--- a/downloads/presentations/modules/arc-200.pptx
+++ b/downloads/presentations/modules/arc-200.pptx
@@ -616,7 +616,8 @@
               <a:rPr lang="en-US" dirty="0"/>
               <a:t>Core Concepts
 System of record. A system of record is the official system or process where public health information, decisions, and actions are maintained. AI outputs should not automatically become the official record unless the agency has explicitly approved that use. For example, an AI tool may draft a case summary, but the final case note may still need to be reviewed, edited, and saved by authorized staff in the surveillance system. The distinction between AI-generated support and official public health documentation is essential for accountability, public records management, legal review, and incident response.
-Data lineage and audit logs. Data lineage documents where data came from, how they were changed, and where they were used. Audit logs record actions taken by users, systems, or automated tools. Together, lineage and audit logs help agencies explain why an AI output was generated, which data were used, who reviewed it, whether it was accepted or edited, and whether downstream action was taken. Without these records, agencies may struggle to investigate errors or demonstrate responsible oversight.</a:t>
+Data lineage and audit logs. Data lineage documents where data came from, how they were changed, and where they were used. Audit logs record actions taken by users, systems, or automated tools. Together, lineage and audit logs help agencies explain why an AI output was generated, which data were used, who reviewed it, whether it was accepted or edited, and whether downstream action was taken. Without these records, agencies may struggle to investigate errors or demonstrate responsible oversight.
+Application guidance: Connect the concept to data quality, model performance, validation evidence, monitoring measures, and decisions that remain under human control.</a:t>
             </a:r>
             <a:endParaRPr lang="en-US" dirty="0"/>
           </a:p>
@@ -707,7 +708,8 @@
               <a:t>Public Health Example
 Consider a health department that wants to use AI to summarize incoming electronic case reports for disease investigators. The AI tool may be able to produce a concise summary of symptoms, laboratory results, diagnosis, treatment, provider information, exposure information, and missing fields. However, the safety of that workflow depends on the surrounding architecture. The eCR data must be received correctly, routed to the right jurisdiction, parsed into the surveillance system, associated with the correct person or case, and made available only to authorized users.
 The AI tool also needs clear boundaries. It should know which fields it can use and whether it is allowed to access narrative text, laboratory results, demographic data, prior case history, or external reference material. If the tool uses retrieval-augmented generation, the agency must know which policies, disease protocols, or guidance documents are included in the retrieval source. If the tool can create tasks or update case records, the agency must define whether those actions require human approval.
-The system also needs a clear human review point. The investigator should be able to see the source information behind the AI summary, identify unsupported statements, correct errors, and document the final interpretation in the surveillance system. The agency should log when the AI summary was generated, which data were used, who reviewed it, and whether the output was accepted, edited, rejected, or escalated. Without that architecture, the AI summary could appear efficient while creating hidden risks.</a:t>
+The system also needs a clear human review point. The investigator should be able to see the source information behind the AI summary, identify unsupported statements, correct errors, and document the final interpretation in the surveillance system. The agency should log when the AI summary was generated, which data were used, who reviewed it, and whether the output was accepted, edited, rejected, or escalated. Without that architecture, the AI summary could appear efficient while creating hidden risks.
+Application guidance: Connect the concept to data quality, model performance, validation evidence, monitoring measures, and decisions that remain under human control.</a:t>
             </a:r>
             <a:endParaRPr lang="en-US" dirty="0"/>
           </a:p>
@@ -798,7 +800,8 @@
               <a:t>Technical Deep Dive
 A public health AI architecture usually begins with source systems. These may include electronic health records, laboratories, immunization information systems, vital records systems, syndromic surveillance feeds, case management systems, health information exchanges, claims datasets, community resource directories, environmental health systems, or manually entered program data. Each source system has its own data quality profile, update frequency, terminology conventions, permissions, and limitations. Before AI can be used safely, the agency needs to understand these characteristics.
 The next layer is data exchange and ingestion. Data may arrive through HL7 v2 messages, CDA documents, FHIR APIs, flat files, web portals, batch uploads, or manual entry. Each method creates different risks. A real-time interface may fail silently if monitoring is weak. A batch file may be delayed. A manual upload may introduce formatting errors. A FHIR API may expose only certain data elements. AI planning must account for how data enter the workflow and how the agency knows whether the data are complete, current, and authorized for the intended use.
-The third layer is data transformation and storage. Public health data are often cleaned, mapped, deduplicated, linked, normalized, geocoded, or summarized before they are used. These steps are essential, but they can also introduce errors. For example, local laboratory codes may be mapped incorrectly to standard codes. Duplicate person records may be merged incorrectly. Addresses may be geocoded to the wrong jurisdiction. Race, ethnicity, language, disability, or housing status fields may be missing or inconsistently captured. If an AI tool uses transformed data, the agency must be able to trace how those data were created and whether transformation decisions affect the output.</a:t>
+The third layer is data transformation and storage. Public health data are often cleaned, mapped, deduplicated, linked, normalized, geocoded, or summarized before they are used. These steps are essential, but they can also introduce errors. For example, local laboratory codes may be mapped incorrectly to standard codes. Duplicate person records may be merged incorrectly. Addresses may be geocoded to the wrong jurisdiction. Race, ethnicity, language, disability, or housing status fields may be missing or inconsistently captured. If an AI tool uses transformed data, the agency must be able to trace how those data were created and whether transformation decisions affect the output.
+Application guidance: Connect the concept to data quality, model performance, validation evidence, monitoring measures, and decisions that remain under human control.</a:t>
             </a:r>
             <a:endParaRPr lang="en-US" dirty="0"/>
           </a:p>
@@ -888,7 +891,8 @@
               <a:rPr lang="en-US" dirty="0"/>
               <a:t>Technical Deep Dive
 The fourth layer is the AI service or model. This may be a predictive model, natural language processing tool, generative AI assistant, retrieval-augmented generation system, rules-based automation, or agentic workflow. The model should have a defined intended use and explicit limits. A tool designed to summarize case notes should not silently make eligibility decisions. A tool designed to classify complaints should not automatically trigger enforcement action unless that use has been reviewed and approved. A tool designed to support resource allocation should not be used without subgroup performance testing and equity review.
-The final layers are workflow integration, monitoring, and governance. AI outputs must appear where staff can use them appropriately and should preserve the ability to inspect source information, correct errors, override outputs, document decisions, and escalate concerns. Monitoring should include technical measures such as uptime, latency, feed failures, missing data, error rates, and drift, as well as operational measures such as user overrides, complaints, incident reports, equity concerns, timeliness, staff burden, and downstream public health outcomes.</a:t>
+The final layers are workflow integration, monitoring, and governance. AI outputs must appear where staff can use them appropriately and should preserve the ability to inspect source information, correct errors, override outputs, document decisions, and escalate concerns. Monitoring should include technical measures such as uptime, latency, feed failures, missing data, error rates, and drift, as well as operational measures such as user overrides, complaints, incident reports, equity concerns, timeliness, staff burden, and downstream public health outcomes.
+Application guidance: Connect the concept to data quality, model performance, validation evidence, monitoring measures, and decisions that remain under human control.</a:t>
             </a:r>
             <a:endParaRPr lang="en-US" dirty="0"/>
           </a:p>
@@ -979,7 +983,8 @@
               <a:t>Risks, Failure Modes, and Guardrails
 Architectural invisibility. If staff cannot explain how data move through the system, they may not recognize when an AI output is based on incomplete, delayed, duplicated, or incorrectly transformed data. A practical guardrail is to require a workflow and data flow map before AI use is approved.
 Unclear authority. AI tools may produce recommendations, summaries, or classifications that look official, even when they have not been reviewed. A practical guardrail is to define which system remains the official system of record and which AI outputs require human approval before they can be used for public health action.
-Excessive access. AI tools connected through APIs, plugins, or workflow integrations may be able to retrieve, summarize, transmit, or modify sensitive data. A practical guardrail is to apply least-privilege access, role-based permissions, audit logging, sandbox testing, and explicit approval for any write-back function.</a:t>
+Excessive access. AI tools connected through APIs, plugins, or workflow integrations may be able to retrieve, summarize, transmit, or modify sensitive data. A practical guardrail is to apply least-privilege access, role-based permissions, audit logging, sandbox testing, and explicit approval for any write-back function.
+Application guidance: Identify what could go wrong, who could be affected, what safeguards are needed, and what evidence should be reviewed before use expands.</a:t>
             </a:r>
             <a:endParaRPr lang="en-US" dirty="0"/>
           </a:p>
@@ -1068,7 +1073,8 @@
             <a:r>
               <a:rPr lang="en-US" dirty="0"/>
               <a:t>Risks, Failure Modes, and Guardrails
-Poor monitoring and equity harm. AI tools can degrade over time when data patterns, reporting sources, terminology, policies, or workflows change. If the architecture relies on data sources that underrepresent some communities, the tool may also produce inequitable outputs. Practical guardrails include pre-deployment subgroup review, monitoring indicators, user override tracking, and clear authority to pause or modify use.</a:t>
+Poor monitoring and equity harm. AI tools can degrade over time when data patterns, reporting sources, terminology, policies, or workflows change. If the architecture relies on data sources that underrepresent some communities, the tool may also produce inequitable outputs. Practical guardrails include pre-deployment subgroup review, monitoring indicators, user override tracking, and clear authority to pause or modify use.
+Application guidance: Identify what could go wrong, who could be affected, what safeguards are needed, and what evidence should be reviewed before use expands.</a:t>
             </a:r>
             <a:endParaRPr lang="en-US" dirty="0"/>
           </a:p>
@@ -1159,7 +1165,8 @@
               <a:t>Application to AI-Supported Workflows
 For generative AI, architecture determines what source material the tool can access, whether it can cite sources, whether it can use sensitive data, and how outputs are reviewed. A generative AI tool used to summarize policy documents has different architectural requirements than one used to summarize case notes or draft public health advisories. The more sensitive or operational the use case, the stronger the controls should be.
 For predictive analytics, architecture determines whether the model receives timely and consistent data, whether the prediction is displayed in context, and whether users understand the limits of the score. A risk score should not become an automatic decision unless the agency has explicitly approved that use, validated the model, reviewed subgroup performance, and established human review procedures.
-For retrieval-augmented generation and agentic AI, architecture determines which documents or systems are available, how permissions are enforced, and what actions the AI can take. An agent that can create tasks, send messages, update records, or trigger alerts must operate within strict boundaries. The agency must define allowed actions, prohibited actions, approval points, logs, rollback procedures, and incident response triggers before deployment.</a:t>
+For retrieval-augmented generation and agentic AI, architecture determines which documents or systems are available, how permissions are enforced, and what actions the AI can take. An agent that can create tasks, send messages, update records, or trigger alerts must operate within strict boundaries. The agency must define allowed actions, prohibited actions, approval points, logs, rollback procedures, and incident response triggers before deployment.
+Application guidance: Connect the concept to data quality, model performance, validation evidence, monitoring measures, and decisions that remain under human control.</a:t>
             </a:r>
             <a:endParaRPr lang="en-US" dirty="0"/>
           </a:p>
@@ -1250,7 +1257,8 @@
               <a:t>Reflection Questions
 Which public health workflow in your agency would be most helpful to map before considering AI?
 What are the source systems, systems of record, and downstream outputs for that workflow?
-Where are data transformed, linked, summarized, interpreted, or manually corrected?</a:t>
+Where are data transformed, linked, summarized, interpreted, or manually corrected?
+Application guidance: Connect the concept to data quality, model performance, validation evidence, monitoring measures, and decisions that remain under human control.</a:t>
             </a:r>
             <a:endParaRPr lang="en-US" dirty="0"/>
           </a:p>
@@ -1341,7 +1349,8 @@
               <a:t>Reflection Questions
 Which parts of the workflow require legal, epidemiologic, clinical, communications, equity, privacy, or leadership review?
 What could go wrong if AI were added without changing the architecture?
-Which monitoring indicators would show whether the AI-supported workflow is working safely and equitably?</a:t>
+Which monitoring indicators would show whether the AI-supported workflow is working safely and equitably?
+Application guidance: Connect the concept to data quality, model performance, validation evidence, monitoring measures, and decisions that remain under human control.</a:t>
             </a:r>
             <a:endParaRPr lang="en-US" dirty="0"/>
           </a:p>
@@ -1431,7 +1440,8 @@
               <a:rPr lang="en-US" dirty="0"/>
               <a:t>Practical Exercise
 Create an AI-enabled workflow architecture map for one public health workflow. Choose a workflow that is real or realistic for your agency, such as case report intake, lab result triage, immunization record review, community complaint classification, outbreak summary drafting, public inquiry response, referral management, syndromic surveillance review, or resource allocation.
-Your map should include the source systems, data exchange methods, transformation steps, system of record, AI-supported task, user interface, human review point, output or decision, audit log, monitoring process, and escalation pathway. After completing the map, identify at least five readiness gaps that should be addressed before implementation.</a:t>
+Your map should include the source systems, data exchange methods, transformation steps, system of record, AI-supported task, user interface, human review point, output or decision, audit log, monitoring process, and escalation pathway. After completing the map, identify at least five readiness gaps that should be addressed before implementation.
+Application guidance: Use the assignment to test whether you can explain the concept, apply it to a realistic public health situation, and identify what would need review before the work moves forward.</a:t>
             </a:r>
             <a:endParaRPr lang="en-US" dirty="0"/>
           </a:p>
@@ -1613,7 +1623,8 @@
               <a:rPr lang="en-US" dirty="0"/>
               <a:t>Expected Artifact or Evidence
 The expected artifact is an AI-enabled workflow architecture map. The evidence should also include a short readiness memo that identifies technical dependencies, governance questions, human review requirements, access control needs, monitoring indicators, and unresolved risks.
-A strong completion artifact should be specific enough to support governance review, implementation planning, procurement, or vendor evaluation. It should not simply state that AI may be useful. It should show how the AI-supported workflow would function, what safeguards would be needed, and what questions remain unresolved.</a:t>
+A strong completion artifact should be specific enough to support governance review, implementation planning, procurement, or vendor evaluation. It should not simply state that AI may be useful. It should show how the AI-supported workflow would function, what safeguards would be needed, and what questions remain unresolved.
+Application guidance: Connect the concept to data quality, model performance, validation evidence, monitoring measures, and decisions that remain under human control.</a:t>
             </a:r>
             <a:endParaRPr lang="en-US" dirty="0"/>
           </a:p>
@@ -1703,7 +1714,8 @@
               <a:rPr lang="en-US" dirty="0"/>
               <a:t>Expected Assignment
 The expected artifact is an AI-enabled workflow architecture map. The evidence should also include a short readiness memo that identifies technical dependencies, governance questions, human review requirements, access control needs, monitoring indicators, and unresolved risks.
-A strong completion artifact should be specific enough to support governance review, implementation planning, procurement, or vendor evaluation. It should not simply state that AI may be useful. It should show how the AI-supported workflow would function, what safeguards would be needed, and what questions remain unresolved.</a:t>
+A strong completion artifact should be specific enough to support governance review, implementation planning, procurement, or vendor evaluation. It should not simply state that AI may be useful. It should show how the AI-supported workflow would function, what safeguards would be needed, and what questions remain unresolved.
+Application guidance: Use the assignment to test whether you can explain the concept, apply it to a realistic public health situation, and identify what would need review before the work moves forward.</a:t>
             </a:r>
             <a:endParaRPr lang="en-US" dirty="0"/>
           </a:p>
@@ -1796,7 +1808,8 @@
 2. What is the role of a system of record in an AI-supported workflow?
 3. Which risk is most likely when staff cannot explain how data move through a workflow?
 4. What is an appropriate guardrail for an AI tool that can update a public health system?
-5. What is strong completion evidence for this module?</a:t>
+5. What is strong completion evidence for this module?
+Application guidance: Use the assignment to test whether you can explain the concept, apply it to a realistic public health situation, and identify what would need review before the work moves forward.</a:t>
             </a:r>
             <a:endParaRPr lang="en-US" dirty="0"/>
           </a:p>
@@ -1889,7 +1902,8 @@
 CDC Data Modernization Initiative materials: https://www.cdc.gov/data-modernization/php/index.html
 NIST AI Risk Management Framework: https://www.nist.gov/itl/ai-risk-management-framework
 NIST Generative AI Profile: https://www.nist.gov/publications/artificial-intelligence-risk-management-framework-generative-artificial-intelligence
-ONC interoperability and health IT resources</a:t>
+ONC interoperability and health IT resources
+Application guidance: Connect the concept to data quality, model performance, validation evidence, monitoring measures, and decisions that remain under human control.</a:t>
             </a:r>
             <a:endParaRPr lang="en-US" dirty="0"/>
           </a:p>
@@ -1978,7 +1992,8 @@
             <a:r>
               <a:rPr lang="en-US" dirty="0"/>
               <a:t>References and Resources
-Agency data governance, privacy, cybersecurity, and enterprise architecture documentation</a:t>
+Agency data governance, privacy, cybersecurity, and enterprise architecture documentation
+Application guidance: Connect the concept to data quality, model performance, validation evidence, monitoring measures, and decisions that remain under human control.</a:t>
             </a:r>
             <a:endParaRPr lang="en-US" dirty="0"/>
           </a:p>
@@ -2257,7 +2272,8 @@
 Describe the major components of an AI-enabled public health architecture, including source systems, data exchange, data transformation, AI services, workflow applications, access controls, audit logs, and monitoring.
 Identify the systems of record, source systems, data flows, and human decision points in a public health workflow.
 Assess where AI could support a workflow and where human review, legal authority, epidemiologic judgment, or community context must remain central.
-Identify architectural risks that can affect AI safety, including incomplete data, unclear authority, excessive system access, weak monitoring, and lack of documentation.</a:t>
+Identify architectural risks that can affect AI safety, including incomplete data, unclear authority, excessive system access, weak monitoring, and lack of documentation.
+Application guidance: Use the assignment to test whether you can explain the concept, apply it to a realistic public health situation, and identify what would need review before the work moves forward.</a:t>
             </a:r>
             <a:endParaRPr lang="en-US" dirty="0"/>
           </a:p>
@@ -2346,7 +2362,8 @@
             <a:r>
               <a:rPr lang="en-US" dirty="0"/>
               <a:t>Learning Objectives
-Produce an AI-enabled workflow architecture map and readiness memo that can support governance review, implementation planning, procurement, or vendor evaluation.</a:t>
+Produce an AI-enabled workflow architecture map and readiness memo that can support governance review, implementation planning, procurement, or vendor evaluation.
+Application guidance: Use the assignment to test whether you can explain the concept, apply it to a realistic public health situation, and identify what would need review before the work moves forward.</a:t>
             </a:r>
             <a:endParaRPr lang="en-US" dirty="0"/>
           </a:p>
@@ -2437,7 +2454,8 @@
               <a:t>Module Overview
 Artificial intelligence does not operate separately from the public health data environment. Every AI-supported workflow depends on the quality, structure, timeliness, governance, and security of the systems that supply data to it. For public health agencies, this means that AI readiness is inseparable from data modernization. A department cannot responsibly deploy AI for surveillance, case investigation, forecasting, summarization, resource allocation, public communication, or operational decision support unless it understands the systems, data flows, authorities, and human decisions that shape the workflow.
 This module introduces public health data modernization as the technical foundation for AI. Learners examine how data move from source systems into public health systems, how those data are transformed and used, and where AI might be introduced safely. The goal is not to teach every learner to design enterprise architecture. The goal is to help informaticians, epidemiologists, technologists, program leaders, and governance participants understand enough about architecture to ask the right questions before AI tools are selected, procured, configured, or deployed.
-By the end of the module, learners should understand that an AI tool is only one component of a broader public health system. The surrounding architecture includes data sources, interfaces, terminology standards, identity and access controls, cloud or on-premises infrastructure, analytics environments, workflow applications, audit logs, governance processes, monitoring, and human review. Responsible AI planning begins by making that system visible.</a:t>
+By the end of the module, learners should understand that an AI tool is only one component of a broader public health system. The surrounding architecture includes data sources, interfaces, terminology standards, identity and access controls, cloud or on-premises infrastructure, analytics environments, workflow applications, audit logs, governance processes, monitoring, and human review. Responsible AI planning begins by making that system visible.
+Application guidance: Connect the concept to data quality, model performance, validation evidence, monitoring measures, and decisions that remain under human control.</a:t>
             </a:r>
             <a:endParaRPr lang="en-US" dirty="0"/>
           </a:p>
@@ -2528,7 +2546,8 @@
               <a:t>Why This Topic Matters for Public Health AI
 Public health agencies often feel pressure to adopt AI tools quickly, especially when staff are overwhelmed, reporting demands are increasing, and data modernization funding is available. AI tools may appear to offer immediate relief by summarizing records, drafting communications, classifying incoming reports, identifying possible outbreaks, or automating repetitive tasks. However, AI can create new risks when it is layered on top of fragmented or poorly understood systems. A model that summarizes case reports may produce incomplete summaries if the source data are missing key fields. A triage algorithm may reinforce inequities if the underlying system receives more complete data from some providers or communities than others. An agentic workflow may trigger inappropriate actions if the system does not clearly define what the AI tool is allowed to read, write, update, or escalate.
 Data modernization provides the foundation for reducing these risks. Modernization is not just a technology upgrade. It includes better data exchange, stronger governance, improved data quality, workforce capacity, reusable services, interoperability, security, and more timely access to information. AI readiness should therefore be treated as a modernization outcome. If an agency cannot describe where the data come from, how they are transformed, who is authorized to use them, and how decisions are documented, then the agency is not yet ready to use AI for that workflow.
-This matters especially in public health because technical errors can become operational errors. A poorly designed AI workflow could delay case investigation, misclassify a reportable condition, summarize a record inaccurately, miss a vulnerable population, or create a public communication that overstates evidence. Architecture review helps prevent these errors by making the full system visible before AI is introduced.</a:t>
+This matters especially in public health because technical errors can become operational errors. A poorly designed AI workflow could delay case investigation, misclassify a reportable condition, summarize a record inaccurately, miss a vulnerable population, or create a public communication that overstates evidence. Architecture review helps prevent these errors by making the full system visible before AI is introduced.
+Application guidance: Connect the concept to data quality, model performance, validation evidence, monitoring measures, and decisions that remain under human control.</a:t>
             </a:r>
             <a:endParaRPr lang="en-US" dirty="0"/>
           </a:p>
@@ -2619,7 +2638,8 @@
               <a:t>Core Concepts
 Public health data modernization. Public health data modernization is the process of improving the systems, standards, infrastructure, governance, and workforce capacity needed to collect, exchange, manage, analyze, and use public health data. Modernization includes technical components such as APIs, cloud platforms, data warehouses, terminology services, analytics environments, and interoperability standards. It also includes operational components such as data stewardship, governance review, privacy controls, workforce training, procurement discipline, and performance monitoring. AI should be understood as one possible modernization capability, not as a replacement for the modernization work itself.
 AI architecture. AI architecture refers to the set of systems and processes that allow an AI tool to function within a public health workflow. This includes the source data, data pipelines, model or AI service, user interface, security controls, audit logs, monitoring process, and human review steps. In a mature architecture, each component has a defined role. Staff know which system is the source of truth, which data are allowed to be used, how outputs are reviewed, and what happens when the AI tool produces an uncertain, incomplete, or incorrect result.
-Source system. A source system is the system where data originate or are first captured. In public health, source systems may include electronic health records, laboratories, immunization information systems, vital records systems, syndromic surveillance feeds, environmental health systems, claims datasets, community resource directories, or manually entered program data. Source systems differ in quality, timeliness, completeness, permissions, and terminology. These differences directly affect whether downstream AI outputs can be trusted.</a:t>
+Source system. A source system is the system where data originate or are first captured. In public health, source systems may include electronic health records, laboratories, immunization information systems, vital records systems, syndromic surveillance feeds, environmental health systems, claims datasets, community resource directories, or manually entered program data. Source systems differ in quality, timeliness, completeness, permissions, and terminology. These differences directly affect whether downstream AI outputs can be trusted.
+Application guidance: Connect the concept to data quality, model performance, validation evidence, monitoring measures, and decisions that remain under human control.</a:t>
             </a:r>
             <a:endParaRPr lang="en-US" dirty="0"/>
           </a:p>
@@ -3390,8 +3410,8 @@
         </p:nvSpPr>
         <p:spPr>
           <a:xfrm>
-            <a:off x="9966960" y="6537960"/>
-            <a:ext cx="1645920" cy="201168"/>
+            <a:off x="9646920" y="6537960"/>
+            <a:ext cx="1965960" cy="201168"/>
           </a:xfrm>
           <a:prstGeom prst="rect">
             <a:avLst/>
@@ -3415,7 +3435,7 @@
                 <a:ea typeface="Aptos" pitchFamily="34" charset="-122"/>
                 <a:cs typeface="Aptos" pitchFamily="34" charset="-120"/>
               </a:rPr>
-              <a:t>Â© Paula Soper</a:t>
+              <a:t>Copyright Paula Soper</a:t>
             </a:r>
             <a:endParaRPr lang="en-US" sz="800" dirty="0"/>
           </a:p>
@@ -3510,7 +3530,7 @@
         <p:spPr>
           <a:xfrm>
             <a:off x="868680" y="1508760"/>
-            <a:ext cx="6537960" cy="4160520"/>
+            <a:ext cx="6309360" cy="4160520"/>
           </a:xfrm>
           <a:prstGeom prst="rect">
             <a:avLst/>
@@ -3575,12 +3595,12 @@
         </p:nvSpPr>
         <p:spPr>
           <a:xfrm>
-            <a:off x="7909560" y="1417320"/>
-            <a:ext cx="3154680" cy="1828800"/>
+            <a:off x="7635240" y="1325880"/>
+            <a:ext cx="3474720" cy="1325880"/>
           </a:xfrm>
           <a:prstGeom prst="roundRect">
             <a:avLst>
-              <a:gd name="adj" fmla="val 6000"/>
+              <a:gd name="adj" fmla="val 8276"/>
             </a:avLst>
           </a:prstGeom>
           <a:solidFill>
@@ -3602,8 +3622,8 @@
         </p:nvSpPr>
         <p:spPr>
           <a:xfrm>
-            <a:off x="8074152" y="1563624"/>
-            <a:ext cx="2825496" cy="256032"/>
+            <a:off x="7799832" y="1472184"/>
+            <a:ext cx="3145536" cy="256032"/>
           </a:xfrm>
           <a:prstGeom prst="rect">
             <a:avLst/>
@@ -3627,7 +3647,7 @@
                 <a:ea typeface="Aptos" pitchFamily="34" charset="-122"/>
                 <a:cs typeface="Aptos" pitchFamily="34" charset="-120"/>
               </a:rPr>
-              <a:t>Key idea</a:t>
+              <a:t>Data decision</a:t>
             </a:r>
             <a:endParaRPr lang="en-US" sz="1300" dirty="0"/>
           </a:p>
@@ -3641,8 +3661,8 @@
         </p:nvSpPr>
         <p:spPr>
           <a:xfrm>
-            <a:off x="8074152" y="1920240"/>
-            <a:ext cx="2825496" cy="1188720"/>
+            <a:off x="7799832" y="1828800"/>
+            <a:ext cx="3145536" cy="685800"/>
           </a:xfrm>
           <a:prstGeom prst="rect">
             <a:avLst/>
@@ -3682,15 +3702,206 @@
         </p:nvSpPr>
         <p:spPr>
           <a:xfrm>
-            <a:off x="7909560" y="3520440"/>
-            <a:ext cx="3154680" cy="1737360"/>
+            <a:off x="7635240" y="2788920"/>
+            <a:ext cx="3474720" cy="1536192"/>
           </a:xfrm>
           <a:prstGeom prst="roundRect">
             <a:avLst>
-              <a:gd name="adj" fmla="val 6316"/>
+              <a:gd name="adj" fmla="val 7143"/>
             </a:avLst>
           </a:prstGeom>
           <a:solidFill>
+            <a:srgbClr val="FFFFFF">
+              <a:alpha val="88000"/>
+            </a:srgbClr>
+          </a:solidFill>
+          <a:ln w="12700">
+            <a:solidFill>
+              <a:srgbClr val="D6E8F2"/>
+            </a:solidFill>
+            <a:prstDash val="solid"/>
+          </a:ln>
+        </p:spPr>
+      </p:sp>
+      <p:sp>
+        <p:nvSpPr>
+          <p:cNvPr id="14" name="Shape 12"/>
+          <p:cNvSpPr/>
+          <p:nvPr/>
+        </p:nvSpPr>
+        <p:spPr>
+          <a:xfrm>
+            <a:off x="8138160" y="3474720"/>
+            <a:ext cx="256032" cy="411480"/>
+          </a:xfrm>
+          <a:prstGeom prst="rect">
+            <a:avLst/>
+          </a:prstGeom>
+          <a:solidFill>
+            <a:srgbClr val="0068B7"/>
+          </a:solidFill>
+          <a:ln w="12700">
+            <a:solidFill>
+              <a:srgbClr val="0068B7"/>
+            </a:solidFill>
+            <a:prstDash val="solid"/>
+          </a:ln>
+        </p:spPr>
+      </p:sp>
+      <p:sp>
+        <p:nvSpPr>
+          <p:cNvPr id="15" name="Shape 13"/>
+          <p:cNvSpPr/>
+          <p:nvPr/>
+        </p:nvSpPr>
+        <p:spPr>
+          <a:xfrm>
+            <a:off x="8577072" y="3172968"/>
+            <a:ext cx="256032" cy="713232"/>
+          </a:xfrm>
+          <a:prstGeom prst="rect">
+            <a:avLst/>
+          </a:prstGeom>
+          <a:solidFill>
+            <a:srgbClr val="2F8A28"/>
+          </a:solidFill>
+          <a:ln w="12700">
+            <a:solidFill>
+              <a:srgbClr val="2F8A28"/>
+            </a:solidFill>
+            <a:prstDash val="solid"/>
+          </a:ln>
+        </p:spPr>
+      </p:sp>
+      <p:sp>
+        <p:nvSpPr>
+          <p:cNvPr id="16" name="Shape 14"/>
+          <p:cNvSpPr/>
+          <p:nvPr/>
+        </p:nvSpPr>
+        <p:spPr>
+          <a:xfrm>
+            <a:off x="9015984" y="2880360"/>
+            <a:ext cx="256032" cy="1005840"/>
+          </a:xfrm>
+          <a:prstGeom prst="rect">
+            <a:avLst/>
+          </a:prstGeom>
+          <a:solidFill>
+            <a:srgbClr val="D69A2D"/>
+          </a:solidFill>
+          <a:ln w="12700">
+            <a:solidFill>
+              <a:srgbClr val="D69A2D"/>
+            </a:solidFill>
+            <a:prstDash val="solid"/>
+          </a:ln>
+        </p:spPr>
+      </p:sp>
+      <p:sp>
+        <p:nvSpPr>
+          <p:cNvPr id="17" name="Shape 15"/>
+          <p:cNvSpPr/>
+          <p:nvPr/>
+        </p:nvSpPr>
+        <p:spPr>
+          <a:xfrm>
+            <a:off x="9454896" y="3319272"/>
+            <a:ext cx="256032" cy="566928"/>
+          </a:xfrm>
+          <a:prstGeom prst="rect">
+            <a:avLst/>
+          </a:prstGeom>
+          <a:solidFill>
+            <a:srgbClr val="6A4CA3"/>
+          </a:solidFill>
+          <a:ln w="12700">
+            <a:solidFill>
+              <a:srgbClr val="6A4CA3"/>
+            </a:solidFill>
+            <a:prstDash val="solid"/>
+          </a:ln>
+        </p:spPr>
+      </p:sp>
+      <p:sp>
+        <p:nvSpPr>
+          <p:cNvPr id="18" name="Shape 16"/>
+          <p:cNvSpPr/>
+          <p:nvPr/>
+        </p:nvSpPr>
+        <p:spPr>
+          <a:xfrm>
+            <a:off x="8019288" y="3886200"/>
+            <a:ext cx="2706624" cy="0"/>
+          </a:xfrm>
+          <a:prstGeom prst="line">
+            <a:avLst/>
+          </a:prstGeom>
+          <a:noFill/>
+          <a:ln w="15240">
+            <a:solidFill>
+              <a:srgbClr val="003A63"/>
+            </a:solidFill>
+            <a:prstDash val="solid"/>
+          </a:ln>
+        </p:spPr>
+      </p:sp>
+      <p:sp>
+        <p:nvSpPr>
+          <p:cNvPr id="19" name="Text 17"/>
+          <p:cNvSpPr/>
+          <p:nvPr/>
+        </p:nvSpPr>
+        <p:spPr>
+          <a:xfrm>
+            <a:off x="7863840" y="3017520"/>
+            <a:ext cx="3017520" cy="201168"/>
+          </a:xfrm>
+          <a:prstGeom prst="rect">
+            <a:avLst/>
+          </a:prstGeom>
+          <a:noFill/>
+          <a:ln/>
+        </p:spPr>
+        <p:txBody>
+          <a:bodyPr wrap="square" lIns="0" tIns="0" rIns="0" bIns="0" rtlCol="0" anchor="ctr"/>
+          <a:lstStyle/>
+          <a:p>
+            <a:pPr algn="ctr" indent="0" marL="0">
+              <a:buNone/>
+            </a:pPr>
+            <a:r>
+              <a:rPr lang="en-US" sz="1050" b="1" dirty="0">
+                <a:solidFill>
+                  <a:srgbClr val="003A63"/>
+                </a:solidFill>
+                <a:latin typeface="Aptos" pitchFamily="34" charset="0"/>
+                <a:ea typeface="Aptos" pitchFamily="34" charset="-122"/>
+                <a:cs typeface="Aptos" pitchFamily="34" charset="-120"/>
+              </a:rPr>
+              <a:t>Measure and monitor</a:t>
+            </a:r>
+            <a:endParaRPr lang="en-US" sz="1050" dirty="0"/>
+          </a:p>
+        </p:txBody>
+      </p:sp>
+      <p:sp>
+        <p:nvSpPr>
+          <p:cNvPr id="20" name="Shape 18"/>
+          <p:cNvSpPr/>
+          <p:nvPr/>
+        </p:nvSpPr>
+        <p:spPr>
+          <a:xfrm>
+            <a:off x="7635240" y="4498848"/>
+            <a:ext cx="3474720" cy="1143000"/>
+          </a:xfrm>
+          <a:prstGeom prst="roundRect">
+            <a:avLst>
+              <a:gd name="adj" fmla="val 9600"/>
+            </a:avLst>
+          </a:prstGeom>
+          <a:solidFill>
             <a:srgbClr val="EAF6F8"/>
           </a:solidFill>
           <a:ln w="12700">
@@ -3703,14 +3914,14 @@
       </p:sp>
       <p:sp>
         <p:nvSpPr>
-          <p:cNvPr id="14" name="Text 12"/>
-          <p:cNvSpPr/>
-          <p:nvPr/>
-        </p:nvSpPr>
-        <p:spPr>
-          <a:xfrm>
-            <a:off x="8074152" y="3666744"/>
-            <a:ext cx="2825496" cy="256032"/>
+          <p:cNvPr id="21" name="Text 19"/>
+          <p:cNvSpPr/>
+          <p:nvPr/>
+        </p:nvSpPr>
+        <p:spPr>
+          <a:xfrm>
+            <a:off x="7799832" y="4645152"/>
+            <a:ext cx="3145536" cy="256032"/>
           </a:xfrm>
           <a:prstGeom prst="rect">
             <a:avLst/>
@@ -3734,7 +3945,7 @@
                 <a:ea typeface="Aptos" pitchFamily="34" charset="-122"/>
                 <a:cs typeface="Aptos" pitchFamily="34" charset="-120"/>
               </a:rPr>
-              <a:t>Use this for</a:t>
+              <a:t>How to validate</a:t>
             </a:r>
             <a:endParaRPr lang="en-US" sz="1300" dirty="0"/>
           </a:p>
@@ -3742,14 +3953,14 @@
       </p:sp>
       <p:sp>
         <p:nvSpPr>
-          <p:cNvPr id="15" name="Text 13"/>
-          <p:cNvSpPr/>
-          <p:nvPr/>
-        </p:nvSpPr>
-        <p:spPr>
-          <a:xfrm>
-            <a:off x="8074152" y="4023360"/>
-            <a:ext cx="2825496" cy="1097280"/>
+          <p:cNvPr id="22" name="Text 20"/>
+          <p:cNvSpPr/>
+          <p:nvPr/>
+        </p:nvSpPr>
+        <p:spPr>
+          <a:xfrm>
+            <a:off x="7799832" y="5001768"/>
+            <a:ext cx="3145536" cy="502920"/>
           </a:xfrm>
           <a:prstGeom prst="rect">
             <a:avLst/>
@@ -3775,7 +3986,7 @@
                 <a:ea typeface="Aptos" pitchFamily="34" charset="-122"/>
                 <a:cs typeface="Aptos" pitchFamily="34" charset="-120"/>
               </a:rPr>
-              <a:t>Connect the concept to public health decisions, safeguards, documentation, or implementation work.</a:t>
+              <a:t>Connect the concept to data quality, model performance, validation evidence, monitoring measures, and decisions that remain under human control.</a:t>
             </a:r>
             <a:endParaRPr lang="en-US" sz="1550" dirty="0"/>
           </a:p>
@@ -3949,8 +4160,8 @@
         </p:nvSpPr>
         <p:spPr>
           <a:xfrm>
-            <a:off x="9966960" y="6537960"/>
-            <a:ext cx="1645920" cy="201168"/>
+            <a:off x="9646920" y="6537960"/>
+            <a:ext cx="1965960" cy="201168"/>
           </a:xfrm>
           <a:prstGeom prst="rect">
             <a:avLst/>
@@ -3974,7 +4185,7 @@
                 <a:ea typeface="Aptos" pitchFamily="34" charset="-122"/>
                 <a:cs typeface="Aptos" pitchFamily="34" charset="-120"/>
               </a:rPr>
-              <a:t>Â© Paula Soper</a:t>
+              <a:t>Copyright Paula Soper</a:t>
             </a:r>
             <a:endParaRPr lang="en-US" sz="800" dirty="0"/>
           </a:p>
@@ -4021,77 +4232,13 @@
       </p:sp>
       <p:sp>
         <p:nvSpPr>
-          <p:cNvPr id="8" name="Shape 6"/>
+          <p:cNvPr id="8" name="Text 6"/>
           <p:cNvSpPr/>
           <p:nvPr/>
         </p:nvSpPr>
         <p:spPr>
           <a:xfrm>
             <a:off x="640080" y="658368"/>
-            <a:ext cx="420624" cy="420624"/>
-          </a:xfrm>
-          <a:prstGeom prst="ellipse">
-            <a:avLst/>
-          </a:prstGeom>
-          <a:solidFill>
-            <a:srgbClr val="0068B7"/>
-          </a:solidFill>
-          <a:ln w="12700">
-            <a:solidFill>
-              <a:srgbClr val="0068B7"/>
-            </a:solidFill>
-            <a:prstDash val="solid"/>
-          </a:ln>
-        </p:spPr>
-      </p:sp>
-      <p:sp>
-        <p:nvSpPr>
-          <p:cNvPr id="9" name="Text 7"/>
-          <p:cNvSpPr/>
-          <p:nvPr/>
-        </p:nvSpPr>
-        <p:spPr>
-          <a:xfrm>
-            <a:off x="640080" y="731520"/>
-            <a:ext cx="420624" cy="164592"/>
-          </a:xfrm>
-          <a:prstGeom prst="rect">
-            <a:avLst/>
-          </a:prstGeom>
-          <a:noFill/>
-          <a:ln/>
-        </p:spPr>
-        <p:txBody>
-          <a:bodyPr wrap="square" lIns="0" tIns="0" rIns="0" bIns="0" rtlCol="0" anchor="ctr"/>
-          <a:lstStyle/>
-          <a:p>
-            <a:pPr algn="ctr" indent="0" marL="0">
-              <a:buNone/>
-            </a:pPr>
-            <a:r>
-              <a:rPr lang="en-US" sz="1100" b="1" dirty="0">
-                <a:solidFill>
-                  <a:srgbClr val="FFFFFF"/>
-                </a:solidFill>
-                <a:latin typeface="Aptos" pitchFamily="34" charset="0"/>
-                <a:ea typeface="Aptos" pitchFamily="34" charset="-122"/>
-                <a:cs typeface="Aptos" pitchFamily="34" charset="-120"/>
-              </a:rPr>
-              <a:t>5</a:t>
-            </a:r>
-            <a:endParaRPr lang="en-US" sz="1100" dirty="0"/>
-          </a:p>
-        </p:txBody>
-      </p:sp>
-      <p:sp>
-        <p:nvSpPr>
-          <p:cNvPr id="10" name="Text 8"/>
-          <p:cNvSpPr/>
-          <p:nvPr/>
-        </p:nvSpPr>
-        <p:spPr>
-          <a:xfrm>
-            <a:off x="640080" y="621792"/>
             <a:ext cx="10881360" cy="713232"/>
           </a:xfrm>
           <a:prstGeom prst="rect">
@@ -4126,14 +4273,14 @@
       </p:sp>
       <p:sp>
         <p:nvSpPr>
-          <p:cNvPr id="11" name="Text 9"/>
+          <p:cNvPr id="9" name="Text 7"/>
           <p:cNvSpPr/>
           <p:nvPr/>
         </p:nvSpPr>
         <p:spPr>
           <a:xfrm>
             <a:off x="868680" y="1508760"/>
-            <a:ext cx="6537960" cy="4160520"/>
+            <a:ext cx="6309360" cy="4160520"/>
           </a:xfrm>
           <a:prstGeom prst="rect">
             <a:avLst/>
@@ -4192,18 +4339,18 @@
       </p:sp>
       <p:sp>
         <p:nvSpPr>
-          <p:cNvPr id="12" name="Shape 10"/>
-          <p:cNvSpPr/>
-          <p:nvPr/>
-        </p:nvSpPr>
-        <p:spPr>
-          <a:xfrm>
-            <a:off x="7909560" y="1417320"/>
-            <a:ext cx="3154680" cy="1828800"/>
+          <p:cNvPr id="10" name="Shape 8"/>
+          <p:cNvSpPr/>
+          <p:nvPr/>
+        </p:nvSpPr>
+        <p:spPr>
+          <a:xfrm>
+            <a:off x="7635240" y="1325880"/>
+            <a:ext cx="3474720" cy="1325880"/>
           </a:xfrm>
           <a:prstGeom prst="roundRect">
             <a:avLst>
-              <a:gd name="adj" fmla="val 6000"/>
+              <a:gd name="adj" fmla="val 8276"/>
             </a:avLst>
           </a:prstGeom>
           <a:solidFill>
@@ -4219,14 +4366,14 @@
       </p:sp>
       <p:sp>
         <p:nvSpPr>
-          <p:cNvPr id="13" name="Text 11"/>
-          <p:cNvSpPr/>
-          <p:nvPr/>
-        </p:nvSpPr>
-        <p:spPr>
-          <a:xfrm>
-            <a:off x="8074152" y="1563624"/>
-            <a:ext cx="2825496" cy="256032"/>
+          <p:cNvPr id="11" name="Text 9"/>
+          <p:cNvSpPr/>
+          <p:nvPr/>
+        </p:nvSpPr>
+        <p:spPr>
+          <a:xfrm>
+            <a:off x="7799832" y="1472184"/>
+            <a:ext cx="3145536" cy="256032"/>
           </a:xfrm>
           <a:prstGeom prst="rect">
             <a:avLst/>
@@ -4250,7 +4397,7 @@
                 <a:ea typeface="Aptos" pitchFamily="34" charset="-122"/>
                 <a:cs typeface="Aptos" pitchFamily="34" charset="-120"/>
               </a:rPr>
-              <a:t>Key idea</a:t>
+              <a:t>Data decision</a:t>
             </a:r>
             <a:endParaRPr lang="en-US" sz="1300" dirty="0"/>
           </a:p>
@@ -4258,14 +4405,14 @@
       </p:sp>
       <p:sp>
         <p:nvSpPr>
-          <p:cNvPr id="14" name="Text 12"/>
-          <p:cNvSpPr/>
-          <p:nvPr/>
-        </p:nvSpPr>
-        <p:spPr>
-          <a:xfrm>
-            <a:off x="8074152" y="1920240"/>
-            <a:ext cx="2825496" cy="1188720"/>
+          <p:cNvPr id="12" name="Text 10"/>
+          <p:cNvSpPr/>
+          <p:nvPr/>
+        </p:nvSpPr>
+        <p:spPr>
+          <a:xfrm>
+            <a:off x="7799832" y="1828800"/>
+            <a:ext cx="3145536" cy="685800"/>
           </a:xfrm>
           <a:prstGeom prst="rect">
             <a:avLst/>
@@ -4299,21 +4446,212 @@
       </p:sp>
       <p:sp>
         <p:nvSpPr>
-          <p:cNvPr id="15" name="Shape 13"/>
-          <p:cNvSpPr/>
-          <p:nvPr/>
-        </p:nvSpPr>
-        <p:spPr>
-          <a:xfrm>
-            <a:off x="7909560" y="3520440"/>
-            <a:ext cx="3154680" cy="1737360"/>
+          <p:cNvPr id="13" name="Shape 11"/>
+          <p:cNvSpPr/>
+          <p:nvPr/>
+        </p:nvSpPr>
+        <p:spPr>
+          <a:xfrm>
+            <a:off x="7635240" y="2788920"/>
+            <a:ext cx="3474720" cy="1536192"/>
           </a:xfrm>
           <a:prstGeom prst="roundRect">
             <a:avLst>
-              <a:gd name="adj" fmla="val 6316"/>
+              <a:gd name="adj" fmla="val 7143"/>
             </a:avLst>
           </a:prstGeom>
           <a:solidFill>
+            <a:srgbClr val="FFFFFF">
+              <a:alpha val="88000"/>
+            </a:srgbClr>
+          </a:solidFill>
+          <a:ln w="12700">
+            <a:solidFill>
+              <a:srgbClr val="D6E8F2"/>
+            </a:solidFill>
+            <a:prstDash val="solid"/>
+          </a:ln>
+        </p:spPr>
+      </p:sp>
+      <p:sp>
+        <p:nvSpPr>
+          <p:cNvPr id="14" name="Shape 12"/>
+          <p:cNvSpPr/>
+          <p:nvPr/>
+        </p:nvSpPr>
+        <p:spPr>
+          <a:xfrm>
+            <a:off x="8138160" y="3474720"/>
+            <a:ext cx="256032" cy="411480"/>
+          </a:xfrm>
+          <a:prstGeom prst="rect">
+            <a:avLst/>
+          </a:prstGeom>
+          <a:solidFill>
+            <a:srgbClr val="0068B7"/>
+          </a:solidFill>
+          <a:ln w="12700">
+            <a:solidFill>
+              <a:srgbClr val="0068B7"/>
+            </a:solidFill>
+            <a:prstDash val="solid"/>
+          </a:ln>
+        </p:spPr>
+      </p:sp>
+      <p:sp>
+        <p:nvSpPr>
+          <p:cNvPr id="15" name="Shape 13"/>
+          <p:cNvSpPr/>
+          <p:nvPr/>
+        </p:nvSpPr>
+        <p:spPr>
+          <a:xfrm>
+            <a:off x="8577072" y="3172968"/>
+            <a:ext cx="256032" cy="713232"/>
+          </a:xfrm>
+          <a:prstGeom prst="rect">
+            <a:avLst/>
+          </a:prstGeom>
+          <a:solidFill>
+            <a:srgbClr val="2F8A28"/>
+          </a:solidFill>
+          <a:ln w="12700">
+            <a:solidFill>
+              <a:srgbClr val="2F8A28"/>
+            </a:solidFill>
+            <a:prstDash val="solid"/>
+          </a:ln>
+        </p:spPr>
+      </p:sp>
+      <p:sp>
+        <p:nvSpPr>
+          <p:cNvPr id="16" name="Shape 14"/>
+          <p:cNvSpPr/>
+          <p:nvPr/>
+        </p:nvSpPr>
+        <p:spPr>
+          <a:xfrm>
+            <a:off x="9015984" y="2880360"/>
+            <a:ext cx="256032" cy="1005840"/>
+          </a:xfrm>
+          <a:prstGeom prst="rect">
+            <a:avLst/>
+          </a:prstGeom>
+          <a:solidFill>
+            <a:srgbClr val="D69A2D"/>
+          </a:solidFill>
+          <a:ln w="12700">
+            <a:solidFill>
+              <a:srgbClr val="D69A2D"/>
+            </a:solidFill>
+            <a:prstDash val="solid"/>
+          </a:ln>
+        </p:spPr>
+      </p:sp>
+      <p:sp>
+        <p:nvSpPr>
+          <p:cNvPr id="17" name="Shape 15"/>
+          <p:cNvSpPr/>
+          <p:nvPr/>
+        </p:nvSpPr>
+        <p:spPr>
+          <a:xfrm>
+            <a:off x="9454896" y="3319272"/>
+            <a:ext cx="256032" cy="566928"/>
+          </a:xfrm>
+          <a:prstGeom prst="rect">
+            <a:avLst/>
+          </a:prstGeom>
+          <a:solidFill>
+            <a:srgbClr val="6A4CA3"/>
+          </a:solidFill>
+          <a:ln w="12700">
+            <a:solidFill>
+              <a:srgbClr val="6A4CA3"/>
+            </a:solidFill>
+            <a:prstDash val="solid"/>
+          </a:ln>
+        </p:spPr>
+      </p:sp>
+      <p:sp>
+        <p:nvSpPr>
+          <p:cNvPr id="18" name="Shape 16"/>
+          <p:cNvSpPr/>
+          <p:nvPr/>
+        </p:nvSpPr>
+        <p:spPr>
+          <a:xfrm>
+            <a:off x="8019288" y="3886200"/>
+            <a:ext cx="2706624" cy="0"/>
+          </a:xfrm>
+          <a:prstGeom prst="line">
+            <a:avLst/>
+          </a:prstGeom>
+          <a:noFill/>
+          <a:ln w="15240">
+            <a:solidFill>
+              <a:srgbClr val="003A63"/>
+            </a:solidFill>
+            <a:prstDash val="solid"/>
+          </a:ln>
+        </p:spPr>
+      </p:sp>
+      <p:sp>
+        <p:nvSpPr>
+          <p:cNvPr id="19" name="Text 17"/>
+          <p:cNvSpPr/>
+          <p:nvPr/>
+        </p:nvSpPr>
+        <p:spPr>
+          <a:xfrm>
+            <a:off x="7863840" y="3017520"/>
+            <a:ext cx="3017520" cy="201168"/>
+          </a:xfrm>
+          <a:prstGeom prst="rect">
+            <a:avLst/>
+          </a:prstGeom>
+          <a:noFill/>
+          <a:ln/>
+        </p:spPr>
+        <p:txBody>
+          <a:bodyPr wrap="square" lIns="0" tIns="0" rIns="0" bIns="0" rtlCol="0" anchor="ctr"/>
+          <a:lstStyle/>
+          <a:p>
+            <a:pPr algn="ctr" indent="0" marL="0">
+              <a:buNone/>
+            </a:pPr>
+            <a:r>
+              <a:rPr lang="en-US" sz="1050" b="1" dirty="0">
+                <a:solidFill>
+                  <a:srgbClr val="003A63"/>
+                </a:solidFill>
+                <a:latin typeface="Aptos" pitchFamily="34" charset="0"/>
+                <a:ea typeface="Aptos" pitchFamily="34" charset="-122"/>
+                <a:cs typeface="Aptos" pitchFamily="34" charset="-120"/>
+              </a:rPr>
+              <a:t>Measure and monitor</a:t>
+            </a:r>
+            <a:endParaRPr lang="en-US" sz="1050" dirty="0"/>
+          </a:p>
+        </p:txBody>
+      </p:sp>
+      <p:sp>
+        <p:nvSpPr>
+          <p:cNvPr id="20" name="Shape 18"/>
+          <p:cNvSpPr/>
+          <p:nvPr/>
+        </p:nvSpPr>
+        <p:spPr>
+          <a:xfrm>
+            <a:off x="7635240" y="4498848"/>
+            <a:ext cx="3474720" cy="1143000"/>
+          </a:xfrm>
+          <a:prstGeom prst="roundRect">
+            <a:avLst>
+              <a:gd name="adj" fmla="val 9600"/>
+            </a:avLst>
+          </a:prstGeom>
+          <a:solidFill>
             <a:srgbClr val="EAF6F8"/>
           </a:solidFill>
           <a:ln w="12700">
@@ -4326,14 +4664,14 @@
       </p:sp>
       <p:sp>
         <p:nvSpPr>
-          <p:cNvPr id="16" name="Text 14"/>
-          <p:cNvSpPr/>
-          <p:nvPr/>
-        </p:nvSpPr>
-        <p:spPr>
-          <a:xfrm>
-            <a:off x="8074152" y="3666744"/>
-            <a:ext cx="2825496" cy="256032"/>
+          <p:cNvPr id="21" name="Text 19"/>
+          <p:cNvSpPr/>
+          <p:nvPr/>
+        </p:nvSpPr>
+        <p:spPr>
+          <a:xfrm>
+            <a:off x="7799832" y="4645152"/>
+            <a:ext cx="3145536" cy="256032"/>
           </a:xfrm>
           <a:prstGeom prst="rect">
             <a:avLst/>
@@ -4357,7 +4695,7 @@
                 <a:ea typeface="Aptos" pitchFamily="34" charset="-122"/>
                 <a:cs typeface="Aptos" pitchFamily="34" charset="-120"/>
               </a:rPr>
-              <a:t>Use this for</a:t>
+              <a:t>How to validate</a:t>
             </a:r>
             <a:endParaRPr lang="en-US" sz="1300" dirty="0"/>
           </a:p>
@@ -4365,14 +4703,14 @@
       </p:sp>
       <p:sp>
         <p:nvSpPr>
-          <p:cNvPr id="17" name="Text 15"/>
-          <p:cNvSpPr/>
-          <p:nvPr/>
-        </p:nvSpPr>
-        <p:spPr>
-          <a:xfrm>
-            <a:off x="8074152" y="4023360"/>
-            <a:ext cx="2825496" cy="1097280"/>
+          <p:cNvPr id="22" name="Text 20"/>
+          <p:cNvSpPr/>
+          <p:nvPr/>
+        </p:nvSpPr>
+        <p:spPr>
+          <a:xfrm>
+            <a:off x="7799832" y="5001768"/>
+            <a:ext cx="3145536" cy="502920"/>
           </a:xfrm>
           <a:prstGeom prst="rect">
             <a:avLst/>
@@ -4398,7 +4736,7 @@
                 <a:ea typeface="Aptos" pitchFamily="34" charset="-122"/>
                 <a:cs typeface="Aptos" pitchFamily="34" charset="-120"/>
               </a:rPr>
-              <a:t>Connect the concept to public health decisions, safeguards, documentation, or implementation work.</a:t>
+              <a:t>Connect the concept to data quality, model performance, validation evidence, monitoring measures, and decisions that remain under human control.</a:t>
             </a:r>
             <a:endParaRPr lang="en-US" sz="1550" dirty="0"/>
           </a:p>
@@ -4572,8 +4910,8 @@
         </p:nvSpPr>
         <p:spPr>
           <a:xfrm>
-            <a:off x="9966960" y="6537960"/>
-            <a:ext cx="1645920" cy="201168"/>
+            <a:off x="9646920" y="6537960"/>
+            <a:ext cx="1965960" cy="201168"/>
           </a:xfrm>
           <a:prstGeom prst="rect">
             <a:avLst/>
@@ -4597,7 +4935,7 @@
                 <a:ea typeface="Aptos" pitchFamily="34" charset="-122"/>
                 <a:cs typeface="Aptos" pitchFamily="34" charset="-120"/>
               </a:rPr>
-              <a:t>Â© Paula Soper</a:t>
+              <a:t>Copyright Paula Soper</a:t>
             </a:r>
             <a:endParaRPr lang="en-US" sz="800" dirty="0"/>
           </a:p>
@@ -4644,77 +4982,13 @@
       </p:sp>
       <p:sp>
         <p:nvSpPr>
-          <p:cNvPr id="8" name="Shape 6"/>
+          <p:cNvPr id="8" name="Text 6"/>
           <p:cNvSpPr/>
           <p:nvPr/>
         </p:nvSpPr>
         <p:spPr>
           <a:xfrm>
             <a:off x="640080" y="658368"/>
-            <a:ext cx="420624" cy="420624"/>
-          </a:xfrm>
-          <a:prstGeom prst="ellipse">
-            <a:avLst/>
-          </a:prstGeom>
-          <a:solidFill>
-            <a:srgbClr val="0068B7"/>
-          </a:solidFill>
-          <a:ln w="12700">
-            <a:solidFill>
-              <a:srgbClr val="0068B7"/>
-            </a:solidFill>
-            <a:prstDash val="solid"/>
-          </a:ln>
-        </p:spPr>
-      </p:sp>
-      <p:sp>
-        <p:nvSpPr>
-          <p:cNvPr id="9" name="Text 7"/>
-          <p:cNvSpPr/>
-          <p:nvPr/>
-        </p:nvSpPr>
-        <p:spPr>
-          <a:xfrm>
-            <a:off x="640080" y="731520"/>
-            <a:ext cx="420624" cy="164592"/>
-          </a:xfrm>
-          <a:prstGeom prst="rect">
-            <a:avLst/>
-          </a:prstGeom>
-          <a:noFill/>
-          <a:ln/>
-        </p:spPr>
-        <p:txBody>
-          <a:bodyPr wrap="square" lIns="0" tIns="0" rIns="0" bIns="0" rtlCol="0" anchor="ctr"/>
-          <a:lstStyle/>
-          <a:p>
-            <a:pPr algn="ctr" indent="0" marL="0">
-              <a:buNone/>
-            </a:pPr>
-            <a:r>
-              <a:rPr lang="en-US" sz="1100" b="1" dirty="0">
-                <a:solidFill>
-                  <a:srgbClr val="FFFFFF"/>
-                </a:solidFill>
-                <a:latin typeface="Aptos" pitchFamily="34" charset="0"/>
-                <a:ea typeface="Aptos" pitchFamily="34" charset="-122"/>
-                <a:cs typeface="Aptos" pitchFamily="34" charset="-120"/>
-              </a:rPr>
-              <a:t>6</a:t>
-            </a:r>
-            <a:endParaRPr lang="en-US" sz="1100" dirty="0"/>
-          </a:p>
-        </p:txBody>
-      </p:sp>
-      <p:sp>
-        <p:nvSpPr>
-          <p:cNvPr id="10" name="Text 8"/>
-          <p:cNvSpPr/>
-          <p:nvPr/>
-        </p:nvSpPr>
-        <p:spPr>
-          <a:xfrm>
-            <a:off x="640080" y="621792"/>
             <a:ext cx="10881360" cy="713232"/>
           </a:xfrm>
           <a:prstGeom prst="rect">
@@ -4749,14 +5023,14 @@
       </p:sp>
       <p:sp>
         <p:nvSpPr>
-          <p:cNvPr id="11" name="Text 9"/>
+          <p:cNvPr id="9" name="Text 7"/>
           <p:cNvSpPr/>
           <p:nvPr/>
         </p:nvSpPr>
         <p:spPr>
           <a:xfrm>
             <a:off x="868680" y="1508760"/>
-            <a:ext cx="6537960" cy="4160520"/>
+            <a:ext cx="6309360" cy="4160520"/>
           </a:xfrm>
           <a:prstGeom prst="rect">
             <a:avLst/>
@@ -4815,18 +5089,18 @@
       </p:sp>
       <p:sp>
         <p:nvSpPr>
-          <p:cNvPr id="12" name="Shape 10"/>
-          <p:cNvSpPr/>
-          <p:nvPr/>
-        </p:nvSpPr>
-        <p:spPr>
-          <a:xfrm>
-            <a:off x="7909560" y="1417320"/>
-            <a:ext cx="3154680" cy="1828800"/>
+          <p:cNvPr id="10" name="Shape 8"/>
+          <p:cNvSpPr/>
+          <p:nvPr/>
+        </p:nvSpPr>
+        <p:spPr>
+          <a:xfrm>
+            <a:off x="7635240" y="1325880"/>
+            <a:ext cx="3474720" cy="1325880"/>
           </a:xfrm>
           <a:prstGeom prst="roundRect">
             <a:avLst>
-              <a:gd name="adj" fmla="val 6000"/>
+              <a:gd name="adj" fmla="val 8276"/>
             </a:avLst>
           </a:prstGeom>
           <a:solidFill>
@@ -4842,14 +5116,14 @@
       </p:sp>
       <p:sp>
         <p:nvSpPr>
-          <p:cNvPr id="13" name="Text 11"/>
-          <p:cNvSpPr/>
-          <p:nvPr/>
-        </p:nvSpPr>
-        <p:spPr>
-          <a:xfrm>
-            <a:off x="8074152" y="1563624"/>
-            <a:ext cx="2825496" cy="256032"/>
+          <p:cNvPr id="11" name="Text 9"/>
+          <p:cNvSpPr/>
+          <p:nvPr/>
+        </p:nvSpPr>
+        <p:spPr>
+          <a:xfrm>
+            <a:off x="7799832" y="1472184"/>
+            <a:ext cx="3145536" cy="256032"/>
           </a:xfrm>
           <a:prstGeom prst="rect">
             <a:avLst/>
@@ -4873,7 +5147,7 @@
                 <a:ea typeface="Aptos" pitchFamily="34" charset="-122"/>
                 <a:cs typeface="Aptos" pitchFamily="34" charset="-120"/>
               </a:rPr>
-              <a:t>Key idea</a:t>
+              <a:t>Data decision</a:t>
             </a:r>
             <a:endParaRPr lang="en-US" sz="1300" dirty="0"/>
           </a:p>
@@ -4881,14 +5155,14 @@
       </p:sp>
       <p:sp>
         <p:nvSpPr>
-          <p:cNvPr id="14" name="Text 12"/>
-          <p:cNvSpPr/>
-          <p:nvPr/>
-        </p:nvSpPr>
-        <p:spPr>
-          <a:xfrm>
-            <a:off x="8074152" y="1920240"/>
-            <a:ext cx="2825496" cy="1188720"/>
+          <p:cNvPr id="12" name="Text 10"/>
+          <p:cNvSpPr/>
+          <p:nvPr/>
+        </p:nvSpPr>
+        <p:spPr>
+          <a:xfrm>
+            <a:off x="7799832" y="1828800"/>
+            <a:ext cx="3145536" cy="685800"/>
           </a:xfrm>
           <a:prstGeom prst="rect">
             <a:avLst/>
@@ -4922,21 +5196,212 @@
       </p:sp>
       <p:sp>
         <p:nvSpPr>
-          <p:cNvPr id="15" name="Shape 13"/>
-          <p:cNvSpPr/>
-          <p:nvPr/>
-        </p:nvSpPr>
-        <p:spPr>
-          <a:xfrm>
-            <a:off x="7909560" y="3520440"/>
-            <a:ext cx="3154680" cy="1737360"/>
+          <p:cNvPr id="13" name="Shape 11"/>
+          <p:cNvSpPr/>
+          <p:nvPr/>
+        </p:nvSpPr>
+        <p:spPr>
+          <a:xfrm>
+            <a:off x="7635240" y="2788920"/>
+            <a:ext cx="3474720" cy="1536192"/>
           </a:xfrm>
           <a:prstGeom prst="roundRect">
             <a:avLst>
-              <a:gd name="adj" fmla="val 6316"/>
+              <a:gd name="adj" fmla="val 7143"/>
             </a:avLst>
           </a:prstGeom>
           <a:solidFill>
+            <a:srgbClr val="FFFFFF">
+              <a:alpha val="88000"/>
+            </a:srgbClr>
+          </a:solidFill>
+          <a:ln w="12700">
+            <a:solidFill>
+              <a:srgbClr val="D6E8F2"/>
+            </a:solidFill>
+            <a:prstDash val="solid"/>
+          </a:ln>
+        </p:spPr>
+      </p:sp>
+      <p:sp>
+        <p:nvSpPr>
+          <p:cNvPr id="14" name="Shape 12"/>
+          <p:cNvSpPr/>
+          <p:nvPr/>
+        </p:nvSpPr>
+        <p:spPr>
+          <a:xfrm>
+            <a:off x="8138160" y="3474720"/>
+            <a:ext cx="256032" cy="411480"/>
+          </a:xfrm>
+          <a:prstGeom prst="rect">
+            <a:avLst/>
+          </a:prstGeom>
+          <a:solidFill>
+            <a:srgbClr val="0068B7"/>
+          </a:solidFill>
+          <a:ln w="12700">
+            <a:solidFill>
+              <a:srgbClr val="0068B7"/>
+            </a:solidFill>
+            <a:prstDash val="solid"/>
+          </a:ln>
+        </p:spPr>
+      </p:sp>
+      <p:sp>
+        <p:nvSpPr>
+          <p:cNvPr id="15" name="Shape 13"/>
+          <p:cNvSpPr/>
+          <p:nvPr/>
+        </p:nvSpPr>
+        <p:spPr>
+          <a:xfrm>
+            <a:off x="8577072" y="3172968"/>
+            <a:ext cx="256032" cy="713232"/>
+          </a:xfrm>
+          <a:prstGeom prst="rect">
+            <a:avLst/>
+          </a:prstGeom>
+          <a:solidFill>
+            <a:srgbClr val="2F8A28"/>
+          </a:solidFill>
+          <a:ln w="12700">
+            <a:solidFill>
+              <a:srgbClr val="2F8A28"/>
+            </a:solidFill>
+            <a:prstDash val="solid"/>
+          </a:ln>
+        </p:spPr>
+      </p:sp>
+      <p:sp>
+        <p:nvSpPr>
+          <p:cNvPr id="16" name="Shape 14"/>
+          <p:cNvSpPr/>
+          <p:nvPr/>
+        </p:nvSpPr>
+        <p:spPr>
+          <a:xfrm>
+            <a:off x="9015984" y="2880360"/>
+            <a:ext cx="256032" cy="1005840"/>
+          </a:xfrm>
+          <a:prstGeom prst="rect">
+            <a:avLst/>
+          </a:prstGeom>
+          <a:solidFill>
+            <a:srgbClr val="D69A2D"/>
+          </a:solidFill>
+          <a:ln w="12700">
+            <a:solidFill>
+              <a:srgbClr val="D69A2D"/>
+            </a:solidFill>
+            <a:prstDash val="solid"/>
+          </a:ln>
+        </p:spPr>
+      </p:sp>
+      <p:sp>
+        <p:nvSpPr>
+          <p:cNvPr id="17" name="Shape 15"/>
+          <p:cNvSpPr/>
+          <p:nvPr/>
+        </p:nvSpPr>
+        <p:spPr>
+          <a:xfrm>
+            <a:off x="9454896" y="3319272"/>
+            <a:ext cx="256032" cy="566928"/>
+          </a:xfrm>
+          <a:prstGeom prst="rect">
+            <a:avLst/>
+          </a:prstGeom>
+          <a:solidFill>
+            <a:srgbClr val="6A4CA3"/>
+          </a:solidFill>
+          <a:ln w="12700">
+            <a:solidFill>
+              <a:srgbClr val="6A4CA3"/>
+            </a:solidFill>
+            <a:prstDash val="solid"/>
+          </a:ln>
+        </p:spPr>
+      </p:sp>
+      <p:sp>
+        <p:nvSpPr>
+          <p:cNvPr id="18" name="Shape 16"/>
+          <p:cNvSpPr/>
+          <p:nvPr/>
+        </p:nvSpPr>
+        <p:spPr>
+          <a:xfrm>
+            <a:off x="8019288" y="3886200"/>
+            <a:ext cx="2706624" cy="0"/>
+          </a:xfrm>
+          <a:prstGeom prst="line">
+            <a:avLst/>
+          </a:prstGeom>
+          <a:noFill/>
+          <a:ln w="15240">
+            <a:solidFill>
+              <a:srgbClr val="003A63"/>
+            </a:solidFill>
+            <a:prstDash val="solid"/>
+          </a:ln>
+        </p:spPr>
+      </p:sp>
+      <p:sp>
+        <p:nvSpPr>
+          <p:cNvPr id="19" name="Text 17"/>
+          <p:cNvSpPr/>
+          <p:nvPr/>
+        </p:nvSpPr>
+        <p:spPr>
+          <a:xfrm>
+            <a:off x="7863840" y="3017520"/>
+            <a:ext cx="3017520" cy="201168"/>
+          </a:xfrm>
+          <a:prstGeom prst="rect">
+            <a:avLst/>
+          </a:prstGeom>
+          <a:noFill/>
+          <a:ln/>
+        </p:spPr>
+        <p:txBody>
+          <a:bodyPr wrap="square" lIns="0" tIns="0" rIns="0" bIns="0" rtlCol="0" anchor="ctr"/>
+          <a:lstStyle/>
+          <a:p>
+            <a:pPr algn="ctr" indent="0" marL="0">
+              <a:buNone/>
+            </a:pPr>
+            <a:r>
+              <a:rPr lang="en-US" sz="1050" b="1" dirty="0">
+                <a:solidFill>
+                  <a:srgbClr val="003A63"/>
+                </a:solidFill>
+                <a:latin typeface="Aptos" pitchFamily="34" charset="0"/>
+                <a:ea typeface="Aptos" pitchFamily="34" charset="-122"/>
+                <a:cs typeface="Aptos" pitchFamily="34" charset="-120"/>
+              </a:rPr>
+              <a:t>Measure and monitor</a:t>
+            </a:r>
+            <a:endParaRPr lang="en-US" sz="1050" dirty="0"/>
+          </a:p>
+        </p:txBody>
+      </p:sp>
+      <p:sp>
+        <p:nvSpPr>
+          <p:cNvPr id="20" name="Shape 18"/>
+          <p:cNvSpPr/>
+          <p:nvPr/>
+        </p:nvSpPr>
+        <p:spPr>
+          <a:xfrm>
+            <a:off x="7635240" y="4498848"/>
+            <a:ext cx="3474720" cy="1143000"/>
+          </a:xfrm>
+          <a:prstGeom prst="roundRect">
+            <a:avLst>
+              <a:gd name="adj" fmla="val 9600"/>
+            </a:avLst>
+          </a:prstGeom>
+          <a:solidFill>
             <a:srgbClr val="EAF6F8"/>
           </a:solidFill>
           <a:ln w="12700">
@@ -4949,14 +5414,14 @@
       </p:sp>
       <p:sp>
         <p:nvSpPr>
-          <p:cNvPr id="16" name="Text 14"/>
-          <p:cNvSpPr/>
-          <p:nvPr/>
-        </p:nvSpPr>
-        <p:spPr>
-          <a:xfrm>
-            <a:off x="8074152" y="3666744"/>
-            <a:ext cx="2825496" cy="256032"/>
+          <p:cNvPr id="21" name="Text 19"/>
+          <p:cNvSpPr/>
+          <p:nvPr/>
+        </p:nvSpPr>
+        <p:spPr>
+          <a:xfrm>
+            <a:off x="7799832" y="4645152"/>
+            <a:ext cx="3145536" cy="256032"/>
           </a:xfrm>
           <a:prstGeom prst="rect">
             <a:avLst/>
@@ -4980,7 +5445,7 @@
                 <a:ea typeface="Aptos" pitchFamily="34" charset="-122"/>
                 <a:cs typeface="Aptos" pitchFamily="34" charset="-120"/>
               </a:rPr>
-              <a:t>Use this for</a:t>
+              <a:t>How to validate</a:t>
             </a:r>
             <a:endParaRPr lang="en-US" sz="1300" dirty="0"/>
           </a:p>
@@ -4988,14 +5453,14 @@
       </p:sp>
       <p:sp>
         <p:nvSpPr>
-          <p:cNvPr id="17" name="Text 15"/>
-          <p:cNvSpPr/>
-          <p:nvPr/>
-        </p:nvSpPr>
-        <p:spPr>
-          <a:xfrm>
-            <a:off x="8074152" y="4023360"/>
-            <a:ext cx="2825496" cy="1097280"/>
+          <p:cNvPr id="22" name="Text 20"/>
+          <p:cNvSpPr/>
+          <p:nvPr/>
+        </p:nvSpPr>
+        <p:spPr>
+          <a:xfrm>
+            <a:off x="7799832" y="5001768"/>
+            <a:ext cx="3145536" cy="502920"/>
           </a:xfrm>
           <a:prstGeom prst="rect">
             <a:avLst/>
@@ -5021,7 +5486,7 @@
                 <a:ea typeface="Aptos" pitchFamily="34" charset="-122"/>
                 <a:cs typeface="Aptos" pitchFamily="34" charset="-120"/>
               </a:rPr>
-              <a:t>Connect the concept to public health decisions, safeguards, documentation, or implementation work.</a:t>
+              <a:t>Connect the concept to data quality, model performance, validation evidence, monitoring measures, and decisions that remain under human control.</a:t>
             </a:r>
             <a:endParaRPr lang="en-US" sz="1550" dirty="0"/>
           </a:p>
@@ -5195,8 +5660,8 @@
         </p:nvSpPr>
         <p:spPr>
           <a:xfrm>
-            <a:off x="9966960" y="6537960"/>
-            <a:ext cx="1645920" cy="201168"/>
+            <a:off x="9646920" y="6537960"/>
+            <a:ext cx="1965960" cy="201168"/>
           </a:xfrm>
           <a:prstGeom prst="rect">
             <a:avLst/>
@@ -5220,7 +5685,7 @@
                 <a:ea typeface="Aptos" pitchFamily="34" charset="-122"/>
                 <a:cs typeface="Aptos" pitchFamily="34" charset="-120"/>
               </a:rPr>
-              <a:t>Â© Paula Soper</a:t>
+              <a:t>Copyright Paula Soper</a:t>
             </a:r>
             <a:endParaRPr lang="en-US" sz="800" dirty="0"/>
           </a:p>
@@ -5315,7 +5780,7 @@
         <p:spPr>
           <a:xfrm>
             <a:off x="868680" y="1508760"/>
-            <a:ext cx="6537960" cy="4160520"/>
+            <a:ext cx="6309360" cy="4160520"/>
           </a:xfrm>
           <a:prstGeom prst="rect">
             <a:avLst/>
@@ -5380,12 +5845,12 @@
         </p:nvSpPr>
         <p:spPr>
           <a:xfrm>
-            <a:off x="7909560" y="1417320"/>
-            <a:ext cx="3154680" cy="1828800"/>
+            <a:off x="7635240" y="1325880"/>
+            <a:ext cx="3474720" cy="1325880"/>
           </a:xfrm>
           <a:prstGeom prst="roundRect">
             <a:avLst>
-              <a:gd name="adj" fmla="val 6000"/>
+              <a:gd name="adj" fmla="val 8276"/>
             </a:avLst>
           </a:prstGeom>
           <a:solidFill>
@@ -5407,8 +5872,8 @@
         </p:nvSpPr>
         <p:spPr>
           <a:xfrm>
-            <a:off x="8074152" y="1563624"/>
-            <a:ext cx="2825496" cy="256032"/>
+            <a:off x="7799832" y="1472184"/>
+            <a:ext cx="3145536" cy="256032"/>
           </a:xfrm>
           <a:prstGeom prst="rect">
             <a:avLst/>
@@ -5432,7 +5897,7 @@
                 <a:ea typeface="Aptos" pitchFamily="34" charset="-122"/>
                 <a:cs typeface="Aptos" pitchFamily="34" charset="-120"/>
               </a:rPr>
-              <a:t>Key idea</a:t>
+              <a:t>Data decision</a:t>
             </a:r>
             <a:endParaRPr lang="en-US" sz="1300" dirty="0"/>
           </a:p>
@@ -5446,8 +5911,8 @@
         </p:nvSpPr>
         <p:spPr>
           <a:xfrm>
-            <a:off x="8074152" y="1920240"/>
-            <a:ext cx="2825496" cy="1188720"/>
+            <a:off x="7799832" y="1828800"/>
+            <a:ext cx="3145536" cy="685800"/>
           </a:xfrm>
           <a:prstGeom prst="rect">
             <a:avLst/>
@@ -5487,15 +5952,206 @@
         </p:nvSpPr>
         <p:spPr>
           <a:xfrm>
-            <a:off x="7909560" y="3520440"/>
-            <a:ext cx="3154680" cy="1737360"/>
+            <a:off x="7635240" y="2788920"/>
+            <a:ext cx="3474720" cy="1536192"/>
           </a:xfrm>
           <a:prstGeom prst="roundRect">
             <a:avLst>
-              <a:gd name="adj" fmla="val 6316"/>
+              <a:gd name="adj" fmla="val 7143"/>
             </a:avLst>
           </a:prstGeom>
           <a:solidFill>
+            <a:srgbClr val="FFFFFF">
+              <a:alpha val="88000"/>
+            </a:srgbClr>
+          </a:solidFill>
+          <a:ln w="12700">
+            <a:solidFill>
+              <a:srgbClr val="D6E8F2"/>
+            </a:solidFill>
+            <a:prstDash val="solid"/>
+          </a:ln>
+        </p:spPr>
+      </p:sp>
+      <p:sp>
+        <p:nvSpPr>
+          <p:cNvPr id="14" name="Shape 12"/>
+          <p:cNvSpPr/>
+          <p:nvPr/>
+        </p:nvSpPr>
+        <p:spPr>
+          <a:xfrm>
+            <a:off x="8138160" y="3474720"/>
+            <a:ext cx="256032" cy="411480"/>
+          </a:xfrm>
+          <a:prstGeom prst="rect">
+            <a:avLst/>
+          </a:prstGeom>
+          <a:solidFill>
+            <a:srgbClr val="0068B7"/>
+          </a:solidFill>
+          <a:ln w="12700">
+            <a:solidFill>
+              <a:srgbClr val="0068B7"/>
+            </a:solidFill>
+            <a:prstDash val="solid"/>
+          </a:ln>
+        </p:spPr>
+      </p:sp>
+      <p:sp>
+        <p:nvSpPr>
+          <p:cNvPr id="15" name="Shape 13"/>
+          <p:cNvSpPr/>
+          <p:nvPr/>
+        </p:nvSpPr>
+        <p:spPr>
+          <a:xfrm>
+            <a:off x="8577072" y="3172968"/>
+            <a:ext cx="256032" cy="713232"/>
+          </a:xfrm>
+          <a:prstGeom prst="rect">
+            <a:avLst/>
+          </a:prstGeom>
+          <a:solidFill>
+            <a:srgbClr val="2F8A28"/>
+          </a:solidFill>
+          <a:ln w="12700">
+            <a:solidFill>
+              <a:srgbClr val="2F8A28"/>
+            </a:solidFill>
+            <a:prstDash val="solid"/>
+          </a:ln>
+        </p:spPr>
+      </p:sp>
+      <p:sp>
+        <p:nvSpPr>
+          <p:cNvPr id="16" name="Shape 14"/>
+          <p:cNvSpPr/>
+          <p:nvPr/>
+        </p:nvSpPr>
+        <p:spPr>
+          <a:xfrm>
+            <a:off x="9015984" y="2880360"/>
+            <a:ext cx="256032" cy="1005840"/>
+          </a:xfrm>
+          <a:prstGeom prst="rect">
+            <a:avLst/>
+          </a:prstGeom>
+          <a:solidFill>
+            <a:srgbClr val="D69A2D"/>
+          </a:solidFill>
+          <a:ln w="12700">
+            <a:solidFill>
+              <a:srgbClr val="D69A2D"/>
+            </a:solidFill>
+            <a:prstDash val="solid"/>
+          </a:ln>
+        </p:spPr>
+      </p:sp>
+      <p:sp>
+        <p:nvSpPr>
+          <p:cNvPr id="17" name="Shape 15"/>
+          <p:cNvSpPr/>
+          <p:nvPr/>
+        </p:nvSpPr>
+        <p:spPr>
+          <a:xfrm>
+            <a:off x="9454896" y="3319272"/>
+            <a:ext cx="256032" cy="566928"/>
+          </a:xfrm>
+          <a:prstGeom prst="rect">
+            <a:avLst/>
+          </a:prstGeom>
+          <a:solidFill>
+            <a:srgbClr val="6A4CA3"/>
+          </a:solidFill>
+          <a:ln w="12700">
+            <a:solidFill>
+              <a:srgbClr val="6A4CA3"/>
+            </a:solidFill>
+            <a:prstDash val="solid"/>
+          </a:ln>
+        </p:spPr>
+      </p:sp>
+      <p:sp>
+        <p:nvSpPr>
+          <p:cNvPr id="18" name="Shape 16"/>
+          <p:cNvSpPr/>
+          <p:nvPr/>
+        </p:nvSpPr>
+        <p:spPr>
+          <a:xfrm>
+            <a:off x="8019288" y="3886200"/>
+            <a:ext cx="2706624" cy="0"/>
+          </a:xfrm>
+          <a:prstGeom prst="line">
+            <a:avLst/>
+          </a:prstGeom>
+          <a:noFill/>
+          <a:ln w="15240">
+            <a:solidFill>
+              <a:srgbClr val="003A63"/>
+            </a:solidFill>
+            <a:prstDash val="solid"/>
+          </a:ln>
+        </p:spPr>
+      </p:sp>
+      <p:sp>
+        <p:nvSpPr>
+          <p:cNvPr id="19" name="Text 17"/>
+          <p:cNvSpPr/>
+          <p:nvPr/>
+        </p:nvSpPr>
+        <p:spPr>
+          <a:xfrm>
+            <a:off x="7863840" y="3017520"/>
+            <a:ext cx="3017520" cy="201168"/>
+          </a:xfrm>
+          <a:prstGeom prst="rect">
+            <a:avLst/>
+          </a:prstGeom>
+          <a:noFill/>
+          <a:ln/>
+        </p:spPr>
+        <p:txBody>
+          <a:bodyPr wrap="square" lIns="0" tIns="0" rIns="0" bIns="0" rtlCol="0" anchor="ctr"/>
+          <a:lstStyle/>
+          <a:p>
+            <a:pPr algn="ctr" indent="0" marL="0">
+              <a:buNone/>
+            </a:pPr>
+            <a:r>
+              <a:rPr lang="en-US" sz="1050" b="1" dirty="0">
+                <a:solidFill>
+                  <a:srgbClr val="003A63"/>
+                </a:solidFill>
+                <a:latin typeface="Aptos" pitchFamily="34" charset="0"/>
+                <a:ea typeface="Aptos" pitchFamily="34" charset="-122"/>
+                <a:cs typeface="Aptos" pitchFamily="34" charset="-120"/>
+              </a:rPr>
+              <a:t>Measure and monitor</a:t>
+            </a:r>
+            <a:endParaRPr lang="en-US" sz="1050" dirty="0"/>
+          </a:p>
+        </p:txBody>
+      </p:sp>
+      <p:sp>
+        <p:nvSpPr>
+          <p:cNvPr id="20" name="Shape 18"/>
+          <p:cNvSpPr/>
+          <p:nvPr/>
+        </p:nvSpPr>
+        <p:spPr>
+          <a:xfrm>
+            <a:off x="7635240" y="4498848"/>
+            <a:ext cx="3474720" cy="1143000"/>
+          </a:xfrm>
+          <a:prstGeom prst="roundRect">
+            <a:avLst>
+              <a:gd name="adj" fmla="val 9600"/>
+            </a:avLst>
+          </a:prstGeom>
+          <a:solidFill>
             <a:srgbClr val="EAF6F8"/>
           </a:solidFill>
           <a:ln w="12700">
@@ -5508,14 +6164,14 @@
       </p:sp>
       <p:sp>
         <p:nvSpPr>
-          <p:cNvPr id="14" name="Text 12"/>
-          <p:cNvSpPr/>
-          <p:nvPr/>
-        </p:nvSpPr>
-        <p:spPr>
-          <a:xfrm>
-            <a:off x="8074152" y="3666744"/>
-            <a:ext cx="2825496" cy="256032"/>
+          <p:cNvPr id="21" name="Text 19"/>
+          <p:cNvSpPr/>
+          <p:nvPr/>
+        </p:nvSpPr>
+        <p:spPr>
+          <a:xfrm>
+            <a:off x="7799832" y="4645152"/>
+            <a:ext cx="3145536" cy="256032"/>
           </a:xfrm>
           <a:prstGeom prst="rect">
             <a:avLst/>
@@ -5539,7 +6195,7 @@
                 <a:ea typeface="Aptos" pitchFamily="34" charset="-122"/>
                 <a:cs typeface="Aptos" pitchFamily="34" charset="-120"/>
               </a:rPr>
-              <a:t>Use this for</a:t>
+              <a:t>How to validate</a:t>
             </a:r>
             <a:endParaRPr lang="en-US" sz="1300" dirty="0"/>
           </a:p>
@@ -5547,14 +6203,14 @@
       </p:sp>
       <p:sp>
         <p:nvSpPr>
-          <p:cNvPr id="15" name="Text 13"/>
-          <p:cNvSpPr/>
-          <p:nvPr/>
-        </p:nvSpPr>
-        <p:spPr>
-          <a:xfrm>
-            <a:off x="8074152" y="4023360"/>
-            <a:ext cx="2825496" cy="1097280"/>
+          <p:cNvPr id="22" name="Text 20"/>
+          <p:cNvSpPr/>
+          <p:nvPr/>
+        </p:nvSpPr>
+        <p:spPr>
+          <a:xfrm>
+            <a:off x="7799832" y="5001768"/>
+            <a:ext cx="3145536" cy="502920"/>
           </a:xfrm>
           <a:prstGeom prst="rect">
             <a:avLst/>
@@ -5580,7 +6236,7 @@
                 <a:ea typeface="Aptos" pitchFamily="34" charset="-122"/>
                 <a:cs typeface="Aptos" pitchFamily="34" charset="-120"/>
               </a:rPr>
-              <a:t>Connect the concept to public health decisions, safeguards, documentation, or implementation work.</a:t>
+              <a:t>Connect the concept to data quality, model performance, validation evidence, monitoring measures, and decisions that remain under human control.</a:t>
             </a:r>
             <a:endParaRPr lang="en-US" sz="1550" dirty="0"/>
           </a:p>
@@ -5754,8 +6410,8 @@
         </p:nvSpPr>
         <p:spPr>
           <a:xfrm>
-            <a:off x="9966960" y="6537960"/>
-            <a:ext cx="1645920" cy="201168"/>
+            <a:off x="9646920" y="6537960"/>
+            <a:ext cx="1965960" cy="201168"/>
           </a:xfrm>
           <a:prstGeom prst="rect">
             <a:avLst/>
@@ -5779,7 +6435,7 @@
                 <a:ea typeface="Aptos" pitchFamily="34" charset="-122"/>
                 <a:cs typeface="Aptos" pitchFamily="34" charset="-120"/>
               </a:rPr>
-              <a:t>Â© Paula Soper</a:t>
+              <a:t>Copyright Paula Soper</a:t>
             </a:r>
             <a:endParaRPr lang="en-US" sz="800" dirty="0"/>
           </a:p>
@@ -5826,77 +6482,13 @@
       </p:sp>
       <p:sp>
         <p:nvSpPr>
-          <p:cNvPr id="8" name="Shape 6"/>
+          <p:cNvPr id="8" name="Text 6"/>
           <p:cNvSpPr/>
           <p:nvPr/>
         </p:nvSpPr>
         <p:spPr>
           <a:xfrm>
             <a:off x="640080" y="658368"/>
-            <a:ext cx="420624" cy="420624"/>
-          </a:xfrm>
-          <a:prstGeom prst="ellipse">
-            <a:avLst/>
-          </a:prstGeom>
-          <a:solidFill>
-            <a:srgbClr val="0068B7"/>
-          </a:solidFill>
-          <a:ln w="12700">
-            <a:solidFill>
-              <a:srgbClr val="0068B7"/>
-            </a:solidFill>
-            <a:prstDash val="solid"/>
-          </a:ln>
-        </p:spPr>
-      </p:sp>
-      <p:sp>
-        <p:nvSpPr>
-          <p:cNvPr id="9" name="Text 7"/>
-          <p:cNvSpPr/>
-          <p:nvPr/>
-        </p:nvSpPr>
-        <p:spPr>
-          <a:xfrm>
-            <a:off x="640080" y="731520"/>
-            <a:ext cx="420624" cy="164592"/>
-          </a:xfrm>
-          <a:prstGeom prst="rect">
-            <a:avLst/>
-          </a:prstGeom>
-          <a:noFill/>
-          <a:ln/>
-        </p:spPr>
-        <p:txBody>
-          <a:bodyPr wrap="square" lIns="0" tIns="0" rIns="0" bIns="0" rtlCol="0" anchor="ctr"/>
-          <a:lstStyle/>
-          <a:p>
-            <a:pPr algn="ctr" indent="0" marL="0">
-              <a:buNone/>
-            </a:pPr>
-            <a:r>
-              <a:rPr lang="en-US" sz="1100" b="1" dirty="0">
-                <a:solidFill>
-                  <a:srgbClr val="FFFFFF"/>
-                </a:solidFill>
-                <a:latin typeface="Aptos" pitchFamily="34" charset="0"/>
-                <a:ea typeface="Aptos" pitchFamily="34" charset="-122"/>
-                <a:cs typeface="Aptos" pitchFamily="34" charset="-120"/>
-              </a:rPr>
-              <a:t>7</a:t>
-            </a:r>
-            <a:endParaRPr lang="en-US" sz="1100" dirty="0"/>
-          </a:p>
-        </p:txBody>
-      </p:sp>
-      <p:sp>
-        <p:nvSpPr>
-          <p:cNvPr id="10" name="Text 8"/>
-          <p:cNvSpPr/>
-          <p:nvPr/>
-        </p:nvSpPr>
-        <p:spPr>
-          <a:xfrm>
-            <a:off x="640080" y="621792"/>
             <a:ext cx="10881360" cy="713232"/>
           </a:xfrm>
           <a:prstGeom prst="rect">
@@ -5931,14 +6523,14 @@
       </p:sp>
       <p:sp>
         <p:nvSpPr>
-          <p:cNvPr id="11" name="Text 9"/>
+          <p:cNvPr id="9" name="Text 7"/>
           <p:cNvSpPr/>
           <p:nvPr/>
         </p:nvSpPr>
         <p:spPr>
           <a:xfrm>
             <a:off x="868680" y="1508760"/>
-            <a:ext cx="6537960" cy="4160520"/>
+            <a:ext cx="6309360" cy="4160520"/>
           </a:xfrm>
           <a:prstGeom prst="rect">
             <a:avLst/>
@@ -5997,18 +6589,18 @@
       </p:sp>
       <p:sp>
         <p:nvSpPr>
-          <p:cNvPr id="12" name="Shape 10"/>
-          <p:cNvSpPr/>
-          <p:nvPr/>
-        </p:nvSpPr>
-        <p:spPr>
-          <a:xfrm>
-            <a:off x="7909560" y="1417320"/>
-            <a:ext cx="3154680" cy="1828800"/>
+          <p:cNvPr id="10" name="Shape 8"/>
+          <p:cNvSpPr/>
+          <p:nvPr/>
+        </p:nvSpPr>
+        <p:spPr>
+          <a:xfrm>
+            <a:off x="7635240" y="1325880"/>
+            <a:ext cx="3474720" cy="1325880"/>
           </a:xfrm>
           <a:prstGeom prst="roundRect">
             <a:avLst>
-              <a:gd name="adj" fmla="val 6000"/>
+              <a:gd name="adj" fmla="val 8276"/>
             </a:avLst>
           </a:prstGeom>
           <a:solidFill>
@@ -6024,14 +6616,14 @@
       </p:sp>
       <p:sp>
         <p:nvSpPr>
-          <p:cNvPr id="13" name="Text 11"/>
-          <p:cNvSpPr/>
-          <p:nvPr/>
-        </p:nvSpPr>
-        <p:spPr>
-          <a:xfrm>
-            <a:off x="8074152" y="1563624"/>
-            <a:ext cx="2825496" cy="256032"/>
+          <p:cNvPr id="11" name="Text 9"/>
+          <p:cNvSpPr/>
+          <p:nvPr/>
+        </p:nvSpPr>
+        <p:spPr>
+          <a:xfrm>
+            <a:off x="7799832" y="1472184"/>
+            <a:ext cx="3145536" cy="256032"/>
           </a:xfrm>
           <a:prstGeom prst="rect">
             <a:avLst/>
@@ -6055,7 +6647,7 @@
                 <a:ea typeface="Aptos" pitchFamily="34" charset="-122"/>
                 <a:cs typeface="Aptos" pitchFamily="34" charset="-120"/>
               </a:rPr>
-              <a:t>Key idea</a:t>
+              <a:t>Risk check</a:t>
             </a:r>
             <a:endParaRPr lang="en-US" sz="1300" dirty="0"/>
           </a:p>
@@ -6063,14 +6655,14 @@
       </p:sp>
       <p:sp>
         <p:nvSpPr>
-          <p:cNvPr id="14" name="Text 12"/>
-          <p:cNvSpPr/>
-          <p:nvPr/>
-        </p:nvSpPr>
-        <p:spPr>
-          <a:xfrm>
-            <a:off x="8074152" y="1920240"/>
-            <a:ext cx="2825496" cy="1188720"/>
+          <p:cNvPr id="12" name="Text 10"/>
+          <p:cNvSpPr/>
+          <p:nvPr/>
+        </p:nvSpPr>
+        <p:spPr>
+          <a:xfrm>
+            <a:off x="7799832" y="1828800"/>
+            <a:ext cx="3145536" cy="685800"/>
           </a:xfrm>
           <a:prstGeom prst="rect">
             <a:avLst/>
@@ -6104,21 +6696,174 @@
       </p:sp>
       <p:sp>
         <p:nvSpPr>
-          <p:cNvPr id="15" name="Shape 13"/>
-          <p:cNvSpPr/>
-          <p:nvPr/>
-        </p:nvSpPr>
-        <p:spPr>
-          <a:xfrm>
-            <a:off x="7909560" y="3520440"/>
-            <a:ext cx="3154680" cy="1737360"/>
+          <p:cNvPr id="13" name="Shape 11"/>
+          <p:cNvSpPr/>
+          <p:nvPr/>
+        </p:nvSpPr>
+        <p:spPr>
+          <a:xfrm>
+            <a:off x="7635240" y="2788920"/>
+            <a:ext cx="3474720" cy="1536192"/>
           </a:xfrm>
           <a:prstGeom prst="roundRect">
             <a:avLst>
-              <a:gd name="adj" fmla="val 6316"/>
+              <a:gd name="adj" fmla="val 7143"/>
             </a:avLst>
           </a:prstGeom>
           <a:solidFill>
+            <a:srgbClr val="FFFFFF">
+              <a:alpha val="88000"/>
+            </a:srgbClr>
+          </a:solidFill>
+          <a:ln w="12700">
+            <a:solidFill>
+              <a:srgbClr val="D6E8F2"/>
+            </a:solidFill>
+            <a:prstDash val="solid"/>
+          </a:ln>
+        </p:spPr>
+      </p:sp>
+      <p:sp>
+        <p:nvSpPr>
+          <p:cNvPr id="14" name="Shape 12"/>
+          <p:cNvSpPr/>
+          <p:nvPr/>
+        </p:nvSpPr>
+        <p:spPr>
+          <a:xfrm>
+            <a:off x="8046720" y="3108960"/>
+            <a:ext cx="2651760" cy="896112"/>
+          </a:xfrm>
+          <a:prstGeom prst="arc">
+            <a:avLst/>
+          </a:prstGeom>
+          <a:noFill/>
+          <a:ln w="25400">
+            <a:solidFill>
+              <a:srgbClr val="0068B7"/>
+            </a:solidFill>
+            <a:prstDash val="solid"/>
+          </a:ln>
+        </p:spPr>
+      </p:sp>
+      <p:sp>
+        <p:nvSpPr>
+          <p:cNvPr id="15" name="Text 13"/>
+          <p:cNvSpPr/>
+          <p:nvPr/>
+        </p:nvSpPr>
+        <p:spPr>
+          <a:xfrm>
+            <a:off x="7909560" y="3099816"/>
+            <a:ext cx="2926080" cy="256032"/>
+          </a:xfrm>
+          <a:prstGeom prst="rect">
+            <a:avLst/>
+          </a:prstGeom>
+          <a:noFill/>
+          <a:ln/>
+        </p:spPr>
+        <p:txBody>
+          <a:bodyPr wrap="square" lIns="0" tIns="0" rIns="0" bIns="0" rtlCol="0" anchor="ctr"/>
+          <a:lstStyle/>
+          <a:p>
+            <a:pPr algn="ctr" indent="0" marL="0">
+              <a:buNone/>
+            </a:pPr>
+            <a:r>
+              <a:rPr lang="en-US" sz="1500" b="1" dirty="0">
+                <a:solidFill>
+                  <a:srgbClr val="003A63"/>
+                </a:solidFill>
+                <a:latin typeface="Aptos" pitchFamily="34" charset="0"/>
+                <a:ea typeface="Aptos" pitchFamily="34" charset="-122"/>
+                <a:cs typeface="Aptos" pitchFamily="34" charset="-120"/>
+              </a:rPr>
+              <a:t>Risk</a:t>
+            </a:r>
+            <a:endParaRPr lang="en-US" sz="1500" dirty="0"/>
+          </a:p>
+        </p:txBody>
+      </p:sp>
+      <p:sp>
+        <p:nvSpPr>
+          <p:cNvPr id="16" name="Shape 14"/>
+          <p:cNvSpPr/>
+          <p:nvPr/>
+        </p:nvSpPr>
+        <p:spPr>
+          <a:xfrm>
+            <a:off x="8366760" y="3639312"/>
+            <a:ext cx="2011680" cy="0"/>
+          </a:xfrm>
+          <a:prstGeom prst="line">
+            <a:avLst/>
+          </a:prstGeom>
+          <a:noFill/>
+          <a:ln w="63500">
+            <a:solidFill>
+              <a:srgbClr val="2F8A28"/>
+            </a:solidFill>
+            <a:prstDash val="solid"/>
+          </a:ln>
+        </p:spPr>
+      </p:sp>
+      <p:sp>
+        <p:nvSpPr>
+          <p:cNvPr id="17" name="Text 15"/>
+          <p:cNvSpPr/>
+          <p:nvPr/>
+        </p:nvSpPr>
+        <p:spPr>
+          <a:xfrm>
+            <a:off x="7909560" y="3849624"/>
+            <a:ext cx="2926080" cy="164592"/>
+          </a:xfrm>
+          <a:prstGeom prst="rect">
+            <a:avLst/>
+          </a:prstGeom>
+          <a:noFill/>
+          <a:ln/>
+        </p:spPr>
+        <p:txBody>
+          <a:bodyPr wrap="square" lIns="0" tIns="0" rIns="0" bIns="0" rtlCol="0" anchor="ctr"/>
+          <a:lstStyle/>
+          <a:p>
+            <a:pPr algn="ctr" indent="0" marL="0">
+              <a:buNone/>
+            </a:pPr>
+            <a:r>
+              <a:rPr lang="en-US" sz="900" dirty="0">
+                <a:solidFill>
+                  <a:srgbClr val="003A63"/>
+                </a:solidFill>
+                <a:latin typeface="Aptos" pitchFamily="34" charset="0"/>
+                <a:ea typeface="Aptos" pitchFamily="34" charset="-122"/>
+                <a:cs typeface="Aptos" pitchFamily="34" charset="-120"/>
+              </a:rPr>
+              <a:t>Human review</a:t>
+            </a:r>
+            <a:endParaRPr lang="en-US" sz="900" dirty="0"/>
+          </a:p>
+        </p:txBody>
+      </p:sp>
+      <p:sp>
+        <p:nvSpPr>
+          <p:cNvPr id="18" name="Shape 16"/>
+          <p:cNvSpPr/>
+          <p:nvPr/>
+        </p:nvSpPr>
+        <p:spPr>
+          <a:xfrm>
+            <a:off x="7635240" y="4498848"/>
+            <a:ext cx="3474720" cy="1143000"/>
+          </a:xfrm>
+          <a:prstGeom prst="roundRect">
+            <a:avLst>
+              <a:gd name="adj" fmla="val 9600"/>
+            </a:avLst>
+          </a:prstGeom>
+          <a:solidFill>
             <a:srgbClr val="EAF6F8"/>
           </a:solidFill>
           <a:ln w="12700">
@@ -6131,14 +6876,14 @@
       </p:sp>
       <p:sp>
         <p:nvSpPr>
-          <p:cNvPr id="16" name="Text 14"/>
-          <p:cNvSpPr/>
-          <p:nvPr/>
-        </p:nvSpPr>
-        <p:spPr>
-          <a:xfrm>
-            <a:off x="8074152" y="3666744"/>
-            <a:ext cx="2825496" cy="256032"/>
+          <p:cNvPr id="19" name="Text 17"/>
+          <p:cNvSpPr/>
+          <p:nvPr/>
+        </p:nvSpPr>
+        <p:spPr>
+          <a:xfrm>
+            <a:off x="7799832" y="4645152"/>
+            <a:ext cx="3145536" cy="256032"/>
           </a:xfrm>
           <a:prstGeom prst="rect">
             <a:avLst/>
@@ -6162,7 +6907,7 @@
                 <a:ea typeface="Aptos" pitchFamily="34" charset="-122"/>
                 <a:cs typeface="Aptos" pitchFamily="34" charset="-120"/>
               </a:rPr>
-              <a:t>Use this for</a:t>
+              <a:t>Safeguard to plan</a:t>
             </a:r>
             <a:endParaRPr lang="en-US" sz="1300" dirty="0"/>
           </a:p>
@@ -6170,14 +6915,14 @@
       </p:sp>
       <p:sp>
         <p:nvSpPr>
-          <p:cNvPr id="17" name="Text 15"/>
-          <p:cNvSpPr/>
-          <p:nvPr/>
-        </p:nvSpPr>
-        <p:spPr>
-          <a:xfrm>
-            <a:off x="8074152" y="4023360"/>
-            <a:ext cx="2825496" cy="1097280"/>
+          <p:cNvPr id="20" name="Text 18"/>
+          <p:cNvSpPr/>
+          <p:nvPr/>
+        </p:nvSpPr>
+        <p:spPr>
+          <a:xfrm>
+            <a:off x="7799832" y="5001768"/>
+            <a:ext cx="3145536" cy="502920"/>
           </a:xfrm>
           <a:prstGeom prst="rect">
             <a:avLst/>
@@ -6203,7 +6948,7 @@
                 <a:ea typeface="Aptos" pitchFamily="34" charset="-122"/>
                 <a:cs typeface="Aptos" pitchFamily="34" charset="-120"/>
               </a:rPr>
-              <a:t>Connect the concept to public health decisions, safeguards, documentation, or implementation work.</a:t>
+              <a:t>Identify what could go wrong, who could be affected, what safeguards are needed, and what evidence should be reviewed before use expands.</a:t>
             </a:r>
             <a:endParaRPr lang="en-US" sz="1550" dirty="0"/>
           </a:p>
@@ -6377,8 +7122,8 @@
         </p:nvSpPr>
         <p:spPr>
           <a:xfrm>
-            <a:off x="9966960" y="6537960"/>
-            <a:ext cx="1645920" cy="201168"/>
+            <a:off x="9646920" y="6537960"/>
+            <a:ext cx="1965960" cy="201168"/>
           </a:xfrm>
           <a:prstGeom prst="rect">
             <a:avLst/>
@@ -6402,7 +7147,7 @@
                 <a:ea typeface="Aptos" pitchFamily="34" charset="-122"/>
                 <a:cs typeface="Aptos" pitchFamily="34" charset="-120"/>
               </a:rPr>
-              <a:t>Â© Paula Soper</a:t>
+              <a:t>Copyright Paula Soper</a:t>
             </a:r>
             <a:endParaRPr lang="en-US" sz="800" dirty="0"/>
           </a:p>
@@ -6497,7 +7242,7 @@
         <p:spPr>
           <a:xfrm>
             <a:off x="868680" y="1508760"/>
-            <a:ext cx="6537960" cy="4160520"/>
+            <a:ext cx="6309360" cy="4160520"/>
           </a:xfrm>
           <a:prstGeom prst="rect">
             <a:avLst/>
@@ -6562,12 +7307,12 @@
         </p:nvSpPr>
         <p:spPr>
           <a:xfrm>
-            <a:off x="7909560" y="1417320"/>
-            <a:ext cx="3154680" cy="1828800"/>
+            <a:off x="7635240" y="1325880"/>
+            <a:ext cx="3474720" cy="1325880"/>
           </a:xfrm>
           <a:prstGeom prst="roundRect">
             <a:avLst>
-              <a:gd name="adj" fmla="val 6000"/>
+              <a:gd name="adj" fmla="val 8276"/>
             </a:avLst>
           </a:prstGeom>
           <a:solidFill>
@@ -6589,8 +7334,8 @@
         </p:nvSpPr>
         <p:spPr>
           <a:xfrm>
-            <a:off x="8074152" y="1563624"/>
-            <a:ext cx="2825496" cy="256032"/>
+            <a:off x="7799832" y="1472184"/>
+            <a:ext cx="3145536" cy="256032"/>
           </a:xfrm>
           <a:prstGeom prst="rect">
             <a:avLst/>
@@ -6614,7 +7359,7 @@
                 <a:ea typeface="Aptos" pitchFamily="34" charset="-122"/>
                 <a:cs typeface="Aptos" pitchFamily="34" charset="-120"/>
               </a:rPr>
-              <a:t>Key idea</a:t>
+              <a:t>Risk check</a:t>
             </a:r>
             <a:endParaRPr lang="en-US" sz="1300" dirty="0"/>
           </a:p>
@@ -6628,8 +7373,8 @@
         </p:nvSpPr>
         <p:spPr>
           <a:xfrm>
-            <a:off x="8074152" y="1920240"/>
-            <a:ext cx="2825496" cy="1188720"/>
+            <a:off x="7799832" y="1828800"/>
+            <a:ext cx="3145536" cy="685800"/>
           </a:xfrm>
           <a:prstGeom prst="rect">
             <a:avLst/>
@@ -6669,15 +7414,168 @@
         </p:nvSpPr>
         <p:spPr>
           <a:xfrm>
-            <a:off x="7909560" y="3520440"/>
-            <a:ext cx="3154680" cy="1737360"/>
+            <a:off x="7635240" y="2788920"/>
+            <a:ext cx="3474720" cy="1536192"/>
           </a:xfrm>
           <a:prstGeom prst="roundRect">
             <a:avLst>
-              <a:gd name="adj" fmla="val 6316"/>
+              <a:gd name="adj" fmla="val 7143"/>
             </a:avLst>
           </a:prstGeom>
           <a:solidFill>
+            <a:srgbClr val="FFFFFF">
+              <a:alpha val="88000"/>
+            </a:srgbClr>
+          </a:solidFill>
+          <a:ln w="12700">
+            <a:solidFill>
+              <a:srgbClr val="D6E8F2"/>
+            </a:solidFill>
+            <a:prstDash val="solid"/>
+          </a:ln>
+        </p:spPr>
+      </p:sp>
+      <p:sp>
+        <p:nvSpPr>
+          <p:cNvPr id="14" name="Shape 12"/>
+          <p:cNvSpPr/>
+          <p:nvPr/>
+        </p:nvSpPr>
+        <p:spPr>
+          <a:xfrm>
+            <a:off x="8046720" y="3108960"/>
+            <a:ext cx="2651760" cy="896112"/>
+          </a:xfrm>
+          <a:prstGeom prst="arc">
+            <a:avLst/>
+          </a:prstGeom>
+          <a:noFill/>
+          <a:ln w="25400">
+            <a:solidFill>
+              <a:srgbClr val="0068B7"/>
+            </a:solidFill>
+            <a:prstDash val="solid"/>
+          </a:ln>
+        </p:spPr>
+      </p:sp>
+      <p:sp>
+        <p:nvSpPr>
+          <p:cNvPr id="15" name="Text 13"/>
+          <p:cNvSpPr/>
+          <p:nvPr/>
+        </p:nvSpPr>
+        <p:spPr>
+          <a:xfrm>
+            <a:off x="7909560" y="3099816"/>
+            <a:ext cx="2926080" cy="256032"/>
+          </a:xfrm>
+          <a:prstGeom prst="rect">
+            <a:avLst/>
+          </a:prstGeom>
+          <a:noFill/>
+          <a:ln/>
+        </p:spPr>
+        <p:txBody>
+          <a:bodyPr wrap="square" lIns="0" tIns="0" rIns="0" bIns="0" rtlCol="0" anchor="ctr"/>
+          <a:lstStyle/>
+          <a:p>
+            <a:pPr algn="ctr" indent="0" marL="0">
+              <a:buNone/>
+            </a:pPr>
+            <a:r>
+              <a:rPr lang="en-US" sz="1500" b="1" dirty="0">
+                <a:solidFill>
+                  <a:srgbClr val="003A63"/>
+                </a:solidFill>
+                <a:latin typeface="Aptos" pitchFamily="34" charset="0"/>
+                <a:ea typeface="Aptos" pitchFamily="34" charset="-122"/>
+                <a:cs typeface="Aptos" pitchFamily="34" charset="-120"/>
+              </a:rPr>
+              <a:t>Risk</a:t>
+            </a:r>
+            <a:endParaRPr lang="en-US" sz="1500" dirty="0"/>
+          </a:p>
+        </p:txBody>
+      </p:sp>
+      <p:sp>
+        <p:nvSpPr>
+          <p:cNvPr id="16" name="Shape 14"/>
+          <p:cNvSpPr/>
+          <p:nvPr/>
+        </p:nvSpPr>
+        <p:spPr>
+          <a:xfrm>
+            <a:off x="8366760" y="3639312"/>
+            <a:ext cx="2011680" cy="0"/>
+          </a:xfrm>
+          <a:prstGeom prst="line">
+            <a:avLst/>
+          </a:prstGeom>
+          <a:noFill/>
+          <a:ln w="63500">
+            <a:solidFill>
+              <a:srgbClr val="2F8A28"/>
+            </a:solidFill>
+            <a:prstDash val="solid"/>
+          </a:ln>
+        </p:spPr>
+      </p:sp>
+      <p:sp>
+        <p:nvSpPr>
+          <p:cNvPr id="17" name="Text 15"/>
+          <p:cNvSpPr/>
+          <p:nvPr/>
+        </p:nvSpPr>
+        <p:spPr>
+          <a:xfrm>
+            <a:off x="7909560" y="3849624"/>
+            <a:ext cx="2926080" cy="164592"/>
+          </a:xfrm>
+          <a:prstGeom prst="rect">
+            <a:avLst/>
+          </a:prstGeom>
+          <a:noFill/>
+          <a:ln/>
+        </p:spPr>
+        <p:txBody>
+          <a:bodyPr wrap="square" lIns="0" tIns="0" rIns="0" bIns="0" rtlCol="0" anchor="ctr"/>
+          <a:lstStyle/>
+          <a:p>
+            <a:pPr algn="ctr" indent="0" marL="0">
+              <a:buNone/>
+            </a:pPr>
+            <a:r>
+              <a:rPr lang="en-US" sz="900" dirty="0">
+                <a:solidFill>
+                  <a:srgbClr val="003A63"/>
+                </a:solidFill>
+                <a:latin typeface="Aptos" pitchFamily="34" charset="0"/>
+                <a:ea typeface="Aptos" pitchFamily="34" charset="-122"/>
+                <a:cs typeface="Aptos" pitchFamily="34" charset="-120"/>
+              </a:rPr>
+              <a:t>Human review</a:t>
+            </a:r>
+            <a:endParaRPr lang="en-US" sz="900" dirty="0"/>
+          </a:p>
+        </p:txBody>
+      </p:sp>
+      <p:sp>
+        <p:nvSpPr>
+          <p:cNvPr id="18" name="Shape 16"/>
+          <p:cNvSpPr/>
+          <p:nvPr/>
+        </p:nvSpPr>
+        <p:spPr>
+          <a:xfrm>
+            <a:off x="7635240" y="4498848"/>
+            <a:ext cx="3474720" cy="1143000"/>
+          </a:xfrm>
+          <a:prstGeom prst="roundRect">
+            <a:avLst>
+              <a:gd name="adj" fmla="val 9600"/>
+            </a:avLst>
+          </a:prstGeom>
+          <a:solidFill>
             <a:srgbClr val="EAF6F8"/>
           </a:solidFill>
           <a:ln w="12700">
@@ -6690,14 +7588,14 @@
       </p:sp>
       <p:sp>
         <p:nvSpPr>
-          <p:cNvPr id="14" name="Text 12"/>
-          <p:cNvSpPr/>
-          <p:nvPr/>
-        </p:nvSpPr>
-        <p:spPr>
-          <a:xfrm>
-            <a:off x="8074152" y="3666744"/>
-            <a:ext cx="2825496" cy="256032"/>
+          <p:cNvPr id="19" name="Text 17"/>
+          <p:cNvSpPr/>
+          <p:nvPr/>
+        </p:nvSpPr>
+        <p:spPr>
+          <a:xfrm>
+            <a:off x="7799832" y="4645152"/>
+            <a:ext cx="3145536" cy="256032"/>
           </a:xfrm>
           <a:prstGeom prst="rect">
             <a:avLst/>
@@ -6721,7 +7619,7 @@
                 <a:ea typeface="Aptos" pitchFamily="34" charset="-122"/>
                 <a:cs typeface="Aptos" pitchFamily="34" charset="-120"/>
               </a:rPr>
-              <a:t>Use this for</a:t>
+              <a:t>Safeguard to plan</a:t>
             </a:r>
             <a:endParaRPr lang="en-US" sz="1300" dirty="0"/>
           </a:p>
@@ -6729,14 +7627,14 @@
       </p:sp>
       <p:sp>
         <p:nvSpPr>
-          <p:cNvPr id="15" name="Text 13"/>
-          <p:cNvSpPr/>
-          <p:nvPr/>
-        </p:nvSpPr>
-        <p:spPr>
-          <a:xfrm>
-            <a:off x="8074152" y="4023360"/>
-            <a:ext cx="2825496" cy="1097280"/>
+          <p:cNvPr id="20" name="Text 18"/>
+          <p:cNvSpPr/>
+          <p:nvPr/>
+        </p:nvSpPr>
+        <p:spPr>
+          <a:xfrm>
+            <a:off x="7799832" y="5001768"/>
+            <a:ext cx="3145536" cy="502920"/>
           </a:xfrm>
           <a:prstGeom prst="rect">
             <a:avLst/>
@@ -6762,7 +7660,7 @@
                 <a:ea typeface="Aptos" pitchFamily="34" charset="-122"/>
                 <a:cs typeface="Aptos" pitchFamily="34" charset="-120"/>
               </a:rPr>
-              <a:t>Connect the concept to public health decisions, safeguards, documentation, or implementation work.</a:t>
+              <a:t>Identify what could go wrong, who could be affected, what safeguards are needed, and what evidence should be reviewed before use expands.</a:t>
             </a:r>
             <a:endParaRPr lang="en-US" sz="1550" dirty="0"/>
           </a:p>
@@ -6936,8 +7834,8 @@
         </p:nvSpPr>
         <p:spPr>
           <a:xfrm>
-            <a:off x="9966960" y="6537960"/>
-            <a:ext cx="1645920" cy="201168"/>
+            <a:off x="9646920" y="6537960"/>
+            <a:ext cx="1965960" cy="201168"/>
           </a:xfrm>
           <a:prstGeom prst="rect">
             <a:avLst/>
@@ -6961,7 +7859,7 @@
                 <a:ea typeface="Aptos" pitchFamily="34" charset="-122"/>
                 <a:cs typeface="Aptos" pitchFamily="34" charset="-120"/>
               </a:rPr>
-              <a:t>Â© Paula Soper</a:t>
+              <a:t>Copyright Paula Soper</a:t>
             </a:r>
             <a:endParaRPr lang="en-US" sz="800" dirty="0"/>
           </a:p>
@@ -7008,77 +7906,13 @@
       </p:sp>
       <p:sp>
         <p:nvSpPr>
-          <p:cNvPr id="8" name="Shape 6"/>
+          <p:cNvPr id="8" name="Text 6"/>
           <p:cNvSpPr/>
           <p:nvPr/>
         </p:nvSpPr>
         <p:spPr>
           <a:xfrm>
             <a:off x="640080" y="658368"/>
-            <a:ext cx="420624" cy="420624"/>
-          </a:xfrm>
-          <a:prstGeom prst="ellipse">
-            <a:avLst/>
-          </a:prstGeom>
-          <a:solidFill>
-            <a:srgbClr val="0068B7"/>
-          </a:solidFill>
-          <a:ln w="12700">
-            <a:solidFill>
-              <a:srgbClr val="0068B7"/>
-            </a:solidFill>
-            <a:prstDash val="solid"/>
-          </a:ln>
-        </p:spPr>
-      </p:sp>
-      <p:sp>
-        <p:nvSpPr>
-          <p:cNvPr id="9" name="Text 7"/>
-          <p:cNvSpPr/>
-          <p:nvPr/>
-        </p:nvSpPr>
-        <p:spPr>
-          <a:xfrm>
-            <a:off x="640080" y="731520"/>
-            <a:ext cx="420624" cy="164592"/>
-          </a:xfrm>
-          <a:prstGeom prst="rect">
-            <a:avLst/>
-          </a:prstGeom>
-          <a:noFill/>
-          <a:ln/>
-        </p:spPr>
-        <p:txBody>
-          <a:bodyPr wrap="square" lIns="0" tIns="0" rIns="0" bIns="0" rtlCol="0" anchor="ctr"/>
-          <a:lstStyle/>
-          <a:p>
-            <a:pPr algn="ctr" indent="0" marL="0">
-              <a:buNone/>
-            </a:pPr>
-            <a:r>
-              <a:rPr lang="en-US" sz="1100" b="1" dirty="0">
-                <a:solidFill>
-                  <a:srgbClr val="FFFFFF"/>
-                </a:solidFill>
-                <a:latin typeface="Aptos" pitchFamily="34" charset="0"/>
-                <a:ea typeface="Aptos" pitchFamily="34" charset="-122"/>
-                <a:cs typeface="Aptos" pitchFamily="34" charset="-120"/>
-              </a:rPr>
-              <a:t>8</a:t>
-            </a:r>
-            <a:endParaRPr lang="en-US" sz="1100" dirty="0"/>
-          </a:p>
-        </p:txBody>
-      </p:sp>
-      <p:sp>
-        <p:nvSpPr>
-          <p:cNvPr id="10" name="Text 8"/>
-          <p:cNvSpPr/>
-          <p:nvPr/>
-        </p:nvSpPr>
-        <p:spPr>
-          <a:xfrm>
-            <a:off x="640080" y="621792"/>
             <a:ext cx="10881360" cy="713232"/>
           </a:xfrm>
           <a:prstGeom prst="rect">
@@ -7113,14 +7947,14 @@
       </p:sp>
       <p:sp>
         <p:nvSpPr>
-          <p:cNvPr id="11" name="Text 9"/>
+          <p:cNvPr id="9" name="Text 7"/>
           <p:cNvSpPr/>
           <p:nvPr/>
         </p:nvSpPr>
         <p:spPr>
           <a:xfrm>
             <a:off x="868680" y="1508760"/>
-            <a:ext cx="6537960" cy="4160520"/>
+            <a:ext cx="6309360" cy="4160520"/>
           </a:xfrm>
           <a:prstGeom prst="rect">
             <a:avLst/>
@@ -7179,18 +8013,18 @@
       </p:sp>
       <p:sp>
         <p:nvSpPr>
-          <p:cNvPr id="12" name="Shape 10"/>
-          <p:cNvSpPr/>
-          <p:nvPr/>
-        </p:nvSpPr>
-        <p:spPr>
-          <a:xfrm>
-            <a:off x="7909560" y="1417320"/>
-            <a:ext cx="3154680" cy="1828800"/>
+          <p:cNvPr id="10" name="Shape 8"/>
+          <p:cNvSpPr/>
+          <p:nvPr/>
+        </p:nvSpPr>
+        <p:spPr>
+          <a:xfrm>
+            <a:off x="7635240" y="1325880"/>
+            <a:ext cx="3474720" cy="1325880"/>
           </a:xfrm>
           <a:prstGeom prst="roundRect">
             <a:avLst>
-              <a:gd name="adj" fmla="val 6000"/>
+              <a:gd name="adj" fmla="val 8276"/>
             </a:avLst>
           </a:prstGeom>
           <a:solidFill>
@@ -7206,14 +8040,14 @@
       </p:sp>
       <p:sp>
         <p:nvSpPr>
-          <p:cNvPr id="13" name="Text 11"/>
-          <p:cNvSpPr/>
-          <p:nvPr/>
-        </p:nvSpPr>
-        <p:spPr>
-          <a:xfrm>
-            <a:off x="8074152" y="1563624"/>
-            <a:ext cx="2825496" cy="256032"/>
+          <p:cNvPr id="11" name="Text 9"/>
+          <p:cNvSpPr/>
+          <p:nvPr/>
+        </p:nvSpPr>
+        <p:spPr>
+          <a:xfrm>
+            <a:off x="7799832" y="1472184"/>
+            <a:ext cx="3145536" cy="256032"/>
           </a:xfrm>
           <a:prstGeom prst="rect">
             <a:avLst/>
@@ -7237,7 +8071,7 @@
                 <a:ea typeface="Aptos" pitchFamily="34" charset="-122"/>
                 <a:cs typeface="Aptos" pitchFamily="34" charset="-120"/>
               </a:rPr>
-              <a:t>Key idea</a:t>
+              <a:t>Data decision</a:t>
             </a:r>
             <a:endParaRPr lang="en-US" sz="1300" dirty="0"/>
           </a:p>
@@ -7245,14 +8079,14 @@
       </p:sp>
       <p:sp>
         <p:nvSpPr>
-          <p:cNvPr id="14" name="Text 12"/>
-          <p:cNvSpPr/>
-          <p:nvPr/>
-        </p:nvSpPr>
-        <p:spPr>
-          <a:xfrm>
-            <a:off x="8074152" y="1920240"/>
-            <a:ext cx="2825496" cy="1188720"/>
+          <p:cNvPr id="12" name="Text 10"/>
+          <p:cNvSpPr/>
+          <p:nvPr/>
+        </p:nvSpPr>
+        <p:spPr>
+          <a:xfrm>
+            <a:off x="7799832" y="1828800"/>
+            <a:ext cx="3145536" cy="685800"/>
           </a:xfrm>
           <a:prstGeom prst="rect">
             <a:avLst/>
@@ -7286,21 +8120,212 @@
       </p:sp>
       <p:sp>
         <p:nvSpPr>
-          <p:cNvPr id="15" name="Shape 13"/>
-          <p:cNvSpPr/>
-          <p:nvPr/>
-        </p:nvSpPr>
-        <p:spPr>
-          <a:xfrm>
-            <a:off x="7909560" y="3520440"/>
-            <a:ext cx="3154680" cy="1737360"/>
+          <p:cNvPr id="13" name="Shape 11"/>
+          <p:cNvSpPr/>
+          <p:nvPr/>
+        </p:nvSpPr>
+        <p:spPr>
+          <a:xfrm>
+            <a:off x="7635240" y="2788920"/>
+            <a:ext cx="3474720" cy="1536192"/>
           </a:xfrm>
           <a:prstGeom prst="roundRect">
             <a:avLst>
-              <a:gd name="adj" fmla="val 6316"/>
+              <a:gd name="adj" fmla="val 7143"/>
             </a:avLst>
           </a:prstGeom>
           <a:solidFill>
+            <a:srgbClr val="FFFFFF">
+              <a:alpha val="88000"/>
+            </a:srgbClr>
+          </a:solidFill>
+          <a:ln w="12700">
+            <a:solidFill>
+              <a:srgbClr val="D6E8F2"/>
+            </a:solidFill>
+            <a:prstDash val="solid"/>
+          </a:ln>
+        </p:spPr>
+      </p:sp>
+      <p:sp>
+        <p:nvSpPr>
+          <p:cNvPr id="14" name="Shape 12"/>
+          <p:cNvSpPr/>
+          <p:nvPr/>
+        </p:nvSpPr>
+        <p:spPr>
+          <a:xfrm>
+            <a:off x="8138160" y="3474720"/>
+            <a:ext cx="256032" cy="411480"/>
+          </a:xfrm>
+          <a:prstGeom prst="rect">
+            <a:avLst/>
+          </a:prstGeom>
+          <a:solidFill>
+            <a:srgbClr val="0068B7"/>
+          </a:solidFill>
+          <a:ln w="12700">
+            <a:solidFill>
+              <a:srgbClr val="0068B7"/>
+            </a:solidFill>
+            <a:prstDash val="solid"/>
+          </a:ln>
+        </p:spPr>
+      </p:sp>
+      <p:sp>
+        <p:nvSpPr>
+          <p:cNvPr id="15" name="Shape 13"/>
+          <p:cNvSpPr/>
+          <p:nvPr/>
+        </p:nvSpPr>
+        <p:spPr>
+          <a:xfrm>
+            <a:off x="8577072" y="3172968"/>
+            <a:ext cx="256032" cy="713232"/>
+          </a:xfrm>
+          <a:prstGeom prst="rect">
+            <a:avLst/>
+          </a:prstGeom>
+          <a:solidFill>
+            <a:srgbClr val="2F8A28"/>
+          </a:solidFill>
+          <a:ln w="12700">
+            <a:solidFill>
+              <a:srgbClr val="2F8A28"/>
+            </a:solidFill>
+            <a:prstDash val="solid"/>
+          </a:ln>
+        </p:spPr>
+      </p:sp>
+      <p:sp>
+        <p:nvSpPr>
+          <p:cNvPr id="16" name="Shape 14"/>
+          <p:cNvSpPr/>
+          <p:nvPr/>
+        </p:nvSpPr>
+        <p:spPr>
+          <a:xfrm>
+            <a:off x="9015984" y="2880360"/>
+            <a:ext cx="256032" cy="1005840"/>
+          </a:xfrm>
+          <a:prstGeom prst="rect">
+            <a:avLst/>
+          </a:prstGeom>
+          <a:solidFill>
+            <a:srgbClr val="D69A2D"/>
+          </a:solidFill>
+          <a:ln w="12700">
+            <a:solidFill>
+              <a:srgbClr val="D69A2D"/>
+            </a:solidFill>
+            <a:prstDash val="solid"/>
+          </a:ln>
+        </p:spPr>
+      </p:sp>
+      <p:sp>
+        <p:nvSpPr>
+          <p:cNvPr id="17" name="Shape 15"/>
+          <p:cNvSpPr/>
+          <p:nvPr/>
+        </p:nvSpPr>
+        <p:spPr>
+          <a:xfrm>
+            <a:off x="9454896" y="3319272"/>
+            <a:ext cx="256032" cy="566928"/>
+          </a:xfrm>
+          <a:prstGeom prst="rect">
+            <a:avLst/>
+          </a:prstGeom>
+          <a:solidFill>
+            <a:srgbClr val="6A4CA3"/>
+          </a:solidFill>
+          <a:ln w="12700">
+            <a:solidFill>
+              <a:srgbClr val="6A4CA3"/>
+            </a:solidFill>
+            <a:prstDash val="solid"/>
+          </a:ln>
+        </p:spPr>
+      </p:sp>
+      <p:sp>
+        <p:nvSpPr>
+          <p:cNvPr id="18" name="Shape 16"/>
+          <p:cNvSpPr/>
+          <p:nvPr/>
+        </p:nvSpPr>
+        <p:spPr>
+          <a:xfrm>
+            <a:off x="8019288" y="3886200"/>
+            <a:ext cx="2706624" cy="0"/>
+          </a:xfrm>
+          <a:prstGeom prst="line">
+            <a:avLst/>
+          </a:prstGeom>
+          <a:noFill/>
+          <a:ln w="15240">
+            <a:solidFill>
+              <a:srgbClr val="003A63"/>
+            </a:solidFill>
+            <a:prstDash val="solid"/>
+          </a:ln>
+        </p:spPr>
+      </p:sp>
+      <p:sp>
+        <p:nvSpPr>
+          <p:cNvPr id="19" name="Text 17"/>
+          <p:cNvSpPr/>
+          <p:nvPr/>
+        </p:nvSpPr>
+        <p:spPr>
+          <a:xfrm>
+            <a:off x="7863840" y="3017520"/>
+            <a:ext cx="3017520" cy="201168"/>
+          </a:xfrm>
+          <a:prstGeom prst="rect">
+            <a:avLst/>
+          </a:prstGeom>
+          <a:noFill/>
+          <a:ln/>
+        </p:spPr>
+        <p:txBody>
+          <a:bodyPr wrap="square" lIns="0" tIns="0" rIns="0" bIns="0" rtlCol="0" anchor="ctr"/>
+          <a:lstStyle/>
+          <a:p>
+            <a:pPr algn="ctr" indent="0" marL="0">
+              <a:buNone/>
+            </a:pPr>
+            <a:r>
+              <a:rPr lang="en-US" sz="1050" b="1" dirty="0">
+                <a:solidFill>
+                  <a:srgbClr val="003A63"/>
+                </a:solidFill>
+                <a:latin typeface="Aptos" pitchFamily="34" charset="0"/>
+                <a:ea typeface="Aptos" pitchFamily="34" charset="-122"/>
+                <a:cs typeface="Aptos" pitchFamily="34" charset="-120"/>
+              </a:rPr>
+              <a:t>Measure and monitor</a:t>
+            </a:r>
+            <a:endParaRPr lang="en-US" sz="1050" dirty="0"/>
+          </a:p>
+        </p:txBody>
+      </p:sp>
+      <p:sp>
+        <p:nvSpPr>
+          <p:cNvPr id="20" name="Shape 18"/>
+          <p:cNvSpPr/>
+          <p:nvPr/>
+        </p:nvSpPr>
+        <p:spPr>
+          <a:xfrm>
+            <a:off x="7635240" y="4498848"/>
+            <a:ext cx="3474720" cy="1143000"/>
+          </a:xfrm>
+          <a:prstGeom prst="roundRect">
+            <a:avLst>
+              <a:gd name="adj" fmla="val 9600"/>
+            </a:avLst>
+          </a:prstGeom>
+          <a:solidFill>
             <a:srgbClr val="EAF6F8"/>
           </a:solidFill>
           <a:ln w="12700">
@@ -7313,14 +8338,14 @@
       </p:sp>
       <p:sp>
         <p:nvSpPr>
-          <p:cNvPr id="16" name="Text 14"/>
-          <p:cNvSpPr/>
-          <p:nvPr/>
-        </p:nvSpPr>
-        <p:spPr>
-          <a:xfrm>
-            <a:off x="8074152" y="3666744"/>
-            <a:ext cx="2825496" cy="256032"/>
+          <p:cNvPr id="21" name="Text 19"/>
+          <p:cNvSpPr/>
+          <p:nvPr/>
+        </p:nvSpPr>
+        <p:spPr>
+          <a:xfrm>
+            <a:off x="7799832" y="4645152"/>
+            <a:ext cx="3145536" cy="256032"/>
           </a:xfrm>
           <a:prstGeom prst="rect">
             <a:avLst/>
@@ -7344,7 +8369,7 @@
                 <a:ea typeface="Aptos" pitchFamily="34" charset="-122"/>
                 <a:cs typeface="Aptos" pitchFamily="34" charset="-120"/>
               </a:rPr>
-              <a:t>Use this for</a:t>
+              <a:t>How to validate</a:t>
             </a:r>
             <a:endParaRPr lang="en-US" sz="1300" dirty="0"/>
           </a:p>
@@ -7352,14 +8377,14 @@
       </p:sp>
       <p:sp>
         <p:nvSpPr>
-          <p:cNvPr id="17" name="Text 15"/>
-          <p:cNvSpPr/>
-          <p:nvPr/>
-        </p:nvSpPr>
-        <p:spPr>
-          <a:xfrm>
-            <a:off x="8074152" y="4023360"/>
-            <a:ext cx="2825496" cy="1097280"/>
+          <p:cNvPr id="22" name="Text 20"/>
+          <p:cNvSpPr/>
+          <p:nvPr/>
+        </p:nvSpPr>
+        <p:spPr>
+          <a:xfrm>
+            <a:off x="7799832" y="5001768"/>
+            <a:ext cx="3145536" cy="502920"/>
           </a:xfrm>
           <a:prstGeom prst="rect">
             <a:avLst/>
@@ -7385,7 +8410,7 @@
                 <a:ea typeface="Aptos" pitchFamily="34" charset="-122"/>
                 <a:cs typeface="Aptos" pitchFamily="34" charset="-120"/>
               </a:rPr>
-              <a:t>Connect the concept to public health decisions, safeguards, documentation, or implementation work.</a:t>
+              <a:t>Connect the concept to data quality, model performance, validation evidence, monitoring measures, and decisions that remain under human control.</a:t>
             </a:r>
             <a:endParaRPr lang="en-US" sz="1550" dirty="0"/>
           </a:p>
@@ -7559,8 +8584,8 @@
         </p:nvSpPr>
         <p:spPr>
           <a:xfrm>
-            <a:off x="9966960" y="6537960"/>
-            <a:ext cx="1645920" cy="201168"/>
+            <a:off x="9646920" y="6537960"/>
+            <a:ext cx="1965960" cy="201168"/>
           </a:xfrm>
           <a:prstGeom prst="rect">
             <a:avLst/>
@@ -7584,7 +8609,7 @@
                 <a:ea typeface="Aptos" pitchFamily="34" charset="-122"/>
                 <a:cs typeface="Aptos" pitchFamily="34" charset="-120"/>
               </a:rPr>
-              <a:t>Â© Paula Soper</a:t>
+              <a:t>Copyright Paula Soper</a:t>
             </a:r>
             <a:endParaRPr lang="en-US" sz="800" dirty="0"/>
           </a:p>
@@ -7631,77 +8656,13 @@
       </p:sp>
       <p:sp>
         <p:nvSpPr>
-          <p:cNvPr id="8" name="Shape 6"/>
+          <p:cNvPr id="8" name="Text 6"/>
           <p:cNvSpPr/>
           <p:nvPr/>
         </p:nvSpPr>
         <p:spPr>
           <a:xfrm>
             <a:off x="640080" y="658368"/>
-            <a:ext cx="420624" cy="420624"/>
-          </a:xfrm>
-          <a:prstGeom prst="ellipse">
-            <a:avLst/>
-          </a:prstGeom>
-          <a:solidFill>
-            <a:srgbClr val="0068B7"/>
-          </a:solidFill>
-          <a:ln w="12700">
-            <a:solidFill>
-              <a:srgbClr val="0068B7"/>
-            </a:solidFill>
-            <a:prstDash val="solid"/>
-          </a:ln>
-        </p:spPr>
-      </p:sp>
-      <p:sp>
-        <p:nvSpPr>
-          <p:cNvPr id="9" name="Text 7"/>
-          <p:cNvSpPr/>
-          <p:nvPr/>
-        </p:nvSpPr>
-        <p:spPr>
-          <a:xfrm>
-            <a:off x="640080" y="731520"/>
-            <a:ext cx="420624" cy="164592"/>
-          </a:xfrm>
-          <a:prstGeom prst="rect">
-            <a:avLst/>
-          </a:prstGeom>
-          <a:noFill/>
-          <a:ln/>
-        </p:spPr>
-        <p:txBody>
-          <a:bodyPr wrap="square" lIns="0" tIns="0" rIns="0" bIns="0" rtlCol="0" anchor="ctr"/>
-          <a:lstStyle/>
-          <a:p>
-            <a:pPr algn="ctr" indent="0" marL="0">
-              <a:buNone/>
-            </a:pPr>
-            <a:r>
-              <a:rPr lang="en-US" sz="1100" b="1" dirty="0">
-                <a:solidFill>
-                  <a:srgbClr val="FFFFFF"/>
-                </a:solidFill>
-                <a:latin typeface="Aptos" pitchFamily="34" charset="0"/>
-                <a:ea typeface="Aptos" pitchFamily="34" charset="-122"/>
-                <a:cs typeface="Aptos" pitchFamily="34" charset="-120"/>
-              </a:rPr>
-              <a:t>9</a:t>
-            </a:r>
-            <a:endParaRPr lang="en-US" sz="1100" dirty="0"/>
-          </a:p>
-        </p:txBody>
-      </p:sp>
-      <p:sp>
-        <p:nvSpPr>
-          <p:cNvPr id="10" name="Text 8"/>
-          <p:cNvSpPr/>
-          <p:nvPr/>
-        </p:nvSpPr>
-        <p:spPr>
-          <a:xfrm>
-            <a:off x="640080" y="621792"/>
             <a:ext cx="10881360" cy="713232"/>
           </a:xfrm>
           <a:prstGeom prst="rect">
@@ -7736,14 +8697,14 @@
       </p:sp>
       <p:sp>
         <p:nvSpPr>
-          <p:cNvPr id="11" name="Text 9"/>
+          <p:cNvPr id="9" name="Text 7"/>
           <p:cNvSpPr/>
           <p:nvPr/>
         </p:nvSpPr>
         <p:spPr>
           <a:xfrm>
             <a:off x="868680" y="1508760"/>
-            <a:ext cx="6537960" cy="4160520"/>
+            <a:ext cx="6309360" cy="4160520"/>
           </a:xfrm>
           <a:prstGeom prst="rect">
             <a:avLst/>
@@ -7802,18 +8763,18 @@
       </p:sp>
       <p:sp>
         <p:nvSpPr>
-          <p:cNvPr id="12" name="Shape 10"/>
-          <p:cNvSpPr/>
-          <p:nvPr/>
-        </p:nvSpPr>
-        <p:spPr>
-          <a:xfrm>
-            <a:off x="7909560" y="1417320"/>
-            <a:ext cx="3154680" cy="1828800"/>
+          <p:cNvPr id="10" name="Shape 8"/>
+          <p:cNvSpPr/>
+          <p:nvPr/>
+        </p:nvSpPr>
+        <p:spPr>
+          <a:xfrm>
+            <a:off x="7635240" y="1325880"/>
+            <a:ext cx="3474720" cy="1325880"/>
           </a:xfrm>
           <a:prstGeom prst="roundRect">
             <a:avLst>
-              <a:gd name="adj" fmla="val 6000"/>
+              <a:gd name="adj" fmla="val 8276"/>
             </a:avLst>
           </a:prstGeom>
           <a:solidFill>
@@ -7829,14 +8790,14 @@
       </p:sp>
       <p:sp>
         <p:nvSpPr>
-          <p:cNvPr id="13" name="Text 11"/>
-          <p:cNvSpPr/>
-          <p:nvPr/>
-        </p:nvSpPr>
-        <p:spPr>
-          <a:xfrm>
-            <a:off x="8074152" y="1563624"/>
-            <a:ext cx="2825496" cy="256032"/>
+          <p:cNvPr id="11" name="Text 9"/>
+          <p:cNvSpPr/>
+          <p:nvPr/>
+        </p:nvSpPr>
+        <p:spPr>
+          <a:xfrm>
+            <a:off x="7799832" y="1472184"/>
+            <a:ext cx="3145536" cy="256032"/>
           </a:xfrm>
           <a:prstGeom prst="rect">
             <a:avLst/>
@@ -7860,7 +8821,7 @@
                 <a:ea typeface="Aptos" pitchFamily="34" charset="-122"/>
                 <a:cs typeface="Aptos" pitchFamily="34" charset="-120"/>
               </a:rPr>
-              <a:t>Key idea</a:t>
+              <a:t>Data decision</a:t>
             </a:r>
             <a:endParaRPr lang="en-US" sz="1300" dirty="0"/>
           </a:p>
@@ -7868,14 +8829,14 @@
       </p:sp>
       <p:sp>
         <p:nvSpPr>
-          <p:cNvPr id="14" name="Text 12"/>
-          <p:cNvSpPr/>
-          <p:nvPr/>
-        </p:nvSpPr>
-        <p:spPr>
-          <a:xfrm>
-            <a:off x="8074152" y="1920240"/>
-            <a:ext cx="2825496" cy="1188720"/>
+          <p:cNvPr id="12" name="Text 10"/>
+          <p:cNvSpPr/>
+          <p:nvPr/>
+        </p:nvSpPr>
+        <p:spPr>
+          <a:xfrm>
+            <a:off x="7799832" y="1828800"/>
+            <a:ext cx="3145536" cy="685800"/>
           </a:xfrm>
           <a:prstGeom prst="rect">
             <a:avLst/>
@@ -7909,21 +8870,212 @@
       </p:sp>
       <p:sp>
         <p:nvSpPr>
-          <p:cNvPr id="15" name="Shape 13"/>
-          <p:cNvSpPr/>
-          <p:nvPr/>
-        </p:nvSpPr>
-        <p:spPr>
-          <a:xfrm>
-            <a:off x="7909560" y="3520440"/>
-            <a:ext cx="3154680" cy="1737360"/>
+          <p:cNvPr id="13" name="Shape 11"/>
+          <p:cNvSpPr/>
+          <p:nvPr/>
+        </p:nvSpPr>
+        <p:spPr>
+          <a:xfrm>
+            <a:off x="7635240" y="2788920"/>
+            <a:ext cx="3474720" cy="1536192"/>
           </a:xfrm>
           <a:prstGeom prst="roundRect">
             <a:avLst>
-              <a:gd name="adj" fmla="val 6316"/>
+              <a:gd name="adj" fmla="val 7143"/>
             </a:avLst>
           </a:prstGeom>
           <a:solidFill>
+            <a:srgbClr val="FFFFFF">
+              <a:alpha val="88000"/>
+            </a:srgbClr>
+          </a:solidFill>
+          <a:ln w="12700">
+            <a:solidFill>
+              <a:srgbClr val="D6E8F2"/>
+            </a:solidFill>
+            <a:prstDash val="solid"/>
+          </a:ln>
+        </p:spPr>
+      </p:sp>
+      <p:sp>
+        <p:nvSpPr>
+          <p:cNvPr id="14" name="Shape 12"/>
+          <p:cNvSpPr/>
+          <p:nvPr/>
+        </p:nvSpPr>
+        <p:spPr>
+          <a:xfrm>
+            <a:off x="8138160" y="3474720"/>
+            <a:ext cx="256032" cy="411480"/>
+          </a:xfrm>
+          <a:prstGeom prst="rect">
+            <a:avLst/>
+          </a:prstGeom>
+          <a:solidFill>
+            <a:srgbClr val="0068B7"/>
+          </a:solidFill>
+          <a:ln w="12700">
+            <a:solidFill>
+              <a:srgbClr val="0068B7"/>
+            </a:solidFill>
+            <a:prstDash val="solid"/>
+          </a:ln>
+        </p:spPr>
+      </p:sp>
+      <p:sp>
+        <p:nvSpPr>
+          <p:cNvPr id="15" name="Shape 13"/>
+          <p:cNvSpPr/>
+          <p:nvPr/>
+        </p:nvSpPr>
+        <p:spPr>
+          <a:xfrm>
+            <a:off x="8577072" y="3172968"/>
+            <a:ext cx="256032" cy="713232"/>
+          </a:xfrm>
+          <a:prstGeom prst="rect">
+            <a:avLst/>
+          </a:prstGeom>
+          <a:solidFill>
+            <a:srgbClr val="2F8A28"/>
+          </a:solidFill>
+          <a:ln w="12700">
+            <a:solidFill>
+              <a:srgbClr val="2F8A28"/>
+            </a:solidFill>
+            <a:prstDash val="solid"/>
+          </a:ln>
+        </p:spPr>
+      </p:sp>
+      <p:sp>
+        <p:nvSpPr>
+          <p:cNvPr id="16" name="Shape 14"/>
+          <p:cNvSpPr/>
+          <p:nvPr/>
+        </p:nvSpPr>
+        <p:spPr>
+          <a:xfrm>
+            <a:off x="9015984" y="2880360"/>
+            <a:ext cx="256032" cy="1005840"/>
+          </a:xfrm>
+          <a:prstGeom prst="rect">
+            <a:avLst/>
+          </a:prstGeom>
+          <a:solidFill>
+            <a:srgbClr val="D69A2D"/>
+          </a:solidFill>
+          <a:ln w="12700">
+            <a:solidFill>
+              <a:srgbClr val="D69A2D"/>
+            </a:solidFill>
+            <a:prstDash val="solid"/>
+          </a:ln>
+        </p:spPr>
+      </p:sp>
+      <p:sp>
+        <p:nvSpPr>
+          <p:cNvPr id="17" name="Shape 15"/>
+          <p:cNvSpPr/>
+          <p:nvPr/>
+        </p:nvSpPr>
+        <p:spPr>
+          <a:xfrm>
+            <a:off x="9454896" y="3319272"/>
+            <a:ext cx="256032" cy="566928"/>
+          </a:xfrm>
+          <a:prstGeom prst="rect">
+            <a:avLst/>
+          </a:prstGeom>
+          <a:solidFill>
+            <a:srgbClr val="6A4CA3"/>
+          </a:solidFill>
+          <a:ln w="12700">
+            <a:solidFill>
+              <a:srgbClr val="6A4CA3"/>
+            </a:solidFill>
+            <a:prstDash val="solid"/>
+          </a:ln>
+        </p:spPr>
+      </p:sp>
+      <p:sp>
+        <p:nvSpPr>
+          <p:cNvPr id="18" name="Shape 16"/>
+          <p:cNvSpPr/>
+          <p:nvPr/>
+        </p:nvSpPr>
+        <p:spPr>
+          <a:xfrm>
+            <a:off x="8019288" y="3886200"/>
+            <a:ext cx="2706624" cy="0"/>
+          </a:xfrm>
+          <a:prstGeom prst="line">
+            <a:avLst/>
+          </a:prstGeom>
+          <a:noFill/>
+          <a:ln w="15240">
+            <a:solidFill>
+              <a:srgbClr val="003A63"/>
+            </a:solidFill>
+            <a:prstDash val="solid"/>
+          </a:ln>
+        </p:spPr>
+      </p:sp>
+      <p:sp>
+        <p:nvSpPr>
+          <p:cNvPr id="19" name="Text 17"/>
+          <p:cNvSpPr/>
+          <p:nvPr/>
+        </p:nvSpPr>
+        <p:spPr>
+          <a:xfrm>
+            <a:off x="7863840" y="3017520"/>
+            <a:ext cx="3017520" cy="201168"/>
+          </a:xfrm>
+          <a:prstGeom prst="rect">
+            <a:avLst/>
+          </a:prstGeom>
+          <a:noFill/>
+          <a:ln/>
+        </p:spPr>
+        <p:txBody>
+          <a:bodyPr wrap="square" lIns="0" tIns="0" rIns="0" bIns="0" rtlCol="0" anchor="ctr"/>
+          <a:lstStyle/>
+          <a:p>
+            <a:pPr algn="ctr" indent="0" marL="0">
+              <a:buNone/>
+            </a:pPr>
+            <a:r>
+              <a:rPr lang="en-US" sz="1050" b="1" dirty="0">
+                <a:solidFill>
+                  <a:srgbClr val="003A63"/>
+                </a:solidFill>
+                <a:latin typeface="Aptos" pitchFamily="34" charset="0"/>
+                <a:ea typeface="Aptos" pitchFamily="34" charset="-122"/>
+                <a:cs typeface="Aptos" pitchFamily="34" charset="-120"/>
+              </a:rPr>
+              <a:t>Measure and monitor</a:t>
+            </a:r>
+            <a:endParaRPr lang="en-US" sz="1050" dirty="0"/>
+          </a:p>
+        </p:txBody>
+      </p:sp>
+      <p:sp>
+        <p:nvSpPr>
+          <p:cNvPr id="20" name="Shape 18"/>
+          <p:cNvSpPr/>
+          <p:nvPr/>
+        </p:nvSpPr>
+        <p:spPr>
+          <a:xfrm>
+            <a:off x="7635240" y="4498848"/>
+            <a:ext cx="3474720" cy="1143000"/>
+          </a:xfrm>
+          <a:prstGeom prst="roundRect">
+            <a:avLst>
+              <a:gd name="adj" fmla="val 9600"/>
+            </a:avLst>
+          </a:prstGeom>
+          <a:solidFill>
             <a:srgbClr val="EAF6F8"/>
           </a:solidFill>
           <a:ln w="12700">
@@ -7936,14 +9088,14 @@
       </p:sp>
       <p:sp>
         <p:nvSpPr>
-          <p:cNvPr id="16" name="Text 14"/>
-          <p:cNvSpPr/>
-          <p:nvPr/>
-        </p:nvSpPr>
-        <p:spPr>
-          <a:xfrm>
-            <a:off x="8074152" y="3666744"/>
-            <a:ext cx="2825496" cy="256032"/>
+          <p:cNvPr id="21" name="Text 19"/>
+          <p:cNvSpPr/>
+          <p:nvPr/>
+        </p:nvSpPr>
+        <p:spPr>
+          <a:xfrm>
+            <a:off x="7799832" y="4645152"/>
+            <a:ext cx="3145536" cy="256032"/>
           </a:xfrm>
           <a:prstGeom prst="rect">
             <a:avLst/>
@@ -7967,7 +9119,7 @@
                 <a:ea typeface="Aptos" pitchFamily="34" charset="-122"/>
                 <a:cs typeface="Aptos" pitchFamily="34" charset="-120"/>
               </a:rPr>
-              <a:t>Use this for</a:t>
+              <a:t>How to validate</a:t>
             </a:r>
             <a:endParaRPr lang="en-US" sz="1300" dirty="0"/>
           </a:p>
@@ -7975,14 +9127,14 @@
       </p:sp>
       <p:sp>
         <p:nvSpPr>
-          <p:cNvPr id="17" name="Text 15"/>
-          <p:cNvSpPr/>
-          <p:nvPr/>
-        </p:nvSpPr>
-        <p:spPr>
-          <a:xfrm>
-            <a:off x="8074152" y="4023360"/>
-            <a:ext cx="2825496" cy="1097280"/>
+          <p:cNvPr id="22" name="Text 20"/>
+          <p:cNvSpPr/>
+          <p:nvPr/>
+        </p:nvSpPr>
+        <p:spPr>
+          <a:xfrm>
+            <a:off x="7799832" y="5001768"/>
+            <a:ext cx="3145536" cy="502920"/>
           </a:xfrm>
           <a:prstGeom prst="rect">
             <a:avLst/>
@@ -8008,7 +9160,7 @@
                 <a:ea typeface="Aptos" pitchFamily="34" charset="-122"/>
                 <a:cs typeface="Aptos" pitchFamily="34" charset="-120"/>
               </a:rPr>
-              <a:t>Connect the concept to public health decisions, safeguards, documentation, or implementation work.</a:t>
+              <a:t>Connect the concept to data quality, model performance, validation evidence, monitoring measures, and decisions that remain under human control.</a:t>
             </a:r>
             <a:endParaRPr lang="en-US" sz="1550" dirty="0"/>
           </a:p>
@@ -8182,8 +9334,8 @@
         </p:nvSpPr>
         <p:spPr>
           <a:xfrm>
-            <a:off x="9966960" y="6537960"/>
-            <a:ext cx="1645920" cy="201168"/>
+            <a:off x="9646920" y="6537960"/>
+            <a:ext cx="1965960" cy="201168"/>
           </a:xfrm>
           <a:prstGeom prst="rect">
             <a:avLst/>
@@ -8207,7 +9359,7 @@
                 <a:ea typeface="Aptos" pitchFamily="34" charset="-122"/>
                 <a:cs typeface="Aptos" pitchFamily="34" charset="-120"/>
               </a:rPr>
-              <a:t>Â© Paula Soper</a:t>
+              <a:t>Copyright Paula Soper</a:t>
             </a:r>
             <a:endParaRPr lang="en-US" sz="800" dirty="0"/>
           </a:p>
@@ -8302,7 +9454,7 @@
         <p:spPr>
           <a:xfrm>
             <a:off x="868680" y="1508760"/>
-            <a:ext cx="6537960" cy="4160520"/>
+            <a:ext cx="6309360" cy="4160520"/>
           </a:xfrm>
           <a:prstGeom prst="rect">
             <a:avLst/>
@@ -8367,12 +9519,12 @@
         </p:nvSpPr>
         <p:spPr>
           <a:xfrm>
-            <a:off x="7909560" y="1417320"/>
-            <a:ext cx="3154680" cy="1828800"/>
+            <a:off x="7635240" y="1325880"/>
+            <a:ext cx="3474720" cy="1325880"/>
           </a:xfrm>
           <a:prstGeom prst="roundRect">
             <a:avLst>
-              <a:gd name="adj" fmla="val 6000"/>
+              <a:gd name="adj" fmla="val 8276"/>
             </a:avLst>
           </a:prstGeom>
           <a:solidFill>
@@ -8394,8 +9546,8 @@
         </p:nvSpPr>
         <p:spPr>
           <a:xfrm>
-            <a:off x="8074152" y="1563624"/>
-            <a:ext cx="2825496" cy="256032"/>
+            <a:off x="7799832" y="1472184"/>
+            <a:ext cx="3145536" cy="256032"/>
           </a:xfrm>
           <a:prstGeom prst="rect">
             <a:avLst/>
@@ -8419,7 +9571,7 @@
                 <a:ea typeface="Aptos" pitchFamily="34" charset="-122"/>
                 <a:cs typeface="Aptos" pitchFamily="34" charset="-120"/>
               </a:rPr>
-              <a:t>Key idea</a:t>
+              <a:t>Data decision</a:t>
             </a:r>
             <a:endParaRPr lang="en-US" sz="1300" dirty="0"/>
           </a:p>
@@ -8433,8 +9585,8 @@
         </p:nvSpPr>
         <p:spPr>
           <a:xfrm>
-            <a:off x="8074152" y="1920240"/>
-            <a:ext cx="2825496" cy="1188720"/>
+            <a:off x="7799832" y="1828800"/>
+            <a:ext cx="3145536" cy="685800"/>
           </a:xfrm>
           <a:prstGeom prst="rect">
             <a:avLst/>
@@ -8474,15 +9626,206 @@
         </p:nvSpPr>
         <p:spPr>
           <a:xfrm>
-            <a:off x="7909560" y="3520440"/>
-            <a:ext cx="3154680" cy="1737360"/>
+            <a:off x="7635240" y="2788920"/>
+            <a:ext cx="3474720" cy="1536192"/>
           </a:xfrm>
           <a:prstGeom prst="roundRect">
             <a:avLst>
-              <a:gd name="adj" fmla="val 6316"/>
+              <a:gd name="adj" fmla="val 7143"/>
             </a:avLst>
           </a:prstGeom>
           <a:solidFill>
+            <a:srgbClr val="FFFFFF">
+              <a:alpha val="88000"/>
+            </a:srgbClr>
+          </a:solidFill>
+          <a:ln w="12700">
+            <a:solidFill>
+              <a:srgbClr val="D6E8F2"/>
+            </a:solidFill>
+            <a:prstDash val="solid"/>
+          </a:ln>
+        </p:spPr>
+      </p:sp>
+      <p:sp>
+        <p:nvSpPr>
+          <p:cNvPr id="14" name="Shape 12"/>
+          <p:cNvSpPr/>
+          <p:nvPr/>
+        </p:nvSpPr>
+        <p:spPr>
+          <a:xfrm>
+            <a:off x="8138160" y="3474720"/>
+            <a:ext cx="256032" cy="411480"/>
+          </a:xfrm>
+          <a:prstGeom prst="rect">
+            <a:avLst/>
+          </a:prstGeom>
+          <a:solidFill>
+            <a:srgbClr val="0068B7"/>
+          </a:solidFill>
+          <a:ln w="12700">
+            <a:solidFill>
+              <a:srgbClr val="0068B7"/>
+            </a:solidFill>
+            <a:prstDash val="solid"/>
+          </a:ln>
+        </p:spPr>
+      </p:sp>
+      <p:sp>
+        <p:nvSpPr>
+          <p:cNvPr id="15" name="Shape 13"/>
+          <p:cNvSpPr/>
+          <p:nvPr/>
+        </p:nvSpPr>
+        <p:spPr>
+          <a:xfrm>
+            <a:off x="8577072" y="3172968"/>
+            <a:ext cx="256032" cy="713232"/>
+          </a:xfrm>
+          <a:prstGeom prst="rect">
+            <a:avLst/>
+          </a:prstGeom>
+          <a:solidFill>
+            <a:srgbClr val="2F8A28"/>
+          </a:solidFill>
+          <a:ln w="12700">
+            <a:solidFill>
+              <a:srgbClr val="2F8A28"/>
+            </a:solidFill>
+            <a:prstDash val="solid"/>
+          </a:ln>
+        </p:spPr>
+      </p:sp>
+      <p:sp>
+        <p:nvSpPr>
+          <p:cNvPr id="16" name="Shape 14"/>
+          <p:cNvSpPr/>
+          <p:nvPr/>
+        </p:nvSpPr>
+        <p:spPr>
+          <a:xfrm>
+            <a:off x="9015984" y="2880360"/>
+            <a:ext cx="256032" cy="1005840"/>
+          </a:xfrm>
+          <a:prstGeom prst="rect">
+            <a:avLst/>
+          </a:prstGeom>
+          <a:solidFill>
+            <a:srgbClr val="D69A2D"/>
+          </a:solidFill>
+          <a:ln w="12700">
+            <a:solidFill>
+              <a:srgbClr val="D69A2D"/>
+            </a:solidFill>
+            <a:prstDash val="solid"/>
+          </a:ln>
+        </p:spPr>
+      </p:sp>
+      <p:sp>
+        <p:nvSpPr>
+          <p:cNvPr id="17" name="Shape 15"/>
+          <p:cNvSpPr/>
+          <p:nvPr/>
+        </p:nvSpPr>
+        <p:spPr>
+          <a:xfrm>
+            <a:off x="9454896" y="3319272"/>
+            <a:ext cx="256032" cy="566928"/>
+          </a:xfrm>
+          <a:prstGeom prst="rect">
+            <a:avLst/>
+          </a:prstGeom>
+          <a:solidFill>
+            <a:srgbClr val="6A4CA3"/>
+          </a:solidFill>
+          <a:ln w="12700">
+            <a:solidFill>
+              <a:srgbClr val="6A4CA3"/>
+            </a:solidFill>
+            <a:prstDash val="solid"/>
+          </a:ln>
+        </p:spPr>
+      </p:sp>
+      <p:sp>
+        <p:nvSpPr>
+          <p:cNvPr id="18" name="Shape 16"/>
+          <p:cNvSpPr/>
+          <p:nvPr/>
+        </p:nvSpPr>
+        <p:spPr>
+          <a:xfrm>
+            <a:off x="8019288" y="3886200"/>
+            <a:ext cx="2706624" cy="0"/>
+          </a:xfrm>
+          <a:prstGeom prst="line">
+            <a:avLst/>
+          </a:prstGeom>
+          <a:noFill/>
+          <a:ln w="15240">
+            <a:solidFill>
+              <a:srgbClr val="003A63"/>
+            </a:solidFill>
+            <a:prstDash val="solid"/>
+          </a:ln>
+        </p:spPr>
+      </p:sp>
+      <p:sp>
+        <p:nvSpPr>
+          <p:cNvPr id="19" name="Text 17"/>
+          <p:cNvSpPr/>
+          <p:nvPr/>
+        </p:nvSpPr>
+        <p:spPr>
+          <a:xfrm>
+            <a:off x="7863840" y="3017520"/>
+            <a:ext cx="3017520" cy="201168"/>
+          </a:xfrm>
+          <a:prstGeom prst="rect">
+            <a:avLst/>
+          </a:prstGeom>
+          <a:noFill/>
+          <a:ln/>
+        </p:spPr>
+        <p:txBody>
+          <a:bodyPr wrap="square" lIns="0" tIns="0" rIns="0" bIns="0" rtlCol="0" anchor="ctr"/>
+          <a:lstStyle/>
+          <a:p>
+            <a:pPr algn="ctr" indent="0" marL="0">
+              <a:buNone/>
+            </a:pPr>
+            <a:r>
+              <a:rPr lang="en-US" sz="1050" b="1" dirty="0">
+                <a:solidFill>
+                  <a:srgbClr val="003A63"/>
+                </a:solidFill>
+                <a:latin typeface="Aptos" pitchFamily="34" charset="0"/>
+                <a:ea typeface="Aptos" pitchFamily="34" charset="-122"/>
+                <a:cs typeface="Aptos" pitchFamily="34" charset="-120"/>
+              </a:rPr>
+              <a:t>Measure and monitor</a:t>
+            </a:r>
+            <a:endParaRPr lang="en-US" sz="1050" dirty="0"/>
+          </a:p>
+        </p:txBody>
+      </p:sp>
+      <p:sp>
+        <p:nvSpPr>
+          <p:cNvPr id="20" name="Shape 18"/>
+          <p:cNvSpPr/>
+          <p:nvPr/>
+        </p:nvSpPr>
+        <p:spPr>
+          <a:xfrm>
+            <a:off x="7635240" y="4498848"/>
+            <a:ext cx="3474720" cy="1143000"/>
+          </a:xfrm>
+          <a:prstGeom prst="roundRect">
+            <a:avLst>
+              <a:gd name="adj" fmla="val 9600"/>
+            </a:avLst>
+          </a:prstGeom>
+          <a:solidFill>
             <a:srgbClr val="EAF6F8"/>
           </a:solidFill>
           <a:ln w="12700">
@@ -8495,14 +9838,14 @@
       </p:sp>
       <p:sp>
         <p:nvSpPr>
-          <p:cNvPr id="14" name="Text 12"/>
-          <p:cNvSpPr/>
-          <p:nvPr/>
-        </p:nvSpPr>
-        <p:spPr>
-          <a:xfrm>
-            <a:off x="8074152" y="3666744"/>
-            <a:ext cx="2825496" cy="256032"/>
+          <p:cNvPr id="21" name="Text 19"/>
+          <p:cNvSpPr/>
+          <p:nvPr/>
+        </p:nvSpPr>
+        <p:spPr>
+          <a:xfrm>
+            <a:off x="7799832" y="4645152"/>
+            <a:ext cx="3145536" cy="256032"/>
           </a:xfrm>
           <a:prstGeom prst="rect">
             <a:avLst/>
@@ -8526,7 +9869,7 @@
                 <a:ea typeface="Aptos" pitchFamily="34" charset="-122"/>
                 <a:cs typeface="Aptos" pitchFamily="34" charset="-120"/>
               </a:rPr>
-              <a:t>Use this for</a:t>
+              <a:t>How to validate</a:t>
             </a:r>
             <a:endParaRPr lang="en-US" sz="1300" dirty="0"/>
           </a:p>
@@ -8534,14 +9877,14 @@
       </p:sp>
       <p:sp>
         <p:nvSpPr>
-          <p:cNvPr id="15" name="Text 13"/>
-          <p:cNvSpPr/>
-          <p:nvPr/>
-        </p:nvSpPr>
-        <p:spPr>
-          <a:xfrm>
-            <a:off x="8074152" y="4023360"/>
-            <a:ext cx="2825496" cy="1097280"/>
+          <p:cNvPr id="22" name="Text 20"/>
+          <p:cNvSpPr/>
+          <p:nvPr/>
+        </p:nvSpPr>
+        <p:spPr>
+          <a:xfrm>
+            <a:off x="7799832" y="5001768"/>
+            <a:ext cx="3145536" cy="502920"/>
           </a:xfrm>
           <a:prstGeom prst="rect">
             <a:avLst/>
@@ -8567,7 +9910,7 @@
                 <a:ea typeface="Aptos" pitchFamily="34" charset="-122"/>
                 <a:cs typeface="Aptos" pitchFamily="34" charset="-120"/>
               </a:rPr>
-              <a:t>Connect the concept to public health decisions, safeguards, documentation, or implementation work.</a:t>
+              <a:t>Connect the concept to data quality, model performance, validation evidence, monitoring measures, and decisions that remain under human control.</a:t>
             </a:r>
             <a:endParaRPr lang="en-US" sz="1550" dirty="0"/>
           </a:p>
@@ -8741,8 +10084,8 @@
         </p:nvSpPr>
         <p:spPr>
           <a:xfrm>
-            <a:off x="9966960" y="6537960"/>
-            <a:ext cx="1645920" cy="201168"/>
+            <a:off x="9646920" y="6537960"/>
+            <a:ext cx="1965960" cy="201168"/>
           </a:xfrm>
           <a:prstGeom prst="rect">
             <a:avLst/>
@@ -8766,7 +10109,7 @@
                 <a:ea typeface="Aptos" pitchFamily="34" charset="-122"/>
                 <a:cs typeface="Aptos" pitchFamily="34" charset="-120"/>
               </a:rPr>
-              <a:t>Â© Paula Soper</a:t>
+              <a:t>Copyright Paula Soper</a:t>
             </a:r>
             <a:endParaRPr lang="en-US" sz="800" dirty="0"/>
           </a:p>
@@ -8813,77 +10156,13 @@
       </p:sp>
       <p:sp>
         <p:nvSpPr>
-          <p:cNvPr id="8" name="Shape 6"/>
+          <p:cNvPr id="8" name="Text 6"/>
           <p:cNvSpPr/>
           <p:nvPr/>
         </p:nvSpPr>
         <p:spPr>
           <a:xfrm>
             <a:off x="640080" y="658368"/>
-            <a:ext cx="420624" cy="420624"/>
-          </a:xfrm>
-          <a:prstGeom prst="ellipse">
-            <a:avLst/>
-          </a:prstGeom>
-          <a:solidFill>
-            <a:srgbClr val="0068B7"/>
-          </a:solidFill>
-          <a:ln w="12700">
-            <a:solidFill>
-              <a:srgbClr val="0068B7"/>
-            </a:solidFill>
-            <a:prstDash val="solid"/>
-          </a:ln>
-        </p:spPr>
-      </p:sp>
-      <p:sp>
-        <p:nvSpPr>
-          <p:cNvPr id="9" name="Text 7"/>
-          <p:cNvSpPr/>
-          <p:nvPr/>
-        </p:nvSpPr>
-        <p:spPr>
-          <a:xfrm>
-            <a:off x="640080" y="731520"/>
-            <a:ext cx="420624" cy="164592"/>
-          </a:xfrm>
-          <a:prstGeom prst="rect">
-            <a:avLst/>
-          </a:prstGeom>
-          <a:noFill/>
-          <a:ln/>
-        </p:spPr>
-        <p:txBody>
-          <a:bodyPr wrap="square" lIns="0" tIns="0" rIns="0" bIns="0" rtlCol="0" anchor="ctr"/>
-          <a:lstStyle/>
-          <a:p>
-            <a:pPr algn="ctr" indent="0" marL="0">
-              <a:buNone/>
-            </a:pPr>
-            <a:r>
-              <a:rPr lang="en-US" sz="1100" b="1" dirty="0">
-                <a:solidFill>
-                  <a:srgbClr val="FFFFFF"/>
-                </a:solidFill>
-                <a:latin typeface="Aptos" pitchFamily="34" charset="0"/>
-                <a:ea typeface="Aptos" pitchFamily="34" charset="-122"/>
-                <a:cs typeface="Aptos" pitchFamily="34" charset="-120"/>
-              </a:rPr>
-              <a:t>10</a:t>
-            </a:r>
-            <a:endParaRPr lang="en-US" sz="1100" dirty="0"/>
-          </a:p>
-        </p:txBody>
-      </p:sp>
-      <p:sp>
-        <p:nvSpPr>
-          <p:cNvPr id="10" name="Text 8"/>
-          <p:cNvSpPr/>
-          <p:nvPr/>
-        </p:nvSpPr>
-        <p:spPr>
-          <a:xfrm>
-            <a:off x="640080" y="621792"/>
             <a:ext cx="10881360" cy="713232"/>
           </a:xfrm>
           <a:prstGeom prst="rect">
@@ -8918,14 +10197,14 @@
       </p:sp>
       <p:sp>
         <p:nvSpPr>
-          <p:cNvPr id="11" name="Text 9"/>
+          <p:cNvPr id="9" name="Text 7"/>
           <p:cNvSpPr/>
           <p:nvPr/>
         </p:nvSpPr>
         <p:spPr>
           <a:xfrm>
             <a:off x="868680" y="1508760"/>
-            <a:ext cx="6537960" cy="4160520"/>
+            <a:ext cx="6309360" cy="4160520"/>
           </a:xfrm>
           <a:prstGeom prst="rect">
             <a:avLst/>
@@ -8984,18 +10263,18 @@
       </p:sp>
       <p:sp>
         <p:nvSpPr>
-          <p:cNvPr id="12" name="Shape 10"/>
-          <p:cNvSpPr/>
-          <p:nvPr/>
-        </p:nvSpPr>
-        <p:spPr>
-          <a:xfrm>
-            <a:off x="7909560" y="1417320"/>
-            <a:ext cx="3154680" cy="1828800"/>
+          <p:cNvPr id="10" name="Shape 8"/>
+          <p:cNvSpPr/>
+          <p:nvPr/>
+        </p:nvSpPr>
+        <p:spPr>
+          <a:xfrm>
+            <a:off x="7635240" y="1325880"/>
+            <a:ext cx="3474720" cy="1325880"/>
           </a:xfrm>
           <a:prstGeom prst="roundRect">
             <a:avLst>
-              <a:gd name="adj" fmla="val 6000"/>
+              <a:gd name="adj" fmla="val 8276"/>
             </a:avLst>
           </a:prstGeom>
           <a:solidFill>
@@ -9011,14 +10290,14 @@
       </p:sp>
       <p:sp>
         <p:nvSpPr>
-          <p:cNvPr id="13" name="Text 11"/>
-          <p:cNvSpPr/>
-          <p:nvPr/>
-        </p:nvSpPr>
-        <p:spPr>
-          <a:xfrm>
-            <a:off x="8074152" y="1563624"/>
-            <a:ext cx="2825496" cy="256032"/>
+          <p:cNvPr id="11" name="Text 9"/>
+          <p:cNvSpPr/>
+          <p:nvPr/>
+        </p:nvSpPr>
+        <p:spPr>
+          <a:xfrm>
+            <a:off x="7799832" y="1472184"/>
+            <a:ext cx="3145536" cy="256032"/>
           </a:xfrm>
           <a:prstGeom prst="rect">
             <a:avLst/>
@@ -9042,7 +10321,7 @@
                 <a:ea typeface="Aptos" pitchFamily="34" charset="-122"/>
                 <a:cs typeface="Aptos" pitchFamily="34" charset="-120"/>
               </a:rPr>
-              <a:t>Key idea</a:t>
+              <a:t>Data decision</a:t>
             </a:r>
             <a:endParaRPr lang="en-US" sz="1300" dirty="0"/>
           </a:p>
@@ -9050,14 +10329,14 @@
       </p:sp>
       <p:sp>
         <p:nvSpPr>
-          <p:cNvPr id="14" name="Text 12"/>
-          <p:cNvSpPr/>
-          <p:nvPr/>
-        </p:nvSpPr>
-        <p:spPr>
-          <a:xfrm>
-            <a:off x="8074152" y="1920240"/>
-            <a:ext cx="2825496" cy="1188720"/>
+          <p:cNvPr id="12" name="Text 10"/>
+          <p:cNvSpPr/>
+          <p:nvPr/>
+        </p:nvSpPr>
+        <p:spPr>
+          <a:xfrm>
+            <a:off x="7799832" y="1828800"/>
+            <a:ext cx="3145536" cy="685800"/>
           </a:xfrm>
           <a:prstGeom prst="rect">
             <a:avLst/>
@@ -9091,21 +10370,212 @@
       </p:sp>
       <p:sp>
         <p:nvSpPr>
-          <p:cNvPr id="15" name="Shape 13"/>
-          <p:cNvSpPr/>
-          <p:nvPr/>
-        </p:nvSpPr>
-        <p:spPr>
-          <a:xfrm>
-            <a:off x="7909560" y="3520440"/>
-            <a:ext cx="3154680" cy="1737360"/>
+          <p:cNvPr id="13" name="Shape 11"/>
+          <p:cNvSpPr/>
+          <p:nvPr/>
+        </p:nvSpPr>
+        <p:spPr>
+          <a:xfrm>
+            <a:off x="7635240" y="2788920"/>
+            <a:ext cx="3474720" cy="1536192"/>
           </a:xfrm>
           <a:prstGeom prst="roundRect">
             <a:avLst>
-              <a:gd name="adj" fmla="val 6316"/>
+              <a:gd name="adj" fmla="val 7143"/>
             </a:avLst>
           </a:prstGeom>
           <a:solidFill>
+            <a:srgbClr val="FFFFFF">
+              <a:alpha val="88000"/>
+            </a:srgbClr>
+          </a:solidFill>
+          <a:ln w="12700">
+            <a:solidFill>
+              <a:srgbClr val="D6E8F2"/>
+            </a:solidFill>
+            <a:prstDash val="solid"/>
+          </a:ln>
+        </p:spPr>
+      </p:sp>
+      <p:sp>
+        <p:nvSpPr>
+          <p:cNvPr id="14" name="Shape 12"/>
+          <p:cNvSpPr/>
+          <p:nvPr/>
+        </p:nvSpPr>
+        <p:spPr>
+          <a:xfrm>
+            <a:off x="8138160" y="3474720"/>
+            <a:ext cx="256032" cy="411480"/>
+          </a:xfrm>
+          <a:prstGeom prst="rect">
+            <a:avLst/>
+          </a:prstGeom>
+          <a:solidFill>
+            <a:srgbClr val="0068B7"/>
+          </a:solidFill>
+          <a:ln w="12700">
+            <a:solidFill>
+              <a:srgbClr val="0068B7"/>
+            </a:solidFill>
+            <a:prstDash val="solid"/>
+          </a:ln>
+        </p:spPr>
+      </p:sp>
+      <p:sp>
+        <p:nvSpPr>
+          <p:cNvPr id="15" name="Shape 13"/>
+          <p:cNvSpPr/>
+          <p:nvPr/>
+        </p:nvSpPr>
+        <p:spPr>
+          <a:xfrm>
+            <a:off x="8577072" y="3172968"/>
+            <a:ext cx="256032" cy="713232"/>
+          </a:xfrm>
+          <a:prstGeom prst="rect">
+            <a:avLst/>
+          </a:prstGeom>
+          <a:solidFill>
+            <a:srgbClr val="2F8A28"/>
+          </a:solidFill>
+          <a:ln w="12700">
+            <a:solidFill>
+              <a:srgbClr val="2F8A28"/>
+            </a:solidFill>
+            <a:prstDash val="solid"/>
+          </a:ln>
+        </p:spPr>
+      </p:sp>
+      <p:sp>
+        <p:nvSpPr>
+          <p:cNvPr id="16" name="Shape 14"/>
+          <p:cNvSpPr/>
+          <p:nvPr/>
+        </p:nvSpPr>
+        <p:spPr>
+          <a:xfrm>
+            <a:off x="9015984" y="2880360"/>
+            <a:ext cx="256032" cy="1005840"/>
+          </a:xfrm>
+          <a:prstGeom prst="rect">
+            <a:avLst/>
+          </a:prstGeom>
+          <a:solidFill>
+            <a:srgbClr val="D69A2D"/>
+          </a:solidFill>
+          <a:ln w="12700">
+            <a:solidFill>
+              <a:srgbClr val="D69A2D"/>
+            </a:solidFill>
+            <a:prstDash val="solid"/>
+          </a:ln>
+        </p:spPr>
+      </p:sp>
+      <p:sp>
+        <p:nvSpPr>
+          <p:cNvPr id="17" name="Shape 15"/>
+          <p:cNvSpPr/>
+          <p:nvPr/>
+        </p:nvSpPr>
+        <p:spPr>
+          <a:xfrm>
+            <a:off x="9454896" y="3319272"/>
+            <a:ext cx="256032" cy="566928"/>
+          </a:xfrm>
+          <a:prstGeom prst="rect">
+            <a:avLst/>
+          </a:prstGeom>
+          <a:solidFill>
+            <a:srgbClr val="6A4CA3"/>
+          </a:solidFill>
+          <a:ln w="12700">
+            <a:solidFill>
+              <a:srgbClr val="6A4CA3"/>
+            </a:solidFill>
+            <a:prstDash val="solid"/>
+          </a:ln>
+        </p:spPr>
+      </p:sp>
+      <p:sp>
+        <p:nvSpPr>
+          <p:cNvPr id="18" name="Shape 16"/>
+          <p:cNvSpPr/>
+          <p:nvPr/>
+        </p:nvSpPr>
+        <p:spPr>
+          <a:xfrm>
+            <a:off x="8019288" y="3886200"/>
+            <a:ext cx="2706624" cy="0"/>
+          </a:xfrm>
+          <a:prstGeom prst="line">
+            <a:avLst/>
+          </a:prstGeom>
+          <a:noFill/>
+          <a:ln w="15240">
+            <a:solidFill>
+              <a:srgbClr val="003A63"/>
+            </a:solidFill>
+            <a:prstDash val="solid"/>
+          </a:ln>
+        </p:spPr>
+      </p:sp>
+      <p:sp>
+        <p:nvSpPr>
+          <p:cNvPr id="19" name="Text 17"/>
+          <p:cNvSpPr/>
+          <p:nvPr/>
+        </p:nvSpPr>
+        <p:spPr>
+          <a:xfrm>
+            <a:off x="7863840" y="3017520"/>
+            <a:ext cx="3017520" cy="201168"/>
+          </a:xfrm>
+          <a:prstGeom prst="rect">
+            <a:avLst/>
+          </a:prstGeom>
+          <a:noFill/>
+          <a:ln/>
+        </p:spPr>
+        <p:txBody>
+          <a:bodyPr wrap="square" lIns="0" tIns="0" rIns="0" bIns="0" rtlCol="0" anchor="ctr"/>
+          <a:lstStyle/>
+          <a:p>
+            <a:pPr algn="ctr" indent="0" marL="0">
+              <a:buNone/>
+            </a:pPr>
+            <a:r>
+              <a:rPr lang="en-US" sz="1050" b="1" dirty="0">
+                <a:solidFill>
+                  <a:srgbClr val="003A63"/>
+                </a:solidFill>
+                <a:latin typeface="Aptos" pitchFamily="34" charset="0"/>
+                <a:ea typeface="Aptos" pitchFamily="34" charset="-122"/>
+                <a:cs typeface="Aptos" pitchFamily="34" charset="-120"/>
+              </a:rPr>
+              <a:t>Measure and monitor</a:t>
+            </a:r>
+            <a:endParaRPr lang="en-US" sz="1050" dirty="0"/>
+          </a:p>
+        </p:txBody>
+      </p:sp>
+      <p:sp>
+        <p:nvSpPr>
+          <p:cNvPr id="20" name="Shape 18"/>
+          <p:cNvSpPr/>
+          <p:nvPr/>
+        </p:nvSpPr>
+        <p:spPr>
+          <a:xfrm>
+            <a:off x="7635240" y="4498848"/>
+            <a:ext cx="3474720" cy="1143000"/>
+          </a:xfrm>
+          <a:prstGeom prst="roundRect">
+            <a:avLst>
+              <a:gd name="adj" fmla="val 9600"/>
+            </a:avLst>
+          </a:prstGeom>
+          <a:solidFill>
             <a:srgbClr val="EAF6F8"/>
           </a:solidFill>
           <a:ln w="12700">
@@ -9118,14 +10588,14 @@
       </p:sp>
       <p:sp>
         <p:nvSpPr>
-          <p:cNvPr id="16" name="Text 14"/>
-          <p:cNvSpPr/>
-          <p:nvPr/>
-        </p:nvSpPr>
-        <p:spPr>
-          <a:xfrm>
-            <a:off x="8074152" y="3666744"/>
-            <a:ext cx="2825496" cy="256032"/>
+          <p:cNvPr id="21" name="Text 19"/>
+          <p:cNvSpPr/>
+          <p:nvPr/>
+        </p:nvSpPr>
+        <p:spPr>
+          <a:xfrm>
+            <a:off x="7799832" y="4645152"/>
+            <a:ext cx="3145536" cy="256032"/>
           </a:xfrm>
           <a:prstGeom prst="rect">
             <a:avLst/>
@@ -9149,7 +10619,7 @@
                 <a:ea typeface="Aptos" pitchFamily="34" charset="-122"/>
                 <a:cs typeface="Aptos" pitchFamily="34" charset="-120"/>
               </a:rPr>
-              <a:t>Use this for</a:t>
+              <a:t>How to validate</a:t>
             </a:r>
             <a:endParaRPr lang="en-US" sz="1300" dirty="0"/>
           </a:p>
@@ -9157,14 +10627,14 @@
       </p:sp>
       <p:sp>
         <p:nvSpPr>
-          <p:cNvPr id="17" name="Text 15"/>
-          <p:cNvSpPr/>
-          <p:nvPr/>
-        </p:nvSpPr>
-        <p:spPr>
-          <a:xfrm>
-            <a:off x="8074152" y="4023360"/>
-            <a:ext cx="2825496" cy="1097280"/>
+          <p:cNvPr id="22" name="Text 20"/>
+          <p:cNvSpPr/>
+          <p:nvPr/>
+        </p:nvSpPr>
+        <p:spPr>
+          <a:xfrm>
+            <a:off x="7799832" y="5001768"/>
+            <a:ext cx="3145536" cy="502920"/>
           </a:xfrm>
           <a:prstGeom prst="rect">
             <a:avLst/>
@@ -9190,7 +10660,7 @@
                 <a:ea typeface="Aptos" pitchFamily="34" charset="-122"/>
                 <a:cs typeface="Aptos" pitchFamily="34" charset="-120"/>
               </a:rPr>
-              <a:t>Connect the concept to public health decisions, safeguards, documentation, or implementation work.</a:t>
+              <a:t>Use the assignment to test whether you can explain the concept, apply it to a realistic public health situation, and identify what would need review before the work moves forward.</a:t>
             </a:r>
             <a:endParaRPr lang="en-US" sz="1550" dirty="0"/>
           </a:p>
@@ -9364,8 +10834,8 @@
         </p:nvSpPr>
         <p:spPr>
           <a:xfrm>
-            <a:off x="9966960" y="6537960"/>
-            <a:ext cx="1645920" cy="201168"/>
+            <a:off x="9646920" y="6537960"/>
+            <a:ext cx="1965960" cy="201168"/>
           </a:xfrm>
           <a:prstGeom prst="rect">
             <a:avLst/>
@@ -9389,7 +10859,7 @@
                 <a:ea typeface="Aptos" pitchFamily="34" charset="-122"/>
                 <a:cs typeface="Aptos" pitchFamily="34" charset="-120"/>
               </a:rPr>
-              <a:t>Â© Paula Soper</a:t>
+              <a:t>Copyright Paula Soper</a:t>
             </a:r>
             <a:endParaRPr lang="en-US" sz="800" dirty="0"/>
           </a:p>
@@ -9752,46 +11222,7 @@
       </p:sp>
       <p:sp>
         <p:nvSpPr>
-          <p:cNvPr id="15" name="Text 13"/>
-          <p:cNvSpPr/>
-          <p:nvPr/>
-        </p:nvSpPr>
-        <p:spPr>
-          <a:xfrm>
-            <a:off x="8695944" y="3941064"/>
-            <a:ext cx="201168" cy="256032"/>
-          </a:xfrm>
-          <a:prstGeom prst="rect">
-            <a:avLst/>
-          </a:prstGeom>
-          <a:noFill/>
-          <a:ln/>
-        </p:spPr>
-        <p:txBody>
-          <a:bodyPr wrap="square" lIns="0" tIns="0" rIns="0" bIns="0" rtlCol="0" anchor="ctr"/>
-          <a:lstStyle/>
-          <a:p>
-            <a:pPr algn="ctr" indent="0" marL="0">
-              <a:buNone/>
-            </a:pPr>
-            <a:r>
-              <a:rPr lang="en-US" sz="1800" b="1" dirty="0">
-                <a:solidFill>
-                  <a:srgbClr val="0068B7"/>
-                </a:solidFill>
-                <a:latin typeface="Aptos" pitchFamily="34" charset="0"/>
-                <a:ea typeface="Aptos" pitchFamily="34" charset="-122"/>
-                <a:cs typeface="Aptos" pitchFamily="34" charset="-120"/>
-              </a:rPr>
-              <a:t>â†’</a:t>
-            </a:r>
-            <a:endParaRPr lang="en-US" sz="1800" dirty="0"/>
-          </a:p>
-        </p:txBody>
-      </p:sp>
-      <p:sp>
-        <p:nvSpPr>
-          <p:cNvPr id="16" name="Shape 14"/>
+          <p:cNvPr id="15" name="Shape 13"/>
           <p:cNvSpPr/>
           <p:nvPr/>
         </p:nvSpPr>
@@ -9818,7 +11249,7 @@
       </p:sp>
       <p:sp>
         <p:nvSpPr>
-          <p:cNvPr id="17" name="Text 15"/>
+          <p:cNvPr id="16" name="Text 14"/>
           <p:cNvSpPr/>
           <p:nvPr/>
         </p:nvSpPr>
@@ -9859,46 +11290,7 @@
       </p:sp>
       <p:sp>
         <p:nvSpPr>
-          <p:cNvPr id="18" name="Text 16"/>
-          <p:cNvSpPr/>
-          <p:nvPr/>
-        </p:nvSpPr>
-        <p:spPr>
-          <a:xfrm>
-            <a:off x="9985248" y="3941064"/>
-            <a:ext cx="201168" cy="256032"/>
-          </a:xfrm>
-          <a:prstGeom prst="rect">
-            <a:avLst/>
-          </a:prstGeom>
-          <a:noFill/>
-          <a:ln/>
-        </p:spPr>
-        <p:txBody>
-          <a:bodyPr wrap="square" lIns="0" tIns="0" rIns="0" bIns="0" rtlCol="0" anchor="ctr"/>
-          <a:lstStyle/>
-          <a:p>
-            <a:pPr algn="ctr" indent="0" marL="0">
-              <a:buNone/>
-            </a:pPr>
-            <a:r>
-              <a:rPr lang="en-US" sz="1800" b="1" dirty="0">
-                <a:solidFill>
-                  <a:srgbClr val="0068B7"/>
-                </a:solidFill>
-                <a:latin typeface="Aptos" pitchFamily="34" charset="0"/>
-                <a:ea typeface="Aptos" pitchFamily="34" charset="-122"/>
-                <a:cs typeface="Aptos" pitchFamily="34" charset="-120"/>
-              </a:rPr>
-              <a:t>â†’</a:t>
-            </a:r>
-            <a:endParaRPr lang="en-US" sz="1800" dirty="0"/>
-          </a:p>
-        </p:txBody>
-      </p:sp>
-      <p:sp>
-        <p:nvSpPr>
-          <p:cNvPr id="19" name="Shape 17"/>
+          <p:cNvPr id="17" name="Shape 15"/>
           <p:cNvSpPr/>
           <p:nvPr/>
         </p:nvSpPr>
@@ -9925,7 +11317,7 @@
       </p:sp>
       <p:sp>
         <p:nvSpPr>
-          <p:cNvPr id="20" name="Text 18"/>
+          <p:cNvPr id="18" name="Text 16"/>
           <p:cNvSpPr/>
           <p:nvPr/>
         </p:nvSpPr>
@@ -10132,8 +11524,8 @@
         </p:nvSpPr>
         <p:spPr>
           <a:xfrm>
-            <a:off x="9966960" y="6537960"/>
-            <a:ext cx="1645920" cy="201168"/>
+            <a:off x="9646920" y="6537960"/>
+            <a:ext cx="1965960" cy="201168"/>
           </a:xfrm>
           <a:prstGeom prst="rect">
             <a:avLst/>
@@ -10157,7 +11549,7 @@
                 <a:ea typeface="Aptos" pitchFamily="34" charset="-122"/>
                 <a:cs typeface="Aptos" pitchFamily="34" charset="-120"/>
               </a:rPr>
-              <a:t>Â© Paula Soper</a:t>
+              <a:t>Copyright Paula Soper</a:t>
             </a:r>
             <a:endParaRPr lang="en-US" sz="800" dirty="0"/>
           </a:p>
@@ -10204,77 +11596,13 @@
       </p:sp>
       <p:sp>
         <p:nvSpPr>
-          <p:cNvPr id="8" name="Shape 6"/>
+          <p:cNvPr id="8" name="Text 6"/>
           <p:cNvSpPr/>
           <p:nvPr/>
         </p:nvSpPr>
         <p:spPr>
           <a:xfrm>
             <a:off x="640080" y="658368"/>
-            <a:ext cx="420624" cy="420624"/>
-          </a:xfrm>
-          <a:prstGeom prst="ellipse">
-            <a:avLst/>
-          </a:prstGeom>
-          <a:solidFill>
-            <a:srgbClr val="0068B7"/>
-          </a:solidFill>
-          <a:ln w="12700">
-            <a:solidFill>
-              <a:srgbClr val="0068B7"/>
-            </a:solidFill>
-            <a:prstDash val="solid"/>
-          </a:ln>
-        </p:spPr>
-      </p:sp>
-      <p:sp>
-        <p:nvSpPr>
-          <p:cNvPr id="9" name="Text 7"/>
-          <p:cNvSpPr/>
-          <p:nvPr/>
-        </p:nvSpPr>
-        <p:spPr>
-          <a:xfrm>
-            <a:off x="640080" y="731520"/>
-            <a:ext cx="420624" cy="164592"/>
-          </a:xfrm>
-          <a:prstGeom prst="rect">
-            <a:avLst/>
-          </a:prstGeom>
-          <a:noFill/>
-          <a:ln/>
-        </p:spPr>
-        <p:txBody>
-          <a:bodyPr wrap="square" lIns="0" tIns="0" rIns="0" bIns="0" rtlCol="0" anchor="ctr"/>
-          <a:lstStyle/>
-          <a:p>
-            <a:pPr algn="ctr" indent="0" marL="0">
-              <a:buNone/>
-            </a:pPr>
-            <a:r>
-              <a:rPr lang="en-US" sz="1100" b="1" dirty="0">
-                <a:solidFill>
-                  <a:srgbClr val="FFFFFF"/>
-                </a:solidFill>
-                <a:latin typeface="Aptos" pitchFamily="34" charset="0"/>
-                <a:ea typeface="Aptos" pitchFamily="34" charset="-122"/>
-                <a:cs typeface="Aptos" pitchFamily="34" charset="-120"/>
-              </a:rPr>
-              <a:t>11</a:t>
-            </a:r>
-            <a:endParaRPr lang="en-US" sz="1100" dirty="0"/>
-          </a:p>
-        </p:txBody>
-      </p:sp>
-      <p:sp>
-        <p:nvSpPr>
-          <p:cNvPr id="10" name="Text 8"/>
-          <p:cNvSpPr/>
-          <p:nvPr/>
-        </p:nvSpPr>
-        <p:spPr>
-          <a:xfrm>
-            <a:off x="640080" y="621792"/>
             <a:ext cx="10881360" cy="713232"/>
           </a:xfrm>
           <a:prstGeom prst="rect">
@@ -10309,14 +11637,14 @@
       </p:sp>
       <p:sp>
         <p:nvSpPr>
-          <p:cNvPr id="11" name="Text 9"/>
+          <p:cNvPr id="9" name="Text 7"/>
           <p:cNvSpPr/>
           <p:nvPr/>
         </p:nvSpPr>
         <p:spPr>
           <a:xfrm>
             <a:off x="868680" y="1508760"/>
-            <a:ext cx="6537960" cy="4160520"/>
+            <a:ext cx="6309360" cy="4160520"/>
           </a:xfrm>
           <a:prstGeom prst="rect">
             <a:avLst/>
@@ -10375,18 +11703,18 @@
       </p:sp>
       <p:sp>
         <p:nvSpPr>
-          <p:cNvPr id="12" name="Shape 10"/>
-          <p:cNvSpPr/>
-          <p:nvPr/>
-        </p:nvSpPr>
-        <p:spPr>
-          <a:xfrm>
-            <a:off x="7909560" y="1417320"/>
-            <a:ext cx="3154680" cy="1828800"/>
+          <p:cNvPr id="10" name="Shape 8"/>
+          <p:cNvSpPr/>
+          <p:nvPr/>
+        </p:nvSpPr>
+        <p:spPr>
+          <a:xfrm>
+            <a:off x="7635240" y="1325880"/>
+            <a:ext cx="3474720" cy="1325880"/>
           </a:xfrm>
           <a:prstGeom prst="roundRect">
             <a:avLst>
-              <a:gd name="adj" fmla="val 6000"/>
+              <a:gd name="adj" fmla="val 8276"/>
             </a:avLst>
           </a:prstGeom>
           <a:solidFill>
@@ -10402,14 +11730,14 @@
       </p:sp>
       <p:sp>
         <p:nvSpPr>
-          <p:cNvPr id="13" name="Text 11"/>
-          <p:cNvSpPr/>
-          <p:nvPr/>
-        </p:nvSpPr>
-        <p:spPr>
-          <a:xfrm>
-            <a:off x="8074152" y="1563624"/>
-            <a:ext cx="2825496" cy="256032"/>
+          <p:cNvPr id="11" name="Text 9"/>
+          <p:cNvSpPr/>
+          <p:nvPr/>
+        </p:nvSpPr>
+        <p:spPr>
+          <a:xfrm>
+            <a:off x="7799832" y="1472184"/>
+            <a:ext cx="3145536" cy="256032"/>
           </a:xfrm>
           <a:prstGeom prst="rect">
             <a:avLst/>
@@ -10433,7 +11761,7 @@
                 <a:ea typeface="Aptos" pitchFamily="34" charset="-122"/>
                 <a:cs typeface="Aptos" pitchFamily="34" charset="-120"/>
               </a:rPr>
-              <a:t>Key idea</a:t>
+              <a:t>Data decision</a:t>
             </a:r>
             <a:endParaRPr lang="en-US" sz="1300" dirty="0"/>
           </a:p>
@@ -10441,14 +11769,14 @@
       </p:sp>
       <p:sp>
         <p:nvSpPr>
-          <p:cNvPr id="14" name="Text 12"/>
-          <p:cNvSpPr/>
-          <p:nvPr/>
-        </p:nvSpPr>
-        <p:spPr>
-          <a:xfrm>
-            <a:off x="8074152" y="1920240"/>
-            <a:ext cx="2825496" cy="1188720"/>
+          <p:cNvPr id="12" name="Text 10"/>
+          <p:cNvSpPr/>
+          <p:nvPr/>
+        </p:nvSpPr>
+        <p:spPr>
+          <a:xfrm>
+            <a:off x="7799832" y="1828800"/>
+            <a:ext cx="3145536" cy="685800"/>
           </a:xfrm>
           <a:prstGeom prst="rect">
             <a:avLst/>
@@ -10482,21 +11810,212 @@
       </p:sp>
       <p:sp>
         <p:nvSpPr>
-          <p:cNvPr id="15" name="Shape 13"/>
-          <p:cNvSpPr/>
-          <p:nvPr/>
-        </p:nvSpPr>
-        <p:spPr>
-          <a:xfrm>
-            <a:off x="7909560" y="3520440"/>
-            <a:ext cx="3154680" cy="1737360"/>
+          <p:cNvPr id="13" name="Shape 11"/>
+          <p:cNvSpPr/>
+          <p:nvPr/>
+        </p:nvSpPr>
+        <p:spPr>
+          <a:xfrm>
+            <a:off x="7635240" y="2788920"/>
+            <a:ext cx="3474720" cy="1536192"/>
           </a:xfrm>
           <a:prstGeom prst="roundRect">
             <a:avLst>
-              <a:gd name="adj" fmla="val 6316"/>
+              <a:gd name="adj" fmla="val 7143"/>
             </a:avLst>
           </a:prstGeom>
           <a:solidFill>
+            <a:srgbClr val="FFFFFF">
+              <a:alpha val="88000"/>
+            </a:srgbClr>
+          </a:solidFill>
+          <a:ln w="12700">
+            <a:solidFill>
+              <a:srgbClr val="D6E8F2"/>
+            </a:solidFill>
+            <a:prstDash val="solid"/>
+          </a:ln>
+        </p:spPr>
+      </p:sp>
+      <p:sp>
+        <p:nvSpPr>
+          <p:cNvPr id="14" name="Shape 12"/>
+          <p:cNvSpPr/>
+          <p:nvPr/>
+        </p:nvSpPr>
+        <p:spPr>
+          <a:xfrm>
+            <a:off x="8138160" y="3474720"/>
+            <a:ext cx="256032" cy="411480"/>
+          </a:xfrm>
+          <a:prstGeom prst="rect">
+            <a:avLst/>
+          </a:prstGeom>
+          <a:solidFill>
+            <a:srgbClr val="0068B7"/>
+          </a:solidFill>
+          <a:ln w="12700">
+            <a:solidFill>
+              <a:srgbClr val="0068B7"/>
+            </a:solidFill>
+            <a:prstDash val="solid"/>
+          </a:ln>
+        </p:spPr>
+      </p:sp>
+      <p:sp>
+        <p:nvSpPr>
+          <p:cNvPr id="15" name="Shape 13"/>
+          <p:cNvSpPr/>
+          <p:nvPr/>
+        </p:nvSpPr>
+        <p:spPr>
+          <a:xfrm>
+            <a:off x="8577072" y="3172968"/>
+            <a:ext cx="256032" cy="713232"/>
+          </a:xfrm>
+          <a:prstGeom prst="rect">
+            <a:avLst/>
+          </a:prstGeom>
+          <a:solidFill>
+            <a:srgbClr val="2F8A28"/>
+          </a:solidFill>
+          <a:ln w="12700">
+            <a:solidFill>
+              <a:srgbClr val="2F8A28"/>
+            </a:solidFill>
+            <a:prstDash val="solid"/>
+          </a:ln>
+        </p:spPr>
+      </p:sp>
+      <p:sp>
+        <p:nvSpPr>
+          <p:cNvPr id="16" name="Shape 14"/>
+          <p:cNvSpPr/>
+          <p:nvPr/>
+        </p:nvSpPr>
+        <p:spPr>
+          <a:xfrm>
+            <a:off x="9015984" y="2880360"/>
+            <a:ext cx="256032" cy="1005840"/>
+          </a:xfrm>
+          <a:prstGeom prst="rect">
+            <a:avLst/>
+          </a:prstGeom>
+          <a:solidFill>
+            <a:srgbClr val="D69A2D"/>
+          </a:solidFill>
+          <a:ln w="12700">
+            <a:solidFill>
+              <a:srgbClr val="D69A2D"/>
+            </a:solidFill>
+            <a:prstDash val="solid"/>
+          </a:ln>
+        </p:spPr>
+      </p:sp>
+      <p:sp>
+        <p:nvSpPr>
+          <p:cNvPr id="17" name="Shape 15"/>
+          <p:cNvSpPr/>
+          <p:nvPr/>
+        </p:nvSpPr>
+        <p:spPr>
+          <a:xfrm>
+            <a:off x="9454896" y="3319272"/>
+            <a:ext cx="256032" cy="566928"/>
+          </a:xfrm>
+          <a:prstGeom prst="rect">
+            <a:avLst/>
+          </a:prstGeom>
+          <a:solidFill>
+            <a:srgbClr val="6A4CA3"/>
+          </a:solidFill>
+          <a:ln w="12700">
+            <a:solidFill>
+              <a:srgbClr val="6A4CA3"/>
+            </a:solidFill>
+            <a:prstDash val="solid"/>
+          </a:ln>
+        </p:spPr>
+      </p:sp>
+      <p:sp>
+        <p:nvSpPr>
+          <p:cNvPr id="18" name="Shape 16"/>
+          <p:cNvSpPr/>
+          <p:nvPr/>
+        </p:nvSpPr>
+        <p:spPr>
+          <a:xfrm>
+            <a:off x="8019288" y="3886200"/>
+            <a:ext cx="2706624" cy="0"/>
+          </a:xfrm>
+          <a:prstGeom prst="line">
+            <a:avLst/>
+          </a:prstGeom>
+          <a:noFill/>
+          <a:ln w="15240">
+            <a:solidFill>
+              <a:srgbClr val="003A63"/>
+            </a:solidFill>
+            <a:prstDash val="solid"/>
+          </a:ln>
+        </p:spPr>
+      </p:sp>
+      <p:sp>
+        <p:nvSpPr>
+          <p:cNvPr id="19" name="Text 17"/>
+          <p:cNvSpPr/>
+          <p:nvPr/>
+        </p:nvSpPr>
+        <p:spPr>
+          <a:xfrm>
+            <a:off x="7863840" y="3017520"/>
+            <a:ext cx="3017520" cy="201168"/>
+          </a:xfrm>
+          <a:prstGeom prst="rect">
+            <a:avLst/>
+          </a:prstGeom>
+          <a:noFill/>
+          <a:ln/>
+        </p:spPr>
+        <p:txBody>
+          <a:bodyPr wrap="square" lIns="0" tIns="0" rIns="0" bIns="0" rtlCol="0" anchor="ctr"/>
+          <a:lstStyle/>
+          <a:p>
+            <a:pPr algn="ctr" indent="0" marL="0">
+              <a:buNone/>
+            </a:pPr>
+            <a:r>
+              <a:rPr lang="en-US" sz="1050" b="1" dirty="0">
+                <a:solidFill>
+                  <a:srgbClr val="003A63"/>
+                </a:solidFill>
+                <a:latin typeface="Aptos" pitchFamily="34" charset="0"/>
+                <a:ea typeface="Aptos" pitchFamily="34" charset="-122"/>
+                <a:cs typeface="Aptos" pitchFamily="34" charset="-120"/>
+              </a:rPr>
+              <a:t>Measure and monitor</a:t>
+            </a:r>
+            <a:endParaRPr lang="en-US" sz="1050" dirty="0"/>
+          </a:p>
+        </p:txBody>
+      </p:sp>
+      <p:sp>
+        <p:nvSpPr>
+          <p:cNvPr id="20" name="Shape 18"/>
+          <p:cNvSpPr/>
+          <p:nvPr/>
+        </p:nvSpPr>
+        <p:spPr>
+          <a:xfrm>
+            <a:off x="7635240" y="4498848"/>
+            <a:ext cx="3474720" cy="1143000"/>
+          </a:xfrm>
+          <a:prstGeom prst="roundRect">
+            <a:avLst>
+              <a:gd name="adj" fmla="val 9600"/>
+            </a:avLst>
+          </a:prstGeom>
+          <a:solidFill>
             <a:srgbClr val="EAF6F8"/>
           </a:solidFill>
           <a:ln w="12700">
@@ -10509,14 +12028,14 @@
       </p:sp>
       <p:sp>
         <p:nvSpPr>
-          <p:cNvPr id="16" name="Text 14"/>
-          <p:cNvSpPr/>
-          <p:nvPr/>
-        </p:nvSpPr>
-        <p:spPr>
-          <a:xfrm>
-            <a:off x="8074152" y="3666744"/>
-            <a:ext cx="2825496" cy="256032"/>
+          <p:cNvPr id="21" name="Text 19"/>
+          <p:cNvSpPr/>
+          <p:nvPr/>
+        </p:nvSpPr>
+        <p:spPr>
+          <a:xfrm>
+            <a:off x="7799832" y="4645152"/>
+            <a:ext cx="3145536" cy="256032"/>
           </a:xfrm>
           <a:prstGeom prst="rect">
             <a:avLst/>
@@ -10540,7 +12059,7 @@
                 <a:ea typeface="Aptos" pitchFamily="34" charset="-122"/>
                 <a:cs typeface="Aptos" pitchFamily="34" charset="-120"/>
               </a:rPr>
-              <a:t>Use this for</a:t>
+              <a:t>How to validate</a:t>
             </a:r>
             <a:endParaRPr lang="en-US" sz="1300" dirty="0"/>
           </a:p>
@@ -10548,14 +12067,14 @@
       </p:sp>
       <p:sp>
         <p:nvSpPr>
-          <p:cNvPr id="17" name="Text 15"/>
-          <p:cNvSpPr/>
-          <p:nvPr/>
-        </p:nvSpPr>
-        <p:spPr>
-          <a:xfrm>
-            <a:off x="8074152" y="4023360"/>
-            <a:ext cx="2825496" cy="1097280"/>
+          <p:cNvPr id="22" name="Text 20"/>
+          <p:cNvSpPr/>
+          <p:nvPr/>
+        </p:nvSpPr>
+        <p:spPr>
+          <a:xfrm>
+            <a:off x="7799832" y="5001768"/>
+            <a:ext cx="3145536" cy="502920"/>
           </a:xfrm>
           <a:prstGeom prst="rect">
             <a:avLst/>
@@ -10581,7 +12100,7 @@
                 <a:ea typeface="Aptos" pitchFamily="34" charset="-122"/>
                 <a:cs typeface="Aptos" pitchFamily="34" charset="-120"/>
               </a:rPr>
-              <a:t>Connect the concept to public health decisions, safeguards, documentation, or implementation work.</a:t>
+              <a:t>Connect the concept to data quality, model performance, validation evidence, monitoring measures, and decisions that remain under human control.</a:t>
             </a:r>
             <a:endParaRPr lang="en-US" sz="1550" dirty="0"/>
           </a:p>
@@ -10755,8 +12274,8 @@
         </p:nvSpPr>
         <p:spPr>
           <a:xfrm>
-            <a:off x="9966960" y="6537960"/>
-            <a:ext cx="1645920" cy="201168"/>
+            <a:off x="9646920" y="6537960"/>
+            <a:ext cx="1965960" cy="201168"/>
           </a:xfrm>
           <a:prstGeom prst="rect">
             <a:avLst/>
@@ -10780,7 +12299,7 @@
                 <a:ea typeface="Aptos" pitchFamily="34" charset="-122"/>
                 <a:cs typeface="Aptos" pitchFamily="34" charset="-120"/>
               </a:rPr>
-              <a:t>Â© Paula Soper</a:t>
+              <a:t>Copyright Paula Soper</a:t>
             </a:r>
             <a:endParaRPr lang="en-US" sz="800" dirty="0"/>
           </a:p>
@@ -10827,77 +12346,13 @@
       </p:sp>
       <p:sp>
         <p:nvSpPr>
-          <p:cNvPr id="8" name="Shape 6"/>
+          <p:cNvPr id="8" name="Text 6"/>
           <p:cNvSpPr/>
           <p:nvPr/>
         </p:nvSpPr>
         <p:spPr>
           <a:xfrm>
             <a:off x="640080" y="658368"/>
-            <a:ext cx="420624" cy="420624"/>
-          </a:xfrm>
-          <a:prstGeom prst="ellipse">
-            <a:avLst/>
-          </a:prstGeom>
-          <a:solidFill>
-            <a:srgbClr val="0068B7"/>
-          </a:solidFill>
-          <a:ln w="12700">
-            <a:solidFill>
-              <a:srgbClr val="0068B7"/>
-            </a:solidFill>
-            <a:prstDash val="solid"/>
-          </a:ln>
-        </p:spPr>
-      </p:sp>
-      <p:sp>
-        <p:nvSpPr>
-          <p:cNvPr id="9" name="Text 7"/>
-          <p:cNvSpPr/>
-          <p:nvPr/>
-        </p:nvSpPr>
-        <p:spPr>
-          <a:xfrm>
-            <a:off x="640080" y="731520"/>
-            <a:ext cx="420624" cy="164592"/>
-          </a:xfrm>
-          <a:prstGeom prst="rect">
-            <a:avLst/>
-          </a:prstGeom>
-          <a:noFill/>
-          <a:ln/>
-        </p:spPr>
-        <p:txBody>
-          <a:bodyPr wrap="square" lIns="0" tIns="0" rIns="0" bIns="0" rtlCol="0" anchor="ctr"/>
-          <a:lstStyle/>
-          <a:p>
-            <a:pPr algn="ctr" indent="0" marL="0">
-              <a:buNone/>
-            </a:pPr>
-            <a:r>
-              <a:rPr lang="en-US" sz="1100" b="1" dirty="0">
-                <a:solidFill>
-                  <a:srgbClr val="FFFFFF"/>
-                </a:solidFill>
-                <a:latin typeface="Aptos" pitchFamily="34" charset="0"/>
-                <a:ea typeface="Aptos" pitchFamily="34" charset="-122"/>
-                <a:cs typeface="Aptos" pitchFamily="34" charset="-120"/>
-              </a:rPr>
-              <a:t>12</a:t>
-            </a:r>
-            <a:endParaRPr lang="en-US" sz="1100" dirty="0"/>
-          </a:p>
-        </p:txBody>
-      </p:sp>
-      <p:sp>
-        <p:nvSpPr>
-          <p:cNvPr id="10" name="Text 8"/>
-          <p:cNvSpPr/>
-          <p:nvPr/>
-        </p:nvSpPr>
-        <p:spPr>
-          <a:xfrm>
-            <a:off x="640080" y="621792"/>
             <a:ext cx="10881360" cy="713232"/>
           </a:xfrm>
           <a:prstGeom prst="rect">
@@ -10932,14 +12387,14 @@
       </p:sp>
       <p:sp>
         <p:nvSpPr>
-          <p:cNvPr id="11" name="Text 9"/>
+          <p:cNvPr id="9" name="Text 7"/>
           <p:cNvSpPr/>
           <p:nvPr/>
         </p:nvSpPr>
         <p:spPr>
           <a:xfrm>
             <a:off x="868680" y="1508760"/>
-            <a:ext cx="6537960" cy="4160520"/>
+            <a:ext cx="6309360" cy="4160520"/>
           </a:xfrm>
           <a:prstGeom prst="rect">
             <a:avLst/>
@@ -10984,18 +12439,18 @@
       </p:sp>
       <p:sp>
         <p:nvSpPr>
-          <p:cNvPr id="12" name="Shape 10"/>
-          <p:cNvSpPr/>
-          <p:nvPr/>
-        </p:nvSpPr>
-        <p:spPr>
-          <a:xfrm>
-            <a:off x="7909560" y="1417320"/>
-            <a:ext cx="3154680" cy="1828800"/>
+          <p:cNvPr id="10" name="Shape 8"/>
+          <p:cNvSpPr/>
+          <p:nvPr/>
+        </p:nvSpPr>
+        <p:spPr>
+          <a:xfrm>
+            <a:off x="7635240" y="1325880"/>
+            <a:ext cx="3474720" cy="1325880"/>
           </a:xfrm>
           <a:prstGeom prst="roundRect">
             <a:avLst>
-              <a:gd name="adj" fmla="val 6000"/>
+              <a:gd name="adj" fmla="val 8276"/>
             </a:avLst>
           </a:prstGeom>
           <a:solidFill>
@@ -11011,14 +12466,14 @@
       </p:sp>
       <p:sp>
         <p:nvSpPr>
-          <p:cNvPr id="13" name="Text 11"/>
-          <p:cNvSpPr/>
-          <p:nvPr/>
-        </p:nvSpPr>
-        <p:spPr>
-          <a:xfrm>
-            <a:off x="8074152" y="1563624"/>
-            <a:ext cx="2825496" cy="256032"/>
+          <p:cNvPr id="11" name="Text 9"/>
+          <p:cNvSpPr/>
+          <p:nvPr/>
+        </p:nvSpPr>
+        <p:spPr>
+          <a:xfrm>
+            <a:off x="7799832" y="1472184"/>
+            <a:ext cx="3145536" cy="256032"/>
           </a:xfrm>
           <a:prstGeom prst="rect">
             <a:avLst/>
@@ -11042,7 +12497,7 @@
                 <a:ea typeface="Aptos" pitchFamily="34" charset="-122"/>
                 <a:cs typeface="Aptos" pitchFamily="34" charset="-120"/>
               </a:rPr>
-              <a:t>Key idea</a:t>
+              <a:t>Data decision</a:t>
             </a:r>
             <a:endParaRPr lang="en-US" sz="1300" dirty="0"/>
           </a:p>
@@ -11050,14 +12505,14 @@
       </p:sp>
       <p:sp>
         <p:nvSpPr>
-          <p:cNvPr id="14" name="Text 12"/>
-          <p:cNvSpPr/>
-          <p:nvPr/>
-        </p:nvSpPr>
-        <p:spPr>
-          <a:xfrm>
-            <a:off x="8074152" y="1920240"/>
-            <a:ext cx="2825496" cy="1188720"/>
+          <p:cNvPr id="12" name="Text 10"/>
+          <p:cNvSpPr/>
+          <p:nvPr/>
+        </p:nvSpPr>
+        <p:spPr>
+          <a:xfrm>
+            <a:off x="7799832" y="1828800"/>
+            <a:ext cx="3145536" cy="685800"/>
           </a:xfrm>
           <a:prstGeom prst="rect">
             <a:avLst/>
@@ -11091,21 +12546,212 @@
       </p:sp>
       <p:sp>
         <p:nvSpPr>
-          <p:cNvPr id="15" name="Shape 13"/>
-          <p:cNvSpPr/>
-          <p:nvPr/>
-        </p:nvSpPr>
-        <p:spPr>
-          <a:xfrm>
-            <a:off x="7909560" y="3520440"/>
-            <a:ext cx="3154680" cy="1737360"/>
+          <p:cNvPr id="13" name="Shape 11"/>
+          <p:cNvSpPr/>
+          <p:nvPr/>
+        </p:nvSpPr>
+        <p:spPr>
+          <a:xfrm>
+            <a:off x="7635240" y="2788920"/>
+            <a:ext cx="3474720" cy="1536192"/>
           </a:xfrm>
           <a:prstGeom prst="roundRect">
             <a:avLst>
-              <a:gd name="adj" fmla="val 6316"/>
+              <a:gd name="adj" fmla="val 7143"/>
             </a:avLst>
           </a:prstGeom>
           <a:solidFill>
+            <a:srgbClr val="FFFFFF">
+              <a:alpha val="88000"/>
+            </a:srgbClr>
+          </a:solidFill>
+          <a:ln w="12700">
+            <a:solidFill>
+              <a:srgbClr val="D6E8F2"/>
+            </a:solidFill>
+            <a:prstDash val="solid"/>
+          </a:ln>
+        </p:spPr>
+      </p:sp>
+      <p:sp>
+        <p:nvSpPr>
+          <p:cNvPr id="14" name="Shape 12"/>
+          <p:cNvSpPr/>
+          <p:nvPr/>
+        </p:nvSpPr>
+        <p:spPr>
+          <a:xfrm>
+            <a:off x="8138160" y="3474720"/>
+            <a:ext cx="256032" cy="411480"/>
+          </a:xfrm>
+          <a:prstGeom prst="rect">
+            <a:avLst/>
+          </a:prstGeom>
+          <a:solidFill>
+            <a:srgbClr val="0068B7"/>
+          </a:solidFill>
+          <a:ln w="12700">
+            <a:solidFill>
+              <a:srgbClr val="0068B7"/>
+            </a:solidFill>
+            <a:prstDash val="solid"/>
+          </a:ln>
+        </p:spPr>
+      </p:sp>
+      <p:sp>
+        <p:nvSpPr>
+          <p:cNvPr id="15" name="Shape 13"/>
+          <p:cNvSpPr/>
+          <p:nvPr/>
+        </p:nvSpPr>
+        <p:spPr>
+          <a:xfrm>
+            <a:off x="8577072" y="3172968"/>
+            <a:ext cx="256032" cy="713232"/>
+          </a:xfrm>
+          <a:prstGeom prst="rect">
+            <a:avLst/>
+          </a:prstGeom>
+          <a:solidFill>
+            <a:srgbClr val="2F8A28"/>
+          </a:solidFill>
+          <a:ln w="12700">
+            <a:solidFill>
+              <a:srgbClr val="2F8A28"/>
+            </a:solidFill>
+            <a:prstDash val="solid"/>
+          </a:ln>
+        </p:spPr>
+      </p:sp>
+      <p:sp>
+        <p:nvSpPr>
+          <p:cNvPr id="16" name="Shape 14"/>
+          <p:cNvSpPr/>
+          <p:nvPr/>
+        </p:nvSpPr>
+        <p:spPr>
+          <a:xfrm>
+            <a:off x="9015984" y="2880360"/>
+            <a:ext cx="256032" cy="1005840"/>
+          </a:xfrm>
+          <a:prstGeom prst="rect">
+            <a:avLst/>
+          </a:prstGeom>
+          <a:solidFill>
+            <a:srgbClr val="D69A2D"/>
+          </a:solidFill>
+          <a:ln w="12700">
+            <a:solidFill>
+              <a:srgbClr val="D69A2D"/>
+            </a:solidFill>
+            <a:prstDash val="solid"/>
+          </a:ln>
+        </p:spPr>
+      </p:sp>
+      <p:sp>
+        <p:nvSpPr>
+          <p:cNvPr id="17" name="Shape 15"/>
+          <p:cNvSpPr/>
+          <p:nvPr/>
+        </p:nvSpPr>
+        <p:spPr>
+          <a:xfrm>
+            <a:off x="9454896" y="3319272"/>
+            <a:ext cx="256032" cy="566928"/>
+          </a:xfrm>
+          <a:prstGeom prst="rect">
+            <a:avLst/>
+          </a:prstGeom>
+          <a:solidFill>
+            <a:srgbClr val="6A4CA3"/>
+          </a:solidFill>
+          <a:ln w="12700">
+            <a:solidFill>
+              <a:srgbClr val="6A4CA3"/>
+            </a:solidFill>
+            <a:prstDash val="solid"/>
+          </a:ln>
+        </p:spPr>
+      </p:sp>
+      <p:sp>
+        <p:nvSpPr>
+          <p:cNvPr id="18" name="Shape 16"/>
+          <p:cNvSpPr/>
+          <p:nvPr/>
+        </p:nvSpPr>
+        <p:spPr>
+          <a:xfrm>
+            <a:off x="8019288" y="3886200"/>
+            <a:ext cx="2706624" cy="0"/>
+          </a:xfrm>
+          <a:prstGeom prst="line">
+            <a:avLst/>
+          </a:prstGeom>
+          <a:noFill/>
+          <a:ln w="15240">
+            <a:solidFill>
+              <a:srgbClr val="003A63"/>
+            </a:solidFill>
+            <a:prstDash val="solid"/>
+          </a:ln>
+        </p:spPr>
+      </p:sp>
+      <p:sp>
+        <p:nvSpPr>
+          <p:cNvPr id="19" name="Text 17"/>
+          <p:cNvSpPr/>
+          <p:nvPr/>
+        </p:nvSpPr>
+        <p:spPr>
+          <a:xfrm>
+            <a:off x="7863840" y="3017520"/>
+            <a:ext cx="3017520" cy="201168"/>
+          </a:xfrm>
+          <a:prstGeom prst="rect">
+            <a:avLst/>
+          </a:prstGeom>
+          <a:noFill/>
+          <a:ln/>
+        </p:spPr>
+        <p:txBody>
+          <a:bodyPr wrap="square" lIns="0" tIns="0" rIns="0" bIns="0" rtlCol="0" anchor="ctr"/>
+          <a:lstStyle/>
+          <a:p>
+            <a:pPr algn="ctr" indent="0" marL="0">
+              <a:buNone/>
+            </a:pPr>
+            <a:r>
+              <a:rPr lang="en-US" sz="1050" b="1" dirty="0">
+                <a:solidFill>
+                  <a:srgbClr val="003A63"/>
+                </a:solidFill>
+                <a:latin typeface="Aptos" pitchFamily="34" charset="0"/>
+                <a:ea typeface="Aptos" pitchFamily="34" charset="-122"/>
+                <a:cs typeface="Aptos" pitchFamily="34" charset="-120"/>
+              </a:rPr>
+              <a:t>Measure and monitor</a:t>
+            </a:r>
+            <a:endParaRPr lang="en-US" sz="1050" dirty="0"/>
+          </a:p>
+        </p:txBody>
+      </p:sp>
+      <p:sp>
+        <p:nvSpPr>
+          <p:cNvPr id="20" name="Shape 18"/>
+          <p:cNvSpPr/>
+          <p:nvPr/>
+        </p:nvSpPr>
+        <p:spPr>
+          <a:xfrm>
+            <a:off x="7635240" y="4498848"/>
+            <a:ext cx="3474720" cy="1143000"/>
+          </a:xfrm>
+          <a:prstGeom prst="roundRect">
+            <a:avLst>
+              <a:gd name="adj" fmla="val 9600"/>
+            </a:avLst>
+          </a:prstGeom>
+          <a:solidFill>
             <a:srgbClr val="EAF6F8"/>
           </a:solidFill>
           <a:ln w="12700">
@@ -11118,14 +12764,14 @@
       </p:sp>
       <p:sp>
         <p:nvSpPr>
-          <p:cNvPr id="16" name="Text 14"/>
-          <p:cNvSpPr/>
-          <p:nvPr/>
-        </p:nvSpPr>
-        <p:spPr>
-          <a:xfrm>
-            <a:off x="8074152" y="3666744"/>
-            <a:ext cx="2825496" cy="256032"/>
+          <p:cNvPr id="21" name="Text 19"/>
+          <p:cNvSpPr/>
+          <p:nvPr/>
+        </p:nvSpPr>
+        <p:spPr>
+          <a:xfrm>
+            <a:off x="7799832" y="4645152"/>
+            <a:ext cx="3145536" cy="256032"/>
           </a:xfrm>
           <a:prstGeom prst="rect">
             <a:avLst/>
@@ -11149,7 +12795,7 @@
                 <a:ea typeface="Aptos" pitchFamily="34" charset="-122"/>
                 <a:cs typeface="Aptos" pitchFamily="34" charset="-120"/>
               </a:rPr>
-              <a:t>Use this for</a:t>
+              <a:t>How to validate</a:t>
             </a:r>
             <a:endParaRPr lang="en-US" sz="1300" dirty="0"/>
           </a:p>
@@ -11157,14 +12803,14 @@
       </p:sp>
       <p:sp>
         <p:nvSpPr>
-          <p:cNvPr id="17" name="Text 15"/>
-          <p:cNvSpPr/>
-          <p:nvPr/>
-        </p:nvSpPr>
-        <p:spPr>
-          <a:xfrm>
-            <a:off x="8074152" y="4023360"/>
-            <a:ext cx="2825496" cy="1097280"/>
+          <p:cNvPr id="22" name="Text 20"/>
+          <p:cNvSpPr/>
+          <p:nvPr/>
+        </p:nvSpPr>
+        <p:spPr>
+          <a:xfrm>
+            <a:off x="7799832" y="5001768"/>
+            <a:ext cx="3145536" cy="502920"/>
           </a:xfrm>
           <a:prstGeom prst="rect">
             <a:avLst/>
@@ -11190,7 +12836,7 @@
                 <a:ea typeface="Aptos" pitchFamily="34" charset="-122"/>
                 <a:cs typeface="Aptos" pitchFamily="34" charset="-120"/>
               </a:rPr>
-              <a:t>Connect the concept to public health decisions, safeguards, documentation, or implementation work.</a:t>
+              <a:t>Use the assignment to test whether you can explain the concept, apply it to a realistic public health situation, and identify what would need review before the work moves forward.</a:t>
             </a:r>
             <a:endParaRPr lang="en-US" sz="1550" dirty="0"/>
           </a:p>
@@ -11364,8 +13010,8 @@
         </p:nvSpPr>
         <p:spPr>
           <a:xfrm>
-            <a:off x="9966960" y="6537960"/>
-            <a:ext cx="1645920" cy="201168"/>
+            <a:off x="9646920" y="6537960"/>
+            <a:ext cx="1965960" cy="201168"/>
           </a:xfrm>
           <a:prstGeom prst="rect">
             <a:avLst/>
@@ -11389,7 +13035,7 @@
                 <a:ea typeface="Aptos" pitchFamily="34" charset="-122"/>
                 <a:cs typeface="Aptos" pitchFamily="34" charset="-120"/>
               </a:rPr>
-              <a:t>Â© Paula Soper</a:t>
+              <a:t>Copyright Paula Soper</a:t>
             </a:r>
             <a:endParaRPr lang="en-US" sz="800" dirty="0"/>
           </a:p>
@@ -11436,77 +13082,13 @@
       </p:sp>
       <p:sp>
         <p:nvSpPr>
-          <p:cNvPr id="8" name="Shape 6"/>
+          <p:cNvPr id="8" name="Text 6"/>
           <p:cNvSpPr/>
           <p:nvPr/>
         </p:nvSpPr>
         <p:spPr>
           <a:xfrm>
             <a:off x="640080" y="658368"/>
-            <a:ext cx="420624" cy="420624"/>
-          </a:xfrm>
-          <a:prstGeom prst="ellipse">
-            <a:avLst/>
-          </a:prstGeom>
-          <a:solidFill>
-            <a:srgbClr val="0068B7"/>
-          </a:solidFill>
-          <a:ln w="12700">
-            <a:solidFill>
-              <a:srgbClr val="0068B7"/>
-            </a:solidFill>
-            <a:prstDash val="solid"/>
-          </a:ln>
-        </p:spPr>
-      </p:sp>
-      <p:sp>
-        <p:nvSpPr>
-          <p:cNvPr id="9" name="Text 7"/>
-          <p:cNvSpPr/>
-          <p:nvPr/>
-        </p:nvSpPr>
-        <p:spPr>
-          <a:xfrm>
-            <a:off x="640080" y="731520"/>
-            <a:ext cx="420624" cy="164592"/>
-          </a:xfrm>
-          <a:prstGeom prst="rect">
-            <a:avLst/>
-          </a:prstGeom>
-          <a:noFill/>
-          <a:ln/>
-        </p:spPr>
-        <p:txBody>
-          <a:bodyPr wrap="square" lIns="0" tIns="0" rIns="0" bIns="0" rtlCol="0" anchor="ctr"/>
-          <a:lstStyle/>
-          <a:p>
-            <a:pPr algn="ctr" indent="0" marL="0">
-              <a:buNone/>
-            </a:pPr>
-            <a:r>
-              <a:rPr lang="en-US" sz="1100" b="1" dirty="0">
-                <a:solidFill>
-                  <a:srgbClr val="FFFFFF"/>
-                </a:solidFill>
-                <a:latin typeface="Aptos" pitchFamily="34" charset="0"/>
-                <a:ea typeface="Aptos" pitchFamily="34" charset="-122"/>
-                <a:cs typeface="Aptos" pitchFamily="34" charset="-120"/>
-              </a:rPr>
-              <a:t>13</a:t>
-            </a:r>
-            <a:endParaRPr lang="en-US" sz="1100" dirty="0"/>
-          </a:p>
-        </p:txBody>
-      </p:sp>
-      <p:sp>
-        <p:nvSpPr>
-          <p:cNvPr id="10" name="Text 8"/>
-          <p:cNvSpPr/>
-          <p:nvPr/>
-        </p:nvSpPr>
-        <p:spPr>
-          <a:xfrm>
-            <a:off x="640080" y="621792"/>
             <a:ext cx="10881360" cy="713232"/>
           </a:xfrm>
           <a:prstGeom prst="rect">
@@ -11541,14 +13123,14 @@
       </p:sp>
       <p:sp>
         <p:nvSpPr>
-          <p:cNvPr id="11" name="Text 9"/>
+          <p:cNvPr id="9" name="Text 7"/>
           <p:cNvSpPr/>
           <p:nvPr/>
         </p:nvSpPr>
         <p:spPr>
           <a:xfrm>
             <a:off x="868680" y="1508760"/>
-            <a:ext cx="6537960" cy="4160520"/>
+            <a:ext cx="6309360" cy="4160520"/>
           </a:xfrm>
           <a:prstGeom prst="rect">
             <a:avLst/>
@@ -11607,18 +13189,18 @@
       </p:sp>
       <p:sp>
         <p:nvSpPr>
-          <p:cNvPr id="12" name="Shape 10"/>
-          <p:cNvSpPr/>
-          <p:nvPr/>
-        </p:nvSpPr>
-        <p:spPr>
-          <a:xfrm>
-            <a:off x="7909560" y="1417320"/>
-            <a:ext cx="3154680" cy="1828800"/>
+          <p:cNvPr id="10" name="Shape 8"/>
+          <p:cNvSpPr/>
+          <p:nvPr/>
+        </p:nvSpPr>
+        <p:spPr>
+          <a:xfrm>
+            <a:off x="7635240" y="1325880"/>
+            <a:ext cx="3474720" cy="1325880"/>
           </a:xfrm>
           <a:prstGeom prst="roundRect">
             <a:avLst>
-              <a:gd name="adj" fmla="val 6000"/>
+              <a:gd name="adj" fmla="val 8276"/>
             </a:avLst>
           </a:prstGeom>
           <a:solidFill>
@@ -11634,14 +13216,14 @@
       </p:sp>
       <p:sp>
         <p:nvSpPr>
-          <p:cNvPr id="13" name="Text 11"/>
-          <p:cNvSpPr/>
-          <p:nvPr/>
-        </p:nvSpPr>
-        <p:spPr>
-          <a:xfrm>
-            <a:off x="8074152" y="1563624"/>
-            <a:ext cx="2825496" cy="256032"/>
+          <p:cNvPr id="11" name="Text 9"/>
+          <p:cNvSpPr/>
+          <p:nvPr/>
+        </p:nvSpPr>
+        <p:spPr>
+          <a:xfrm>
+            <a:off x="7799832" y="1472184"/>
+            <a:ext cx="3145536" cy="256032"/>
           </a:xfrm>
           <a:prstGeom prst="rect">
             <a:avLst/>
@@ -11665,7 +13247,7 @@
                 <a:ea typeface="Aptos" pitchFamily="34" charset="-122"/>
                 <a:cs typeface="Aptos" pitchFamily="34" charset="-120"/>
               </a:rPr>
-              <a:t>Key idea</a:t>
+              <a:t>Data decision</a:t>
             </a:r>
             <a:endParaRPr lang="en-US" sz="1300" dirty="0"/>
           </a:p>
@@ -11673,14 +13255,14 @@
       </p:sp>
       <p:sp>
         <p:nvSpPr>
-          <p:cNvPr id="14" name="Text 12"/>
-          <p:cNvSpPr/>
-          <p:nvPr/>
-        </p:nvSpPr>
-        <p:spPr>
-          <a:xfrm>
-            <a:off x="8074152" y="1920240"/>
-            <a:ext cx="2825496" cy="1188720"/>
+          <p:cNvPr id="12" name="Text 10"/>
+          <p:cNvSpPr/>
+          <p:nvPr/>
+        </p:nvSpPr>
+        <p:spPr>
+          <a:xfrm>
+            <a:off x="7799832" y="1828800"/>
+            <a:ext cx="3145536" cy="685800"/>
           </a:xfrm>
           <a:prstGeom prst="rect">
             <a:avLst/>
@@ -11714,21 +13296,212 @@
       </p:sp>
       <p:sp>
         <p:nvSpPr>
-          <p:cNvPr id="15" name="Shape 13"/>
-          <p:cNvSpPr/>
-          <p:nvPr/>
-        </p:nvSpPr>
-        <p:spPr>
-          <a:xfrm>
-            <a:off x="7909560" y="3520440"/>
-            <a:ext cx="3154680" cy="1737360"/>
+          <p:cNvPr id="13" name="Shape 11"/>
+          <p:cNvSpPr/>
+          <p:nvPr/>
+        </p:nvSpPr>
+        <p:spPr>
+          <a:xfrm>
+            <a:off x="7635240" y="2788920"/>
+            <a:ext cx="3474720" cy="1536192"/>
           </a:xfrm>
           <a:prstGeom prst="roundRect">
             <a:avLst>
-              <a:gd name="adj" fmla="val 6316"/>
+              <a:gd name="adj" fmla="val 7143"/>
             </a:avLst>
           </a:prstGeom>
           <a:solidFill>
+            <a:srgbClr val="FFFFFF">
+              <a:alpha val="88000"/>
+            </a:srgbClr>
+          </a:solidFill>
+          <a:ln w="12700">
+            <a:solidFill>
+              <a:srgbClr val="D6E8F2"/>
+            </a:solidFill>
+            <a:prstDash val="solid"/>
+          </a:ln>
+        </p:spPr>
+      </p:sp>
+      <p:sp>
+        <p:nvSpPr>
+          <p:cNvPr id="14" name="Shape 12"/>
+          <p:cNvSpPr/>
+          <p:nvPr/>
+        </p:nvSpPr>
+        <p:spPr>
+          <a:xfrm>
+            <a:off x="8138160" y="3474720"/>
+            <a:ext cx="256032" cy="411480"/>
+          </a:xfrm>
+          <a:prstGeom prst="rect">
+            <a:avLst/>
+          </a:prstGeom>
+          <a:solidFill>
+            <a:srgbClr val="0068B7"/>
+          </a:solidFill>
+          <a:ln w="12700">
+            <a:solidFill>
+              <a:srgbClr val="0068B7"/>
+            </a:solidFill>
+            <a:prstDash val="solid"/>
+          </a:ln>
+        </p:spPr>
+      </p:sp>
+      <p:sp>
+        <p:nvSpPr>
+          <p:cNvPr id="15" name="Shape 13"/>
+          <p:cNvSpPr/>
+          <p:nvPr/>
+        </p:nvSpPr>
+        <p:spPr>
+          <a:xfrm>
+            <a:off x="8577072" y="3172968"/>
+            <a:ext cx="256032" cy="713232"/>
+          </a:xfrm>
+          <a:prstGeom prst="rect">
+            <a:avLst/>
+          </a:prstGeom>
+          <a:solidFill>
+            <a:srgbClr val="2F8A28"/>
+          </a:solidFill>
+          <a:ln w="12700">
+            <a:solidFill>
+              <a:srgbClr val="2F8A28"/>
+            </a:solidFill>
+            <a:prstDash val="solid"/>
+          </a:ln>
+        </p:spPr>
+      </p:sp>
+      <p:sp>
+        <p:nvSpPr>
+          <p:cNvPr id="16" name="Shape 14"/>
+          <p:cNvSpPr/>
+          <p:nvPr/>
+        </p:nvSpPr>
+        <p:spPr>
+          <a:xfrm>
+            <a:off x="9015984" y="2880360"/>
+            <a:ext cx="256032" cy="1005840"/>
+          </a:xfrm>
+          <a:prstGeom prst="rect">
+            <a:avLst/>
+          </a:prstGeom>
+          <a:solidFill>
+            <a:srgbClr val="D69A2D"/>
+          </a:solidFill>
+          <a:ln w="12700">
+            <a:solidFill>
+              <a:srgbClr val="D69A2D"/>
+            </a:solidFill>
+            <a:prstDash val="solid"/>
+          </a:ln>
+        </p:spPr>
+      </p:sp>
+      <p:sp>
+        <p:nvSpPr>
+          <p:cNvPr id="17" name="Shape 15"/>
+          <p:cNvSpPr/>
+          <p:nvPr/>
+        </p:nvSpPr>
+        <p:spPr>
+          <a:xfrm>
+            <a:off x="9454896" y="3319272"/>
+            <a:ext cx="256032" cy="566928"/>
+          </a:xfrm>
+          <a:prstGeom prst="rect">
+            <a:avLst/>
+          </a:prstGeom>
+          <a:solidFill>
+            <a:srgbClr val="6A4CA3"/>
+          </a:solidFill>
+          <a:ln w="12700">
+            <a:solidFill>
+              <a:srgbClr val="6A4CA3"/>
+            </a:solidFill>
+            <a:prstDash val="solid"/>
+          </a:ln>
+        </p:spPr>
+      </p:sp>
+      <p:sp>
+        <p:nvSpPr>
+          <p:cNvPr id="18" name="Shape 16"/>
+          <p:cNvSpPr/>
+          <p:nvPr/>
+        </p:nvSpPr>
+        <p:spPr>
+          <a:xfrm>
+            <a:off x="8019288" y="3886200"/>
+            <a:ext cx="2706624" cy="0"/>
+          </a:xfrm>
+          <a:prstGeom prst="line">
+            <a:avLst/>
+          </a:prstGeom>
+          <a:noFill/>
+          <a:ln w="15240">
+            <a:solidFill>
+              <a:srgbClr val="003A63"/>
+            </a:solidFill>
+            <a:prstDash val="solid"/>
+          </a:ln>
+        </p:spPr>
+      </p:sp>
+      <p:sp>
+        <p:nvSpPr>
+          <p:cNvPr id="19" name="Text 17"/>
+          <p:cNvSpPr/>
+          <p:nvPr/>
+        </p:nvSpPr>
+        <p:spPr>
+          <a:xfrm>
+            <a:off x="7863840" y="3017520"/>
+            <a:ext cx="3017520" cy="201168"/>
+          </a:xfrm>
+          <a:prstGeom prst="rect">
+            <a:avLst/>
+          </a:prstGeom>
+          <a:noFill/>
+          <a:ln/>
+        </p:spPr>
+        <p:txBody>
+          <a:bodyPr wrap="square" lIns="0" tIns="0" rIns="0" bIns="0" rtlCol="0" anchor="ctr"/>
+          <a:lstStyle/>
+          <a:p>
+            <a:pPr algn="ctr" indent="0" marL="0">
+              <a:buNone/>
+            </a:pPr>
+            <a:r>
+              <a:rPr lang="en-US" sz="1050" b="1" dirty="0">
+                <a:solidFill>
+                  <a:srgbClr val="003A63"/>
+                </a:solidFill>
+                <a:latin typeface="Aptos" pitchFamily="34" charset="0"/>
+                <a:ea typeface="Aptos" pitchFamily="34" charset="-122"/>
+                <a:cs typeface="Aptos" pitchFamily="34" charset="-120"/>
+              </a:rPr>
+              <a:t>Measure and monitor</a:t>
+            </a:r>
+            <a:endParaRPr lang="en-US" sz="1050" dirty="0"/>
+          </a:p>
+        </p:txBody>
+      </p:sp>
+      <p:sp>
+        <p:nvSpPr>
+          <p:cNvPr id="20" name="Shape 18"/>
+          <p:cNvSpPr/>
+          <p:nvPr/>
+        </p:nvSpPr>
+        <p:spPr>
+          <a:xfrm>
+            <a:off x="7635240" y="4498848"/>
+            <a:ext cx="3474720" cy="1143000"/>
+          </a:xfrm>
+          <a:prstGeom prst="roundRect">
+            <a:avLst>
+              <a:gd name="adj" fmla="val 9600"/>
+            </a:avLst>
+          </a:prstGeom>
+          <a:solidFill>
             <a:srgbClr val="EAF6F8"/>
           </a:solidFill>
           <a:ln w="12700">
@@ -11741,14 +13514,14 @@
       </p:sp>
       <p:sp>
         <p:nvSpPr>
-          <p:cNvPr id="16" name="Text 14"/>
-          <p:cNvSpPr/>
-          <p:nvPr/>
-        </p:nvSpPr>
-        <p:spPr>
-          <a:xfrm>
-            <a:off x="8074152" y="3666744"/>
-            <a:ext cx="2825496" cy="256032"/>
+          <p:cNvPr id="21" name="Text 19"/>
+          <p:cNvSpPr/>
+          <p:nvPr/>
+        </p:nvSpPr>
+        <p:spPr>
+          <a:xfrm>
+            <a:off x="7799832" y="4645152"/>
+            <a:ext cx="3145536" cy="256032"/>
           </a:xfrm>
           <a:prstGeom prst="rect">
             <a:avLst/>
@@ -11772,7 +13545,7 @@
                 <a:ea typeface="Aptos" pitchFamily="34" charset="-122"/>
                 <a:cs typeface="Aptos" pitchFamily="34" charset="-120"/>
               </a:rPr>
-              <a:t>Use this for</a:t>
+              <a:t>How to validate</a:t>
             </a:r>
             <a:endParaRPr lang="en-US" sz="1300" dirty="0"/>
           </a:p>
@@ -11780,14 +13553,14 @@
       </p:sp>
       <p:sp>
         <p:nvSpPr>
-          <p:cNvPr id="17" name="Text 15"/>
-          <p:cNvSpPr/>
-          <p:nvPr/>
-        </p:nvSpPr>
-        <p:spPr>
-          <a:xfrm>
-            <a:off x="8074152" y="4023360"/>
-            <a:ext cx="2825496" cy="1097280"/>
+          <p:cNvPr id="22" name="Text 20"/>
+          <p:cNvSpPr/>
+          <p:nvPr/>
+        </p:nvSpPr>
+        <p:spPr>
+          <a:xfrm>
+            <a:off x="7799832" y="5001768"/>
+            <a:ext cx="3145536" cy="502920"/>
           </a:xfrm>
           <a:prstGeom prst="rect">
             <a:avLst/>
@@ -11813,7 +13586,7 @@
                 <a:ea typeface="Aptos" pitchFamily="34" charset="-122"/>
                 <a:cs typeface="Aptos" pitchFamily="34" charset="-120"/>
               </a:rPr>
-              <a:t>Connect the concept to public health decisions, safeguards, documentation, or implementation work.</a:t>
+              <a:t>Use the assignment to test whether you can explain the concept, apply it to a realistic public health situation, and identify what would need review before the work moves forward.</a:t>
             </a:r>
             <a:endParaRPr lang="en-US" sz="1550" dirty="0"/>
           </a:p>
@@ -11987,8 +13760,8 @@
         </p:nvSpPr>
         <p:spPr>
           <a:xfrm>
-            <a:off x="9966960" y="6537960"/>
-            <a:ext cx="1645920" cy="201168"/>
+            <a:off x="9646920" y="6537960"/>
+            <a:ext cx="1965960" cy="201168"/>
           </a:xfrm>
           <a:prstGeom prst="rect">
             <a:avLst/>
@@ -12012,7 +13785,7 @@
                 <a:ea typeface="Aptos" pitchFamily="34" charset="-122"/>
                 <a:cs typeface="Aptos" pitchFamily="34" charset="-120"/>
               </a:rPr>
-              <a:t>Â© Paula Soper</a:t>
+              <a:t>Copyright Paula Soper</a:t>
             </a:r>
             <a:endParaRPr lang="en-US" sz="800" dirty="0"/>
           </a:p>
@@ -12059,77 +13832,13 @@
       </p:sp>
       <p:sp>
         <p:nvSpPr>
-          <p:cNvPr id="8" name="Shape 6"/>
+          <p:cNvPr id="8" name="Text 6"/>
           <p:cNvSpPr/>
           <p:nvPr/>
         </p:nvSpPr>
         <p:spPr>
           <a:xfrm>
             <a:off x="640080" y="658368"/>
-            <a:ext cx="420624" cy="420624"/>
-          </a:xfrm>
-          <a:prstGeom prst="ellipse">
-            <a:avLst/>
-          </a:prstGeom>
-          <a:solidFill>
-            <a:srgbClr val="0068B7"/>
-          </a:solidFill>
-          <a:ln w="12700">
-            <a:solidFill>
-              <a:srgbClr val="0068B7"/>
-            </a:solidFill>
-            <a:prstDash val="solid"/>
-          </a:ln>
-        </p:spPr>
-      </p:sp>
-      <p:sp>
-        <p:nvSpPr>
-          <p:cNvPr id="9" name="Text 7"/>
-          <p:cNvSpPr/>
-          <p:nvPr/>
-        </p:nvSpPr>
-        <p:spPr>
-          <a:xfrm>
-            <a:off x="640080" y="731520"/>
-            <a:ext cx="420624" cy="164592"/>
-          </a:xfrm>
-          <a:prstGeom prst="rect">
-            <a:avLst/>
-          </a:prstGeom>
-          <a:noFill/>
-          <a:ln/>
-        </p:spPr>
-        <p:txBody>
-          <a:bodyPr wrap="square" lIns="0" tIns="0" rIns="0" bIns="0" rtlCol="0" anchor="ctr"/>
-          <a:lstStyle/>
-          <a:p>
-            <a:pPr algn="ctr" indent="0" marL="0">
-              <a:buNone/>
-            </a:pPr>
-            <a:r>
-              <a:rPr lang="en-US" sz="1100" b="1" dirty="0">
-                <a:solidFill>
-                  <a:srgbClr val="FFFFFF"/>
-                </a:solidFill>
-                <a:latin typeface="Aptos" pitchFamily="34" charset="0"/>
-                <a:ea typeface="Aptos" pitchFamily="34" charset="-122"/>
-                <a:cs typeface="Aptos" pitchFamily="34" charset="-120"/>
-              </a:rPr>
-              <a:t>14</a:t>
-            </a:r>
-            <a:endParaRPr lang="en-US" sz="1100" dirty="0"/>
-          </a:p>
-        </p:txBody>
-      </p:sp>
-      <p:sp>
-        <p:nvSpPr>
-          <p:cNvPr id="10" name="Text 8"/>
-          <p:cNvSpPr/>
-          <p:nvPr/>
-        </p:nvSpPr>
-        <p:spPr>
-          <a:xfrm>
-            <a:off x="640080" y="621792"/>
             <a:ext cx="10881360" cy="713232"/>
           </a:xfrm>
           <a:prstGeom prst="rect">
@@ -12164,14 +13873,14 @@
       </p:sp>
       <p:sp>
         <p:nvSpPr>
-          <p:cNvPr id="11" name="Text 9"/>
+          <p:cNvPr id="9" name="Text 7"/>
           <p:cNvSpPr/>
           <p:nvPr/>
         </p:nvSpPr>
         <p:spPr>
           <a:xfrm>
             <a:off x="868680" y="1508760"/>
-            <a:ext cx="6537960" cy="4160520"/>
+            <a:ext cx="6309360" cy="4160520"/>
           </a:xfrm>
           <a:prstGeom prst="rect">
             <a:avLst/>
@@ -12230,18 +13939,18 @@
       </p:sp>
       <p:sp>
         <p:nvSpPr>
-          <p:cNvPr id="12" name="Shape 10"/>
-          <p:cNvSpPr/>
-          <p:nvPr/>
-        </p:nvSpPr>
-        <p:spPr>
-          <a:xfrm>
-            <a:off x="7909560" y="1417320"/>
-            <a:ext cx="3154680" cy="1828800"/>
+          <p:cNvPr id="10" name="Shape 8"/>
+          <p:cNvSpPr/>
+          <p:nvPr/>
+        </p:nvSpPr>
+        <p:spPr>
+          <a:xfrm>
+            <a:off x="7635240" y="1325880"/>
+            <a:ext cx="3474720" cy="1325880"/>
           </a:xfrm>
           <a:prstGeom prst="roundRect">
             <a:avLst>
-              <a:gd name="adj" fmla="val 6000"/>
+              <a:gd name="adj" fmla="val 8276"/>
             </a:avLst>
           </a:prstGeom>
           <a:solidFill>
@@ -12257,14 +13966,14 @@
       </p:sp>
       <p:sp>
         <p:nvSpPr>
-          <p:cNvPr id="13" name="Text 11"/>
-          <p:cNvSpPr/>
-          <p:nvPr/>
-        </p:nvSpPr>
-        <p:spPr>
-          <a:xfrm>
-            <a:off x="8074152" y="1563624"/>
-            <a:ext cx="2825496" cy="256032"/>
+          <p:cNvPr id="11" name="Text 9"/>
+          <p:cNvSpPr/>
+          <p:nvPr/>
+        </p:nvSpPr>
+        <p:spPr>
+          <a:xfrm>
+            <a:off x="7799832" y="1472184"/>
+            <a:ext cx="3145536" cy="256032"/>
           </a:xfrm>
           <a:prstGeom prst="rect">
             <a:avLst/>
@@ -12288,7 +13997,7 @@
                 <a:ea typeface="Aptos" pitchFamily="34" charset="-122"/>
                 <a:cs typeface="Aptos" pitchFamily="34" charset="-120"/>
               </a:rPr>
-              <a:t>Key idea</a:t>
+              <a:t>Data decision</a:t>
             </a:r>
             <a:endParaRPr lang="en-US" sz="1300" dirty="0"/>
           </a:p>
@@ -12296,14 +14005,14 @@
       </p:sp>
       <p:sp>
         <p:nvSpPr>
-          <p:cNvPr id="14" name="Text 12"/>
-          <p:cNvSpPr/>
-          <p:nvPr/>
-        </p:nvSpPr>
-        <p:spPr>
-          <a:xfrm>
-            <a:off x="8074152" y="1920240"/>
-            <a:ext cx="2825496" cy="1188720"/>
+          <p:cNvPr id="12" name="Text 10"/>
+          <p:cNvSpPr/>
+          <p:nvPr/>
+        </p:nvSpPr>
+        <p:spPr>
+          <a:xfrm>
+            <a:off x="7799832" y="1828800"/>
+            <a:ext cx="3145536" cy="685800"/>
           </a:xfrm>
           <a:prstGeom prst="rect">
             <a:avLst/>
@@ -12337,21 +14046,212 @@
       </p:sp>
       <p:sp>
         <p:nvSpPr>
-          <p:cNvPr id="15" name="Shape 13"/>
-          <p:cNvSpPr/>
-          <p:nvPr/>
-        </p:nvSpPr>
-        <p:spPr>
-          <a:xfrm>
-            <a:off x="7909560" y="3520440"/>
-            <a:ext cx="3154680" cy="1737360"/>
+          <p:cNvPr id="13" name="Shape 11"/>
+          <p:cNvSpPr/>
+          <p:nvPr/>
+        </p:nvSpPr>
+        <p:spPr>
+          <a:xfrm>
+            <a:off x="7635240" y="2788920"/>
+            <a:ext cx="3474720" cy="1536192"/>
           </a:xfrm>
           <a:prstGeom prst="roundRect">
             <a:avLst>
-              <a:gd name="adj" fmla="val 6316"/>
+              <a:gd name="adj" fmla="val 7143"/>
             </a:avLst>
           </a:prstGeom>
           <a:solidFill>
+            <a:srgbClr val="FFFFFF">
+              <a:alpha val="88000"/>
+            </a:srgbClr>
+          </a:solidFill>
+          <a:ln w="12700">
+            <a:solidFill>
+              <a:srgbClr val="D6E8F2"/>
+            </a:solidFill>
+            <a:prstDash val="solid"/>
+          </a:ln>
+        </p:spPr>
+      </p:sp>
+      <p:sp>
+        <p:nvSpPr>
+          <p:cNvPr id="14" name="Shape 12"/>
+          <p:cNvSpPr/>
+          <p:nvPr/>
+        </p:nvSpPr>
+        <p:spPr>
+          <a:xfrm>
+            <a:off x="8138160" y="3474720"/>
+            <a:ext cx="256032" cy="411480"/>
+          </a:xfrm>
+          <a:prstGeom prst="rect">
+            <a:avLst/>
+          </a:prstGeom>
+          <a:solidFill>
+            <a:srgbClr val="0068B7"/>
+          </a:solidFill>
+          <a:ln w="12700">
+            <a:solidFill>
+              <a:srgbClr val="0068B7"/>
+            </a:solidFill>
+            <a:prstDash val="solid"/>
+          </a:ln>
+        </p:spPr>
+      </p:sp>
+      <p:sp>
+        <p:nvSpPr>
+          <p:cNvPr id="15" name="Shape 13"/>
+          <p:cNvSpPr/>
+          <p:nvPr/>
+        </p:nvSpPr>
+        <p:spPr>
+          <a:xfrm>
+            <a:off x="8577072" y="3172968"/>
+            <a:ext cx="256032" cy="713232"/>
+          </a:xfrm>
+          <a:prstGeom prst="rect">
+            <a:avLst/>
+          </a:prstGeom>
+          <a:solidFill>
+            <a:srgbClr val="2F8A28"/>
+          </a:solidFill>
+          <a:ln w="12700">
+            <a:solidFill>
+              <a:srgbClr val="2F8A28"/>
+            </a:solidFill>
+            <a:prstDash val="solid"/>
+          </a:ln>
+        </p:spPr>
+      </p:sp>
+      <p:sp>
+        <p:nvSpPr>
+          <p:cNvPr id="16" name="Shape 14"/>
+          <p:cNvSpPr/>
+          <p:nvPr/>
+        </p:nvSpPr>
+        <p:spPr>
+          <a:xfrm>
+            <a:off x="9015984" y="2880360"/>
+            <a:ext cx="256032" cy="1005840"/>
+          </a:xfrm>
+          <a:prstGeom prst="rect">
+            <a:avLst/>
+          </a:prstGeom>
+          <a:solidFill>
+            <a:srgbClr val="D69A2D"/>
+          </a:solidFill>
+          <a:ln w="12700">
+            <a:solidFill>
+              <a:srgbClr val="D69A2D"/>
+            </a:solidFill>
+            <a:prstDash val="solid"/>
+          </a:ln>
+        </p:spPr>
+      </p:sp>
+      <p:sp>
+        <p:nvSpPr>
+          <p:cNvPr id="17" name="Shape 15"/>
+          <p:cNvSpPr/>
+          <p:nvPr/>
+        </p:nvSpPr>
+        <p:spPr>
+          <a:xfrm>
+            <a:off x="9454896" y="3319272"/>
+            <a:ext cx="256032" cy="566928"/>
+          </a:xfrm>
+          <a:prstGeom prst="rect">
+            <a:avLst/>
+          </a:prstGeom>
+          <a:solidFill>
+            <a:srgbClr val="6A4CA3"/>
+          </a:solidFill>
+          <a:ln w="12700">
+            <a:solidFill>
+              <a:srgbClr val="6A4CA3"/>
+            </a:solidFill>
+            <a:prstDash val="solid"/>
+          </a:ln>
+        </p:spPr>
+      </p:sp>
+      <p:sp>
+        <p:nvSpPr>
+          <p:cNvPr id="18" name="Shape 16"/>
+          <p:cNvSpPr/>
+          <p:nvPr/>
+        </p:nvSpPr>
+        <p:spPr>
+          <a:xfrm>
+            <a:off x="8019288" y="3886200"/>
+            <a:ext cx="2706624" cy="0"/>
+          </a:xfrm>
+          <a:prstGeom prst="line">
+            <a:avLst/>
+          </a:prstGeom>
+          <a:noFill/>
+          <a:ln w="15240">
+            <a:solidFill>
+              <a:srgbClr val="003A63"/>
+            </a:solidFill>
+            <a:prstDash val="solid"/>
+          </a:ln>
+        </p:spPr>
+      </p:sp>
+      <p:sp>
+        <p:nvSpPr>
+          <p:cNvPr id="19" name="Text 17"/>
+          <p:cNvSpPr/>
+          <p:nvPr/>
+        </p:nvSpPr>
+        <p:spPr>
+          <a:xfrm>
+            <a:off x="7863840" y="3017520"/>
+            <a:ext cx="3017520" cy="201168"/>
+          </a:xfrm>
+          <a:prstGeom prst="rect">
+            <a:avLst/>
+          </a:prstGeom>
+          <a:noFill/>
+          <a:ln/>
+        </p:spPr>
+        <p:txBody>
+          <a:bodyPr wrap="square" lIns="0" tIns="0" rIns="0" bIns="0" rtlCol="0" anchor="ctr"/>
+          <a:lstStyle/>
+          <a:p>
+            <a:pPr algn="ctr" indent="0" marL="0">
+              <a:buNone/>
+            </a:pPr>
+            <a:r>
+              <a:rPr lang="en-US" sz="1050" b="1" dirty="0">
+                <a:solidFill>
+                  <a:srgbClr val="003A63"/>
+                </a:solidFill>
+                <a:latin typeface="Aptos" pitchFamily="34" charset="0"/>
+                <a:ea typeface="Aptos" pitchFamily="34" charset="-122"/>
+                <a:cs typeface="Aptos" pitchFamily="34" charset="-120"/>
+              </a:rPr>
+              <a:t>Measure and monitor</a:t>
+            </a:r>
+            <a:endParaRPr lang="en-US" sz="1050" dirty="0"/>
+          </a:p>
+        </p:txBody>
+      </p:sp>
+      <p:sp>
+        <p:nvSpPr>
+          <p:cNvPr id="20" name="Shape 18"/>
+          <p:cNvSpPr/>
+          <p:nvPr/>
+        </p:nvSpPr>
+        <p:spPr>
+          <a:xfrm>
+            <a:off x="7635240" y="4498848"/>
+            <a:ext cx="3474720" cy="1143000"/>
+          </a:xfrm>
+          <a:prstGeom prst="roundRect">
+            <a:avLst>
+              <a:gd name="adj" fmla="val 9600"/>
+            </a:avLst>
+          </a:prstGeom>
+          <a:solidFill>
             <a:srgbClr val="EAF6F8"/>
           </a:solidFill>
           <a:ln w="12700">
@@ -12364,14 +14264,14 @@
       </p:sp>
       <p:sp>
         <p:nvSpPr>
-          <p:cNvPr id="16" name="Text 14"/>
-          <p:cNvSpPr/>
-          <p:nvPr/>
-        </p:nvSpPr>
-        <p:spPr>
-          <a:xfrm>
-            <a:off x="8074152" y="3666744"/>
-            <a:ext cx="2825496" cy="256032"/>
+          <p:cNvPr id="21" name="Text 19"/>
+          <p:cNvSpPr/>
+          <p:nvPr/>
+        </p:nvSpPr>
+        <p:spPr>
+          <a:xfrm>
+            <a:off x="7799832" y="4645152"/>
+            <a:ext cx="3145536" cy="256032"/>
           </a:xfrm>
           <a:prstGeom prst="rect">
             <a:avLst/>
@@ -12395,7 +14295,7 @@
                 <a:ea typeface="Aptos" pitchFamily="34" charset="-122"/>
                 <a:cs typeface="Aptos" pitchFamily="34" charset="-120"/>
               </a:rPr>
-              <a:t>Use this for</a:t>
+              <a:t>How to validate</a:t>
             </a:r>
             <a:endParaRPr lang="en-US" sz="1300" dirty="0"/>
           </a:p>
@@ -12403,14 +14303,14 @@
       </p:sp>
       <p:sp>
         <p:nvSpPr>
-          <p:cNvPr id="17" name="Text 15"/>
-          <p:cNvSpPr/>
-          <p:nvPr/>
-        </p:nvSpPr>
-        <p:spPr>
-          <a:xfrm>
-            <a:off x="8074152" y="4023360"/>
-            <a:ext cx="2825496" cy="1097280"/>
+          <p:cNvPr id="22" name="Text 20"/>
+          <p:cNvSpPr/>
+          <p:nvPr/>
+        </p:nvSpPr>
+        <p:spPr>
+          <a:xfrm>
+            <a:off x="7799832" y="5001768"/>
+            <a:ext cx="3145536" cy="502920"/>
           </a:xfrm>
           <a:prstGeom prst="rect">
             <a:avLst/>
@@ -12436,7 +14336,7 @@
                 <a:ea typeface="Aptos" pitchFamily="34" charset="-122"/>
                 <a:cs typeface="Aptos" pitchFamily="34" charset="-120"/>
               </a:rPr>
-              <a:t>Connect the concept to public health decisions, safeguards, documentation, or implementation work.</a:t>
+              <a:t>Connect the concept to data quality, model performance, validation evidence, monitoring measures, and decisions that remain under human control.</a:t>
             </a:r>
             <a:endParaRPr lang="en-US" sz="1550" dirty="0"/>
           </a:p>
@@ -12610,8 +14510,8 @@
         </p:nvSpPr>
         <p:spPr>
           <a:xfrm>
-            <a:off x="9966960" y="6537960"/>
-            <a:ext cx="1645920" cy="201168"/>
+            <a:off x="9646920" y="6537960"/>
+            <a:ext cx="1965960" cy="201168"/>
           </a:xfrm>
           <a:prstGeom prst="rect">
             <a:avLst/>
@@ -12635,7 +14535,7 @@
                 <a:ea typeface="Aptos" pitchFamily="34" charset="-122"/>
                 <a:cs typeface="Aptos" pitchFamily="34" charset="-120"/>
               </a:rPr>
-              <a:t>Â© Paula Soper</a:t>
+              <a:t>Copyright Paula Soper</a:t>
             </a:r>
             <a:endParaRPr lang="en-US" sz="800" dirty="0"/>
           </a:p>
@@ -12730,7 +14630,7 @@
         <p:spPr>
           <a:xfrm>
             <a:off x="868680" y="1508760"/>
-            <a:ext cx="6537960" cy="4160520"/>
+            <a:ext cx="6309360" cy="4160520"/>
           </a:xfrm>
           <a:prstGeom prst="rect">
             <a:avLst/>
@@ -12767,12 +14667,12 @@
         </p:nvSpPr>
         <p:spPr>
           <a:xfrm>
-            <a:off x="7909560" y="1417320"/>
-            <a:ext cx="3154680" cy="1828800"/>
+            <a:off x="7635240" y="1325880"/>
+            <a:ext cx="3474720" cy="1325880"/>
           </a:xfrm>
           <a:prstGeom prst="roundRect">
             <a:avLst>
-              <a:gd name="adj" fmla="val 6000"/>
+              <a:gd name="adj" fmla="val 8276"/>
             </a:avLst>
           </a:prstGeom>
           <a:solidFill>
@@ -12794,8 +14694,8 @@
         </p:nvSpPr>
         <p:spPr>
           <a:xfrm>
-            <a:off x="8074152" y="1563624"/>
-            <a:ext cx="2825496" cy="256032"/>
+            <a:off x="7799832" y="1472184"/>
+            <a:ext cx="3145536" cy="256032"/>
           </a:xfrm>
           <a:prstGeom prst="rect">
             <a:avLst/>
@@ -12819,7 +14719,7 @@
                 <a:ea typeface="Aptos" pitchFamily="34" charset="-122"/>
                 <a:cs typeface="Aptos" pitchFamily="34" charset="-120"/>
               </a:rPr>
-              <a:t>Key idea</a:t>
+              <a:t>Data decision</a:t>
             </a:r>
             <a:endParaRPr lang="en-US" sz="1300" dirty="0"/>
           </a:p>
@@ -12833,8 +14733,8 @@
         </p:nvSpPr>
         <p:spPr>
           <a:xfrm>
-            <a:off x="8074152" y="1920240"/>
-            <a:ext cx="2825496" cy="1188720"/>
+            <a:off x="7799832" y="1828800"/>
+            <a:ext cx="3145536" cy="685800"/>
           </a:xfrm>
           <a:prstGeom prst="rect">
             <a:avLst/>
@@ -12874,15 +14774,206 @@
         </p:nvSpPr>
         <p:spPr>
           <a:xfrm>
-            <a:off x="7909560" y="3520440"/>
-            <a:ext cx="3154680" cy="1737360"/>
+            <a:off x="7635240" y="2788920"/>
+            <a:ext cx="3474720" cy="1536192"/>
           </a:xfrm>
           <a:prstGeom prst="roundRect">
             <a:avLst>
-              <a:gd name="adj" fmla="val 6316"/>
+              <a:gd name="adj" fmla="val 7143"/>
             </a:avLst>
           </a:prstGeom>
           <a:solidFill>
+            <a:srgbClr val="FFFFFF">
+              <a:alpha val="88000"/>
+            </a:srgbClr>
+          </a:solidFill>
+          <a:ln w="12700">
+            <a:solidFill>
+              <a:srgbClr val="D6E8F2"/>
+            </a:solidFill>
+            <a:prstDash val="solid"/>
+          </a:ln>
+        </p:spPr>
+      </p:sp>
+      <p:sp>
+        <p:nvSpPr>
+          <p:cNvPr id="14" name="Shape 12"/>
+          <p:cNvSpPr/>
+          <p:nvPr/>
+        </p:nvSpPr>
+        <p:spPr>
+          <a:xfrm>
+            <a:off x="8138160" y="3474720"/>
+            <a:ext cx="256032" cy="411480"/>
+          </a:xfrm>
+          <a:prstGeom prst="rect">
+            <a:avLst/>
+          </a:prstGeom>
+          <a:solidFill>
+            <a:srgbClr val="0068B7"/>
+          </a:solidFill>
+          <a:ln w="12700">
+            <a:solidFill>
+              <a:srgbClr val="0068B7"/>
+            </a:solidFill>
+            <a:prstDash val="solid"/>
+          </a:ln>
+        </p:spPr>
+      </p:sp>
+      <p:sp>
+        <p:nvSpPr>
+          <p:cNvPr id="15" name="Shape 13"/>
+          <p:cNvSpPr/>
+          <p:nvPr/>
+        </p:nvSpPr>
+        <p:spPr>
+          <a:xfrm>
+            <a:off x="8577072" y="3172968"/>
+            <a:ext cx="256032" cy="713232"/>
+          </a:xfrm>
+          <a:prstGeom prst="rect">
+            <a:avLst/>
+          </a:prstGeom>
+          <a:solidFill>
+            <a:srgbClr val="2F8A28"/>
+          </a:solidFill>
+          <a:ln w="12700">
+            <a:solidFill>
+              <a:srgbClr val="2F8A28"/>
+            </a:solidFill>
+            <a:prstDash val="solid"/>
+          </a:ln>
+        </p:spPr>
+      </p:sp>
+      <p:sp>
+        <p:nvSpPr>
+          <p:cNvPr id="16" name="Shape 14"/>
+          <p:cNvSpPr/>
+          <p:nvPr/>
+        </p:nvSpPr>
+        <p:spPr>
+          <a:xfrm>
+            <a:off x="9015984" y="2880360"/>
+            <a:ext cx="256032" cy="1005840"/>
+          </a:xfrm>
+          <a:prstGeom prst="rect">
+            <a:avLst/>
+          </a:prstGeom>
+          <a:solidFill>
+            <a:srgbClr val="D69A2D"/>
+          </a:solidFill>
+          <a:ln w="12700">
+            <a:solidFill>
+              <a:srgbClr val="D69A2D"/>
+            </a:solidFill>
+            <a:prstDash val="solid"/>
+          </a:ln>
+        </p:spPr>
+      </p:sp>
+      <p:sp>
+        <p:nvSpPr>
+          <p:cNvPr id="17" name="Shape 15"/>
+          <p:cNvSpPr/>
+          <p:nvPr/>
+        </p:nvSpPr>
+        <p:spPr>
+          <a:xfrm>
+            <a:off x="9454896" y="3319272"/>
+            <a:ext cx="256032" cy="566928"/>
+          </a:xfrm>
+          <a:prstGeom prst="rect">
+            <a:avLst/>
+          </a:prstGeom>
+          <a:solidFill>
+            <a:srgbClr val="6A4CA3"/>
+          </a:solidFill>
+          <a:ln w="12700">
+            <a:solidFill>
+              <a:srgbClr val="6A4CA3"/>
+            </a:solidFill>
+            <a:prstDash val="solid"/>
+          </a:ln>
+        </p:spPr>
+      </p:sp>
+      <p:sp>
+        <p:nvSpPr>
+          <p:cNvPr id="18" name="Shape 16"/>
+          <p:cNvSpPr/>
+          <p:nvPr/>
+        </p:nvSpPr>
+        <p:spPr>
+          <a:xfrm>
+            <a:off x="8019288" y="3886200"/>
+            <a:ext cx="2706624" cy="0"/>
+          </a:xfrm>
+          <a:prstGeom prst="line">
+            <a:avLst/>
+          </a:prstGeom>
+          <a:noFill/>
+          <a:ln w="15240">
+            <a:solidFill>
+              <a:srgbClr val="003A63"/>
+            </a:solidFill>
+            <a:prstDash val="solid"/>
+          </a:ln>
+        </p:spPr>
+      </p:sp>
+      <p:sp>
+        <p:nvSpPr>
+          <p:cNvPr id="19" name="Text 17"/>
+          <p:cNvSpPr/>
+          <p:nvPr/>
+        </p:nvSpPr>
+        <p:spPr>
+          <a:xfrm>
+            <a:off x="7863840" y="3017520"/>
+            <a:ext cx="3017520" cy="201168"/>
+          </a:xfrm>
+          <a:prstGeom prst="rect">
+            <a:avLst/>
+          </a:prstGeom>
+          <a:noFill/>
+          <a:ln/>
+        </p:spPr>
+        <p:txBody>
+          <a:bodyPr wrap="square" lIns="0" tIns="0" rIns="0" bIns="0" rtlCol="0" anchor="ctr"/>
+          <a:lstStyle/>
+          <a:p>
+            <a:pPr algn="ctr" indent="0" marL="0">
+              <a:buNone/>
+            </a:pPr>
+            <a:r>
+              <a:rPr lang="en-US" sz="1050" b="1" dirty="0">
+                <a:solidFill>
+                  <a:srgbClr val="003A63"/>
+                </a:solidFill>
+                <a:latin typeface="Aptos" pitchFamily="34" charset="0"/>
+                <a:ea typeface="Aptos" pitchFamily="34" charset="-122"/>
+                <a:cs typeface="Aptos" pitchFamily="34" charset="-120"/>
+              </a:rPr>
+              <a:t>Measure and monitor</a:t>
+            </a:r>
+            <a:endParaRPr lang="en-US" sz="1050" dirty="0"/>
+          </a:p>
+        </p:txBody>
+      </p:sp>
+      <p:sp>
+        <p:nvSpPr>
+          <p:cNvPr id="20" name="Shape 18"/>
+          <p:cNvSpPr/>
+          <p:nvPr/>
+        </p:nvSpPr>
+        <p:spPr>
+          <a:xfrm>
+            <a:off x="7635240" y="4498848"/>
+            <a:ext cx="3474720" cy="1143000"/>
+          </a:xfrm>
+          <a:prstGeom prst="roundRect">
+            <a:avLst>
+              <a:gd name="adj" fmla="val 9600"/>
+            </a:avLst>
+          </a:prstGeom>
+          <a:solidFill>
             <a:srgbClr val="EAF6F8"/>
           </a:solidFill>
           <a:ln w="12700">
@@ -12895,14 +14986,14 @@
       </p:sp>
       <p:sp>
         <p:nvSpPr>
-          <p:cNvPr id="14" name="Text 12"/>
-          <p:cNvSpPr/>
-          <p:nvPr/>
-        </p:nvSpPr>
-        <p:spPr>
-          <a:xfrm>
-            <a:off x="8074152" y="3666744"/>
-            <a:ext cx="2825496" cy="256032"/>
+          <p:cNvPr id="21" name="Text 19"/>
+          <p:cNvSpPr/>
+          <p:nvPr/>
+        </p:nvSpPr>
+        <p:spPr>
+          <a:xfrm>
+            <a:off x="7799832" y="4645152"/>
+            <a:ext cx="3145536" cy="256032"/>
           </a:xfrm>
           <a:prstGeom prst="rect">
             <a:avLst/>
@@ -12926,7 +15017,7 @@
                 <a:ea typeface="Aptos" pitchFamily="34" charset="-122"/>
                 <a:cs typeface="Aptos" pitchFamily="34" charset="-120"/>
               </a:rPr>
-              <a:t>Use this for</a:t>
+              <a:t>How to validate</a:t>
             </a:r>
             <a:endParaRPr lang="en-US" sz="1300" dirty="0"/>
           </a:p>
@@ -12934,14 +15025,14 @@
       </p:sp>
       <p:sp>
         <p:nvSpPr>
-          <p:cNvPr id="15" name="Text 13"/>
-          <p:cNvSpPr/>
-          <p:nvPr/>
-        </p:nvSpPr>
-        <p:spPr>
-          <a:xfrm>
-            <a:off x="8074152" y="4023360"/>
-            <a:ext cx="2825496" cy="1097280"/>
+          <p:cNvPr id="22" name="Text 20"/>
+          <p:cNvSpPr/>
+          <p:nvPr/>
+        </p:nvSpPr>
+        <p:spPr>
+          <a:xfrm>
+            <a:off x="7799832" y="5001768"/>
+            <a:ext cx="3145536" cy="502920"/>
           </a:xfrm>
           <a:prstGeom prst="rect">
             <a:avLst/>
@@ -12967,7 +15058,7 @@
                 <a:ea typeface="Aptos" pitchFamily="34" charset="-122"/>
                 <a:cs typeface="Aptos" pitchFamily="34" charset="-120"/>
               </a:rPr>
-              <a:t>Connect the concept to public health decisions, safeguards, documentation, or implementation work.</a:t>
+              <a:t>Connect the concept to data quality, model performance, validation evidence, monitoring measures, and decisions that remain under human control.</a:t>
             </a:r>
             <a:endParaRPr lang="en-US" sz="1550" dirty="0"/>
           </a:p>
@@ -13141,8 +15232,8 @@
         </p:nvSpPr>
         <p:spPr>
           <a:xfrm>
-            <a:off x="9966960" y="6537960"/>
-            <a:ext cx="1645920" cy="201168"/>
+            <a:off x="9646920" y="6537960"/>
+            <a:ext cx="1965960" cy="201168"/>
           </a:xfrm>
           <a:prstGeom prst="rect">
             <a:avLst/>
@@ -13166,7 +15257,7 @@
                 <a:ea typeface="Aptos" pitchFamily="34" charset="-122"/>
                 <a:cs typeface="Aptos" pitchFamily="34" charset="-120"/>
               </a:rPr>
-              <a:t>Â© Paula Soper</a:t>
+              <a:t>Copyright Paula Soper</a:t>
             </a:r>
             <a:endParaRPr lang="en-US" sz="800" dirty="0"/>
           </a:p>
@@ -13509,46 +15600,7 @@
       </p:sp>
       <p:sp>
         <p:nvSpPr>
-          <p:cNvPr id="15" name="Text 13"/>
-          <p:cNvSpPr/>
-          <p:nvPr/>
-        </p:nvSpPr>
-        <p:spPr>
-          <a:xfrm>
-            <a:off x="8817864" y="4187952"/>
-            <a:ext cx="201168" cy="256032"/>
-          </a:xfrm>
-          <a:prstGeom prst="rect">
-            <a:avLst/>
-          </a:prstGeom>
-          <a:noFill/>
-          <a:ln/>
-        </p:spPr>
-        <p:txBody>
-          <a:bodyPr wrap="square" lIns="0" tIns="0" rIns="0" bIns="0" rtlCol="0" anchor="ctr"/>
-          <a:lstStyle/>
-          <a:p>
-            <a:pPr algn="ctr" indent="0" marL="0">
-              <a:buNone/>
-            </a:pPr>
-            <a:r>
-              <a:rPr lang="en-US" sz="1800" b="1" dirty="0">
-                <a:solidFill>
-                  <a:srgbClr val="0068B7"/>
-                </a:solidFill>
-                <a:latin typeface="Aptos" pitchFamily="34" charset="0"/>
-                <a:ea typeface="Aptos" pitchFamily="34" charset="-122"/>
-                <a:cs typeface="Aptos" pitchFamily="34" charset="-120"/>
-              </a:rPr>
-              <a:t>â†’</a:t>
-            </a:r>
-            <a:endParaRPr lang="en-US" sz="1800" dirty="0"/>
-          </a:p>
-        </p:txBody>
-      </p:sp>
-      <p:sp>
-        <p:nvSpPr>
-          <p:cNvPr id="16" name="Shape 14"/>
+          <p:cNvPr id="15" name="Shape 13"/>
           <p:cNvSpPr/>
           <p:nvPr/>
         </p:nvSpPr>
@@ -13575,7 +15627,7 @@
       </p:sp>
       <p:sp>
         <p:nvSpPr>
-          <p:cNvPr id="17" name="Text 15"/>
+          <p:cNvPr id="16" name="Text 14"/>
           <p:cNvSpPr/>
           <p:nvPr/>
         </p:nvSpPr>
@@ -13616,46 +15668,7 @@
       </p:sp>
       <p:sp>
         <p:nvSpPr>
-          <p:cNvPr id="18" name="Text 16"/>
-          <p:cNvSpPr/>
-          <p:nvPr/>
-        </p:nvSpPr>
-        <p:spPr>
-          <a:xfrm>
-            <a:off x="10046208" y="4187952"/>
-            <a:ext cx="201168" cy="256032"/>
-          </a:xfrm>
-          <a:prstGeom prst="rect">
-            <a:avLst/>
-          </a:prstGeom>
-          <a:noFill/>
-          <a:ln/>
-        </p:spPr>
-        <p:txBody>
-          <a:bodyPr wrap="square" lIns="0" tIns="0" rIns="0" bIns="0" rtlCol="0" anchor="ctr"/>
-          <a:lstStyle/>
-          <a:p>
-            <a:pPr algn="ctr" indent="0" marL="0">
-              <a:buNone/>
-            </a:pPr>
-            <a:r>
-              <a:rPr lang="en-US" sz="1800" b="1" dirty="0">
-                <a:solidFill>
-                  <a:srgbClr val="0068B7"/>
-                </a:solidFill>
-                <a:latin typeface="Aptos" pitchFamily="34" charset="0"/>
-                <a:ea typeface="Aptos" pitchFamily="34" charset="-122"/>
-                <a:cs typeface="Aptos" pitchFamily="34" charset="-120"/>
-              </a:rPr>
-              <a:t>â†’</a:t>
-            </a:r>
-            <a:endParaRPr lang="en-US" sz="1800" dirty="0"/>
-          </a:p>
-        </p:txBody>
-      </p:sp>
-      <p:sp>
-        <p:nvSpPr>
-          <p:cNvPr id="19" name="Shape 17"/>
+          <p:cNvPr id="17" name="Shape 15"/>
           <p:cNvSpPr/>
           <p:nvPr/>
         </p:nvSpPr>
@@ -13682,7 +15695,7 @@
       </p:sp>
       <p:sp>
         <p:nvSpPr>
-          <p:cNvPr id="20" name="Text 18"/>
+          <p:cNvPr id="18" name="Text 16"/>
           <p:cNvSpPr/>
           <p:nvPr/>
         </p:nvSpPr>
@@ -13889,8 +15902,8 @@
         </p:nvSpPr>
         <p:spPr>
           <a:xfrm>
-            <a:off x="9966960" y="6537960"/>
-            <a:ext cx="1645920" cy="201168"/>
+            <a:off x="9646920" y="6537960"/>
+            <a:ext cx="1965960" cy="201168"/>
           </a:xfrm>
           <a:prstGeom prst="rect">
             <a:avLst/>
@@ -13914,7 +15927,7 @@
                 <a:ea typeface="Aptos" pitchFamily="34" charset="-122"/>
                 <a:cs typeface="Aptos" pitchFamily="34" charset="-120"/>
               </a:rPr>
-              <a:t>Â© Paula Soper</a:t>
+              <a:t>Copyright Paula Soper</a:t>
             </a:r>
             <a:endParaRPr lang="en-US" sz="800" dirty="0"/>
           </a:p>
@@ -14257,46 +16270,7 @@
       </p:sp>
       <p:sp>
         <p:nvSpPr>
-          <p:cNvPr id="15" name="Text 13"/>
-          <p:cNvSpPr/>
-          <p:nvPr/>
-        </p:nvSpPr>
-        <p:spPr>
-          <a:xfrm>
-            <a:off x="8817864" y="4187952"/>
-            <a:ext cx="201168" cy="256032"/>
-          </a:xfrm>
-          <a:prstGeom prst="rect">
-            <a:avLst/>
-          </a:prstGeom>
-          <a:noFill/>
-          <a:ln/>
-        </p:spPr>
-        <p:txBody>
-          <a:bodyPr wrap="square" lIns="0" tIns="0" rIns="0" bIns="0" rtlCol="0" anchor="ctr"/>
-          <a:lstStyle/>
-          <a:p>
-            <a:pPr algn="ctr" indent="0" marL="0">
-              <a:buNone/>
-            </a:pPr>
-            <a:r>
-              <a:rPr lang="en-US" sz="1800" b="1" dirty="0">
-                <a:solidFill>
-                  <a:srgbClr val="0068B7"/>
-                </a:solidFill>
-                <a:latin typeface="Aptos" pitchFamily="34" charset="0"/>
-                <a:ea typeface="Aptos" pitchFamily="34" charset="-122"/>
-                <a:cs typeface="Aptos" pitchFamily="34" charset="-120"/>
-              </a:rPr>
-              <a:t>â†’</a:t>
-            </a:r>
-            <a:endParaRPr lang="en-US" sz="1800" dirty="0"/>
-          </a:p>
-        </p:txBody>
-      </p:sp>
-      <p:sp>
-        <p:nvSpPr>
-          <p:cNvPr id="16" name="Shape 14"/>
+          <p:cNvPr id="15" name="Shape 13"/>
           <p:cNvSpPr/>
           <p:nvPr/>
         </p:nvSpPr>
@@ -14323,7 +16297,7 @@
       </p:sp>
       <p:sp>
         <p:nvSpPr>
-          <p:cNvPr id="17" name="Text 15"/>
+          <p:cNvPr id="16" name="Text 14"/>
           <p:cNvSpPr/>
           <p:nvPr/>
         </p:nvSpPr>
@@ -14364,46 +16338,7 @@
       </p:sp>
       <p:sp>
         <p:nvSpPr>
-          <p:cNvPr id="18" name="Text 16"/>
-          <p:cNvSpPr/>
-          <p:nvPr/>
-        </p:nvSpPr>
-        <p:spPr>
-          <a:xfrm>
-            <a:off x="10046208" y="4187952"/>
-            <a:ext cx="201168" cy="256032"/>
-          </a:xfrm>
-          <a:prstGeom prst="rect">
-            <a:avLst/>
-          </a:prstGeom>
-          <a:noFill/>
-          <a:ln/>
-        </p:spPr>
-        <p:txBody>
-          <a:bodyPr wrap="square" lIns="0" tIns="0" rIns="0" bIns="0" rtlCol="0" anchor="ctr"/>
-          <a:lstStyle/>
-          <a:p>
-            <a:pPr algn="ctr" indent="0" marL="0">
-              <a:buNone/>
-            </a:pPr>
-            <a:r>
-              <a:rPr lang="en-US" sz="1800" b="1" dirty="0">
-                <a:solidFill>
-                  <a:srgbClr val="0068B7"/>
-                </a:solidFill>
-                <a:latin typeface="Aptos" pitchFamily="34" charset="0"/>
-                <a:ea typeface="Aptos" pitchFamily="34" charset="-122"/>
-                <a:cs typeface="Aptos" pitchFamily="34" charset="-120"/>
-              </a:rPr>
-              <a:t>â†’</a:t>
-            </a:r>
-            <a:endParaRPr lang="en-US" sz="1800" dirty="0"/>
-          </a:p>
-        </p:txBody>
-      </p:sp>
-      <p:sp>
-        <p:nvSpPr>
-          <p:cNvPr id="19" name="Shape 17"/>
+          <p:cNvPr id="17" name="Shape 15"/>
           <p:cNvSpPr/>
           <p:nvPr/>
         </p:nvSpPr>
@@ -14430,7 +16365,7 @@
       </p:sp>
       <p:sp>
         <p:nvSpPr>
-          <p:cNvPr id="20" name="Text 18"/>
+          <p:cNvPr id="18" name="Text 16"/>
           <p:cNvSpPr/>
           <p:nvPr/>
         </p:nvSpPr>
@@ -14637,8 +16572,8 @@
         </p:nvSpPr>
         <p:spPr>
           <a:xfrm>
-            <a:off x="9966960" y="6537960"/>
-            <a:ext cx="1645920" cy="201168"/>
+            <a:off x="9646920" y="6537960"/>
+            <a:ext cx="1965960" cy="201168"/>
           </a:xfrm>
           <a:prstGeom prst="rect">
             <a:avLst/>
@@ -14662,7 +16597,7 @@
                 <a:ea typeface="Aptos" pitchFamily="34" charset="-122"/>
                 <a:cs typeface="Aptos" pitchFamily="34" charset="-120"/>
               </a:rPr>
-              <a:t>Â© Paula Soper</a:t>
+              <a:t>Copyright Paula Soper</a:t>
             </a:r>
             <a:endParaRPr lang="en-US" sz="800" dirty="0"/>
           </a:p>
@@ -14709,77 +16644,13 @@
       </p:sp>
       <p:sp>
         <p:nvSpPr>
-          <p:cNvPr id="8" name="Shape 6"/>
+          <p:cNvPr id="8" name="Text 6"/>
           <p:cNvSpPr/>
           <p:nvPr/>
         </p:nvSpPr>
         <p:spPr>
           <a:xfrm>
             <a:off x="640080" y="658368"/>
-            <a:ext cx="420624" cy="420624"/>
-          </a:xfrm>
-          <a:prstGeom prst="ellipse">
-            <a:avLst/>
-          </a:prstGeom>
-          <a:solidFill>
-            <a:srgbClr val="0068B7"/>
-          </a:solidFill>
-          <a:ln w="12700">
-            <a:solidFill>
-              <a:srgbClr val="0068B7"/>
-            </a:solidFill>
-            <a:prstDash val="solid"/>
-          </a:ln>
-        </p:spPr>
-      </p:sp>
-      <p:sp>
-        <p:nvSpPr>
-          <p:cNvPr id="9" name="Text 7"/>
-          <p:cNvSpPr/>
-          <p:nvPr/>
-        </p:nvSpPr>
-        <p:spPr>
-          <a:xfrm>
-            <a:off x="640080" y="731520"/>
-            <a:ext cx="420624" cy="164592"/>
-          </a:xfrm>
-          <a:prstGeom prst="rect">
-            <a:avLst/>
-          </a:prstGeom>
-          <a:noFill/>
-          <a:ln/>
-        </p:spPr>
-        <p:txBody>
-          <a:bodyPr wrap="square" lIns="0" tIns="0" rIns="0" bIns="0" rtlCol="0" anchor="ctr"/>
-          <a:lstStyle/>
-          <a:p>
-            <a:pPr algn="ctr" indent="0" marL="0">
-              <a:buNone/>
-            </a:pPr>
-            <a:r>
-              <a:rPr lang="en-US" sz="1100" b="1" dirty="0">
-                <a:solidFill>
-                  <a:srgbClr val="FFFFFF"/>
-                </a:solidFill>
-                <a:latin typeface="Aptos" pitchFamily="34" charset="0"/>
-                <a:ea typeface="Aptos" pitchFamily="34" charset="-122"/>
-                <a:cs typeface="Aptos" pitchFamily="34" charset="-120"/>
-              </a:rPr>
-              <a:t>1</a:t>
-            </a:r>
-            <a:endParaRPr lang="en-US" sz="1100" dirty="0"/>
-          </a:p>
-        </p:txBody>
-      </p:sp>
-      <p:sp>
-        <p:nvSpPr>
-          <p:cNvPr id="10" name="Text 8"/>
-          <p:cNvSpPr/>
-          <p:nvPr/>
-        </p:nvSpPr>
-        <p:spPr>
-          <a:xfrm>
-            <a:off x="640080" y="621792"/>
             <a:ext cx="10881360" cy="713232"/>
           </a:xfrm>
           <a:prstGeom prst="rect">
@@ -14814,14 +16685,14 @@
       </p:sp>
       <p:sp>
         <p:nvSpPr>
-          <p:cNvPr id="11" name="Text 9"/>
+          <p:cNvPr id="9" name="Text 7"/>
           <p:cNvSpPr/>
           <p:nvPr/>
         </p:nvSpPr>
         <p:spPr>
           <a:xfrm>
             <a:off x="868680" y="1508760"/>
-            <a:ext cx="6537960" cy="4160520"/>
+            <a:ext cx="6309360" cy="4160520"/>
           </a:xfrm>
           <a:prstGeom prst="rect">
             <a:avLst/>
@@ -14880,18 +16751,18 @@
       </p:sp>
       <p:sp>
         <p:nvSpPr>
-          <p:cNvPr id="12" name="Shape 10"/>
-          <p:cNvSpPr/>
-          <p:nvPr/>
-        </p:nvSpPr>
-        <p:spPr>
-          <a:xfrm>
-            <a:off x="7909560" y="1417320"/>
-            <a:ext cx="3154680" cy="1828800"/>
+          <p:cNvPr id="10" name="Shape 8"/>
+          <p:cNvSpPr/>
+          <p:nvPr/>
+        </p:nvSpPr>
+        <p:spPr>
+          <a:xfrm>
+            <a:off x="7635240" y="1325880"/>
+            <a:ext cx="3474720" cy="1325880"/>
           </a:xfrm>
           <a:prstGeom prst="roundRect">
             <a:avLst>
-              <a:gd name="adj" fmla="val 6000"/>
+              <a:gd name="adj" fmla="val 8276"/>
             </a:avLst>
           </a:prstGeom>
           <a:solidFill>
@@ -14907,14 +16778,14 @@
       </p:sp>
       <p:sp>
         <p:nvSpPr>
-          <p:cNvPr id="13" name="Text 11"/>
-          <p:cNvSpPr/>
-          <p:nvPr/>
-        </p:nvSpPr>
-        <p:spPr>
-          <a:xfrm>
-            <a:off x="8074152" y="1563624"/>
-            <a:ext cx="2825496" cy="256032"/>
+          <p:cNvPr id="11" name="Text 9"/>
+          <p:cNvSpPr/>
+          <p:nvPr/>
+        </p:nvSpPr>
+        <p:spPr>
+          <a:xfrm>
+            <a:off x="7799832" y="1472184"/>
+            <a:ext cx="3145536" cy="256032"/>
           </a:xfrm>
           <a:prstGeom prst="rect">
             <a:avLst/>
@@ -14938,7 +16809,7 @@
                 <a:ea typeface="Aptos" pitchFamily="34" charset="-122"/>
                 <a:cs typeface="Aptos" pitchFamily="34" charset="-120"/>
               </a:rPr>
-              <a:t>Key idea</a:t>
+              <a:t>Data decision</a:t>
             </a:r>
             <a:endParaRPr lang="en-US" sz="1300" dirty="0"/>
           </a:p>
@@ -14946,14 +16817,14 @@
       </p:sp>
       <p:sp>
         <p:nvSpPr>
-          <p:cNvPr id="14" name="Text 12"/>
-          <p:cNvSpPr/>
-          <p:nvPr/>
-        </p:nvSpPr>
-        <p:spPr>
-          <a:xfrm>
-            <a:off x="8074152" y="1920240"/>
-            <a:ext cx="2825496" cy="1188720"/>
+          <p:cNvPr id="12" name="Text 10"/>
+          <p:cNvSpPr/>
+          <p:nvPr/>
+        </p:nvSpPr>
+        <p:spPr>
+          <a:xfrm>
+            <a:off x="7799832" y="1828800"/>
+            <a:ext cx="3145536" cy="685800"/>
           </a:xfrm>
           <a:prstGeom prst="rect">
             <a:avLst/>
@@ -14987,21 +16858,212 @@
       </p:sp>
       <p:sp>
         <p:nvSpPr>
-          <p:cNvPr id="15" name="Shape 13"/>
-          <p:cNvSpPr/>
-          <p:nvPr/>
-        </p:nvSpPr>
-        <p:spPr>
-          <a:xfrm>
-            <a:off x="7909560" y="3520440"/>
-            <a:ext cx="3154680" cy="1737360"/>
+          <p:cNvPr id="13" name="Shape 11"/>
+          <p:cNvSpPr/>
+          <p:nvPr/>
+        </p:nvSpPr>
+        <p:spPr>
+          <a:xfrm>
+            <a:off x="7635240" y="2788920"/>
+            <a:ext cx="3474720" cy="1536192"/>
           </a:xfrm>
           <a:prstGeom prst="roundRect">
             <a:avLst>
-              <a:gd name="adj" fmla="val 6316"/>
+              <a:gd name="adj" fmla="val 7143"/>
             </a:avLst>
           </a:prstGeom>
           <a:solidFill>
+            <a:srgbClr val="FFFFFF">
+              <a:alpha val="88000"/>
+            </a:srgbClr>
+          </a:solidFill>
+          <a:ln w="12700">
+            <a:solidFill>
+              <a:srgbClr val="D6E8F2"/>
+            </a:solidFill>
+            <a:prstDash val="solid"/>
+          </a:ln>
+        </p:spPr>
+      </p:sp>
+      <p:sp>
+        <p:nvSpPr>
+          <p:cNvPr id="14" name="Shape 12"/>
+          <p:cNvSpPr/>
+          <p:nvPr/>
+        </p:nvSpPr>
+        <p:spPr>
+          <a:xfrm>
+            <a:off x="8138160" y="3474720"/>
+            <a:ext cx="256032" cy="411480"/>
+          </a:xfrm>
+          <a:prstGeom prst="rect">
+            <a:avLst/>
+          </a:prstGeom>
+          <a:solidFill>
+            <a:srgbClr val="0068B7"/>
+          </a:solidFill>
+          <a:ln w="12700">
+            <a:solidFill>
+              <a:srgbClr val="0068B7"/>
+            </a:solidFill>
+            <a:prstDash val="solid"/>
+          </a:ln>
+        </p:spPr>
+      </p:sp>
+      <p:sp>
+        <p:nvSpPr>
+          <p:cNvPr id="15" name="Shape 13"/>
+          <p:cNvSpPr/>
+          <p:nvPr/>
+        </p:nvSpPr>
+        <p:spPr>
+          <a:xfrm>
+            <a:off x="8577072" y="3172968"/>
+            <a:ext cx="256032" cy="713232"/>
+          </a:xfrm>
+          <a:prstGeom prst="rect">
+            <a:avLst/>
+          </a:prstGeom>
+          <a:solidFill>
+            <a:srgbClr val="2F8A28"/>
+          </a:solidFill>
+          <a:ln w="12700">
+            <a:solidFill>
+              <a:srgbClr val="2F8A28"/>
+            </a:solidFill>
+            <a:prstDash val="solid"/>
+          </a:ln>
+        </p:spPr>
+      </p:sp>
+      <p:sp>
+        <p:nvSpPr>
+          <p:cNvPr id="16" name="Shape 14"/>
+          <p:cNvSpPr/>
+          <p:nvPr/>
+        </p:nvSpPr>
+        <p:spPr>
+          <a:xfrm>
+            <a:off x="9015984" y="2880360"/>
+            <a:ext cx="256032" cy="1005840"/>
+          </a:xfrm>
+          <a:prstGeom prst="rect">
+            <a:avLst/>
+          </a:prstGeom>
+          <a:solidFill>
+            <a:srgbClr val="D69A2D"/>
+          </a:solidFill>
+          <a:ln w="12700">
+            <a:solidFill>
+              <a:srgbClr val="D69A2D"/>
+            </a:solidFill>
+            <a:prstDash val="solid"/>
+          </a:ln>
+        </p:spPr>
+      </p:sp>
+      <p:sp>
+        <p:nvSpPr>
+          <p:cNvPr id="17" name="Shape 15"/>
+          <p:cNvSpPr/>
+          <p:nvPr/>
+        </p:nvSpPr>
+        <p:spPr>
+          <a:xfrm>
+            <a:off x="9454896" y="3319272"/>
+            <a:ext cx="256032" cy="566928"/>
+          </a:xfrm>
+          <a:prstGeom prst="rect">
+            <a:avLst/>
+          </a:prstGeom>
+          <a:solidFill>
+            <a:srgbClr val="6A4CA3"/>
+          </a:solidFill>
+          <a:ln w="12700">
+            <a:solidFill>
+              <a:srgbClr val="6A4CA3"/>
+            </a:solidFill>
+            <a:prstDash val="solid"/>
+          </a:ln>
+        </p:spPr>
+      </p:sp>
+      <p:sp>
+        <p:nvSpPr>
+          <p:cNvPr id="18" name="Shape 16"/>
+          <p:cNvSpPr/>
+          <p:nvPr/>
+        </p:nvSpPr>
+        <p:spPr>
+          <a:xfrm>
+            <a:off x="8019288" y="3886200"/>
+            <a:ext cx="2706624" cy="0"/>
+          </a:xfrm>
+          <a:prstGeom prst="line">
+            <a:avLst/>
+          </a:prstGeom>
+          <a:noFill/>
+          <a:ln w="15240">
+            <a:solidFill>
+              <a:srgbClr val="003A63"/>
+            </a:solidFill>
+            <a:prstDash val="solid"/>
+          </a:ln>
+        </p:spPr>
+      </p:sp>
+      <p:sp>
+        <p:nvSpPr>
+          <p:cNvPr id="19" name="Text 17"/>
+          <p:cNvSpPr/>
+          <p:nvPr/>
+        </p:nvSpPr>
+        <p:spPr>
+          <a:xfrm>
+            <a:off x="7863840" y="3017520"/>
+            <a:ext cx="3017520" cy="201168"/>
+          </a:xfrm>
+          <a:prstGeom prst="rect">
+            <a:avLst/>
+          </a:prstGeom>
+          <a:noFill/>
+          <a:ln/>
+        </p:spPr>
+        <p:txBody>
+          <a:bodyPr wrap="square" lIns="0" tIns="0" rIns="0" bIns="0" rtlCol="0" anchor="ctr"/>
+          <a:lstStyle/>
+          <a:p>
+            <a:pPr algn="ctr" indent="0" marL="0">
+              <a:buNone/>
+            </a:pPr>
+            <a:r>
+              <a:rPr lang="en-US" sz="1050" b="1" dirty="0">
+                <a:solidFill>
+                  <a:srgbClr val="003A63"/>
+                </a:solidFill>
+                <a:latin typeface="Aptos" pitchFamily="34" charset="0"/>
+                <a:ea typeface="Aptos" pitchFamily="34" charset="-122"/>
+                <a:cs typeface="Aptos" pitchFamily="34" charset="-120"/>
+              </a:rPr>
+              <a:t>Measure and monitor</a:t>
+            </a:r>
+            <a:endParaRPr lang="en-US" sz="1050" dirty="0"/>
+          </a:p>
+        </p:txBody>
+      </p:sp>
+      <p:sp>
+        <p:nvSpPr>
+          <p:cNvPr id="20" name="Shape 18"/>
+          <p:cNvSpPr/>
+          <p:nvPr/>
+        </p:nvSpPr>
+        <p:spPr>
+          <a:xfrm>
+            <a:off x="7635240" y="4498848"/>
+            <a:ext cx="3474720" cy="1143000"/>
+          </a:xfrm>
+          <a:prstGeom prst="roundRect">
+            <a:avLst>
+              <a:gd name="adj" fmla="val 9600"/>
+            </a:avLst>
+          </a:prstGeom>
+          <a:solidFill>
             <a:srgbClr val="EAF6F8"/>
           </a:solidFill>
           <a:ln w="12700">
@@ -15014,14 +17076,14 @@
       </p:sp>
       <p:sp>
         <p:nvSpPr>
-          <p:cNvPr id="16" name="Text 14"/>
-          <p:cNvSpPr/>
-          <p:nvPr/>
-        </p:nvSpPr>
-        <p:spPr>
-          <a:xfrm>
-            <a:off x="8074152" y="3666744"/>
-            <a:ext cx="2825496" cy="256032"/>
+          <p:cNvPr id="21" name="Text 19"/>
+          <p:cNvSpPr/>
+          <p:nvPr/>
+        </p:nvSpPr>
+        <p:spPr>
+          <a:xfrm>
+            <a:off x="7799832" y="4645152"/>
+            <a:ext cx="3145536" cy="256032"/>
           </a:xfrm>
           <a:prstGeom prst="rect">
             <a:avLst/>
@@ -15045,7 +17107,7 @@
                 <a:ea typeface="Aptos" pitchFamily="34" charset="-122"/>
                 <a:cs typeface="Aptos" pitchFamily="34" charset="-120"/>
               </a:rPr>
-              <a:t>Use this for</a:t>
+              <a:t>How to validate</a:t>
             </a:r>
             <a:endParaRPr lang="en-US" sz="1300" dirty="0"/>
           </a:p>
@@ -15053,14 +17115,14 @@
       </p:sp>
       <p:sp>
         <p:nvSpPr>
-          <p:cNvPr id="17" name="Text 15"/>
-          <p:cNvSpPr/>
-          <p:nvPr/>
-        </p:nvSpPr>
-        <p:spPr>
-          <a:xfrm>
-            <a:off x="8074152" y="4023360"/>
-            <a:ext cx="2825496" cy="1097280"/>
+          <p:cNvPr id="22" name="Text 20"/>
+          <p:cNvSpPr/>
+          <p:nvPr/>
+        </p:nvSpPr>
+        <p:spPr>
+          <a:xfrm>
+            <a:off x="7799832" y="5001768"/>
+            <a:ext cx="3145536" cy="502920"/>
           </a:xfrm>
           <a:prstGeom prst="rect">
             <a:avLst/>
@@ -15086,7 +17148,7 @@
                 <a:ea typeface="Aptos" pitchFamily="34" charset="-122"/>
                 <a:cs typeface="Aptos" pitchFamily="34" charset="-120"/>
               </a:rPr>
-              <a:t>Connect the concept to public health decisions, safeguards, documentation, or implementation work.</a:t>
+              <a:t>Use the assignment to test whether you can explain the concept, apply it to a realistic public health situation, and identify what would need review before the work moves forward.</a:t>
             </a:r>
             <a:endParaRPr lang="en-US" sz="1550" dirty="0"/>
           </a:p>
@@ -15260,8 +17322,8 @@
         </p:nvSpPr>
         <p:spPr>
           <a:xfrm>
-            <a:off x="9966960" y="6537960"/>
-            <a:ext cx="1645920" cy="201168"/>
+            <a:off x="9646920" y="6537960"/>
+            <a:ext cx="1965960" cy="201168"/>
           </a:xfrm>
           <a:prstGeom prst="rect">
             <a:avLst/>
@@ -15285,7 +17347,7 @@
                 <a:ea typeface="Aptos" pitchFamily="34" charset="-122"/>
                 <a:cs typeface="Aptos" pitchFamily="34" charset="-120"/>
               </a:rPr>
-              <a:t>Â© Paula Soper</a:t>
+              <a:t>Copyright Paula Soper</a:t>
             </a:r>
             <a:endParaRPr lang="en-US" sz="800" dirty="0"/>
           </a:p>
@@ -15380,7 +17442,7 @@
         <p:spPr>
           <a:xfrm>
             <a:off x="868680" y="1508760"/>
-            <a:ext cx="6537960" cy="4160520"/>
+            <a:ext cx="6309360" cy="4160520"/>
           </a:xfrm>
           <a:prstGeom prst="rect">
             <a:avLst/>
@@ -15417,12 +17479,12 @@
         </p:nvSpPr>
         <p:spPr>
           <a:xfrm>
-            <a:off x="7909560" y="1417320"/>
-            <a:ext cx="3154680" cy="1828800"/>
+            <a:off x="7635240" y="1325880"/>
+            <a:ext cx="3474720" cy="1325880"/>
           </a:xfrm>
           <a:prstGeom prst="roundRect">
             <a:avLst>
-              <a:gd name="adj" fmla="val 6000"/>
+              <a:gd name="adj" fmla="val 8276"/>
             </a:avLst>
           </a:prstGeom>
           <a:solidFill>
@@ -15444,8 +17506,8 @@
         </p:nvSpPr>
         <p:spPr>
           <a:xfrm>
-            <a:off x="8074152" y="1563624"/>
-            <a:ext cx="2825496" cy="256032"/>
+            <a:off x="7799832" y="1472184"/>
+            <a:ext cx="3145536" cy="256032"/>
           </a:xfrm>
           <a:prstGeom prst="rect">
             <a:avLst/>
@@ -15469,7 +17531,7 @@
                 <a:ea typeface="Aptos" pitchFamily="34" charset="-122"/>
                 <a:cs typeface="Aptos" pitchFamily="34" charset="-120"/>
               </a:rPr>
-              <a:t>Key idea</a:t>
+              <a:t>Data decision</a:t>
             </a:r>
             <a:endParaRPr lang="en-US" sz="1300" dirty="0"/>
           </a:p>
@@ -15483,8 +17545,8 @@
         </p:nvSpPr>
         <p:spPr>
           <a:xfrm>
-            <a:off x="8074152" y="1920240"/>
-            <a:ext cx="2825496" cy="1188720"/>
+            <a:off x="7799832" y="1828800"/>
+            <a:ext cx="3145536" cy="685800"/>
           </a:xfrm>
           <a:prstGeom prst="rect">
             <a:avLst/>
@@ -15524,15 +17586,206 @@
         </p:nvSpPr>
         <p:spPr>
           <a:xfrm>
-            <a:off x="7909560" y="3520440"/>
-            <a:ext cx="3154680" cy="1737360"/>
+            <a:off x="7635240" y="2788920"/>
+            <a:ext cx="3474720" cy="1536192"/>
           </a:xfrm>
           <a:prstGeom prst="roundRect">
             <a:avLst>
-              <a:gd name="adj" fmla="val 6316"/>
+              <a:gd name="adj" fmla="val 7143"/>
             </a:avLst>
           </a:prstGeom>
           <a:solidFill>
+            <a:srgbClr val="FFFFFF">
+              <a:alpha val="88000"/>
+            </a:srgbClr>
+          </a:solidFill>
+          <a:ln w="12700">
+            <a:solidFill>
+              <a:srgbClr val="D6E8F2"/>
+            </a:solidFill>
+            <a:prstDash val="solid"/>
+          </a:ln>
+        </p:spPr>
+      </p:sp>
+      <p:sp>
+        <p:nvSpPr>
+          <p:cNvPr id="14" name="Shape 12"/>
+          <p:cNvSpPr/>
+          <p:nvPr/>
+        </p:nvSpPr>
+        <p:spPr>
+          <a:xfrm>
+            <a:off x="8138160" y="3474720"/>
+            <a:ext cx="256032" cy="411480"/>
+          </a:xfrm>
+          <a:prstGeom prst="rect">
+            <a:avLst/>
+          </a:prstGeom>
+          <a:solidFill>
+            <a:srgbClr val="0068B7"/>
+          </a:solidFill>
+          <a:ln w="12700">
+            <a:solidFill>
+              <a:srgbClr val="0068B7"/>
+            </a:solidFill>
+            <a:prstDash val="solid"/>
+          </a:ln>
+        </p:spPr>
+      </p:sp>
+      <p:sp>
+        <p:nvSpPr>
+          <p:cNvPr id="15" name="Shape 13"/>
+          <p:cNvSpPr/>
+          <p:nvPr/>
+        </p:nvSpPr>
+        <p:spPr>
+          <a:xfrm>
+            <a:off x="8577072" y="3172968"/>
+            <a:ext cx="256032" cy="713232"/>
+          </a:xfrm>
+          <a:prstGeom prst="rect">
+            <a:avLst/>
+          </a:prstGeom>
+          <a:solidFill>
+            <a:srgbClr val="2F8A28"/>
+          </a:solidFill>
+          <a:ln w="12700">
+            <a:solidFill>
+              <a:srgbClr val="2F8A28"/>
+            </a:solidFill>
+            <a:prstDash val="solid"/>
+          </a:ln>
+        </p:spPr>
+      </p:sp>
+      <p:sp>
+        <p:nvSpPr>
+          <p:cNvPr id="16" name="Shape 14"/>
+          <p:cNvSpPr/>
+          <p:nvPr/>
+        </p:nvSpPr>
+        <p:spPr>
+          <a:xfrm>
+            <a:off x="9015984" y="2880360"/>
+            <a:ext cx="256032" cy="1005840"/>
+          </a:xfrm>
+          <a:prstGeom prst="rect">
+            <a:avLst/>
+          </a:prstGeom>
+          <a:solidFill>
+            <a:srgbClr val="D69A2D"/>
+          </a:solidFill>
+          <a:ln w="12700">
+            <a:solidFill>
+              <a:srgbClr val="D69A2D"/>
+            </a:solidFill>
+            <a:prstDash val="solid"/>
+          </a:ln>
+        </p:spPr>
+      </p:sp>
+      <p:sp>
+        <p:nvSpPr>
+          <p:cNvPr id="17" name="Shape 15"/>
+          <p:cNvSpPr/>
+          <p:nvPr/>
+        </p:nvSpPr>
+        <p:spPr>
+          <a:xfrm>
+            <a:off x="9454896" y="3319272"/>
+            <a:ext cx="256032" cy="566928"/>
+          </a:xfrm>
+          <a:prstGeom prst="rect">
+            <a:avLst/>
+          </a:prstGeom>
+          <a:solidFill>
+            <a:srgbClr val="6A4CA3"/>
+          </a:solidFill>
+          <a:ln w="12700">
+            <a:solidFill>
+              <a:srgbClr val="6A4CA3"/>
+            </a:solidFill>
+            <a:prstDash val="solid"/>
+          </a:ln>
+        </p:spPr>
+      </p:sp>
+      <p:sp>
+        <p:nvSpPr>
+          <p:cNvPr id="18" name="Shape 16"/>
+          <p:cNvSpPr/>
+          <p:nvPr/>
+        </p:nvSpPr>
+        <p:spPr>
+          <a:xfrm>
+            <a:off x="8019288" y="3886200"/>
+            <a:ext cx="2706624" cy="0"/>
+          </a:xfrm>
+          <a:prstGeom prst="line">
+            <a:avLst/>
+          </a:prstGeom>
+          <a:noFill/>
+          <a:ln w="15240">
+            <a:solidFill>
+              <a:srgbClr val="003A63"/>
+            </a:solidFill>
+            <a:prstDash val="solid"/>
+          </a:ln>
+        </p:spPr>
+      </p:sp>
+      <p:sp>
+        <p:nvSpPr>
+          <p:cNvPr id="19" name="Text 17"/>
+          <p:cNvSpPr/>
+          <p:nvPr/>
+        </p:nvSpPr>
+        <p:spPr>
+          <a:xfrm>
+            <a:off x="7863840" y="3017520"/>
+            <a:ext cx="3017520" cy="201168"/>
+          </a:xfrm>
+          <a:prstGeom prst="rect">
+            <a:avLst/>
+          </a:prstGeom>
+          <a:noFill/>
+          <a:ln/>
+        </p:spPr>
+        <p:txBody>
+          <a:bodyPr wrap="square" lIns="0" tIns="0" rIns="0" bIns="0" rtlCol="0" anchor="ctr"/>
+          <a:lstStyle/>
+          <a:p>
+            <a:pPr algn="ctr" indent="0" marL="0">
+              <a:buNone/>
+            </a:pPr>
+            <a:r>
+              <a:rPr lang="en-US" sz="1050" b="1" dirty="0">
+                <a:solidFill>
+                  <a:srgbClr val="003A63"/>
+                </a:solidFill>
+                <a:latin typeface="Aptos" pitchFamily="34" charset="0"/>
+                <a:ea typeface="Aptos" pitchFamily="34" charset="-122"/>
+                <a:cs typeface="Aptos" pitchFamily="34" charset="-120"/>
+              </a:rPr>
+              <a:t>Measure and monitor</a:t>
+            </a:r>
+            <a:endParaRPr lang="en-US" sz="1050" dirty="0"/>
+          </a:p>
+        </p:txBody>
+      </p:sp>
+      <p:sp>
+        <p:nvSpPr>
+          <p:cNvPr id="20" name="Shape 18"/>
+          <p:cNvSpPr/>
+          <p:nvPr/>
+        </p:nvSpPr>
+        <p:spPr>
+          <a:xfrm>
+            <a:off x="7635240" y="4498848"/>
+            <a:ext cx="3474720" cy="1143000"/>
+          </a:xfrm>
+          <a:prstGeom prst="roundRect">
+            <a:avLst>
+              <a:gd name="adj" fmla="val 9600"/>
+            </a:avLst>
+          </a:prstGeom>
+          <a:solidFill>
             <a:srgbClr val="EAF6F8"/>
           </a:solidFill>
           <a:ln w="12700">
@@ -15545,14 +17798,14 @@
       </p:sp>
       <p:sp>
         <p:nvSpPr>
-          <p:cNvPr id="14" name="Text 12"/>
-          <p:cNvSpPr/>
-          <p:nvPr/>
-        </p:nvSpPr>
-        <p:spPr>
-          <a:xfrm>
-            <a:off x="8074152" y="3666744"/>
-            <a:ext cx="2825496" cy="256032"/>
+          <p:cNvPr id="21" name="Text 19"/>
+          <p:cNvSpPr/>
+          <p:nvPr/>
+        </p:nvSpPr>
+        <p:spPr>
+          <a:xfrm>
+            <a:off x="7799832" y="4645152"/>
+            <a:ext cx="3145536" cy="256032"/>
           </a:xfrm>
           <a:prstGeom prst="rect">
             <a:avLst/>
@@ -15576,7 +17829,7 @@
                 <a:ea typeface="Aptos" pitchFamily="34" charset="-122"/>
                 <a:cs typeface="Aptos" pitchFamily="34" charset="-120"/>
               </a:rPr>
-              <a:t>Use this for</a:t>
+              <a:t>How to validate</a:t>
             </a:r>
             <a:endParaRPr lang="en-US" sz="1300" dirty="0"/>
           </a:p>
@@ -15584,14 +17837,14 @@
       </p:sp>
       <p:sp>
         <p:nvSpPr>
-          <p:cNvPr id="15" name="Text 13"/>
-          <p:cNvSpPr/>
-          <p:nvPr/>
-        </p:nvSpPr>
-        <p:spPr>
-          <a:xfrm>
-            <a:off x="8074152" y="4023360"/>
-            <a:ext cx="2825496" cy="1097280"/>
+          <p:cNvPr id="22" name="Text 20"/>
+          <p:cNvSpPr/>
+          <p:nvPr/>
+        </p:nvSpPr>
+        <p:spPr>
+          <a:xfrm>
+            <a:off x="7799832" y="5001768"/>
+            <a:ext cx="3145536" cy="502920"/>
           </a:xfrm>
           <a:prstGeom prst="rect">
             <a:avLst/>
@@ -15617,7 +17870,7 @@
                 <a:ea typeface="Aptos" pitchFamily="34" charset="-122"/>
                 <a:cs typeface="Aptos" pitchFamily="34" charset="-120"/>
               </a:rPr>
-              <a:t>Connect the concept to public health decisions, safeguards, documentation, or implementation work.</a:t>
+              <a:t>Use the assignment to test whether you can explain the concept, apply it to a realistic public health situation, and identify what would need review before the work moves forward.</a:t>
             </a:r>
             <a:endParaRPr lang="en-US" sz="1550" dirty="0"/>
           </a:p>
@@ -15791,8 +18044,8 @@
         </p:nvSpPr>
         <p:spPr>
           <a:xfrm>
-            <a:off x="9966960" y="6537960"/>
-            <a:ext cx="1645920" cy="201168"/>
+            <a:off x="9646920" y="6537960"/>
+            <a:ext cx="1965960" cy="201168"/>
           </a:xfrm>
           <a:prstGeom prst="rect">
             <a:avLst/>
@@ -15816,7 +18069,7 @@
                 <a:ea typeface="Aptos" pitchFamily="34" charset="-122"/>
                 <a:cs typeface="Aptos" pitchFamily="34" charset="-120"/>
               </a:rPr>
-              <a:t>Â© Paula Soper</a:t>
+              <a:t>Copyright Paula Soper</a:t>
             </a:r>
             <a:endParaRPr lang="en-US" sz="800" dirty="0"/>
           </a:p>
@@ -15863,77 +18116,13 @@
       </p:sp>
       <p:sp>
         <p:nvSpPr>
-          <p:cNvPr id="8" name="Shape 6"/>
+          <p:cNvPr id="8" name="Text 6"/>
           <p:cNvSpPr/>
           <p:nvPr/>
         </p:nvSpPr>
         <p:spPr>
           <a:xfrm>
             <a:off x="640080" y="658368"/>
-            <a:ext cx="420624" cy="420624"/>
-          </a:xfrm>
-          <a:prstGeom prst="ellipse">
-            <a:avLst/>
-          </a:prstGeom>
-          <a:solidFill>
-            <a:srgbClr val="0068B7"/>
-          </a:solidFill>
-          <a:ln w="12700">
-            <a:solidFill>
-              <a:srgbClr val="0068B7"/>
-            </a:solidFill>
-            <a:prstDash val="solid"/>
-          </a:ln>
-        </p:spPr>
-      </p:sp>
-      <p:sp>
-        <p:nvSpPr>
-          <p:cNvPr id="9" name="Text 7"/>
-          <p:cNvSpPr/>
-          <p:nvPr/>
-        </p:nvSpPr>
-        <p:spPr>
-          <a:xfrm>
-            <a:off x="640080" y="731520"/>
-            <a:ext cx="420624" cy="164592"/>
-          </a:xfrm>
-          <a:prstGeom prst="rect">
-            <a:avLst/>
-          </a:prstGeom>
-          <a:noFill/>
-          <a:ln/>
-        </p:spPr>
-        <p:txBody>
-          <a:bodyPr wrap="square" lIns="0" tIns="0" rIns="0" bIns="0" rtlCol="0" anchor="ctr"/>
-          <a:lstStyle/>
-          <a:p>
-            <a:pPr algn="ctr" indent="0" marL="0">
-              <a:buNone/>
-            </a:pPr>
-            <a:r>
-              <a:rPr lang="en-US" sz="1100" b="1" dirty="0">
-                <a:solidFill>
-                  <a:srgbClr val="FFFFFF"/>
-                </a:solidFill>
-                <a:latin typeface="Aptos" pitchFamily="34" charset="0"/>
-                <a:ea typeface="Aptos" pitchFamily="34" charset="-122"/>
-                <a:cs typeface="Aptos" pitchFamily="34" charset="-120"/>
-              </a:rPr>
-              <a:t>2</a:t>
-            </a:r>
-            <a:endParaRPr lang="en-US" sz="1100" dirty="0"/>
-          </a:p>
-        </p:txBody>
-      </p:sp>
-      <p:sp>
-        <p:nvSpPr>
-          <p:cNvPr id="10" name="Text 8"/>
-          <p:cNvSpPr/>
-          <p:nvPr/>
-        </p:nvSpPr>
-        <p:spPr>
-          <a:xfrm>
-            <a:off x="640080" y="621792"/>
             <a:ext cx="10881360" cy="713232"/>
           </a:xfrm>
           <a:prstGeom prst="rect">
@@ -15968,14 +18157,14 @@
       </p:sp>
       <p:sp>
         <p:nvSpPr>
-          <p:cNvPr id="11" name="Text 9"/>
+          <p:cNvPr id="9" name="Text 7"/>
           <p:cNvSpPr/>
           <p:nvPr/>
         </p:nvSpPr>
         <p:spPr>
           <a:xfrm>
             <a:off x="868680" y="1508760"/>
-            <a:ext cx="6537960" cy="4160520"/>
+            <a:ext cx="6309360" cy="4160520"/>
           </a:xfrm>
           <a:prstGeom prst="rect">
             <a:avLst/>
@@ -16034,18 +18223,18 @@
       </p:sp>
       <p:sp>
         <p:nvSpPr>
-          <p:cNvPr id="12" name="Shape 10"/>
-          <p:cNvSpPr/>
-          <p:nvPr/>
-        </p:nvSpPr>
-        <p:spPr>
-          <a:xfrm>
-            <a:off x="7909560" y="1417320"/>
-            <a:ext cx="3154680" cy="1828800"/>
+          <p:cNvPr id="10" name="Shape 8"/>
+          <p:cNvSpPr/>
+          <p:nvPr/>
+        </p:nvSpPr>
+        <p:spPr>
+          <a:xfrm>
+            <a:off x="7635240" y="1325880"/>
+            <a:ext cx="3474720" cy="1325880"/>
           </a:xfrm>
           <a:prstGeom prst="roundRect">
             <a:avLst>
-              <a:gd name="adj" fmla="val 6000"/>
+              <a:gd name="adj" fmla="val 8276"/>
             </a:avLst>
           </a:prstGeom>
           <a:solidFill>
@@ -16061,14 +18250,14 @@
       </p:sp>
       <p:sp>
         <p:nvSpPr>
-          <p:cNvPr id="13" name="Text 11"/>
-          <p:cNvSpPr/>
-          <p:nvPr/>
-        </p:nvSpPr>
-        <p:spPr>
-          <a:xfrm>
-            <a:off x="8074152" y="1563624"/>
-            <a:ext cx="2825496" cy="256032"/>
+          <p:cNvPr id="11" name="Text 9"/>
+          <p:cNvSpPr/>
+          <p:nvPr/>
+        </p:nvSpPr>
+        <p:spPr>
+          <a:xfrm>
+            <a:off x="7799832" y="1472184"/>
+            <a:ext cx="3145536" cy="256032"/>
           </a:xfrm>
           <a:prstGeom prst="rect">
             <a:avLst/>
@@ -16092,7 +18281,7 @@
                 <a:ea typeface="Aptos" pitchFamily="34" charset="-122"/>
                 <a:cs typeface="Aptos" pitchFamily="34" charset="-120"/>
               </a:rPr>
-              <a:t>Key idea</a:t>
+              <a:t>Data decision</a:t>
             </a:r>
             <a:endParaRPr lang="en-US" sz="1300" dirty="0"/>
           </a:p>
@@ -16100,14 +18289,14 @@
       </p:sp>
       <p:sp>
         <p:nvSpPr>
-          <p:cNvPr id="14" name="Text 12"/>
-          <p:cNvSpPr/>
-          <p:nvPr/>
-        </p:nvSpPr>
-        <p:spPr>
-          <a:xfrm>
-            <a:off x="8074152" y="1920240"/>
-            <a:ext cx="2825496" cy="1188720"/>
+          <p:cNvPr id="12" name="Text 10"/>
+          <p:cNvSpPr/>
+          <p:nvPr/>
+        </p:nvSpPr>
+        <p:spPr>
+          <a:xfrm>
+            <a:off x="7799832" y="1828800"/>
+            <a:ext cx="3145536" cy="685800"/>
           </a:xfrm>
           <a:prstGeom prst="rect">
             <a:avLst/>
@@ -16141,21 +18330,212 @@
       </p:sp>
       <p:sp>
         <p:nvSpPr>
-          <p:cNvPr id="15" name="Shape 13"/>
-          <p:cNvSpPr/>
-          <p:nvPr/>
-        </p:nvSpPr>
-        <p:spPr>
-          <a:xfrm>
-            <a:off x="7909560" y="3520440"/>
-            <a:ext cx="3154680" cy="1737360"/>
+          <p:cNvPr id="13" name="Shape 11"/>
+          <p:cNvSpPr/>
+          <p:nvPr/>
+        </p:nvSpPr>
+        <p:spPr>
+          <a:xfrm>
+            <a:off x="7635240" y="2788920"/>
+            <a:ext cx="3474720" cy="1536192"/>
           </a:xfrm>
           <a:prstGeom prst="roundRect">
             <a:avLst>
-              <a:gd name="adj" fmla="val 6316"/>
+              <a:gd name="adj" fmla="val 7143"/>
             </a:avLst>
           </a:prstGeom>
           <a:solidFill>
+            <a:srgbClr val="FFFFFF">
+              <a:alpha val="88000"/>
+            </a:srgbClr>
+          </a:solidFill>
+          <a:ln w="12700">
+            <a:solidFill>
+              <a:srgbClr val="D6E8F2"/>
+            </a:solidFill>
+            <a:prstDash val="solid"/>
+          </a:ln>
+        </p:spPr>
+      </p:sp>
+      <p:sp>
+        <p:nvSpPr>
+          <p:cNvPr id="14" name="Shape 12"/>
+          <p:cNvSpPr/>
+          <p:nvPr/>
+        </p:nvSpPr>
+        <p:spPr>
+          <a:xfrm>
+            <a:off x="8138160" y="3474720"/>
+            <a:ext cx="256032" cy="411480"/>
+          </a:xfrm>
+          <a:prstGeom prst="rect">
+            <a:avLst/>
+          </a:prstGeom>
+          <a:solidFill>
+            <a:srgbClr val="0068B7"/>
+          </a:solidFill>
+          <a:ln w="12700">
+            <a:solidFill>
+              <a:srgbClr val="0068B7"/>
+            </a:solidFill>
+            <a:prstDash val="solid"/>
+          </a:ln>
+        </p:spPr>
+      </p:sp>
+      <p:sp>
+        <p:nvSpPr>
+          <p:cNvPr id="15" name="Shape 13"/>
+          <p:cNvSpPr/>
+          <p:nvPr/>
+        </p:nvSpPr>
+        <p:spPr>
+          <a:xfrm>
+            <a:off x="8577072" y="3172968"/>
+            <a:ext cx="256032" cy="713232"/>
+          </a:xfrm>
+          <a:prstGeom prst="rect">
+            <a:avLst/>
+          </a:prstGeom>
+          <a:solidFill>
+            <a:srgbClr val="2F8A28"/>
+          </a:solidFill>
+          <a:ln w="12700">
+            <a:solidFill>
+              <a:srgbClr val="2F8A28"/>
+            </a:solidFill>
+            <a:prstDash val="solid"/>
+          </a:ln>
+        </p:spPr>
+      </p:sp>
+      <p:sp>
+        <p:nvSpPr>
+          <p:cNvPr id="16" name="Shape 14"/>
+          <p:cNvSpPr/>
+          <p:nvPr/>
+        </p:nvSpPr>
+        <p:spPr>
+          <a:xfrm>
+            <a:off x="9015984" y="2880360"/>
+            <a:ext cx="256032" cy="1005840"/>
+          </a:xfrm>
+          <a:prstGeom prst="rect">
+            <a:avLst/>
+          </a:prstGeom>
+          <a:solidFill>
+            <a:srgbClr val="D69A2D"/>
+          </a:solidFill>
+          <a:ln w="12700">
+            <a:solidFill>
+              <a:srgbClr val="D69A2D"/>
+            </a:solidFill>
+            <a:prstDash val="solid"/>
+          </a:ln>
+        </p:spPr>
+      </p:sp>
+      <p:sp>
+        <p:nvSpPr>
+          <p:cNvPr id="17" name="Shape 15"/>
+          <p:cNvSpPr/>
+          <p:nvPr/>
+        </p:nvSpPr>
+        <p:spPr>
+          <a:xfrm>
+            <a:off x="9454896" y="3319272"/>
+            <a:ext cx="256032" cy="566928"/>
+          </a:xfrm>
+          <a:prstGeom prst="rect">
+            <a:avLst/>
+          </a:prstGeom>
+          <a:solidFill>
+            <a:srgbClr val="6A4CA3"/>
+          </a:solidFill>
+          <a:ln w="12700">
+            <a:solidFill>
+              <a:srgbClr val="6A4CA3"/>
+            </a:solidFill>
+            <a:prstDash val="solid"/>
+          </a:ln>
+        </p:spPr>
+      </p:sp>
+      <p:sp>
+        <p:nvSpPr>
+          <p:cNvPr id="18" name="Shape 16"/>
+          <p:cNvSpPr/>
+          <p:nvPr/>
+        </p:nvSpPr>
+        <p:spPr>
+          <a:xfrm>
+            <a:off x="8019288" y="3886200"/>
+            <a:ext cx="2706624" cy="0"/>
+          </a:xfrm>
+          <a:prstGeom prst="line">
+            <a:avLst/>
+          </a:prstGeom>
+          <a:noFill/>
+          <a:ln w="15240">
+            <a:solidFill>
+              <a:srgbClr val="003A63"/>
+            </a:solidFill>
+            <a:prstDash val="solid"/>
+          </a:ln>
+        </p:spPr>
+      </p:sp>
+      <p:sp>
+        <p:nvSpPr>
+          <p:cNvPr id="19" name="Text 17"/>
+          <p:cNvSpPr/>
+          <p:nvPr/>
+        </p:nvSpPr>
+        <p:spPr>
+          <a:xfrm>
+            <a:off x="7863840" y="3017520"/>
+            <a:ext cx="3017520" cy="201168"/>
+          </a:xfrm>
+          <a:prstGeom prst="rect">
+            <a:avLst/>
+          </a:prstGeom>
+          <a:noFill/>
+          <a:ln/>
+        </p:spPr>
+        <p:txBody>
+          <a:bodyPr wrap="square" lIns="0" tIns="0" rIns="0" bIns="0" rtlCol="0" anchor="ctr"/>
+          <a:lstStyle/>
+          <a:p>
+            <a:pPr algn="ctr" indent="0" marL="0">
+              <a:buNone/>
+            </a:pPr>
+            <a:r>
+              <a:rPr lang="en-US" sz="1050" b="1" dirty="0">
+                <a:solidFill>
+                  <a:srgbClr val="003A63"/>
+                </a:solidFill>
+                <a:latin typeface="Aptos" pitchFamily="34" charset="0"/>
+                <a:ea typeface="Aptos" pitchFamily="34" charset="-122"/>
+                <a:cs typeface="Aptos" pitchFamily="34" charset="-120"/>
+              </a:rPr>
+              <a:t>Measure and monitor</a:t>
+            </a:r>
+            <a:endParaRPr lang="en-US" sz="1050" dirty="0"/>
+          </a:p>
+        </p:txBody>
+      </p:sp>
+      <p:sp>
+        <p:nvSpPr>
+          <p:cNvPr id="20" name="Shape 18"/>
+          <p:cNvSpPr/>
+          <p:nvPr/>
+        </p:nvSpPr>
+        <p:spPr>
+          <a:xfrm>
+            <a:off x="7635240" y="4498848"/>
+            <a:ext cx="3474720" cy="1143000"/>
+          </a:xfrm>
+          <a:prstGeom prst="roundRect">
+            <a:avLst>
+              <a:gd name="adj" fmla="val 9600"/>
+            </a:avLst>
+          </a:prstGeom>
+          <a:solidFill>
             <a:srgbClr val="EAF6F8"/>
           </a:solidFill>
           <a:ln w="12700">
@@ -16168,14 +18548,14 @@
       </p:sp>
       <p:sp>
         <p:nvSpPr>
-          <p:cNvPr id="16" name="Text 14"/>
-          <p:cNvSpPr/>
-          <p:nvPr/>
-        </p:nvSpPr>
-        <p:spPr>
-          <a:xfrm>
-            <a:off x="8074152" y="3666744"/>
-            <a:ext cx="2825496" cy="256032"/>
+          <p:cNvPr id="21" name="Text 19"/>
+          <p:cNvSpPr/>
+          <p:nvPr/>
+        </p:nvSpPr>
+        <p:spPr>
+          <a:xfrm>
+            <a:off x="7799832" y="4645152"/>
+            <a:ext cx="3145536" cy="256032"/>
           </a:xfrm>
           <a:prstGeom prst="rect">
             <a:avLst/>
@@ -16199,7 +18579,7 @@
                 <a:ea typeface="Aptos" pitchFamily="34" charset="-122"/>
                 <a:cs typeface="Aptos" pitchFamily="34" charset="-120"/>
               </a:rPr>
-              <a:t>Use this for</a:t>
+              <a:t>How to validate</a:t>
             </a:r>
             <a:endParaRPr lang="en-US" sz="1300" dirty="0"/>
           </a:p>
@@ -16207,14 +18587,14 @@
       </p:sp>
       <p:sp>
         <p:nvSpPr>
-          <p:cNvPr id="17" name="Text 15"/>
-          <p:cNvSpPr/>
-          <p:nvPr/>
-        </p:nvSpPr>
-        <p:spPr>
-          <a:xfrm>
-            <a:off x="8074152" y="4023360"/>
-            <a:ext cx="2825496" cy="1097280"/>
+          <p:cNvPr id="22" name="Text 20"/>
+          <p:cNvSpPr/>
+          <p:nvPr/>
+        </p:nvSpPr>
+        <p:spPr>
+          <a:xfrm>
+            <a:off x="7799832" y="5001768"/>
+            <a:ext cx="3145536" cy="502920"/>
           </a:xfrm>
           <a:prstGeom prst="rect">
             <a:avLst/>
@@ -16240,7 +18620,7 @@
                 <a:ea typeface="Aptos" pitchFamily="34" charset="-122"/>
                 <a:cs typeface="Aptos" pitchFamily="34" charset="-120"/>
               </a:rPr>
-              <a:t>Connect the concept to public health decisions, safeguards, documentation, or implementation work.</a:t>
+              <a:t>Connect the concept to data quality, model performance, validation evidence, monitoring measures, and decisions that remain under human control.</a:t>
             </a:r>
             <a:endParaRPr lang="en-US" sz="1550" dirty="0"/>
           </a:p>
@@ -16414,8 +18794,8 @@
         </p:nvSpPr>
         <p:spPr>
           <a:xfrm>
-            <a:off x="9966960" y="6537960"/>
-            <a:ext cx="1645920" cy="201168"/>
+            <a:off x="9646920" y="6537960"/>
+            <a:ext cx="1965960" cy="201168"/>
           </a:xfrm>
           <a:prstGeom prst="rect">
             <a:avLst/>
@@ -16439,7 +18819,7 @@
                 <a:ea typeface="Aptos" pitchFamily="34" charset="-122"/>
                 <a:cs typeface="Aptos" pitchFamily="34" charset="-120"/>
               </a:rPr>
-              <a:t>Â© Paula Soper</a:t>
+              <a:t>Copyright Paula Soper</a:t>
             </a:r>
             <a:endParaRPr lang="en-US" sz="800" dirty="0"/>
           </a:p>
@@ -16486,77 +18866,13 @@
       </p:sp>
       <p:sp>
         <p:nvSpPr>
-          <p:cNvPr id="8" name="Shape 6"/>
+          <p:cNvPr id="8" name="Text 6"/>
           <p:cNvSpPr/>
           <p:nvPr/>
         </p:nvSpPr>
         <p:spPr>
           <a:xfrm>
             <a:off x="640080" y="658368"/>
-            <a:ext cx="420624" cy="420624"/>
-          </a:xfrm>
-          <a:prstGeom prst="ellipse">
-            <a:avLst/>
-          </a:prstGeom>
-          <a:solidFill>
-            <a:srgbClr val="0068B7"/>
-          </a:solidFill>
-          <a:ln w="12700">
-            <a:solidFill>
-              <a:srgbClr val="0068B7"/>
-            </a:solidFill>
-            <a:prstDash val="solid"/>
-          </a:ln>
-        </p:spPr>
-      </p:sp>
-      <p:sp>
-        <p:nvSpPr>
-          <p:cNvPr id="9" name="Text 7"/>
-          <p:cNvSpPr/>
-          <p:nvPr/>
-        </p:nvSpPr>
-        <p:spPr>
-          <a:xfrm>
-            <a:off x="640080" y="731520"/>
-            <a:ext cx="420624" cy="164592"/>
-          </a:xfrm>
-          <a:prstGeom prst="rect">
-            <a:avLst/>
-          </a:prstGeom>
-          <a:noFill/>
-          <a:ln/>
-        </p:spPr>
-        <p:txBody>
-          <a:bodyPr wrap="square" lIns="0" tIns="0" rIns="0" bIns="0" rtlCol="0" anchor="ctr"/>
-          <a:lstStyle/>
-          <a:p>
-            <a:pPr algn="ctr" indent="0" marL="0">
-              <a:buNone/>
-            </a:pPr>
-            <a:r>
-              <a:rPr lang="en-US" sz="1100" b="1" dirty="0">
-                <a:solidFill>
-                  <a:srgbClr val="FFFFFF"/>
-                </a:solidFill>
-                <a:latin typeface="Aptos" pitchFamily="34" charset="0"/>
-                <a:ea typeface="Aptos" pitchFamily="34" charset="-122"/>
-                <a:cs typeface="Aptos" pitchFamily="34" charset="-120"/>
-              </a:rPr>
-              <a:t>3</a:t>
-            </a:r>
-            <a:endParaRPr lang="en-US" sz="1100" dirty="0"/>
-          </a:p>
-        </p:txBody>
-      </p:sp>
-      <p:sp>
-        <p:nvSpPr>
-          <p:cNvPr id="10" name="Text 8"/>
-          <p:cNvSpPr/>
-          <p:nvPr/>
-        </p:nvSpPr>
-        <p:spPr>
-          <a:xfrm>
-            <a:off x="640080" y="621792"/>
             <a:ext cx="10881360" cy="713232"/>
           </a:xfrm>
           <a:prstGeom prst="rect">
@@ -16591,14 +18907,14 @@
       </p:sp>
       <p:sp>
         <p:nvSpPr>
-          <p:cNvPr id="11" name="Text 9"/>
+          <p:cNvPr id="9" name="Text 7"/>
           <p:cNvSpPr/>
           <p:nvPr/>
         </p:nvSpPr>
         <p:spPr>
           <a:xfrm>
             <a:off x="868680" y="1508760"/>
-            <a:ext cx="6537960" cy="4160520"/>
+            <a:ext cx="6309360" cy="4160520"/>
           </a:xfrm>
           <a:prstGeom prst="rect">
             <a:avLst/>
@@ -16657,18 +18973,18 @@
       </p:sp>
       <p:sp>
         <p:nvSpPr>
-          <p:cNvPr id="12" name="Shape 10"/>
-          <p:cNvSpPr/>
-          <p:nvPr/>
-        </p:nvSpPr>
-        <p:spPr>
-          <a:xfrm>
-            <a:off x="7909560" y="1417320"/>
-            <a:ext cx="3154680" cy="1828800"/>
+          <p:cNvPr id="10" name="Shape 8"/>
+          <p:cNvSpPr/>
+          <p:nvPr/>
+        </p:nvSpPr>
+        <p:spPr>
+          <a:xfrm>
+            <a:off x="7635240" y="1325880"/>
+            <a:ext cx="3474720" cy="1325880"/>
           </a:xfrm>
           <a:prstGeom prst="roundRect">
             <a:avLst>
-              <a:gd name="adj" fmla="val 6000"/>
+              <a:gd name="adj" fmla="val 8276"/>
             </a:avLst>
           </a:prstGeom>
           <a:solidFill>
@@ -16684,14 +19000,14 @@
       </p:sp>
       <p:sp>
         <p:nvSpPr>
-          <p:cNvPr id="13" name="Text 11"/>
-          <p:cNvSpPr/>
-          <p:nvPr/>
-        </p:nvSpPr>
-        <p:spPr>
-          <a:xfrm>
-            <a:off x="8074152" y="1563624"/>
-            <a:ext cx="2825496" cy="256032"/>
+          <p:cNvPr id="11" name="Text 9"/>
+          <p:cNvSpPr/>
+          <p:nvPr/>
+        </p:nvSpPr>
+        <p:spPr>
+          <a:xfrm>
+            <a:off x="7799832" y="1472184"/>
+            <a:ext cx="3145536" cy="256032"/>
           </a:xfrm>
           <a:prstGeom prst="rect">
             <a:avLst/>
@@ -16715,7 +19031,7 @@
                 <a:ea typeface="Aptos" pitchFamily="34" charset="-122"/>
                 <a:cs typeface="Aptos" pitchFamily="34" charset="-120"/>
               </a:rPr>
-              <a:t>Key idea</a:t>
+              <a:t>Data decision</a:t>
             </a:r>
             <a:endParaRPr lang="en-US" sz="1300" dirty="0"/>
           </a:p>
@@ -16723,14 +19039,14 @@
       </p:sp>
       <p:sp>
         <p:nvSpPr>
-          <p:cNvPr id="14" name="Text 12"/>
-          <p:cNvSpPr/>
-          <p:nvPr/>
-        </p:nvSpPr>
-        <p:spPr>
-          <a:xfrm>
-            <a:off x="8074152" y="1920240"/>
-            <a:ext cx="2825496" cy="1188720"/>
+          <p:cNvPr id="12" name="Text 10"/>
+          <p:cNvSpPr/>
+          <p:nvPr/>
+        </p:nvSpPr>
+        <p:spPr>
+          <a:xfrm>
+            <a:off x="7799832" y="1828800"/>
+            <a:ext cx="3145536" cy="685800"/>
           </a:xfrm>
           <a:prstGeom prst="rect">
             <a:avLst/>
@@ -16764,21 +19080,212 @@
       </p:sp>
       <p:sp>
         <p:nvSpPr>
-          <p:cNvPr id="15" name="Shape 13"/>
-          <p:cNvSpPr/>
-          <p:nvPr/>
-        </p:nvSpPr>
-        <p:spPr>
-          <a:xfrm>
-            <a:off x="7909560" y="3520440"/>
-            <a:ext cx="3154680" cy="1737360"/>
+          <p:cNvPr id="13" name="Shape 11"/>
+          <p:cNvSpPr/>
+          <p:nvPr/>
+        </p:nvSpPr>
+        <p:spPr>
+          <a:xfrm>
+            <a:off x="7635240" y="2788920"/>
+            <a:ext cx="3474720" cy="1536192"/>
           </a:xfrm>
           <a:prstGeom prst="roundRect">
             <a:avLst>
-              <a:gd name="adj" fmla="val 6316"/>
+              <a:gd name="adj" fmla="val 7143"/>
             </a:avLst>
           </a:prstGeom>
           <a:solidFill>
+            <a:srgbClr val="FFFFFF">
+              <a:alpha val="88000"/>
+            </a:srgbClr>
+          </a:solidFill>
+          <a:ln w="12700">
+            <a:solidFill>
+              <a:srgbClr val="D6E8F2"/>
+            </a:solidFill>
+            <a:prstDash val="solid"/>
+          </a:ln>
+        </p:spPr>
+      </p:sp>
+      <p:sp>
+        <p:nvSpPr>
+          <p:cNvPr id="14" name="Shape 12"/>
+          <p:cNvSpPr/>
+          <p:nvPr/>
+        </p:nvSpPr>
+        <p:spPr>
+          <a:xfrm>
+            <a:off x="8138160" y="3474720"/>
+            <a:ext cx="256032" cy="411480"/>
+          </a:xfrm>
+          <a:prstGeom prst="rect">
+            <a:avLst/>
+          </a:prstGeom>
+          <a:solidFill>
+            <a:srgbClr val="0068B7"/>
+          </a:solidFill>
+          <a:ln w="12700">
+            <a:solidFill>
+              <a:srgbClr val="0068B7"/>
+            </a:solidFill>
+            <a:prstDash val="solid"/>
+          </a:ln>
+        </p:spPr>
+      </p:sp>
+      <p:sp>
+        <p:nvSpPr>
+          <p:cNvPr id="15" name="Shape 13"/>
+          <p:cNvSpPr/>
+          <p:nvPr/>
+        </p:nvSpPr>
+        <p:spPr>
+          <a:xfrm>
+            <a:off x="8577072" y="3172968"/>
+            <a:ext cx="256032" cy="713232"/>
+          </a:xfrm>
+          <a:prstGeom prst="rect">
+            <a:avLst/>
+          </a:prstGeom>
+          <a:solidFill>
+            <a:srgbClr val="2F8A28"/>
+          </a:solidFill>
+          <a:ln w="12700">
+            <a:solidFill>
+              <a:srgbClr val="2F8A28"/>
+            </a:solidFill>
+            <a:prstDash val="solid"/>
+          </a:ln>
+        </p:spPr>
+      </p:sp>
+      <p:sp>
+        <p:nvSpPr>
+          <p:cNvPr id="16" name="Shape 14"/>
+          <p:cNvSpPr/>
+          <p:nvPr/>
+        </p:nvSpPr>
+        <p:spPr>
+          <a:xfrm>
+            <a:off x="9015984" y="2880360"/>
+            <a:ext cx="256032" cy="1005840"/>
+          </a:xfrm>
+          <a:prstGeom prst="rect">
+            <a:avLst/>
+          </a:prstGeom>
+          <a:solidFill>
+            <a:srgbClr val="D69A2D"/>
+          </a:solidFill>
+          <a:ln w="12700">
+            <a:solidFill>
+              <a:srgbClr val="D69A2D"/>
+            </a:solidFill>
+            <a:prstDash val="solid"/>
+          </a:ln>
+        </p:spPr>
+      </p:sp>
+      <p:sp>
+        <p:nvSpPr>
+          <p:cNvPr id="17" name="Shape 15"/>
+          <p:cNvSpPr/>
+          <p:nvPr/>
+        </p:nvSpPr>
+        <p:spPr>
+          <a:xfrm>
+            <a:off x="9454896" y="3319272"/>
+            <a:ext cx="256032" cy="566928"/>
+          </a:xfrm>
+          <a:prstGeom prst="rect">
+            <a:avLst/>
+          </a:prstGeom>
+          <a:solidFill>
+            <a:srgbClr val="6A4CA3"/>
+          </a:solidFill>
+          <a:ln w="12700">
+            <a:solidFill>
+              <a:srgbClr val="6A4CA3"/>
+            </a:solidFill>
+            <a:prstDash val="solid"/>
+          </a:ln>
+        </p:spPr>
+      </p:sp>
+      <p:sp>
+        <p:nvSpPr>
+          <p:cNvPr id="18" name="Shape 16"/>
+          <p:cNvSpPr/>
+          <p:nvPr/>
+        </p:nvSpPr>
+        <p:spPr>
+          <a:xfrm>
+            <a:off x="8019288" y="3886200"/>
+            <a:ext cx="2706624" cy="0"/>
+          </a:xfrm>
+          <a:prstGeom prst="line">
+            <a:avLst/>
+          </a:prstGeom>
+          <a:noFill/>
+          <a:ln w="15240">
+            <a:solidFill>
+              <a:srgbClr val="003A63"/>
+            </a:solidFill>
+            <a:prstDash val="solid"/>
+          </a:ln>
+        </p:spPr>
+      </p:sp>
+      <p:sp>
+        <p:nvSpPr>
+          <p:cNvPr id="19" name="Text 17"/>
+          <p:cNvSpPr/>
+          <p:nvPr/>
+        </p:nvSpPr>
+        <p:spPr>
+          <a:xfrm>
+            <a:off x="7863840" y="3017520"/>
+            <a:ext cx="3017520" cy="201168"/>
+          </a:xfrm>
+          <a:prstGeom prst="rect">
+            <a:avLst/>
+          </a:prstGeom>
+          <a:noFill/>
+          <a:ln/>
+        </p:spPr>
+        <p:txBody>
+          <a:bodyPr wrap="square" lIns="0" tIns="0" rIns="0" bIns="0" rtlCol="0" anchor="ctr"/>
+          <a:lstStyle/>
+          <a:p>
+            <a:pPr algn="ctr" indent="0" marL="0">
+              <a:buNone/>
+            </a:pPr>
+            <a:r>
+              <a:rPr lang="en-US" sz="1050" b="1" dirty="0">
+                <a:solidFill>
+                  <a:srgbClr val="003A63"/>
+                </a:solidFill>
+                <a:latin typeface="Aptos" pitchFamily="34" charset="0"/>
+                <a:ea typeface="Aptos" pitchFamily="34" charset="-122"/>
+                <a:cs typeface="Aptos" pitchFamily="34" charset="-120"/>
+              </a:rPr>
+              <a:t>Measure and monitor</a:t>
+            </a:r>
+            <a:endParaRPr lang="en-US" sz="1050" dirty="0"/>
+          </a:p>
+        </p:txBody>
+      </p:sp>
+      <p:sp>
+        <p:nvSpPr>
+          <p:cNvPr id="20" name="Shape 18"/>
+          <p:cNvSpPr/>
+          <p:nvPr/>
+        </p:nvSpPr>
+        <p:spPr>
+          <a:xfrm>
+            <a:off x="7635240" y="4498848"/>
+            <a:ext cx="3474720" cy="1143000"/>
+          </a:xfrm>
+          <a:prstGeom prst="roundRect">
+            <a:avLst>
+              <a:gd name="adj" fmla="val 9600"/>
+            </a:avLst>
+          </a:prstGeom>
+          <a:solidFill>
             <a:srgbClr val="EAF6F8"/>
           </a:solidFill>
           <a:ln w="12700">
@@ -16791,14 +19298,14 @@
       </p:sp>
       <p:sp>
         <p:nvSpPr>
-          <p:cNvPr id="16" name="Text 14"/>
-          <p:cNvSpPr/>
-          <p:nvPr/>
-        </p:nvSpPr>
-        <p:spPr>
-          <a:xfrm>
-            <a:off x="8074152" y="3666744"/>
-            <a:ext cx="2825496" cy="256032"/>
+          <p:cNvPr id="21" name="Text 19"/>
+          <p:cNvSpPr/>
+          <p:nvPr/>
+        </p:nvSpPr>
+        <p:spPr>
+          <a:xfrm>
+            <a:off x="7799832" y="4645152"/>
+            <a:ext cx="3145536" cy="256032"/>
           </a:xfrm>
           <a:prstGeom prst="rect">
             <a:avLst/>
@@ -16822,7 +19329,7 @@
                 <a:ea typeface="Aptos" pitchFamily="34" charset="-122"/>
                 <a:cs typeface="Aptos" pitchFamily="34" charset="-120"/>
               </a:rPr>
-              <a:t>Use this for</a:t>
+              <a:t>How to validate</a:t>
             </a:r>
             <a:endParaRPr lang="en-US" sz="1300" dirty="0"/>
           </a:p>
@@ -16830,14 +19337,14 @@
       </p:sp>
       <p:sp>
         <p:nvSpPr>
-          <p:cNvPr id="17" name="Text 15"/>
-          <p:cNvSpPr/>
-          <p:nvPr/>
-        </p:nvSpPr>
-        <p:spPr>
-          <a:xfrm>
-            <a:off x="8074152" y="4023360"/>
-            <a:ext cx="2825496" cy="1097280"/>
+          <p:cNvPr id="22" name="Text 20"/>
+          <p:cNvSpPr/>
+          <p:nvPr/>
+        </p:nvSpPr>
+        <p:spPr>
+          <a:xfrm>
+            <a:off x="7799832" y="5001768"/>
+            <a:ext cx="3145536" cy="502920"/>
           </a:xfrm>
           <a:prstGeom prst="rect">
             <a:avLst/>
@@ -16863,7 +19370,7 @@
                 <a:ea typeface="Aptos" pitchFamily="34" charset="-122"/>
                 <a:cs typeface="Aptos" pitchFamily="34" charset="-120"/>
               </a:rPr>
-              <a:t>Connect the concept to public health decisions, safeguards, documentation, or implementation work.</a:t>
+              <a:t>Connect the concept to data quality, model performance, validation evidence, monitoring measures, and decisions that remain under human control.</a:t>
             </a:r>
             <a:endParaRPr lang="en-US" sz="1550" dirty="0"/>
           </a:p>
@@ -17037,8 +19544,8 @@
         </p:nvSpPr>
         <p:spPr>
           <a:xfrm>
-            <a:off x="9966960" y="6537960"/>
-            <a:ext cx="1645920" cy="201168"/>
+            <a:off x="9646920" y="6537960"/>
+            <a:ext cx="1965960" cy="201168"/>
           </a:xfrm>
           <a:prstGeom prst="rect">
             <a:avLst/>
@@ -17062,7 +19569,7 @@
                 <a:ea typeface="Aptos" pitchFamily="34" charset="-122"/>
                 <a:cs typeface="Aptos" pitchFamily="34" charset="-120"/>
               </a:rPr>
-              <a:t>Â© Paula Soper</a:t>
+              <a:t>Copyright Paula Soper</a:t>
             </a:r>
             <a:endParaRPr lang="en-US" sz="800" dirty="0"/>
           </a:p>
@@ -17109,77 +19616,13 @@
       </p:sp>
       <p:sp>
         <p:nvSpPr>
-          <p:cNvPr id="8" name="Shape 6"/>
+          <p:cNvPr id="8" name="Text 6"/>
           <p:cNvSpPr/>
           <p:nvPr/>
         </p:nvSpPr>
         <p:spPr>
           <a:xfrm>
             <a:off x="640080" y="658368"/>
-            <a:ext cx="420624" cy="420624"/>
-          </a:xfrm>
-          <a:prstGeom prst="ellipse">
-            <a:avLst/>
-          </a:prstGeom>
-          <a:solidFill>
-            <a:srgbClr val="0068B7"/>
-          </a:solidFill>
-          <a:ln w="12700">
-            <a:solidFill>
-              <a:srgbClr val="0068B7"/>
-            </a:solidFill>
-            <a:prstDash val="solid"/>
-          </a:ln>
-        </p:spPr>
-      </p:sp>
-      <p:sp>
-        <p:nvSpPr>
-          <p:cNvPr id="9" name="Text 7"/>
-          <p:cNvSpPr/>
-          <p:nvPr/>
-        </p:nvSpPr>
-        <p:spPr>
-          <a:xfrm>
-            <a:off x="640080" y="731520"/>
-            <a:ext cx="420624" cy="164592"/>
-          </a:xfrm>
-          <a:prstGeom prst="rect">
-            <a:avLst/>
-          </a:prstGeom>
-          <a:noFill/>
-          <a:ln/>
-        </p:spPr>
-        <p:txBody>
-          <a:bodyPr wrap="square" lIns="0" tIns="0" rIns="0" bIns="0" rtlCol="0" anchor="ctr"/>
-          <a:lstStyle/>
-          <a:p>
-            <a:pPr algn="ctr" indent="0" marL="0">
-              <a:buNone/>
-            </a:pPr>
-            <a:r>
-              <a:rPr lang="en-US" sz="1100" b="1" dirty="0">
-                <a:solidFill>
-                  <a:srgbClr val="FFFFFF"/>
-                </a:solidFill>
-                <a:latin typeface="Aptos" pitchFamily="34" charset="0"/>
-                <a:ea typeface="Aptos" pitchFamily="34" charset="-122"/>
-                <a:cs typeface="Aptos" pitchFamily="34" charset="-120"/>
-              </a:rPr>
-              <a:t>4</a:t>
-            </a:r>
-            <a:endParaRPr lang="en-US" sz="1100" dirty="0"/>
-          </a:p>
-        </p:txBody>
-      </p:sp>
-      <p:sp>
-        <p:nvSpPr>
-          <p:cNvPr id="10" name="Text 8"/>
-          <p:cNvSpPr/>
-          <p:nvPr/>
-        </p:nvSpPr>
-        <p:spPr>
-          <a:xfrm>
-            <a:off x="640080" y="621792"/>
             <a:ext cx="10881360" cy="713232"/>
           </a:xfrm>
           <a:prstGeom prst="rect">
@@ -17214,14 +19657,14 @@
       </p:sp>
       <p:sp>
         <p:nvSpPr>
-          <p:cNvPr id="11" name="Text 9"/>
+          <p:cNvPr id="9" name="Text 7"/>
           <p:cNvSpPr/>
           <p:nvPr/>
         </p:nvSpPr>
         <p:spPr>
           <a:xfrm>
             <a:off x="868680" y="1508760"/>
-            <a:ext cx="6537960" cy="4160520"/>
+            <a:ext cx="6309360" cy="4160520"/>
           </a:xfrm>
           <a:prstGeom prst="rect">
             <a:avLst/>
@@ -17280,18 +19723,18 @@
       </p:sp>
       <p:sp>
         <p:nvSpPr>
-          <p:cNvPr id="12" name="Shape 10"/>
-          <p:cNvSpPr/>
-          <p:nvPr/>
-        </p:nvSpPr>
-        <p:spPr>
-          <a:xfrm>
-            <a:off x="7909560" y="1417320"/>
-            <a:ext cx="3154680" cy="1828800"/>
+          <p:cNvPr id="10" name="Shape 8"/>
+          <p:cNvSpPr/>
+          <p:nvPr/>
+        </p:nvSpPr>
+        <p:spPr>
+          <a:xfrm>
+            <a:off x="7635240" y="1325880"/>
+            <a:ext cx="3474720" cy="1325880"/>
           </a:xfrm>
           <a:prstGeom prst="roundRect">
             <a:avLst>
-              <a:gd name="adj" fmla="val 6000"/>
+              <a:gd name="adj" fmla="val 8276"/>
             </a:avLst>
           </a:prstGeom>
           <a:solidFill>
@@ -17307,14 +19750,14 @@
       </p:sp>
       <p:sp>
         <p:nvSpPr>
-          <p:cNvPr id="13" name="Text 11"/>
-          <p:cNvSpPr/>
-          <p:nvPr/>
-        </p:nvSpPr>
-        <p:spPr>
-          <a:xfrm>
-            <a:off x="8074152" y="1563624"/>
-            <a:ext cx="2825496" cy="256032"/>
+          <p:cNvPr id="11" name="Text 9"/>
+          <p:cNvSpPr/>
+          <p:nvPr/>
+        </p:nvSpPr>
+        <p:spPr>
+          <a:xfrm>
+            <a:off x="7799832" y="1472184"/>
+            <a:ext cx="3145536" cy="256032"/>
           </a:xfrm>
           <a:prstGeom prst="rect">
             <a:avLst/>
@@ -17338,7 +19781,7 @@
                 <a:ea typeface="Aptos" pitchFamily="34" charset="-122"/>
                 <a:cs typeface="Aptos" pitchFamily="34" charset="-120"/>
               </a:rPr>
-              <a:t>Key idea</a:t>
+              <a:t>Data decision</a:t>
             </a:r>
             <a:endParaRPr lang="en-US" sz="1300" dirty="0"/>
           </a:p>
@@ -17346,14 +19789,14 @@
       </p:sp>
       <p:sp>
         <p:nvSpPr>
-          <p:cNvPr id="14" name="Text 12"/>
-          <p:cNvSpPr/>
-          <p:nvPr/>
-        </p:nvSpPr>
-        <p:spPr>
-          <a:xfrm>
-            <a:off x="8074152" y="1920240"/>
-            <a:ext cx="2825496" cy="1188720"/>
+          <p:cNvPr id="12" name="Text 10"/>
+          <p:cNvSpPr/>
+          <p:nvPr/>
+        </p:nvSpPr>
+        <p:spPr>
+          <a:xfrm>
+            <a:off x="7799832" y="1828800"/>
+            <a:ext cx="3145536" cy="685800"/>
           </a:xfrm>
           <a:prstGeom prst="rect">
             <a:avLst/>
@@ -17387,21 +19830,212 @@
       </p:sp>
       <p:sp>
         <p:nvSpPr>
-          <p:cNvPr id="15" name="Shape 13"/>
-          <p:cNvSpPr/>
-          <p:nvPr/>
-        </p:nvSpPr>
-        <p:spPr>
-          <a:xfrm>
-            <a:off x="7909560" y="3520440"/>
-            <a:ext cx="3154680" cy="1737360"/>
+          <p:cNvPr id="13" name="Shape 11"/>
+          <p:cNvSpPr/>
+          <p:nvPr/>
+        </p:nvSpPr>
+        <p:spPr>
+          <a:xfrm>
+            <a:off x="7635240" y="2788920"/>
+            <a:ext cx="3474720" cy="1536192"/>
           </a:xfrm>
           <a:prstGeom prst="roundRect">
             <a:avLst>
-              <a:gd name="adj" fmla="val 6316"/>
+              <a:gd name="adj" fmla="val 7143"/>
             </a:avLst>
           </a:prstGeom>
           <a:solidFill>
+            <a:srgbClr val="FFFFFF">
+              <a:alpha val="88000"/>
+            </a:srgbClr>
+          </a:solidFill>
+          <a:ln w="12700">
+            <a:solidFill>
+              <a:srgbClr val="D6E8F2"/>
+            </a:solidFill>
+            <a:prstDash val="solid"/>
+          </a:ln>
+        </p:spPr>
+      </p:sp>
+      <p:sp>
+        <p:nvSpPr>
+          <p:cNvPr id="14" name="Shape 12"/>
+          <p:cNvSpPr/>
+          <p:nvPr/>
+        </p:nvSpPr>
+        <p:spPr>
+          <a:xfrm>
+            <a:off x="8138160" y="3474720"/>
+            <a:ext cx="256032" cy="411480"/>
+          </a:xfrm>
+          <a:prstGeom prst="rect">
+            <a:avLst/>
+          </a:prstGeom>
+          <a:solidFill>
+            <a:srgbClr val="0068B7"/>
+          </a:solidFill>
+          <a:ln w="12700">
+            <a:solidFill>
+              <a:srgbClr val="0068B7"/>
+            </a:solidFill>
+            <a:prstDash val="solid"/>
+          </a:ln>
+        </p:spPr>
+      </p:sp>
+      <p:sp>
+        <p:nvSpPr>
+          <p:cNvPr id="15" name="Shape 13"/>
+          <p:cNvSpPr/>
+          <p:nvPr/>
+        </p:nvSpPr>
+        <p:spPr>
+          <a:xfrm>
+            <a:off x="8577072" y="3172968"/>
+            <a:ext cx="256032" cy="713232"/>
+          </a:xfrm>
+          <a:prstGeom prst="rect">
+            <a:avLst/>
+          </a:prstGeom>
+          <a:solidFill>
+            <a:srgbClr val="2F8A28"/>
+          </a:solidFill>
+          <a:ln w="12700">
+            <a:solidFill>
+              <a:srgbClr val="2F8A28"/>
+            </a:solidFill>
+            <a:prstDash val="solid"/>
+          </a:ln>
+        </p:spPr>
+      </p:sp>
+      <p:sp>
+        <p:nvSpPr>
+          <p:cNvPr id="16" name="Shape 14"/>
+          <p:cNvSpPr/>
+          <p:nvPr/>
+        </p:nvSpPr>
+        <p:spPr>
+          <a:xfrm>
+            <a:off x="9015984" y="2880360"/>
+            <a:ext cx="256032" cy="1005840"/>
+          </a:xfrm>
+          <a:prstGeom prst="rect">
+            <a:avLst/>
+          </a:prstGeom>
+          <a:solidFill>
+            <a:srgbClr val="D69A2D"/>
+          </a:solidFill>
+          <a:ln w="12700">
+            <a:solidFill>
+              <a:srgbClr val="D69A2D"/>
+            </a:solidFill>
+            <a:prstDash val="solid"/>
+          </a:ln>
+        </p:spPr>
+      </p:sp>
+      <p:sp>
+        <p:nvSpPr>
+          <p:cNvPr id="17" name="Shape 15"/>
+          <p:cNvSpPr/>
+          <p:nvPr/>
+        </p:nvSpPr>
+        <p:spPr>
+          <a:xfrm>
+            <a:off x="9454896" y="3319272"/>
+            <a:ext cx="256032" cy="566928"/>
+          </a:xfrm>
+          <a:prstGeom prst="rect">
+            <a:avLst/>
+          </a:prstGeom>
+          <a:solidFill>
+            <a:srgbClr val="6A4CA3"/>
+          </a:solidFill>
+          <a:ln w="12700">
+            <a:solidFill>
+              <a:srgbClr val="6A4CA3"/>
+            </a:solidFill>
+            <a:prstDash val="solid"/>
+          </a:ln>
+        </p:spPr>
+      </p:sp>
+      <p:sp>
+        <p:nvSpPr>
+          <p:cNvPr id="18" name="Shape 16"/>
+          <p:cNvSpPr/>
+          <p:nvPr/>
+        </p:nvSpPr>
+        <p:spPr>
+          <a:xfrm>
+            <a:off x="8019288" y="3886200"/>
+            <a:ext cx="2706624" cy="0"/>
+          </a:xfrm>
+          <a:prstGeom prst="line">
+            <a:avLst/>
+          </a:prstGeom>
+          <a:noFill/>
+          <a:ln w="15240">
+            <a:solidFill>
+              <a:srgbClr val="003A63"/>
+            </a:solidFill>
+            <a:prstDash val="solid"/>
+          </a:ln>
+        </p:spPr>
+      </p:sp>
+      <p:sp>
+        <p:nvSpPr>
+          <p:cNvPr id="19" name="Text 17"/>
+          <p:cNvSpPr/>
+          <p:nvPr/>
+        </p:nvSpPr>
+        <p:spPr>
+          <a:xfrm>
+            <a:off x="7863840" y="3017520"/>
+            <a:ext cx="3017520" cy="201168"/>
+          </a:xfrm>
+          <a:prstGeom prst="rect">
+            <a:avLst/>
+          </a:prstGeom>
+          <a:noFill/>
+          <a:ln/>
+        </p:spPr>
+        <p:txBody>
+          <a:bodyPr wrap="square" lIns="0" tIns="0" rIns="0" bIns="0" rtlCol="0" anchor="ctr"/>
+          <a:lstStyle/>
+          <a:p>
+            <a:pPr algn="ctr" indent="0" marL="0">
+              <a:buNone/>
+            </a:pPr>
+            <a:r>
+              <a:rPr lang="en-US" sz="1050" b="1" dirty="0">
+                <a:solidFill>
+                  <a:srgbClr val="003A63"/>
+                </a:solidFill>
+                <a:latin typeface="Aptos" pitchFamily="34" charset="0"/>
+                <a:ea typeface="Aptos" pitchFamily="34" charset="-122"/>
+                <a:cs typeface="Aptos" pitchFamily="34" charset="-120"/>
+              </a:rPr>
+              <a:t>Measure and monitor</a:t>
+            </a:r>
+            <a:endParaRPr lang="en-US" sz="1050" dirty="0"/>
+          </a:p>
+        </p:txBody>
+      </p:sp>
+      <p:sp>
+        <p:nvSpPr>
+          <p:cNvPr id="20" name="Shape 18"/>
+          <p:cNvSpPr/>
+          <p:nvPr/>
+        </p:nvSpPr>
+        <p:spPr>
+          <a:xfrm>
+            <a:off x="7635240" y="4498848"/>
+            <a:ext cx="3474720" cy="1143000"/>
+          </a:xfrm>
+          <a:prstGeom prst="roundRect">
+            <a:avLst>
+              <a:gd name="adj" fmla="val 9600"/>
+            </a:avLst>
+          </a:prstGeom>
+          <a:solidFill>
             <a:srgbClr val="EAF6F8"/>
           </a:solidFill>
           <a:ln w="12700">
@@ -17414,14 +20048,14 @@
       </p:sp>
       <p:sp>
         <p:nvSpPr>
-          <p:cNvPr id="16" name="Text 14"/>
-          <p:cNvSpPr/>
-          <p:nvPr/>
-        </p:nvSpPr>
-        <p:spPr>
-          <a:xfrm>
-            <a:off x="8074152" y="3666744"/>
-            <a:ext cx="2825496" cy="256032"/>
+          <p:cNvPr id="21" name="Text 19"/>
+          <p:cNvSpPr/>
+          <p:nvPr/>
+        </p:nvSpPr>
+        <p:spPr>
+          <a:xfrm>
+            <a:off x="7799832" y="4645152"/>
+            <a:ext cx="3145536" cy="256032"/>
           </a:xfrm>
           <a:prstGeom prst="rect">
             <a:avLst/>
@@ -17445,7 +20079,7 @@
                 <a:ea typeface="Aptos" pitchFamily="34" charset="-122"/>
                 <a:cs typeface="Aptos" pitchFamily="34" charset="-120"/>
               </a:rPr>
-              <a:t>Use this for</a:t>
+              <a:t>How to validate</a:t>
             </a:r>
             <a:endParaRPr lang="en-US" sz="1300" dirty="0"/>
           </a:p>
@@ -17453,14 +20087,14 @@
       </p:sp>
       <p:sp>
         <p:nvSpPr>
-          <p:cNvPr id="17" name="Text 15"/>
-          <p:cNvSpPr/>
-          <p:nvPr/>
-        </p:nvSpPr>
-        <p:spPr>
-          <a:xfrm>
-            <a:off x="8074152" y="4023360"/>
-            <a:ext cx="2825496" cy="1097280"/>
+          <p:cNvPr id="22" name="Text 20"/>
+          <p:cNvSpPr/>
+          <p:nvPr/>
+        </p:nvSpPr>
+        <p:spPr>
+          <a:xfrm>
+            <a:off x="7799832" y="5001768"/>
+            <a:ext cx="3145536" cy="502920"/>
           </a:xfrm>
           <a:prstGeom prst="rect">
             <a:avLst/>
@@ -17486,7 +20120,7 @@
                 <a:ea typeface="Aptos" pitchFamily="34" charset="-122"/>
                 <a:cs typeface="Aptos" pitchFamily="34" charset="-120"/>
               </a:rPr>
-              <a:t>Connect the concept to public health decisions, safeguards, documentation, or implementation work.</a:t>
+              <a:t>Connect the concept to data quality, model performance, validation evidence, monitoring measures, and decisions that remain under human control.</a:t>
             </a:r>
             <a:endParaRPr lang="en-US" sz="1550" dirty="0"/>
           </a:p>

--- a/downloads/presentations/modules/arc-200.pptx
+++ b/downloads/presentations/modules/arc-200.pptx
@@ -3711,13 +3711,11 @@
             </a:avLst>
           </a:prstGeom>
           <a:solidFill>
-            <a:srgbClr val="FFFFFF">
-              <a:alpha val="88000"/>
-            </a:srgbClr>
+            <a:srgbClr val="FFFFFF"/>
           </a:solidFill>
           <a:ln w="12700">
             <a:solidFill>
-              <a:srgbClr val="D6E8F2"/>
+              <a:srgbClr val="B9D7E6"/>
             </a:solidFill>
             <a:prstDash val="solid"/>
           </a:ln>
@@ -3725,169 +3723,112 @@
       </p:sp>
       <p:sp>
         <p:nvSpPr>
-          <p:cNvPr id="14" name="Shape 12"/>
-          <p:cNvSpPr/>
-          <p:nvPr/>
-        </p:nvSpPr>
-        <p:spPr>
-          <a:xfrm>
-            <a:off x="8138160" y="3474720"/>
-            <a:ext cx="256032" cy="411480"/>
-          </a:xfrm>
-          <a:prstGeom prst="rect">
-            <a:avLst/>
-          </a:prstGeom>
-          <a:solidFill>
-            <a:srgbClr val="0068B7"/>
-          </a:solidFill>
-          <a:ln w="12700">
-            <a:solidFill>
-              <a:srgbClr val="0068B7"/>
-            </a:solidFill>
-            <a:prstDash val="solid"/>
-          </a:ln>
-        </p:spPr>
-      </p:sp>
-      <p:sp>
-        <p:nvSpPr>
-          <p:cNvPr id="15" name="Shape 13"/>
-          <p:cNvSpPr/>
-          <p:nvPr/>
-        </p:nvSpPr>
-        <p:spPr>
-          <a:xfrm>
-            <a:off x="8577072" y="3172968"/>
-            <a:ext cx="256032" cy="713232"/>
-          </a:xfrm>
-          <a:prstGeom prst="rect">
-            <a:avLst/>
-          </a:prstGeom>
-          <a:solidFill>
-            <a:srgbClr val="2F8A28"/>
-          </a:solidFill>
-          <a:ln w="12700">
-            <a:solidFill>
-              <a:srgbClr val="2F8A28"/>
-            </a:solidFill>
-            <a:prstDash val="solid"/>
-          </a:ln>
-        </p:spPr>
+          <p:cNvPr id="14" name="Text 12"/>
+          <p:cNvSpPr/>
+          <p:nvPr/>
+        </p:nvSpPr>
+        <p:spPr>
+          <a:xfrm>
+            <a:off x="7799832" y="2935224"/>
+            <a:ext cx="3145536" cy="256032"/>
+          </a:xfrm>
+          <a:prstGeom prst="rect">
+            <a:avLst/>
+          </a:prstGeom>
+          <a:noFill/>
+          <a:ln/>
+        </p:spPr>
+        <p:txBody>
+          <a:bodyPr wrap="square" lIns="0" tIns="0" rIns="0" bIns="0" rtlCol="0" anchor="ctr"/>
+          <a:lstStyle/>
+          <a:p>
+            <a:pPr indent="0" marL="0">
+              <a:buNone/>
+            </a:pPr>
+            <a:r>
+              <a:rPr lang="en-US" sz="1300" b="1" dirty="0">
+                <a:solidFill>
+                  <a:srgbClr val="0068B7"/>
+                </a:solidFill>
+                <a:latin typeface="Aptos" pitchFamily="34" charset="0"/>
+                <a:ea typeface="Aptos" pitchFamily="34" charset="-122"/>
+                <a:cs typeface="Aptos" pitchFamily="34" charset="-120"/>
+              </a:rPr>
+              <a:t>Concept checkpoints</a:t>
+            </a:r>
+            <a:endParaRPr lang="en-US" sz="1300" dirty="0"/>
+          </a:p>
+        </p:txBody>
+      </p:sp>
+      <p:sp>
+        <p:nvSpPr>
+          <p:cNvPr id="15" name="Text 13"/>
+          <p:cNvSpPr/>
+          <p:nvPr/>
+        </p:nvSpPr>
+        <p:spPr>
+          <a:xfrm>
+            <a:off x="7818120" y="3300984"/>
+            <a:ext cx="3090672" cy="877824"/>
+          </a:xfrm>
+          <a:prstGeom prst="rect">
+            <a:avLst/>
+          </a:prstGeom>
+          <a:noFill/>
+          <a:ln/>
+        </p:spPr>
+        <p:txBody>
+          <a:bodyPr wrap="square" lIns="254" tIns="254" rIns="254" bIns="254" rtlCol="0" anchor="t">
+            <a:normAutofit/>
+          </a:bodyPr>
+          <a:lstStyle/>
+          <a:p>
+            <a:r>
+              <a:rPr lang="en-US" sz="1380" dirty="0">
+                <a:solidFill>
+                  <a:srgbClr val="17364A"/>
+                </a:solidFill>
+                <a:latin typeface="Aptos" pitchFamily="34" charset="0"/>
+                <a:ea typeface="Aptos" pitchFamily="34" charset="-122"/>
+                <a:cs typeface="Aptos" pitchFamily="34" charset="-120"/>
+              </a:rPr>
+              <a:t>A system of record is the official system or process where public health information,.</a:t>
+            </a:r>
+            <a:endParaRPr lang="en-US" sz="1380" dirty="0"/>
+          </a:p>
+          <a:p>
+            <a:r>
+              <a:rPr lang="en-US" sz="1380" dirty="0">
+                <a:solidFill>
+                  <a:srgbClr val="17364A"/>
+                </a:solidFill>
+                <a:latin typeface="Aptos" pitchFamily="34" charset="0"/>
+                <a:ea typeface="Aptos" pitchFamily="34" charset="-122"/>
+                <a:cs typeface="Aptos" pitchFamily="34" charset="-120"/>
+              </a:rPr>
+              <a:t>AI outputs should not automatically become the official record unless the agency has.</a:t>
+            </a:r>
+            <a:endParaRPr lang="en-US" sz="1380" dirty="0"/>
+          </a:p>
+          <a:p>
+            <a:r>
+              <a:rPr lang="en-US" sz="1380" dirty="0">
+                <a:solidFill>
+                  <a:srgbClr val="17364A"/>
+                </a:solidFill>
+                <a:latin typeface="Aptos" pitchFamily="34" charset="0"/>
+                <a:ea typeface="Aptos" pitchFamily="34" charset="-122"/>
+                <a:cs typeface="Aptos" pitchFamily="34" charset="-120"/>
+              </a:rPr>
+              <a:t>For example, an AI tool may draft a case summary, but the final case note may still need.</a:t>
+            </a:r>
+            <a:endParaRPr lang="en-US" sz="1380" dirty="0"/>
+          </a:p>
+        </p:txBody>
       </p:sp>
       <p:sp>
         <p:nvSpPr>
           <p:cNvPr id="16" name="Shape 14"/>
-          <p:cNvSpPr/>
-          <p:nvPr/>
-        </p:nvSpPr>
-        <p:spPr>
-          <a:xfrm>
-            <a:off x="9015984" y="2880360"/>
-            <a:ext cx="256032" cy="1005840"/>
-          </a:xfrm>
-          <a:prstGeom prst="rect">
-            <a:avLst/>
-          </a:prstGeom>
-          <a:solidFill>
-            <a:srgbClr val="D69A2D"/>
-          </a:solidFill>
-          <a:ln w="12700">
-            <a:solidFill>
-              <a:srgbClr val="D69A2D"/>
-            </a:solidFill>
-            <a:prstDash val="solid"/>
-          </a:ln>
-        </p:spPr>
-      </p:sp>
-      <p:sp>
-        <p:nvSpPr>
-          <p:cNvPr id="17" name="Shape 15"/>
-          <p:cNvSpPr/>
-          <p:nvPr/>
-        </p:nvSpPr>
-        <p:spPr>
-          <a:xfrm>
-            <a:off x="9454896" y="3319272"/>
-            <a:ext cx="256032" cy="566928"/>
-          </a:xfrm>
-          <a:prstGeom prst="rect">
-            <a:avLst/>
-          </a:prstGeom>
-          <a:solidFill>
-            <a:srgbClr val="6A4CA3"/>
-          </a:solidFill>
-          <a:ln w="12700">
-            <a:solidFill>
-              <a:srgbClr val="6A4CA3"/>
-            </a:solidFill>
-            <a:prstDash val="solid"/>
-          </a:ln>
-        </p:spPr>
-      </p:sp>
-      <p:sp>
-        <p:nvSpPr>
-          <p:cNvPr id="18" name="Shape 16"/>
-          <p:cNvSpPr/>
-          <p:nvPr/>
-        </p:nvSpPr>
-        <p:spPr>
-          <a:xfrm>
-            <a:off x="8019288" y="3886200"/>
-            <a:ext cx="2706624" cy="0"/>
-          </a:xfrm>
-          <a:prstGeom prst="line">
-            <a:avLst/>
-          </a:prstGeom>
-          <a:noFill/>
-          <a:ln w="15240">
-            <a:solidFill>
-              <a:srgbClr val="003A63"/>
-            </a:solidFill>
-            <a:prstDash val="solid"/>
-          </a:ln>
-        </p:spPr>
-      </p:sp>
-      <p:sp>
-        <p:nvSpPr>
-          <p:cNvPr id="19" name="Text 17"/>
-          <p:cNvSpPr/>
-          <p:nvPr/>
-        </p:nvSpPr>
-        <p:spPr>
-          <a:xfrm>
-            <a:off x="7863840" y="3017520"/>
-            <a:ext cx="3017520" cy="201168"/>
-          </a:xfrm>
-          <a:prstGeom prst="rect">
-            <a:avLst/>
-          </a:prstGeom>
-          <a:noFill/>
-          <a:ln/>
-        </p:spPr>
-        <p:txBody>
-          <a:bodyPr wrap="square" lIns="0" tIns="0" rIns="0" bIns="0" rtlCol="0" anchor="ctr"/>
-          <a:lstStyle/>
-          <a:p>
-            <a:pPr algn="ctr" indent="0" marL="0">
-              <a:buNone/>
-            </a:pPr>
-            <a:r>
-              <a:rPr lang="en-US" sz="1050" b="1" dirty="0">
-                <a:solidFill>
-                  <a:srgbClr val="003A63"/>
-                </a:solidFill>
-                <a:latin typeface="Aptos" pitchFamily="34" charset="0"/>
-                <a:ea typeface="Aptos" pitchFamily="34" charset="-122"/>
-                <a:cs typeface="Aptos" pitchFamily="34" charset="-120"/>
-              </a:rPr>
-              <a:t>Measure and monitor</a:t>
-            </a:r>
-            <a:endParaRPr lang="en-US" sz="1050" dirty="0"/>
-          </a:p>
-        </p:txBody>
-      </p:sp>
-      <p:sp>
-        <p:nvSpPr>
-          <p:cNvPr id="20" name="Shape 18"/>
           <p:cNvSpPr/>
           <p:nvPr/>
         </p:nvSpPr>
@@ -3914,7 +3855,7 @@
       </p:sp>
       <p:sp>
         <p:nvSpPr>
-          <p:cNvPr id="21" name="Text 19"/>
+          <p:cNvPr id="17" name="Text 15"/>
           <p:cNvSpPr/>
           <p:nvPr/>
         </p:nvSpPr>
@@ -3953,7 +3894,7 @@
       </p:sp>
       <p:sp>
         <p:nvSpPr>
-          <p:cNvPr id="22" name="Text 20"/>
+          <p:cNvPr id="18" name="Text 16"/>
           <p:cNvSpPr/>
           <p:nvPr/>
         </p:nvSpPr>
@@ -4461,13 +4402,11 @@
             </a:avLst>
           </a:prstGeom>
           <a:solidFill>
-            <a:srgbClr val="FFFFFF">
-              <a:alpha val="88000"/>
-            </a:srgbClr>
+            <a:srgbClr val="FFFFFF"/>
           </a:solidFill>
           <a:ln w="12700">
             <a:solidFill>
-              <a:srgbClr val="D6E8F2"/>
+              <a:srgbClr val="B9D7E6"/>
             </a:solidFill>
             <a:prstDash val="solid"/>
           </a:ln>
@@ -4475,169 +4414,112 @@
       </p:sp>
       <p:sp>
         <p:nvSpPr>
-          <p:cNvPr id="14" name="Shape 12"/>
-          <p:cNvSpPr/>
-          <p:nvPr/>
-        </p:nvSpPr>
-        <p:spPr>
-          <a:xfrm>
-            <a:off x="8138160" y="3474720"/>
-            <a:ext cx="256032" cy="411480"/>
-          </a:xfrm>
-          <a:prstGeom prst="rect">
-            <a:avLst/>
-          </a:prstGeom>
-          <a:solidFill>
-            <a:srgbClr val="0068B7"/>
-          </a:solidFill>
-          <a:ln w="12700">
-            <a:solidFill>
-              <a:srgbClr val="0068B7"/>
-            </a:solidFill>
-            <a:prstDash val="solid"/>
-          </a:ln>
-        </p:spPr>
-      </p:sp>
-      <p:sp>
-        <p:nvSpPr>
-          <p:cNvPr id="15" name="Shape 13"/>
-          <p:cNvSpPr/>
-          <p:nvPr/>
-        </p:nvSpPr>
-        <p:spPr>
-          <a:xfrm>
-            <a:off x="8577072" y="3172968"/>
-            <a:ext cx="256032" cy="713232"/>
-          </a:xfrm>
-          <a:prstGeom prst="rect">
-            <a:avLst/>
-          </a:prstGeom>
-          <a:solidFill>
-            <a:srgbClr val="2F8A28"/>
-          </a:solidFill>
-          <a:ln w="12700">
-            <a:solidFill>
-              <a:srgbClr val="2F8A28"/>
-            </a:solidFill>
-            <a:prstDash val="solid"/>
-          </a:ln>
-        </p:spPr>
+          <p:cNvPr id="14" name="Text 12"/>
+          <p:cNvSpPr/>
+          <p:nvPr/>
+        </p:nvSpPr>
+        <p:spPr>
+          <a:xfrm>
+            <a:off x="7799832" y="2935224"/>
+            <a:ext cx="3145536" cy="256032"/>
+          </a:xfrm>
+          <a:prstGeom prst="rect">
+            <a:avLst/>
+          </a:prstGeom>
+          <a:noFill/>
+          <a:ln/>
+        </p:spPr>
+        <p:txBody>
+          <a:bodyPr wrap="square" lIns="0" tIns="0" rIns="0" bIns="0" rtlCol="0" anchor="ctr"/>
+          <a:lstStyle/>
+          <a:p>
+            <a:pPr indent="0" marL="0">
+              <a:buNone/>
+            </a:pPr>
+            <a:r>
+              <a:rPr lang="en-US" sz="1300" b="1" dirty="0">
+                <a:solidFill>
+                  <a:srgbClr val="0068B7"/>
+                </a:solidFill>
+                <a:latin typeface="Aptos" pitchFamily="34" charset="0"/>
+                <a:ea typeface="Aptos" pitchFamily="34" charset="-122"/>
+                <a:cs typeface="Aptos" pitchFamily="34" charset="-120"/>
+              </a:rPr>
+              <a:t>Concept checkpoints</a:t>
+            </a:r>
+            <a:endParaRPr lang="en-US" sz="1300" dirty="0"/>
+          </a:p>
+        </p:txBody>
+      </p:sp>
+      <p:sp>
+        <p:nvSpPr>
+          <p:cNvPr id="15" name="Text 13"/>
+          <p:cNvSpPr/>
+          <p:nvPr/>
+        </p:nvSpPr>
+        <p:spPr>
+          <a:xfrm>
+            <a:off x="7818120" y="3300984"/>
+            <a:ext cx="3090672" cy="877824"/>
+          </a:xfrm>
+          <a:prstGeom prst="rect">
+            <a:avLst/>
+          </a:prstGeom>
+          <a:noFill/>
+          <a:ln/>
+        </p:spPr>
+        <p:txBody>
+          <a:bodyPr wrap="square" lIns="254" tIns="254" rIns="254" bIns="254" rtlCol="0" anchor="t">
+            <a:normAutofit/>
+          </a:bodyPr>
+          <a:lstStyle/>
+          <a:p>
+            <a:r>
+              <a:rPr lang="en-US" sz="1380" dirty="0">
+                <a:solidFill>
+                  <a:srgbClr val="17364A"/>
+                </a:solidFill>
+                <a:latin typeface="Aptos" pitchFamily="34" charset="0"/>
+                <a:ea typeface="Aptos" pitchFamily="34" charset="-122"/>
+                <a:cs typeface="Aptos" pitchFamily="34" charset="-120"/>
+              </a:rPr>
+              <a:t>Consider a health department that wants to use AI to summarize incoming electronic case.</a:t>
+            </a:r>
+            <a:endParaRPr lang="en-US" sz="1380" dirty="0"/>
+          </a:p>
+          <a:p>
+            <a:r>
+              <a:rPr lang="en-US" sz="1380" dirty="0">
+                <a:solidFill>
+                  <a:srgbClr val="17364A"/>
+                </a:solidFill>
+                <a:latin typeface="Aptos" pitchFamily="34" charset="0"/>
+                <a:ea typeface="Aptos" pitchFamily="34" charset="-122"/>
+                <a:cs typeface="Aptos" pitchFamily="34" charset="-120"/>
+              </a:rPr>
+              <a:t>The AI tool may be able to produce a concise summary of symptoms, laboratory results,.</a:t>
+            </a:r>
+            <a:endParaRPr lang="en-US" sz="1380" dirty="0"/>
+          </a:p>
+          <a:p>
+            <a:r>
+              <a:rPr lang="en-US" sz="1380" dirty="0">
+                <a:solidFill>
+                  <a:srgbClr val="17364A"/>
+                </a:solidFill>
+                <a:latin typeface="Aptos" pitchFamily="34" charset="0"/>
+                <a:ea typeface="Aptos" pitchFamily="34" charset="-122"/>
+                <a:cs typeface="Aptos" pitchFamily="34" charset="-120"/>
+              </a:rPr>
+              <a:t>The eCR data must be received correctly, routed to the right jurisdiction, parsed into the.</a:t>
+            </a:r>
+            <a:endParaRPr lang="en-US" sz="1380" dirty="0"/>
+          </a:p>
+        </p:txBody>
       </p:sp>
       <p:sp>
         <p:nvSpPr>
           <p:cNvPr id="16" name="Shape 14"/>
-          <p:cNvSpPr/>
-          <p:nvPr/>
-        </p:nvSpPr>
-        <p:spPr>
-          <a:xfrm>
-            <a:off x="9015984" y="2880360"/>
-            <a:ext cx="256032" cy="1005840"/>
-          </a:xfrm>
-          <a:prstGeom prst="rect">
-            <a:avLst/>
-          </a:prstGeom>
-          <a:solidFill>
-            <a:srgbClr val="D69A2D"/>
-          </a:solidFill>
-          <a:ln w="12700">
-            <a:solidFill>
-              <a:srgbClr val="D69A2D"/>
-            </a:solidFill>
-            <a:prstDash val="solid"/>
-          </a:ln>
-        </p:spPr>
-      </p:sp>
-      <p:sp>
-        <p:nvSpPr>
-          <p:cNvPr id="17" name="Shape 15"/>
-          <p:cNvSpPr/>
-          <p:nvPr/>
-        </p:nvSpPr>
-        <p:spPr>
-          <a:xfrm>
-            <a:off x="9454896" y="3319272"/>
-            <a:ext cx="256032" cy="566928"/>
-          </a:xfrm>
-          <a:prstGeom prst="rect">
-            <a:avLst/>
-          </a:prstGeom>
-          <a:solidFill>
-            <a:srgbClr val="6A4CA3"/>
-          </a:solidFill>
-          <a:ln w="12700">
-            <a:solidFill>
-              <a:srgbClr val="6A4CA3"/>
-            </a:solidFill>
-            <a:prstDash val="solid"/>
-          </a:ln>
-        </p:spPr>
-      </p:sp>
-      <p:sp>
-        <p:nvSpPr>
-          <p:cNvPr id="18" name="Shape 16"/>
-          <p:cNvSpPr/>
-          <p:nvPr/>
-        </p:nvSpPr>
-        <p:spPr>
-          <a:xfrm>
-            <a:off x="8019288" y="3886200"/>
-            <a:ext cx="2706624" cy="0"/>
-          </a:xfrm>
-          <a:prstGeom prst="line">
-            <a:avLst/>
-          </a:prstGeom>
-          <a:noFill/>
-          <a:ln w="15240">
-            <a:solidFill>
-              <a:srgbClr val="003A63"/>
-            </a:solidFill>
-            <a:prstDash val="solid"/>
-          </a:ln>
-        </p:spPr>
-      </p:sp>
-      <p:sp>
-        <p:nvSpPr>
-          <p:cNvPr id="19" name="Text 17"/>
-          <p:cNvSpPr/>
-          <p:nvPr/>
-        </p:nvSpPr>
-        <p:spPr>
-          <a:xfrm>
-            <a:off x="7863840" y="3017520"/>
-            <a:ext cx="3017520" cy="201168"/>
-          </a:xfrm>
-          <a:prstGeom prst="rect">
-            <a:avLst/>
-          </a:prstGeom>
-          <a:noFill/>
-          <a:ln/>
-        </p:spPr>
-        <p:txBody>
-          <a:bodyPr wrap="square" lIns="0" tIns="0" rIns="0" bIns="0" rtlCol="0" anchor="ctr"/>
-          <a:lstStyle/>
-          <a:p>
-            <a:pPr algn="ctr" indent="0" marL="0">
-              <a:buNone/>
-            </a:pPr>
-            <a:r>
-              <a:rPr lang="en-US" sz="1050" b="1" dirty="0">
-                <a:solidFill>
-                  <a:srgbClr val="003A63"/>
-                </a:solidFill>
-                <a:latin typeface="Aptos" pitchFamily="34" charset="0"/>
-                <a:ea typeface="Aptos" pitchFamily="34" charset="-122"/>
-                <a:cs typeface="Aptos" pitchFamily="34" charset="-120"/>
-              </a:rPr>
-              <a:t>Measure and monitor</a:t>
-            </a:r>
-            <a:endParaRPr lang="en-US" sz="1050" dirty="0"/>
-          </a:p>
-        </p:txBody>
-      </p:sp>
-      <p:sp>
-        <p:nvSpPr>
-          <p:cNvPr id="20" name="Shape 18"/>
           <p:cNvSpPr/>
           <p:nvPr/>
         </p:nvSpPr>
@@ -4664,7 +4546,7 @@
       </p:sp>
       <p:sp>
         <p:nvSpPr>
-          <p:cNvPr id="21" name="Text 19"/>
+          <p:cNvPr id="17" name="Text 15"/>
           <p:cNvSpPr/>
           <p:nvPr/>
         </p:nvSpPr>
@@ -4703,7 +4585,7 @@
       </p:sp>
       <p:sp>
         <p:nvSpPr>
-          <p:cNvPr id="22" name="Text 20"/>
+          <p:cNvPr id="18" name="Text 16"/>
           <p:cNvSpPr/>
           <p:nvPr/>
         </p:nvSpPr>
@@ -5211,13 +5093,11 @@
             </a:avLst>
           </a:prstGeom>
           <a:solidFill>
-            <a:srgbClr val="FFFFFF">
-              <a:alpha val="88000"/>
-            </a:srgbClr>
+            <a:srgbClr val="FFFFFF"/>
           </a:solidFill>
           <a:ln w="12700">
             <a:solidFill>
-              <a:srgbClr val="D6E8F2"/>
+              <a:srgbClr val="B9D7E6"/>
             </a:solidFill>
             <a:prstDash val="solid"/>
           </a:ln>
@@ -5225,169 +5105,112 @@
       </p:sp>
       <p:sp>
         <p:nvSpPr>
-          <p:cNvPr id="14" name="Shape 12"/>
-          <p:cNvSpPr/>
-          <p:nvPr/>
-        </p:nvSpPr>
-        <p:spPr>
-          <a:xfrm>
-            <a:off x="8138160" y="3474720"/>
-            <a:ext cx="256032" cy="411480"/>
-          </a:xfrm>
-          <a:prstGeom prst="rect">
-            <a:avLst/>
-          </a:prstGeom>
-          <a:solidFill>
-            <a:srgbClr val="0068B7"/>
-          </a:solidFill>
-          <a:ln w="12700">
-            <a:solidFill>
-              <a:srgbClr val="0068B7"/>
-            </a:solidFill>
-            <a:prstDash val="solid"/>
-          </a:ln>
-        </p:spPr>
-      </p:sp>
-      <p:sp>
-        <p:nvSpPr>
-          <p:cNvPr id="15" name="Shape 13"/>
-          <p:cNvSpPr/>
-          <p:nvPr/>
-        </p:nvSpPr>
-        <p:spPr>
-          <a:xfrm>
-            <a:off x="8577072" y="3172968"/>
-            <a:ext cx="256032" cy="713232"/>
-          </a:xfrm>
-          <a:prstGeom prst="rect">
-            <a:avLst/>
-          </a:prstGeom>
-          <a:solidFill>
-            <a:srgbClr val="2F8A28"/>
-          </a:solidFill>
-          <a:ln w="12700">
-            <a:solidFill>
-              <a:srgbClr val="2F8A28"/>
-            </a:solidFill>
-            <a:prstDash val="solid"/>
-          </a:ln>
-        </p:spPr>
+          <p:cNvPr id="14" name="Text 12"/>
+          <p:cNvSpPr/>
+          <p:nvPr/>
+        </p:nvSpPr>
+        <p:spPr>
+          <a:xfrm>
+            <a:off x="7799832" y="2935224"/>
+            <a:ext cx="3145536" cy="256032"/>
+          </a:xfrm>
+          <a:prstGeom prst="rect">
+            <a:avLst/>
+          </a:prstGeom>
+          <a:noFill/>
+          <a:ln/>
+        </p:spPr>
+        <p:txBody>
+          <a:bodyPr wrap="square" lIns="0" tIns="0" rIns="0" bIns="0" rtlCol="0" anchor="ctr"/>
+          <a:lstStyle/>
+          <a:p>
+            <a:pPr indent="0" marL="0">
+              <a:buNone/>
+            </a:pPr>
+            <a:r>
+              <a:rPr lang="en-US" sz="1300" b="1" dirty="0">
+                <a:solidFill>
+                  <a:srgbClr val="0068B7"/>
+                </a:solidFill>
+                <a:latin typeface="Aptos" pitchFamily="34" charset="0"/>
+                <a:ea typeface="Aptos" pitchFamily="34" charset="-122"/>
+                <a:cs typeface="Aptos" pitchFamily="34" charset="-120"/>
+              </a:rPr>
+              <a:t>Concept checkpoints</a:t>
+            </a:r>
+            <a:endParaRPr lang="en-US" sz="1300" dirty="0"/>
+          </a:p>
+        </p:txBody>
+      </p:sp>
+      <p:sp>
+        <p:nvSpPr>
+          <p:cNvPr id="15" name="Text 13"/>
+          <p:cNvSpPr/>
+          <p:nvPr/>
+        </p:nvSpPr>
+        <p:spPr>
+          <a:xfrm>
+            <a:off x="7818120" y="3300984"/>
+            <a:ext cx="3090672" cy="877824"/>
+          </a:xfrm>
+          <a:prstGeom prst="rect">
+            <a:avLst/>
+          </a:prstGeom>
+          <a:noFill/>
+          <a:ln/>
+        </p:spPr>
+        <p:txBody>
+          <a:bodyPr wrap="square" lIns="254" tIns="254" rIns="254" bIns="254" rtlCol="0" anchor="t">
+            <a:normAutofit/>
+          </a:bodyPr>
+          <a:lstStyle/>
+          <a:p>
+            <a:r>
+              <a:rPr lang="en-US" sz="1380" dirty="0">
+                <a:solidFill>
+                  <a:srgbClr val="17364A"/>
+                </a:solidFill>
+                <a:latin typeface="Aptos" pitchFamily="34" charset="0"/>
+                <a:ea typeface="Aptos" pitchFamily="34" charset="-122"/>
+                <a:cs typeface="Aptos" pitchFamily="34" charset="-120"/>
+              </a:rPr>
+              <a:t>These may include electronic health records, laboratories, immunization information.</a:t>
+            </a:r>
+            <a:endParaRPr lang="en-US" sz="1380" dirty="0"/>
+          </a:p>
+          <a:p>
+            <a:r>
+              <a:rPr lang="en-US" sz="1380" dirty="0">
+                <a:solidFill>
+                  <a:srgbClr val="17364A"/>
+                </a:solidFill>
+                <a:latin typeface="Aptos" pitchFamily="34" charset="0"/>
+                <a:ea typeface="Aptos" pitchFamily="34" charset="-122"/>
+                <a:cs typeface="Aptos" pitchFamily="34" charset="-120"/>
+              </a:rPr>
+              <a:t>Each source system has its own data quality profile, update frequency, terminology.</a:t>
+            </a:r>
+            <a:endParaRPr lang="en-US" sz="1380" dirty="0"/>
+          </a:p>
+          <a:p>
+            <a:r>
+              <a:rPr lang="en-US" sz="1380" dirty="0">
+                <a:solidFill>
+                  <a:srgbClr val="17364A"/>
+                </a:solidFill>
+                <a:latin typeface="Aptos" pitchFamily="34" charset="0"/>
+                <a:ea typeface="Aptos" pitchFamily="34" charset="-122"/>
+                <a:cs typeface="Aptos" pitchFamily="34" charset="-120"/>
+              </a:rPr>
+              <a:t>Before AI can be used safely, the agency needs to understand these characteristics.</a:t>
+            </a:r>
+            <a:endParaRPr lang="en-US" sz="1380" dirty="0"/>
+          </a:p>
+        </p:txBody>
       </p:sp>
       <p:sp>
         <p:nvSpPr>
           <p:cNvPr id="16" name="Shape 14"/>
-          <p:cNvSpPr/>
-          <p:nvPr/>
-        </p:nvSpPr>
-        <p:spPr>
-          <a:xfrm>
-            <a:off x="9015984" y="2880360"/>
-            <a:ext cx="256032" cy="1005840"/>
-          </a:xfrm>
-          <a:prstGeom prst="rect">
-            <a:avLst/>
-          </a:prstGeom>
-          <a:solidFill>
-            <a:srgbClr val="D69A2D"/>
-          </a:solidFill>
-          <a:ln w="12700">
-            <a:solidFill>
-              <a:srgbClr val="D69A2D"/>
-            </a:solidFill>
-            <a:prstDash val="solid"/>
-          </a:ln>
-        </p:spPr>
-      </p:sp>
-      <p:sp>
-        <p:nvSpPr>
-          <p:cNvPr id="17" name="Shape 15"/>
-          <p:cNvSpPr/>
-          <p:nvPr/>
-        </p:nvSpPr>
-        <p:spPr>
-          <a:xfrm>
-            <a:off x="9454896" y="3319272"/>
-            <a:ext cx="256032" cy="566928"/>
-          </a:xfrm>
-          <a:prstGeom prst="rect">
-            <a:avLst/>
-          </a:prstGeom>
-          <a:solidFill>
-            <a:srgbClr val="6A4CA3"/>
-          </a:solidFill>
-          <a:ln w="12700">
-            <a:solidFill>
-              <a:srgbClr val="6A4CA3"/>
-            </a:solidFill>
-            <a:prstDash val="solid"/>
-          </a:ln>
-        </p:spPr>
-      </p:sp>
-      <p:sp>
-        <p:nvSpPr>
-          <p:cNvPr id="18" name="Shape 16"/>
-          <p:cNvSpPr/>
-          <p:nvPr/>
-        </p:nvSpPr>
-        <p:spPr>
-          <a:xfrm>
-            <a:off x="8019288" y="3886200"/>
-            <a:ext cx="2706624" cy="0"/>
-          </a:xfrm>
-          <a:prstGeom prst="line">
-            <a:avLst/>
-          </a:prstGeom>
-          <a:noFill/>
-          <a:ln w="15240">
-            <a:solidFill>
-              <a:srgbClr val="003A63"/>
-            </a:solidFill>
-            <a:prstDash val="solid"/>
-          </a:ln>
-        </p:spPr>
-      </p:sp>
-      <p:sp>
-        <p:nvSpPr>
-          <p:cNvPr id="19" name="Text 17"/>
-          <p:cNvSpPr/>
-          <p:nvPr/>
-        </p:nvSpPr>
-        <p:spPr>
-          <a:xfrm>
-            <a:off x="7863840" y="3017520"/>
-            <a:ext cx="3017520" cy="201168"/>
-          </a:xfrm>
-          <a:prstGeom prst="rect">
-            <a:avLst/>
-          </a:prstGeom>
-          <a:noFill/>
-          <a:ln/>
-        </p:spPr>
-        <p:txBody>
-          <a:bodyPr wrap="square" lIns="0" tIns="0" rIns="0" bIns="0" rtlCol="0" anchor="ctr"/>
-          <a:lstStyle/>
-          <a:p>
-            <a:pPr algn="ctr" indent="0" marL="0">
-              <a:buNone/>
-            </a:pPr>
-            <a:r>
-              <a:rPr lang="en-US" sz="1050" b="1" dirty="0">
-                <a:solidFill>
-                  <a:srgbClr val="003A63"/>
-                </a:solidFill>
-                <a:latin typeface="Aptos" pitchFamily="34" charset="0"/>
-                <a:ea typeface="Aptos" pitchFamily="34" charset="-122"/>
-                <a:cs typeface="Aptos" pitchFamily="34" charset="-120"/>
-              </a:rPr>
-              <a:t>Measure and monitor</a:t>
-            </a:r>
-            <a:endParaRPr lang="en-US" sz="1050" dirty="0"/>
-          </a:p>
-        </p:txBody>
-      </p:sp>
-      <p:sp>
-        <p:nvSpPr>
-          <p:cNvPr id="20" name="Shape 18"/>
           <p:cNvSpPr/>
           <p:nvPr/>
         </p:nvSpPr>
@@ -5414,7 +5237,7 @@
       </p:sp>
       <p:sp>
         <p:nvSpPr>
-          <p:cNvPr id="21" name="Text 19"/>
+          <p:cNvPr id="17" name="Text 15"/>
           <p:cNvSpPr/>
           <p:nvPr/>
         </p:nvSpPr>
@@ -5453,7 +5276,7 @@
       </p:sp>
       <p:sp>
         <p:nvSpPr>
-          <p:cNvPr id="22" name="Text 20"/>
+          <p:cNvPr id="18" name="Text 16"/>
           <p:cNvSpPr/>
           <p:nvPr/>
         </p:nvSpPr>
@@ -5961,13 +5784,11 @@
             </a:avLst>
           </a:prstGeom>
           <a:solidFill>
-            <a:srgbClr val="FFFFFF">
-              <a:alpha val="88000"/>
-            </a:srgbClr>
+            <a:srgbClr val="FFFFFF"/>
           </a:solidFill>
           <a:ln w="12700">
             <a:solidFill>
-              <a:srgbClr val="D6E8F2"/>
+              <a:srgbClr val="B9D7E6"/>
             </a:solidFill>
             <a:prstDash val="solid"/>
           </a:ln>
@@ -5975,169 +5796,112 @@
       </p:sp>
       <p:sp>
         <p:nvSpPr>
-          <p:cNvPr id="14" name="Shape 12"/>
-          <p:cNvSpPr/>
-          <p:nvPr/>
-        </p:nvSpPr>
-        <p:spPr>
-          <a:xfrm>
-            <a:off x="8138160" y="3474720"/>
-            <a:ext cx="256032" cy="411480"/>
-          </a:xfrm>
-          <a:prstGeom prst="rect">
-            <a:avLst/>
-          </a:prstGeom>
-          <a:solidFill>
-            <a:srgbClr val="0068B7"/>
-          </a:solidFill>
-          <a:ln w="12700">
-            <a:solidFill>
-              <a:srgbClr val="0068B7"/>
-            </a:solidFill>
-            <a:prstDash val="solid"/>
-          </a:ln>
-        </p:spPr>
-      </p:sp>
-      <p:sp>
-        <p:nvSpPr>
-          <p:cNvPr id="15" name="Shape 13"/>
-          <p:cNvSpPr/>
-          <p:nvPr/>
-        </p:nvSpPr>
-        <p:spPr>
-          <a:xfrm>
-            <a:off x="8577072" y="3172968"/>
-            <a:ext cx="256032" cy="713232"/>
-          </a:xfrm>
-          <a:prstGeom prst="rect">
-            <a:avLst/>
-          </a:prstGeom>
-          <a:solidFill>
-            <a:srgbClr val="2F8A28"/>
-          </a:solidFill>
-          <a:ln w="12700">
-            <a:solidFill>
-              <a:srgbClr val="2F8A28"/>
-            </a:solidFill>
-            <a:prstDash val="solid"/>
-          </a:ln>
-        </p:spPr>
+          <p:cNvPr id="14" name="Text 12"/>
+          <p:cNvSpPr/>
+          <p:nvPr/>
+        </p:nvSpPr>
+        <p:spPr>
+          <a:xfrm>
+            <a:off x="7799832" y="2935224"/>
+            <a:ext cx="3145536" cy="256032"/>
+          </a:xfrm>
+          <a:prstGeom prst="rect">
+            <a:avLst/>
+          </a:prstGeom>
+          <a:noFill/>
+          <a:ln/>
+        </p:spPr>
+        <p:txBody>
+          <a:bodyPr wrap="square" lIns="0" tIns="0" rIns="0" bIns="0" rtlCol="0" anchor="ctr"/>
+          <a:lstStyle/>
+          <a:p>
+            <a:pPr indent="0" marL="0">
+              <a:buNone/>
+            </a:pPr>
+            <a:r>
+              <a:rPr lang="en-US" sz="1300" b="1" dirty="0">
+                <a:solidFill>
+                  <a:srgbClr val="0068B7"/>
+                </a:solidFill>
+                <a:latin typeface="Aptos" pitchFamily="34" charset="0"/>
+                <a:ea typeface="Aptos" pitchFamily="34" charset="-122"/>
+                <a:cs typeface="Aptos" pitchFamily="34" charset="-120"/>
+              </a:rPr>
+              <a:t>Concept checkpoints</a:t>
+            </a:r>
+            <a:endParaRPr lang="en-US" sz="1300" dirty="0"/>
+          </a:p>
+        </p:txBody>
+      </p:sp>
+      <p:sp>
+        <p:nvSpPr>
+          <p:cNvPr id="15" name="Text 13"/>
+          <p:cNvSpPr/>
+          <p:nvPr/>
+        </p:nvSpPr>
+        <p:spPr>
+          <a:xfrm>
+            <a:off x="7818120" y="3300984"/>
+            <a:ext cx="3090672" cy="877824"/>
+          </a:xfrm>
+          <a:prstGeom prst="rect">
+            <a:avLst/>
+          </a:prstGeom>
+          <a:noFill/>
+          <a:ln/>
+        </p:spPr>
+        <p:txBody>
+          <a:bodyPr wrap="square" lIns="254" tIns="254" rIns="254" bIns="254" rtlCol="0" anchor="t">
+            <a:normAutofit/>
+          </a:bodyPr>
+          <a:lstStyle/>
+          <a:p>
+            <a:r>
+              <a:rPr lang="en-US" sz="1380" dirty="0">
+                <a:solidFill>
+                  <a:srgbClr val="17364A"/>
+                </a:solidFill>
+                <a:latin typeface="Aptos" pitchFamily="34" charset="0"/>
+                <a:ea typeface="Aptos" pitchFamily="34" charset="-122"/>
+                <a:cs typeface="Aptos" pitchFamily="34" charset="-120"/>
+              </a:rPr>
+              <a:t>This may be a predictive model, natural language processing tool, generative AI assistant,.</a:t>
+            </a:r>
+            <a:endParaRPr lang="en-US" sz="1380" dirty="0"/>
+          </a:p>
+          <a:p>
+            <a:r>
+              <a:rPr lang="en-US" sz="1380" dirty="0">
+                <a:solidFill>
+                  <a:srgbClr val="17364A"/>
+                </a:solidFill>
+                <a:latin typeface="Aptos" pitchFamily="34" charset="0"/>
+                <a:ea typeface="Aptos" pitchFamily="34" charset="-122"/>
+                <a:cs typeface="Aptos" pitchFamily="34" charset="-120"/>
+              </a:rPr>
+              <a:t>A tool designed to summarize case notes should not silently make eligibility decisions.</a:t>
+            </a:r>
+            <a:endParaRPr lang="en-US" sz="1380" dirty="0"/>
+          </a:p>
+          <a:p>
+            <a:r>
+              <a:rPr lang="en-US" sz="1380" dirty="0">
+                <a:solidFill>
+                  <a:srgbClr val="17364A"/>
+                </a:solidFill>
+                <a:latin typeface="Aptos" pitchFamily="34" charset="0"/>
+                <a:ea typeface="Aptos" pitchFamily="34" charset="-122"/>
+                <a:cs typeface="Aptos" pitchFamily="34" charset="-120"/>
+              </a:rPr>
+              <a:t>A tool designed to classify complaints should not automatically trigger enforcement action.</a:t>
+            </a:r>
+            <a:endParaRPr lang="en-US" sz="1380" dirty="0"/>
+          </a:p>
+        </p:txBody>
       </p:sp>
       <p:sp>
         <p:nvSpPr>
           <p:cNvPr id="16" name="Shape 14"/>
-          <p:cNvSpPr/>
-          <p:nvPr/>
-        </p:nvSpPr>
-        <p:spPr>
-          <a:xfrm>
-            <a:off x="9015984" y="2880360"/>
-            <a:ext cx="256032" cy="1005840"/>
-          </a:xfrm>
-          <a:prstGeom prst="rect">
-            <a:avLst/>
-          </a:prstGeom>
-          <a:solidFill>
-            <a:srgbClr val="D69A2D"/>
-          </a:solidFill>
-          <a:ln w="12700">
-            <a:solidFill>
-              <a:srgbClr val="D69A2D"/>
-            </a:solidFill>
-            <a:prstDash val="solid"/>
-          </a:ln>
-        </p:spPr>
-      </p:sp>
-      <p:sp>
-        <p:nvSpPr>
-          <p:cNvPr id="17" name="Shape 15"/>
-          <p:cNvSpPr/>
-          <p:nvPr/>
-        </p:nvSpPr>
-        <p:spPr>
-          <a:xfrm>
-            <a:off x="9454896" y="3319272"/>
-            <a:ext cx="256032" cy="566928"/>
-          </a:xfrm>
-          <a:prstGeom prst="rect">
-            <a:avLst/>
-          </a:prstGeom>
-          <a:solidFill>
-            <a:srgbClr val="6A4CA3"/>
-          </a:solidFill>
-          <a:ln w="12700">
-            <a:solidFill>
-              <a:srgbClr val="6A4CA3"/>
-            </a:solidFill>
-            <a:prstDash val="solid"/>
-          </a:ln>
-        </p:spPr>
-      </p:sp>
-      <p:sp>
-        <p:nvSpPr>
-          <p:cNvPr id="18" name="Shape 16"/>
-          <p:cNvSpPr/>
-          <p:nvPr/>
-        </p:nvSpPr>
-        <p:spPr>
-          <a:xfrm>
-            <a:off x="8019288" y="3886200"/>
-            <a:ext cx="2706624" cy="0"/>
-          </a:xfrm>
-          <a:prstGeom prst="line">
-            <a:avLst/>
-          </a:prstGeom>
-          <a:noFill/>
-          <a:ln w="15240">
-            <a:solidFill>
-              <a:srgbClr val="003A63"/>
-            </a:solidFill>
-            <a:prstDash val="solid"/>
-          </a:ln>
-        </p:spPr>
-      </p:sp>
-      <p:sp>
-        <p:nvSpPr>
-          <p:cNvPr id="19" name="Text 17"/>
-          <p:cNvSpPr/>
-          <p:nvPr/>
-        </p:nvSpPr>
-        <p:spPr>
-          <a:xfrm>
-            <a:off x="7863840" y="3017520"/>
-            <a:ext cx="3017520" cy="201168"/>
-          </a:xfrm>
-          <a:prstGeom prst="rect">
-            <a:avLst/>
-          </a:prstGeom>
-          <a:noFill/>
-          <a:ln/>
-        </p:spPr>
-        <p:txBody>
-          <a:bodyPr wrap="square" lIns="0" tIns="0" rIns="0" bIns="0" rtlCol="0" anchor="ctr"/>
-          <a:lstStyle/>
-          <a:p>
-            <a:pPr algn="ctr" indent="0" marL="0">
-              <a:buNone/>
-            </a:pPr>
-            <a:r>
-              <a:rPr lang="en-US" sz="1050" b="1" dirty="0">
-                <a:solidFill>
-                  <a:srgbClr val="003A63"/>
-                </a:solidFill>
-                <a:latin typeface="Aptos" pitchFamily="34" charset="0"/>
-                <a:ea typeface="Aptos" pitchFamily="34" charset="-122"/>
-                <a:cs typeface="Aptos" pitchFamily="34" charset="-120"/>
-              </a:rPr>
-              <a:t>Measure and monitor</a:t>
-            </a:r>
-            <a:endParaRPr lang="en-US" sz="1050" dirty="0"/>
-          </a:p>
-        </p:txBody>
-      </p:sp>
-      <p:sp>
-        <p:nvSpPr>
-          <p:cNvPr id="20" name="Shape 18"/>
           <p:cNvSpPr/>
           <p:nvPr/>
         </p:nvSpPr>
@@ -6164,7 +5928,7 @@
       </p:sp>
       <p:sp>
         <p:nvSpPr>
-          <p:cNvPr id="21" name="Text 19"/>
+          <p:cNvPr id="17" name="Text 15"/>
           <p:cNvSpPr/>
           <p:nvPr/>
         </p:nvSpPr>
@@ -6203,7 +5967,7 @@
       </p:sp>
       <p:sp>
         <p:nvSpPr>
-          <p:cNvPr id="22" name="Text 20"/>
+          <p:cNvPr id="18" name="Text 16"/>
           <p:cNvSpPr/>
           <p:nvPr/>
         </p:nvSpPr>
@@ -6711,13 +6475,11 @@
             </a:avLst>
           </a:prstGeom>
           <a:solidFill>
-            <a:srgbClr val="FFFFFF">
-              <a:alpha val="88000"/>
-            </a:srgbClr>
+            <a:srgbClr val="FFFFFF"/>
           </a:solidFill>
           <a:ln w="12700">
             <a:solidFill>
-              <a:srgbClr val="D6E8F2"/>
+              <a:srgbClr val="B9D7E6"/>
             </a:solidFill>
             <a:prstDash val="solid"/>
           </a:ln>
@@ -6725,26 +6487,42 @@
       </p:sp>
       <p:sp>
         <p:nvSpPr>
-          <p:cNvPr id="14" name="Shape 12"/>
-          <p:cNvSpPr/>
-          <p:nvPr/>
-        </p:nvSpPr>
-        <p:spPr>
-          <a:xfrm>
-            <a:off x="8046720" y="3108960"/>
-            <a:ext cx="2651760" cy="896112"/>
-          </a:xfrm>
-          <a:prstGeom prst="arc">
-            <a:avLst/>
-          </a:prstGeom>
-          <a:noFill/>
-          <a:ln w="25400">
-            <a:solidFill>
-              <a:srgbClr val="0068B7"/>
-            </a:solidFill>
-            <a:prstDash val="solid"/>
-          </a:ln>
-        </p:spPr>
+          <p:cNvPr id="14" name="Text 12"/>
+          <p:cNvSpPr/>
+          <p:nvPr/>
+        </p:nvSpPr>
+        <p:spPr>
+          <a:xfrm>
+            <a:off x="7799832" y="2935224"/>
+            <a:ext cx="3145536" cy="256032"/>
+          </a:xfrm>
+          <a:prstGeom prst="rect">
+            <a:avLst/>
+          </a:prstGeom>
+          <a:noFill/>
+          <a:ln/>
+        </p:spPr>
+        <p:txBody>
+          <a:bodyPr wrap="square" lIns="0" tIns="0" rIns="0" bIns="0" rtlCol="0" anchor="ctr"/>
+          <a:lstStyle/>
+          <a:p>
+            <a:pPr indent="0" marL="0">
+              <a:buNone/>
+            </a:pPr>
+            <a:r>
+              <a:rPr lang="en-US" sz="1300" b="1" dirty="0">
+                <a:solidFill>
+                  <a:srgbClr val="0068B7"/>
+                </a:solidFill>
+                <a:latin typeface="Aptos" pitchFamily="34" charset="0"/>
+                <a:ea typeface="Aptos" pitchFamily="34" charset="-122"/>
+                <a:cs typeface="Aptos" pitchFamily="34" charset="-120"/>
+              </a:rPr>
+              <a:t>Concept checkpoints</a:t>
+            </a:r>
+            <a:endParaRPr lang="en-US" sz="1300" dirty="0"/>
+          </a:p>
+        </p:txBody>
       </p:sp>
       <p:sp>
         <p:nvSpPr>
@@ -6754,102 +6532,67 @@
         </p:nvSpPr>
         <p:spPr>
           <a:xfrm>
-            <a:off x="7909560" y="3099816"/>
-            <a:ext cx="2926080" cy="256032"/>
-          </a:xfrm>
-          <a:prstGeom prst="rect">
-            <a:avLst/>
-          </a:prstGeom>
-          <a:noFill/>
-          <a:ln/>
-        </p:spPr>
-        <p:txBody>
-          <a:bodyPr wrap="square" lIns="0" tIns="0" rIns="0" bIns="0" rtlCol="0" anchor="ctr"/>
-          <a:lstStyle/>
-          <a:p>
-            <a:pPr algn="ctr" indent="0" marL="0">
-              <a:buNone/>
-            </a:pPr>
-            <a:r>
-              <a:rPr lang="en-US" sz="1500" b="1" dirty="0">
-                <a:solidFill>
-                  <a:srgbClr val="003A63"/>
-                </a:solidFill>
-                <a:latin typeface="Aptos" pitchFamily="34" charset="0"/>
-                <a:ea typeface="Aptos" pitchFamily="34" charset="-122"/>
-                <a:cs typeface="Aptos" pitchFamily="34" charset="-120"/>
-              </a:rPr>
-              <a:t>Risk</a:t>
-            </a:r>
-            <a:endParaRPr lang="en-US" sz="1500" dirty="0"/>
+            <a:off x="7818120" y="3300984"/>
+            <a:ext cx="3090672" cy="877824"/>
+          </a:xfrm>
+          <a:prstGeom prst="rect">
+            <a:avLst/>
+          </a:prstGeom>
+          <a:noFill/>
+          <a:ln/>
+        </p:spPr>
+        <p:txBody>
+          <a:bodyPr wrap="square" lIns="254" tIns="254" rIns="254" bIns="254" rtlCol="0" anchor="t">
+            <a:normAutofit/>
+          </a:bodyPr>
+          <a:lstStyle/>
+          <a:p>
+            <a:r>
+              <a:rPr lang="en-US" sz="1380" dirty="0">
+                <a:solidFill>
+                  <a:srgbClr val="17364A"/>
+                </a:solidFill>
+                <a:latin typeface="Aptos" pitchFamily="34" charset="0"/>
+                <a:ea typeface="Aptos" pitchFamily="34" charset="-122"/>
+                <a:cs typeface="Aptos" pitchFamily="34" charset="-120"/>
+              </a:rPr>
+              <a:t>If staff cannot explain how data move through the system, they may not recognize when an.</a:t>
+            </a:r>
+            <a:endParaRPr lang="en-US" sz="1380" dirty="0"/>
+          </a:p>
+          <a:p>
+            <a:r>
+              <a:rPr lang="en-US" sz="1380" dirty="0">
+                <a:solidFill>
+                  <a:srgbClr val="17364A"/>
+                </a:solidFill>
+                <a:latin typeface="Aptos" pitchFamily="34" charset="0"/>
+                <a:ea typeface="Aptos" pitchFamily="34" charset="-122"/>
+                <a:cs typeface="Aptos" pitchFamily="34" charset="-120"/>
+              </a:rPr>
+              <a:t>Unclear authority.</a:t>
+            </a:r>
+            <a:endParaRPr lang="en-US" sz="1380" dirty="0"/>
+          </a:p>
+          <a:p>
+            <a:r>
+              <a:rPr lang="en-US" sz="1380" dirty="0">
+                <a:solidFill>
+                  <a:srgbClr val="17364A"/>
+                </a:solidFill>
+                <a:latin typeface="Aptos" pitchFamily="34" charset="0"/>
+                <a:ea typeface="Aptos" pitchFamily="34" charset="-122"/>
+                <a:cs typeface="Aptos" pitchFamily="34" charset="-120"/>
+              </a:rPr>
+              <a:t>AI tools may produce recommendations, summaries, or classifications that look official,.</a:t>
+            </a:r>
+            <a:endParaRPr lang="en-US" sz="1380" dirty="0"/>
           </a:p>
         </p:txBody>
       </p:sp>
       <p:sp>
         <p:nvSpPr>
           <p:cNvPr id="16" name="Shape 14"/>
-          <p:cNvSpPr/>
-          <p:nvPr/>
-        </p:nvSpPr>
-        <p:spPr>
-          <a:xfrm>
-            <a:off x="8366760" y="3639312"/>
-            <a:ext cx="2011680" cy="0"/>
-          </a:xfrm>
-          <a:prstGeom prst="line">
-            <a:avLst/>
-          </a:prstGeom>
-          <a:noFill/>
-          <a:ln w="63500">
-            <a:solidFill>
-              <a:srgbClr val="2F8A28"/>
-            </a:solidFill>
-            <a:prstDash val="solid"/>
-          </a:ln>
-        </p:spPr>
-      </p:sp>
-      <p:sp>
-        <p:nvSpPr>
-          <p:cNvPr id="17" name="Text 15"/>
-          <p:cNvSpPr/>
-          <p:nvPr/>
-        </p:nvSpPr>
-        <p:spPr>
-          <a:xfrm>
-            <a:off x="7909560" y="3849624"/>
-            <a:ext cx="2926080" cy="164592"/>
-          </a:xfrm>
-          <a:prstGeom prst="rect">
-            <a:avLst/>
-          </a:prstGeom>
-          <a:noFill/>
-          <a:ln/>
-        </p:spPr>
-        <p:txBody>
-          <a:bodyPr wrap="square" lIns="0" tIns="0" rIns="0" bIns="0" rtlCol="0" anchor="ctr"/>
-          <a:lstStyle/>
-          <a:p>
-            <a:pPr algn="ctr" indent="0" marL="0">
-              <a:buNone/>
-            </a:pPr>
-            <a:r>
-              <a:rPr lang="en-US" sz="900" dirty="0">
-                <a:solidFill>
-                  <a:srgbClr val="003A63"/>
-                </a:solidFill>
-                <a:latin typeface="Aptos" pitchFamily="34" charset="0"/>
-                <a:ea typeface="Aptos" pitchFamily="34" charset="-122"/>
-                <a:cs typeface="Aptos" pitchFamily="34" charset="-120"/>
-              </a:rPr>
-              <a:t>Human review</a:t>
-            </a:r>
-            <a:endParaRPr lang="en-US" sz="900" dirty="0"/>
-          </a:p>
-        </p:txBody>
-      </p:sp>
-      <p:sp>
-        <p:nvSpPr>
-          <p:cNvPr id="18" name="Shape 16"/>
           <p:cNvSpPr/>
           <p:nvPr/>
         </p:nvSpPr>
@@ -6876,7 +6619,7 @@
       </p:sp>
       <p:sp>
         <p:nvSpPr>
-          <p:cNvPr id="19" name="Text 17"/>
+          <p:cNvPr id="17" name="Text 15"/>
           <p:cNvSpPr/>
           <p:nvPr/>
         </p:nvSpPr>
@@ -6915,7 +6658,7 @@
       </p:sp>
       <p:sp>
         <p:nvSpPr>
-          <p:cNvPr id="20" name="Text 18"/>
+          <p:cNvPr id="18" name="Text 16"/>
           <p:cNvSpPr/>
           <p:nvPr/>
         </p:nvSpPr>
@@ -7423,13 +7166,11 @@
             </a:avLst>
           </a:prstGeom>
           <a:solidFill>
-            <a:srgbClr val="FFFFFF">
-              <a:alpha val="88000"/>
-            </a:srgbClr>
+            <a:srgbClr val="FFFFFF"/>
           </a:solidFill>
           <a:ln w="12700">
             <a:solidFill>
-              <a:srgbClr val="D6E8F2"/>
+              <a:srgbClr val="B9D7E6"/>
             </a:solidFill>
             <a:prstDash val="solid"/>
           </a:ln>
@@ -7437,26 +7178,42 @@
       </p:sp>
       <p:sp>
         <p:nvSpPr>
-          <p:cNvPr id="14" name="Shape 12"/>
-          <p:cNvSpPr/>
-          <p:nvPr/>
-        </p:nvSpPr>
-        <p:spPr>
-          <a:xfrm>
-            <a:off x="8046720" y="3108960"/>
-            <a:ext cx="2651760" cy="896112"/>
-          </a:xfrm>
-          <a:prstGeom prst="arc">
-            <a:avLst/>
-          </a:prstGeom>
-          <a:noFill/>
-          <a:ln w="25400">
-            <a:solidFill>
-              <a:srgbClr val="0068B7"/>
-            </a:solidFill>
-            <a:prstDash val="solid"/>
-          </a:ln>
-        </p:spPr>
+          <p:cNvPr id="14" name="Text 12"/>
+          <p:cNvSpPr/>
+          <p:nvPr/>
+        </p:nvSpPr>
+        <p:spPr>
+          <a:xfrm>
+            <a:off x="7799832" y="2935224"/>
+            <a:ext cx="3145536" cy="256032"/>
+          </a:xfrm>
+          <a:prstGeom prst="rect">
+            <a:avLst/>
+          </a:prstGeom>
+          <a:noFill/>
+          <a:ln/>
+        </p:spPr>
+        <p:txBody>
+          <a:bodyPr wrap="square" lIns="0" tIns="0" rIns="0" bIns="0" rtlCol="0" anchor="ctr"/>
+          <a:lstStyle/>
+          <a:p>
+            <a:pPr indent="0" marL="0">
+              <a:buNone/>
+            </a:pPr>
+            <a:r>
+              <a:rPr lang="en-US" sz="1300" b="1" dirty="0">
+                <a:solidFill>
+                  <a:srgbClr val="0068B7"/>
+                </a:solidFill>
+                <a:latin typeface="Aptos" pitchFamily="34" charset="0"/>
+                <a:ea typeface="Aptos" pitchFamily="34" charset="-122"/>
+                <a:cs typeface="Aptos" pitchFamily="34" charset="-120"/>
+              </a:rPr>
+              <a:t>Concept checkpoints</a:t>
+            </a:r>
+            <a:endParaRPr lang="en-US" sz="1300" dirty="0"/>
+          </a:p>
+        </p:txBody>
       </p:sp>
       <p:sp>
         <p:nvSpPr>
@@ -7466,102 +7223,67 @@
         </p:nvSpPr>
         <p:spPr>
           <a:xfrm>
-            <a:off x="7909560" y="3099816"/>
-            <a:ext cx="2926080" cy="256032"/>
-          </a:xfrm>
-          <a:prstGeom prst="rect">
-            <a:avLst/>
-          </a:prstGeom>
-          <a:noFill/>
-          <a:ln/>
-        </p:spPr>
-        <p:txBody>
-          <a:bodyPr wrap="square" lIns="0" tIns="0" rIns="0" bIns="0" rtlCol="0" anchor="ctr"/>
-          <a:lstStyle/>
-          <a:p>
-            <a:pPr algn="ctr" indent="0" marL="0">
-              <a:buNone/>
-            </a:pPr>
-            <a:r>
-              <a:rPr lang="en-US" sz="1500" b="1" dirty="0">
-                <a:solidFill>
-                  <a:srgbClr val="003A63"/>
-                </a:solidFill>
-                <a:latin typeface="Aptos" pitchFamily="34" charset="0"/>
-                <a:ea typeface="Aptos" pitchFamily="34" charset="-122"/>
-                <a:cs typeface="Aptos" pitchFamily="34" charset="-120"/>
-              </a:rPr>
-              <a:t>Risk</a:t>
-            </a:r>
-            <a:endParaRPr lang="en-US" sz="1500" dirty="0"/>
+            <a:off x="7818120" y="3300984"/>
+            <a:ext cx="3090672" cy="877824"/>
+          </a:xfrm>
+          <a:prstGeom prst="rect">
+            <a:avLst/>
+          </a:prstGeom>
+          <a:noFill/>
+          <a:ln/>
+        </p:spPr>
+        <p:txBody>
+          <a:bodyPr wrap="square" lIns="254" tIns="254" rIns="254" bIns="254" rtlCol="0" anchor="t">
+            <a:normAutofit/>
+          </a:bodyPr>
+          <a:lstStyle/>
+          <a:p>
+            <a:r>
+              <a:rPr lang="en-US" sz="1380" dirty="0">
+                <a:solidFill>
+                  <a:srgbClr val="17364A"/>
+                </a:solidFill>
+                <a:latin typeface="Aptos" pitchFamily="34" charset="0"/>
+                <a:ea typeface="Aptos" pitchFamily="34" charset="-122"/>
+                <a:cs typeface="Aptos" pitchFamily="34" charset="-120"/>
+              </a:rPr>
+              <a:t>AI tools can degrade over time when data patterns, reporting sources, terminology,.</a:t>
+            </a:r>
+            <a:endParaRPr lang="en-US" sz="1380" dirty="0"/>
+          </a:p>
+          <a:p>
+            <a:r>
+              <a:rPr lang="en-US" sz="1380" dirty="0">
+                <a:solidFill>
+                  <a:srgbClr val="17364A"/>
+                </a:solidFill>
+                <a:latin typeface="Aptos" pitchFamily="34" charset="0"/>
+                <a:ea typeface="Aptos" pitchFamily="34" charset="-122"/>
+                <a:cs typeface="Aptos" pitchFamily="34" charset="-120"/>
+              </a:rPr>
+              <a:t>If the architecture relies on data sources that underrepresent some communities, the tool.</a:t>
+            </a:r>
+            <a:endParaRPr lang="en-US" sz="1380" dirty="0"/>
+          </a:p>
+          <a:p>
+            <a:r>
+              <a:rPr lang="en-US" sz="1380" dirty="0">
+                <a:solidFill>
+                  <a:srgbClr val="17364A"/>
+                </a:solidFill>
+                <a:latin typeface="Aptos" pitchFamily="34" charset="0"/>
+                <a:ea typeface="Aptos" pitchFamily="34" charset="-122"/>
+                <a:cs typeface="Aptos" pitchFamily="34" charset="-120"/>
+              </a:rPr>
+              <a:t>Practical guardrails include pre-deployment subgroup review, monitoring indicators, user.</a:t>
+            </a:r>
+            <a:endParaRPr lang="en-US" sz="1380" dirty="0"/>
           </a:p>
         </p:txBody>
       </p:sp>
       <p:sp>
         <p:nvSpPr>
           <p:cNvPr id="16" name="Shape 14"/>
-          <p:cNvSpPr/>
-          <p:nvPr/>
-        </p:nvSpPr>
-        <p:spPr>
-          <a:xfrm>
-            <a:off x="8366760" y="3639312"/>
-            <a:ext cx="2011680" cy="0"/>
-          </a:xfrm>
-          <a:prstGeom prst="line">
-            <a:avLst/>
-          </a:prstGeom>
-          <a:noFill/>
-          <a:ln w="63500">
-            <a:solidFill>
-              <a:srgbClr val="2F8A28"/>
-            </a:solidFill>
-            <a:prstDash val="solid"/>
-          </a:ln>
-        </p:spPr>
-      </p:sp>
-      <p:sp>
-        <p:nvSpPr>
-          <p:cNvPr id="17" name="Text 15"/>
-          <p:cNvSpPr/>
-          <p:nvPr/>
-        </p:nvSpPr>
-        <p:spPr>
-          <a:xfrm>
-            <a:off x="7909560" y="3849624"/>
-            <a:ext cx="2926080" cy="164592"/>
-          </a:xfrm>
-          <a:prstGeom prst="rect">
-            <a:avLst/>
-          </a:prstGeom>
-          <a:noFill/>
-          <a:ln/>
-        </p:spPr>
-        <p:txBody>
-          <a:bodyPr wrap="square" lIns="0" tIns="0" rIns="0" bIns="0" rtlCol="0" anchor="ctr"/>
-          <a:lstStyle/>
-          <a:p>
-            <a:pPr algn="ctr" indent="0" marL="0">
-              <a:buNone/>
-            </a:pPr>
-            <a:r>
-              <a:rPr lang="en-US" sz="900" dirty="0">
-                <a:solidFill>
-                  <a:srgbClr val="003A63"/>
-                </a:solidFill>
-                <a:latin typeface="Aptos" pitchFamily="34" charset="0"/>
-                <a:ea typeface="Aptos" pitchFamily="34" charset="-122"/>
-                <a:cs typeface="Aptos" pitchFamily="34" charset="-120"/>
-              </a:rPr>
-              <a:t>Human review</a:t>
-            </a:r>
-            <a:endParaRPr lang="en-US" sz="900" dirty="0"/>
-          </a:p>
-        </p:txBody>
-      </p:sp>
-      <p:sp>
-        <p:nvSpPr>
-          <p:cNvPr id="18" name="Shape 16"/>
           <p:cNvSpPr/>
           <p:nvPr/>
         </p:nvSpPr>
@@ -7588,7 +7310,7 @@
       </p:sp>
       <p:sp>
         <p:nvSpPr>
-          <p:cNvPr id="19" name="Text 17"/>
+          <p:cNvPr id="17" name="Text 15"/>
           <p:cNvSpPr/>
           <p:nvPr/>
         </p:nvSpPr>
@@ -7627,7 +7349,7 @@
       </p:sp>
       <p:sp>
         <p:nvSpPr>
-          <p:cNvPr id="20" name="Text 18"/>
+          <p:cNvPr id="18" name="Text 16"/>
           <p:cNvSpPr/>
           <p:nvPr/>
         </p:nvSpPr>
@@ -8135,13 +7857,11 @@
             </a:avLst>
           </a:prstGeom>
           <a:solidFill>
-            <a:srgbClr val="FFFFFF">
-              <a:alpha val="88000"/>
-            </a:srgbClr>
+            <a:srgbClr val="FFFFFF"/>
           </a:solidFill>
           <a:ln w="12700">
             <a:solidFill>
-              <a:srgbClr val="D6E8F2"/>
+              <a:srgbClr val="B9D7E6"/>
             </a:solidFill>
             <a:prstDash val="solid"/>
           </a:ln>
@@ -8149,169 +7869,112 @@
       </p:sp>
       <p:sp>
         <p:nvSpPr>
-          <p:cNvPr id="14" name="Shape 12"/>
-          <p:cNvSpPr/>
-          <p:nvPr/>
-        </p:nvSpPr>
-        <p:spPr>
-          <a:xfrm>
-            <a:off x="8138160" y="3474720"/>
-            <a:ext cx="256032" cy="411480"/>
-          </a:xfrm>
-          <a:prstGeom prst="rect">
-            <a:avLst/>
-          </a:prstGeom>
-          <a:solidFill>
-            <a:srgbClr val="0068B7"/>
-          </a:solidFill>
-          <a:ln w="12700">
-            <a:solidFill>
-              <a:srgbClr val="0068B7"/>
-            </a:solidFill>
-            <a:prstDash val="solid"/>
-          </a:ln>
-        </p:spPr>
-      </p:sp>
-      <p:sp>
-        <p:nvSpPr>
-          <p:cNvPr id="15" name="Shape 13"/>
-          <p:cNvSpPr/>
-          <p:nvPr/>
-        </p:nvSpPr>
-        <p:spPr>
-          <a:xfrm>
-            <a:off x="8577072" y="3172968"/>
-            <a:ext cx="256032" cy="713232"/>
-          </a:xfrm>
-          <a:prstGeom prst="rect">
-            <a:avLst/>
-          </a:prstGeom>
-          <a:solidFill>
-            <a:srgbClr val="2F8A28"/>
-          </a:solidFill>
-          <a:ln w="12700">
-            <a:solidFill>
-              <a:srgbClr val="2F8A28"/>
-            </a:solidFill>
-            <a:prstDash val="solid"/>
-          </a:ln>
-        </p:spPr>
+          <p:cNvPr id="14" name="Text 12"/>
+          <p:cNvSpPr/>
+          <p:nvPr/>
+        </p:nvSpPr>
+        <p:spPr>
+          <a:xfrm>
+            <a:off x="7799832" y="2935224"/>
+            <a:ext cx="3145536" cy="256032"/>
+          </a:xfrm>
+          <a:prstGeom prst="rect">
+            <a:avLst/>
+          </a:prstGeom>
+          <a:noFill/>
+          <a:ln/>
+        </p:spPr>
+        <p:txBody>
+          <a:bodyPr wrap="square" lIns="0" tIns="0" rIns="0" bIns="0" rtlCol="0" anchor="ctr"/>
+          <a:lstStyle/>
+          <a:p>
+            <a:pPr indent="0" marL="0">
+              <a:buNone/>
+            </a:pPr>
+            <a:r>
+              <a:rPr lang="en-US" sz="1300" b="1" dirty="0">
+                <a:solidFill>
+                  <a:srgbClr val="0068B7"/>
+                </a:solidFill>
+                <a:latin typeface="Aptos" pitchFamily="34" charset="0"/>
+                <a:ea typeface="Aptos" pitchFamily="34" charset="-122"/>
+                <a:cs typeface="Aptos" pitchFamily="34" charset="-120"/>
+              </a:rPr>
+              <a:t>Concept checkpoints</a:t>
+            </a:r>
+            <a:endParaRPr lang="en-US" sz="1300" dirty="0"/>
+          </a:p>
+        </p:txBody>
+      </p:sp>
+      <p:sp>
+        <p:nvSpPr>
+          <p:cNvPr id="15" name="Text 13"/>
+          <p:cNvSpPr/>
+          <p:nvPr/>
+        </p:nvSpPr>
+        <p:spPr>
+          <a:xfrm>
+            <a:off x="7818120" y="3300984"/>
+            <a:ext cx="3090672" cy="877824"/>
+          </a:xfrm>
+          <a:prstGeom prst="rect">
+            <a:avLst/>
+          </a:prstGeom>
+          <a:noFill/>
+          <a:ln/>
+        </p:spPr>
+        <p:txBody>
+          <a:bodyPr wrap="square" lIns="254" tIns="254" rIns="254" bIns="254" rtlCol="0" anchor="t">
+            <a:normAutofit/>
+          </a:bodyPr>
+          <a:lstStyle/>
+          <a:p>
+            <a:r>
+              <a:rPr lang="en-US" sz="1380" dirty="0">
+                <a:solidFill>
+                  <a:srgbClr val="17364A"/>
+                </a:solidFill>
+                <a:latin typeface="Aptos" pitchFamily="34" charset="0"/>
+                <a:ea typeface="Aptos" pitchFamily="34" charset="-122"/>
+                <a:cs typeface="Aptos" pitchFamily="34" charset="-120"/>
+              </a:rPr>
+              <a:t>For generative AI, architecture determines what source material the tool can access,.</a:t>
+            </a:r>
+            <a:endParaRPr lang="en-US" sz="1380" dirty="0"/>
+          </a:p>
+          <a:p>
+            <a:r>
+              <a:rPr lang="en-US" sz="1380" dirty="0">
+                <a:solidFill>
+                  <a:srgbClr val="17364A"/>
+                </a:solidFill>
+                <a:latin typeface="Aptos" pitchFamily="34" charset="0"/>
+                <a:ea typeface="Aptos" pitchFamily="34" charset="-122"/>
+                <a:cs typeface="Aptos" pitchFamily="34" charset="-120"/>
+              </a:rPr>
+              <a:t>A generative AI tool used to summarize policy documents has different architectural.</a:t>
+            </a:r>
+            <a:endParaRPr lang="en-US" sz="1380" dirty="0"/>
+          </a:p>
+          <a:p>
+            <a:r>
+              <a:rPr lang="en-US" sz="1380" dirty="0">
+                <a:solidFill>
+                  <a:srgbClr val="17364A"/>
+                </a:solidFill>
+                <a:latin typeface="Aptos" pitchFamily="34" charset="0"/>
+                <a:ea typeface="Aptos" pitchFamily="34" charset="-122"/>
+                <a:cs typeface="Aptos" pitchFamily="34" charset="-120"/>
+              </a:rPr>
+              <a:t>For predictive analytics, architecture determines whether the model receives timely and.</a:t>
+            </a:r>
+            <a:endParaRPr lang="en-US" sz="1380" dirty="0"/>
+          </a:p>
+        </p:txBody>
       </p:sp>
       <p:sp>
         <p:nvSpPr>
           <p:cNvPr id="16" name="Shape 14"/>
-          <p:cNvSpPr/>
-          <p:nvPr/>
-        </p:nvSpPr>
-        <p:spPr>
-          <a:xfrm>
-            <a:off x="9015984" y="2880360"/>
-            <a:ext cx="256032" cy="1005840"/>
-          </a:xfrm>
-          <a:prstGeom prst="rect">
-            <a:avLst/>
-          </a:prstGeom>
-          <a:solidFill>
-            <a:srgbClr val="D69A2D"/>
-          </a:solidFill>
-          <a:ln w="12700">
-            <a:solidFill>
-              <a:srgbClr val="D69A2D"/>
-            </a:solidFill>
-            <a:prstDash val="solid"/>
-          </a:ln>
-        </p:spPr>
-      </p:sp>
-      <p:sp>
-        <p:nvSpPr>
-          <p:cNvPr id="17" name="Shape 15"/>
-          <p:cNvSpPr/>
-          <p:nvPr/>
-        </p:nvSpPr>
-        <p:spPr>
-          <a:xfrm>
-            <a:off x="9454896" y="3319272"/>
-            <a:ext cx="256032" cy="566928"/>
-          </a:xfrm>
-          <a:prstGeom prst="rect">
-            <a:avLst/>
-          </a:prstGeom>
-          <a:solidFill>
-            <a:srgbClr val="6A4CA3"/>
-          </a:solidFill>
-          <a:ln w="12700">
-            <a:solidFill>
-              <a:srgbClr val="6A4CA3"/>
-            </a:solidFill>
-            <a:prstDash val="solid"/>
-          </a:ln>
-        </p:spPr>
-      </p:sp>
-      <p:sp>
-        <p:nvSpPr>
-          <p:cNvPr id="18" name="Shape 16"/>
-          <p:cNvSpPr/>
-          <p:nvPr/>
-        </p:nvSpPr>
-        <p:spPr>
-          <a:xfrm>
-            <a:off x="8019288" y="3886200"/>
-            <a:ext cx="2706624" cy="0"/>
-          </a:xfrm>
-          <a:prstGeom prst="line">
-            <a:avLst/>
-          </a:prstGeom>
-          <a:noFill/>
-          <a:ln w="15240">
-            <a:solidFill>
-              <a:srgbClr val="003A63"/>
-            </a:solidFill>
-            <a:prstDash val="solid"/>
-          </a:ln>
-        </p:spPr>
-      </p:sp>
-      <p:sp>
-        <p:nvSpPr>
-          <p:cNvPr id="19" name="Text 17"/>
-          <p:cNvSpPr/>
-          <p:nvPr/>
-        </p:nvSpPr>
-        <p:spPr>
-          <a:xfrm>
-            <a:off x="7863840" y="3017520"/>
-            <a:ext cx="3017520" cy="201168"/>
-          </a:xfrm>
-          <a:prstGeom prst="rect">
-            <a:avLst/>
-          </a:prstGeom>
-          <a:noFill/>
-          <a:ln/>
-        </p:spPr>
-        <p:txBody>
-          <a:bodyPr wrap="square" lIns="0" tIns="0" rIns="0" bIns="0" rtlCol="0" anchor="ctr"/>
-          <a:lstStyle/>
-          <a:p>
-            <a:pPr algn="ctr" indent="0" marL="0">
-              <a:buNone/>
-            </a:pPr>
-            <a:r>
-              <a:rPr lang="en-US" sz="1050" b="1" dirty="0">
-                <a:solidFill>
-                  <a:srgbClr val="003A63"/>
-                </a:solidFill>
-                <a:latin typeface="Aptos" pitchFamily="34" charset="0"/>
-                <a:ea typeface="Aptos" pitchFamily="34" charset="-122"/>
-                <a:cs typeface="Aptos" pitchFamily="34" charset="-120"/>
-              </a:rPr>
-              <a:t>Measure and monitor</a:t>
-            </a:r>
-            <a:endParaRPr lang="en-US" sz="1050" dirty="0"/>
-          </a:p>
-        </p:txBody>
-      </p:sp>
-      <p:sp>
-        <p:nvSpPr>
-          <p:cNvPr id="20" name="Shape 18"/>
           <p:cNvSpPr/>
           <p:nvPr/>
         </p:nvSpPr>
@@ -8338,7 +8001,7 @@
       </p:sp>
       <p:sp>
         <p:nvSpPr>
-          <p:cNvPr id="21" name="Text 19"/>
+          <p:cNvPr id="17" name="Text 15"/>
           <p:cNvSpPr/>
           <p:nvPr/>
         </p:nvSpPr>
@@ -8377,7 +8040,7 @@
       </p:sp>
       <p:sp>
         <p:nvSpPr>
-          <p:cNvPr id="22" name="Text 20"/>
+          <p:cNvPr id="18" name="Text 16"/>
           <p:cNvSpPr/>
           <p:nvPr/>
         </p:nvSpPr>
@@ -8885,13 +8548,11 @@
             </a:avLst>
           </a:prstGeom>
           <a:solidFill>
-            <a:srgbClr val="FFFFFF">
-              <a:alpha val="88000"/>
-            </a:srgbClr>
+            <a:srgbClr val="FFFFFF"/>
           </a:solidFill>
           <a:ln w="12700">
             <a:solidFill>
-              <a:srgbClr val="D6E8F2"/>
+              <a:srgbClr val="B9D7E6"/>
             </a:solidFill>
             <a:prstDash val="solid"/>
           </a:ln>
@@ -8899,169 +8560,112 @@
       </p:sp>
       <p:sp>
         <p:nvSpPr>
-          <p:cNvPr id="14" name="Shape 12"/>
-          <p:cNvSpPr/>
-          <p:nvPr/>
-        </p:nvSpPr>
-        <p:spPr>
-          <a:xfrm>
-            <a:off x="8138160" y="3474720"/>
-            <a:ext cx="256032" cy="411480"/>
-          </a:xfrm>
-          <a:prstGeom prst="rect">
-            <a:avLst/>
-          </a:prstGeom>
-          <a:solidFill>
-            <a:srgbClr val="0068B7"/>
-          </a:solidFill>
-          <a:ln w="12700">
-            <a:solidFill>
-              <a:srgbClr val="0068B7"/>
-            </a:solidFill>
-            <a:prstDash val="solid"/>
-          </a:ln>
-        </p:spPr>
-      </p:sp>
-      <p:sp>
-        <p:nvSpPr>
-          <p:cNvPr id="15" name="Shape 13"/>
-          <p:cNvSpPr/>
-          <p:nvPr/>
-        </p:nvSpPr>
-        <p:spPr>
-          <a:xfrm>
-            <a:off x="8577072" y="3172968"/>
-            <a:ext cx="256032" cy="713232"/>
-          </a:xfrm>
-          <a:prstGeom prst="rect">
-            <a:avLst/>
-          </a:prstGeom>
-          <a:solidFill>
-            <a:srgbClr val="2F8A28"/>
-          </a:solidFill>
-          <a:ln w="12700">
-            <a:solidFill>
-              <a:srgbClr val="2F8A28"/>
-            </a:solidFill>
-            <a:prstDash val="solid"/>
-          </a:ln>
-        </p:spPr>
+          <p:cNvPr id="14" name="Text 12"/>
+          <p:cNvSpPr/>
+          <p:nvPr/>
+        </p:nvSpPr>
+        <p:spPr>
+          <a:xfrm>
+            <a:off x="7799832" y="2935224"/>
+            <a:ext cx="3145536" cy="256032"/>
+          </a:xfrm>
+          <a:prstGeom prst="rect">
+            <a:avLst/>
+          </a:prstGeom>
+          <a:noFill/>
+          <a:ln/>
+        </p:spPr>
+        <p:txBody>
+          <a:bodyPr wrap="square" lIns="0" tIns="0" rIns="0" bIns="0" rtlCol="0" anchor="ctr"/>
+          <a:lstStyle/>
+          <a:p>
+            <a:pPr indent="0" marL="0">
+              <a:buNone/>
+            </a:pPr>
+            <a:r>
+              <a:rPr lang="en-US" sz="1300" b="1" dirty="0">
+                <a:solidFill>
+                  <a:srgbClr val="0068B7"/>
+                </a:solidFill>
+                <a:latin typeface="Aptos" pitchFamily="34" charset="0"/>
+                <a:ea typeface="Aptos" pitchFamily="34" charset="-122"/>
+                <a:cs typeface="Aptos" pitchFamily="34" charset="-120"/>
+              </a:rPr>
+              <a:t>Concept checkpoints</a:t>
+            </a:r>
+            <a:endParaRPr lang="en-US" sz="1300" dirty="0"/>
+          </a:p>
+        </p:txBody>
+      </p:sp>
+      <p:sp>
+        <p:nvSpPr>
+          <p:cNvPr id="15" name="Text 13"/>
+          <p:cNvSpPr/>
+          <p:nvPr/>
+        </p:nvSpPr>
+        <p:spPr>
+          <a:xfrm>
+            <a:off x="7818120" y="3300984"/>
+            <a:ext cx="3090672" cy="877824"/>
+          </a:xfrm>
+          <a:prstGeom prst="rect">
+            <a:avLst/>
+          </a:prstGeom>
+          <a:noFill/>
+          <a:ln/>
+        </p:spPr>
+        <p:txBody>
+          <a:bodyPr wrap="square" lIns="254" tIns="254" rIns="254" bIns="254" rtlCol="0" anchor="t">
+            <a:normAutofit/>
+          </a:bodyPr>
+          <a:lstStyle/>
+          <a:p>
+            <a:r>
+              <a:rPr lang="en-US" sz="1380" dirty="0">
+                <a:solidFill>
+                  <a:srgbClr val="17364A"/>
+                </a:solidFill>
+                <a:latin typeface="Aptos" pitchFamily="34" charset="0"/>
+                <a:ea typeface="Aptos" pitchFamily="34" charset="-122"/>
+                <a:cs typeface="Aptos" pitchFamily="34" charset="-120"/>
+              </a:rPr>
+              <a:t>Which public health workflow in your agency would be most helpful to map before.</a:t>
+            </a:r>
+            <a:endParaRPr lang="en-US" sz="1380" dirty="0"/>
+          </a:p>
+          <a:p>
+            <a:r>
+              <a:rPr lang="en-US" sz="1380" dirty="0">
+                <a:solidFill>
+                  <a:srgbClr val="17364A"/>
+                </a:solidFill>
+                <a:latin typeface="Aptos" pitchFamily="34" charset="0"/>
+                <a:ea typeface="Aptos" pitchFamily="34" charset="-122"/>
+                <a:cs typeface="Aptos" pitchFamily="34" charset="-120"/>
+              </a:rPr>
+              <a:t>What are the source systems, systems of record, and downstream outputs for that workflow?</a:t>
+            </a:r>
+            <a:endParaRPr lang="en-US" sz="1380" dirty="0"/>
+          </a:p>
+          <a:p>
+            <a:r>
+              <a:rPr lang="en-US" sz="1380" dirty="0">
+                <a:solidFill>
+                  <a:srgbClr val="17364A"/>
+                </a:solidFill>
+                <a:latin typeface="Aptos" pitchFamily="34" charset="0"/>
+                <a:ea typeface="Aptos" pitchFamily="34" charset="-122"/>
+                <a:cs typeface="Aptos" pitchFamily="34" charset="-120"/>
+              </a:rPr>
+              <a:t>Where are data transformed, linked, summarized, interpreted, or manually corrected?</a:t>
+            </a:r>
+            <a:endParaRPr lang="en-US" sz="1380" dirty="0"/>
+          </a:p>
+        </p:txBody>
       </p:sp>
       <p:sp>
         <p:nvSpPr>
           <p:cNvPr id="16" name="Shape 14"/>
-          <p:cNvSpPr/>
-          <p:nvPr/>
-        </p:nvSpPr>
-        <p:spPr>
-          <a:xfrm>
-            <a:off x="9015984" y="2880360"/>
-            <a:ext cx="256032" cy="1005840"/>
-          </a:xfrm>
-          <a:prstGeom prst="rect">
-            <a:avLst/>
-          </a:prstGeom>
-          <a:solidFill>
-            <a:srgbClr val="D69A2D"/>
-          </a:solidFill>
-          <a:ln w="12700">
-            <a:solidFill>
-              <a:srgbClr val="D69A2D"/>
-            </a:solidFill>
-            <a:prstDash val="solid"/>
-          </a:ln>
-        </p:spPr>
-      </p:sp>
-      <p:sp>
-        <p:nvSpPr>
-          <p:cNvPr id="17" name="Shape 15"/>
-          <p:cNvSpPr/>
-          <p:nvPr/>
-        </p:nvSpPr>
-        <p:spPr>
-          <a:xfrm>
-            <a:off x="9454896" y="3319272"/>
-            <a:ext cx="256032" cy="566928"/>
-          </a:xfrm>
-          <a:prstGeom prst="rect">
-            <a:avLst/>
-          </a:prstGeom>
-          <a:solidFill>
-            <a:srgbClr val="6A4CA3"/>
-          </a:solidFill>
-          <a:ln w="12700">
-            <a:solidFill>
-              <a:srgbClr val="6A4CA3"/>
-            </a:solidFill>
-            <a:prstDash val="solid"/>
-          </a:ln>
-        </p:spPr>
-      </p:sp>
-      <p:sp>
-        <p:nvSpPr>
-          <p:cNvPr id="18" name="Shape 16"/>
-          <p:cNvSpPr/>
-          <p:nvPr/>
-        </p:nvSpPr>
-        <p:spPr>
-          <a:xfrm>
-            <a:off x="8019288" y="3886200"/>
-            <a:ext cx="2706624" cy="0"/>
-          </a:xfrm>
-          <a:prstGeom prst="line">
-            <a:avLst/>
-          </a:prstGeom>
-          <a:noFill/>
-          <a:ln w="15240">
-            <a:solidFill>
-              <a:srgbClr val="003A63"/>
-            </a:solidFill>
-            <a:prstDash val="solid"/>
-          </a:ln>
-        </p:spPr>
-      </p:sp>
-      <p:sp>
-        <p:nvSpPr>
-          <p:cNvPr id="19" name="Text 17"/>
-          <p:cNvSpPr/>
-          <p:nvPr/>
-        </p:nvSpPr>
-        <p:spPr>
-          <a:xfrm>
-            <a:off x="7863840" y="3017520"/>
-            <a:ext cx="3017520" cy="201168"/>
-          </a:xfrm>
-          <a:prstGeom prst="rect">
-            <a:avLst/>
-          </a:prstGeom>
-          <a:noFill/>
-          <a:ln/>
-        </p:spPr>
-        <p:txBody>
-          <a:bodyPr wrap="square" lIns="0" tIns="0" rIns="0" bIns="0" rtlCol="0" anchor="ctr"/>
-          <a:lstStyle/>
-          <a:p>
-            <a:pPr algn="ctr" indent="0" marL="0">
-              <a:buNone/>
-            </a:pPr>
-            <a:r>
-              <a:rPr lang="en-US" sz="1050" b="1" dirty="0">
-                <a:solidFill>
-                  <a:srgbClr val="003A63"/>
-                </a:solidFill>
-                <a:latin typeface="Aptos" pitchFamily="34" charset="0"/>
-                <a:ea typeface="Aptos" pitchFamily="34" charset="-122"/>
-                <a:cs typeface="Aptos" pitchFamily="34" charset="-120"/>
-              </a:rPr>
-              <a:t>Measure and monitor</a:t>
-            </a:r>
-            <a:endParaRPr lang="en-US" sz="1050" dirty="0"/>
-          </a:p>
-        </p:txBody>
-      </p:sp>
-      <p:sp>
-        <p:nvSpPr>
-          <p:cNvPr id="20" name="Shape 18"/>
           <p:cNvSpPr/>
           <p:nvPr/>
         </p:nvSpPr>
@@ -9088,7 +8692,7 @@
       </p:sp>
       <p:sp>
         <p:nvSpPr>
-          <p:cNvPr id="21" name="Text 19"/>
+          <p:cNvPr id="17" name="Text 15"/>
           <p:cNvSpPr/>
           <p:nvPr/>
         </p:nvSpPr>
@@ -9127,7 +8731,7 @@
       </p:sp>
       <p:sp>
         <p:nvSpPr>
-          <p:cNvPr id="22" name="Text 20"/>
+          <p:cNvPr id="18" name="Text 16"/>
           <p:cNvSpPr/>
           <p:nvPr/>
         </p:nvSpPr>
@@ -9635,13 +9239,11 @@
             </a:avLst>
           </a:prstGeom>
           <a:solidFill>
-            <a:srgbClr val="FFFFFF">
-              <a:alpha val="88000"/>
-            </a:srgbClr>
+            <a:srgbClr val="FFFFFF"/>
           </a:solidFill>
           <a:ln w="12700">
             <a:solidFill>
-              <a:srgbClr val="D6E8F2"/>
+              <a:srgbClr val="B9D7E6"/>
             </a:solidFill>
             <a:prstDash val="solid"/>
           </a:ln>
@@ -9649,169 +9251,112 @@
       </p:sp>
       <p:sp>
         <p:nvSpPr>
-          <p:cNvPr id="14" name="Shape 12"/>
-          <p:cNvSpPr/>
-          <p:nvPr/>
-        </p:nvSpPr>
-        <p:spPr>
-          <a:xfrm>
-            <a:off x="8138160" y="3474720"/>
-            <a:ext cx="256032" cy="411480"/>
-          </a:xfrm>
-          <a:prstGeom prst="rect">
-            <a:avLst/>
-          </a:prstGeom>
-          <a:solidFill>
-            <a:srgbClr val="0068B7"/>
-          </a:solidFill>
-          <a:ln w="12700">
-            <a:solidFill>
-              <a:srgbClr val="0068B7"/>
-            </a:solidFill>
-            <a:prstDash val="solid"/>
-          </a:ln>
-        </p:spPr>
-      </p:sp>
-      <p:sp>
-        <p:nvSpPr>
-          <p:cNvPr id="15" name="Shape 13"/>
-          <p:cNvSpPr/>
-          <p:nvPr/>
-        </p:nvSpPr>
-        <p:spPr>
-          <a:xfrm>
-            <a:off x="8577072" y="3172968"/>
-            <a:ext cx="256032" cy="713232"/>
-          </a:xfrm>
-          <a:prstGeom prst="rect">
-            <a:avLst/>
-          </a:prstGeom>
-          <a:solidFill>
-            <a:srgbClr val="2F8A28"/>
-          </a:solidFill>
-          <a:ln w="12700">
-            <a:solidFill>
-              <a:srgbClr val="2F8A28"/>
-            </a:solidFill>
-            <a:prstDash val="solid"/>
-          </a:ln>
-        </p:spPr>
+          <p:cNvPr id="14" name="Text 12"/>
+          <p:cNvSpPr/>
+          <p:nvPr/>
+        </p:nvSpPr>
+        <p:spPr>
+          <a:xfrm>
+            <a:off x="7799832" y="2935224"/>
+            <a:ext cx="3145536" cy="256032"/>
+          </a:xfrm>
+          <a:prstGeom prst="rect">
+            <a:avLst/>
+          </a:prstGeom>
+          <a:noFill/>
+          <a:ln/>
+        </p:spPr>
+        <p:txBody>
+          <a:bodyPr wrap="square" lIns="0" tIns="0" rIns="0" bIns="0" rtlCol="0" anchor="ctr"/>
+          <a:lstStyle/>
+          <a:p>
+            <a:pPr indent="0" marL="0">
+              <a:buNone/>
+            </a:pPr>
+            <a:r>
+              <a:rPr lang="en-US" sz="1300" b="1" dirty="0">
+                <a:solidFill>
+                  <a:srgbClr val="0068B7"/>
+                </a:solidFill>
+                <a:latin typeface="Aptos" pitchFamily="34" charset="0"/>
+                <a:ea typeface="Aptos" pitchFamily="34" charset="-122"/>
+                <a:cs typeface="Aptos" pitchFamily="34" charset="-120"/>
+              </a:rPr>
+              <a:t>Concept checkpoints</a:t>
+            </a:r>
+            <a:endParaRPr lang="en-US" sz="1300" dirty="0"/>
+          </a:p>
+        </p:txBody>
+      </p:sp>
+      <p:sp>
+        <p:nvSpPr>
+          <p:cNvPr id="15" name="Text 13"/>
+          <p:cNvSpPr/>
+          <p:nvPr/>
+        </p:nvSpPr>
+        <p:spPr>
+          <a:xfrm>
+            <a:off x="7818120" y="3300984"/>
+            <a:ext cx="3090672" cy="877824"/>
+          </a:xfrm>
+          <a:prstGeom prst="rect">
+            <a:avLst/>
+          </a:prstGeom>
+          <a:noFill/>
+          <a:ln/>
+        </p:spPr>
+        <p:txBody>
+          <a:bodyPr wrap="square" lIns="254" tIns="254" rIns="254" bIns="254" rtlCol="0" anchor="t">
+            <a:normAutofit/>
+          </a:bodyPr>
+          <a:lstStyle/>
+          <a:p>
+            <a:r>
+              <a:rPr lang="en-US" sz="1380" dirty="0">
+                <a:solidFill>
+                  <a:srgbClr val="17364A"/>
+                </a:solidFill>
+                <a:latin typeface="Aptos" pitchFamily="34" charset="0"/>
+                <a:ea typeface="Aptos" pitchFamily="34" charset="-122"/>
+                <a:cs typeface="Aptos" pitchFamily="34" charset="-120"/>
+              </a:rPr>
+              <a:t>Which parts of the workflow require legal, epidemiologic, clinical, communications,.</a:t>
+            </a:r>
+            <a:endParaRPr lang="en-US" sz="1380" dirty="0"/>
+          </a:p>
+          <a:p>
+            <a:r>
+              <a:rPr lang="en-US" sz="1380" dirty="0">
+                <a:solidFill>
+                  <a:srgbClr val="17364A"/>
+                </a:solidFill>
+                <a:latin typeface="Aptos" pitchFamily="34" charset="0"/>
+                <a:ea typeface="Aptos" pitchFamily="34" charset="-122"/>
+                <a:cs typeface="Aptos" pitchFamily="34" charset="-120"/>
+              </a:rPr>
+              <a:t>What could go wrong if AI were added without changing the architecture?</a:t>
+            </a:r>
+            <a:endParaRPr lang="en-US" sz="1380" dirty="0"/>
+          </a:p>
+          <a:p>
+            <a:r>
+              <a:rPr lang="en-US" sz="1380" dirty="0">
+                <a:solidFill>
+                  <a:srgbClr val="17364A"/>
+                </a:solidFill>
+                <a:latin typeface="Aptos" pitchFamily="34" charset="0"/>
+                <a:ea typeface="Aptos" pitchFamily="34" charset="-122"/>
+                <a:cs typeface="Aptos" pitchFamily="34" charset="-120"/>
+              </a:rPr>
+              <a:t>Which monitoring indicators would show whether the AI-supported workflow is working safely.</a:t>
+            </a:r>
+            <a:endParaRPr lang="en-US" sz="1380" dirty="0"/>
+          </a:p>
+        </p:txBody>
       </p:sp>
       <p:sp>
         <p:nvSpPr>
           <p:cNvPr id="16" name="Shape 14"/>
-          <p:cNvSpPr/>
-          <p:nvPr/>
-        </p:nvSpPr>
-        <p:spPr>
-          <a:xfrm>
-            <a:off x="9015984" y="2880360"/>
-            <a:ext cx="256032" cy="1005840"/>
-          </a:xfrm>
-          <a:prstGeom prst="rect">
-            <a:avLst/>
-          </a:prstGeom>
-          <a:solidFill>
-            <a:srgbClr val="D69A2D"/>
-          </a:solidFill>
-          <a:ln w="12700">
-            <a:solidFill>
-              <a:srgbClr val="D69A2D"/>
-            </a:solidFill>
-            <a:prstDash val="solid"/>
-          </a:ln>
-        </p:spPr>
-      </p:sp>
-      <p:sp>
-        <p:nvSpPr>
-          <p:cNvPr id="17" name="Shape 15"/>
-          <p:cNvSpPr/>
-          <p:nvPr/>
-        </p:nvSpPr>
-        <p:spPr>
-          <a:xfrm>
-            <a:off x="9454896" y="3319272"/>
-            <a:ext cx="256032" cy="566928"/>
-          </a:xfrm>
-          <a:prstGeom prst="rect">
-            <a:avLst/>
-          </a:prstGeom>
-          <a:solidFill>
-            <a:srgbClr val="6A4CA3"/>
-          </a:solidFill>
-          <a:ln w="12700">
-            <a:solidFill>
-              <a:srgbClr val="6A4CA3"/>
-            </a:solidFill>
-            <a:prstDash val="solid"/>
-          </a:ln>
-        </p:spPr>
-      </p:sp>
-      <p:sp>
-        <p:nvSpPr>
-          <p:cNvPr id="18" name="Shape 16"/>
-          <p:cNvSpPr/>
-          <p:nvPr/>
-        </p:nvSpPr>
-        <p:spPr>
-          <a:xfrm>
-            <a:off x="8019288" y="3886200"/>
-            <a:ext cx="2706624" cy="0"/>
-          </a:xfrm>
-          <a:prstGeom prst="line">
-            <a:avLst/>
-          </a:prstGeom>
-          <a:noFill/>
-          <a:ln w="15240">
-            <a:solidFill>
-              <a:srgbClr val="003A63"/>
-            </a:solidFill>
-            <a:prstDash val="solid"/>
-          </a:ln>
-        </p:spPr>
-      </p:sp>
-      <p:sp>
-        <p:nvSpPr>
-          <p:cNvPr id="19" name="Text 17"/>
-          <p:cNvSpPr/>
-          <p:nvPr/>
-        </p:nvSpPr>
-        <p:spPr>
-          <a:xfrm>
-            <a:off x="7863840" y="3017520"/>
-            <a:ext cx="3017520" cy="201168"/>
-          </a:xfrm>
-          <a:prstGeom prst="rect">
-            <a:avLst/>
-          </a:prstGeom>
-          <a:noFill/>
-          <a:ln/>
-        </p:spPr>
-        <p:txBody>
-          <a:bodyPr wrap="square" lIns="0" tIns="0" rIns="0" bIns="0" rtlCol="0" anchor="ctr"/>
-          <a:lstStyle/>
-          <a:p>
-            <a:pPr algn="ctr" indent="0" marL="0">
-              <a:buNone/>
-            </a:pPr>
-            <a:r>
-              <a:rPr lang="en-US" sz="1050" b="1" dirty="0">
-                <a:solidFill>
-                  <a:srgbClr val="003A63"/>
-                </a:solidFill>
-                <a:latin typeface="Aptos" pitchFamily="34" charset="0"/>
-                <a:ea typeface="Aptos" pitchFamily="34" charset="-122"/>
-                <a:cs typeface="Aptos" pitchFamily="34" charset="-120"/>
-              </a:rPr>
-              <a:t>Measure and monitor</a:t>
-            </a:r>
-            <a:endParaRPr lang="en-US" sz="1050" dirty="0"/>
-          </a:p>
-        </p:txBody>
-      </p:sp>
-      <p:sp>
-        <p:nvSpPr>
-          <p:cNvPr id="20" name="Shape 18"/>
           <p:cNvSpPr/>
           <p:nvPr/>
         </p:nvSpPr>
@@ -9838,7 +9383,7 @@
       </p:sp>
       <p:sp>
         <p:nvSpPr>
-          <p:cNvPr id="21" name="Text 19"/>
+          <p:cNvPr id="17" name="Text 15"/>
           <p:cNvSpPr/>
           <p:nvPr/>
         </p:nvSpPr>
@@ -9877,7 +9422,7 @@
       </p:sp>
       <p:sp>
         <p:nvSpPr>
-          <p:cNvPr id="22" name="Text 20"/>
+          <p:cNvPr id="18" name="Text 16"/>
           <p:cNvSpPr/>
           <p:nvPr/>
         </p:nvSpPr>
@@ -10385,13 +9930,11 @@
             </a:avLst>
           </a:prstGeom>
           <a:solidFill>
-            <a:srgbClr val="FFFFFF">
-              <a:alpha val="88000"/>
-            </a:srgbClr>
+            <a:srgbClr val="FFFFFF"/>
           </a:solidFill>
           <a:ln w="12700">
             <a:solidFill>
-              <a:srgbClr val="D6E8F2"/>
+              <a:srgbClr val="B9D7E6"/>
             </a:solidFill>
             <a:prstDash val="solid"/>
           </a:ln>
@@ -10399,169 +9942,112 @@
       </p:sp>
       <p:sp>
         <p:nvSpPr>
-          <p:cNvPr id="14" name="Shape 12"/>
-          <p:cNvSpPr/>
-          <p:nvPr/>
-        </p:nvSpPr>
-        <p:spPr>
-          <a:xfrm>
-            <a:off x="8138160" y="3474720"/>
-            <a:ext cx="256032" cy="411480"/>
-          </a:xfrm>
-          <a:prstGeom prst="rect">
-            <a:avLst/>
-          </a:prstGeom>
-          <a:solidFill>
-            <a:srgbClr val="0068B7"/>
-          </a:solidFill>
-          <a:ln w="12700">
-            <a:solidFill>
-              <a:srgbClr val="0068B7"/>
-            </a:solidFill>
-            <a:prstDash val="solid"/>
-          </a:ln>
-        </p:spPr>
-      </p:sp>
-      <p:sp>
-        <p:nvSpPr>
-          <p:cNvPr id="15" name="Shape 13"/>
-          <p:cNvSpPr/>
-          <p:nvPr/>
-        </p:nvSpPr>
-        <p:spPr>
-          <a:xfrm>
-            <a:off x="8577072" y="3172968"/>
-            <a:ext cx="256032" cy="713232"/>
-          </a:xfrm>
-          <a:prstGeom prst="rect">
-            <a:avLst/>
-          </a:prstGeom>
-          <a:solidFill>
-            <a:srgbClr val="2F8A28"/>
-          </a:solidFill>
-          <a:ln w="12700">
-            <a:solidFill>
-              <a:srgbClr val="2F8A28"/>
-            </a:solidFill>
-            <a:prstDash val="solid"/>
-          </a:ln>
-        </p:spPr>
+          <p:cNvPr id="14" name="Text 12"/>
+          <p:cNvSpPr/>
+          <p:nvPr/>
+        </p:nvSpPr>
+        <p:spPr>
+          <a:xfrm>
+            <a:off x="7799832" y="2935224"/>
+            <a:ext cx="3145536" cy="256032"/>
+          </a:xfrm>
+          <a:prstGeom prst="rect">
+            <a:avLst/>
+          </a:prstGeom>
+          <a:noFill/>
+          <a:ln/>
+        </p:spPr>
+        <p:txBody>
+          <a:bodyPr wrap="square" lIns="0" tIns="0" rIns="0" bIns="0" rtlCol="0" anchor="ctr"/>
+          <a:lstStyle/>
+          <a:p>
+            <a:pPr indent="0" marL="0">
+              <a:buNone/>
+            </a:pPr>
+            <a:r>
+              <a:rPr lang="en-US" sz="1300" b="1" dirty="0">
+                <a:solidFill>
+                  <a:srgbClr val="0068B7"/>
+                </a:solidFill>
+                <a:latin typeface="Aptos" pitchFamily="34" charset="0"/>
+                <a:ea typeface="Aptos" pitchFamily="34" charset="-122"/>
+                <a:cs typeface="Aptos" pitchFamily="34" charset="-120"/>
+              </a:rPr>
+              <a:t>Concept checkpoints</a:t>
+            </a:r>
+            <a:endParaRPr lang="en-US" sz="1300" dirty="0"/>
+          </a:p>
+        </p:txBody>
+      </p:sp>
+      <p:sp>
+        <p:nvSpPr>
+          <p:cNvPr id="15" name="Text 13"/>
+          <p:cNvSpPr/>
+          <p:nvPr/>
+        </p:nvSpPr>
+        <p:spPr>
+          <a:xfrm>
+            <a:off x="7818120" y="3300984"/>
+            <a:ext cx="3090672" cy="877824"/>
+          </a:xfrm>
+          <a:prstGeom prst="rect">
+            <a:avLst/>
+          </a:prstGeom>
+          <a:noFill/>
+          <a:ln/>
+        </p:spPr>
+        <p:txBody>
+          <a:bodyPr wrap="square" lIns="254" tIns="254" rIns="254" bIns="254" rtlCol="0" anchor="t">
+            <a:normAutofit/>
+          </a:bodyPr>
+          <a:lstStyle/>
+          <a:p>
+            <a:r>
+              <a:rPr lang="en-US" sz="1380" dirty="0">
+                <a:solidFill>
+                  <a:srgbClr val="17364A"/>
+                </a:solidFill>
+                <a:latin typeface="Aptos" pitchFamily="34" charset="0"/>
+                <a:ea typeface="Aptos" pitchFamily="34" charset="-122"/>
+                <a:cs typeface="Aptos" pitchFamily="34" charset="-120"/>
+              </a:rPr>
+              <a:t>Choose a workflow that is real or realistic for your agency, such as case report intake,.</a:t>
+            </a:r>
+            <a:endParaRPr lang="en-US" sz="1380" dirty="0"/>
+          </a:p>
+          <a:p>
+            <a:r>
+              <a:rPr lang="en-US" sz="1380" dirty="0">
+                <a:solidFill>
+                  <a:srgbClr val="17364A"/>
+                </a:solidFill>
+                <a:latin typeface="Aptos" pitchFamily="34" charset="0"/>
+                <a:ea typeface="Aptos" pitchFamily="34" charset="-122"/>
+                <a:cs typeface="Aptos" pitchFamily="34" charset="-120"/>
+              </a:rPr>
+              <a:t>Your map should include the source systems, data exchange methods, transformation steps,.</a:t>
+            </a:r>
+            <a:endParaRPr lang="en-US" sz="1380" dirty="0"/>
+          </a:p>
+          <a:p>
+            <a:r>
+              <a:rPr lang="en-US" sz="1380" dirty="0">
+                <a:solidFill>
+                  <a:srgbClr val="17364A"/>
+                </a:solidFill>
+                <a:latin typeface="Aptos" pitchFamily="34" charset="0"/>
+                <a:ea typeface="Aptos" pitchFamily="34" charset="-122"/>
+                <a:cs typeface="Aptos" pitchFamily="34" charset="-120"/>
+              </a:rPr>
+              <a:t>After completing the map, identify at least five readiness gaps that should be addressed.</a:t>
+            </a:r>
+            <a:endParaRPr lang="en-US" sz="1380" dirty="0"/>
+          </a:p>
+        </p:txBody>
       </p:sp>
       <p:sp>
         <p:nvSpPr>
           <p:cNvPr id="16" name="Shape 14"/>
-          <p:cNvSpPr/>
-          <p:nvPr/>
-        </p:nvSpPr>
-        <p:spPr>
-          <a:xfrm>
-            <a:off x="9015984" y="2880360"/>
-            <a:ext cx="256032" cy="1005840"/>
-          </a:xfrm>
-          <a:prstGeom prst="rect">
-            <a:avLst/>
-          </a:prstGeom>
-          <a:solidFill>
-            <a:srgbClr val="D69A2D"/>
-          </a:solidFill>
-          <a:ln w="12700">
-            <a:solidFill>
-              <a:srgbClr val="D69A2D"/>
-            </a:solidFill>
-            <a:prstDash val="solid"/>
-          </a:ln>
-        </p:spPr>
-      </p:sp>
-      <p:sp>
-        <p:nvSpPr>
-          <p:cNvPr id="17" name="Shape 15"/>
-          <p:cNvSpPr/>
-          <p:nvPr/>
-        </p:nvSpPr>
-        <p:spPr>
-          <a:xfrm>
-            <a:off x="9454896" y="3319272"/>
-            <a:ext cx="256032" cy="566928"/>
-          </a:xfrm>
-          <a:prstGeom prst="rect">
-            <a:avLst/>
-          </a:prstGeom>
-          <a:solidFill>
-            <a:srgbClr val="6A4CA3"/>
-          </a:solidFill>
-          <a:ln w="12700">
-            <a:solidFill>
-              <a:srgbClr val="6A4CA3"/>
-            </a:solidFill>
-            <a:prstDash val="solid"/>
-          </a:ln>
-        </p:spPr>
-      </p:sp>
-      <p:sp>
-        <p:nvSpPr>
-          <p:cNvPr id="18" name="Shape 16"/>
-          <p:cNvSpPr/>
-          <p:nvPr/>
-        </p:nvSpPr>
-        <p:spPr>
-          <a:xfrm>
-            <a:off x="8019288" y="3886200"/>
-            <a:ext cx="2706624" cy="0"/>
-          </a:xfrm>
-          <a:prstGeom prst="line">
-            <a:avLst/>
-          </a:prstGeom>
-          <a:noFill/>
-          <a:ln w="15240">
-            <a:solidFill>
-              <a:srgbClr val="003A63"/>
-            </a:solidFill>
-            <a:prstDash val="solid"/>
-          </a:ln>
-        </p:spPr>
-      </p:sp>
-      <p:sp>
-        <p:nvSpPr>
-          <p:cNvPr id="19" name="Text 17"/>
-          <p:cNvSpPr/>
-          <p:nvPr/>
-        </p:nvSpPr>
-        <p:spPr>
-          <a:xfrm>
-            <a:off x="7863840" y="3017520"/>
-            <a:ext cx="3017520" cy="201168"/>
-          </a:xfrm>
-          <a:prstGeom prst="rect">
-            <a:avLst/>
-          </a:prstGeom>
-          <a:noFill/>
-          <a:ln/>
-        </p:spPr>
-        <p:txBody>
-          <a:bodyPr wrap="square" lIns="0" tIns="0" rIns="0" bIns="0" rtlCol="0" anchor="ctr"/>
-          <a:lstStyle/>
-          <a:p>
-            <a:pPr algn="ctr" indent="0" marL="0">
-              <a:buNone/>
-            </a:pPr>
-            <a:r>
-              <a:rPr lang="en-US" sz="1050" b="1" dirty="0">
-                <a:solidFill>
-                  <a:srgbClr val="003A63"/>
-                </a:solidFill>
-                <a:latin typeface="Aptos" pitchFamily="34" charset="0"/>
-                <a:ea typeface="Aptos" pitchFamily="34" charset="-122"/>
-                <a:cs typeface="Aptos" pitchFamily="34" charset="-120"/>
-              </a:rPr>
-              <a:t>Measure and monitor</a:t>
-            </a:r>
-            <a:endParaRPr lang="en-US" sz="1050" dirty="0"/>
-          </a:p>
-        </p:txBody>
-      </p:sp>
-      <p:sp>
-        <p:nvSpPr>
-          <p:cNvPr id="20" name="Shape 18"/>
           <p:cNvSpPr/>
           <p:nvPr/>
         </p:nvSpPr>
@@ -10588,7 +10074,7 @@
       </p:sp>
       <p:sp>
         <p:nvSpPr>
-          <p:cNvPr id="21" name="Text 19"/>
+          <p:cNvPr id="17" name="Text 15"/>
           <p:cNvSpPr/>
           <p:nvPr/>
         </p:nvSpPr>
@@ -10627,7 +10113,7 @@
       </p:sp>
       <p:sp>
         <p:nvSpPr>
-          <p:cNvPr id="22" name="Text 20"/>
+          <p:cNvPr id="18" name="Text 16"/>
           <p:cNvSpPr/>
           <p:nvPr/>
         </p:nvSpPr>
@@ -11160,20 +10646,20 @@
         </p:nvSpPr>
         <p:spPr>
           <a:xfrm>
-            <a:off x="7635240" y="3730752"/>
-            <a:ext cx="1033272" cy="749808"/>
+            <a:off x="7909560" y="3675888"/>
+            <a:ext cx="3154680" cy="1691640"/>
           </a:xfrm>
           <a:prstGeom prst="roundRect">
             <a:avLst>
-              <a:gd name="adj" fmla="val 14634"/>
+              <a:gd name="adj" fmla="val 6486"/>
             </a:avLst>
           </a:prstGeom>
           <a:solidFill>
-            <a:srgbClr val="0068B7"/>
+            <a:srgbClr val="FFFFFF"/>
           </a:solidFill>
           <a:ln w="12700">
             <a:solidFill>
-              <a:srgbClr val="0068B7"/>
+              <a:srgbClr val="B9D7E6"/>
             </a:solidFill>
             <a:prstDash val="solid"/>
           </a:ln>
@@ -11187,172 +10673,100 @@
         </p:nvSpPr>
         <p:spPr>
           <a:xfrm>
-            <a:off x="7708392" y="3922776"/>
-            <a:ext cx="886968" cy="310896"/>
-          </a:xfrm>
-          <a:prstGeom prst="rect">
-            <a:avLst/>
-          </a:prstGeom>
-          <a:noFill/>
-          <a:ln/>
-        </p:spPr>
-        <p:txBody>
-          <a:bodyPr wrap="square" lIns="0" tIns="0" rIns="0" bIns="0" rtlCol="0" anchor="ctr">
+            <a:off x="8074152" y="3822192"/>
+            <a:ext cx="2825496" cy="256032"/>
+          </a:xfrm>
+          <a:prstGeom prst="rect">
+            <a:avLst/>
+          </a:prstGeom>
+          <a:noFill/>
+          <a:ln/>
+        </p:spPr>
+        <p:txBody>
+          <a:bodyPr wrap="square" lIns="0" tIns="0" rIns="0" bIns="0" rtlCol="0" anchor="ctr"/>
+          <a:lstStyle/>
+          <a:p>
+            <a:pPr indent="0" marL="0">
+              <a:buNone/>
+            </a:pPr>
+            <a:r>
+              <a:rPr lang="en-US" sz="1300" b="1" dirty="0">
+                <a:solidFill>
+                  <a:srgbClr val="0068B7"/>
+                </a:solidFill>
+                <a:latin typeface="Aptos" pitchFamily="34" charset="0"/>
+                <a:ea typeface="Aptos" pitchFamily="34" charset="-122"/>
+                <a:cs typeface="Aptos" pitchFamily="34" charset="-120"/>
+              </a:rPr>
+              <a:t>Learning sequence</a:t>
+            </a:r>
+            <a:endParaRPr lang="en-US" sz="1300" dirty="0"/>
+          </a:p>
+        </p:txBody>
+      </p:sp>
+      <p:sp>
+        <p:nvSpPr>
+          <p:cNvPr id="15" name="Text 13"/>
+          <p:cNvSpPr/>
+          <p:nvPr/>
+        </p:nvSpPr>
+        <p:spPr>
+          <a:xfrm>
+            <a:off x="8092440" y="4187952"/>
+            <a:ext cx="2770632" cy="1033272"/>
+          </a:xfrm>
+          <a:prstGeom prst="rect">
+            <a:avLst/>
+          </a:prstGeom>
+          <a:noFill/>
+          <a:ln/>
+        </p:spPr>
+        <p:txBody>
+          <a:bodyPr wrap="square" lIns="254" tIns="254" rIns="254" bIns="254" rtlCol="0" anchor="t">
             <a:normAutofit/>
           </a:bodyPr>
           <a:lstStyle/>
           <a:p>
-            <a:pPr algn="ctr" indent="0" marL="0">
-              <a:buNone/>
-            </a:pPr>
-            <a:r>
-              <a:rPr lang="en-US" sz="1500" b="1" dirty="0">
-                <a:solidFill>
-                  <a:srgbClr val="FFFFFF"/>
-                </a:solidFill>
-                <a:latin typeface="Aptos" pitchFamily="34" charset="0"/>
-                <a:ea typeface="Aptos" pitchFamily="34" charset="-122"/>
-                <a:cs typeface="Aptos" pitchFamily="34" charset="-120"/>
-              </a:rPr>
-              <a:t>Learn</a:t>
-            </a:r>
-            <a:endParaRPr lang="en-US" sz="1500" dirty="0"/>
-          </a:p>
-        </p:txBody>
-      </p:sp>
-      <p:sp>
-        <p:nvSpPr>
-          <p:cNvPr id="15" name="Shape 13"/>
-          <p:cNvSpPr/>
-          <p:nvPr/>
-        </p:nvSpPr>
-        <p:spPr>
-          <a:xfrm>
-            <a:off x="8924544" y="3730752"/>
-            <a:ext cx="1033272" cy="749808"/>
-          </a:xfrm>
-          <a:prstGeom prst="roundRect">
-            <a:avLst>
-              <a:gd name="adj" fmla="val 14634"/>
-            </a:avLst>
-          </a:prstGeom>
-          <a:solidFill>
-            <a:srgbClr val="2F8A28"/>
-          </a:solidFill>
-          <a:ln w="12700">
-            <a:solidFill>
-              <a:srgbClr val="2F8A28"/>
-            </a:solidFill>
-            <a:prstDash val="solid"/>
-          </a:ln>
-        </p:spPr>
-      </p:sp>
-      <p:sp>
-        <p:nvSpPr>
-          <p:cNvPr id="16" name="Text 14"/>
-          <p:cNvSpPr/>
-          <p:nvPr/>
-        </p:nvSpPr>
-        <p:spPr>
-          <a:xfrm>
-            <a:off x="8997696" y="3922776"/>
-            <a:ext cx="886968" cy="310896"/>
-          </a:xfrm>
-          <a:prstGeom prst="rect">
-            <a:avLst/>
-          </a:prstGeom>
-          <a:noFill/>
-          <a:ln/>
-        </p:spPr>
-        <p:txBody>
-          <a:bodyPr wrap="square" lIns="0" tIns="0" rIns="0" bIns="0" rtlCol="0" anchor="ctr">
-            <a:normAutofit/>
-          </a:bodyPr>
-          <a:lstStyle/>
-          <a:p>
-            <a:pPr algn="ctr" indent="0" marL="0">
-              <a:buNone/>
-            </a:pPr>
-            <a:r>
-              <a:rPr lang="en-US" sz="1500" b="1" dirty="0">
-                <a:solidFill>
-                  <a:srgbClr val="FFFFFF"/>
-                </a:solidFill>
-                <a:latin typeface="Aptos" pitchFamily="34" charset="0"/>
-                <a:ea typeface="Aptos" pitchFamily="34" charset="-122"/>
-                <a:cs typeface="Aptos" pitchFamily="34" charset="-120"/>
-              </a:rPr>
-              <a:t>Apply</a:t>
-            </a:r>
-            <a:endParaRPr lang="en-US" sz="1500" dirty="0"/>
-          </a:p>
-        </p:txBody>
-      </p:sp>
-      <p:sp>
-        <p:nvSpPr>
-          <p:cNvPr id="17" name="Shape 15"/>
-          <p:cNvSpPr/>
-          <p:nvPr/>
-        </p:nvSpPr>
-        <p:spPr>
-          <a:xfrm>
-            <a:off x="10213848" y="3730752"/>
-            <a:ext cx="1033272" cy="749808"/>
-          </a:xfrm>
-          <a:prstGeom prst="roundRect">
-            <a:avLst>
-              <a:gd name="adj" fmla="val 14634"/>
-            </a:avLst>
-          </a:prstGeom>
-          <a:solidFill>
-            <a:srgbClr val="6A4CA3"/>
-          </a:solidFill>
-          <a:ln w="12700">
-            <a:solidFill>
-              <a:srgbClr val="6A4CA3"/>
-            </a:solidFill>
-            <a:prstDash val="solid"/>
-          </a:ln>
-        </p:spPr>
-      </p:sp>
-      <p:sp>
-        <p:nvSpPr>
-          <p:cNvPr id="18" name="Text 16"/>
-          <p:cNvSpPr/>
-          <p:nvPr/>
-        </p:nvSpPr>
-        <p:spPr>
-          <a:xfrm>
-            <a:off x="10287000" y="3922776"/>
-            <a:ext cx="886968" cy="310896"/>
-          </a:xfrm>
-          <a:prstGeom prst="rect">
-            <a:avLst/>
-          </a:prstGeom>
-          <a:noFill/>
-          <a:ln/>
-        </p:spPr>
-        <p:txBody>
-          <a:bodyPr wrap="square" lIns="0" tIns="0" rIns="0" bIns="0" rtlCol="0" anchor="ctr">
-            <a:normAutofit/>
-          </a:bodyPr>
-          <a:lstStyle/>
-          <a:p>
-            <a:pPr algn="ctr" indent="0" marL="0">
-              <a:buNone/>
-            </a:pPr>
-            <a:r>
-              <a:rPr lang="en-US" sz="1500" b="1" dirty="0">
-                <a:solidFill>
-                  <a:srgbClr val="FFFFFF"/>
-                </a:solidFill>
-                <a:latin typeface="Aptos" pitchFamily="34" charset="0"/>
-                <a:ea typeface="Aptos" pitchFamily="34" charset="-122"/>
-                <a:cs typeface="Aptos" pitchFamily="34" charset="-120"/>
-              </a:rPr>
-              <a:t>Document</a:t>
-            </a:r>
-            <a:endParaRPr lang="en-US" sz="1500" dirty="0"/>
+            <a:r>
+              <a:rPr lang="en-US" sz="1380" dirty="0">
+                <a:solidFill>
+                  <a:srgbClr val="17364A"/>
+                </a:solidFill>
+                <a:latin typeface="Aptos" pitchFamily="34" charset="0"/>
+                <a:ea typeface="Aptos" pitchFamily="34" charset="-122"/>
+                <a:cs typeface="Aptos" pitchFamily="34" charset="-120"/>
+              </a:rPr>
+              <a:t>Read the module for shared vocabulary and context.</a:t>
+            </a:r>
+            <a:endParaRPr lang="en-US" sz="1380" dirty="0"/>
+          </a:p>
+          <a:p>
+            <a:r>
+              <a:rPr lang="en-US" sz="1380" dirty="0">
+                <a:solidFill>
+                  <a:srgbClr val="17364A"/>
+                </a:solidFill>
+                <a:latin typeface="Aptos" pitchFamily="34" charset="0"/>
+                <a:ea typeface="Aptos" pitchFamily="34" charset="-122"/>
+                <a:cs typeface="Aptos" pitchFamily="34" charset="-120"/>
+              </a:rPr>
+              <a:t>Complete the practical exercise to apply the concept.</a:t>
+            </a:r>
+            <a:endParaRPr lang="en-US" sz="1380" dirty="0"/>
+          </a:p>
+          <a:p>
+            <a:r>
+              <a:rPr lang="en-US" sz="1380" dirty="0">
+                <a:solidFill>
+                  <a:srgbClr val="17364A"/>
+                </a:solidFill>
+                <a:latin typeface="Aptos" pitchFamily="34" charset="0"/>
+                <a:ea typeface="Aptos" pitchFamily="34" charset="-122"/>
+                <a:cs typeface="Aptos" pitchFamily="34" charset="-120"/>
+              </a:rPr>
+              <a:t>Use the notes and references for deeper review.</a:t>
+            </a:r>
+            <a:endParaRPr lang="en-US" sz="1380" dirty="0"/>
           </a:p>
         </p:txBody>
       </p:sp>
@@ -11825,13 +11239,11 @@
             </a:avLst>
           </a:prstGeom>
           <a:solidFill>
-            <a:srgbClr val="FFFFFF">
-              <a:alpha val="88000"/>
-            </a:srgbClr>
+            <a:srgbClr val="FFFFFF"/>
           </a:solidFill>
           <a:ln w="12700">
             <a:solidFill>
-              <a:srgbClr val="D6E8F2"/>
+              <a:srgbClr val="B9D7E6"/>
             </a:solidFill>
             <a:prstDash val="solid"/>
           </a:ln>
@@ -11839,169 +11251,112 @@
       </p:sp>
       <p:sp>
         <p:nvSpPr>
-          <p:cNvPr id="14" name="Shape 12"/>
-          <p:cNvSpPr/>
-          <p:nvPr/>
-        </p:nvSpPr>
-        <p:spPr>
-          <a:xfrm>
-            <a:off x="8138160" y="3474720"/>
-            <a:ext cx="256032" cy="411480"/>
-          </a:xfrm>
-          <a:prstGeom prst="rect">
-            <a:avLst/>
-          </a:prstGeom>
-          <a:solidFill>
-            <a:srgbClr val="0068B7"/>
-          </a:solidFill>
-          <a:ln w="12700">
-            <a:solidFill>
-              <a:srgbClr val="0068B7"/>
-            </a:solidFill>
-            <a:prstDash val="solid"/>
-          </a:ln>
-        </p:spPr>
-      </p:sp>
-      <p:sp>
-        <p:nvSpPr>
-          <p:cNvPr id="15" name="Shape 13"/>
-          <p:cNvSpPr/>
-          <p:nvPr/>
-        </p:nvSpPr>
-        <p:spPr>
-          <a:xfrm>
-            <a:off x="8577072" y="3172968"/>
-            <a:ext cx="256032" cy="713232"/>
-          </a:xfrm>
-          <a:prstGeom prst="rect">
-            <a:avLst/>
-          </a:prstGeom>
-          <a:solidFill>
-            <a:srgbClr val="2F8A28"/>
-          </a:solidFill>
-          <a:ln w="12700">
-            <a:solidFill>
-              <a:srgbClr val="2F8A28"/>
-            </a:solidFill>
-            <a:prstDash val="solid"/>
-          </a:ln>
-        </p:spPr>
+          <p:cNvPr id="14" name="Text 12"/>
+          <p:cNvSpPr/>
+          <p:nvPr/>
+        </p:nvSpPr>
+        <p:spPr>
+          <a:xfrm>
+            <a:off x="7799832" y="2935224"/>
+            <a:ext cx="3145536" cy="256032"/>
+          </a:xfrm>
+          <a:prstGeom prst="rect">
+            <a:avLst/>
+          </a:prstGeom>
+          <a:noFill/>
+          <a:ln/>
+        </p:spPr>
+        <p:txBody>
+          <a:bodyPr wrap="square" lIns="0" tIns="0" rIns="0" bIns="0" rtlCol="0" anchor="ctr"/>
+          <a:lstStyle/>
+          <a:p>
+            <a:pPr indent="0" marL="0">
+              <a:buNone/>
+            </a:pPr>
+            <a:r>
+              <a:rPr lang="en-US" sz="1300" b="1" dirty="0">
+                <a:solidFill>
+                  <a:srgbClr val="0068B7"/>
+                </a:solidFill>
+                <a:latin typeface="Aptos" pitchFamily="34" charset="0"/>
+                <a:ea typeface="Aptos" pitchFamily="34" charset="-122"/>
+                <a:cs typeface="Aptos" pitchFamily="34" charset="-120"/>
+              </a:rPr>
+              <a:t>Concept checkpoints</a:t>
+            </a:r>
+            <a:endParaRPr lang="en-US" sz="1300" dirty="0"/>
+          </a:p>
+        </p:txBody>
+      </p:sp>
+      <p:sp>
+        <p:nvSpPr>
+          <p:cNvPr id="15" name="Text 13"/>
+          <p:cNvSpPr/>
+          <p:nvPr/>
+        </p:nvSpPr>
+        <p:spPr>
+          <a:xfrm>
+            <a:off x="7818120" y="3300984"/>
+            <a:ext cx="3090672" cy="877824"/>
+          </a:xfrm>
+          <a:prstGeom prst="rect">
+            <a:avLst/>
+          </a:prstGeom>
+          <a:noFill/>
+          <a:ln/>
+        </p:spPr>
+        <p:txBody>
+          <a:bodyPr wrap="square" lIns="254" tIns="254" rIns="254" bIns="254" rtlCol="0" anchor="t">
+            <a:normAutofit/>
+          </a:bodyPr>
+          <a:lstStyle/>
+          <a:p>
+            <a:r>
+              <a:rPr lang="en-US" sz="1380" dirty="0">
+                <a:solidFill>
+                  <a:srgbClr val="17364A"/>
+                </a:solidFill>
+                <a:latin typeface="Aptos" pitchFamily="34" charset="0"/>
+                <a:ea typeface="Aptos" pitchFamily="34" charset="-122"/>
+                <a:cs typeface="Aptos" pitchFamily="34" charset="-120"/>
+              </a:rPr>
+              <a:t>The evidence should also include a short readiness memo that identifies technical.</a:t>
+            </a:r>
+            <a:endParaRPr lang="en-US" sz="1380" dirty="0"/>
+          </a:p>
+          <a:p>
+            <a:r>
+              <a:rPr lang="en-US" sz="1380" dirty="0">
+                <a:solidFill>
+                  <a:srgbClr val="17364A"/>
+                </a:solidFill>
+                <a:latin typeface="Aptos" pitchFamily="34" charset="0"/>
+                <a:ea typeface="Aptos" pitchFamily="34" charset="-122"/>
+                <a:cs typeface="Aptos" pitchFamily="34" charset="-120"/>
+              </a:rPr>
+              <a:t>A strong completion artifact should be specific enough to support governance review,.</a:t>
+            </a:r>
+            <a:endParaRPr lang="en-US" sz="1380" dirty="0"/>
+          </a:p>
+          <a:p>
+            <a:r>
+              <a:rPr lang="en-US" sz="1380" dirty="0">
+                <a:solidFill>
+                  <a:srgbClr val="17364A"/>
+                </a:solidFill>
+                <a:latin typeface="Aptos" pitchFamily="34" charset="0"/>
+                <a:ea typeface="Aptos" pitchFamily="34" charset="-122"/>
+                <a:cs typeface="Aptos" pitchFamily="34" charset="-120"/>
+              </a:rPr>
+              <a:t>It should not simply state that AI may be useful.</a:t>
+            </a:r>
+            <a:endParaRPr lang="en-US" sz="1380" dirty="0"/>
+          </a:p>
+        </p:txBody>
       </p:sp>
       <p:sp>
         <p:nvSpPr>
           <p:cNvPr id="16" name="Shape 14"/>
-          <p:cNvSpPr/>
-          <p:nvPr/>
-        </p:nvSpPr>
-        <p:spPr>
-          <a:xfrm>
-            <a:off x="9015984" y="2880360"/>
-            <a:ext cx="256032" cy="1005840"/>
-          </a:xfrm>
-          <a:prstGeom prst="rect">
-            <a:avLst/>
-          </a:prstGeom>
-          <a:solidFill>
-            <a:srgbClr val="D69A2D"/>
-          </a:solidFill>
-          <a:ln w="12700">
-            <a:solidFill>
-              <a:srgbClr val="D69A2D"/>
-            </a:solidFill>
-            <a:prstDash val="solid"/>
-          </a:ln>
-        </p:spPr>
-      </p:sp>
-      <p:sp>
-        <p:nvSpPr>
-          <p:cNvPr id="17" name="Shape 15"/>
-          <p:cNvSpPr/>
-          <p:nvPr/>
-        </p:nvSpPr>
-        <p:spPr>
-          <a:xfrm>
-            <a:off x="9454896" y="3319272"/>
-            <a:ext cx="256032" cy="566928"/>
-          </a:xfrm>
-          <a:prstGeom prst="rect">
-            <a:avLst/>
-          </a:prstGeom>
-          <a:solidFill>
-            <a:srgbClr val="6A4CA3"/>
-          </a:solidFill>
-          <a:ln w="12700">
-            <a:solidFill>
-              <a:srgbClr val="6A4CA3"/>
-            </a:solidFill>
-            <a:prstDash val="solid"/>
-          </a:ln>
-        </p:spPr>
-      </p:sp>
-      <p:sp>
-        <p:nvSpPr>
-          <p:cNvPr id="18" name="Shape 16"/>
-          <p:cNvSpPr/>
-          <p:nvPr/>
-        </p:nvSpPr>
-        <p:spPr>
-          <a:xfrm>
-            <a:off x="8019288" y="3886200"/>
-            <a:ext cx="2706624" cy="0"/>
-          </a:xfrm>
-          <a:prstGeom prst="line">
-            <a:avLst/>
-          </a:prstGeom>
-          <a:noFill/>
-          <a:ln w="15240">
-            <a:solidFill>
-              <a:srgbClr val="003A63"/>
-            </a:solidFill>
-            <a:prstDash val="solid"/>
-          </a:ln>
-        </p:spPr>
-      </p:sp>
-      <p:sp>
-        <p:nvSpPr>
-          <p:cNvPr id="19" name="Text 17"/>
-          <p:cNvSpPr/>
-          <p:nvPr/>
-        </p:nvSpPr>
-        <p:spPr>
-          <a:xfrm>
-            <a:off x="7863840" y="3017520"/>
-            <a:ext cx="3017520" cy="201168"/>
-          </a:xfrm>
-          <a:prstGeom prst="rect">
-            <a:avLst/>
-          </a:prstGeom>
-          <a:noFill/>
-          <a:ln/>
-        </p:spPr>
-        <p:txBody>
-          <a:bodyPr wrap="square" lIns="0" tIns="0" rIns="0" bIns="0" rtlCol="0" anchor="ctr"/>
-          <a:lstStyle/>
-          <a:p>
-            <a:pPr algn="ctr" indent="0" marL="0">
-              <a:buNone/>
-            </a:pPr>
-            <a:r>
-              <a:rPr lang="en-US" sz="1050" b="1" dirty="0">
-                <a:solidFill>
-                  <a:srgbClr val="003A63"/>
-                </a:solidFill>
-                <a:latin typeface="Aptos" pitchFamily="34" charset="0"/>
-                <a:ea typeface="Aptos" pitchFamily="34" charset="-122"/>
-                <a:cs typeface="Aptos" pitchFamily="34" charset="-120"/>
-              </a:rPr>
-              <a:t>Measure and monitor</a:t>
-            </a:r>
-            <a:endParaRPr lang="en-US" sz="1050" dirty="0"/>
-          </a:p>
-        </p:txBody>
-      </p:sp>
-      <p:sp>
-        <p:nvSpPr>
-          <p:cNvPr id="20" name="Shape 18"/>
           <p:cNvSpPr/>
           <p:nvPr/>
         </p:nvSpPr>
@@ -12028,7 +11383,7 @@
       </p:sp>
       <p:sp>
         <p:nvSpPr>
-          <p:cNvPr id="21" name="Text 19"/>
+          <p:cNvPr id="17" name="Text 15"/>
           <p:cNvSpPr/>
           <p:nvPr/>
         </p:nvSpPr>
@@ -12067,7 +11422,7 @@
       </p:sp>
       <p:sp>
         <p:nvSpPr>
-          <p:cNvPr id="22" name="Text 20"/>
+          <p:cNvPr id="18" name="Text 16"/>
           <p:cNvSpPr/>
           <p:nvPr/>
         </p:nvSpPr>
@@ -12561,13 +11916,11 @@
             </a:avLst>
           </a:prstGeom>
           <a:solidFill>
-            <a:srgbClr val="FFFFFF">
-              <a:alpha val="88000"/>
-            </a:srgbClr>
+            <a:srgbClr val="FFFFFF"/>
           </a:solidFill>
           <a:ln w="12700">
             <a:solidFill>
-              <a:srgbClr val="D6E8F2"/>
+              <a:srgbClr val="B9D7E6"/>
             </a:solidFill>
             <a:prstDash val="solid"/>
           </a:ln>
@@ -12575,169 +11928,112 @@
       </p:sp>
       <p:sp>
         <p:nvSpPr>
-          <p:cNvPr id="14" name="Shape 12"/>
-          <p:cNvSpPr/>
-          <p:nvPr/>
-        </p:nvSpPr>
-        <p:spPr>
-          <a:xfrm>
-            <a:off x="8138160" y="3474720"/>
-            <a:ext cx="256032" cy="411480"/>
-          </a:xfrm>
-          <a:prstGeom prst="rect">
-            <a:avLst/>
-          </a:prstGeom>
-          <a:solidFill>
-            <a:srgbClr val="0068B7"/>
-          </a:solidFill>
-          <a:ln w="12700">
-            <a:solidFill>
-              <a:srgbClr val="0068B7"/>
-            </a:solidFill>
-            <a:prstDash val="solid"/>
-          </a:ln>
-        </p:spPr>
-      </p:sp>
-      <p:sp>
-        <p:nvSpPr>
-          <p:cNvPr id="15" name="Shape 13"/>
-          <p:cNvSpPr/>
-          <p:nvPr/>
-        </p:nvSpPr>
-        <p:spPr>
-          <a:xfrm>
-            <a:off x="8577072" y="3172968"/>
-            <a:ext cx="256032" cy="713232"/>
-          </a:xfrm>
-          <a:prstGeom prst="rect">
-            <a:avLst/>
-          </a:prstGeom>
-          <a:solidFill>
-            <a:srgbClr val="2F8A28"/>
-          </a:solidFill>
-          <a:ln w="12700">
-            <a:solidFill>
-              <a:srgbClr val="2F8A28"/>
-            </a:solidFill>
-            <a:prstDash val="solid"/>
-          </a:ln>
-        </p:spPr>
+          <p:cNvPr id="14" name="Text 12"/>
+          <p:cNvSpPr/>
+          <p:nvPr/>
+        </p:nvSpPr>
+        <p:spPr>
+          <a:xfrm>
+            <a:off x="7799832" y="2935224"/>
+            <a:ext cx="3145536" cy="256032"/>
+          </a:xfrm>
+          <a:prstGeom prst="rect">
+            <a:avLst/>
+          </a:prstGeom>
+          <a:noFill/>
+          <a:ln/>
+        </p:spPr>
+        <p:txBody>
+          <a:bodyPr wrap="square" lIns="0" tIns="0" rIns="0" bIns="0" rtlCol="0" anchor="ctr"/>
+          <a:lstStyle/>
+          <a:p>
+            <a:pPr indent="0" marL="0">
+              <a:buNone/>
+            </a:pPr>
+            <a:r>
+              <a:rPr lang="en-US" sz="1300" b="1" dirty="0">
+                <a:solidFill>
+                  <a:srgbClr val="0068B7"/>
+                </a:solidFill>
+                <a:latin typeface="Aptos" pitchFamily="34" charset="0"/>
+                <a:ea typeface="Aptos" pitchFamily="34" charset="-122"/>
+                <a:cs typeface="Aptos" pitchFamily="34" charset="-120"/>
+              </a:rPr>
+              <a:t>Concept checkpoints</a:t>
+            </a:r>
+            <a:endParaRPr lang="en-US" sz="1300" dirty="0"/>
+          </a:p>
+        </p:txBody>
+      </p:sp>
+      <p:sp>
+        <p:nvSpPr>
+          <p:cNvPr id="15" name="Text 13"/>
+          <p:cNvSpPr/>
+          <p:nvPr/>
+        </p:nvSpPr>
+        <p:spPr>
+          <a:xfrm>
+            <a:off x="7818120" y="3300984"/>
+            <a:ext cx="3090672" cy="877824"/>
+          </a:xfrm>
+          <a:prstGeom prst="rect">
+            <a:avLst/>
+          </a:prstGeom>
+          <a:noFill/>
+          <a:ln/>
+        </p:spPr>
+        <p:txBody>
+          <a:bodyPr wrap="square" lIns="254" tIns="254" rIns="254" bIns="254" rtlCol="0" anchor="t">
+            <a:normAutofit/>
+          </a:bodyPr>
+          <a:lstStyle/>
+          <a:p>
+            <a:r>
+              <a:rPr lang="en-US" sz="1380" dirty="0">
+                <a:solidFill>
+                  <a:srgbClr val="17364A"/>
+                </a:solidFill>
+                <a:latin typeface="Aptos" pitchFamily="34" charset="0"/>
+                <a:ea typeface="Aptos" pitchFamily="34" charset="-122"/>
+                <a:cs typeface="Aptos" pitchFamily="34" charset="-120"/>
+              </a:rPr>
+              <a:t>The expected artifact is an AI-enabled workflow architecture map.</a:t>
+            </a:r>
+            <a:endParaRPr lang="en-US" sz="1380" dirty="0"/>
+          </a:p>
+          <a:p>
+            <a:r>
+              <a:rPr lang="en-US" sz="1380" dirty="0">
+                <a:solidFill>
+                  <a:srgbClr val="17364A"/>
+                </a:solidFill>
+                <a:latin typeface="Aptos" pitchFamily="34" charset="0"/>
+                <a:ea typeface="Aptos" pitchFamily="34" charset="-122"/>
+                <a:cs typeface="Aptos" pitchFamily="34" charset="-120"/>
+              </a:rPr>
+              <a:t>The evidence should also include a short readiness memo that identifies technical.</a:t>
+            </a:r>
+            <a:endParaRPr lang="en-US" sz="1380" dirty="0"/>
+          </a:p>
+          <a:p>
+            <a:r>
+              <a:rPr lang="en-US" sz="1380" dirty="0">
+                <a:solidFill>
+                  <a:srgbClr val="17364A"/>
+                </a:solidFill>
+                <a:latin typeface="Aptos" pitchFamily="34" charset="0"/>
+                <a:ea typeface="Aptos" pitchFamily="34" charset="-122"/>
+                <a:cs typeface="Aptos" pitchFamily="34" charset="-120"/>
+              </a:rPr>
+              <a:t>A strong completion artifact should be specific enough to support governance review,.</a:t>
+            </a:r>
+            <a:endParaRPr lang="en-US" sz="1380" dirty="0"/>
+          </a:p>
+        </p:txBody>
       </p:sp>
       <p:sp>
         <p:nvSpPr>
           <p:cNvPr id="16" name="Shape 14"/>
-          <p:cNvSpPr/>
-          <p:nvPr/>
-        </p:nvSpPr>
-        <p:spPr>
-          <a:xfrm>
-            <a:off x="9015984" y="2880360"/>
-            <a:ext cx="256032" cy="1005840"/>
-          </a:xfrm>
-          <a:prstGeom prst="rect">
-            <a:avLst/>
-          </a:prstGeom>
-          <a:solidFill>
-            <a:srgbClr val="D69A2D"/>
-          </a:solidFill>
-          <a:ln w="12700">
-            <a:solidFill>
-              <a:srgbClr val="D69A2D"/>
-            </a:solidFill>
-            <a:prstDash val="solid"/>
-          </a:ln>
-        </p:spPr>
-      </p:sp>
-      <p:sp>
-        <p:nvSpPr>
-          <p:cNvPr id="17" name="Shape 15"/>
-          <p:cNvSpPr/>
-          <p:nvPr/>
-        </p:nvSpPr>
-        <p:spPr>
-          <a:xfrm>
-            <a:off x="9454896" y="3319272"/>
-            <a:ext cx="256032" cy="566928"/>
-          </a:xfrm>
-          <a:prstGeom prst="rect">
-            <a:avLst/>
-          </a:prstGeom>
-          <a:solidFill>
-            <a:srgbClr val="6A4CA3"/>
-          </a:solidFill>
-          <a:ln w="12700">
-            <a:solidFill>
-              <a:srgbClr val="6A4CA3"/>
-            </a:solidFill>
-            <a:prstDash val="solid"/>
-          </a:ln>
-        </p:spPr>
-      </p:sp>
-      <p:sp>
-        <p:nvSpPr>
-          <p:cNvPr id="18" name="Shape 16"/>
-          <p:cNvSpPr/>
-          <p:nvPr/>
-        </p:nvSpPr>
-        <p:spPr>
-          <a:xfrm>
-            <a:off x="8019288" y="3886200"/>
-            <a:ext cx="2706624" cy="0"/>
-          </a:xfrm>
-          <a:prstGeom prst="line">
-            <a:avLst/>
-          </a:prstGeom>
-          <a:noFill/>
-          <a:ln w="15240">
-            <a:solidFill>
-              <a:srgbClr val="003A63"/>
-            </a:solidFill>
-            <a:prstDash val="solid"/>
-          </a:ln>
-        </p:spPr>
-      </p:sp>
-      <p:sp>
-        <p:nvSpPr>
-          <p:cNvPr id="19" name="Text 17"/>
-          <p:cNvSpPr/>
-          <p:nvPr/>
-        </p:nvSpPr>
-        <p:spPr>
-          <a:xfrm>
-            <a:off x="7863840" y="3017520"/>
-            <a:ext cx="3017520" cy="201168"/>
-          </a:xfrm>
-          <a:prstGeom prst="rect">
-            <a:avLst/>
-          </a:prstGeom>
-          <a:noFill/>
-          <a:ln/>
-        </p:spPr>
-        <p:txBody>
-          <a:bodyPr wrap="square" lIns="0" tIns="0" rIns="0" bIns="0" rtlCol="0" anchor="ctr"/>
-          <a:lstStyle/>
-          <a:p>
-            <a:pPr algn="ctr" indent="0" marL="0">
-              <a:buNone/>
-            </a:pPr>
-            <a:r>
-              <a:rPr lang="en-US" sz="1050" b="1" dirty="0">
-                <a:solidFill>
-                  <a:srgbClr val="003A63"/>
-                </a:solidFill>
-                <a:latin typeface="Aptos" pitchFamily="34" charset="0"/>
-                <a:ea typeface="Aptos" pitchFamily="34" charset="-122"/>
-                <a:cs typeface="Aptos" pitchFamily="34" charset="-120"/>
-              </a:rPr>
-              <a:t>Measure and monitor</a:t>
-            </a:r>
-            <a:endParaRPr lang="en-US" sz="1050" dirty="0"/>
-          </a:p>
-        </p:txBody>
-      </p:sp>
-      <p:sp>
-        <p:nvSpPr>
-          <p:cNvPr id="20" name="Shape 18"/>
           <p:cNvSpPr/>
           <p:nvPr/>
         </p:nvSpPr>
@@ -12764,7 +12060,7 @@
       </p:sp>
       <p:sp>
         <p:nvSpPr>
-          <p:cNvPr id="21" name="Text 19"/>
+          <p:cNvPr id="17" name="Text 15"/>
           <p:cNvSpPr/>
           <p:nvPr/>
         </p:nvSpPr>
@@ -12803,7 +12099,7 @@
       </p:sp>
       <p:sp>
         <p:nvSpPr>
-          <p:cNvPr id="22" name="Text 20"/>
+          <p:cNvPr id="18" name="Text 16"/>
           <p:cNvSpPr/>
           <p:nvPr/>
         </p:nvSpPr>
@@ -13311,13 +12607,11 @@
             </a:avLst>
           </a:prstGeom>
           <a:solidFill>
-            <a:srgbClr val="FFFFFF">
-              <a:alpha val="88000"/>
-            </a:srgbClr>
+            <a:srgbClr val="FFFFFF"/>
           </a:solidFill>
           <a:ln w="12700">
             <a:solidFill>
-              <a:srgbClr val="D6E8F2"/>
+              <a:srgbClr val="B9D7E6"/>
             </a:solidFill>
             <a:prstDash val="solid"/>
           </a:ln>
@@ -13325,169 +12619,112 @@
       </p:sp>
       <p:sp>
         <p:nvSpPr>
-          <p:cNvPr id="14" name="Shape 12"/>
-          <p:cNvSpPr/>
-          <p:nvPr/>
-        </p:nvSpPr>
-        <p:spPr>
-          <a:xfrm>
-            <a:off x="8138160" y="3474720"/>
-            <a:ext cx="256032" cy="411480"/>
-          </a:xfrm>
-          <a:prstGeom prst="rect">
-            <a:avLst/>
-          </a:prstGeom>
-          <a:solidFill>
-            <a:srgbClr val="0068B7"/>
-          </a:solidFill>
-          <a:ln w="12700">
-            <a:solidFill>
-              <a:srgbClr val="0068B7"/>
-            </a:solidFill>
-            <a:prstDash val="solid"/>
-          </a:ln>
-        </p:spPr>
-      </p:sp>
-      <p:sp>
-        <p:nvSpPr>
-          <p:cNvPr id="15" name="Shape 13"/>
-          <p:cNvSpPr/>
-          <p:nvPr/>
-        </p:nvSpPr>
-        <p:spPr>
-          <a:xfrm>
-            <a:off x="8577072" y="3172968"/>
-            <a:ext cx="256032" cy="713232"/>
-          </a:xfrm>
-          <a:prstGeom prst="rect">
-            <a:avLst/>
-          </a:prstGeom>
-          <a:solidFill>
-            <a:srgbClr val="2F8A28"/>
-          </a:solidFill>
-          <a:ln w="12700">
-            <a:solidFill>
-              <a:srgbClr val="2F8A28"/>
-            </a:solidFill>
-            <a:prstDash val="solid"/>
-          </a:ln>
-        </p:spPr>
+          <p:cNvPr id="14" name="Text 12"/>
+          <p:cNvSpPr/>
+          <p:nvPr/>
+        </p:nvSpPr>
+        <p:spPr>
+          <a:xfrm>
+            <a:off x="7799832" y="2935224"/>
+            <a:ext cx="3145536" cy="256032"/>
+          </a:xfrm>
+          <a:prstGeom prst="rect">
+            <a:avLst/>
+          </a:prstGeom>
+          <a:noFill/>
+          <a:ln/>
+        </p:spPr>
+        <p:txBody>
+          <a:bodyPr wrap="square" lIns="0" tIns="0" rIns="0" bIns="0" rtlCol="0" anchor="ctr"/>
+          <a:lstStyle/>
+          <a:p>
+            <a:pPr indent="0" marL="0">
+              <a:buNone/>
+            </a:pPr>
+            <a:r>
+              <a:rPr lang="en-US" sz="1300" b="1" dirty="0">
+                <a:solidFill>
+                  <a:srgbClr val="0068B7"/>
+                </a:solidFill>
+                <a:latin typeface="Aptos" pitchFamily="34" charset="0"/>
+                <a:ea typeface="Aptos" pitchFamily="34" charset="-122"/>
+                <a:cs typeface="Aptos" pitchFamily="34" charset="-120"/>
+              </a:rPr>
+              <a:t>Concept checkpoints</a:t>
+            </a:r>
+            <a:endParaRPr lang="en-US" sz="1300" dirty="0"/>
+          </a:p>
+        </p:txBody>
+      </p:sp>
+      <p:sp>
+        <p:nvSpPr>
+          <p:cNvPr id="15" name="Text 13"/>
+          <p:cNvSpPr/>
+          <p:nvPr/>
+        </p:nvSpPr>
+        <p:spPr>
+          <a:xfrm>
+            <a:off x="7818120" y="3300984"/>
+            <a:ext cx="3090672" cy="877824"/>
+          </a:xfrm>
+          <a:prstGeom prst="rect">
+            <a:avLst/>
+          </a:prstGeom>
+          <a:noFill/>
+          <a:ln/>
+        </p:spPr>
+        <p:txBody>
+          <a:bodyPr wrap="square" lIns="254" tIns="254" rIns="254" bIns="254" rtlCol="0" anchor="t">
+            <a:normAutofit/>
+          </a:bodyPr>
+          <a:lstStyle/>
+          <a:p>
+            <a:r>
+              <a:rPr lang="en-US" sz="1380" dirty="0">
+                <a:solidFill>
+                  <a:srgbClr val="17364A"/>
+                </a:solidFill>
+                <a:latin typeface="Aptos" pitchFamily="34" charset="0"/>
+                <a:ea typeface="Aptos" pitchFamily="34" charset="-122"/>
+                <a:cs typeface="Aptos" pitchFamily="34" charset="-120"/>
+              </a:rPr>
+              <a:t>1.</a:t>
+            </a:r>
+            <a:endParaRPr lang="en-US" sz="1380" dirty="0"/>
+          </a:p>
+          <a:p>
+            <a:r>
+              <a:rPr lang="en-US" sz="1380" dirty="0">
+                <a:solidFill>
+                  <a:srgbClr val="17364A"/>
+                </a:solidFill>
+                <a:latin typeface="Aptos" pitchFamily="34" charset="0"/>
+                <a:ea typeface="Aptos" pitchFamily="34" charset="-122"/>
+                <a:cs typeface="Aptos" pitchFamily="34" charset="-120"/>
+              </a:rPr>
+              <a:t>Why should AI planning begin with architecture and workflow mapping?</a:t>
+            </a:r>
+            <a:endParaRPr lang="en-US" sz="1380" dirty="0"/>
+          </a:p>
+          <a:p>
+            <a:r>
+              <a:rPr lang="en-US" sz="1380" dirty="0">
+                <a:solidFill>
+                  <a:srgbClr val="17364A"/>
+                </a:solidFill>
+                <a:latin typeface="Aptos" pitchFamily="34" charset="0"/>
+                <a:ea typeface="Aptos" pitchFamily="34" charset="-122"/>
+                <a:cs typeface="Aptos" pitchFamily="34" charset="-120"/>
+              </a:rPr>
+              <a:t>2.</a:t>
+            </a:r>
+            <a:endParaRPr lang="en-US" sz="1380" dirty="0"/>
+          </a:p>
+        </p:txBody>
       </p:sp>
       <p:sp>
         <p:nvSpPr>
           <p:cNvPr id="16" name="Shape 14"/>
-          <p:cNvSpPr/>
-          <p:nvPr/>
-        </p:nvSpPr>
-        <p:spPr>
-          <a:xfrm>
-            <a:off x="9015984" y="2880360"/>
-            <a:ext cx="256032" cy="1005840"/>
-          </a:xfrm>
-          <a:prstGeom prst="rect">
-            <a:avLst/>
-          </a:prstGeom>
-          <a:solidFill>
-            <a:srgbClr val="D69A2D"/>
-          </a:solidFill>
-          <a:ln w="12700">
-            <a:solidFill>
-              <a:srgbClr val="D69A2D"/>
-            </a:solidFill>
-            <a:prstDash val="solid"/>
-          </a:ln>
-        </p:spPr>
-      </p:sp>
-      <p:sp>
-        <p:nvSpPr>
-          <p:cNvPr id="17" name="Shape 15"/>
-          <p:cNvSpPr/>
-          <p:nvPr/>
-        </p:nvSpPr>
-        <p:spPr>
-          <a:xfrm>
-            <a:off x="9454896" y="3319272"/>
-            <a:ext cx="256032" cy="566928"/>
-          </a:xfrm>
-          <a:prstGeom prst="rect">
-            <a:avLst/>
-          </a:prstGeom>
-          <a:solidFill>
-            <a:srgbClr val="6A4CA3"/>
-          </a:solidFill>
-          <a:ln w="12700">
-            <a:solidFill>
-              <a:srgbClr val="6A4CA3"/>
-            </a:solidFill>
-            <a:prstDash val="solid"/>
-          </a:ln>
-        </p:spPr>
-      </p:sp>
-      <p:sp>
-        <p:nvSpPr>
-          <p:cNvPr id="18" name="Shape 16"/>
-          <p:cNvSpPr/>
-          <p:nvPr/>
-        </p:nvSpPr>
-        <p:spPr>
-          <a:xfrm>
-            <a:off x="8019288" y="3886200"/>
-            <a:ext cx="2706624" cy="0"/>
-          </a:xfrm>
-          <a:prstGeom prst="line">
-            <a:avLst/>
-          </a:prstGeom>
-          <a:noFill/>
-          <a:ln w="15240">
-            <a:solidFill>
-              <a:srgbClr val="003A63"/>
-            </a:solidFill>
-            <a:prstDash val="solid"/>
-          </a:ln>
-        </p:spPr>
-      </p:sp>
-      <p:sp>
-        <p:nvSpPr>
-          <p:cNvPr id="19" name="Text 17"/>
-          <p:cNvSpPr/>
-          <p:nvPr/>
-        </p:nvSpPr>
-        <p:spPr>
-          <a:xfrm>
-            <a:off x="7863840" y="3017520"/>
-            <a:ext cx="3017520" cy="201168"/>
-          </a:xfrm>
-          <a:prstGeom prst="rect">
-            <a:avLst/>
-          </a:prstGeom>
-          <a:noFill/>
-          <a:ln/>
-        </p:spPr>
-        <p:txBody>
-          <a:bodyPr wrap="square" lIns="0" tIns="0" rIns="0" bIns="0" rtlCol="0" anchor="ctr"/>
-          <a:lstStyle/>
-          <a:p>
-            <a:pPr algn="ctr" indent="0" marL="0">
-              <a:buNone/>
-            </a:pPr>
-            <a:r>
-              <a:rPr lang="en-US" sz="1050" b="1" dirty="0">
-                <a:solidFill>
-                  <a:srgbClr val="003A63"/>
-                </a:solidFill>
-                <a:latin typeface="Aptos" pitchFamily="34" charset="0"/>
-                <a:ea typeface="Aptos" pitchFamily="34" charset="-122"/>
-                <a:cs typeface="Aptos" pitchFamily="34" charset="-120"/>
-              </a:rPr>
-              <a:t>Measure and monitor</a:t>
-            </a:r>
-            <a:endParaRPr lang="en-US" sz="1050" dirty="0"/>
-          </a:p>
-        </p:txBody>
-      </p:sp>
-      <p:sp>
-        <p:nvSpPr>
-          <p:cNvPr id="20" name="Shape 18"/>
           <p:cNvSpPr/>
           <p:nvPr/>
         </p:nvSpPr>
@@ -13514,7 +12751,7 @@
       </p:sp>
       <p:sp>
         <p:nvSpPr>
-          <p:cNvPr id="21" name="Text 19"/>
+          <p:cNvPr id="17" name="Text 15"/>
           <p:cNvSpPr/>
           <p:nvPr/>
         </p:nvSpPr>
@@ -13553,7 +12790,7 @@
       </p:sp>
       <p:sp>
         <p:nvSpPr>
-          <p:cNvPr id="22" name="Text 20"/>
+          <p:cNvPr id="18" name="Text 16"/>
           <p:cNvSpPr/>
           <p:nvPr/>
         </p:nvSpPr>
@@ -14061,13 +13298,11 @@
             </a:avLst>
           </a:prstGeom>
           <a:solidFill>
-            <a:srgbClr val="FFFFFF">
-              <a:alpha val="88000"/>
-            </a:srgbClr>
+            <a:srgbClr val="FFFFFF"/>
           </a:solidFill>
           <a:ln w="12700">
             <a:solidFill>
-              <a:srgbClr val="D6E8F2"/>
+              <a:srgbClr val="B9D7E6"/>
             </a:solidFill>
             <a:prstDash val="solid"/>
           </a:ln>
@@ -14075,169 +13310,98 @@
       </p:sp>
       <p:sp>
         <p:nvSpPr>
-          <p:cNvPr id="14" name="Shape 12"/>
-          <p:cNvSpPr/>
-          <p:nvPr/>
-        </p:nvSpPr>
-        <p:spPr>
-          <a:xfrm>
-            <a:off x="8138160" y="3474720"/>
-            <a:ext cx="256032" cy="411480"/>
-          </a:xfrm>
-          <a:prstGeom prst="rect">
-            <a:avLst/>
-          </a:prstGeom>
-          <a:solidFill>
-            <a:srgbClr val="0068B7"/>
-          </a:solidFill>
-          <a:ln w="12700">
-            <a:solidFill>
-              <a:srgbClr val="0068B7"/>
-            </a:solidFill>
-            <a:prstDash val="solid"/>
-          </a:ln>
-        </p:spPr>
-      </p:sp>
-      <p:sp>
-        <p:nvSpPr>
-          <p:cNvPr id="15" name="Shape 13"/>
-          <p:cNvSpPr/>
-          <p:nvPr/>
-        </p:nvSpPr>
-        <p:spPr>
-          <a:xfrm>
-            <a:off x="8577072" y="3172968"/>
-            <a:ext cx="256032" cy="713232"/>
-          </a:xfrm>
-          <a:prstGeom prst="rect">
-            <a:avLst/>
-          </a:prstGeom>
-          <a:solidFill>
-            <a:srgbClr val="2F8A28"/>
-          </a:solidFill>
-          <a:ln w="12700">
-            <a:solidFill>
-              <a:srgbClr val="2F8A28"/>
-            </a:solidFill>
-            <a:prstDash val="solid"/>
-          </a:ln>
-        </p:spPr>
+          <p:cNvPr id="14" name="Text 12"/>
+          <p:cNvSpPr/>
+          <p:nvPr/>
+        </p:nvSpPr>
+        <p:spPr>
+          <a:xfrm>
+            <a:off x="7799832" y="2935224"/>
+            <a:ext cx="3145536" cy="256032"/>
+          </a:xfrm>
+          <a:prstGeom prst="rect">
+            <a:avLst/>
+          </a:prstGeom>
+          <a:noFill/>
+          <a:ln/>
+        </p:spPr>
+        <p:txBody>
+          <a:bodyPr wrap="square" lIns="0" tIns="0" rIns="0" bIns="0" rtlCol="0" anchor="ctr"/>
+          <a:lstStyle/>
+          <a:p>
+            <a:pPr indent="0" marL="0">
+              <a:buNone/>
+            </a:pPr>
+            <a:r>
+              <a:rPr lang="en-US" sz="1300" b="1" dirty="0">
+                <a:solidFill>
+                  <a:srgbClr val="0068B7"/>
+                </a:solidFill>
+                <a:latin typeface="Aptos" pitchFamily="34" charset="0"/>
+                <a:ea typeface="Aptos" pitchFamily="34" charset="-122"/>
+                <a:cs typeface="Aptos" pitchFamily="34" charset="-120"/>
+              </a:rPr>
+              <a:t>Concept checkpoints</a:t>
+            </a:r>
+            <a:endParaRPr lang="en-US" sz="1300" dirty="0"/>
+          </a:p>
+        </p:txBody>
+      </p:sp>
+      <p:sp>
+        <p:nvSpPr>
+          <p:cNvPr id="15" name="Text 13"/>
+          <p:cNvSpPr/>
+          <p:nvPr/>
+        </p:nvSpPr>
+        <p:spPr>
+          <a:xfrm>
+            <a:off x="7818120" y="3300984"/>
+            <a:ext cx="3090672" cy="877824"/>
+          </a:xfrm>
+          <a:prstGeom prst="rect">
+            <a:avLst/>
+          </a:prstGeom>
+          <a:noFill/>
+          <a:ln/>
+        </p:spPr>
+        <p:txBody>
+          <a:bodyPr wrap="square" lIns="254" tIns="254" rIns="254" bIns="254" rtlCol="0" anchor="t">
+            <a:normAutofit/>
+          </a:bodyPr>
+          <a:lstStyle/>
+          <a:p>
+            <a:r>
+              <a:rPr lang="en-US" sz="1380" dirty="0">
+                <a:solidFill>
+                  <a:srgbClr val="17364A"/>
+                </a:solidFill>
+                <a:latin typeface="Aptos" pitchFamily="34" charset="0"/>
+                <a:ea typeface="Aptos" pitchFamily="34" charset="-122"/>
+                <a:cs typeface="Aptos" pitchFamily="34" charset="-120"/>
+              </a:rPr>
+              <a:t>NIST Generative AI Profile:.</a:t>
+            </a:r>
+            <a:endParaRPr lang="en-US" sz="1380" dirty="0"/>
+          </a:p>
+          <a:p>
+            <a:r>
+              <a:rPr lang="en-US" sz="1380" dirty="0">
+                <a:solidFill>
+                  <a:srgbClr val="17364A"/>
+                </a:solidFill>
+                <a:latin typeface="Aptos" pitchFamily="34" charset="0"/>
+                <a:ea typeface="Aptos" pitchFamily="34" charset="-122"/>
+                <a:cs typeface="Aptos" pitchFamily="34" charset="-120"/>
+              </a:rPr>
+              <a:t>ONC interoperability and health IT resources</a:t>
+            </a:r>
+            <a:endParaRPr lang="en-US" sz="1380" dirty="0"/>
+          </a:p>
+        </p:txBody>
       </p:sp>
       <p:sp>
         <p:nvSpPr>
           <p:cNvPr id="16" name="Shape 14"/>
-          <p:cNvSpPr/>
-          <p:nvPr/>
-        </p:nvSpPr>
-        <p:spPr>
-          <a:xfrm>
-            <a:off x="9015984" y="2880360"/>
-            <a:ext cx="256032" cy="1005840"/>
-          </a:xfrm>
-          <a:prstGeom prst="rect">
-            <a:avLst/>
-          </a:prstGeom>
-          <a:solidFill>
-            <a:srgbClr val="D69A2D"/>
-          </a:solidFill>
-          <a:ln w="12700">
-            <a:solidFill>
-              <a:srgbClr val="D69A2D"/>
-            </a:solidFill>
-            <a:prstDash val="solid"/>
-          </a:ln>
-        </p:spPr>
-      </p:sp>
-      <p:sp>
-        <p:nvSpPr>
-          <p:cNvPr id="17" name="Shape 15"/>
-          <p:cNvSpPr/>
-          <p:nvPr/>
-        </p:nvSpPr>
-        <p:spPr>
-          <a:xfrm>
-            <a:off x="9454896" y="3319272"/>
-            <a:ext cx="256032" cy="566928"/>
-          </a:xfrm>
-          <a:prstGeom prst="rect">
-            <a:avLst/>
-          </a:prstGeom>
-          <a:solidFill>
-            <a:srgbClr val="6A4CA3"/>
-          </a:solidFill>
-          <a:ln w="12700">
-            <a:solidFill>
-              <a:srgbClr val="6A4CA3"/>
-            </a:solidFill>
-            <a:prstDash val="solid"/>
-          </a:ln>
-        </p:spPr>
-      </p:sp>
-      <p:sp>
-        <p:nvSpPr>
-          <p:cNvPr id="18" name="Shape 16"/>
-          <p:cNvSpPr/>
-          <p:nvPr/>
-        </p:nvSpPr>
-        <p:spPr>
-          <a:xfrm>
-            <a:off x="8019288" y="3886200"/>
-            <a:ext cx="2706624" cy="0"/>
-          </a:xfrm>
-          <a:prstGeom prst="line">
-            <a:avLst/>
-          </a:prstGeom>
-          <a:noFill/>
-          <a:ln w="15240">
-            <a:solidFill>
-              <a:srgbClr val="003A63"/>
-            </a:solidFill>
-            <a:prstDash val="solid"/>
-          </a:ln>
-        </p:spPr>
-      </p:sp>
-      <p:sp>
-        <p:nvSpPr>
-          <p:cNvPr id="19" name="Text 17"/>
-          <p:cNvSpPr/>
-          <p:nvPr/>
-        </p:nvSpPr>
-        <p:spPr>
-          <a:xfrm>
-            <a:off x="7863840" y="3017520"/>
-            <a:ext cx="3017520" cy="201168"/>
-          </a:xfrm>
-          <a:prstGeom prst="rect">
-            <a:avLst/>
-          </a:prstGeom>
-          <a:noFill/>
-          <a:ln/>
-        </p:spPr>
-        <p:txBody>
-          <a:bodyPr wrap="square" lIns="0" tIns="0" rIns="0" bIns="0" rtlCol="0" anchor="ctr"/>
-          <a:lstStyle/>
-          <a:p>
-            <a:pPr algn="ctr" indent="0" marL="0">
-              <a:buNone/>
-            </a:pPr>
-            <a:r>
-              <a:rPr lang="en-US" sz="1050" b="1" dirty="0">
-                <a:solidFill>
-                  <a:srgbClr val="003A63"/>
-                </a:solidFill>
-                <a:latin typeface="Aptos" pitchFamily="34" charset="0"/>
-                <a:ea typeface="Aptos" pitchFamily="34" charset="-122"/>
-                <a:cs typeface="Aptos" pitchFamily="34" charset="-120"/>
-              </a:rPr>
-              <a:t>Measure and monitor</a:t>
-            </a:r>
-            <a:endParaRPr lang="en-US" sz="1050" dirty="0"/>
-          </a:p>
-        </p:txBody>
-      </p:sp>
-      <p:sp>
-        <p:nvSpPr>
-          <p:cNvPr id="20" name="Shape 18"/>
           <p:cNvSpPr/>
           <p:nvPr/>
         </p:nvSpPr>
@@ -14264,7 +13428,7 @@
       </p:sp>
       <p:sp>
         <p:nvSpPr>
-          <p:cNvPr id="21" name="Text 19"/>
+          <p:cNvPr id="17" name="Text 15"/>
           <p:cNvSpPr/>
           <p:nvPr/>
         </p:nvSpPr>
@@ -14303,7 +13467,7 @@
       </p:sp>
       <p:sp>
         <p:nvSpPr>
-          <p:cNvPr id="22" name="Text 20"/>
+          <p:cNvPr id="18" name="Text 16"/>
           <p:cNvSpPr/>
           <p:nvPr/>
         </p:nvSpPr>
@@ -14783,13 +13947,11 @@
             </a:avLst>
           </a:prstGeom>
           <a:solidFill>
-            <a:srgbClr val="FFFFFF">
-              <a:alpha val="88000"/>
-            </a:srgbClr>
+            <a:srgbClr val="FFFFFF"/>
           </a:solidFill>
           <a:ln w="12700">
             <a:solidFill>
-              <a:srgbClr val="D6E8F2"/>
+              <a:srgbClr val="B9D7E6"/>
             </a:solidFill>
             <a:prstDash val="solid"/>
           </a:ln>
@@ -14797,169 +13959,84 @@
       </p:sp>
       <p:sp>
         <p:nvSpPr>
-          <p:cNvPr id="14" name="Shape 12"/>
-          <p:cNvSpPr/>
-          <p:nvPr/>
-        </p:nvSpPr>
-        <p:spPr>
-          <a:xfrm>
-            <a:off x="8138160" y="3474720"/>
-            <a:ext cx="256032" cy="411480"/>
-          </a:xfrm>
-          <a:prstGeom prst="rect">
-            <a:avLst/>
-          </a:prstGeom>
-          <a:solidFill>
-            <a:srgbClr val="0068B7"/>
-          </a:solidFill>
-          <a:ln w="12700">
-            <a:solidFill>
-              <a:srgbClr val="0068B7"/>
-            </a:solidFill>
-            <a:prstDash val="solid"/>
-          </a:ln>
-        </p:spPr>
-      </p:sp>
-      <p:sp>
-        <p:nvSpPr>
-          <p:cNvPr id="15" name="Shape 13"/>
-          <p:cNvSpPr/>
-          <p:nvPr/>
-        </p:nvSpPr>
-        <p:spPr>
-          <a:xfrm>
-            <a:off x="8577072" y="3172968"/>
-            <a:ext cx="256032" cy="713232"/>
-          </a:xfrm>
-          <a:prstGeom prst="rect">
-            <a:avLst/>
-          </a:prstGeom>
-          <a:solidFill>
-            <a:srgbClr val="2F8A28"/>
-          </a:solidFill>
-          <a:ln w="12700">
-            <a:solidFill>
-              <a:srgbClr val="2F8A28"/>
-            </a:solidFill>
-            <a:prstDash val="solid"/>
-          </a:ln>
-        </p:spPr>
+          <p:cNvPr id="14" name="Text 12"/>
+          <p:cNvSpPr/>
+          <p:nvPr/>
+        </p:nvSpPr>
+        <p:spPr>
+          <a:xfrm>
+            <a:off x="7799832" y="2935224"/>
+            <a:ext cx="3145536" cy="256032"/>
+          </a:xfrm>
+          <a:prstGeom prst="rect">
+            <a:avLst/>
+          </a:prstGeom>
+          <a:noFill/>
+          <a:ln/>
+        </p:spPr>
+        <p:txBody>
+          <a:bodyPr wrap="square" lIns="0" tIns="0" rIns="0" bIns="0" rtlCol="0" anchor="ctr"/>
+          <a:lstStyle/>
+          <a:p>
+            <a:pPr indent="0" marL="0">
+              <a:buNone/>
+            </a:pPr>
+            <a:r>
+              <a:rPr lang="en-US" sz="1300" b="1" dirty="0">
+                <a:solidFill>
+                  <a:srgbClr val="0068B7"/>
+                </a:solidFill>
+                <a:latin typeface="Aptos" pitchFamily="34" charset="0"/>
+                <a:ea typeface="Aptos" pitchFamily="34" charset="-122"/>
+                <a:cs typeface="Aptos" pitchFamily="34" charset="-120"/>
+              </a:rPr>
+              <a:t>Concept checkpoints</a:t>
+            </a:r>
+            <a:endParaRPr lang="en-US" sz="1300" dirty="0"/>
+          </a:p>
+        </p:txBody>
+      </p:sp>
+      <p:sp>
+        <p:nvSpPr>
+          <p:cNvPr id="15" name="Text 13"/>
+          <p:cNvSpPr/>
+          <p:nvPr/>
+        </p:nvSpPr>
+        <p:spPr>
+          <a:xfrm>
+            <a:off x="7818120" y="3300984"/>
+            <a:ext cx="3090672" cy="877824"/>
+          </a:xfrm>
+          <a:prstGeom prst="rect">
+            <a:avLst/>
+          </a:prstGeom>
+          <a:noFill/>
+          <a:ln/>
+        </p:spPr>
+        <p:txBody>
+          <a:bodyPr wrap="square" lIns="254" tIns="254" rIns="254" bIns="254" rtlCol="0" anchor="t">
+            <a:normAutofit/>
+          </a:bodyPr>
+          <a:lstStyle/>
+          <a:p>
+            <a:r>
+              <a:rPr lang="en-US" sz="1380" dirty="0">
+                <a:solidFill>
+                  <a:srgbClr val="17364A"/>
+                </a:solidFill>
+                <a:latin typeface="Aptos" pitchFamily="34" charset="0"/>
+                <a:ea typeface="Aptos" pitchFamily="34" charset="-122"/>
+                <a:cs typeface="Aptos" pitchFamily="34" charset="-120"/>
+              </a:rPr>
+              <a:t>Agency data governance, privacy, cybersecurity, and enterprise architecture documentation</a:t>
+            </a:r>
+            <a:endParaRPr lang="en-US" sz="1380" dirty="0"/>
+          </a:p>
+        </p:txBody>
       </p:sp>
       <p:sp>
         <p:nvSpPr>
           <p:cNvPr id="16" name="Shape 14"/>
-          <p:cNvSpPr/>
-          <p:nvPr/>
-        </p:nvSpPr>
-        <p:spPr>
-          <a:xfrm>
-            <a:off x="9015984" y="2880360"/>
-            <a:ext cx="256032" cy="1005840"/>
-          </a:xfrm>
-          <a:prstGeom prst="rect">
-            <a:avLst/>
-          </a:prstGeom>
-          <a:solidFill>
-            <a:srgbClr val="D69A2D"/>
-          </a:solidFill>
-          <a:ln w="12700">
-            <a:solidFill>
-              <a:srgbClr val="D69A2D"/>
-            </a:solidFill>
-            <a:prstDash val="solid"/>
-          </a:ln>
-        </p:spPr>
-      </p:sp>
-      <p:sp>
-        <p:nvSpPr>
-          <p:cNvPr id="17" name="Shape 15"/>
-          <p:cNvSpPr/>
-          <p:nvPr/>
-        </p:nvSpPr>
-        <p:spPr>
-          <a:xfrm>
-            <a:off x="9454896" y="3319272"/>
-            <a:ext cx="256032" cy="566928"/>
-          </a:xfrm>
-          <a:prstGeom prst="rect">
-            <a:avLst/>
-          </a:prstGeom>
-          <a:solidFill>
-            <a:srgbClr val="6A4CA3"/>
-          </a:solidFill>
-          <a:ln w="12700">
-            <a:solidFill>
-              <a:srgbClr val="6A4CA3"/>
-            </a:solidFill>
-            <a:prstDash val="solid"/>
-          </a:ln>
-        </p:spPr>
-      </p:sp>
-      <p:sp>
-        <p:nvSpPr>
-          <p:cNvPr id="18" name="Shape 16"/>
-          <p:cNvSpPr/>
-          <p:nvPr/>
-        </p:nvSpPr>
-        <p:spPr>
-          <a:xfrm>
-            <a:off x="8019288" y="3886200"/>
-            <a:ext cx="2706624" cy="0"/>
-          </a:xfrm>
-          <a:prstGeom prst="line">
-            <a:avLst/>
-          </a:prstGeom>
-          <a:noFill/>
-          <a:ln w="15240">
-            <a:solidFill>
-              <a:srgbClr val="003A63"/>
-            </a:solidFill>
-            <a:prstDash val="solid"/>
-          </a:ln>
-        </p:spPr>
-      </p:sp>
-      <p:sp>
-        <p:nvSpPr>
-          <p:cNvPr id="19" name="Text 17"/>
-          <p:cNvSpPr/>
-          <p:nvPr/>
-        </p:nvSpPr>
-        <p:spPr>
-          <a:xfrm>
-            <a:off x="7863840" y="3017520"/>
-            <a:ext cx="3017520" cy="201168"/>
-          </a:xfrm>
-          <a:prstGeom prst="rect">
-            <a:avLst/>
-          </a:prstGeom>
-          <a:noFill/>
-          <a:ln/>
-        </p:spPr>
-        <p:txBody>
-          <a:bodyPr wrap="square" lIns="0" tIns="0" rIns="0" bIns="0" rtlCol="0" anchor="ctr"/>
-          <a:lstStyle/>
-          <a:p>
-            <a:pPr algn="ctr" indent="0" marL="0">
-              <a:buNone/>
-            </a:pPr>
-            <a:r>
-              <a:rPr lang="en-US" sz="1050" b="1" dirty="0">
-                <a:solidFill>
-                  <a:srgbClr val="003A63"/>
-                </a:solidFill>
-                <a:latin typeface="Aptos" pitchFamily="34" charset="0"/>
-                <a:ea typeface="Aptos" pitchFamily="34" charset="-122"/>
-                <a:cs typeface="Aptos" pitchFamily="34" charset="-120"/>
-              </a:rPr>
-              <a:t>Measure and monitor</a:t>
-            </a:r>
-            <a:endParaRPr lang="en-US" sz="1050" dirty="0"/>
-          </a:p>
-        </p:txBody>
-      </p:sp>
-      <p:sp>
-        <p:nvSpPr>
-          <p:cNvPr id="20" name="Shape 18"/>
           <p:cNvSpPr/>
           <p:nvPr/>
         </p:nvSpPr>
@@ -14986,7 +14063,7 @@
       </p:sp>
       <p:sp>
         <p:nvSpPr>
-          <p:cNvPr id="21" name="Text 19"/>
+          <p:cNvPr id="17" name="Text 15"/>
           <p:cNvSpPr/>
           <p:nvPr/>
         </p:nvSpPr>
@@ -15025,7 +14102,7 @@
       </p:sp>
       <p:sp>
         <p:nvSpPr>
-          <p:cNvPr id="22" name="Text 20"/>
+          <p:cNvPr id="18" name="Text 16"/>
           <p:cNvSpPr/>
           <p:nvPr/>
         </p:nvSpPr>
@@ -15538,20 +14615,20 @@
         </p:nvSpPr>
         <p:spPr>
           <a:xfrm>
-            <a:off x="7818120" y="3977640"/>
-            <a:ext cx="972312" cy="749808"/>
+            <a:off x="8046720" y="3794760"/>
+            <a:ext cx="3063240" cy="1600200"/>
           </a:xfrm>
           <a:prstGeom prst="roundRect">
             <a:avLst>
-              <a:gd name="adj" fmla="val 14634"/>
+              <a:gd name="adj" fmla="val 6857"/>
             </a:avLst>
           </a:prstGeom>
           <a:solidFill>
-            <a:srgbClr val="0068B7"/>
+            <a:srgbClr val="FFFFFF"/>
           </a:solidFill>
           <a:ln w="12700">
             <a:solidFill>
-              <a:srgbClr val="0068B7"/>
+              <a:srgbClr val="B9D7E6"/>
             </a:solidFill>
             <a:prstDash val="solid"/>
           </a:ln>
@@ -15565,172 +14642,100 @@
         </p:nvSpPr>
         <p:spPr>
           <a:xfrm>
-            <a:off x="7891272" y="4169664"/>
-            <a:ext cx="826008" cy="310896"/>
-          </a:xfrm>
-          <a:prstGeom prst="rect">
-            <a:avLst/>
-          </a:prstGeom>
-          <a:noFill/>
-          <a:ln/>
-        </p:spPr>
-        <p:txBody>
-          <a:bodyPr wrap="square" lIns="0" tIns="0" rIns="0" bIns="0" rtlCol="0" anchor="ctr">
+            <a:off x="8211312" y="3941064"/>
+            <a:ext cx="2734056" cy="256032"/>
+          </a:xfrm>
+          <a:prstGeom prst="rect">
+            <a:avLst/>
+          </a:prstGeom>
+          <a:noFill/>
+          <a:ln/>
+        </p:spPr>
+        <p:txBody>
+          <a:bodyPr wrap="square" lIns="0" tIns="0" rIns="0" bIns="0" rtlCol="0" anchor="ctr"/>
+          <a:lstStyle/>
+          <a:p>
+            <a:pPr indent="0" marL="0">
+              <a:buNone/>
+            </a:pPr>
+            <a:r>
+              <a:rPr lang="en-US" sz="1300" b="1" dirty="0">
+                <a:solidFill>
+                  <a:srgbClr val="0068B7"/>
+                </a:solidFill>
+                <a:latin typeface="Aptos" pitchFamily="34" charset="0"/>
+                <a:ea typeface="Aptos" pitchFamily="34" charset="-122"/>
+                <a:cs typeface="Aptos" pitchFamily="34" charset="-120"/>
+              </a:rPr>
+              <a:t>Use the play links to</a:t>
+            </a:r>
+            <a:endParaRPr lang="en-US" sz="1300" dirty="0"/>
+          </a:p>
+        </p:txBody>
+      </p:sp>
+      <p:sp>
+        <p:nvSpPr>
+          <p:cNvPr id="15" name="Text 13"/>
+          <p:cNvSpPr/>
+          <p:nvPr/>
+        </p:nvSpPr>
+        <p:spPr>
+          <a:xfrm>
+            <a:off x="8229600" y="4306824"/>
+            <a:ext cx="2679192" cy="941832"/>
+          </a:xfrm>
+          <a:prstGeom prst="rect">
+            <a:avLst/>
+          </a:prstGeom>
+          <a:noFill/>
+          <a:ln/>
+        </p:spPr>
+        <p:txBody>
+          <a:bodyPr wrap="square" lIns="254" tIns="254" rIns="254" bIns="254" rtlCol="0" anchor="t">
             <a:normAutofit/>
           </a:bodyPr>
           <a:lstStyle/>
           <a:p>
-            <a:pPr algn="ctr" indent="0" marL="0">
-              <a:buNone/>
-            </a:pPr>
-            <a:r>
-              <a:rPr lang="en-US" sz="1500" b="1" dirty="0">
-                <a:solidFill>
-                  <a:srgbClr val="FFFFFF"/>
-                </a:solidFill>
-                <a:latin typeface="Aptos" pitchFamily="34" charset="0"/>
-                <a:ea typeface="Aptos" pitchFamily="34" charset="-122"/>
-                <a:cs typeface="Aptos" pitchFamily="34" charset="-120"/>
-              </a:rPr>
-              <a:t>Lesson</a:t>
-            </a:r>
-            <a:endParaRPr lang="en-US" sz="1500" dirty="0"/>
-          </a:p>
-        </p:txBody>
-      </p:sp>
-      <p:sp>
-        <p:nvSpPr>
-          <p:cNvPr id="15" name="Shape 13"/>
-          <p:cNvSpPr/>
-          <p:nvPr/>
-        </p:nvSpPr>
-        <p:spPr>
-          <a:xfrm>
-            <a:off x="9046464" y="3977640"/>
-            <a:ext cx="972312" cy="749808"/>
-          </a:xfrm>
-          <a:prstGeom prst="roundRect">
-            <a:avLst>
-              <a:gd name="adj" fmla="val 14634"/>
-            </a:avLst>
-          </a:prstGeom>
-          <a:solidFill>
-            <a:srgbClr val="2F8A28"/>
-          </a:solidFill>
-          <a:ln w="12700">
-            <a:solidFill>
-              <a:srgbClr val="2F8A28"/>
-            </a:solidFill>
-            <a:prstDash val="solid"/>
-          </a:ln>
-        </p:spPr>
-      </p:sp>
-      <p:sp>
-        <p:nvSpPr>
-          <p:cNvPr id="16" name="Text 14"/>
-          <p:cNvSpPr/>
-          <p:nvPr/>
-        </p:nvSpPr>
-        <p:spPr>
-          <a:xfrm>
-            <a:off x="9119616" y="4169664"/>
-            <a:ext cx="826008" cy="310896"/>
-          </a:xfrm>
-          <a:prstGeom prst="rect">
-            <a:avLst/>
-          </a:prstGeom>
-          <a:noFill/>
-          <a:ln/>
-        </p:spPr>
-        <p:txBody>
-          <a:bodyPr wrap="square" lIns="0" tIns="0" rIns="0" bIns="0" rtlCol="0" anchor="ctr">
-            <a:normAutofit/>
-          </a:bodyPr>
-          <a:lstStyle/>
-          <a:p>
-            <a:pPr algn="ctr" indent="0" marL="0">
-              <a:buNone/>
-            </a:pPr>
-            <a:r>
-              <a:rPr lang="en-US" sz="1500" b="1" dirty="0">
-                <a:solidFill>
-                  <a:srgbClr val="FFFFFF"/>
-                </a:solidFill>
-                <a:latin typeface="Aptos" pitchFamily="34" charset="0"/>
-                <a:ea typeface="Aptos" pitchFamily="34" charset="-122"/>
-                <a:cs typeface="Aptos" pitchFamily="34" charset="-120"/>
-              </a:rPr>
-              <a:t>Plays</a:t>
-            </a:r>
-            <a:endParaRPr lang="en-US" sz="1500" dirty="0"/>
-          </a:p>
-        </p:txBody>
-      </p:sp>
-      <p:sp>
-        <p:nvSpPr>
-          <p:cNvPr id="17" name="Shape 15"/>
-          <p:cNvSpPr/>
-          <p:nvPr/>
-        </p:nvSpPr>
-        <p:spPr>
-          <a:xfrm>
-            <a:off x="10274808" y="3977640"/>
-            <a:ext cx="972312" cy="749808"/>
-          </a:xfrm>
-          <a:prstGeom prst="roundRect">
-            <a:avLst>
-              <a:gd name="adj" fmla="val 14634"/>
-            </a:avLst>
-          </a:prstGeom>
-          <a:solidFill>
-            <a:srgbClr val="6A4CA3"/>
-          </a:solidFill>
-          <a:ln w="12700">
-            <a:solidFill>
-              <a:srgbClr val="6A4CA3"/>
-            </a:solidFill>
-            <a:prstDash val="solid"/>
-          </a:ln>
-        </p:spPr>
-      </p:sp>
-      <p:sp>
-        <p:nvSpPr>
-          <p:cNvPr id="18" name="Text 16"/>
-          <p:cNvSpPr/>
-          <p:nvPr/>
-        </p:nvSpPr>
-        <p:spPr>
-          <a:xfrm>
-            <a:off x="10347960" y="4169664"/>
-            <a:ext cx="826008" cy="310896"/>
-          </a:xfrm>
-          <a:prstGeom prst="rect">
-            <a:avLst/>
-          </a:prstGeom>
-          <a:noFill/>
-          <a:ln/>
-        </p:spPr>
-        <p:txBody>
-          <a:bodyPr wrap="square" lIns="0" tIns="0" rIns="0" bIns="0" rtlCol="0" anchor="ctr">
-            <a:normAutofit/>
-          </a:bodyPr>
-          <a:lstStyle/>
-          <a:p>
-            <a:pPr algn="ctr" indent="0" marL="0">
-              <a:buNone/>
-            </a:pPr>
-            <a:r>
-              <a:rPr lang="en-US" sz="1500" b="1" dirty="0">
-                <a:solidFill>
-                  <a:srgbClr val="FFFFFF"/>
-                </a:solidFill>
-                <a:latin typeface="Aptos" pitchFamily="34" charset="0"/>
-                <a:ea typeface="Aptos" pitchFamily="34" charset="-122"/>
-                <a:cs typeface="Aptos" pitchFamily="34" charset="-120"/>
-              </a:rPr>
-              <a:t>Action</a:t>
-            </a:r>
-            <a:endParaRPr lang="en-US" sz="1500" dirty="0"/>
+            <a:r>
+              <a:rPr lang="en-US" sz="1380" dirty="0">
+                <a:solidFill>
+                  <a:srgbClr val="17364A"/>
+                </a:solidFill>
+                <a:latin typeface="Aptos" pitchFamily="34" charset="0"/>
+                <a:ea typeface="Aptos" pitchFamily="34" charset="-122"/>
+                <a:cs typeface="Aptos" pitchFamily="34" charset="-120"/>
+              </a:rPr>
+              <a:t>Locate the decision point in the playbook sequence.</a:t>
+            </a:r>
+            <a:endParaRPr lang="en-US" sz="1380" dirty="0"/>
+          </a:p>
+          <a:p>
+            <a:r>
+              <a:rPr lang="en-US" sz="1380" dirty="0">
+                <a:solidFill>
+                  <a:srgbClr val="17364A"/>
+                </a:solidFill>
+                <a:latin typeface="Aptos" pitchFamily="34" charset="0"/>
+                <a:ea typeface="Aptos" pitchFamily="34" charset="-122"/>
+                <a:cs typeface="Aptos" pitchFamily="34" charset="-120"/>
+              </a:rPr>
+              <a:t>Identify who should participate in the work.</a:t>
+            </a:r>
+            <a:endParaRPr lang="en-US" sz="1380" dirty="0"/>
+          </a:p>
+          <a:p>
+            <a:r>
+              <a:rPr lang="en-US" sz="1380" dirty="0">
+                <a:solidFill>
+                  <a:srgbClr val="17364A"/>
+                </a:solidFill>
+                <a:latin typeface="Aptos" pitchFamily="34" charset="0"/>
+                <a:ea typeface="Aptos" pitchFamily="34" charset="-122"/>
+                <a:cs typeface="Aptos" pitchFamily="34" charset="-120"/>
+              </a:rPr>
+              <a:t>Document the review, approval, or implementation step.</a:t>
+            </a:r>
+            <a:endParaRPr lang="en-US" sz="1380" dirty="0"/>
           </a:p>
         </p:txBody>
       </p:sp>
@@ -16208,20 +15213,20 @@
         </p:nvSpPr>
         <p:spPr>
           <a:xfrm>
-            <a:off x="7818120" y="3977640"/>
-            <a:ext cx="972312" cy="749808"/>
+            <a:off x="8046720" y="3794760"/>
+            <a:ext cx="3063240" cy="1600200"/>
           </a:xfrm>
           <a:prstGeom prst="roundRect">
             <a:avLst>
-              <a:gd name="adj" fmla="val 14634"/>
+              <a:gd name="adj" fmla="val 6857"/>
             </a:avLst>
           </a:prstGeom>
           <a:solidFill>
-            <a:srgbClr val="0068B7"/>
+            <a:srgbClr val="FFFFFF"/>
           </a:solidFill>
           <a:ln w="12700">
             <a:solidFill>
-              <a:srgbClr val="0068B7"/>
+              <a:srgbClr val="B9D7E6"/>
             </a:solidFill>
             <a:prstDash val="solid"/>
           </a:ln>
@@ -16235,172 +15240,100 @@
         </p:nvSpPr>
         <p:spPr>
           <a:xfrm>
-            <a:off x="7891272" y="4169664"/>
-            <a:ext cx="826008" cy="310896"/>
-          </a:xfrm>
-          <a:prstGeom prst="rect">
-            <a:avLst/>
-          </a:prstGeom>
-          <a:noFill/>
-          <a:ln/>
-        </p:spPr>
-        <p:txBody>
-          <a:bodyPr wrap="square" lIns="0" tIns="0" rIns="0" bIns="0" rtlCol="0" anchor="ctr">
+            <a:off x="8211312" y="3941064"/>
+            <a:ext cx="2734056" cy="256032"/>
+          </a:xfrm>
+          <a:prstGeom prst="rect">
+            <a:avLst/>
+          </a:prstGeom>
+          <a:noFill/>
+          <a:ln/>
+        </p:spPr>
+        <p:txBody>
+          <a:bodyPr wrap="square" lIns="0" tIns="0" rIns="0" bIns="0" rtlCol="0" anchor="ctr"/>
+          <a:lstStyle/>
+          <a:p>
+            <a:pPr indent="0" marL="0">
+              <a:buNone/>
+            </a:pPr>
+            <a:r>
+              <a:rPr lang="en-US" sz="1300" b="1" dirty="0">
+                <a:solidFill>
+                  <a:srgbClr val="0068B7"/>
+                </a:solidFill>
+                <a:latin typeface="Aptos" pitchFamily="34" charset="0"/>
+                <a:ea typeface="Aptos" pitchFamily="34" charset="-122"/>
+                <a:cs typeface="Aptos" pitchFamily="34" charset="-120"/>
+              </a:rPr>
+              <a:t>Tool selection cues</a:t>
+            </a:r>
+            <a:endParaRPr lang="en-US" sz="1300" dirty="0"/>
+          </a:p>
+        </p:txBody>
+      </p:sp>
+      <p:sp>
+        <p:nvSpPr>
+          <p:cNvPr id="15" name="Text 13"/>
+          <p:cNvSpPr/>
+          <p:nvPr/>
+        </p:nvSpPr>
+        <p:spPr>
+          <a:xfrm>
+            <a:off x="8229600" y="4306824"/>
+            <a:ext cx="2679192" cy="941832"/>
+          </a:xfrm>
+          <a:prstGeom prst="rect">
+            <a:avLst/>
+          </a:prstGeom>
+          <a:noFill/>
+          <a:ln/>
+        </p:spPr>
+        <p:txBody>
+          <a:bodyPr wrap="square" lIns="254" tIns="254" rIns="254" bIns="254" rtlCol="0" anchor="t">
             <a:normAutofit/>
           </a:bodyPr>
           <a:lstStyle/>
           <a:p>
-            <a:pPr algn="ctr" indent="0" marL="0">
-              <a:buNone/>
-            </a:pPr>
-            <a:r>
-              <a:rPr lang="en-US" sz="1500" b="1" dirty="0">
-                <a:solidFill>
-                  <a:srgbClr val="FFFFFF"/>
-                </a:solidFill>
-                <a:latin typeface="Aptos" pitchFamily="34" charset="0"/>
-                <a:ea typeface="Aptos" pitchFamily="34" charset="-122"/>
-                <a:cs typeface="Aptos" pitchFamily="34" charset="-120"/>
-              </a:rPr>
-              <a:t>Concept</a:t>
-            </a:r>
-            <a:endParaRPr lang="en-US" sz="1500" dirty="0"/>
-          </a:p>
-        </p:txBody>
-      </p:sp>
-      <p:sp>
-        <p:nvSpPr>
-          <p:cNvPr id="15" name="Shape 13"/>
-          <p:cNvSpPr/>
-          <p:nvPr/>
-        </p:nvSpPr>
-        <p:spPr>
-          <a:xfrm>
-            <a:off x="9046464" y="3977640"/>
-            <a:ext cx="972312" cy="749808"/>
-          </a:xfrm>
-          <a:prstGeom prst="roundRect">
-            <a:avLst>
-              <a:gd name="adj" fmla="val 14634"/>
-            </a:avLst>
-          </a:prstGeom>
-          <a:solidFill>
-            <a:srgbClr val="2F8A28"/>
-          </a:solidFill>
-          <a:ln w="12700">
-            <a:solidFill>
-              <a:srgbClr val="2F8A28"/>
-            </a:solidFill>
-            <a:prstDash val="solid"/>
-          </a:ln>
-        </p:spPr>
-      </p:sp>
-      <p:sp>
-        <p:nvSpPr>
-          <p:cNvPr id="16" name="Text 14"/>
-          <p:cNvSpPr/>
-          <p:nvPr/>
-        </p:nvSpPr>
-        <p:spPr>
-          <a:xfrm>
-            <a:off x="9119616" y="4169664"/>
-            <a:ext cx="826008" cy="310896"/>
-          </a:xfrm>
-          <a:prstGeom prst="rect">
-            <a:avLst/>
-          </a:prstGeom>
-          <a:noFill/>
-          <a:ln/>
-        </p:spPr>
-        <p:txBody>
-          <a:bodyPr wrap="square" lIns="0" tIns="0" rIns="0" bIns="0" rtlCol="0" anchor="ctr">
-            <a:normAutofit/>
-          </a:bodyPr>
-          <a:lstStyle/>
-          <a:p>
-            <a:pPr algn="ctr" indent="0" marL="0">
-              <a:buNone/>
-            </a:pPr>
-            <a:r>
-              <a:rPr lang="en-US" sz="1500" b="1" dirty="0">
-                <a:solidFill>
-                  <a:srgbClr val="FFFFFF"/>
-                </a:solidFill>
-                <a:latin typeface="Aptos" pitchFamily="34" charset="0"/>
-                <a:ea typeface="Aptos" pitchFamily="34" charset="-122"/>
-                <a:cs typeface="Aptos" pitchFamily="34" charset="-120"/>
-              </a:rPr>
-              <a:t>Tool</a:t>
-            </a:r>
-            <a:endParaRPr lang="en-US" sz="1500" dirty="0"/>
-          </a:p>
-        </p:txBody>
-      </p:sp>
-      <p:sp>
-        <p:nvSpPr>
-          <p:cNvPr id="17" name="Shape 15"/>
-          <p:cNvSpPr/>
-          <p:nvPr/>
-        </p:nvSpPr>
-        <p:spPr>
-          <a:xfrm>
-            <a:off x="10274808" y="3977640"/>
-            <a:ext cx="972312" cy="749808"/>
-          </a:xfrm>
-          <a:prstGeom prst="roundRect">
-            <a:avLst>
-              <a:gd name="adj" fmla="val 14634"/>
-            </a:avLst>
-          </a:prstGeom>
-          <a:solidFill>
-            <a:srgbClr val="D69A2D"/>
-          </a:solidFill>
-          <a:ln w="12700">
-            <a:solidFill>
-              <a:srgbClr val="D69A2D"/>
-            </a:solidFill>
-            <a:prstDash val="solid"/>
-          </a:ln>
-        </p:spPr>
-      </p:sp>
-      <p:sp>
-        <p:nvSpPr>
-          <p:cNvPr id="18" name="Text 16"/>
-          <p:cNvSpPr/>
-          <p:nvPr/>
-        </p:nvSpPr>
-        <p:spPr>
-          <a:xfrm>
-            <a:off x="10347960" y="4169664"/>
-            <a:ext cx="826008" cy="310896"/>
-          </a:xfrm>
-          <a:prstGeom prst="rect">
-            <a:avLst/>
-          </a:prstGeom>
-          <a:noFill/>
-          <a:ln/>
-        </p:spPr>
-        <p:txBody>
-          <a:bodyPr wrap="square" lIns="0" tIns="0" rIns="0" bIns="0" rtlCol="0" anchor="ctr">
-            <a:normAutofit/>
-          </a:bodyPr>
-          <a:lstStyle/>
-          <a:p>
-            <a:pPr algn="ctr" indent="0" marL="0">
-              <a:buNone/>
-            </a:pPr>
-            <a:r>
-              <a:rPr lang="en-US" sz="1500" b="1" dirty="0">
-                <a:solidFill>
-                  <a:srgbClr val="FFFFFF"/>
-                </a:solidFill>
-                <a:latin typeface="Aptos" pitchFamily="34" charset="0"/>
-                <a:ea typeface="Aptos" pitchFamily="34" charset="-122"/>
-                <a:cs typeface="Aptos" pitchFamily="34" charset="-120"/>
-              </a:rPr>
-              <a:t>Artifact</a:t>
-            </a:r>
-            <a:endParaRPr lang="en-US" sz="1500" dirty="0"/>
+            <a:r>
+              <a:rPr lang="en-US" sz="1380" dirty="0">
+                <a:solidFill>
+                  <a:srgbClr val="17364A"/>
+                </a:solidFill>
+                <a:latin typeface="Aptos" pitchFamily="34" charset="0"/>
+                <a:ea typeface="Aptos" pitchFamily="34" charset="-122"/>
+                <a:cs typeface="Aptos" pitchFamily="34" charset="-120"/>
+              </a:rPr>
+              <a:t>Use a tool when no comparable local process exists.</a:t>
+            </a:r>
+            <a:endParaRPr lang="en-US" sz="1380" dirty="0"/>
+          </a:p>
+          <a:p>
+            <a:r>
+              <a:rPr lang="en-US" sz="1380" dirty="0">
+                <a:solidFill>
+                  <a:srgbClr val="17364A"/>
+                </a:solidFill>
+                <a:latin typeface="Aptos" pitchFamily="34" charset="0"/>
+                <a:ea typeface="Aptos" pitchFamily="34" charset="-122"/>
+                <a:cs typeface="Aptos" pitchFamily="34" charset="-120"/>
+              </a:rPr>
+              <a:t>Adapt existing department templates when they already fit the purpose.</a:t>
+            </a:r>
+            <a:endParaRPr lang="en-US" sz="1380" dirty="0"/>
+          </a:p>
+          <a:p>
+            <a:r>
+              <a:rPr lang="en-US" sz="1380" dirty="0">
+                <a:solidFill>
+                  <a:srgbClr val="17364A"/>
+                </a:solidFill>
+                <a:latin typeface="Aptos" pitchFamily="34" charset="0"/>
+                <a:ea typeface="Aptos" pitchFamily="34" charset="-122"/>
+                <a:cs typeface="Aptos" pitchFamily="34" charset="-120"/>
+              </a:rPr>
+              <a:t>Save the completed artifact as evidence of the decision.</a:t>
+            </a:r>
+            <a:endParaRPr lang="en-US" sz="1380" dirty="0"/>
           </a:p>
         </p:txBody>
       </p:sp>
@@ -16873,13 +15806,11 @@
             </a:avLst>
           </a:prstGeom>
           <a:solidFill>
-            <a:srgbClr val="FFFFFF">
-              <a:alpha val="88000"/>
-            </a:srgbClr>
+            <a:srgbClr val="FFFFFF"/>
           </a:solidFill>
           <a:ln w="12700">
             <a:solidFill>
-              <a:srgbClr val="D6E8F2"/>
+              <a:srgbClr val="B9D7E6"/>
             </a:solidFill>
             <a:prstDash val="solid"/>
           </a:ln>
@@ -16887,169 +15818,112 @@
       </p:sp>
       <p:sp>
         <p:nvSpPr>
-          <p:cNvPr id="14" name="Shape 12"/>
-          <p:cNvSpPr/>
-          <p:nvPr/>
-        </p:nvSpPr>
-        <p:spPr>
-          <a:xfrm>
-            <a:off x="8138160" y="3474720"/>
-            <a:ext cx="256032" cy="411480"/>
-          </a:xfrm>
-          <a:prstGeom prst="rect">
-            <a:avLst/>
-          </a:prstGeom>
-          <a:solidFill>
-            <a:srgbClr val="0068B7"/>
-          </a:solidFill>
-          <a:ln w="12700">
-            <a:solidFill>
-              <a:srgbClr val="0068B7"/>
-            </a:solidFill>
-            <a:prstDash val="solid"/>
-          </a:ln>
-        </p:spPr>
-      </p:sp>
-      <p:sp>
-        <p:nvSpPr>
-          <p:cNvPr id="15" name="Shape 13"/>
-          <p:cNvSpPr/>
-          <p:nvPr/>
-        </p:nvSpPr>
-        <p:spPr>
-          <a:xfrm>
-            <a:off x="8577072" y="3172968"/>
-            <a:ext cx="256032" cy="713232"/>
-          </a:xfrm>
-          <a:prstGeom prst="rect">
-            <a:avLst/>
-          </a:prstGeom>
-          <a:solidFill>
-            <a:srgbClr val="2F8A28"/>
-          </a:solidFill>
-          <a:ln w="12700">
-            <a:solidFill>
-              <a:srgbClr val="2F8A28"/>
-            </a:solidFill>
-            <a:prstDash val="solid"/>
-          </a:ln>
-        </p:spPr>
+          <p:cNvPr id="14" name="Text 12"/>
+          <p:cNvSpPr/>
+          <p:nvPr/>
+        </p:nvSpPr>
+        <p:spPr>
+          <a:xfrm>
+            <a:off x="7799832" y="2935224"/>
+            <a:ext cx="3145536" cy="256032"/>
+          </a:xfrm>
+          <a:prstGeom prst="rect">
+            <a:avLst/>
+          </a:prstGeom>
+          <a:noFill/>
+          <a:ln/>
+        </p:spPr>
+        <p:txBody>
+          <a:bodyPr wrap="square" lIns="0" tIns="0" rIns="0" bIns="0" rtlCol="0" anchor="ctr"/>
+          <a:lstStyle/>
+          <a:p>
+            <a:pPr indent="0" marL="0">
+              <a:buNone/>
+            </a:pPr>
+            <a:r>
+              <a:rPr lang="en-US" sz="1300" b="1" dirty="0">
+                <a:solidFill>
+                  <a:srgbClr val="0068B7"/>
+                </a:solidFill>
+                <a:latin typeface="Aptos" pitchFamily="34" charset="0"/>
+                <a:ea typeface="Aptos" pitchFamily="34" charset="-122"/>
+                <a:cs typeface="Aptos" pitchFamily="34" charset="-120"/>
+              </a:rPr>
+              <a:t>Concept checkpoints</a:t>
+            </a:r>
+            <a:endParaRPr lang="en-US" sz="1300" dirty="0"/>
+          </a:p>
+        </p:txBody>
+      </p:sp>
+      <p:sp>
+        <p:nvSpPr>
+          <p:cNvPr id="15" name="Text 13"/>
+          <p:cNvSpPr/>
+          <p:nvPr/>
+        </p:nvSpPr>
+        <p:spPr>
+          <a:xfrm>
+            <a:off x="7818120" y="3300984"/>
+            <a:ext cx="3090672" cy="877824"/>
+          </a:xfrm>
+          <a:prstGeom prst="rect">
+            <a:avLst/>
+          </a:prstGeom>
+          <a:noFill/>
+          <a:ln/>
+        </p:spPr>
+        <p:txBody>
+          <a:bodyPr wrap="square" lIns="254" tIns="254" rIns="254" bIns="254" rtlCol="0" anchor="t">
+            <a:normAutofit/>
+          </a:bodyPr>
+          <a:lstStyle/>
+          <a:p>
+            <a:r>
+              <a:rPr lang="en-US" sz="1380" dirty="0">
+                <a:solidFill>
+                  <a:srgbClr val="17364A"/>
+                </a:solidFill>
+                <a:latin typeface="Aptos" pitchFamily="34" charset="0"/>
+                <a:ea typeface="Aptos" pitchFamily="34" charset="-122"/>
+                <a:cs typeface="Aptos" pitchFamily="34" charset="-120"/>
+              </a:rPr>
+              <a:t>Describe the major components of an AI-enabled public health architecture, including.</a:t>
+            </a:r>
+            <a:endParaRPr lang="en-US" sz="1380" dirty="0"/>
+          </a:p>
+          <a:p>
+            <a:r>
+              <a:rPr lang="en-US" sz="1380" dirty="0">
+                <a:solidFill>
+                  <a:srgbClr val="17364A"/>
+                </a:solidFill>
+                <a:latin typeface="Aptos" pitchFamily="34" charset="0"/>
+                <a:ea typeface="Aptos" pitchFamily="34" charset="-122"/>
+                <a:cs typeface="Aptos" pitchFamily="34" charset="-120"/>
+              </a:rPr>
+              <a:t>Identify the systems of record, source systems, data flows, and human decision points in a.</a:t>
+            </a:r>
+            <a:endParaRPr lang="en-US" sz="1380" dirty="0"/>
+          </a:p>
+          <a:p>
+            <a:r>
+              <a:rPr lang="en-US" sz="1380" dirty="0">
+                <a:solidFill>
+                  <a:srgbClr val="17364A"/>
+                </a:solidFill>
+                <a:latin typeface="Aptos" pitchFamily="34" charset="0"/>
+                <a:ea typeface="Aptos" pitchFamily="34" charset="-122"/>
+                <a:cs typeface="Aptos" pitchFamily="34" charset="-120"/>
+              </a:rPr>
+              <a:t>Assess where AI could support a workflow and where human review, legal authority,.</a:t>
+            </a:r>
+            <a:endParaRPr lang="en-US" sz="1380" dirty="0"/>
+          </a:p>
+        </p:txBody>
       </p:sp>
       <p:sp>
         <p:nvSpPr>
           <p:cNvPr id="16" name="Shape 14"/>
-          <p:cNvSpPr/>
-          <p:nvPr/>
-        </p:nvSpPr>
-        <p:spPr>
-          <a:xfrm>
-            <a:off x="9015984" y="2880360"/>
-            <a:ext cx="256032" cy="1005840"/>
-          </a:xfrm>
-          <a:prstGeom prst="rect">
-            <a:avLst/>
-          </a:prstGeom>
-          <a:solidFill>
-            <a:srgbClr val="D69A2D"/>
-          </a:solidFill>
-          <a:ln w="12700">
-            <a:solidFill>
-              <a:srgbClr val="D69A2D"/>
-            </a:solidFill>
-            <a:prstDash val="solid"/>
-          </a:ln>
-        </p:spPr>
-      </p:sp>
-      <p:sp>
-        <p:nvSpPr>
-          <p:cNvPr id="17" name="Shape 15"/>
-          <p:cNvSpPr/>
-          <p:nvPr/>
-        </p:nvSpPr>
-        <p:spPr>
-          <a:xfrm>
-            <a:off x="9454896" y="3319272"/>
-            <a:ext cx="256032" cy="566928"/>
-          </a:xfrm>
-          <a:prstGeom prst="rect">
-            <a:avLst/>
-          </a:prstGeom>
-          <a:solidFill>
-            <a:srgbClr val="6A4CA3"/>
-          </a:solidFill>
-          <a:ln w="12700">
-            <a:solidFill>
-              <a:srgbClr val="6A4CA3"/>
-            </a:solidFill>
-            <a:prstDash val="solid"/>
-          </a:ln>
-        </p:spPr>
-      </p:sp>
-      <p:sp>
-        <p:nvSpPr>
-          <p:cNvPr id="18" name="Shape 16"/>
-          <p:cNvSpPr/>
-          <p:nvPr/>
-        </p:nvSpPr>
-        <p:spPr>
-          <a:xfrm>
-            <a:off x="8019288" y="3886200"/>
-            <a:ext cx="2706624" cy="0"/>
-          </a:xfrm>
-          <a:prstGeom prst="line">
-            <a:avLst/>
-          </a:prstGeom>
-          <a:noFill/>
-          <a:ln w="15240">
-            <a:solidFill>
-              <a:srgbClr val="003A63"/>
-            </a:solidFill>
-            <a:prstDash val="solid"/>
-          </a:ln>
-        </p:spPr>
-      </p:sp>
-      <p:sp>
-        <p:nvSpPr>
-          <p:cNvPr id="19" name="Text 17"/>
-          <p:cNvSpPr/>
-          <p:nvPr/>
-        </p:nvSpPr>
-        <p:spPr>
-          <a:xfrm>
-            <a:off x="7863840" y="3017520"/>
-            <a:ext cx="3017520" cy="201168"/>
-          </a:xfrm>
-          <a:prstGeom prst="rect">
-            <a:avLst/>
-          </a:prstGeom>
-          <a:noFill/>
-          <a:ln/>
-        </p:spPr>
-        <p:txBody>
-          <a:bodyPr wrap="square" lIns="0" tIns="0" rIns="0" bIns="0" rtlCol="0" anchor="ctr"/>
-          <a:lstStyle/>
-          <a:p>
-            <a:pPr algn="ctr" indent="0" marL="0">
-              <a:buNone/>
-            </a:pPr>
-            <a:r>
-              <a:rPr lang="en-US" sz="1050" b="1" dirty="0">
-                <a:solidFill>
-                  <a:srgbClr val="003A63"/>
-                </a:solidFill>
-                <a:latin typeface="Aptos" pitchFamily="34" charset="0"/>
-                <a:ea typeface="Aptos" pitchFamily="34" charset="-122"/>
-                <a:cs typeface="Aptos" pitchFamily="34" charset="-120"/>
-              </a:rPr>
-              <a:t>Measure and monitor</a:t>
-            </a:r>
-            <a:endParaRPr lang="en-US" sz="1050" dirty="0"/>
-          </a:p>
-        </p:txBody>
-      </p:sp>
-      <p:sp>
-        <p:nvSpPr>
-          <p:cNvPr id="20" name="Shape 18"/>
           <p:cNvSpPr/>
           <p:nvPr/>
         </p:nvSpPr>
@@ -17076,7 +15950,7 @@
       </p:sp>
       <p:sp>
         <p:nvSpPr>
-          <p:cNvPr id="21" name="Text 19"/>
+          <p:cNvPr id="17" name="Text 15"/>
           <p:cNvSpPr/>
           <p:nvPr/>
         </p:nvSpPr>
@@ -17115,7 +15989,7 @@
       </p:sp>
       <p:sp>
         <p:nvSpPr>
-          <p:cNvPr id="22" name="Text 20"/>
+          <p:cNvPr id="18" name="Text 16"/>
           <p:cNvSpPr/>
           <p:nvPr/>
         </p:nvSpPr>
@@ -17595,13 +16469,11 @@
             </a:avLst>
           </a:prstGeom>
           <a:solidFill>
-            <a:srgbClr val="FFFFFF">
-              <a:alpha val="88000"/>
-            </a:srgbClr>
+            <a:srgbClr val="FFFFFF"/>
           </a:solidFill>
           <a:ln w="12700">
             <a:solidFill>
-              <a:srgbClr val="D6E8F2"/>
+              <a:srgbClr val="B9D7E6"/>
             </a:solidFill>
             <a:prstDash val="solid"/>
           </a:ln>
@@ -17609,169 +16481,84 @@
       </p:sp>
       <p:sp>
         <p:nvSpPr>
-          <p:cNvPr id="14" name="Shape 12"/>
-          <p:cNvSpPr/>
-          <p:nvPr/>
-        </p:nvSpPr>
-        <p:spPr>
-          <a:xfrm>
-            <a:off x="8138160" y="3474720"/>
-            <a:ext cx="256032" cy="411480"/>
-          </a:xfrm>
-          <a:prstGeom prst="rect">
-            <a:avLst/>
-          </a:prstGeom>
-          <a:solidFill>
-            <a:srgbClr val="0068B7"/>
-          </a:solidFill>
-          <a:ln w="12700">
-            <a:solidFill>
-              <a:srgbClr val="0068B7"/>
-            </a:solidFill>
-            <a:prstDash val="solid"/>
-          </a:ln>
-        </p:spPr>
-      </p:sp>
-      <p:sp>
-        <p:nvSpPr>
-          <p:cNvPr id="15" name="Shape 13"/>
-          <p:cNvSpPr/>
-          <p:nvPr/>
-        </p:nvSpPr>
-        <p:spPr>
-          <a:xfrm>
-            <a:off x="8577072" y="3172968"/>
-            <a:ext cx="256032" cy="713232"/>
-          </a:xfrm>
-          <a:prstGeom prst="rect">
-            <a:avLst/>
-          </a:prstGeom>
-          <a:solidFill>
-            <a:srgbClr val="2F8A28"/>
-          </a:solidFill>
-          <a:ln w="12700">
-            <a:solidFill>
-              <a:srgbClr val="2F8A28"/>
-            </a:solidFill>
-            <a:prstDash val="solid"/>
-          </a:ln>
-        </p:spPr>
+          <p:cNvPr id="14" name="Text 12"/>
+          <p:cNvSpPr/>
+          <p:nvPr/>
+        </p:nvSpPr>
+        <p:spPr>
+          <a:xfrm>
+            <a:off x="7799832" y="2935224"/>
+            <a:ext cx="3145536" cy="256032"/>
+          </a:xfrm>
+          <a:prstGeom prst="rect">
+            <a:avLst/>
+          </a:prstGeom>
+          <a:noFill/>
+          <a:ln/>
+        </p:spPr>
+        <p:txBody>
+          <a:bodyPr wrap="square" lIns="0" tIns="0" rIns="0" bIns="0" rtlCol="0" anchor="ctr"/>
+          <a:lstStyle/>
+          <a:p>
+            <a:pPr indent="0" marL="0">
+              <a:buNone/>
+            </a:pPr>
+            <a:r>
+              <a:rPr lang="en-US" sz="1300" b="1" dirty="0">
+                <a:solidFill>
+                  <a:srgbClr val="0068B7"/>
+                </a:solidFill>
+                <a:latin typeface="Aptos" pitchFamily="34" charset="0"/>
+                <a:ea typeface="Aptos" pitchFamily="34" charset="-122"/>
+                <a:cs typeface="Aptos" pitchFamily="34" charset="-120"/>
+              </a:rPr>
+              <a:t>Concept checkpoints</a:t>
+            </a:r>
+            <a:endParaRPr lang="en-US" sz="1300" dirty="0"/>
+          </a:p>
+        </p:txBody>
+      </p:sp>
+      <p:sp>
+        <p:nvSpPr>
+          <p:cNvPr id="15" name="Text 13"/>
+          <p:cNvSpPr/>
+          <p:nvPr/>
+        </p:nvSpPr>
+        <p:spPr>
+          <a:xfrm>
+            <a:off x="7818120" y="3300984"/>
+            <a:ext cx="3090672" cy="877824"/>
+          </a:xfrm>
+          <a:prstGeom prst="rect">
+            <a:avLst/>
+          </a:prstGeom>
+          <a:noFill/>
+          <a:ln/>
+        </p:spPr>
+        <p:txBody>
+          <a:bodyPr wrap="square" lIns="254" tIns="254" rIns="254" bIns="254" rtlCol="0" anchor="t">
+            <a:normAutofit/>
+          </a:bodyPr>
+          <a:lstStyle/>
+          <a:p>
+            <a:r>
+              <a:rPr lang="en-US" sz="1380" dirty="0">
+                <a:solidFill>
+                  <a:srgbClr val="17364A"/>
+                </a:solidFill>
+                <a:latin typeface="Aptos" pitchFamily="34" charset="0"/>
+                <a:ea typeface="Aptos" pitchFamily="34" charset="-122"/>
+                <a:cs typeface="Aptos" pitchFamily="34" charset="-120"/>
+              </a:rPr>
+              <a:t>Produce an AI-enabled workflow architecture map and readiness memo that can support.</a:t>
+            </a:r>
+            <a:endParaRPr lang="en-US" sz="1380" dirty="0"/>
+          </a:p>
+        </p:txBody>
       </p:sp>
       <p:sp>
         <p:nvSpPr>
           <p:cNvPr id="16" name="Shape 14"/>
-          <p:cNvSpPr/>
-          <p:nvPr/>
-        </p:nvSpPr>
-        <p:spPr>
-          <a:xfrm>
-            <a:off x="9015984" y="2880360"/>
-            <a:ext cx="256032" cy="1005840"/>
-          </a:xfrm>
-          <a:prstGeom prst="rect">
-            <a:avLst/>
-          </a:prstGeom>
-          <a:solidFill>
-            <a:srgbClr val="D69A2D"/>
-          </a:solidFill>
-          <a:ln w="12700">
-            <a:solidFill>
-              <a:srgbClr val="D69A2D"/>
-            </a:solidFill>
-            <a:prstDash val="solid"/>
-          </a:ln>
-        </p:spPr>
-      </p:sp>
-      <p:sp>
-        <p:nvSpPr>
-          <p:cNvPr id="17" name="Shape 15"/>
-          <p:cNvSpPr/>
-          <p:nvPr/>
-        </p:nvSpPr>
-        <p:spPr>
-          <a:xfrm>
-            <a:off x="9454896" y="3319272"/>
-            <a:ext cx="256032" cy="566928"/>
-          </a:xfrm>
-          <a:prstGeom prst="rect">
-            <a:avLst/>
-          </a:prstGeom>
-          <a:solidFill>
-            <a:srgbClr val="6A4CA3"/>
-          </a:solidFill>
-          <a:ln w="12700">
-            <a:solidFill>
-              <a:srgbClr val="6A4CA3"/>
-            </a:solidFill>
-            <a:prstDash val="solid"/>
-          </a:ln>
-        </p:spPr>
-      </p:sp>
-      <p:sp>
-        <p:nvSpPr>
-          <p:cNvPr id="18" name="Shape 16"/>
-          <p:cNvSpPr/>
-          <p:nvPr/>
-        </p:nvSpPr>
-        <p:spPr>
-          <a:xfrm>
-            <a:off x="8019288" y="3886200"/>
-            <a:ext cx="2706624" cy="0"/>
-          </a:xfrm>
-          <a:prstGeom prst="line">
-            <a:avLst/>
-          </a:prstGeom>
-          <a:noFill/>
-          <a:ln w="15240">
-            <a:solidFill>
-              <a:srgbClr val="003A63"/>
-            </a:solidFill>
-            <a:prstDash val="solid"/>
-          </a:ln>
-        </p:spPr>
-      </p:sp>
-      <p:sp>
-        <p:nvSpPr>
-          <p:cNvPr id="19" name="Text 17"/>
-          <p:cNvSpPr/>
-          <p:nvPr/>
-        </p:nvSpPr>
-        <p:spPr>
-          <a:xfrm>
-            <a:off x="7863840" y="3017520"/>
-            <a:ext cx="3017520" cy="201168"/>
-          </a:xfrm>
-          <a:prstGeom prst="rect">
-            <a:avLst/>
-          </a:prstGeom>
-          <a:noFill/>
-          <a:ln/>
-        </p:spPr>
-        <p:txBody>
-          <a:bodyPr wrap="square" lIns="0" tIns="0" rIns="0" bIns="0" rtlCol="0" anchor="ctr"/>
-          <a:lstStyle/>
-          <a:p>
-            <a:pPr algn="ctr" indent="0" marL="0">
-              <a:buNone/>
-            </a:pPr>
-            <a:r>
-              <a:rPr lang="en-US" sz="1050" b="1" dirty="0">
-                <a:solidFill>
-                  <a:srgbClr val="003A63"/>
-                </a:solidFill>
-                <a:latin typeface="Aptos" pitchFamily="34" charset="0"/>
-                <a:ea typeface="Aptos" pitchFamily="34" charset="-122"/>
-                <a:cs typeface="Aptos" pitchFamily="34" charset="-120"/>
-              </a:rPr>
-              <a:t>Measure and monitor</a:t>
-            </a:r>
-            <a:endParaRPr lang="en-US" sz="1050" dirty="0"/>
-          </a:p>
-        </p:txBody>
-      </p:sp>
-      <p:sp>
-        <p:nvSpPr>
-          <p:cNvPr id="20" name="Shape 18"/>
           <p:cNvSpPr/>
           <p:nvPr/>
         </p:nvSpPr>
@@ -17798,7 +16585,7 @@
       </p:sp>
       <p:sp>
         <p:nvSpPr>
-          <p:cNvPr id="21" name="Text 19"/>
+          <p:cNvPr id="17" name="Text 15"/>
           <p:cNvSpPr/>
           <p:nvPr/>
         </p:nvSpPr>
@@ -17837,7 +16624,7 @@
       </p:sp>
       <p:sp>
         <p:nvSpPr>
-          <p:cNvPr id="22" name="Text 20"/>
+          <p:cNvPr id="18" name="Text 16"/>
           <p:cNvSpPr/>
           <p:nvPr/>
         </p:nvSpPr>
@@ -18345,13 +17132,11 @@
             </a:avLst>
           </a:prstGeom>
           <a:solidFill>
-            <a:srgbClr val="FFFFFF">
-              <a:alpha val="88000"/>
-            </a:srgbClr>
+            <a:srgbClr val="FFFFFF"/>
           </a:solidFill>
           <a:ln w="12700">
             <a:solidFill>
-              <a:srgbClr val="D6E8F2"/>
+              <a:srgbClr val="B9D7E6"/>
             </a:solidFill>
             <a:prstDash val="solid"/>
           </a:ln>
@@ -18359,169 +17144,112 @@
       </p:sp>
       <p:sp>
         <p:nvSpPr>
-          <p:cNvPr id="14" name="Shape 12"/>
-          <p:cNvSpPr/>
-          <p:nvPr/>
-        </p:nvSpPr>
-        <p:spPr>
-          <a:xfrm>
-            <a:off x="8138160" y="3474720"/>
-            <a:ext cx="256032" cy="411480"/>
-          </a:xfrm>
-          <a:prstGeom prst="rect">
-            <a:avLst/>
-          </a:prstGeom>
-          <a:solidFill>
-            <a:srgbClr val="0068B7"/>
-          </a:solidFill>
-          <a:ln w="12700">
-            <a:solidFill>
-              <a:srgbClr val="0068B7"/>
-            </a:solidFill>
-            <a:prstDash val="solid"/>
-          </a:ln>
-        </p:spPr>
-      </p:sp>
-      <p:sp>
-        <p:nvSpPr>
-          <p:cNvPr id="15" name="Shape 13"/>
-          <p:cNvSpPr/>
-          <p:nvPr/>
-        </p:nvSpPr>
-        <p:spPr>
-          <a:xfrm>
-            <a:off x="8577072" y="3172968"/>
-            <a:ext cx="256032" cy="713232"/>
-          </a:xfrm>
-          <a:prstGeom prst="rect">
-            <a:avLst/>
-          </a:prstGeom>
-          <a:solidFill>
-            <a:srgbClr val="2F8A28"/>
-          </a:solidFill>
-          <a:ln w="12700">
-            <a:solidFill>
-              <a:srgbClr val="2F8A28"/>
-            </a:solidFill>
-            <a:prstDash val="solid"/>
-          </a:ln>
-        </p:spPr>
+          <p:cNvPr id="14" name="Text 12"/>
+          <p:cNvSpPr/>
+          <p:nvPr/>
+        </p:nvSpPr>
+        <p:spPr>
+          <a:xfrm>
+            <a:off x="7799832" y="2935224"/>
+            <a:ext cx="3145536" cy="256032"/>
+          </a:xfrm>
+          <a:prstGeom prst="rect">
+            <a:avLst/>
+          </a:prstGeom>
+          <a:noFill/>
+          <a:ln/>
+        </p:spPr>
+        <p:txBody>
+          <a:bodyPr wrap="square" lIns="0" tIns="0" rIns="0" bIns="0" rtlCol="0" anchor="ctr"/>
+          <a:lstStyle/>
+          <a:p>
+            <a:pPr indent="0" marL="0">
+              <a:buNone/>
+            </a:pPr>
+            <a:r>
+              <a:rPr lang="en-US" sz="1300" b="1" dirty="0">
+                <a:solidFill>
+                  <a:srgbClr val="0068B7"/>
+                </a:solidFill>
+                <a:latin typeface="Aptos" pitchFamily="34" charset="0"/>
+                <a:ea typeface="Aptos" pitchFamily="34" charset="-122"/>
+                <a:cs typeface="Aptos" pitchFamily="34" charset="-120"/>
+              </a:rPr>
+              <a:t>Concept checkpoints</a:t>
+            </a:r>
+            <a:endParaRPr lang="en-US" sz="1300" dirty="0"/>
+          </a:p>
+        </p:txBody>
+      </p:sp>
+      <p:sp>
+        <p:nvSpPr>
+          <p:cNvPr id="15" name="Text 13"/>
+          <p:cNvSpPr/>
+          <p:nvPr/>
+        </p:nvSpPr>
+        <p:spPr>
+          <a:xfrm>
+            <a:off x="7818120" y="3300984"/>
+            <a:ext cx="3090672" cy="877824"/>
+          </a:xfrm>
+          <a:prstGeom prst="rect">
+            <a:avLst/>
+          </a:prstGeom>
+          <a:noFill/>
+          <a:ln/>
+        </p:spPr>
+        <p:txBody>
+          <a:bodyPr wrap="square" lIns="254" tIns="254" rIns="254" bIns="254" rtlCol="0" anchor="t">
+            <a:normAutofit/>
+          </a:bodyPr>
+          <a:lstStyle/>
+          <a:p>
+            <a:r>
+              <a:rPr lang="en-US" sz="1380" dirty="0">
+                <a:solidFill>
+                  <a:srgbClr val="17364A"/>
+                </a:solidFill>
+                <a:latin typeface="Aptos" pitchFamily="34" charset="0"/>
+                <a:ea typeface="Aptos" pitchFamily="34" charset="-122"/>
+                <a:cs typeface="Aptos" pitchFamily="34" charset="-120"/>
+              </a:rPr>
+              <a:t>Every AI-supported workflow depends on the quality, structure, timeliness, governance, and.</a:t>
+            </a:r>
+            <a:endParaRPr lang="en-US" sz="1380" dirty="0"/>
+          </a:p>
+          <a:p>
+            <a:r>
+              <a:rPr lang="en-US" sz="1380" dirty="0">
+                <a:solidFill>
+                  <a:srgbClr val="17364A"/>
+                </a:solidFill>
+                <a:latin typeface="Aptos" pitchFamily="34" charset="0"/>
+                <a:ea typeface="Aptos" pitchFamily="34" charset="-122"/>
+                <a:cs typeface="Aptos" pitchFamily="34" charset="-120"/>
+              </a:rPr>
+              <a:t>A department cannot responsibly deploy AI for surveillance, case investigation,.</a:t>
+            </a:r>
+            <a:endParaRPr lang="en-US" sz="1380" dirty="0"/>
+          </a:p>
+          <a:p>
+            <a:r>
+              <a:rPr lang="en-US" sz="1380" dirty="0">
+                <a:solidFill>
+                  <a:srgbClr val="17364A"/>
+                </a:solidFill>
+                <a:latin typeface="Aptos" pitchFamily="34" charset="0"/>
+                <a:ea typeface="Aptos" pitchFamily="34" charset="-122"/>
+                <a:cs typeface="Aptos" pitchFamily="34" charset="-120"/>
+              </a:rPr>
+              <a:t>This module introduces public health data modernization as the technical foundation for AI.</a:t>
+            </a:r>
+            <a:endParaRPr lang="en-US" sz="1380" dirty="0"/>
+          </a:p>
+        </p:txBody>
       </p:sp>
       <p:sp>
         <p:nvSpPr>
           <p:cNvPr id="16" name="Shape 14"/>
-          <p:cNvSpPr/>
-          <p:nvPr/>
-        </p:nvSpPr>
-        <p:spPr>
-          <a:xfrm>
-            <a:off x="9015984" y="2880360"/>
-            <a:ext cx="256032" cy="1005840"/>
-          </a:xfrm>
-          <a:prstGeom prst="rect">
-            <a:avLst/>
-          </a:prstGeom>
-          <a:solidFill>
-            <a:srgbClr val="D69A2D"/>
-          </a:solidFill>
-          <a:ln w="12700">
-            <a:solidFill>
-              <a:srgbClr val="D69A2D"/>
-            </a:solidFill>
-            <a:prstDash val="solid"/>
-          </a:ln>
-        </p:spPr>
-      </p:sp>
-      <p:sp>
-        <p:nvSpPr>
-          <p:cNvPr id="17" name="Shape 15"/>
-          <p:cNvSpPr/>
-          <p:nvPr/>
-        </p:nvSpPr>
-        <p:spPr>
-          <a:xfrm>
-            <a:off x="9454896" y="3319272"/>
-            <a:ext cx="256032" cy="566928"/>
-          </a:xfrm>
-          <a:prstGeom prst="rect">
-            <a:avLst/>
-          </a:prstGeom>
-          <a:solidFill>
-            <a:srgbClr val="6A4CA3"/>
-          </a:solidFill>
-          <a:ln w="12700">
-            <a:solidFill>
-              <a:srgbClr val="6A4CA3"/>
-            </a:solidFill>
-            <a:prstDash val="solid"/>
-          </a:ln>
-        </p:spPr>
-      </p:sp>
-      <p:sp>
-        <p:nvSpPr>
-          <p:cNvPr id="18" name="Shape 16"/>
-          <p:cNvSpPr/>
-          <p:nvPr/>
-        </p:nvSpPr>
-        <p:spPr>
-          <a:xfrm>
-            <a:off x="8019288" y="3886200"/>
-            <a:ext cx="2706624" cy="0"/>
-          </a:xfrm>
-          <a:prstGeom prst="line">
-            <a:avLst/>
-          </a:prstGeom>
-          <a:noFill/>
-          <a:ln w="15240">
-            <a:solidFill>
-              <a:srgbClr val="003A63"/>
-            </a:solidFill>
-            <a:prstDash val="solid"/>
-          </a:ln>
-        </p:spPr>
-      </p:sp>
-      <p:sp>
-        <p:nvSpPr>
-          <p:cNvPr id="19" name="Text 17"/>
-          <p:cNvSpPr/>
-          <p:nvPr/>
-        </p:nvSpPr>
-        <p:spPr>
-          <a:xfrm>
-            <a:off x="7863840" y="3017520"/>
-            <a:ext cx="3017520" cy="201168"/>
-          </a:xfrm>
-          <a:prstGeom prst="rect">
-            <a:avLst/>
-          </a:prstGeom>
-          <a:noFill/>
-          <a:ln/>
-        </p:spPr>
-        <p:txBody>
-          <a:bodyPr wrap="square" lIns="0" tIns="0" rIns="0" bIns="0" rtlCol="0" anchor="ctr"/>
-          <a:lstStyle/>
-          <a:p>
-            <a:pPr algn="ctr" indent="0" marL="0">
-              <a:buNone/>
-            </a:pPr>
-            <a:r>
-              <a:rPr lang="en-US" sz="1050" b="1" dirty="0">
-                <a:solidFill>
-                  <a:srgbClr val="003A63"/>
-                </a:solidFill>
-                <a:latin typeface="Aptos" pitchFamily="34" charset="0"/>
-                <a:ea typeface="Aptos" pitchFamily="34" charset="-122"/>
-                <a:cs typeface="Aptos" pitchFamily="34" charset="-120"/>
-              </a:rPr>
-              <a:t>Measure and monitor</a:t>
-            </a:r>
-            <a:endParaRPr lang="en-US" sz="1050" dirty="0"/>
-          </a:p>
-        </p:txBody>
-      </p:sp>
-      <p:sp>
-        <p:nvSpPr>
-          <p:cNvPr id="20" name="Shape 18"/>
           <p:cNvSpPr/>
           <p:nvPr/>
         </p:nvSpPr>
@@ -18548,7 +17276,7 @@
       </p:sp>
       <p:sp>
         <p:nvSpPr>
-          <p:cNvPr id="21" name="Text 19"/>
+          <p:cNvPr id="17" name="Text 15"/>
           <p:cNvSpPr/>
           <p:nvPr/>
         </p:nvSpPr>
@@ -18587,7 +17315,7 @@
       </p:sp>
       <p:sp>
         <p:nvSpPr>
-          <p:cNvPr id="22" name="Text 20"/>
+          <p:cNvPr id="18" name="Text 16"/>
           <p:cNvSpPr/>
           <p:nvPr/>
         </p:nvSpPr>
@@ -19095,13 +17823,11 @@
             </a:avLst>
           </a:prstGeom>
           <a:solidFill>
-            <a:srgbClr val="FFFFFF">
-              <a:alpha val="88000"/>
-            </a:srgbClr>
+            <a:srgbClr val="FFFFFF"/>
           </a:solidFill>
           <a:ln w="12700">
             <a:solidFill>
-              <a:srgbClr val="D6E8F2"/>
+              <a:srgbClr val="B9D7E6"/>
             </a:solidFill>
             <a:prstDash val="solid"/>
           </a:ln>
@@ -19109,169 +17835,112 @@
       </p:sp>
       <p:sp>
         <p:nvSpPr>
-          <p:cNvPr id="14" name="Shape 12"/>
-          <p:cNvSpPr/>
-          <p:nvPr/>
-        </p:nvSpPr>
-        <p:spPr>
-          <a:xfrm>
-            <a:off x="8138160" y="3474720"/>
-            <a:ext cx="256032" cy="411480"/>
-          </a:xfrm>
-          <a:prstGeom prst="rect">
-            <a:avLst/>
-          </a:prstGeom>
-          <a:solidFill>
-            <a:srgbClr val="0068B7"/>
-          </a:solidFill>
-          <a:ln w="12700">
-            <a:solidFill>
-              <a:srgbClr val="0068B7"/>
-            </a:solidFill>
-            <a:prstDash val="solid"/>
-          </a:ln>
-        </p:spPr>
-      </p:sp>
-      <p:sp>
-        <p:nvSpPr>
-          <p:cNvPr id="15" name="Shape 13"/>
-          <p:cNvSpPr/>
-          <p:nvPr/>
-        </p:nvSpPr>
-        <p:spPr>
-          <a:xfrm>
-            <a:off x="8577072" y="3172968"/>
-            <a:ext cx="256032" cy="713232"/>
-          </a:xfrm>
-          <a:prstGeom prst="rect">
-            <a:avLst/>
-          </a:prstGeom>
-          <a:solidFill>
-            <a:srgbClr val="2F8A28"/>
-          </a:solidFill>
-          <a:ln w="12700">
-            <a:solidFill>
-              <a:srgbClr val="2F8A28"/>
-            </a:solidFill>
-            <a:prstDash val="solid"/>
-          </a:ln>
-        </p:spPr>
+          <p:cNvPr id="14" name="Text 12"/>
+          <p:cNvSpPr/>
+          <p:nvPr/>
+        </p:nvSpPr>
+        <p:spPr>
+          <a:xfrm>
+            <a:off x="7799832" y="2935224"/>
+            <a:ext cx="3145536" cy="256032"/>
+          </a:xfrm>
+          <a:prstGeom prst="rect">
+            <a:avLst/>
+          </a:prstGeom>
+          <a:noFill/>
+          <a:ln/>
+        </p:spPr>
+        <p:txBody>
+          <a:bodyPr wrap="square" lIns="0" tIns="0" rIns="0" bIns="0" rtlCol="0" anchor="ctr"/>
+          <a:lstStyle/>
+          <a:p>
+            <a:pPr indent="0" marL="0">
+              <a:buNone/>
+            </a:pPr>
+            <a:r>
+              <a:rPr lang="en-US" sz="1300" b="1" dirty="0">
+                <a:solidFill>
+                  <a:srgbClr val="0068B7"/>
+                </a:solidFill>
+                <a:latin typeface="Aptos" pitchFamily="34" charset="0"/>
+                <a:ea typeface="Aptos" pitchFamily="34" charset="-122"/>
+                <a:cs typeface="Aptos" pitchFamily="34" charset="-120"/>
+              </a:rPr>
+              <a:t>Concept checkpoints</a:t>
+            </a:r>
+            <a:endParaRPr lang="en-US" sz="1300" dirty="0"/>
+          </a:p>
+        </p:txBody>
+      </p:sp>
+      <p:sp>
+        <p:nvSpPr>
+          <p:cNvPr id="15" name="Text 13"/>
+          <p:cNvSpPr/>
+          <p:nvPr/>
+        </p:nvSpPr>
+        <p:spPr>
+          <a:xfrm>
+            <a:off x="7818120" y="3300984"/>
+            <a:ext cx="3090672" cy="877824"/>
+          </a:xfrm>
+          <a:prstGeom prst="rect">
+            <a:avLst/>
+          </a:prstGeom>
+          <a:noFill/>
+          <a:ln/>
+        </p:spPr>
+        <p:txBody>
+          <a:bodyPr wrap="square" lIns="254" tIns="254" rIns="254" bIns="254" rtlCol="0" anchor="t">
+            <a:normAutofit/>
+          </a:bodyPr>
+          <a:lstStyle/>
+          <a:p>
+            <a:r>
+              <a:rPr lang="en-US" sz="1380" dirty="0">
+                <a:solidFill>
+                  <a:srgbClr val="17364A"/>
+                </a:solidFill>
+                <a:latin typeface="Aptos" pitchFamily="34" charset="0"/>
+                <a:ea typeface="Aptos" pitchFamily="34" charset="-122"/>
+                <a:cs typeface="Aptos" pitchFamily="34" charset="-120"/>
+              </a:rPr>
+              <a:t>Public health agencies often feel pressure to adopt AI tools quickly, especially when.</a:t>
+            </a:r>
+            <a:endParaRPr lang="en-US" sz="1380" dirty="0"/>
+          </a:p>
+          <a:p>
+            <a:r>
+              <a:rPr lang="en-US" sz="1380" dirty="0">
+                <a:solidFill>
+                  <a:srgbClr val="17364A"/>
+                </a:solidFill>
+                <a:latin typeface="Aptos" pitchFamily="34" charset="0"/>
+                <a:ea typeface="Aptos" pitchFamily="34" charset="-122"/>
+                <a:cs typeface="Aptos" pitchFamily="34" charset="-120"/>
+              </a:rPr>
+              <a:t>AI tools may appear to offer immediate relief by summarizing records, drafting.</a:t>
+            </a:r>
+            <a:endParaRPr lang="en-US" sz="1380" dirty="0"/>
+          </a:p>
+          <a:p>
+            <a:r>
+              <a:rPr lang="en-US" sz="1380" dirty="0">
+                <a:solidFill>
+                  <a:srgbClr val="17364A"/>
+                </a:solidFill>
+                <a:latin typeface="Aptos" pitchFamily="34" charset="0"/>
+                <a:ea typeface="Aptos" pitchFamily="34" charset="-122"/>
+                <a:cs typeface="Aptos" pitchFamily="34" charset="-120"/>
+              </a:rPr>
+              <a:t>A model that summarizes case reports may produce incomplete summaries if the source data.</a:t>
+            </a:r>
+            <a:endParaRPr lang="en-US" sz="1380" dirty="0"/>
+          </a:p>
+        </p:txBody>
       </p:sp>
       <p:sp>
         <p:nvSpPr>
           <p:cNvPr id="16" name="Shape 14"/>
-          <p:cNvSpPr/>
-          <p:nvPr/>
-        </p:nvSpPr>
-        <p:spPr>
-          <a:xfrm>
-            <a:off x="9015984" y="2880360"/>
-            <a:ext cx="256032" cy="1005840"/>
-          </a:xfrm>
-          <a:prstGeom prst="rect">
-            <a:avLst/>
-          </a:prstGeom>
-          <a:solidFill>
-            <a:srgbClr val="D69A2D"/>
-          </a:solidFill>
-          <a:ln w="12700">
-            <a:solidFill>
-              <a:srgbClr val="D69A2D"/>
-            </a:solidFill>
-            <a:prstDash val="solid"/>
-          </a:ln>
-        </p:spPr>
-      </p:sp>
-      <p:sp>
-        <p:nvSpPr>
-          <p:cNvPr id="17" name="Shape 15"/>
-          <p:cNvSpPr/>
-          <p:nvPr/>
-        </p:nvSpPr>
-        <p:spPr>
-          <a:xfrm>
-            <a:off x="9454896" y="3319272"/>
-            <a:ext cx="256032" cy="566928"/>
-          </a:xfrm>
-          <a:prstGeom prst="rect">
-            <a:avLst/>
-          </a:prstGeom>
-          <a:solidFill>
-            <a:srgbClr val="6A4CA3"/>
-          </a:solidFill>
-          <a:ln w="12700">
-            <a:solidFill>
-              <a:srgbClr val="6A4CA3"/>
-            </a:solidFill>
-            <a:prstDash val="solid"/>
-          </a:ln>
-        </p:spPr>
-      </p:sp>
-      <p:sp>
-        <p:nvSpPr>
-          <p:cNvPr id="18" name="Shape 16"/>
-          <p:cNvSpPr/>
-          <p:nvPr/>
-        </p:nvSpPr>
-        <p:spPr>
-          <a:xfrm>
-            <a:off x="8019288" y="3886200"/>
-            <a:ext cx="2706624" cy="0"/>
-          </a:xfrm>
-          <a:prstGeom prst="line">
-            <a:avLst/>
-          </a:prstGeom>
-          <a:noFill/>
-          <a:ln w="15240">
-            <a:solidFill>
-              <a:srgbClr val="003A63"/>
-            </a:solidFill>
-            <a:prstDash val="solid"/>
-          </a:ln>
-        </p:spPr>
-      </p:sp>
-      <p:sp>
-        <p:nvSpPr>
-          <p:cNvPr id="19" name="Text 17"/>
-          <p:cNvSpPr/>
-          <p:nvPr/>
-        </p:nvSpPr>
-        <p:spPr>
-          <a:xfrm>
-            <a:off x="7863840" y="3017520"/>
-            <a:ext cx="3017520" cy="201168"/>
-          </a:xfrm>
-          <a:prstGeom prst="rect">
-            <a:avLst/>
-          </a:prstGeom>
-          <a:noFill/>
-          <a:ln/>
-        </p:spPr>
-        <p:txBody>
-          <a:bodyPr wrap="square" lIns="0" tIns="0" rIns="0" bIns="0" rtlCol="0" anchor="ctr"/>
-          <a:lstStyle/>
-          <a:p>
-            <a:pPr algn="ctr" indent="0" marL="0">
-              <a:buNone/>
-            </a:pPr>
-            <a:r>
-              <a:rPr lang="en-US" sz="1050" b="1" dirty="0">
-                <a:solidFill>
-                  <a:srgbClr val="003A63"/>
-                </a:solidFill>
-                <a:latin typeface="Aptos" pitchFamily="34" charset="0"/>
-                <a:ea typeface="Aptos" pitchFamily="34" charset="-122"/>
-                <a:cs typeface="Aptos" pitchFamily="34" charset="-120"/>
-              </a:rPr>
-              <a:t>Measure and monitor</a:t>
-            </a:r>
-            <a:endParaRPr lang="en-US" sz="1050" dirty="0"/>
-          </a:p>
-        </p:txBody>
-      </p:sp>
-      <p:sp>
-        <p:nvSpPr>
-          <p:cNvPr id="20" name="Shape 18"/>
           <p:cNvSpPr/>
           <p:nvPr/>
         </p:nvSpPr>
@@ -19298,7 +17967,7 @@
       </p:sp>
       <p:sp>
         <p:nvSpPr>
-          <p:cNvPr id="21" name="Text 19"/>
+          <p:cNvPr id="17" name="Text 15"/>
           <p:cNvSpPr/>
           <p:nvPr/>
         </p:nvSpPr>
@@ -19337,7 +18006,7 @@
       </p:sp>
       <p:sp>
         <p:nvSpPr>
-          <p:cNvPr id="22" name="Text 20"/>
+          <p:cNvPr id="18" name="Text 16"/>
           <p:cNvSpPr/>
           <p:nvPr/>
         </p:nvSpPr>
@@ -19845,13 +18514,11 @@
             </a:avLst>
           </a:prstGeom>
           <a:solidFill>
-            <a:srgbClr val="FFFFFF">
-              <a:alpha val="88000"/>
-            </a:srgbClr>
+            <a:srgbClr val="FFFFFF"/>
           </a:solidFill>
           <a:ln w="12700">
             <a:solidFill>
-              <a:srgbClr val="D6E8F2"/>
+              <a:srgbClr val="B9D7E6"/>
             </a:solidFill>
             <a:prstDash val="solid"/>
           </a:ln>
@@ -19859,169 +18526,112 @@
       </p:sp>
       <p:sp>
         <p:nvSpPr>
-          <p:cNvPr id="14" name="Shape 12"/>
-          <p:cNvSpPr/>
-          <p:nvPr/>
-        </p:nvSpPr>
-        <p:spPr>
-          <a:xfrm>
-            <a:off x="8138160" y="3474720"/>
-            <a:ext cx="256032" cy="411480"/>
-          </a:xfrm>
-          <a:prstGeom prst="rect">
-            <a:avLst/>
-          </a:prstGeom>
-          <a:solidFill>
-            <a:srgbClr val="0068B7"/>
-          </a:solidFill>
-          <a:ln w="12700">
-            <a:solidFill>
-              <a:srgbClr val="0068B7"/>
-            </a:solidFill>
-            <a:prstDash val="solid"/>
-          </a:ln>
-        </p:spPr>
-      </p:sp>
-      <p:sp>
-        <p:nvSpPr>
-          <p:cNvPr id="15" name="Shape 13"/>
-          <p:cNvSpPr/>
-          <p:nvPr/>
-        </p:nvSpPr>
-        <p:spPr>
-          <a:xfrm>
-            <a:off x="8577072" y="3172968"/>
-            <a:ext cx="256032" cy="713232"/>
-          </a:xfrm>
-          <a:prstGeom prst="rect">
-            <a:avLst/>
-          </a:prstGeom>
-          <a:solidFill>
-            <a:srgbClr val="2F8A28"/>
-          </a:solidFill>
-          <a:ln w="12700">
-            <a:solidFill>
-              <a:srgbClr val="2F8A28"/>
-            </a:solidFill>
-            <a:prstDash val="solid"/>
-          </a:ln>
-        </p:spPr>
+          <p:cNvPr id="14" name="Text 12"/>
+          <p:cNvSpPr/>
+          <p:nvPr/>
+        </p:nvSpPr>
+        <p:spPr>
+          <a:xfrm>
+            <a:off x="7799832" y="2935224"/>
+            <a:ext cx="3145536" cy="256032"/>
+          </a:xfrm>
+          <a:prstGeom prst="rect">
+            <a:avLst/>
+          </a:prstGeom>
+          <a:noFill/>
+          <a:ln/>
+        </p:spPr>
+        <p:txBody>
+          <a:bodyPr wrap="square" lIns="0" tIns="0" rIns="0" bIns="0" rtlCol="0" anchor="ctr"/>
+          <a:lstStyle/>
+          <a:p>
+            <a:pPr indent="0" marL="0">
+              <a:buNone/>
+            </a:pPr>
+            <a:r>
+              <a:rPr lang="en-US" sz="1300" b="1" dirty="0">
+                <a:solidFill>
+                  <a:srgbClr val="0068B7"/>
+                </a:solidFill>
+                <a:latin typeface="Aptos" pitchFamily="34" charset="0"/>
+                <a:ea typeface="Aptos" pitchFamily="34" charset="-122"/>
+                <a:cs typeface="Aptos" pitchFamily="34" charset="-120"/>
+              </a:rPr>
+              <a:t>Concept checkpoints</a:t>
+            </a:r>
+            <a:endParaRPr lang="en-US" sz="1300" dirty="0"/>
+          </a:p>
+        </p:txBody>
+      </p:sp>
+      <p:sp>
+        <p:nvSpPr>
+          <p:cNvPr id="15" name="Text 13"/>
+          <p:cNvSpPr/>
+          <p:nvPr/>
+        </p:nvSpPr>
+        <p:spPr>
+          <a:xfrm>
+            <a:off x="7818120" y="3300984"/>
+            <a:ext cx="3090672" cy="877824"/>
+          </a:xfrm>
+          <a:prstGeom prst="rect">
+            <a:avLst/>
+          </a:prstGeom>
+          <a:noFill/>
+          <a:ln/>
+        </p:spPr>
+        <p:txBody>
+          <a:bodyPr wrap="square" lIns="254" tIns="254" rIns="254" bIns="254" rtlCol="0" anchor="t">
+            <a:normAutofit/>
+          </a:bodyPr>
+          <a:lstStyle/>
+          <a:p>
+            <a:r>
+              <a:rPr lang="en-US" sz="1380" dirty="0">
+                <a:solidFill>
+                  <a:srgbClr val="17364A"/>
+                </a:solidFill>
+                <a:latin typeface="Aptos" pitchFamily="34" charset="0"/>
+                <a:ea typeface="Aptos" pitchFamily="34" charset="-122"/>
+                <a:cs typeface="Aptos" pitchFamily="34" charset="-120"/>
+              </a:rPr>
+              <a:t>Public health data modernization is the process of improving the systems, standards,.</a:t>
+            </a:r>
+            <a:endParaRPr lang="en-US" sz="1380" dirty="0"/>
+          </a:p>
+          <a:p>
+            <a:r>
+              <a:rPr lang="en-US" sz="1380" dirty="0">
+                <a:solidFill>
+                  <a:srgbClr val="17364A"/>
+                </a:solidFill>
+                <a:latin typeface="Aptos" pitchFamily="34" charset="0"/>
+                <a:ea typeface="Aptos" pitchFamily="34" charset="-122"/>
+                <a:cs typeface="Aptos" pitchFamily="34" charset="-120"/>
+              </a:rPr>
+              <a:t>Modernization includes technical components such as APIs, cloud platforms, data.</a:t>
+            </a:r>
+            <a:endParaRPr lang="en-US" sz="1380" dirty="0"/>
+          </a:p>
+          <a:p>
+            <a:r>
+              <a:rPr lang="en-US" sz="1380" dirty="0">
+                <a:solidFill>
+                  <a:srgbClr val="17364A"/>
+                </a:solidFill>
+                <a:latin typeface="Aptos" pitchFamily="34" charset="0"/>
+                <a:ea typeface="Aptos" pitchFamily="34" charset="-122"/>
+                <a:cs typeface="Aptos" pitchFamily="34" charset="-120"/>
+              </a:rPr>
+              <a:t>It also includes operational components such as data stewardship, governance review,.</a:t>
+            </a:r>
+            <a:endParaRPr lang="en-US" sz="1380" dirty="0"/>
+          </a:p>
+        </p:txBody>
       </p:sp>
       <p:sp>
         <p:nvSpPr>
           <p:cNvPr id="16" name="Shape 14"/>
-          <p:cNvSpPr/>
-          <p:nvPr/>
-        </p:nvSpPr>
-        <p:spPr>
-          <a:xfrm>
-            <a:off x="9015984" y="2880360"/>
-            <a:ext cx="256032" cy="1005840"/>
-          </a:xfrm>
-          <a:prstGeom prst="rect">
-            <a:avLst/>
-          </a:prstGeom>
-          <a:solidFill>
-            <a:srgbClr val="D69A2D"/>
-          </a:solidFill>
-          <a:ln w="12700">
-            <a:solidFill>
-              <a:srgbClr val="D69A2D"/>
-            </a:solidFill>
-            <a:prstDash val="solid"/>
-          </a:ln>
-        </p:spPr>
-      </p:sp>
-      <p:sp>
-        <p:nvSpPr>
-          <p:cNvPr id="17" name="Shape 15"/>
-          <p:cNvSpPr/>
-          <p:nvPr/>
-        </p:nvSpPr>
-        <p:spPr>
-          <a:xfrm>
-            <a:off x="9454896" y="3319272"/>
-            <a:ext cx="256032" cy="566928"/>
-          </a:xfrm>
-          <a:prstGeom prst="rect">
-            <a:avLst/>
-          </a:prstGeom>
-          <a:solidFill>
-            <a:srgbClr val="6A4CA3"/>
-          </a:solidFill>
-          <a:ln w="12700">
-            <a:solidFill>
-              <a:srgbClr val="6A4CA3"/>
-            </a:solidFill>
-            <a:prstDash val="solid"/>
-          </a:ln>
-        </p:spPr>
-      </p:sp>
-      <p:sp>
-        <p:nvSpPr>
-          <p:cNvPr id="18" name="Shape 16"/>
-          <p:cNvSpPr/>
-          <p:nvPr/>
-        </p:nvSpPr>
-        <p:spPr>
-          <a:xfrm>
-            <a:off x="8019288" y="3886200"/>
-            <a:ext cx="2706624" cy="0"/>
-          </a:xfrm>
-          <a:prstGeom prst="line">
-            <a:avLst/>
-          </a:prstGeom>
-          <a:noFill/>
-          <a:ln w="15240">
-            <a:solidFill>
-              <a:srgbClr val="003A63"/>
-            </a:solidFill>
-            <a:prstDash val="solid"/>
-          </a:ln>
-        </p:spPr>
-      </p:sp>
-      <p:sp>
-        <p:nvSpPr>
-          <p:cNvPr id="19" name="Text 17"/>
-          <p:cNvSpPr/>
-          <p:nvPr/>
-        </p:nvSpPr>
-        <p:spPr>
-          <a:xfrm>
-            <a:off x="7863840" y="3017520"/>
-            <a:ext cx="3017520" cy="201168"/>
-          </a:xfrm>
-          <a:prstGeom prst="rect">
-            <a:avLst/>
-          </a:prstGeom>
-          <a:noFill/>
-          <a:ln/>
-        </p:spPr>
-        <p:txBody>
-          <a:bodyPr wrap="square" lIns="0" tIns="0" rIns="0" bIns="0" rtlCol="0" anchor="ctr"/>
-          <a:lstStyle/>
-          <a:p>
-            <a:pPr algn="ctr" indent="0" marL="0">
-              <a:buNone/>
-            </a:pPr>
-            <a:r>
-              <a:rPr lang="en-US" sz="1050" b="1" dirty="0">
-                <a:solidFill>
-                  <a:srgbClr val="003A63"/>
-                </a:solidFill>
-                <a:latin typeface="Aptos" pitchFamily="34" charset="0"/>
-                <a:ea typeface="Aptos" pitchFamily="34" charset="-122"/>
-                <a:cs typeface="Aptos" pitchFamily="34" charset="-120"/>
-              </a:rPr>
-              <a:t>Measure and monitor</a:t>
-            </a:r>
-            <a:endParaRPr lang="en-US" sz="1050" dirty="0"/>
-          </a:p>
-        </p:txBody>
-      </p:sp>
-      <p:sp>
-        <p:nvSpPr>
-          <p:cNvPr id="20" name="Shape 18"/>
           <p:cNvSpPr/>
           <p:nvPr/>
         </p:nvSpPr>
@@ -20048,7 +18658,7 @@
       </p:sp>
       <p:sp>
         <p:nvSpPr>
-          <p:cNvPr id="21" name="Text 19"/>
+          <p:cNvPr id="17" name="Text 15"/>
           <p:cNvSpPr/>
           <p:nvPr/>
         </p:nvSpPr>
@@ -20087,7 +18697,7 @@
       </p:sp>
       <p:sp>
         <p:nvSpPr>
-          <p:cNvPr id="22" name="Text 20"/>
+          <p:cNvPr id="18" name="Text 16"/>
           <p:cNvSpPr/>
           <p:nvPr/>
         </p:nvSpPr>

--- a/downloads/presentations/modules/arc-200.pptx
+++ b/downloads/presentations/modules/arc-200.pptx
@@ -3539,49 +3539,58 @@
           <a:ln/>
         </p:spPr>
         <p:txBody>
-          <a:bodyPr wrap="square" lIns="635" tIns="635" rIns="635" bIns="635" rtlCol="0" anchor="t">
+          <a:bodyPr wrap="square" lIns="1016" tIns="1016" rIns="1016" bIns="1016" rtlCol="0" anchor="t">
             <a:normAutofit/>
           </a:bodyPr>
           <a:lstStyle/>
           <a:p>
+            <a:pPr indent="0" marL="0">
+              <a:buNone/>
+            </a:pPr>
             <a:r>
               <a:rPr lang="en-US" sz="2100" dirty="0">
                 <a:solidFill>
-                  <a:srgbClr val="17364A"/>
-                </a:solidFill>
-                <a:latin typeface="Aptos" pitchFamily="34" charset="0"/>
-                <a:ea typeface="Aptos" pitchFamily="34" charset="-122"/>
-                <a:cs typeface="Aptos" pitchFamily="34" charset="-120"/>
-              </a:rPr>
-              <a:t>System of record.</a:t>
+                  <a:srgbClr val="003A63"/>
+                </a:solidFill>
+                <a:latin typeface="Aptos" pitchFamily="34" charset="0"/>
+                <a:ea typeface="Aptos" pitchFamily="34" charset="-122"/>
+                <a:cs typeface="Aptos" pitchFamily="34" charset="-120"/>
+              </a:rPr>
+              <a:t>• System of record.</a:t>
             </a:r>
             <a:endParaRPr lang="en-US" sz="2100" dirty="0"/>
           </a:p>
           <a:p>
+            <a:pPr indent="0" marL="0">
+              <a:buNone/>
+            </a:pPr>
             <a:r>
               <a:rPr lang="en-US" sz="2100" dirty="0">
                 <a:solidFill>
-                  <a:srgbClr val="17364A"/>
-                </a:solidFill>
-                <a:latin typeface="Aptos" pitchFamily="34" charset="0"/>
-                <a:ea typeface="Aptos" pitchFamily="34" charset="-122"/>
-                <a:cs typeface="Aptos" pitchFamily="34" charset="-120"/>
-              </a:rPr>
-              <a:t>A system of record is the official system or process where public health information, decisions, and.</a:t>
+                  <a:srgbClr val="003A63"/>
+                </a:solidFill>
+                <a:latin typeface="Aptos" pitchFamily="34" charset="0"/>
+                <a:ea typeface="Aptos" pitchFamily="34" charset="-122"/>
+                <a:cs typeface="Aptos" pitchFamily="34" charset="-120"/>
+              </a:rPr>
+              <a:t>• A system of record is the official system or process where public health information,.</a:t>
             </a:r>
             <a:endParaRPr lang="en-US" sz="2100" dirty="0"/>
           </a:p>
           <a:p>
+            <a:pPr indent="0" marL="0">
+              <a:buNone/>
+            </a:pPr>
             <a:r>
               <a:rPr lang="en-US" sz="2100" dirty="0">
                 <a:solidFill>
-                  <a:srgbClr val="17364A"/>
-                </a:solidFill>
-                <a:latin typeface="Aptos" pitchFamily="34" charset="0"/>
-                <a:ea typeface="Aptos" pitchFamily="34" charset="-122"/>
-                <a:cs typeface="Aptos" pitchFamily="34" charset="-120"/>
-              </a:rPr>
-              <a:t>AI outputs should not automatically become the official record unless the agency has explicitly.</a:t>
+                  <a:srgbClr val="003A63"/>
+                </a:solidFill>
+                <a:latin typeface="Aptos" pitchFamily="34" charset="0"/>
+                <a:ea typeface="Aptos" pitchFamily="34" charset="-122"/>
+                <a:cs typeface="Aptos" pitchFamily="34" charset="-120"/>
+              </a:rPr>
+              <a:t>• AI outputs should not automatically become the official record unless the agency has explicitly.</a:t>
             </a:r>
             <a:endParaRPr lang="en-US" sz="2100" dirty="0"/>
           </a:p>
@@ -3661,17 +3670,17 @@
         </p:nvSpPr>
         <p:spPr>
           <a:xfrm>
-            <a:off x="7799832" y="1828800"/>
-            <a:ext cx="3145536" cy="685800"/>
-          </a:xfrm>
-          <a:prstGeom prst="rect">
-            <a:avLst/>
-          </a:prstGeom>
-          <a:noFill/>
-          <a:ln/>
-        </p:spPr>
-        <p:txBody>
-          <a:bodyPr wrap="square" lIns="0" tIns="0" rIns="0" bIns="0" rtlCol="0" anchor="t">
+            <a:off x="7799832" y="1801368"/>
+            <a:ext cx="3145536" cy="758952"/>
+          </a:xfrm>
+          <a:prstGeom prst="rect">
+            <a:avLst/>
+          </a:prstGeom>
+          <a:noFill/>
+          <a:ln/>
+        </p:spPr>
+        <p:txBody>
+          <a:bodyPr wrap="square" lIns="254" tIns="254" rIns="254" bIns="254" rtlCol="0" anchor="t">
             <a:normAutofit/>
           </a:bodyPr>
           <a:lstStyle/>
@@ -3680,7 +3689,7 @@
               <a:buNone/>
             </a:pPr>
             <a:r>
-              <a:rPr lang="en-US" sz="1550" dirty="0">
+              <a:rPr lang="en-US" sz="1320" dirty="0">
                 <a:solidFill>
                   <a:srgbClr val="17364A"/>
                 </a:solidFill>
@@ -3690,7 +3699,7 @@
               </a:rPr>
               <a:t>System of record.</a:t>
             </a:r>
-            <a:endParaRPr lang="en-US" sz="1550" dirty="0"/>
+            <a:endParaRPr lang="en-US" sz="1320" dirty="0"/>
           </a:p>
         </p:txBody>
       </p:sp>
@@ -3778,13 +3787,16 @@
           <a:ln/>
         </p:spPr>
         <p:txBody>
-          <a:bodyPr wrap="square" lIns="254" tIns="254" rIns="254" bIns="254" rtlCol="0" anchor="t">
+          <a:bodyPr wrap="square" lIns="508" tIns="508" rIns="508" bIns="508" rtlCol="0" anchor="t">
             <a:normAutofit/>
           </a:bodyPr>
           <a:lstStyle/>
           <a:p>
-            <a:r>
-              <a:rPr lang="en-US" sz="1380" dirty="0">
+            <a:pPr indent="0" marL="0">
+              <a:buNone/>
+            </a:pPr>
+            <a:r>
+              <a:rPr lang="en-US" sz="1220" dirty="0">
                 <a:solidFill>
                   <a:srgbClr val="17364A"/>
                 </a:solidFill>
@@ -3792,13 +3804,16 @@
                 <a:ea typeface="Aptos" pitchFamily="34" charset="-122"/>
                 <a:cs typeface="Aptos" pitchFamily="34" charset="-120"/>
               </a:rPr>
-              <a:t>A system of record is the official system or process where public health information,.</a:t>
-            </a:r>
-            <a:endParaRPr lang="en-US" sz="1380" dirty="0"/>
-          </a:p>
-          <a:p>
-            <a:r>
-              <a:rPr lang="en-US" sz="1380" dirty="0">
+              <a:t>A system of record is the official system or process where public.</a:t>
+            </a:r>
+            <a:endParaRPr lang="en-US" sz="1220" dirty="0"/>
+          </a:p>
+          <a:p>
+            <a:pPr indent="0" marL="0">
+              <a:buNone/>
+            </a:pPr>
+            <a:r>
+              <a:rPr lang="en-US" sz="1220" dirty="0">
                 <a:solidFill>
                   <a:srgbClr val="17364A"/>
                 </a:solidFill>
@@ -3806,13 +3821,16 @@
                 <a:ea typeface="Aptos" pitchFamily="34" charset="-122"/>
                 <a:cs typeface="Aptos" pitchFamily="34" charset="-120"/>
               </a:rPr>
-              <a:t>AI outputs should not automatically become the official record unless the agency has.</a:t>
-            </a:r>
-            <a:endParaRPr lang="en-US" sz="1380" dirty="0"/>
-          </a:p>
-          <a:p>
-            <a:r>
-              <a:rPr lang="en-US" sz="1380" dirty="0">
+              <a:t>AI outputs should not automatically become the official record.</a:t>
+            </a:r>
+            <a:endParaRPr lang="en-US" sz="1220" dirty="0"/>
+          </a:p>
+          <a:p>
+            <a:pPr indent="0" marL="0">
+              <a:buNone/>
+            </a:pPr>
+            <a:r>
+              <a:rPr lang="en-US" sz="1220" dirty="0">
                 <a:solidFill>
                   <a:srgbClr val="17364A"/>
                 </a:solidFill>
@@ -3820,9 +3838,9 @@
                 <a:ea typeface="Aptos" pitchFamily="34" charset="-122"/>
                 <a:cs typeface="Aptos" pitchFamily="34" charset="-120"/>
               </a:rPr>
-              <a:t>For example, an AI tool may draft a case summary, but the final case note may still need.</a:t>
-            </a:r>
-            <a:endParaRPr lang="en-US" sz="1380" dirty="0"/>
+              <a:t>For example, an AI tool may draft a case summary, but the final.</a:t>
+            </a:r>
+            <a:endParaRPr lang="en-US" sz="1220" dirty="0"/>
           </a:p>
         </p:txBody>
       </p:sp>
@@ -3900,17 +3918,17 @@
         </p:nvSpPr>
         <p:spPr>
           <a:xfrm>
-            <a:off x="7799832" y="5001768"/>
-            <a:ext cx="3145536" cy="502920"/>
-          </a:xfrm>
-          <a:prstGeom prst="rect">
-            <a:avLst/>
-          </a:prstGeom>
-          <a:noFill/>
-          <a:ln/>
-        </p:spPr>
-        <p:txBody>
-          <a:bodyPr wrap="square" lIns="0" tIns="0" rIns="0" bIns="0" rtlCol="0" anchor="t">
+            <a:off x="7799832" y="4974336"/>
+            <a:ext cx="3145536" cy="576072"/>
+          </a:xfrm>
+          <a:prstGeom prst="rect">
+            <a:avLst/>
+          </a:prstGeom>
+          <a:noFill/>
+          <a:ln/>
+        </p:spPr>
+        <p:txBody>
+          <a:bodyPr wrap="square" lIns="254" tIns="254" rIns="254" bIns="254" rtlCol="0" anchor="t">
             <a:normAutofit/>
           </a:bodyPr>
           <a:lstStyle/>
@@ -3919,7 +3937,7 @@
               <a:buNone/>
             </a:pPr>
             <a:r>
-              <a:rPr lang="en-US" sz="1550" dirty="0">
+              <a:rPr lang="en-US" sz="1320" dirty="0">
                 <a:solidFill>
                   <a:srgbClr val="17364A"/>
                 </a:solidFill>
@@ -3927,9 +3945,9 @@
                 <a:ea typeface="Aptos" pitchFamily="34" charset="-122"/>
                 <a:cs typeface="Aptos" pitchFamily="34" charset="-120"/>
               </a:rPr>
-              <a:t>Connect the concept to data quality, model performance, validation evidence, monitoring measures, and decisions that remain under human control.</a:t>
-            </a:r>
-            <a:endParaRPr lang="en-US" sz="1550" dirty="0"/>
+              <a:t>Connect the concept to data quality, model performance, validation evidence, monitoring measures, and decisions that.</a:t>
+            </a:r>
+            <a:endParaRPr lang="en-US" sz="1320" dirty="0"/>
           </a:p>
         </p:txBody>
       </p:sp>
@@ -4230,49 +4248,58 @@
           <a:ln/>
         </p:spPr>
         <p:txBody>
-          <a:bodyPr wrap="square" lIns="635" tIns="635" rIns="635" bIns="635" rtlCol="0" anchor="t">
+          <a:bodyPr wrap="square" lIns="1016" tIns="1016" rIns="1016" bIns="1016" rtlCol="0" anchor="t">
             <a:normAutofit/>
           </a:bodyPr>
           <a:lstStyle/>
           <a:p>
+            <a:pPr indent="0" marL="0">
+              <a:buNone/>
+            </a:pPr>
             <a:r>
               <a:rPr lang="en-US" sz="2100" dirty="0">
                 <a:solidFill>
-                  <a:srgbClr val="17364A"/>
-                </a:solidFill>
-                <a:latin typeface="Aptos" pitchFamily="34" charset="0"/>
-                <a:ea typeface="Aptos" pitchFamily="34" charset="-122"/>
-                <a:cs typeface="Aptos" pitchFamily="34" charset="-120"/>
-              </a:rPr>
-              <a:t>Consider a health department that wants to use AI to summarize incoming electronic case reports for.</a:t>
+                  <a:srgbClr val="003A63"/>
+                </a:solidFill>
+                <a:latin typeface="Aptos" pitchFamily="34" charset="0"/>
+                <a:ea typeface="Aptos" pitchFamily="34" charset="-122"/>
+                <a:cs typeface="Aptos" pitchFamily="34" charset="-120"/>
+              </a:rPr>
+              <a:t>• Consider a health department that wants to use AI to summarize incoming electronic case.</a:t>
             </a:r>
             <a:endParaRPr lang="en-US" sz="2100" dirty="0"/>
           </a:p>
           <a:p>
+            <a:pPr indent="0" marL="0">
+              <a:buNone/>
+            </a:pPr>
             <a:r>
               <a:rPr lang="en-US" sz="2100" dirty="0">
                 <a:solidFill>
-                  <a:srgbClr val="17364A"/>
-                </a:solidFill>
-                <a:latin typeface="Aptos" pitchFamily="34" charset="0"/>
-                <a:ea typeface="Aptos" pitchFamily="34" charset="-122"/>
-                <a:cs typeface="Aptos" pitchFamily="34" charset="-120"/>
-              </a:rPr>
-              <a:t>The AI tool may be able to produce a concise summary of symptoms, laboratory results, diagnosis,.</a:t>
+                  <a:srgbClr val="003A63"/>
+                </a:solidFill>
+                <a:latin typeface="Aptos" pitchFamily="34" charset="0"/>
+                <a:ea typeface="Aptos" pitchFamily="34" charset="-122"/>
+                <a:cs typeface="Aptos" pitchFamily="34" charset="-120"/>
+              </a:rPr>
+              <a:t>• The AI tool may be able to produce a concise summary of symptoms, laboratory results,.</a:t>
             </a:r>
             <a:endParaRPr lang="en-US" sz="2100" dirty="0"/>
           </a:p>
           <a:p>
+            <a:pPr indent="0" marL="0">
+              <a:buNone/>
+            </a:pPr>
             <a:r>
               <a:rPr lang="en-US" sz="2100" dirty="0">
                 <a:solidFill>
-                  <a:srgbClr val="17364A"/>
-                </a:solidFill>
-                <a:latin typeface="Aptos" pitchFamily="34" charset="0"/>
-                <a:ea typeface="Aptos" pitchFamily="34" charset="-122"/>
-                <a:cs typeface="Aptos" pitchFamily="34" charset="-120"/>
-              </a:rPr>
-              <a:t>However, the safety of that workflow depends on the surrounding architecture.</a:t>
+                  <a:srgbClr val="003A63"/>
+                </a:solidFill>
+                <a:latin typeface="Aptos" pitchFamily="34" charset="0"/>
+                <a:ea typeface="Aptos" pitchFamily="34" charset="-122"/>
+                <a:cs typeface="Aptos" pitchFamily="34" charset="-120"/>
+              </a:rPr>
+              <a:t>• However, the safety of that workflow depends on the surrounding architecture.</a:t>
             </a:r>
             <a:endParaRPr lang="en-US" sz="2100" dirty="0"/>
           </a:p>
@@ -4352,17 +4379,17 @@
         </p:nvSpPr>
         <p:spPr>
           <a:xfrm>
-            <a:off x="7799832" y="1828800"/>
-            <a:ext cx="3145536" cy="685800"/>
-          </a:xfrm>
-          <a:prstGeom prst="rect">
-            <a:avLst/>
-          </a:prstGeom>
-          <a:noFill/>
-          <a:ln/>
-        </p:spPr>
-        <p:txBody>
-          <a:bodyPr wrap="square" lIns="0" tIns="0" rIns="0" bIns="0" rtlCol="0" anchor="t">
+            <a:off x="7799832" y="1801368"/>
+            <a:ext cx="3145536" cy="758952"/>
+          </a:xfrm>
+          <a:prstGeom prst="rect">
+            <a:avLst/>
+          </a:prstGeom>
+          <a:noFill/>
+          <a:ln/>
+        </p:spPr>
+        <p:txBody>
+          <a:bodyPr wrap="square" lIns="254" tIns="254" rIns="254" bIns="254" rtlCol="0" anchor="t">
             <a:normAutofit/>
           </a:bodyPr>
           <a:lstStyle/>
@@ -4371,7 +4398,7 @@
               <a:buNone/>
             </a:pPr>
             <a:r>
-              <a:rPr lang="en-US" sz="1550" dirty="0">
+              <a:rPr lang="en-US" sz="1320" dirty="0">
                 <a:solidFill>
                   <a:srgbClr val="17364A"/>
                 </a:solidFill>
@@ -4381,7 +4408,7 @@
               </a:rPr>
               <a:t>Consider a health department that wants to use AI to summarize incoming electronic case reports for.</a:t>
             </a:r>
-            <a:endParaRPr lang="en-US" sz="1550" dirty="0"/>
+            <a:endParaRPr lang="en-US" sz="1320" dirty="0"/>
           </a:p>
         </p:txBody>
       </p:sp>
@@ -4469,13 +4496,16 @@
           <a:ln/>
         </p:spPr>
         <p:txBody>
-          <a:bodyPr wrap="square" lIns="254" tIns="254" rIns="254" bIns="254" rtlCol="0" anchor="t">
+          <a:bodyPr wrap="square" lIns="508" tIns="508" rIns="508" bIns="508" rtlCol="0" anchor="t">
             <a:normAutofit/>
           </a:bodyPr>
           <a:lstStyle/>
           <a:p>
-            <a:r>
-              <a:rPr lang="en-US" sz="1380" dirty="0">
+            <a:pPr indent="0" marL="0">
+              <a:buNone/>
+            </a:pPr>
+            <a:r>
+              <a:rPr lang="en-US" sz="1220" dirty="0">
                 <a:solidFill>
                   <a:srgbClr val="17364A"/>
                 </a:solidFill>
@@ -4483,13 +4513,16 @@
                 <a:ea typeface="Aptos" pitchFamily="34" charset="-122"/>
                 <a:cs typeface="Aptos" pitchFamily="34" charset="-120"/>
               </a:rPr>
-              <a:t>Consider a health department that wants to use AI to summarize incoming electronic case.</a:t>
-            </a:r>
-            <a:endParaRPr lang="en-US" sz="1380" dirty="0"/>
-          </a:p>
-          <a:p>
-            <a:r>
-              <a:rPr lang="en-US" sz="1380" dirty="0">
+              <a:t>Consider a health department that wants to use AI to summarize.</a:t>
+            </a:r>
+            <a:endParaRPr lang="en-US" sz="1220" dirty="0"/>
+          </a:p>
+          <a:p>
+            <a:pPr indent="0" marL="0">
+              <a:buNone/>
+            </a:pPr>
+            <a:r>
+              <a:rPr lang="en-US" sz="1220" dirty="0">
                 <a:solidFill>
                   <a:srgbClr val="17364A"/>
                 </a:solidFill>
@@ -4497,13 +4530,16 @@
                 <a:ea typeface="Aptos" pitchFamily="34" charset="-122"/>
                 <a:cs typeface="Aptos" pitchFamily="34" charset="-120"/>
               </a:rPr>
-              <a:t>The AI tool may be able to produce a concise summary of symptoms, laboratory results,.</a:t>
-            </a:r>
-            <a:endParaRPr lang="en-US" sz="1380" dirty="0"/>
-          </a:p>
-          <a:p>
-            <a:r>
-              <a:rPr lang="en-US" sz="1380" dirty="0">
+              <a:t>The AI tool may be able to produce a concise summary of symptoms,.</a:t>
+            </a:r>
+            <a:endParaRPr lang="en-US" sz="1220" dirty="0"/>
+          </a:p>
+          <a:p>
+            <a:pPr indent="0" marL="0">
+              <a:buNone/>
+            </a:pPr>
+            <a:r>
+              <a:rPr lang="en-US" sz="1220" dirty="0">
                 <a:solidFill>
                   <a:srgbClr val="17364A"/>
                 </a:solidFill>
@@ -4511,9 +4547,9 @@
                 <a:ea typeface="Aptos" pitchFamily="34" charset="-122"/>
                 <a:cs typeface="Aptos" pitchFamily="34" charset="-120"/>
               </a:rPr>
-              <a:t>The eCR data must be received correctly, routed to the right jurisdiction, parsed into the.</a:t>
-            </a:r>
-            <a:endParaRPr lang="en-US" sz="1380" dirty="0"/>
+              <a:t>The eCR data must be received correctly, routed to the right.</a:t>
+            </a:r>
+            <a:endParaRPr lang="en-US" sz="1220" dirty="0"/>
           </a:p>
         </p:txBody>
       </p:sp>
@@ -4591,17 +4627,17 @@
         </p:nvSpPr>
         <p:spPr>
           <a:xfrm>
-            <a:off x="7799832" y="5001768"/>
-            <a:ext cx="3145536" cy="502920"/>
-          </a:xfrm>
-          <a:prstGeom prst="rect">
-            <a:avLst/>
-          </a:prstGeom>
-          <a:noFill/>
-          <a:ln/>
-        </p:spPr>
-        <p:txBody>
-          <a:bodyPr wrap="square" lIns="0" tIns="0" rIns="0" bIns="0" rtlCol="0" anchor="t">
+            <a:off x="7799832" y="4974336"/>
+            <a:ext cx="3145536" cy="576072"/>
+          </a:xfrm>
+          <a:prstGeom prst="rect">
+            <a:avLst/>
+          </a:prstGeom>
+          <a:noFill/>
+          <a:ln/>
+        </p:spPr>
+        <p:txBody>
+          <a:bodyPr wrap="square" lIns="254" tIns="254" rIns="254" bIns="254" rtlCol="0" anchor="t">
             <a:normAutofit/>
           </a:bodyPr>
           <a:lstStyle/>
@@ -4610,7 +4646,7 @@
               <a:buNone/>
             </a:pPr>
             <a:r>
-              <a:rPr lang="en-US" sz="1550" dirty="0">
+              <a:rPr lang="en-US" sz="1320" dirty="0">
                 <a:solidFill>
                   <a:srgbClr val="17364A"/>
                 </a:solidFill>
@@ -4618,9 +4654,9 @@
                 <a:ea typeface="Aptos" pitchFamily="34" charset="-122"/>
                 <a:cs typeface="Aptos" pitchFamily="34" charset="-120"/>
               </a:rPr>
-              <a:t>Connect the concept to data quality, model performance, validation evidence, monitoring measures, and decisions that remain under human control.</a:t>
-            </a:r>
-            <a:endParaRPr lang="en-US" sz="1550" dirty="0"/>
+              <a:t>Connect the concept to data quality, model performance, validation evidence, monitoring measures, and decisions that.</a:t>
+            </a:r>
+            <a:endParaRPr lang="en-US" sz="1320" dirty="0"/>
           </a:p>
         </p:txBody>
       </p:sp>
@@ -4921,49 +4957,58 @@
           <a:ln/>
         </p:spPr>
         <p:txBody>
-          <a:bodyPr wrap="square" lIns="635" tIns="635" rIns="635" bIns="635" rtlCol="0" anchor="t">
+          <a:bodyPr wrap="square" lIns="1016" tIns="1016" rIns="1016" bIns="1016" rtlCol="0" anchor="t">
             <a:normAutofit/>
           </a:bodyPr>
           <a:lstStyle/>
           <a:p>
+            <a:pPr indent="0" marL="0">
+              <a:buNone/>
+            </a:pPr>
             <a:r>
               <a:rPr lang="en-US" sz="2100" dirty="0">
                 <a:solidFill>
-                  <a:srgbClr val="17364A"/>
-                </a:solidFill>
-                <a:latin typeface="Aptos" pitchFamily="34" charset="0"/>
-                <a:ea typeface="Aptos" pitchFamily="34" charset="-122"/>
-                <a:cs typeface="Aptos" pitchFamily="34" charset="-120"/>
-              </a:rPr>
-              <a:t>A public health AI architecture usually begins with source systems.</a:t>
+                  <a:srgbClr val="003A63"/>
+                </a:solidFill>
+                <a:latin typeface="Aptos" pitchFamily="34" charset="0"/>
+                <a:ea typeface="Aptos" pitchFamily="34" charset="-122"/>
+                <a:cs typeface="Aptos" pitchFamily="34" charset="-120"/>
+              </a:rPr>
+              <a:t>• A public health AI architecture usually begins with source systems.</a:t>
             </a:r>
             <a:endParaRPr lang="en-US" sz="2100" dirty="0"/>
           </a:p>
           <a:p>
+            <a:pPr indent="0" marL="0">
+              <a:buNone/>
+            </a:pPr>
             <a:r>
               <a:rPr lang="en-US" sz="2100" dirty="0">
                 <a:solidFill>
-                  <a:srgbClr val="17364A"/>
-                </a:solidFill>
-                <a:latin typeface="Aptos" pitchFamily="34" charset="0"/>
-                <a:ea typeface="Aptos" pitchFamily="34" charset="-122"/>
-                <a:cs typeface="Aptos" pitchFamily="34" charset="-120"/>
-              </a:rPr>
-              <a:t>These may include electronic health records, laboratories, immunization information systems, vital.</a:t>
+                  <a:srgbClr val="003A63"/>
+                </a:solidFill>
+                <a:latin typeface="Aptos" pitchFamily="34" charset="0"/>
+                <a:ea typeface="Aptos" pitchFamily="34" charset="-122"/>
+                <a:cs typeface="Aptos" pitchFamily="34" charset="-120"/>
+              </a:rPr>
+              <a:t>• These may include electronic health records, laboratories, immunization information systems,.</a:t>
             </a:r>
             <a:endParaRPr lang="en-US" sz="2100" dirty="0"/>
           </a:p>
           <a:p>
+            <a:pPr indent="0" marL="0">
+              <a:buNone/>
+            </a:pPr>
             <a:r>
               <a:rPr lang="en-US" sz="2100" dirty="0">
                 <a:solidFill>
-                  <a:srgbClr val="17364A"/>
-                </a:solidFill>
-                <a:latin typeface="Aptos" pitchFamily="34" charset="0"/>
-                <a:ea typeface="Aptos" pitchFamily="34" charset="-122"/>
-                <a:cs typeface="Aptos" pitchFamily="34" charset="-120"/>
-              </a:rPr>
-              <a:t>Each source system has its own data quality profile, update frequency, terminology conventions,.</a:t>
+                  <a:srgbClr val="003A63"/>
+                </a:solidFill>
+                <a:latin typeface="Aptos" pitchFamily="34" charset="0"/>
+                <a:ea typeface="Aptos" pitchFamily="34" charset="-122"/>
+                <a:cs typeface="Aptos" pitchFamily="34" charset="-120"/>
+              </a:rPr>
+              <a:t>• Each source system has its own data quality profile, update frequency, terminology conventions,.</a:t>
             </a:r>
             <a:endParaRPr lang="en-US" sz="2100" dirty="0"/>
           </a:p>
@@ -5043,17 +5088,17 @@
         </p:nvSpPr>
         <p:spPr>
           <a:xfrm>
-            <a:off x="7799832" y="1828800"/>
-            <a:ext cx="3145536" cy="685800"/>
-          </a:xfrm>
-          <a:prstGeom prst="rect">
-            <a:avLst/>
-          </a:prstGeom>
-          <a:noFill/>
-          <a:ln/>
-        </p:spPr>
-        <p:txBody>
-          <a:bodyPr wrap="square" lIns="0" tIns="0" rIns="0" bIns="0" rtlCol="0" anchor="t">
+            <a:off x="7799832" y="1801368"/>
+            <a:ext cx="3145536" cy="758952"/>
+          </a:xfrm>
+          <a:prstGeom prst="rect">
+            <a:avLst/>
+          </a:prstGeom>
+          <a:noFill/>
+          <a:ln/>
+        </p:spPr>
+        <p:txBody>
+          <a:bodyPr wrap="square" lIns="254" tIns="254" rIns="254" bIns="254" rtlCol="0" anchor="t">
             <a:normAutofit/>
           </a:bodyPr>
           <a:lstStyle/>
@@ -5062,7 +5107,7 @@
               <a:buNone/>
             </a:pPr>
             <a:r>
-              <a:rPr lang="en-US" sz="1550" dirty="0">
+              <a:rPr lang="en-US" sz="1320" dirty="0">
                 <a:solidFill>
                   <a:srgbClr val="17364A"/>
                 </a:solidFill>
@@ -5072,7 +5117,7 @@
               </a:rPr>
               <a:t>A public health AI architecture usually begins with source systems.</a:t>
             </a:r>
-            <a:endParaRPr lang="en-US" sz="1550" dirty="0"/>
+            <a:endParaRPr lang="en-US" sz="1320" dirty="0"/>
           </a:p>
         </p:txBody>
       </p:sp>
@@ -5160,13 +5205,16 @@
           <a:ln/>
         </p:spPr>
         <p:txBody>
-          <a:bodyPr wrap="square" lIns="254" tIns="254" rIns="254" bIns="254" rtlCol="0" anchor="t">
+          <a:bodyPr wrap="square" lIns="508" tIns="508" rIns="508" bIns="508" rtlCol="0" anchor="t">
             <a:normAutofit/>
           </a:bodyPr>
           <a:lstStyle/>
           <a:p>
-            <a:r>
-              <a:rPr lang="en-US" sz="1380" dirty="0">
+            <a:pPr indent="0" marL="0">
+              <a:buNone/>
+            </a:pPr>
+            <a:r>
+              <a:rPr lang="en-US" sz="1220" dirty="0">
                 <a:solidFill>
                   <a:srgbClr val="17364A"/>
                 </a:solidFill>
@@ -5174,13 +5222,16 @@
                 <a:ea typeface="Aptos" pitchFamily="34" charset="-122"/>
                 <a:cs typeface="Aptos" pitchFamily="34" charset="-120"/>
               </a:rPr>
-              <a:t>These may include electronic health records, laboratories, immunization information.</a:t>
-            </a:r>
-            <a:endParaRPr lang="en-US" sz="1380" dirty="0"/>
-          </a:p>
-          <a:p>
-            <a:r>
-              <a:rPr lang="en-US" sz="1380" dirty="0">
+              <a:t>These may include electronic health records, laboratories,.</a:t>
+            </a:r>
+            <a:endParaRPr lang="en-US" sz="1220" dirty="0"/>
+          </a:p>
+          <a:p>
+            <a:pPr indent="0" marL="0">
+              <a:buNone/>
+            </a:pPr>
+            <a:r>
+              <a:rPr lang="en-US" sz="1220" dirty="0">
                 <a:solidFill>
                   <a:srgbClr val="17364A"/>
                 </a:solidFill>
@@ -5188,13 +5239,16 @@
                 <a:ea typeface="Aptos" pitchFamily="34" charset="-122"/>
                 <a:cs typeface="Aptos" pitchFamily="34" charset="-120"/>
               </a:rPr>
-              <a:t>Each source system has its own data quality profile, update frequency, terminology.</a:t>
-            </a:r>
-            <a:endParaRPr lang="en-US" sz="1380" dirty="0"/>
-          </a:p>
-          <a:p>
-            <a:r>
-              <a:rPr lang="en-US" sz="1380" dirty="0">
+              <a:t>Each source system has its own data quality profile, update.</a:t>
+            </a:r>
+            <a:endParaRPr lang="en-US" sz="1220" dirty="0"/>
+          </a:p>
+          <a:p>
+            <a:pPr indent="0" marL="0">
+              <a:buNone/>
+            </a:pPr>
+            <a:r>
+              <a:rPr lang="en-US" sz="1220" dirty="0">
                 <a:solidFill>
                   <a:srgbClr val="17364A"/>
                 </a:solidFill>
@@ -5202,9 +5256,9 @@
                 <a:ea typeface="Aptos" pitchFamily="34" charset="-122"/>
                 <a:cs typeface="Aptos" pitchFamily="34" charset="-120"/>
               </a:rPr>
-              <a:t>Before AI can be used safely, the agency needs to understand these characteristics.</a:t>
-            </a:r>
-            <a:endParaRPr lang="en-US" sz="1380" dirty="0"/>
+              <a:t>Before AI can be used safely, the agency needs to understand these.</a:t>
+            </a:r>
+            <a:endParaRPr lang="en-US" sz="1220" dirty="0"/>
           </a:p>
         </p:txBody>
       </p:sp>
@@ -5282,17 +5336,17 @@
         </p:nvSpPr>
         <p:spPr>
           <a:xfrm>
-            <a:off x="7799832" y="5001768"/>
-            <a:ext cx="3145536" cy="502920"/>
-          </a:xfrm>
-          <a:prstGeom prst="rect">
-            <a:avLst/>
-          </a:prstGeom>
-          <a:noFill/>
-          <a:ln/>
-        </p:spPr>
-        <p:txBody>
-          <a:bodyPr wrap="square" lIns="0" tIns="0" rIns="0" bIns="0" rtlCol="0" anchor="t">
+            <a:off x="7799832" y="4974336"/>
+            <a:ext cx="3145536" cy="576072"/>
+          </a:xfrm>
+          <a:prstGeom prst="rect">
+            <a:avLst/>
+          </a:prstGeom>
+          <a:noFill/>
+          <a:ln/>
+        </p:spPr>
+        <p:txBody>
+          <a:bodyPr wrap="square" lIns="254" tIns="254" rIns="254" bIns="254" rtlCol="0" anchor="t">
             <a:normAutofit/>
           </a:bodyPr>
           <a:lstStyle/>
@@ -5301,7 +5355,7 @@
               <a:buNone/>
             </a:pPr>
             <a:r>
-              <a:rPr lang="en-US" sz="1550" dirty="0">
+              <a:rPr lang="en-US" sz="1320" dirty="0">
                 <a:solidFill>
                   <a:srgbClr val="17364A"/>
                 </a:solidFill>
@@ -5309,9 +5363,9 @@
                 <a:ea typeface="Aptos" pitchFamily="34" charset="-122"/>
                 <a:cs typeface="Aptos" pitchFamily="34" charset="-120"/>
               </a:rPr>
-              <a:t>Connect the concept to data quality, model performance, validation evidence, monitoring measures, and decisions that remain under human control.</a:t>
-            </a:r>
-            <a:endParaRPr lang="en-US" sz="1550" dirty="0"/>
+              <a:t>Connect the concept to data quality, model performance, validation evidence, monitoring measures, and decisions that.</a:t>
+            </a:r>
+            <a:endParaRPr lang="en-US" sz="1320" dirty="0"/>
           </a:p>
         </p:txBody>
       </p:sp>
@@ -5612,49 +5666,58 @@
           <a:ln/>
         </p:spPr>
         <p:txBody>
-          <a:bodyPr wrap="square" lIns="635" tIns="635" rIns="635" bIns="635" rtlCol="0" anchor="t">
+          <a:bodyPr wrap="square" lIns="1016" tIns="1016" rIns="1016" bIns="1016" rtlCol="0" anchor="t">
             <a:normAutofit/>
           </a:bodyPr>
           <a:lstStyle/>
           <a:p>
+            <a:pPr indent="0" marL="0">
+              <a:buNone/>
+            </a:pPr>
             <a:r>
               <a:rPr lang="en-US" sz="2100" dirty="0">
                 <a:solidFill>
-                  <a:srgbClr val="17364A"/>
-                </a:solidFill>
-                <a:latin typeface="Aptos" pitchFamily="34" charset="0"/>
-                <a:ea typeface="Aptos" pitchFamily="34" charset="-122"/>
-                <a:cs typeface="Aptos" pitchFamily="34" charset="-120"/>
-              </a:rPr>
-              <a:t>The fourth layer is the AI service or model.</a:t>
+                  <a:srgbClr val="003A63"/>
+                </a:solidFill>
+                <a:latin typeface="Aptos" pitchFamily="34" charset="0"/>
+                <a:ea typeface="Aptos" pitchFamily="34" charset="-122"/>
+                <a:cs typeface="Aptos" pitchFamily="34" charset="-120"/>
+              </a:rPr>
+              <a:t>• The fourth layer is the AI service or model.</a:t>
             </a:r>
             <a:endParaRPr lang="en-US" sz="2100" dirty="0"/>
           </a:p>
           <a:p>
+            <a:pPr indent="0" marL="0">
+              <a:buNone/>
+            </a:pPr>
             <a:r>
               <a:rPr lang="en-US" sz="2100" dirty="0">
                 <a:solidFill>
-                  <a:srgbClr val="17364A"/>
-                </a:solidFill>
-                <a:latin typeface="Aptos" pitchFamily="34" charset="0"/>
-                <a:ea typeface="Aptos" pitchFamily="34" charset="-122"/>
-                <a:cs typeface="Aptos" pitchFamily="34" charset="-120"/>
-              </a:rPr>
-              <a:t>This may be a predictive model, natural language processing tool, generative AI assistant,.</a:t>
+                  <a:srgbClr val="003A63"/>
+                </a:solidFill>
+                <a:latin typeface="Aptos" pitchFamily="34" charset="0"/>
+                <a:ea typeface="Aptos" pitchFamily="34" charset="-122"/>
+                <a:cs typeface="Aptos" pitchFamily="34" charset="-120"/>
+              </a:rPr>
+              <a:t>• This may be a predictive model, natural language processing tool, generative AI assistant,.</a:t>
             </a:r>
             <a:endParaRPr lang="en-US" sz="2100" dirty="0"/>
           </a:p>
           <a:p>
+            <a:pPr indent="0" marL="0">
+              <a:buNone/>
+            </a:pPr>
             <a:r>
               <a:rPr lang="en-US" sz="2100" dirty="0">
                 <a:solidFill>
-                  <a:srgbClr val="17364A"/>
-                </a:solidFill>
-                <a:latin typeface="Aptos" pitchFamily="34" charset="0"/>
-                <a:ea typeface="Aptos" pitchFamily="34" charset="-122"/>
-                <a:cs typeface="Aptos" pitchFamily="34" charset="-120"/>
-              </a:rPr>
-              <a:t>The model should have a defined intended use and explicit limits.</a:t>
+                  <a:srgbClr val="003A63"/>
+                </a:solidFill>
+                <a:latin typeface="Aptos" pitchFamily="34" charset="0"/>
+                <a:ea typeface="Aptos" pitchFamily="34" charset="-122"/>
+                <a:cs typeface="Aptos" pitchFamily="34" charset="-120"/>
+              </a:rPr>
+              <a:t>• The model should have a defined intended use and explicit limits.</a:t>
             </a:r>
             <a:endParaRPr lang="en-US" sz="2100" dirty="0"/>
           </a:p>
@@ -5734,17 +5797,17 @@
         </p:nvSpPr>
         <p:spPr>
           <a:xfrm>
-            <a:off x="7799832" y="1828800"/>
-            <a:ext cx="3145536" cy="685800"/>
-          </a:xfrm>
-          <a:prstGeom prst="rect">
-            <a:avLst/>
-          </a:prstGeom>
-          <a:noFill/>
-          <a:ln/>
-        </p:spPr>
-        <p:txBody>
-          <a:bodyPr wrap="square" lIns="0" tIns="0" rIns="0" bIns="0" rtlCol="0" anchor="t">
+            <a:off x="7799832" y="1801368"/>
+            <a:ext cx="3145536" cy="758952"/>
+          </a:xfrm>
+          <a:prstGeom prst="rect">
+            <a:avLst/>
+          </a:prstGeom>
+          <a:noFill/>
+          <a:ln/>
+        </p:spPr>
+        <p:txBody>
+          <a:bodyPr wrap="square" lIns="254" tIns="254" rIns="254" bIns="254" rtlCol="0" anchor="t">
             <a:normAutofit/>
           </a:bodyPr>
           <a:lstStyle/>
@@ -5753,7 +5816,7 @@
               <a:buNone/>
             </a:pPr>
             <a:r>
-              <a:rPr lang="en-US" sz="1550" dirty="0">
+              <a:rPr lang="en-US" sz="1320" dirty="0">
                 <a:solidFill>
                   <a:srgbClr val="17364A"/>
                 </a:solidFill>
@@ -5763,7 +5826,7 @@
               </a:rPr>
               <a:t>The fourth layer is the AI service or model.</a:t>
             </a:r>
-            <a:endParaRPr lang="en-US" sz="1550" dirty="0"/>
+            <a:endParaRPr lang="en-US" sz="1320" dirty="0"/>
           </a:p>
         </p:txBody>
       </p:sp>
@@ -5851,13 +5914,16 @@
           <a:ln/>
         </p:spPr>
         <p:txBody>
-          <a:bodyPr wrap="square" lIns="254" tIns="254" rIns="254" bIns="254" rtlCol="0" anchor="t">
+          <a:bodyPr wrap="square" lIns="508" tIns="508" rIns="508" bIns="508" rtlCol="0" anchor="t">
             <a:normAutofit/>
           </a:bodyPr>
           <a:lstStyle/>
           <a:p>
-            <a:r>
-              <a:rPr lang="en-US" sz="1380" dirty="0">
+            <a:pPr indent="0" marL="0">
+              <a:buNone/>
+            </a:pPr>
+            <a:r>
+              <a:rPr lang="en-US" sz="1220" dirty="0">
                 <a:solidFill>
                   <a:srgbClr val="17364A"/>
                 </a:solidFill>
@@ -5865,13 +5931,16 @@
                 <a:ea typeface="Aptos" pitchFamily="34" charset="-122"/>
                 <a:cs typeface="Aptos" pitchFamily="34" charset="-120"/>
               </a:rPr>
-              <a:t>This may be a predictive model, natural language processing tool, generative AI assistant,.</a:t>
-            </a:r>
-            <a:endParaRPr lang="en-US" sz="1380" dirty="0"/>
-          </a:p>
-          <a:p>
-            <a:r>
-              <a:rPr lang="en-US" sz="1380" dirty="0">
+              <a:t>This may be a predictive model, natural language processing tool,.</a:t>
+            </a:r>
+            <a:endParaRPr lang="en-US" sz="1220" dirty="0"/>
+          </a:p>
+          <a:p>
+            <a:pPr indent="0" marL="0">
+              <a:buNone/>
+            </a:pPr>
+            <a:r>
+              <a:rPr lang="en-US" sz="1220" dirty="0">
                 <a:solidFill>
                   <a:srgbClr val="17364A"/>
                 </a:solidFill>
@@ -5879,13 +5948,16 @@
                 <a:ea typeface="Aptos" pitchFamily="34" charset="-122"/>
                 <a:cs typeface="Aptos" pitchFamily="34" charset="-120"/>
               </a:rPr>
-              <a:t>A tool designed to summarize case notes should not silently make eligibility decisions.</a:t>
-            </a:r>
-            <a:endParaRPr lang="en-US" sz="1380" dirty="0"/>
-          </a:p>
-          <a:p>
-            <a:r>
-              <a:rPr lang="en-US" sz="1380" dirty="0">
+              <a:t>A tool designed to summarize case notes should not silently make.</a:t>
+            </a:r>
+            <a:endParaRPr lang="en-US" sz="1220" dirty="0"/>
+          </a:p>
+          <a:p>
+            <a:pPr indent="0" marL="0">
+              <a:buNone/>
+            </a:pPr>
+            <a:r>
+              <a:rPr lang="en-US" sz="1220" dirty="0">
                 <a:solidFill>
                   <a:srgbClr val="17364A"/>
                 </a:solidFill>
@@ -5893,9 +5965,9 @@
                 <a:ea typeface="Aptos" pitchFamily="34" charset="-122"/>
                 <a:cs typeface="Aptos" pitchFamily="34" charset="-120"/>
               </a:rPr>
-              <a:t>A tool designed to classify complaints should not automatically trigger enforcement action.</a:t>
-            </a:r>
-            <a:endParaRPr lang="en-US" sz="1380" dirty="0"/>
+              <a:t>A tool designed to classify complaints should not automatically.</a:t>
+            </a:r>
+            <a:endParaRPr lang="en-US" sz="1220" dirty="0"/>
           </a:p>
         </p:txBody>
       </p:sp>
@@ -5973,17 +6045,17 @@
         </p:nvSpPr>
         <p:spPr>
           <a:xfrm>
-            <a:off x="7799832" y="5001768"/>
-            <a:ext cx="3145536" cy="502920"/>
-          </a:xfrm>
-          <a:prstGeom prst="rect">
-            <a:avLst/>
-          </a:prstGeom>
-          <a:noFill/>
-          <a:ln/>
-        </p:spPr>
-        <p:txBody>
-          <a:bodyPr wrap="square" lIns="0" tIns="0" rIns="0" bIns="0" rtlCol="0" anchor="t">
+            <a:off x="7799832" y="4974336"/>
+            <a:ext cx="3145536" cy="576072"/>
+          </a:xfrm>
+          <a:prstGeom prst="rect">
+            <a:avLst/>
+          </a:prstGeom>
+          <a:noFill/>
+          <a:ln/>
+        </p:spPr>
+        <p:txBody>
+          <a:bodyPr wrap="square" lIns="254" tIns="254" rIns="254" bIns="254" rtlCol="0" anchor="t">
             <a:normAutofit/>
           </a:bodyPr>
           <a:lstStyle/>
@@ -5992,7 +6064,7 @@
               <a:buNone/>
             </a:pPr>
             <a:r>
-              <a:rPr lang="en-US" sz="1550" dirty="0">
+              <a:rPr lang="en-US" sz="1320" dirty="0">
                 <a:solidFill>
                   <a:srgbClr val="17364A"/>
                 </a:solidFill>
@@ -6000,9 +6072,9 @@
                 <a:ea typeface="Aptos" pitchFamily="34" charset="-122"/>
                 <a:cs typeface="Aptos" pitchFamily="34" charset="-120"/>
               </a:rPr>
-              <a:t>Connect the concept to data quality, model performance, validation evidence, monitoring measures, and decisions that remain under human control.</a:t>
-            </a:r>
-            <a:endParaRPr lang="en-US" sz="1550" dirty="0"/>
+              <a:t>Connect the concept to data quality, model performance, validation evidence, monitoring measures, and decisions that.</a:t>
+            </a:r>
+            <a:endParaRPr lang="en-US" sz="1320" dirty="0"/>
           </a:p>
         </p:txBody>
       </p:sp>
@@ -6303,49 +6375,58 @@
           <a:ln/>
         </p:spPr>
         <p:txBody>
-          <a:bodyPr wrap="square" lIns="635" tIns="635" rIns="635" bIns="635" rtlCol="0" anchor="t">
+          <a:bodyPr wrap="square" lIns="1016" tIns="1016" rIns="1016" bIns="1016" rtlCol="0" anchor="t">
             <a:normAutofit/>
           </a:bodyPr>
           <a:lstStyle/>
           <a:p>
+            <a:pPr indent="0" marL="0">
+              <a:buNone/>
+            </a:pPr>
             <a:r>
               <a:rPr lang="en-US" sz="2100" dirty="0">
                 <a:solidFill>
-                  <a:srgbClr val="17364A"/>
-                </a:solidFill>
-                <a:latin typeface="Aptos" pitchFamily="34" charset="0"/>
-                <a:ea typeface="Aptos" pitchFamily="34" charset="-122"/>
-                <a:cs typeface="Aptos" pitchFamily="34" charset="-120"/>
-              </a:rPr>
-              <a:t>Architectural invisibility.</a:t>
+                  <a:srgbClr val="003A63"/>
+                </a:solidFill>
+                <a:latin typeface="Aptos" pitchFamily="34" charset="0"/>
+                <a:ea typeface="Aptos" pitchFamily="34" charset="-122"/>
+                <a:cs typeface="Aptos" pitchFamily="34" charset="-120"/>
+              </a:rPr>
+              <a:t>• Architectural invisibility.</a:t>
             </a:r>
             <a:endParaRPr lang="en-US" sz="2100" dirty="0"/>
           </a:p>
           <a:p>
+            <a:pPr indent="0" marL="0">
+              <a:buNone/>
+            </a:pPr>
             <a:r>
               <a:rPr lang="en-US" sz="2100" dirty="0">
                 <a:solidFill>
-                  <a:srgbClr val="17364A"/>
-                </a:solidFill>
-                <a:latin typeface="Aptos" pitchFamily="34" charset="0"/>
-                <a:ea typeface="Aptos" pitchFamily="34" charset="-122"/>
-                <a:cs typeface="Aptos" pitchFamily="34" charset="-120"/>
-              </a:rPr>
-              <a:t>If staff cannot explain how data move through the system, they may not recognize when an AI output is.</a:t>
+                  <a:srgbClr val="003A63"/>
+                </a:solidFill>
+                <a:latin typeface="Aptos" pitchFamily="34" charset="0"/>
+                <a:ea typeface="Aptos" pitchFamily="34" charset="-122"/>
+                <a:cs typeface="Aptos" pitchFamily="34" charset="-120"/>
+              </a:rPr>
+              <a:t>• If staff cannot explain how data move through the system, they may not recognize when an AI.</a:t>
             </a:r>
             <a:endParaRPr lang="en-US" sz="2100" dirty="0"/>
           </a:p>
           <a:p>
+            <a:pPr indent="0" marL="0">
+              <a:buNone/>
+            </a:pPr>
             <a:r>
               <a:rPr lang="en-US" sz="2100" dirty="0">
                 <a:solidFill>
-                  <a:srgbClr val="17364A"/>
-                </a:solidFill>
-                <a:latin typeface="Aptos" pitchFamily="34" charset="0"/>
-                <a:ea typeface="Aptos" pitchFamily="34" charset="-122"/>
-                <a:cs typeface="Aptos" pitchFamily="34" charset="-120"/>
-              </a:rPr>
-              <a:t>A practical guardrail is to require a workflow and data flow map before AI use is approved.</a:t>
+                  <a:srgbClr val="003A63"/>
+                </a:solidFill>
+                <a:latin typeface="Aptos" pitchFamily="34" charset="0"/>
+                <a:ea typeface="Aptos" pitchFamily="34" charset="-122"/>
+                <a:cs typeface="Aptos" pitchFamily="34" charset="-120"/>
+              </a:rPr>
+              <a:t>• A practical guardrail is to require a workflow and data flow map before AI use is approved.</a:t>
             </a:r>
             <a:endParaRPr lang="en-US" sz="2100" dirty="0"/>
           </a:p>
@@ -6425,17 +6506,17 @@
         </p:nvSpPr>
         <p:spPr>
           <a:xfrm>
-            <a:off x="7799832" y="1828800"/>
-            <a:ext cx="3145536" cy="685800"/>
-          </a:xfrm>
-          <a:prstGeom prst="rect">
-            <a:avLst/>
-          </a:prstGeom>
-          <a:noFill/>
-          <a:ln/>
-        </p:spPr>
-        <p:txBody>
-          <a:bodyPr wrap="square" lIns="0" tIns="0" rIns="0" bIns="0" rtlCol="0" anchor="t">
+            <a:off x="7799832" y="1801368"/>
+            <a:ext cx="3145536" cy="758952"/>
+          </a:xfrm>
+          <a:prstGeom prst="rect">
+            <a:avLst/>
+          </a:prstGeom>
+          <a:noFill/>
+          <a:ln/>
+        </p:spPr>
+        <p:txBody>
+          <a:bodyPr wrap="square" lIns="254" tIns="254" rIns="254" bIns="254" rtlCol="0" anchor="t">
             <a:normAutofit/>
           </a:bodyPr>
           <a:lstStyle/>
@@ -6444,7 +6525,7 @@
               <a:buNone/>
             </a:pPr>
             <a:r>
-              <a:rPr lang="en-US" sz="1550" dirty="0">
+              <a:rPr lang="en-US" sz="1320" dirty="0">
                 <a:solidFill>
                   <a:srgbClr val="17364A"/>
                 </a:solidFill>
@@ -6454,7 +6535,7 @@
               </a:rPr>
               <a:t>Architectural invisibility.</a:t>
             </a:r>
-            <a:endParaRPr lang="en-US" sz="1550" dirty="0"/>
+            <a:endParaRPr lang="en-US" sz="1320" dirty="0"/>
           </a:p>
         </p:txBody>
       </p:sp>
@@ -6542,13 +6623,16 @@
           <a:ln/>
         </p:spPr>
         <p:txBody>
-          <a:bodyPr wrap="square" lIns="254" tIns="254" rIns="254" bIns="254" rtlCol="0" anchor="t">
+          <a:bodyPr wrap="square" lIns="508" tIns="508" rIns="508" bIns="508" rtlCol="0" anchor="t">
             <a:normAutofit/>
           </a:bodyPr>
           <a:lstStyle/>
           <a:p>
-            <a:r>
-              <a:rPr lang="en-US" sz="1380" dirty="0">
+            <a:pPr indent="0" marL="0">
+              <a:buNone/>
+            </a:pPr>
+            <a:r>
+              <a:rPr lang="en-US" sz="1220" dirty="0">
                 <a:solidFill>
                   <a:srgbClr val="17364A"/>
                 </a:solidFill>
@@ -6556,13 +6640,16 @@
                 <a:ea typeface="Aptos" pitchFamily="34" charset="-122"/>
                 <a:cs typeface="Aptos" pitchFamily="34" charset="-120"/>
               </a:rPr>
-              <a:t>If staff cannot explain how data move through the system, they may not recognize when an.</a:t>
-            </a:r>
-            <a:endParaRPr lang="en-US" sz="1380" dirty="0"/>
-          </a:p>
-          <a:p>
-            <a:r>
-              <a:rPr lang="en-US" sz="1380" dirty="0">
+              <a:t>If staff cannot explain how data move through the system, they may.</a:t>
+            </a:r>
+            <a:endParaRPr lang="en-US" sz="1220" dirty="0"/>
+          </a:p>
+          <a:p>
+            <a:pPr indent="0" marL="0">
+              <a:buNone/>
+            </a:pPr>
+            <a:r>
+              <a:rPr lang="en-US" sz="1220" dirty="0">
                 <a:solidFill>
                   <a:srgbClr val="17364A"/>
                 </a:solidFill>
@@ -6572,11 +6659,14 @@
               </a:rPr>
               <a:t>Unclear authority.</a:t>
             </a:r>
-            <a:endParaRPr lang="en-US" sz="1380" dirty="0"/>
-          </a:p>
-          <a:p>
-            <a:r>
-              <a:rPr lang="en-US" sz="1380" dirty="0">
+            <a:endParaRPr lang="en-US" sz="1220" dirty="0"/>
+          </a:p>
+          <a:p>
+            <a:pPr indent="0" marL="0">
+              <a:buNone/>
+            </a:pPr>
+            <a:r>
+              <a:rPr lang="en-US" sz="1220" dirty="0">
                 <a:solidFill>
                   <a:srgbClr val="17364A"/>
                 </a:solidFill>
@@ -6584,9 +6674,9 @@
                 <a:ea typeface="Aptos" pitchFamily="34" charset="-122"/>
                 <a:cs typeface="Aptos" pitchFamily="34" charset="-120"/>
               </a:rPr>
-              <a:t>AI tools may produce recommendations, summaries, or classifications that look official,.</a:t>
-            </a:r>
-            <a:endParaRPr lang="en-US" sz="1380" dirty="0"/>
+              <a:t>AI tools may produce recommendations, summaries, or.</a:t>
+            </a:r>
+            <a:endParaRPr lang="en-US" sz="1220" dirty="0"/>
           </a:p>
         </p:txBody>
       </p:sp>
@@ -6664,17 +6754,17 @@
         </p:nvSpPr>
         <p:spPr>
           <a:xfrm>
-            <a:off x="7799832" y="5001768"/>
-            <a:ext cx="3145536" cy="502920"/>
-          </a:xfrm>
-          <a:prstGeom prst="rect">
-            <a:avLst/>
-          </a:prstGeom>
-          <a:noFill/>
-          <a:ln/>
-        </p:spPr>
-        <p:txBody>
-          <a:bodyPr wrap="square" lIns="0" tIns="0" rIns="0" bIns="0" rtlCol="0" anchor="t">
+            <a:off x="7799832" y="4974336"/>
+            <a:ext cx="3145536" cy="576072"/>
+          </a:xfrm>
+          <a:prstGeom prst="rect">
+            <a:avLst/>
+          </a:prstGeom>
+          <a:noFill/>
+          <a:ln/>
+        </p:spPr>
+        <p:txBody>
+          <a:bodyPr wrap="square" lIns="254" tIns="254" rIns="254" bIns="254" rtlCol="0" anchor="t">
             <a:normAutofit/>
           </a:bodyPr>
           <a:lstStyle/>
@@ -6683,7 +6773,7 @@
               <a:buNone/>
             </a:pPr>
             <a:r>
-              <a:rPr lang="en-US" sz="1550" dirty="0">
+              <a:rPr lang="en-US" sz="1320" dirty="0">
                 <a:solidFill>
                   <a:srgbClr val="17364A"/>
                 </a:solidFill>
@@ -6691,9 +6781,9 @@
                 <a:ea typeface="Aptos" pitchFamily="34" charset="-122"/>
                 <a:cs typeface="Aptos" pitchFamily="34" charset="-120"/>
               </a:rPr>
-              <a:t>Identify what could go wrong, who could be affected, what safeguards are needed, and what evidence should be reviewed before use expands.</a:t>
-            </a:r>
-            <a:endParaRPr lang="en-US" sz="1550" dirty="0"/>
+              <a:t>Identify what could go wrong, who could be affected, what safeguards are needed, and what evidence should be reviewed.</a:t>
+            </a:r>
+            <a:endParaRPr lang="en-US" sz="1320" dirty="0"/>
           </a:p>
         </p:txBody>
       </p:sp>
@@ -6994,49 +7084,58 @@
           <a:ln/>
         </p:spPr>
         <p:txBody>
-          <a:bodyPr wrap="square" lIns="635" tIns="635" rIns="635" bIns="635" rtlCol="0" anchor="t">
+          <a:bodyPr wrap="square" lIns="1016" tIns="1016" rIns="1016" bIns="1016" rtlCol="0" anchor="t">
             <a:normAutofit/>
           </a:bodyPr>
           <a:lstStyle/>
           <a:p>
+            <a:pPr indent="0" marL="0">
+              <a:buNone/>
+            </a:pPr>
             <a:r>
               <a:rPr lang="en-US" sz="2100" dirty="0">
                 <a:solidFill>
-                  <a:srgbClr val="17364A"/>
-                </a:solidFill>
-                <a:latin typeface="Aptos" pitchFamily="34" charset="0"/>
-                <a:ea typeface="Aptos" pitchFamily="34" charset="-122"/>
-                <a:cs typeface="Aptos" pitchFamily="34" charset="-120"/>
-              </a:rPr>
-              <a:t>Poor monitoring and equity harm.</a:t>
+                  <a:srgbClr val="003A63"/>
+                </a:solidFill>
+                <a:latin typeface="Aptos" pitchFamily="34" charset="0"/>
+                <a:ea typeface="Aptos" pitchFamily="34" charset="-122"/>
+                <a:cs typeface="Aptos" pitchFamily="34" charset="-120"/>
+              </a:rPr>
+              <a:t>• Poor monitoring and equity harm.</a:t>
             </a:r>
             <a:endParaRPr lang="en-US" sz="2100" dirty="0"/>
           </a:p>
           <a:p>
+            <a:pPr indent="0" marL="0">
+              <a:buNone/>
+            </a:pPr>
             <a:r>
               <a:rPr lang="en-US" sz="2100" dirty="0">
                 <a:solidFill>
-                  <a:srgbClr val="17364A"/>
-                </a:solidFill>
-                <a:latin typeface="Aptos" pitchFamily="34" charset="0"/>
-                <a:ea typeface="Aptos" pitchFamily="34" charset="-122"/>
-                <a:cs typeface="Aptos" pitchFamily="34" charset="-120"/>
-              </a:rPr>
-              <a:t>AI tools can degrade over time when data patterns, reporting sources, terminology, policies, or.</a:t>
+                  <a:srgbClr val="003A63"/>
+                </a:solidFill>
+                <a:latin typeface="Aptos" pitchFamily="34" charset="0"/>
+                <a:ea typeface="Aptos" pitchFamily="34" charset="-122"/>
+                <a:cs typeface="Aptos" pitchFamily="34" charset="-120"/>
+              </a:rPr>
+              <a:t>• AI tools can degrade over time when data patterns, reporting sources, terminology, policies, or.</a:t>
             </a:r>
             <a:endParaRPr lang="en-US" sz="2100" dirty="0"/>
           </a:p>
           <a:p>
+            <a:pPr indent="0" marL="0">
+              <a:buNone/>
+            </a:pPr>
             <a:r>
               <a:rPr lang="en-US" sz="2100" dirty="0">
                 <a:solidFill>
-                  <a:srgbClr val="17364A"/>
-                </a:solidFill>
-                <a:latin typeface="Aptos" pitchFamily="34" charset="0"/>
-                <a:ea typeface="Aptos" pitchFamily="34" charset="-122"/>
-                <a:cs typeface="Aptos" pitchFamily="34" charset="-120"/>
-              </a:rPr>
-              <a:t>If the architecture relies on data sources that underrepresent some communities, the tool may also.</a:t>
+                  <a:srgbClr val="003A63"/>
+                </a:solidFill>
+                <a:latin typeface="Aptos" pitchFamily="34" charset="0"/>
+                <a:ea typeface="Aptos" pitchFamily="34" charset="-122"/>
+                <a:cs typeface="Aptos" pitchFamily="34" charset="-120"/>
+              </a:rPr>
+              <a:t>• If the architecture relies on data sources that underrepresent some communities, the tool may.</a:t>
             </a:r>
             <a:endParaRPr lang="en-US" sz="2100" dirty="0"/>
           </a:p>
@@ -7116,17 +7215,17 @@
         </p:nvSpPr>
         <p:spPr>
           <a:xfrm>
-            <a:off x="7799832" y="1828800"/>
-            <a:ext cx="3145536" cy="685800"/>
-          </a:xfrm>
-          <a:prstGeom prst="rect">
-            <a:avLst/>
-          </a:prstGeom>
-          <a:noFill/>
-          <a:ln/>
-        </p:spPr>
-        <p:txBody>
-          <a:bodyPr wrap="square" lIns="0" tIns="0" rIns="0" bIns="0" rtlCol="0" anchor="t">
+            <a:off x="7799832" y="1801368"/>
+            <a:ext cx="3145536" cy="758952"/>
+          </a:xfrm>
+          <a:prstGeom prst="rect">
+            <a:avLst/>
+          </a:prstGeom>
+          <a:noFill/>
+          <a:ln/>
+        </p:spPr>
+        <p:txBody>
+          <a:bodyPr wrap="square" lIns="254" tIns="254" rIns="254" bIns="254" rtlCol="0" anchor="t">
             <a:normAutofit/>
           </a:bodyPr>
           <a:lstStyle/>
@@ -7135,7 +7234,7 @@
               <a:buNone/>
             </a:pPr>
             <a:r>
-              <a:rPr lang="en-US" sz="1550" dirty="0">
+              <a:rPr lang="en-US" sz="1320" dirty="0">
                 <a:solidFill>
                   <a:srgbClr val="17364A"/>
                 </a:solidFill>
@@ -7145,7 +7244,7 @@
               </a:rPr>
               <a:t>Poor monitoring and equity harm.</a:t>
             </a:r>
-            <a:endParaRPr lang="en-US" sz="1550" dirty="0"/>
+            <a:endParaRPr lang="en-US" sz="1320" dirty="0"/>
           </a:p>
         </p:txBody>
       </p:sp>
@@ -7233,13 +7332,16 @@
           <a:ln/>
         </p:spPr>
         <p:txBody>
-          <a:bodyPr wrap="square" lIns="254" tIns="254" rIns="254" bIns="254" rtlCol="0" anchor="t">
+          <a:bodyPr wrap="square" lIns="508" tIns="508" rIns="508" bIns="508" rtlCol="0" anchor="t">
             <a:normAutofit/>
           </a:bodyPr>
           <a:lstStyle/>
           <a:p>
-            <a:r>
-              <a:rPr lang="en-US" sz="1380" dirty="0">
+            <a:pPr indent="0" marL="0">
+              <a:buNone/>
+            </a:pPr>
+            <a:r>
+              <a:rPr lang="en-US" sz="1220" dirty="0">
                 <a:solidFill>
                   <a:srgbClr val="17364A"/>
                 </a:solidFill>
@@ -7247,13 +7349,16 @@
                 <a:ea typeface="Aptos" pitchFamily="34" charset="-122"/>
                 <a:cs typeface="Aptos" pitchFamily="34" charset="-120"/>
               </a:rPr>
-              <a:t>AI tools can degrade over time when data patterns, reporting sources, terminology,.</a:t>
-            </a:r>
-            <a:endParaRPr lang="en-US" sz="1380" dirty="0"/>
-          </a:p>
-          <a:p>
-            <a:r>
-              <a:rPr lang="en-US" sz="1380" dirty="0">
+              <a:t>AI tools can degrade over time when data patterns, reporting.</a:t>
+            </a:r>
+            <a:endParaRPr lang="en-US" sz="1220" dirty="0"/>
+          </a:p>
+          <a:p>
+            <a:pPr indent="0" marL="0">
+              <a:buNone/>
+            </a:pPr>
+            <a:r>
+              <a:rPr lang="en-US" sz="1220" dirty="0">
                 <a:solidFill>
                   <a:srgbClr val="17364A"/>
                 </a:solidFill>
@@ -7261,13 +7366,16 @@
                 <a:ea typeface="Aptos" pitchFamily="34" charset="-122"/>
                 <a:cs typeface="Aptos" pitchFamily="34" charset="-120"/>
               </a:rPr>
-              <a:t>If the architecture relies on data sources that underrepresent some communities, the tool.</a:t>
-            </a:r>
-            <a:endParaRPr lang="en-US" sz="1380" dirty="0"/>
-          </a:p>
-          <a:p>
-            <a:r>
-              <a:rPr lang="en-US" sz="1380" dirty="0">
+              <a:t>If the architecture relies on data sources that underrepresent.</a:t>
+            </a:r>
+            <a:endParaRPr lang="en-US" sz="1220" dirty="0"/>
+          </a:p>
+          <a:p>
+            <a:pPr indent="0" marL="0">
+              <a:buNone/>
+            </a:pPr>
+            <a:r>
+              <a:rPr lang="en-US" sz="1220" dirty="0">
                 <a:solidFill>
                   <a:srgbClr val="17364A"/>
                 </a:solidFill>
@@ -7275,9 +7383,9 @@
                 <a:ea typeface="Aptos" pitchFamily="34" charset="-122"/>
                 <a:cs typeface="Aptos" pitchFamily="34" charset="-120"/>
               </a:rPr>
-              <a:t>Practical guardrails include pre-deployment subgroup review, monitoring indicators, user.</a:t>
-            </a:r>
-            <a:endParaRPr lang="en-US" sz="1380" dirty="0"/>
+              <a:t>Practical guardrails include pre-deployment subgroup review,.</a:t>
+            </a:r>
+            <a:endParaRPr lang="en-US" sz="1220" dirty="0"/>
           </a:p>
         </p:txBody>
       </p:sp>
@@ -7355,17 +7463,17 @@
         </p:nvSpPr>
         <p:spPr>
           <a:xfrm>
-            <a:off x="7799832" y="5001768"/>
-            <a:ext cx="3145536" cy="502920"/>
-          </a:xfrm>
-          <a:prstGeom prst="rect">
-            <a:avLst/>
-          </a:prstGeom>
-          <a:noFill/>
-          <a:ln/>
-        </p:spPr>
-        <p:txBody>
-          <a:bodyPr wrap="square" lIns="0" tIns="0" rIns="0" bIns="0" rtlCol="0" anchor="t">
+            <a:off x="7799832" y="4974336"/>
+            <a:ext cx="3145536" cy="576072"/>
+          </a:xfrm>
+          <a:prstGeom prst="rect">
+            <a:avLst/>
+          </a:prstGeom>
+          <a:noFill/>
+          <a:ln/>
+        </p:spPr>
+        <p:txBody>
+          <a:bodyPr wrap="square" lIns="254" tIns="254" rIns="254" bIns="254" rtlCol="0" anchor="t">
             <a:normAutofit/>
           </a:bodyPr>
           <a:lstStyle/>
@@ -7374,7 +7482,7 @@
               <a:buNone/>
             </a:pPr>
             <a:r>
-              <a:rPr lang="en-US" sz="1550" dirty="0">
+              <a:rPr lang="en-US" sz="1320" dirty="0">
                 <a:solidFill>
                   <a:srgbClr val="17364A"/>
                 </a:solidFill>
@@ -7382,9 +7490,9 @@
                 <a:ea typeface="Aptos" pitchFamily="34" charset="-122"/>
                 <a:cs typeface="Aptos" pitchFamily="34" charset="-120"/>
               </a:rPr>
-              <a:t>Identify what could go wrong, who could be affected, what safeguards are needed, and what evidence should be reviewed before use expands.</a:t>
-            </a:r>
-            <a:endParaRPr lang="en-US" sz="1550" dirty="0"/>
+              <a:t>Identify what could go wrong, who could be affected, what safeguards are needed, and what evidence should be reviewed.</a:t>
+            </a:r>
+            <a:endParaRPr lang="en-US" sz="1320" dirty="0"/>
           </a:p>
         </p:txBody>
       </p:sp>
@@ -7685,49 +7793,58 @@
           <a:ln/>
         </p:spPr>
         <p:txBody>
-          <a:bodyPr wrap="square" lIns="635" tIns="635" rIns="635" bIns="635" rtlCol="0" anchor="t">
+          <a:bodyPr wrap="square" lIns="1016" tIns="1016" rIns="1016" bIns="1016" rtlCol="0" anchor="t">
             <a:normAutofit/>
           </a:bodyPr>
           <a:lstStyle/>
           <a:p>
+            <a:pPr indent="0" marL="0">
+              <a:buNone/>
+            </a:pPr>
             <a:r>
               <a:rPr lang="en-US" sz="2100" dirty="0">
                 <a:solidFill>
-                  <a:srgbClr val="17364A"/>
-                </a:solidFill>
-                <a:latin typeface="Aptos" pitchFamily="34" charset="0"/>
-                <a:ea typeface="Aptos" pitchFamily="34" charset="-122"/>
-                <a:cs typeface="Aptos" pitchFamily="34" charset="-120"/>
-              </a:rPr>
-              <a:t>For generative AI, architecture determines what source material the tool can access, whether it can.</a:t>
+                  <a:srgbClr val="003A63"/>
+                </a:solidFill>
+                <a:latin typeface="Aptos" pitchFamily="34" charset="0"/>
+                <a:ea typeface="Aptos" pitchFamily="34" charset="-122"/>
+                <a:cs typeface="Aptos" pitchFamily="34" charset="-120"/>
+              </a:rPr>
+              <a:t>• For generative AI, architecture determines what source material the tool can access, whether.</a:t>
             </a:r>
             <a:endParaRPr lang="en-US" sz="2100" dirty="0"/>
           </a:p>
           <a:p>
+            <a:pPr indent="0" marL="0">
+              <a:buNone/>
+            </a:pPr>
             <a:r>
               <a:rPr lang="en-US" sz="2100" dirty="0">
                 <a:solidFill>
-                  <a:srgbClr val="17364A"/>
-                </a:solidFill>
-                <a:latin typeface="Aptos" pitchFamily="34" charset="0"/>
-                <a:ea typeface="Aptos" pitchFamily="34" charset="-122"/>
-                <a:cs typeface="Aptos" pitchFamily="34" charset="-120"/>
-              </a:rPr>
-              <a:t>A generative AI tool used to summarize policy documents has different architectural requirements than.</a:t>
+                  <a:srgbClr val="003A63"/>
+                </a:solidFill>
+                <a:latin typeface="Aptos" pitchFamily="34" charset="0"/>
+                <a:ea typeface="Aptos" pitchFamily="34" charset="-122"/>
+                <a:cs typeface="Aptos" pitchFamily="34" charset="-120"/>
+              </a:rPr>
+              <a:t>• A generative AI tool used to summarize policy documents has different architectural.</a:t>
             </a:r>
             <a:endParaRPr lang="en-US" sz="2100" dirty="0"/>
           </a:p>
           <a:p>
+            <a:pPr indent="0" marL="0">
+              <a:buNone/>
+            </a:pPr>
             <a:r>
               <a:rPr lang="en-US" sz="2100" dirty="0">
                 <a:solidFill>
-                  <a:srgbClr val="17364A"/>
-                </a:solidFill>
-                <a:latin typeface="Aptos" pitchFamily="34" charset="0"/>
-                <a:ea typeface="Aptos" pitchFamily="34" charset="-122"/>
-                <a:cs typeface="Aptos" pitchFamily="34" charset="-120"/>
-              </a:rPr>
-              <a:t>The more sensitive or operational the use case, the stronger the controls should be.</a:t>
+                  <a:srgbClr val="003A63"/>
+                </a:solidFill>
+                <a:latin typeface="Aptos" pitchFamily="34" charset="0"/>
+                <a:ea typeface="Aptos" pitchFamily="34" charset="-122"/>
+                <a:cs typeface="Aptos" pitchFamily="34" charset="-120"/>
+              </a:rPr>
+              <a:t>• The more sensitive or operational the use case, the stronger the controls should be.</a:t>
             </a:r>
             <a:endParaRPr lang="en-US" sz="2100" dirty="0"/>
           </a:p>
@@ -7807,17 +7924,17 @@
         </p:nvSpPr>
         <p:spPr>
           <a:xfrm>
-            <a:off x="7799832" y="1828800"/>
-            <a:ext cx="3145536" cy="685800"/>
-          </a:xfrm>
-          <a:prstGeom prst="rect">
-            <a:avLst/>
-          </a:prstGeom>
-          <a:noFill/>
-          <a:ln/>
-        </p:spPr>
-        <p:txBody>
-          <a:bodyPr wrap="square" lIns="0" tIns="0" rIns="0" bIns="0" rtlCol="0" anchor="t">
+            <a:off x="7799832" y="1801368"/>
+            <a:ext cx="3145536" cy="758952"/>
+          </a:xfrm>
+          <a:prstGeom prst="rect">
+            <a:avLst/>
+          </a:prstGeom>
+          <a:noFill/>
+          <a:ln/>
+        </p:spPr>
+        <p:txBody>
+          <a:bodyPr wrap="square" lIns="254" tIns="254" rIns="254" bIns="254" rtlCol="0" anchor="t">
             <a:normAutofit/>
           </a:bodyPr>
           <a:lstStyle/>
@@ -7826,7 +7943,7 @@
               <a:buNone/>
             </a:pPr>
             <a:r>
-              <a:rPr lang="en-US" sz="1550" dirty="0">
+              <a:rPr lang="en-US" sz="1320" dirty="0">
                 <a:solidFill>
                   <a:srgbClr val="17364A"/>
                 </a:solidFill>
@@ -7836,7 +7953,7 @@
               </a:rPr>
               <a:t>For generative AI, architecture determines what source material the tool can access, whether it can.</a:t>
             </a:r>
-            <a:endParaRPr lang="en-US" sz="1550" dirty="0"/>
+            <a:endParaRPr lang="en-US" sz="1320" dirty="0"/>
           </a:p>
         </p:txBody>
       </p:sp>
@@ -7924,13 +8041,16 @@
           <a:ln/>
         </p:spPr>
         <p:txBody>
-          <a:bodyPr wrap="square" lIns="254" tIns="254" rIns="254" bIns="254" rtlCol="0" anchor="t">
+          <a:bodyPr wrap="square" lIns="508" tIns="508" rIns="508" bIns="508" rtlCol="0" anchor="t">
             <a:normAutofit/>
           </a:bodyPr>
           <a:lstStyle/>
           <a:p>
-            <a:r>
-              <a:rPr lang="en-US" sz="1380" dirty="0">
+            <a:pPr indent="0" marL="0">
+              <a:buNone/>
+            </a:pPr>
+            <a:r>
+              <a:rPr lang="en-US" sz="1220" dirty="0">
                 <a:solidFill>
                   <a:srgbClr val="17364A"/>
                 </a:solidFill>
@@ -7938,13 +8058,16 @@
                 <a:ea typeface="Aptos" pitchFamily="34" charset="-122"/>
                 <a:cs typeface="Aptos" pitchFamily="34" charset="-120"/>
               </a:rPr>
-              <a:t>For generative AI, architecture determines what source material the tool can access,.</a:t>
-            </a:r>
-            <a:endParaRPr lang="en-US" sz="1380" dirty="0"/>
-          </a:p>
-          <a:p>
-            <a:r>
-              <a:rPr lang="en-US" sz="1380" dirty="0">
+              <a:t>For generative AI, architecture determines what source material.</a:t>
+            </a:r>
+            <a:endParaRPr lang="en-US" sz="1220" dirty="0"/>
+          </a:p>
+          <a:p>
+            <a:pPr indent="0" marL="0">
+              <a:buNone/>
+            </a:pPr>
+            <a:r>
+              <a:rPr lang="en-US" sz="1220" dirty="0">
                 <a:solidFill>
                   <a:srgbClr val="17364A"/>
                 </a:solidFill>
@@ -7952,13 +8075,16 @@
                 <a:ea typeface="Aptos" pitchFamily="34" charset="-122"/>
                 <a:cs typeface="Aptos" pitchFamily="34" charset="-120"/>
               </a:rPr>
-              <a:t>A generative AI tool used to summarize policy documents has different architectural.</a:t>
-            </a:r>
-            <a:endParaRPr lang="en-US" sz="1380" dirty="0"/>
-          </a:p>
-          <a:p>
-            <a:r>
-              <a:rPr lang="en-US" sz="1380" dirty="0">
+              <a:t>A generative AI tool used to summarize policy documents has.</a:t>
+            </a:r>
+            <a:endParaRPr lang="en-US" sz="1220" dirty="0"/>
+          </a:p>
+          <a:p>
+            <a:pPr indent="0" marL="0">
+              <a:buNone/>
+            </a:pPr>
+            <a:r>
+              <a:rPr lang="en-US" sz="1220" dirty="0">
                 <a:solidFill>
                   <a:srgbClr val="17364A"/>
                 </a:solidFill>
@@ -7966,9 +8092,9 @@
                 <a:ea typeface="Aptos" pitchFamily="34" charset="-122"/>
                 <a:cs typeface="Aptos" pitchFamily="34" charset="-120"/>
               </a:rPr>
-              <a:t>For predictive analytics, architecture determines whether the model receives timely and.</a:t>
-            </a:r>
-            <a:endParaRPr lang="en-US" sz="1380" dirty="0"/>
+              <a:t>For predictive analytics, architecture determines whether the.</a:t>
+            </a:r>
+            <a:endParaRPr lang="en-US" sz="1220" dirty="0"/>
           </a:p>
         </p:txBody>
       </p:sp>
@@ -8046,17 +8172,17 @@
         </p:nvSpPr>
         <p:spPr>
           <a:xfrm>
-            <a:off x="7799832" y="5001768"/>
-            <a:ext cx="3145536" cy="502920"/>
-          </a:xfrm>
-          <a:prstGeom prst="rect">
-            <a:avLst/>
-          </a:prstGeom>
-          <a:noFill/>
-          <a:ln/>
-        </p:spPr>
-        <p:txBody>
-          <a:bodyPr wrap="square" lIns="0" tIns="0" rIns="0" bIns="0" rtlCol="0" anchor="t">
+            <a:off x="7799832" y="4974336"/>
+            <a:ext cx="3145536" cy="576072"/>
+          </a:xfrm>
+          <a:prstGeom prst="rect">
+            <a:avLst/>
+          </a:prstGeom>
+          <a:noFill/>
+          <a:ln/>
+        </p:spPr>
+        <p:txBody>
+          <a:bodyPr wrap="square" lIns="254" tIns="254" rIns="254" bIns="254" rtlCol="0" anchor="t">
             <a:normAutofit/>
           </a:bodyPr>
           <a:lstStyle/>
@@ -8065,7 +8191,7 @@
               <a:buNone/>
             </a:pPr>
             <a:r>
-              <a:rPr lang="en-US" sz="1550" dirty="0">
+              <a:rPr lang="en-US" sz="1320" dirty="0">
                 <a:solidFill>
                   <a:srgbClr val="17364A"/>
                 </a:solidFill>
@@ -8073,9 +8199,9 @@
                 <a:ea typeface="Aptos" pitchFamily="34" charset="-122"/>
                 <a:cs typeface="Aptos" pitchFamily="34" charset="-120"/>
               </a:rPr>
-              <a:t>Connect the concept to data quality, model performance, validation evidence, monitoring measures, and decisions that remain under human control.</a:t>
-            </a:r>
-            <a:endParaRPr lang="en-US" sz="1550" dirty="0"/>
+              <a:t>Connect the concept to data quality, model performance, validation evidence, monitoring measures, and decisions that.</a:t>
+            </a:r>
+            <a:endParaRPr lang="en-US" sz="1320" dirty="0"/>
           </a:p>
         </p:txBody>
       </p:sp>
@@ -8376,49 +8502,58 @@
           <a:ln/>
         </p:spPr>
         <p:txBody>
-          <a:bodyPr wrap="square" lIns="635" tIns="635" rIns="635" bIns="635" rtlCol="0" anchor="t">
+          <a:bodyPr wrap="square" lIns="1016" tIns="1016" rIns="1016" bIns="1016" rtlCol="0" anchor="t">
             <a:normAutofit/>
           </a:bodyPr>
           <a:lstStyle/>
           <a:p>
+            <a:pPr indent="0" marL="0">
+              <a:buNone/>
+            </a:pPr>
             <a:r>
               <a:rPr lang="en-US" sz="2100" dirty="0">
                 <a:solidFill>
-                  <a:srgbClr val="17364A"/>
-                </a:solidFill>
-                <a:latin typeface="Aptos" pitchFamily="34" charset="0"/>
-                <a:ea typeface="Aptos" pitchFamily="34" charset="-122"/>
-                <a:cs typeface="Aptos" pitchFamily="34" charset="-120"/>
-              </a:rPr>
-              <a:t>Which public health workflow in your agency would be most helpful to map before considering AI?</a:t>
+                  <a:srgbClr val="003A63"/>
+                </a:solidFill>
+                <a:latin typeface="Aptos" pitchFamily="34" charset="0"/>
+                <a:ea typeface="Aptos" pitchFamily="34" charset="-122"/>
+                <a:cs typeface="Aptos" pitchFamily="34" charset="-120"/>
+              </a:rPr>
+              <a:t>• Which public health workflow in your agency would be most helpful to map before considering AI?</a:t>
             </a:r>
             <a:endParaRPr lang="en-US" sz="2100" dirty="0"/>
           </a:p>
           <a:p>
+            <a:pPr indent="0" marL="0">
+              <a:buNone/>
+            </a:pPr>
             <a:r>
               <a:rPr lang="en-US" sz="2100" dirty="0">
                 <a:solidFill>
-                  <a:srgbClr val="17364A"/>
-                </a:solidFill>
-                <a:latin typeface="Aptos" pitchFamily="34" charset="0"/>
-                <a:ea typeface="Aptos" pitchFamily="34" charset="-122"/>
-                <a:cs typeface="Aptos" pitchFamily="34" charset="-120"/>
-              </a:rPr>
-              <a:t>What are the source systems, systems of record, and downstream outputs for that workflow?</a:t>
+                  <a:srgbClr val="003A63"/>
+                </a:solidFill>
+                <a:latin typeface="Aptos" pitchFamily="34" charset="0"/>
+                <a:ea typeface="Aptos" pitchFamily="34" charset="-122"/>
+                <a:cs typeface="Aptos" pitchFamily="34" charset="-120"/>
+              </a:rPr>
+              <a:t>• What are the source systems, systems of record, and downstream outputs for that workflow?</a:t>
             </a:r>
             <a:endParaRPr lang="en-US" sz="2100" dirty="0"/>
           </a:p>
           <a:p>
+            <a:pPr indent="0" marL="0">
+              <a:buNone/>
+            </a:pPr>
             <a:r>
               <a:rPr lang="en-US" sz="2100" dirty="0">
                 <a:solidFill>
-                  <a:srgbClr val="17364A"/>
-                </a:solidFill>
-                <a:latin typeface="Aptos" pitchFamily="34" charset="0"/>
-                <a:ea typeface="Aptos" pitchFamily="34" charset="-122"/>
-                <a:cs typeface="Aptos" pitchFamily="34" charset="-120"/>
-              </a:rPr>
-              <a:t>Where are data transformed, linked, summarized, interpreted, or manually corrected?</a:t>
+                  <a:srgbClr val="003A63"/>
+                </a:solidFill>
+                <a:latin typeface="Aptos" pitchFamily="34" charset="0"/>
+                <a:ea typeface="Aptos" pitchFamily="34" charset="-122"/>
+                <a:cs typeface="Aptos" pitchFamily="34" charset="-120"/>
+              </a:rPr>
+              <a:t>• Where are data transformed, linked, summarized, interpreted, or manually corrected?</a:t>
             </a:r>
             <a:endParaRPr lang="en-US" sz="2100" dirty="0"/>
           </a:p>
@@ -8498,17 +8633,17 @@
         </p:nvSpPr>
         <p:spPr>
           <a:xfrm>
-            <a:off x="7799832" y="1828800"/>
-            <a:ext cx="3145536" cy="685800"/>
-          </a:xfrm>
-          <a:prstGeom prst="rect">
-            <a:avLst/>
-          </a:prstGeom>
-          <a:noFill/>
-          <a:ln/>
-        </p:spPr>
-        <p:txBody>
-          <a:bodyPr wrap="square" lIns="0" tIns="0" rIns="0" bIns="0" rtlCol="0" anchor="t">
+            <a:off x="7799832" y="1801368"/>
+            <a:ext cx="3145536" cy="758952"/>
+          </a:xfrm>
+          <a:prstGeom prst="rect">
+            <a:avLst/>
+          </a:prstGeom>
+          <a:noFill/>
+          <a:ln/>
+        </p:spPr>
+        <p:txBody>
+          <a:bodyPr wrap="square" lIns="254" tIns="254" rIns="254" bIns="254" rtlCol="0" anchor="t">
             <a:normAutofit/>
           </a:bodyPr>
           <a:lstStyle/>
@@ -8517,7 +8652,7 @@
               <a:buNone/>
             </a:pPr>
             <a:r>
-              <a:rPr lang="en-US" sz="1550" dirty="0">
+              <a:rPr lang="en-US" sz="1320" dirty="0">
                 <a:solidFill>
                   <a:srgbClr val="17364A"/>
                 </a:solidFill>
@@ -8527,7 +8662,7 @@
               </a:rPr>
               <a:t>Which public health workflow in your agency would be most helpful to map before considering AI?</a:t>
             </a:r>
-            <a:endParaRPr lang="en-US" sz="1550" dirty="0"/>
+            <a:endParaRPr lang="en-US" sz="1320" dirty="0"/>
           </a:p>
         </p:txBody>
       </p:sp>
@@ -8615,13 +8750,16 @@
           <a:ln/>
         </p:spPr>
         <p:txBody>
-          <a:bodyPr wrap="square" lIns="254" tIns="254" rIns="254" bIns="254" rtlCol="0" anchor="t">
+          <a:bodyPr wrap="square" lIns="508" tIns="508" rIns="508" bIns="508" rtlCol="0" anchor="t">
             <a:normAutofit/>
           </a:bodyPr>
           <a:lstStyle/>
           <a:p>
-            <a:r>
-              <a:rPr lang="en-US" sz="1380" dirty="0">
+            <a:pPr indent="0" marL="0">
+              <a:buNone/>
+            </a:pPr>
+            <a:r>
+              <a:rPr lang="en-US" sz="1220" dirty="0">
                 <a:solidFill>
                   <a:srgbClr val="17364A"/>
                 </a:solidFill>
@@ -8629,13 +8767,16 @@
                 <a:ea typeface="Aptos" pitchFamily="34" charset="-122"/>
                 <a:cs typeface="Aptos" pitchFamily="34" charset="-120"/>
               </a:rPr>
-              <a:t>Which public health workflow in your agency would be most helpful to map before.</a:t>
-            </a:r>
-            <a:endParaRPr lang="en-US" sz="1380" dirty="0"/>
-          </a:p>
-          <a:p>
-            <a:r>
-              <a:rPr lang="en-US" sz="1380" dirty="0">
+              <a:t>Which public health workflow in your agency would be most helpful.</a:t>
+            </a:r>
+            <a:endParaRPr lang="en-US" sz="1220" dirty="0"/>
+          </a:p>
+          <a:p>
+            <a:pPr indent="0" marL="0">
+              <a:buNone/>
+            </a:pPr>
+            <a:r>
+              <a:rPr lang="en-US" sz="1220" dirty="0">
                 <a:solidFill>
                   <a:srgbClr val="17364A"/>
                 </a:solidFill>
@@ -8643,13 +8784,16 @@
                 <a:ea typeface="Aptos" pitchFamily="34" charset="-122"/>
                 <a:cs typeface="Aptos" pitchFamily="34" charset="-120"/>
               </a:rPr>
-              <a:t>What are the source systems, systems of record, and downstream outputs for that workflow?</a:t>
-            </a:r>
-            <a:endParaRPr lang="en-US" sz="1380" dirty="0"/>
-          </a:p>
-          <a:p>
-            <a:r>
-              <a:rPr lang="en-US" sz="1380" dirty="0">
+              <a:t>What are the source systems, systems of record, and downstream.</a:t>
+            </a:r>
+            <a:endParaRPr lang="en-US" sz="1220" dirty="0"/>
+          </a:p>
+          <a:p>
+            <a:pPr indent="0" marL="0">
+              <a:buNone/>
+            </a:pPr>
+            <a:r>
+              <a:rPr lang="en-US" sz="1220" dirty="0">
                 <a:solidFill>
                   <a:srgbClr val="17364A"/>
                 </a:solidFill>
@@ -8657,9 +8801,9 @@
                 <a:ea typeface="Aptos" pitchFamily="34" charset="-122"/>
                 <a:cs typeface="Aptos" pitchFamily="34" charset="-120"/>
               </a:rPr>
-              <a:t>Where are data transformed, linked, summarized, interpreted, or manually corrected?</a:t>
-            </a:r>
-            <a:endParaRPr lang="en-US" sz="1380" dirty="0"/>
+              <a:t>Where are data transformed, linked, summarized, interpreted, or.</a:t>
+            </a:r>
+            <a:endParaRPr lang="en-US" sz="1220" dirty="0"/>
           </a:p>
         </p:txBody>
       </p:sp>
@@ -8737,17 +8881,17 @@
         </p:nvSpPr>
         <p:spPr>
           <a:xfrm>
-            <a:off x="7799832" y="5001768"/>
-            <a:ext cx="3145536" cy="502920"/>
-          </a:xfrm>
-          <a:prstGeom prst="rect">
-            <a:avLst/>
-          </a:prstGeom>
-          <a:noFill/>
-          <a:ln/>
-        </p:spPr>
-        <p:txBody>
-          <a:bodyPr wrap="square" lIns="0" tIns="0" rIns="0" bIns="0" rtlCol="0" anchor="t">
+            <a:off x="7799832" y="4974336"/>
+            <a:ext cx="3145536" cy="576072"/>
+          </a:xfrm>
+          <a:prstGeom prst="rect">
+            <a:avLst/>
+          </a:prstGeom>
+          <a:noFill/>
+          <a:ln/>
+        </p:spPr>
+        <p:txBody>
+          <a:bodyPr wrap="square" lIns="254" tIns="254" rIns="254" bIns="254" rtlCol="0" anchor="t">
             <a:normAutofit/>
           </a:bodyPr>
           <a:lstStyle/>
@@ -8756,7 +8900,7 @@
               <a:buNone/>
             </a:pPr>
             <a:r>
-              <a:rPr lang="en-US" sz="1550" dirty="0">
+              <a:rPr lang="en-US" sz="1320" dirty="0">
                 <a:solidFill>
                   <a:srgbClr val="17364A"/>
                 </a:solidFill>
@@ -8764,9 +8908,9 @@
                 <a:ea typeface="Aptos" pitchFamily="34" charset="-122"/>
                 <a:cs typeface="Aptos" pitchFamily="34" charset="-120"/>
               </a:rPr>
-              <a:t>Connect the concept to data quality, model performance, validation evidence, monitoring measures, and decisions that remain under human control.</a:t>
-            </a:r>
-            <a:endParaRPr lang="en-US" sz="1550" dirty="0"/>
+              <a:t>Connect the concept to data quality, model performance, validation evidence, monitoring measures, and decisions that.</a:t>
+            </a:r>
+            <a:endParaRPr lang="en-US" sz="1320" dirty="0"/>
           </a:p>
         </p:txBody>
       </p:sp>
@@ -9067,49 +9211,58 @@
           <a:ln/>
         </p:spPr>
         <p:txBody>
-          <a:bodyPr wrap="square" lIns="635" tIns="635" rIns="635" bIns="635" rtlCol="0" anchor="t">
+          <a:bodyPr wrap="square" lIns="1016" tIns="1016" rIns="1016" bIns="1016" rtlCol="0" anchor="t">
             <a:normAutofit/>
           </a:bodyPr>
           <a:lstStyle/>
           <a:p>
+            <a:pPr indent="0" marL="0">
+              <a:buNone/>
+            </a:pPr>
             <a:r>
               <a:rPr lang="en-US" sz="2100" dirty="0">
                 <a:solidFill>
-                  <a:srgbClr val="17364A"/>
-                </a:solidFill>
-                <a:latin typeface="Aptos" pitchFamily="34" charset="0"/>
-                <a:ea typeface="Aptos" pitchFamily="34" charset="-122"/>
-                <a:cs typeface="Aptos" pitchFamily="34" charset="-120"/>
-              </a:rPr>
-              <a:t>Which parts of the workflow require legal, epidemiologic, clinical, communications, equity, privacy, or.</a:t>
+                  <a:srgbClr val="003A63"/>
+                </a:solidFill>
+                <a:latin typeface="Aptos" pitchFamily="34" charset="0"/>
+                <a:ea typeface="Aptos" pitchFamily="34" charset="-122"/>
+                <a:cs typeface="Aptos" pitchFamily="34" charset="-120"/>
+              </a:rPr>
+              <a:t>• Which parts of the workflow require legal, epidemiologic, clinical, communications, equity,.</a:t>
             </a:r>
             <a:endParaRPr lang="en-US" sz="2100" dirty="0"/>
           </a:p>
           <a:p>
+            <a:pPr indent="0" marL="0">
+              <a:buNone/>
+            </a:pPr>
             <a:r>
               <a:rPr lang="en-US" sz="2100" dirty="0">
                 <a:solidFill>
-                  <a:srgbClr val="17364A"/>
-                </a:solidFill>
-                <a:latin typeface="Aptos" pitchFamily="34" charset="0"/>
-                <a:ea typeface="Aptos" pitchFamily="34" charset="-122"/>
-                <a:cs typeface="Aptos" pitchFamily="34" charset="-120"/>
-              </a:rPr>
-              <a:t>What could go wrong if AI were added without changing the architecture?</a:t>
+                  <a:srgbClr val="003A63"/>
+                </a:solidFill>
+                <a:latin typeface="Aptos" pitchFamily="34" charset="0"/>
+                <a:ea typeface="Aptos" pitchFamily="34" charset="-122"/>
+                <a:cs typeface="Aptos" pitchFamily="34" charset="-120"/>
+              </a:rPr>
+              <a:t>• What could go wrong if AI were added without changing the architecture?</a:t>
             </a:r>
             <a:endParaRPr lang="en-US" sz="2100" dirty="0"/>
           </a:p>
           <a:p>
+            <a:pPr indent="0" marL="0">
+              <a:buNone/>
+            </a:pPr>
             <a:r>
               <a:rPr lang="en-US" sz="2100" dirty="0">
                 <a:solidFill>
-                  <a:srgbClr val="17364A"/>
-                </a:solidFill>
-                <a:latin typeface="Aptos" pitchFamily="34" charset="0"/>
-                <a:ea typeface="Aptos" pitchFamily="34" charset="-122"/>
-                <a:cs typeface="Aptos" pitchFamily="34" charset="-120"/>
-              </a:rPr>
-              <a:t>Which monitoring indicators would show whether the AI-supported workflow is working safely and equitably?</a:t>
+                  <a:srgbClr val="003A63"/>
+                </a:solidFill>
+                <a:latin typeface="Aptos" pitchFamily="34" charset="0"/>
+                <a:ea typeface="Aptos" pitchFamily="34" charset="-122"/>
+                <a:cs typeface="Aptos" pitchFamily="34" charset="-120"/>
+              </a:rPr>
+              <a:t>• Which monitoring indicators would show whether the AI-supported workflow is working safely and.</a:t>
             </a:r>
             <a:endParaRPr lang="en-US" sz="2100" dirty="0"/>
           </a:p>
@@ -9189,17 +9342,17 @@
         </p:nvSpPr>
         <p:spPr>
           <a:xfrm>
-            <a:off x="7799832" y="1828800"/>
-            <a:ext cx="3145536" cy="685800"/>
-          </a:xfrm>
-          <a:prstGeom prst="rect">
-            <a:avLst/>
-          </a:prstGeom>
-          <a:noFill/>
-          <a:ln/>
-        </p:spPr>
-        <p:txBody>
-          <a:bodyPr wrap="square" lIns="0" tIns="0" rIns="0" bIns="0" rtlCol="0" anchor="t">
+            <a:off x="7799832" y="1801368"/>
+            <a:ext cx="3145536" cy="758952"/>
+          </a:xfrm>
+          <a:prstGeom prst="rect">
+            <a:avLst/>
+          </a:prstGeom>
+          <a:noFill/>
+          <a:ln/>
+        </p:spPr>
+        <p:txBody>
+          <a:bodyPr wrap="square" lIns="254" tIns="254" rIns="254" bIns="254" rtlCol="0" anchor="t">
             <a:normAutofit/>
           </a:bodyPr>
           <a:lstStyle/>
@@ -9208,7 +9361,7 @@
               <a:buNone/>
             </a:pPr>
             <a:r>
-              <a:rPr lang="en-US" sz="1550" dirty="0">
+              <a:rPr lang="en-US" sz="1320" dirty="0">
                 <a:solidFill>
                   <a:srgbClr val="17364A"/>
                 </a:solidFill>
@@ -9218,7 +9371,7 @@
               </a:rPr>
               <a:t>Which parts of the workflow require legal, epidemiologic, clinical, communications, equity, privacy, or.</a:t>
             </a:r>
-            <a:endParaRPr lang="en-US" sz="1550" dirty="0"/>
+            <a:endParaRPr lang="en-US" sz="1320" dirty="0"/>
           </a:p>
         </p:txBody>
       </p:sp>
@@ -9306,13 +9459,16 @@
           <a:ln/>
         </p:spPr>
         <p:txBody>
-          <a:bodyPr wrap="square" lIns="254" tIns="254" rIns="254" bIns="254" rtlCol="0" anchor="t">
+          <a:bodyPr wrap="square" lIns="508" tIns="508" rIns="508" bIns="508" rtlCol="0" anchor="t">
             <a:normAutofit/>
           </a:bodyPr>
           <a:lstStyle/>
           <a:p>
-            <a:r>
-              <a:rPr lang="en-US" sz="1380" dirty="0">
+            <a:pPr indent="0" marL="0">
+              <a:buNone/>
+            </a:pPr>
+            <a:r>
+              <a:rPr lang="en-US" sz="1220" dirty="0">
                 <a:solidFill>
                   <a:srgbClr val="17364A"/>
                 </a:solidFill>
@@ -9320,13 +9476,16 @@
                 <a:ea typeface="Aptos" pitchFamily="34" charset="-122"/>
                 <a:cs typeface="Aptos" pitchFamily="34" charset="-120"/>
               </a:rPr>
-              <a:t>Which parts of the workflow require legal, epidemiologic, clinical, communications,.</a:t>
-            </a:r>
-            <a:endParaRPr lang="en-US" sz="1380" dirty="0"/>
-          </a:p>
-          <a:p>
-            <a:r>
-              <a:rPr lang="en-US" sz="1380" dirty="0">
+              <a:t>Which parts of the workflow require legal, epidemiologic,.</a:t>
+            </a:r>
+            <a:endParaRPr lang="en-US" sz="1220" dirty="0"/>
+          </a:p>
+          <a:p>
+            <a:pPr indent="0" marL="0">
+              <a:buNone/>
+            </a:pPr>
+            <a:r>
+              <a:rPr lang="en-US" sz="1220" dirty="0">
                 <a:solidFill>
                   <a:srgbClr val="17364A"/>
                 </a:solidFill>
@@ -9334,13 +9493,16 @@
                 <a:ea typeface="Aptos" pitchFamily="34" charset="-122"/>
                 <a:cs typeface="Aptos" pitchFamily="34" charset="-120"/>
               </a:rPr>
-              <a:t>What could go wrong if AI were added without changing the architecture?</a:t>
-            </a:r>
-            <a:endParaRPr lang="en-US" sz="1380" dirty="0"/>
-          </a:p>
-          <a:p>
-            <a:r>
-              <a:rPr lang="en-US" sz="1380" dirty="0">
+              <a:t>What could go wrong if AI were added without changing the.</a:t>
+            </a:r>
+            <a:endParaRPr lang="en-US" sz="1220" dirty="0"/>
+          </a:p>
+          <a:p>
+            <a:pPr indent="0" marL="0">
+              <a:buNone/>
+            </a:pPr>
+            <a:r>
+              <a:rPr lang="en-US" sz="1220" dirty="0">
                 <a:solidFill>
                   <a:srgbClr val="17364A"/>
                 </a:solidFill>
@@ -9348,9 +9510,9 @@
                 <a:ea typeface="Aptos" pitchFamily="34" charset="-122"/>
                 <a:cs typeface="Aptos" pitchFamily="34" charset="-120"/>
               </a:rPr>
-              <a:t>Which monitoring indicators would show whether the AI-supported workflow is working safely.</a:t>
-            </a:r>
-            <a:endParaRPr lang="en-US" sz="1380" dirty="0"/>
+              <a:t>Which monitoring indicators would show whether the AI-supported.</a:t>
+            </a:r>
+            <a:endParaRPr lang="en-US" sz="1220" dirty="0"/>
           </a:p>
         </p:txBody>
       </p:sp>
@@ -9428,17 +9590,17 @@
         </p:nvSpPr>
         <p:spPr>
           <a:xfrm>
-            <a:off x="7799832" y="5001768"/>
-            <a:ext cx="3145536" cy="502920"/>
-          </a:xfrm>
-          <a:prstGeom prst="rect">
-            <a:avLst/>
-          </a:prstGeom>
-          <a:noFill/>
-          <a:ln/>
-        </p:spPr>
-        <p:txBody>
-          <a:bodyPr wrap="square" lIns="0" tIns="0" rIns="0" bIns="0" rtlCol="0" anchor="t">
+            <a:off x="7799832" y="4974336"/>
+            <a:ext cx="3145536" cy="576072"/>
+          </a:xfrm>
+          <a:prstGeom prst="rect">
+            <a:avLst/>
+          </a:prstGeom>
+          <a:noFill/>
+          <a:ln/>
+        </p:spPr>
+        <p:txBody>
+          <a:bodyPr wrap="square" lIns="254" tIns="254" rIns="254" bIns="254" rtlCol="0" anchor="t">
             <a:normAutofit/>
           </a:bodyPr>
           <a:lstStyle/>
@@ -9447,7 +9609,7 @@
               <a:buNone/>
             </a:pPr>
             <a:r>
-              <a:rPr lang="en-US" sz="1550" dirty="0">
+              <a:rPr lang="en-US" sz="1320" dirty="0">
                 <a:solidFill>
                   <a:srgbClr val="17364A"/>
                 </a:solidFill>
@@ -9455,9 +9617,9 @@
                 <a:ea typeface="Aptos" pitchFamily="34" charset="-122"/>
                 <a:cs typeface="Aptos" pitchFamily="34" charset="-120"/>
               </a:rPr>
-              <a:t>Connect the concept to data quality, model performance, validation evidence, monitoring measures, and decisions that remain under human control.</a:t>
-            </a:r>
-            <a:endParaRPr lang="en-US" sz="1550" dirty="0"/>
+              <a:t>Connect the concept to data quality, model performance, validation evidence, monitoring measures, and decisions that.</a:t>
+            </a:r>
+            <a:endParaRPr lang="en-US" sz="1320" dirty="0"/>
           </a:p>
         </p:txBody>
       </p:sp>
@@ -9758,49 +9920,58 @@
           <a:ln/>
         </p:spPr>
         <p:txBody>
-          <a:bodyPr wrap="square" lIns="635" tIns="635" rIns="635" bIns="635" rtlCol="0" anchor="t">
+          <a:bodyPr wrap="square" lIns="1016" tIns="1016" rIns="1016" bIns="1016" rtlCol="0" anchor="t">
             <a:normAutofit/>
           </a:bodyPr>
           <a:lstStyle/>
           <a:p>
+            <a:pPr indent="0" marL="0">
+              <a:buNone/>
+            </a:pPr>
             <a:r>
               <a:rPr lang="en-US" sz="2100" dirty="0">
                 <a:solidFill>
-                  <a:srgbClr val="17364A"/>
-                </a:solidFill>
-                <a:latin typeface="Aptos" pitchFamily="34" charset="0"/>
-                <a:ea typeface="Aptos" pitchFamily="34" charset="-122"/>
-                <a:cs typeface="Aptos" pitchFamily="34" charset="-120"/>
-              </a:rPr>
-              <a:t>Create an AI-enabled workflow architecture map for one public health workflow.</a:t>
+                  <a:srgbClr val="003A63"/>
+                </a:solidFill>
+                <a:latin typeface="Aptos" pitchFamily="34" charset="0"/>
+                <a:ea typeface="Aptos" pitchFamily="34" charset="-122"/>
+                <a:cs typeface="Aptos" pitchFamily="34" charset="-120"/>
+              </a:rPr>
+              <a:t>• Create an AI-enabled workflow architecture map for one public health workflow.</a:t>
             </a:r>
             <a:endParaRPr lang="en-US" sz="2100" dirty="0"/>
           </a:p>
           <a:p>
+            <a:pPr indent="0" marL="0">
+              <a:buNone/>
+            </a:pPr>
             <a:r>
               <a:rPr lang="en-US" sz="2100" dirty="0">
                 <a:solidFill>
-                  <a:srgbClr val="17364A"/>
-                </a:solidFill>
-                <a:latin typeface="Aptos" pitchFamily="34" charset="0"/>
-                <a:ea typeface="Aptos" pitchFamily="34" charset="-122"/>
-                <a:cs typeface="Aptos" pitchFamily="34" charset="-120"/>
-              </a:rPr>
-              <a:t>Choose a workflow that is real or realistic for your agency, such as case report intake, lab result.</a:t>
+                  <a:srgbClr val="003A63"/>
+                </a:solidFill>
+                <a:latin typeface="Aptos" pitchFamily="34" charset="0"/>
+                <a:ea typeface="Aptos" pitchFamily="34" charset="-122"/>
+                <a:cs typeface="Aptos" pitchFamily="34" charset="-120"/>
+              </a:rPr>
+              <a:t>• Choose a workflow that is real or realistic for your agency, such as case report intake, lab.</a:t>
             </a:r>
             <a:endParaRPr lang="en-US" sz="2100" dirty="0"/>
           </a:p>
           <a:p>
+            <a:pPr indent="0" marL="0">
+              <a:buNone/>
+            </a:pPr>
             <a:r>
               <a:rPr lang="en-US" sz="2100" dirty="0">
                 <a:solidFill>
-                  <a:srgbClr val="17364A"/>
-                </a:solidFill>
-                <a:latin typeface="Aptos" pitchFamily="34" charset="0"/>
-                <a:ea typeface="Aptos" pitchFamily="34" charset="-122"/>
-                <a:cs typeface="Aptos" pitchFamily="34" charset="-120"/>
-              </a:rPr>
-              <a:t>Your map should include the source systems, data exchange methods, transformation steps, system of.</a:t>
+                  <a:srgbClr val="003A63"/>
+                </a:solidFill>
+                <a:latin typeface="Aptos" pitchFamily="34" charset="0"/>
+                <a:ea typeface="Aptos" pitchFamily="34" charset="-122"/>
+                <a:cs typeface="Aptos" pitchFamily="34" charset="-120"/>
+              </a:rPr>
+              <a:t>• Your map should include the source systems, data exchange methods, transformation steps,.</a:t>
             </a:r>
             <a:endParaRPr lang="en-US" sz="2100" dirty="0"/>
           </a:p>
@@ -9880,17 +10051,17 @@
         </p:nvSpPr>
         <p:spPr>
           <a:xfrm>
-            <a:off x="7799832" y="1828800"/>
-            <a:ext cx="3145536" cy="685800"/>
-          </a:xfrm>
-          <a:prstGeom prst="rect">
-            <a:avLst/>
-          </a:prstGeom>
-          <a:noFill/>
-          <a:ln/>
-        </p:spPr>
-        <p:txBody>
-          <a:bodyPr wrap="square" lIns="0" tIns="0" rIns="0" bIns="0" rtlCol="0" anchor="t">
+            <a:off x="7799832" y="1801368"/>
+            <a:ext cx="3145536" cy="758952"/>
+          </a:xfrm>
+          <a:prstGeom prst="rect">
+            <a:avLst/>
+          </a:prstGeom>
+          <a:noFill/>
+          <a:ln/>
+        </p:spPr>
+        <p:txBody>
+          <a:bodyPr wrap="square" lIns="254" tIns="254" rIns="254" bIns="254" rtlCol="0" anchor="t">
             <a:normAutofit/>
           </a:bodyPr>
           <a:lstStyle/>
@@ -9899,7 +10070,7 @@
               <a:buNone/>
             </a:pPr>
             <a:r>
-              <a:rPr lang="en-US" sz="1550" dirty="0">
+              <a:rPr lang="en-US" sz="1320" dirty="0">
                 <a:solidFill>
                   <a:srgbClr val="17364A"/>
                 </a:solidFill>
@@ -9909,7 +10080,7 @@
               </a:rPr>
               <a:t>Create an AI-enabled workflow architecture map for one public health workflow.</a:t>
             </a:r>
-            <a:endParaRPr lang="en-US" sz="1550" dirty="0"/>
+            <a:endParaRPr lang="en-US" sz="1320" dirty="0"/>
           </a:p>
         </p:txBody>
       </p:sp>
@@ -9997,13 +10168,16 @@
           <a:ln/>
         </p:spPr>
         <p:txBody>
-          <a:bodyPr wrap="square" lIns="254" tIns="254" rIns="254" bIns="254" rtlCol="0" anchor="t">
+          <a:bodyPr wrap="square" lIns="508" tIns="508" rIns="508" bIns="508" rtlCol="0" anchor="t">
             <a:normAutofit/>
           </a:bodyPr>
           <a:lstStyle/>
           <a:p>
-            <a:r>
-              <a:rPr lang="en-US" sz="1380" dirty="0">
+            <a:pPr indent="0" marL="0">
+              <a:buNone/>
+            </a:pPr>
+            <a:r>
+              <a:rPr lang="en-US" sz="1220" dirty="0">
                 <a:solidFill>
                   <a:srgbClr val="17364A"/>
                 </a:solidFill>
@@ -10011,13 +10185,16 @@
                 <a:ea typeface="Aptos" pitchFamily="34" charset="-122"/>
                 <a:cs typeface="Aptos" pitchFamily="34" charset="-120"/>
               </a:rPr>
-              <a:t>Choose a workflow that is real or realistic for your agency, such as case report intake,.</a:t>
-            </a:r>
-            <a:endParaRPr lang="en-US" sz="1380" dirty="0"/>
-          </a:p>
-          <a:p>
-            <a:r>
-              <a:rPr lang="en-US" sz="1380" dirty="0">
+              <a:t>Choose a workflow that is real or realistic for your agency, such.</a:t>
+            </a:r>
+            <a:endParaRPr lang="en-US" sz="1220" dirty="0"/>
+          </a:p>
+          <a:p>
+            <a:pPr indent="0" marL="0">
+              <a:buNone/>
+            </a:pPr>
+            <a:r>
+              <a:rPr lang="en-US" sz="1220" dirty="0">
                 <a:solidFill>
                   <a:srgbClr val="17364A"/>
                 </a:solidFill>
@@ -10025,13 +10202,16 @@
                 <a:ea typeface="Aptos" pitchFamily="34" charset="-122"/>
                 <a:cs typeface="Aptos" pitchFamily="34" charset="-120"/>
               </a:rPr>
-              <a:t>Your map should include the source systems, data exchange methods, transformation steps,.</a:t>
-            </a:r>
-            <a:endParaRPr lang="en-US" sz="1380" dirty="0"/>
-          </a:p>
-          <a:p>
-            <a:r>
-              <a:rPr lang="en-US" sz="1380" dirty="0">
+              <a:t>Your map should include the source systems, data exchange methods,.</a:t>
+            </a:r>
+            <a:endParaRPr lang="en-US" sz="1220" dirty="0"/>
+          </a:p>
+          <a:p>
+            <a:pPr indent="0" marL="0">
+              <a:buNone/>
+            </a:pPr>
+            <a:r>
+              <a:rPr lang="en-US" sz="1220" dirty="0">
                 <a:solidFill>
                   <a:srgbClr val="17364A"/>
                 </a:solidFill>
@@ -10039,9 +10219,9 @@
                 <a:ea typeface="Aptos" pitchFamily="34" charset="-122"/>
                 <a:cs typeface="Aptos" pitchFamily="34" charset="-120"/>
               </a:rPr>
-              <a:t>After completing the map, identify at least five readiness gaps that should be addressed.</a:t>
-            </a:r>
-            <a:endParaRPr lang="en-US" sz="1380" dirty="0"/>
+              <a:t>After completing the map, identify at least five readiness gaps.</a:t>
+            </a:r>
+            <a:endParaRPr lang="en-US" sz="1220" dirty="0"/>
           </a:p>
         </p:txBody>
       </p:sp>
@@ -10119,17 +10299,17 @@
         </p:nvSpPr>
         <p:spPr>
           <a:xfrm>
-            <a:off x="7799832" y="5001768"/>
-            <a:ext cx="3145536" cy="502920"/>
-          </a:xfrm>
-          <a:prstGeom prst="rect">
-            <a:avLst/>
-          </a:prstGeom>
-          <a:noFill/>
-          <a:ln/>
-        </p:spPr>
-        <p:txBody>
-          <a:bodyPr wrap="square" lIns="0" tIns="0" rIns="0" bIns="0" rtlCol="0" anchor="t">
+            <a:off x="7799832" y="4974336"/>
+            <a:ext cx="3145536" cy="576072"/>
+          </a:xfrm>
+          <a:prstGeom prst="rect">
+            <a:avLst/>
+          </a:prstGeom>
+          <a:noFill/>
+          <a:ln/>
+        </p:spPr>
+        <p:txBody>
+          <a:bodyPr wrap="square" lIns="254" tIns="254" rIns="254" bIns="254" rtlCol="0" anchor="t">
             <a:normAutofit/>
           </a:bodyPr>
           <a:lstStyle/>
@@ -10138,7 +10318,7 @@
               <a:buNone/>
             </a:pPr>
             <a:r>
-              <a:rPr lang="en-US" sz="1550" dirty="0">
+              <a:rPr lang="en-US" sz="1320" dirty="0">
                 <a:solidFill>
                   <a:srgbClr val="17364A"/>
                 </a:solidFill>
@@ -10146,9 +10326,9 @@
                 <a:ea typeface="Aptos" pitchFamily="34" charset="-122"/>
                 <a:cs typeface="Aptos" pitchFamily="34" charset="-120"/>
               </a:rPr>
-              <a:t>Use the assignment to test whether you can explain the concept, apply it to a realistic public health situation, and identify what would need review before the work moves forward.</a:t>
-            </a:r>
-            <a:endParaRPr lang="en-US" sz="1550" dirty="0"/>
+              <a:t>Use the assignment to test whether you can explain the concept, apply it to a realistic public health situation, and.</a:t>
+            </a:r>
+            <a:endParaRPr lang="en-US" sz="1320" dirty="0"/>
           </a:p>
         </p:txBody>
       </p:sp>
@@ -10449,49 +10629,58 @@
           <a:ln/>
         </p:spPr>
         <p:txBody>
-          <a:bodyPr wrap="square" lIns="635" tIns="635" rIns="635" bIns="635" rtlCol="0" anchor="t">
+          <a:bodyPr wrap="square" lIns="1016" tIns="1016" rIns="1016" bIns="1016" rtlCol="0" anchor="t">
             <a:normAutofit/>
           </a:bodyPr>
           <a:lstStyle/>
           <a:p>
+            <a:pPr indent="0" marL="0">
+              <a:buNone/>
+            </a:pPr>
             <a:r>
               <a:rPr lang="en-US" sz="2100" dirty="0">
                 <a:solidFill>
-                  <a:srgbClr val="17364A"/>
-                </a:solidFill>
-                <a:latin typeface="Aptos" pitchFamily="34" charset="0"/>
-                <a:ea typeface="Aptos" pitchFamily="34" charset="-122"/>
-                <a:cs typeface="Aptos" pitchFamily="34" charset="-120"/>
-              </a:rPr>
-              <a:t>Artificial intelligence does not operate separately from the public health data environment.</a:t>
+                  <a:srgbClr val="003A63"/>
+                </a:solidFill>
+                <a:latin typeface="Aptos" pitchFamily="34" charset="0"/>
+                <a:ea typeface="Aptos" pitchFamily="34" charset="-122"/>
+                <a:cs typeface="Aptos" pitchFamily="34" charset="-120"/>
+              </a:rPr>
+              <a:t>• Artificial intelligence does not operate separately from the public health data environment.</a:t>
             </a:r>
             <a:endParaRPr lang="en-US" sz="2100" dirty="0"/>
           </a:p>
           <a:p>
+            <a:pPr indent="0" marL="0">
+              <a:buNone/>
+            </a:pPr>
             <a:r>
               <a:rPr lang="en-US" sz="2100" dirty="0">
                 <a:solidFill>
-                  <a:srgbClr val="17364A"/>
-                </a:solidFill>
-                <a:latin typeface="Aptos" pitchFamily="34" charset="0"/>
-                <a:ea typeface="Aptos" pitchFamily="34" charset="-122"/>
-                <a:cs typeface="Aptos" pitchFamily="34" charset="-120"/>
-              </a:rPr>
-              <a:t>Every AI-supported workflow depends on the quality, structure, timeliness, governance, and security of the.</a:t>
+                  <a:srgbClr val="003A63"/>
+                </a:solidFill>
+                <a:latin typeface="Aptos" pitchFamily="34" charset="0"/>
+                <a:ea typeface="Aptos" pitchFamily="34" charset="-122"/>
+                <a:cs typeface="Aptos" pitchFamily="34" charset="-120"/>
+              </a:rPr>
+              <a:t>• Every AI-supported workflow depends on the quality, structure, timeliness, governance, and.</a:t>
             </a:r>
             <a:endParaRPr lang="en-US" sz="2100" dirty="0"/>
           </a:p>
           <a:p>
+            <a:pPr indent="0" marL="0">
+              <a:buNone/>
+            </a:pPr>
             <a:r>
               <a:rPr lang="en-US" sz="2100" dirty="0">
                 <a:solidFill>
-                  <a:srgbClr val="17364A"/>
-                </a:solidFill>
-                <a:latin typeface="Aptos" pitchFamily="34" charset="0"/>
-                <a:ea typeface="Aptos" pitchFamily="34" charset="-122"/>
-                <a:cs typeface="Aptos" pitchFamily="34" charset="-120"/>
-              </a:rPr>
-              <a:t>For public health agencies, this means that AI readiness is inseparable from data modernization.</a:t>
+                  <a:srgbClr val="003A63"/>
+                </a:solidFill>
+                <a:latin typeface="Aptos" pitchFamily="34" charset="0"/>
+                <a:ea typeface="Aptos" pitchFamily="34" charset="-122"/>
+                <a:cs typeface="Aptos" pitchFamily="34" charset="-120"/>
+              </a:rPr>
+              <a:t>• For public health agencies, this means that AI readiness is inseparable from data modernization.</a:t>
             </a:r>
             <a:endParaRPr lang="en-US" sz="2100" dirty="0"/>
           </a:p>
@@ -10571,17 +10760,17 @@
         </p:nvSpPr>
         <p:spPr>
           <a:xfrm>
-            <a:off x="8074152" y="1920240"/>
-            <a:ext cx="2825496" cy="1280160"/>
-          </a:xfrm>
-          <a:prstGeom prst="rect">
-            <a:avLst/>
-          </a:prstGeom>
-          <a:noFill/>
-          <a:ln/>
-        </p:spPr>
-        <p:txBody>
-          <a:bodyPr wrap="square" lIns="0" tIns="0" rIns="0" bIns="0" rtlCol="0" anchor="t">
+            <a:off x="8074152" y="1892808"/>
+            <a:ext cx="2825496" cy="1353312"/>
+          </a:xfrm>
+          <a:prstGeom prst="rect">
+            <a:avLst/>
+          </a:prstGeom>
+          <a:noFill/>
+          <a:ln/>
+        </p:spPr>
+        <p:txBody>
+          <a:bodyPr wrap="square" lIns="254" tIns="254" rIns="254" bIns="254" rtlCol="0" anchor="t">
             <a:normAutofit/>
           </a:bodyPr>
           <a:lstStyle/>
@@ -10590,7 +10779,7 @@
               <a:buNone/>
             </a:pPr>
             <a:r>
-              <a:rPr lang="en-US" sz="1550" dirty="0">
+              <a:rPr lang="en-US" sz="1320" dirty="0">
                 <a:solidFill>
                   <a:srgbClr val="17364A"/>
                 </a:solidFill>
@@ -10598,43 +10787,9 @@
                 <a:ea typeface="Aptos" pitchFamily="34" charset="-122"/>
                 <a:cs typeface="Aptos" pitchFamily="34" charset="-120"/>
               </a:rPr>
-              <a:t>Level: applied/foundational</a:t>
-            </a:r>
-            <a:endParaRPr lang="en-US" sz="1550" dirty="0"/>
-          </a:p>
-          <a:p>
-            <a:pPr indent="0" marL="0">
-              <a:buNone/>
-            </a:pPr>
-            <a:r>
-              <a:rPr lang="en-US" sz="1550" dirty="0">
-                <a:solidFill>
-                  <a:srgbClr val="17364A"/>
-                </a:solidFill>
-                <a:latin typeface="Aptos" pitchFamily="34" charset="0"/>
-                <a:ea typeface="Aptos" pitchFamily="34" charset="-122"/>
-                <a:cs typeface="Aptos" pitchFamily="34" charset="-120"/>
-              </a:rPr>
-              <a:t>Primary track: Technical Architecture Track</a:t>
-            </a:r>
-            <a:endParaRPr lang="en-US" sz="1550" dirty="0"/>
-          </a:p>
-          <a:p>
-            <a:pPr indent="0" marL="0">
-              <a:buNone/>
-            </a:pPr>
-            <a:r>
-              <a:rPr lang="en-US" sz="1550" dirty="0">
-                <a:solidFill>
-                  <a:srgbClr val="17364A"/>
-                </a:solidFill>
-                <a:latin typeface="Aptos" pitchFamily="34" charset="0"/>
-                <a:ea typeface="Aptos" pitchFamily="34" charset="-122"/>
-                <a:cs typeface="Aptos" pitchFamily="34" charset="-120"/>
-              </a:rPr>
-              <a:t>Appears in tracks: technical-architecture</a:t>
-            </a:r>
-            <a:endParaRPr lang="en-US" sz="1550" dirty="0"/>
+              <a:t>Level: applied/foundational Primary track: Technical Architecture Track Appears in tracks: technical-architecture</a:t>
+            </a:r>
+            <a:endParaRPr lang="en-US" sz="1320" dirty="0"/>
           </a:p>
         </p:txBody>
       </p:sp>
@@ -10722,13 +10877,16 @@
           <a:ln/>
         </p:spPr>
         <p:txBody>
-          <a:bodyPr wrap="square" lIns="254" tIns="254" rIns="254" bIns="254" rtlCol="0" anchor="t">
+          <a:bodyPr wrap="square" lIns="508" tIns="508" rIns="508" bIns="508" rtlCol="0" anchor="t">
             <a:normAutofit/>
           </a:bodyPr>
           <a:lstStyle/>
           <a:p>
-            <a:r>
-              <a:rPr lang="en-US" sz="1380" dirty="0">
+            <a:pPr indent="0" marL="0">
+              <a:buNone/>
+            </a:pPr>
+            <a:r>
+              <a:rPr lang="en-US" sz="1220" dirty="0">
                 <a:solidFill>
                   <a:srgbClr val="17364A"/>
                 </a:solidFill>
@@ -10738,11 +10896,14 @@
               </a:rPr>
               <a:t>Read the module for shared vocabulary and context.</a:t>
             </a:r>
-            <a:endParaRPr lang="en-US" sz="1380" dirty="0"/>
-          </a:p>
-          <a:p>
-            <a:r>
-              <a:rPr lang="en-US" sz="1380" dirty="0">
+            <a:endParaRPr lang="en-US" sz="1220" dirty="0"/>
+          </a:p>
+          <a:p>
+            <a:pPr indent="0" marL="0">
+              <a:buNone/>
+            </a:pPr>
+            <a:r>
+              <a:rPr lang="en-US" sz="1220" dirty="0">
                 <a:solidFill>
                   <a:srgbClr val="17364A"/>
                 </a:solidFill>
@@ -10752,11 +10913,14 @@
               </a:rPr>
               <a:t>Complete the practical exercise to apply the concept.</a:t>
             </a:r>
-            <a:endParaRPr lang="en-US" sz="1380" dirty="0"/>
-          </a:p>
-          <a:p>
-            <a:r>
-              <a:rPr lang="en-US" sz="1380" dirty="0">
+            <a:endParaRPr lang="en-US" sz="1220" dirty="0"/>
+          </a:p>
+          <a:p>
+            <a:pPr indent="0" marL="0">
+              <a:buNone/>
+            </a:pPr>
+            <a:r>
+              <a:rPr lang="en-US" sz="1220" dirty="0">
                 <a:solidFill>
                   <a:srgbClr val="17364A"/>
                 </a:solidFill>
@@ -10766,7 +10930,7 @@
               </a:rPr>
               <a:t>Use the notes and references for deeper review.</a:t>
             </a:r>
-            <a:endParaRPr lang="en-US" sz="1380" dirty="0"/>
+            <a:endParaRPr lang="en-US" sz="1220" dirty="0"/>
           </a:p>
         </p:txBody>
       </p:sp>
@@ -11067,49 +11231,58 @@
           <a:ln/>
         </p:spPr>
         <p:txBody>
-          <a:bodyPr wrap="square" lIns="635" tIns="635" rIns="635" bIns="635" rtlCol="0" anchor="t">
+          <a:bodyPr wrap="square" lIns="1016" tIns="1016" rIns="1016" bIns="1016" rtlCol="0" anchor="t">
             <a:normAutofit/>
           </a:bodyPr>
           <a:lstStyle/>
           <a:p>
+            <a:pPr indent="0" marL="0">
+              <a:buNone/>
+            </a:pPr>
             <a:r>
               <a:rPr lang="en-US" sz="2100" dirty="0">
                 <a:solidFill>
-                  <a:srgbClr val="17364A"/>
-                </a:solidFill>
-                <a:latin typeface="Aptos" pitchFamily="34" charset="0"/>
-                <a:ea typeface="Aptos" pitchFamily="34" charset="-122"/>
-                <a:cs typeface="Aptos" pitchFamily="34" charset="-120"/>
-              </a:rPr>
-              <a:t>The expected artifact is an AI-enabled workflow architecture map.</a:t>
+                  <a:srgbClr val="003A63"/>
+                </a:solidFill>
+                <a:latin typeface="Aptos" pitchFamily="34" charset="0"/>
+                <a:ea typeface="Aptos" pitchFamily="34" charset="-122"/>
+                <a:cs typeface="Aptos" pitchFamily="34" charset="-120"/>
+              </a:rPr>
+              <a:t>• The expected artifact is an AI-enabled workflow architecture map.</a:t>
             </a:r>
             <a:endParaRPr lang="en-US" sz="2100" dirty="0"/>
           </a:p>
           <a:p>
+            <a:pPr indent="0" marL="0">
+              <a:buNone/>
+            </a:pPr>
             <a:r>
               <a:rPr lang="en-US" sz="2100" dirty="0">
                 <a:solidFill>
-                  <a:srgbClr val="17364A"/>
-                </a:solidFill>
-                <a:latin typeface="Aptos" pitchFamily="34" charset="0"/>
-                <a:ea typeface="Aptos" pitchFamily="34" charset="-122"/>
-                <a:cs typeface="Aptos" pitchFamily="34" charset="-120"/>
-              </a:rPr>
-              <a:t>The evidence should also include a short readiness memo that identifies technical dependencies,.</a:t>
+                  <a:srgbClr val="003A63"/>
+                </a:solidFill>
+                <a:latin typeface="Aptos" pitchFamily="34" charset="0"/>
+                <a:ea typeface="Aptos" pitchFamily="34" charset="-122"/>
+                <a:cs typeface="Aptos" pitchFamily="34" charset="-120"/>
+              </a:rPr>
+              <a:t>• The evidence should also include a short readiness memo that identifies technical dependencies,.</a:t>
             </a:r>
             <a:endParaRPr lang="en-US" sz="2100" dirty="0"/>
           </a:p>
           <a:p>
+            <a:pPr indent="0" marL="0">
+              <a:buNone/>
+            </a:pPr>
             <a:r>
               <a:rPr lang="en-US" sz="2100" dirty="0">
                 <a:solidFill>
-                  <a:srgbClr val="17364A"/>
-                </a:solidFill>
-                <a:latin typeface="Aptos" pitchFamily="34" charset="0"/>
-                <a:ea typeface="Aptos" pitchFamily="34" charset="-122"/>
-                <a:cs typeface="Aptos" pitchFamily="34" charset="-120"/>
-              </a:rPr>
-              <a:t>A strong completion artifact should be specific enough to support governance review, implementation.</a:t>
+                  <a:srgbClr val="003A63"/>
+                </a:solidFill>
+                <a:latin typeface="Aptos" pitchFamily="34" charset="0"/>
+                <a:ea typeface="Aptos" pitchFamily="34" charset="-122"/>
+                <a:cs typeface="Aptos" pitchFamily="34" charset="-120"/>
+              </a:rPr>
+              <a:t>• A strong completion artifact should be specific enough to support governance review,.</a:t>
             </a:r>
             <a:endParaRPr lang="en-US" sz="2100" dirty="0"/>
           </a:p>
@@ -11189,17 +11362,17 @@
         </p:nvSpPr>
         <p:spPr>
           <a:xfrm>
-            <a:off x="7799832" y="1828800"/>
-            <a:ext cx="3145536" cy="685800"/>
-          </a:xfrm>
-          <a:prstGeom prst="rect">
-            <a:avLst/>
-          </a:prstGeom>
-          <a:noFill/>
-          <a:ln/>
-        </p:spPr>
-        <p:txBody>
-          <a:bodyPr wrap="square" lIns="0" tIns="0" rIns="0" bIns="0" rtlCol="0" anchor="t">
+            <a:off x="7799832" y="1801368"/>
+            <a:ext cx="3145536" cy="758952"/>
+          </a:xfrm>
+          <a:prstGeom prst="rect">
+            <a:avLst/>
+          </a:prstGeom>
+          <a:noFill/>
+          <a:ln/>
+        </p:spPr>
+        <p:txBody>
+          <a:bodyPr wrap="square" lIns="254" tIns="254" rIns="254" bIns="254" rtlCol="0" anchor="t">
             <a:normAutofit/>
           </a:bodyPr>
           <a:lstStyle/>
@@ -11208,7 +11381,7 @@
               <a:buNone/>
             </a:pPr>
             <a:r>
-              <a:rPr lang="en-US" sz="1550" dirty="0">
+              <a:rPr lang="en-US" sz="1320" dirty="0">
                 <a:solidFill>
                   <a:srgbClr val="17364A"/>
                 </a:solidFill>
@@ -11218,7 +11391,7 @@
               </a:rPr>
               <a:t>The expected artifact is an AI-enabled workflow architecture map.</a:t>
             </a:r>
-            <a:endParaRPr lang="en-US" sz="1550" dirty="0"/>
+            <a:endParaRPr lang="en-US" sz="1320" dirty="0"/>
           </a:p>
         </p:txBody>
       </p:sp>
@@ -11306,13 +11479,16 @@
           <a:ln/>
         </p:spPr>
         <p:txBody>
-          <a:bodyPr wrap="square" lIns="254" tIns="254" rIns="254" bIns="254" rtlCol="0" anchor="t">
+          <a:bodyPr wrap="square" lIns="508" tIns="508" rIns="508" bIns="508" rtlCol="0" anchor="t">
             <a:normAutofit/>
           </a:bodyPr>
           <a:lstStyle/>
           <a:p>
-            <a:r>
-              <a:rPr lang="en-US" sz="1380" dirty="0">
+            <a:pPr indent="0" marL="0">
+              <a:buNone/>
+            </a:pPr>
+            <a:r>
+              <a:rPr lang="en-US" sz="1220" dirty="0">
                 <a:solidFill>
                   <a:srgbClr val="17364A"/>
                 </a:solidFill>
@@ -11320,13 +11496,16 @@
                 <a:ea typeface="Aptos" pitchFamily="34" charset="-122"/>
                 <a:cs typeface="Aptos" pitchFamily="34" charset="-120"/>
               </a:rPr>
-              <a:t>The evidence should also include a short readiness memo that identifies technical.</a:t>
-            </a:r>
-            <a:endParaRPr lang="en-US" sz="1380" dirty="0"/>
-          </a:p>
-          <a:p>
-            <a:r>
-              <a:rPr lang="en-US" sz="1380" dirty="0">
+              <a:t>The evidence should also include a short readiness memo that.</a:t>
+            </a:r>
+            <a:endParaRPr lang="en-US" sz="1220" dirty="0"/>
+          </a:p>
+          <a:p>
+            <a:pPr indent="0" marL="0">
+              <a:buNone/>
+            </a:pPr>
+            <a:r>
+              <a:rPr lang="en-US" sz="1220" dirty="0">
                 <a:solidFill>
                   <a:srgbClr val="17364A"/>
                 </a:solidFill>
@@ -11334,13 +11513,16 @@
                 <a:ea typeface="Aptos" pitchFamily="34" charset="-122"/>
                 <a:cs typeface="Aptos" pitchFamily="34" charset="-120"/>
               </a:rPr>
-              <a:t>A strong completion artifact should be specific enough to support governance review,.</a:t>
-            </a:r>
-            <a:endParaRPr lang="en-US" sz="1380" dirty="0"/>
-          </a:p>
-          <a:p>
-            <a:r>
-              <a:rPr lang="en-US" sz="1380" dirty="0">
+              <a:t>A strong completion artifact should be specific enough to support.</a:t>
+            </a:r>
+            <a:endParaRPr lang="en-US" sz="1220" dirty="0"/>
+          </a:p>
+          <a:p>
+            <a:pPr indent="0" marL="0">
+              <a:buNone/>
+            </a:pPr>
+            <a:r>
+              <a:rPr lang="en-US" sz="1220" dirty="0">
                 <a:solidFill>
                   <a:srgbClr val="17364A"/>
                 </a:solidFill>
@@ -11350,7 +11532,7 @@
               </a:rPr>
               <a:t>It should not simply state that AI may be useful.</a:t>
             </a:r>
-            <a:endParaRPr lang="en-US" sz="1380" dirty="0"/>
+            <a:endParaRPr lang="en-US" sz="1220" dirty="0"/>
           </a:p>
         </p:txBody>
       </p:sp>
@@ -11428,17 +11610,17 @@
         </p:nvSpPr>
         <p:spPr>
           <a:xfrm>
-            <a:off x="7799832" y="5001768"/>
-            <a:ext cx="3145536" cy="502920"/>
-          </a:xfrm>
-          <a:prstGeom prst="rect">
-            <a:avLst/>
-          </a:prstGeom>
-          <a:noFill/>
-          <a:ln/>
-        </p:spPr>
-        <p:txBody>
-          <a:bodyPr wrap="square" lIns="0" tIns="0" rIns="0" bIns="0" rtlCol="0" anchor="t">
+            <a:off x="7799832" y="4974336"/>
+            <a:ext cx="3145536" cy="576072"/>
+          </a:xfrm>
+          <a:prstGeom prst="rect">
+            <a:avLst/>
+          </a:prstGeom>
+          <a:noFill/>
+          <a:ln/>
+        </p:spPr>
+        <p:txBody>
+          <a:bodyPr wrap="square" lIns="254" tIns="254" rIns="254" bIns="254" rtlCol="0" anchor="t">
             <a:normAutofit/>
           </a:bodyPr>
           <a:lstStyle/>
@@ -11447,7 +11629,7 @@
               <a:buNone/>
             </a:pPr>
             <a:r>
-              <a:rPr lang="en-US" sz="1550" dirty="0">
+              <a:rPr lang="en-US" sz="1320" dirty="0">
                 <a:solidFill>
                   <a:srgbClr val="17364A"/>
                 </a:solidFill>
@@ -11455,9 +11637,9 @@
                 <a:ea typeface="Aptos" pitchFamily="34" charset="-122"/>
                 <a:cs typeface="Aptos" pitchFamily="34" charset="-120"/>
               </a:rPr>
-              <a:t>Connect the concept to data quality, model performance, validation evidence, monitoring measures, and decisions that remain under human control.</a:t>
-            </a:r>
-            <a:endParaRPr lang="en-US" sz="1550" dirty="0"/>
+              <a:t>Connect the concept to data quality, model performance, validation evidence, monitoring measures, and decisions that.</a:t>
+            </a:r>
+            <a:endParaRPr lang="en-US" sz="1320" dirty="0"/>
           </a:p>
         </p:txBody>
       </p:sp>
@@ -11758,35 +11940,41 @@
           <a:ln/>
         </p:spPr>
         <p:txBody>
-          <a:bodyPr wrap="square" lIns="635" tIns="635" rIns="635" bIns="635" rtlCol="0" anchor="t">
+          <a:bodyPr wrap="square" lIns="1016" tIns="1016" rIns="1016" bIns="1016" rtlCol="0" anchor="t">
             <a:normAutofit/>
           </a:bodyPr>
           <a:lstStyle/>
           <a:p>
+            <a:pPr indent="0" marL="0">
+              <a:buNone/>
+            </a:pPr>
             <a:r>
               <a:rPr lang="en-US" sz="2100" dirty="0">
                 <a:solidFill>
-                  <a:srgbClr val="17364A"/>
-                </a:solidFill>
-                <a:latin typeface="Aptos" pitchFamily="34" charset="0"/>
-                <a:ea typeface="Aptos" pitchFamily="34" charset="-122"/>
-                <a:cs typeface="Aptos" pitchFamily="34" charset="-120"/>
-              </a:rPr>
-              <a:t>The expected artifact is an AI-enabled workflow architecture map. The evidence should also include a.</a:t>
+                  <a:srgbClr val="003A63"/>
+                </a:solidFill>
+                <a:latin typeface="Aptos" pitchFamily="34" charset="0"/>
+                <a:ea typeface="Aptos" pitchFamily="34" charset="-122"/>
+                <a:cs typeface="Aptos" pitchFamily="34" charset="-120"/>
+              </a:rPr>
+              <a:t>• The expected artifact is an AI-enabled workflow architecture map. The evidence should also.</a:t>
             </a:r>
             <a:endParaRPr lang="en-US" sz="2100" dirty="0"/>
           </a:p>
           <a:p>
+            <a:pPr indent="0" marL="0">
+              <a:buNone/>
+            </a:pPr>
             <a:r>
               <a:rPr lang="en-US" sz="2100" dirty="0">
                 <a:solidFill>
-                  <a:srgbClr val="17364A"/>
-                </a:solidFill>
-                <a:latin typeface="Aptos" pitchFamily="34" charset="0"/>
-                <a:ea typeface="Aptos" pitchFamily="34" charset="-122"/>
-                <a:cs typeface="Aptos" pitchFamily="34" charset="-120"/>
-              </a:rPr>
-              <a:t>A strong completion artifact should be specific enough to support governance review, implementation.</a:t>
+                  <a:srgbClr val="003A63"/>
+                </a:solidFill>
+                <a:latin typeface="Aptos" pitchFamily="34" charset="0"/>
+                <a:ea typeface="Aptos" pitchFamily="34" charset="-122"/>
+                <a:cs typeface="Aptos" pitchFamily="34" charset="-120"/>
+              </a:rPr>
+              <a:t>• A strong completion artifact should be specific enough to support governance review,.</a:t>
             </a:r>
             <a:endParaRPr lang="en-US" sz="2100" dirty="0"/>
           </a:p>
@@ -11866,17 +12054,17 @@
         </p:nvSpPr>
         <p:spPr>
           <a:xfrm>
-            <a:off x="7799832" y="1828800"/>
-            <a:ext cx="3145536" cy="685800"/>
-          </a:xfrm>
-          <a:prstGeom prst="rect">
-            <a:avLst/>
-          </a:prstGeom>
-          <a:noFill/>
-          <a:ln/>
-        </p:spPr>
-        <p:txBody>
-          <a:bodyPr wrap="square" lIns="0" tIns="0" rIns="0" bIns="0" rtlCol="0" anchor="t">
+            <a:off x="7799832" y="1801368"/>
+            <a:ext cx="3145536" cy="758952"/>
+          </a:xfrm>
+          <a:prstGeom prst="rect">
+            <a:avLst/>
+          </a:prstGeom>
+          <a:noFill/>
+          <a:ln/>
+        </p:spPr>
+        <p:txBody>
+          <a:bodyPr wrap="square" lIns="254" tIns="254" rIns="254" bIns="254" rtlCol="0" anchor="t">
             <a:normAutofit/>
           </a:bodyPr>
           <a:lstStyle/>
@@ -11885,7 +12073,7 @@
               <a:buNone/>
             </a:pPr>
             <a:r>
-              <a:rPr lang="en-US" sz="1550" dirty="0">
+              <a:rPr lang="en-US" sz="1320" dirty="0">
                 <a:solidFill>
                   <a:srgbClr val="17364A"/>
                 </a:solidFill>
@@ -11895,7 +12083,7 @@
               </a:rPr>
               <a:t>The expected artifact is an AI-enabled workflow architecture map. The evidence should also include a.</a:t>
             </a:r>
-            <a:endParaRPr lang="en-US" sz="1550" dirty="0"/>
+            <a:endParaRPr lang="en-US" sz="1320" dirty="0"/>
           </a:p>
         </p:txBody>
       </p:sp>
@@ -11983,13 +12171,16 @@
           <a:ln/>
         </p:spPr>
         <p:txBody>
-          <a:bodyPr wrap="square" lIns="254" tIns="254" rIns="254" bIns="254" rtlCol="0" anchor="t">
+          <a:bodyPr wrap="square" lIns="508" tIns="508" rIns="508" bIns="508" rtlCol="0" anchor="t">
             <a:normAutofit/>
           </a:bodyPr>
           <a:lstStyle/>
           <a:p>
-            <a:r>
-              <a:rPr lang="en-US" sz="1380" dirty="0">
+            <a:pPr indent="0" marL="0">
+              <a:buNone/>
+            </a:pPr>
+            <a:r>
+              <a:rPr lang="en-US" sz="1220" dirty="0">
                 <a:solidFill>
                   <a:srgbClr val="17364A"/>
                 </a:solidFill>
@@ -11999,11 +12190,14 @@
               </a:rPr>
               <a:t>The expected artifact is an AI-enabled workflow architecture map.</a:t>
             </a:r>
-            <a:endParaRPr lang="en-US" sz="1380" dirty="0"/>
-          </a:p>
-          <a:p>
-            <a:r>
-              <a:rPr lang="en-US" sz="1380" dirty="0">
+            <a:endParaRPr lang="en-US" sz="1220" dirty="0"/>
+          </a:p>
+          <a:p>
+            <a:pPr indent="0" marL="0">
+              <a:buNone/>
+            </a:pPr>
+            <a:r>
+              <a:rPr lang="en-US" sz="1220" dirty="0">
                 <a:solidFill>
                   <a:srgbClr val="17364A"/>
                 </a:solidFill>
@@ -12011,13 +12205,16 @@
                 <a:ea typeface="Aptos" pitchFamily="34" charset="-122"/>
                 <a:cs typeface="Aptos" pitchFamily="34" charset="-120"/>
               </a:rPr>
-              <a:t>The evidence should also include a short readiness memo that identifies technical.</a:t>
-            </a:r>
-            <a:endParaRPr lang="en-US" sz="1380" dirty="0"/>
-          </a:p>
-          <a:p>
-            <a:r>
-              <a:rPr lang="en-US" sz="1380" dirty="0">
+              <a:t>The evidence should also include a short readiness memo that.</a:t>
+            </a:r>
+            <a:endParaRPr lang="en-US" sz="1220" dirty="0"/>
+          </a:p>
+          <a:p>
+            <a:pPr indent="0" marL="0">
+              <a:buNone/>
+            </a:pPr>
+            <a:r>
+              <a:rPr lang="en-US" sz="1220" dirty="0">
                 <a:solidFill>
                   <a:srgbClr val="17364A"/>
                 </a:solidFill>
@@ -12025,9 +12222,9 @@
                 <a:ea typeface="Aptos" pitchFamily="34" charset="-122"/>
                 <a:cs typeface="Aptos" pitchFamily="34" charset="-120"/>
               </a:rPr>
-              <a:t>A strong completion artifact should be specific enough to support governance review,.</a:t>
-            </a:r>
-            <a:endParaRPr lang="en-US" sz="1380" dirty="0"/>
+              <a:t>A strong completion artifact should be specific enough to support.</a:t>
+            </a:r>
+            <a:endParaRPr lang="en-US" sz="1220" dirty="0"/>
           </a:p>
         </p:txBody>
       </p:sp>
@@ -12105,17 +12302,17 @@
         </p:nvSpPr>
         <p:spPr>
           <a:xfrm>
-            <a:off x="7799832" y="5001768"/>
-            <a:ext cx="3145536" cy="502920"/>
-          </a:xfrm>
-          <a:prstGeom prst="rect">
-            <a:avLst/>
-          </a:prstGeom>
-          <a:noFill/>
-          <a:ln/>
-        </p:spPr>
-        <p:txBody>
-          <a:bodyPr wrap="square" lIns="0" tIns="0" rIns="0" bIns="0" rtlCol="0" anchor="t">
+            <a:off x="7799832" y="4974336"/>
+            <a:ext cx="3145536" cy="576072"/>
+          </a:xfrm>
+          <a:prstGeom prst="rect">
+            <a:avLst/>
+          </a:prstGeom>
+          <a:noFill/>
+          <a:ln/>
+        </p:spPr>
+        <p:txBody>
+          <a:bodyPr wrap="square" lIns="254" tIns="254" rIns="254" bIns="254" rtlCol="0" anchor="t">
             <a:normAutofit/>
           </a:bodyPr>
           <a:lstStyle/>
@@ -12124,7 +12321,7 @@
               <a:buNone/>
             </a:pPr>
             <a:r>
-              <a:rPr lang="en-US" sz="1550" dirty="0">
+              <a:rPr lang="en-US" sz="1320" dirty="0">
                 <a:solidFill>
                   <a:srgbClr val="17364A"/>
                 </a:solidFill>
@@ -12132,9 +12329,9 @@
                 <a:ea typeface="Aptos" pitchFamily="34" charset="-122"/>
                 <a:cs typeface="Aptos" pitchFamily="34" charset="-120"/>
               </a:rPr>
-              <a:t>Use the assignment to test whether you can explain the concept, apply it to a realistic public health situation, and identify what would need review before the work moves forward.</a:t>
-            </a:r>
-            <a:endParaRPr lang="en-US" sz="1550" dirty="0"/>
+              <a:t>Use the assignment to test whether you can explain the concept, apply it to a realistic public health situation, and.</a:t>
+            </a:r>
+            <a:endParaRPr lang="en-US" sz="1320" dirty="0"/>
           </a:p>
         </p:txBody>
       </p:sp>
@@ -12435,49 +12632,58 @@
           <a:ln/>
         </p:spPr>
         <p:txBody>
-          <a:bodyPr wrap="square" lIns="635" tIns="635" rIns="635" bIns="635" rtlCol="0" anchor="t">
+          <a:bodyPr wrap="square" lIns="1016" tIns="1016" rIns="1016" bIns="1016" rtlCol="0" anchor="t">
             <a:normAutofit/>
           </a:bodyPr>
           <a:lstStyle/>
           <a:p>
+            <a:pPr indent="0" marL="0">
+              <a:buNone/>
+            </a:pPr>
             <a:r>
               <a:rPr lang="en-US" sz="2100" dirty="0">
                 <a:solidFill>
-                  <a:srgbClr val="17364A"/>
-                </a:solidFill>
-                <a:latin typeface="Aptos" pitchFamily="34" charset="0"/>
-                <a:ea typeface="Aptos" pitchFamily="34" charset="-122"/>
-                <a:cs typeface="Aptos" pitchFamily="34" charset="-120"/>
-              </a:rPr>
-              <a:t>1. Why should AI planning begin with architecture and workflow mapping?</a:t>
+                  <a:srgbClr val="003A63"/>
+                </a:solidFill>
+                <a:latin typeface="Aptos" pitchFamily="34" charset="0"/>
+                <a:ea typeface="Aptos" pitchFamily="34" charset="-122"/>
+                <a:cs typeface="Aptos" pitchFamily="34" charset="-120"/>
+              </a:rPr>
+              <a:t>• 1. Why should AI planning begin with architecture and workflow mapping?</a:t>
             </a:r>
             <a:endParaRPr lang="en-US" sz="2100" dirty="0"/>
           </a:p>
           <a:p>
+            <a:pPr indent="0" marL="0">
+              <a:buNone/>
+            </a:pPr>
             <a:r>
               <a:rPr lang="en-US" sz="2100" dirty="0">
                 <a:solidFill>
-                  <a:srgbClr val="17364A"/>
-                </a:solidFill>
-                <a:latin typeface="Aptos" pitchFamily="34" charset="0"/>
-                <a:ea typeface="Aptos" pitchFamily="34" charset="-122"/>
-                <a:cs typeface="Aptos" pitchFamily="34" charset="-120"/>
-              </a:rPr>
-              <a:t>2. What is the role of a system of record in an AI-supported workflow?</a:t>
+                  <a:srgbClr val="003A63"/>
+                </a:solidFill>
+                <a:latin typeface="Aptos" pitchFamily="34" charset="0"/>
+                <a:ea typeface="Aptos" pitchFamily="34" charset="-122"/>
+                <a:cs typeface="Aptos" pitchFamily="34" charset="-120"/>
+              </a:rPr>
+              <a:t>• 2. What is the role of a system of record in an AI-supported workflow?</a:t>
             </a:r>
             <a:endParaRPr lang="en-US" sz="2100" dirty="0"/>
           </a:p>
           <a:p>
+            <a:pPr indent="0" marL="0">
+              <a:buNone/>
+            </a:pPr>
             <a:r>
               <a:rPr lang="en-US" sz="2100" dirty="0">
                 <a:solidFill>
-                  <a:srgbClr val="17364A"/>
-                </a:solidFill>
-                <a:latin typeface="Aptos" pitchFamily="34" charset="0"/>
-                <a:ea typeface="Aptos" pitchFamily="34" charset="-122"/>
-                <a:cs typeface="Aptos" pitchFamily="34" charset="-120"/>
-              </a:rPr>
-              <a:t>3. Which risk is most likely when staff cannot explain how data move through a workflow?</a:t>
+                  <a:srgbClr val="003A63"/>
+                </a:solidFill>
+                <a:latin typeface="Aptos" pitchFamily="34" charset="0"/>
+                <a:ea typeface="Aptos" pitchFamily="34" charset="-122"/>
+                <a:cs typeface="Aptos" pitchFamily="34" charset="-120"/>
+              </a:rPr>
+              <a:t>• 3. Which risk is most likely when staff cannot explain how data move through a workflow?</a:t>
             </a:r>
             <a:endParaRPr lang="en-US" sz="2100" dirty="0"/>
           </a:p>
@@ -12557,17 +12763,17 @@
         </p:nvSpPr>
         <p:spPr>
           <a:xfrm>
-            <a:off x="7799832" y="1828800"/>
-            <a:ext cx="3145536" cy="685800"/>
-          </a:xfrm>
-          <a:prstGeom prst="rect">
-            <a:avLst/>
-          </a:prstGeom>
-          <a:noFill/>
-          <a:ln/>
-        </p:spPr>
-        <p:txBody>
-          <a:bodyPr wrap="square" lIns="0" tIns="0" rIns="0" bIns="0" rtlCol="0" anchor="t">
+            <a:off x="7799832" y="1801368"/>
+            <a:ext cx="3145536" cy="758952"/>
+          </a:xfrm>
+          <a:prstGeom prst="rect">
+            <a:avLst/>
+          </a:prstGeom>
+          <a:noFill/>
+          <a:ln/>
+        </p:spPr>
+        <p:txBody>
+          <a:bodyPr wrap="square" lIns="254" tIns="254" rIns="254" bIns="254" rtlCol="0" anchor="t">
             <a:normAutofit/>
           </a:bodyPr>
           <a:lstStyle/>
@@ -12576,7 +12782,7 @@
               <a:buNone/>
             </a:pPr>
             <a:r>
-              <a:rPr lang="en-US" sz="1550" dirty="0">
+              <a:rPr lang="en-US" sz="1320" dirty="0">
                 <a:solidFill>
                   <a:srgbClr val="17364A"/>
                 </a:solidFill>
@@ -12586,7 +12792,7 @@
               </a:rPr>
               <a:t>1. Why should AI planning begin with architecture and workflow mapping?</a:t>
             </a:r>
-            <a:endParaRPr lang="en-US" sz="1550" dirty="0"/>
+            <a:endParaRPr lang="en-US" sz="1320" dirty="0"/>
           </a:p>
         </p:txBody>
       </p:sp>
@@ -12674,13 +12880,16 @@
           <a:ln/>
         </p:spPr>
         <p:txBody>
-          <a:bodyPr wrap="square" lIns="254" tIns="254" rIns="254" bIns="254" rtlCol="0" anchor="t">
+          <a:bodyPr wrap="square" lIns="508" tIns="508" rIns="508" bIns="508" rtlCol="0" anchor="t">
             <a:normAutofit/>
           </a:bodyPr>
           <a:lstStyle/>
           <a:p>
-            <a:r>
-              <a:rPr lang="en-US" sz="1380" dirty="0">
+            <a:pPr indent="0" marL="0">
+              <a:buNone/>
+            </a:pPr>
+            <a:r>
+              <a:rPr lang="en-US" sz="1220" dirty="0">
                 <a:solidFill>
                   <a:srgbClr val="17364A"/>
                 </a:solidFill>
@@ -12690,11 +12899,14 @@
               </a:rPr>
               <a:t>1.</a:t>
             </a:r>
-            <a:endParaRPr lang="en-US" sz="1380" dirty="0"/>
-          </a:p>
-          <a:p>
-            <a:r>
-              <a:rPr lang="en-US" sz="1380" dirty="0">
+            <a:endParaRPr lang="en-US" sz="1220" dirty="0"/>
+          </a:p>
+          <a:p>
+            <a:pPr indent="0" marL="0">
+              <a:buNone/>
+            </a:pPr>
+            <a:r>
+              <a:rPr lang="en-US" sz="1220" dirty="0">
                 <a:solidFill>
                   <a:srgbClr val="17364A"/>
                 </a:solidFill>
@@ -12704,11 +12916,14 @@
               </a:rPr>
               <a:t>Why should AI planning begin with architecture and workflow mapping?</a:t>
             </a:r>
-            <a:endParaRPr lang="en-US" sz="1380" dirty="0"/>
-          </a:p>
-          <a:p>
-            <a:r>
-              <a:rPr lang="en-US" sz="1380" dirty="0">
+            <a:endParaRPr lang="en-US" sz="1220" dirty="0"/>
+          </a:p>
+          <a:p>
+            <a:pPr indent="0" marL="0">
+              <a:buNone/>
+            </a:pPr>
+            <a:r>
+              <a:rPr lang="en-US" sz="1220" dirty="0">
                 <a:solidFill>
                   <a:srgbClr val="17364A"/>
                 </a:solidFill>
@@ -12718,7 +12933,7 @@
               </a:rPr>
               <a:t>2.</a:t>
             </a:r>
-            <a:endParaRPr lang="en-US" sz="1380" dirty="0"/>
+            <a:endParaRPr lang="en-US" sz="1220" dirty="0"/>
           </a:p>
         </p:txBody>
       </p:sp>
@@ -12796,17 +13011,17 @@
         </p:nvSpPr>
         <p:spPr>
           <a:xfrm>
-            <a:off x="7799832" y="5001768"/>
-            <a:ext cx="3145536" cy="502920"/>
-          </a:xfrm>
-          <a:prstGeom prst="rect">
-            <a:avLst/>
-          </a:prstGeom>
-          <a:noFill/>
-          <a:ln/>
-        </p:spPr>
-        <p:txBody>
-          <a:bodyPr wrap="square" lIns="0" tIns="0" rIns="0" bIns="0" rtlCol="0" anchor="t">
+            <a:off x="7799832" y="4974336"/>
+            <a:ext cx="3145536" cy="576072"/>
+          </a:xfrm>
+          <a:prstGeom prst="rect">
+            <a:avLst/>
+          </a:prstGeom>
+          <a:noFill/>
+          <a:ln/>
+        </p:spPr>
+        <p:txBody>
+          <a:bodyPr wrap="square" lIns="254" tIns="254" rIns="254" bIns="254" rtlCol="0" anchor="t">
             <a:normAutofit/>
           </a:bodyPr>
           <a:lstStyle/>
@@ -12815,7 +13030,7 @@
               <a:buNone/>
             </a:pPr>
             <a:r>
-              <a:rPr lang="en-US" sz="1550" dirty="0">
+              <a:rPr lang="en-US" sz="1320" dirty="0">
                 <a:solidFill>
                   <a:srgbClr val="17364A"/>
                 </a:solidFill>
@@ -12823,9 +13038,9 @@
                 <a:ea typeface="Aptos" pitchFamily="34" charset="-122"/>
                 <a:cs typeface="Aptos" pitchFamily="34" charset="-120"/>
               </a:rPr>
-              <a:t>Use the assignment to test whether you can explain the concept, apply it to a realistic public health situation, and identify what would need review before the work moves forward.</a:t>
-            </a:r>
-            <a:endParaRPr lang="en-US" sz="1550" dirty="0"/>
+              <a:t>Use the assignment to test whether you can explain the concept, apply it to a realistic public health situation, and.</a:t>
+            </a:r>
+            <a:endParaRPr lang="en-US" sz="1320" dirty="0"/>
           </a:p>
         </p:txBody>
       </p:sp>
@@ -13126,49 +13341,58 @@
           <a:ln/>
         </p:spPr>
         <p:txBody>
-          <a:bodyPr wrap="square" lIns="635" tIns="635" rIns="635" bIns="635" rtlCol="0" anchor="t">
+          <a:bodyPr wrap="square" lIns="1016" tIns="1016" rIns="1016" bIns="1016" rtlCol="0" anchor="t">
             <a:normAutofit/>
           </a:bodyPr>
           <a:lstStyle/>
           <a:p>
+            <a:pPr indent="0" marL="0">
+              <a:buNone/>
+            </a:pPr>
             <a:r>
               <a:rPr lang="en-US" sz="2100" dirty="0">
                 <a:solidFill>
-                  <a:srgbClr val="17364A"/>
-                </a:solidFill>
-                <a:latin typeface="Aptos" pitchFamily="34" charset="0"/>
-                <a:ea typeface="Aptos" pitchFamily="34" charset="-122"/>
-                <a:cs typeface="Aptos" pitchFamily="34" charset="-120"/>
-              </a:rPr>
-              <a:t>CDC Public Health Data Strategy: https://www.cdc.gov/public-health-data-strategy/php/about/index.html</a:t>
+                  <a:srgbClr val="003A63"/>
+                </a:solidFill>
+                <a:latin typeface="Aptos" pitchFamily="34" charset="0"/>
+                <a:ea typeface="Aptos" pitchFamily="34" charset="-122"/>
+                <a:cs typeface="Aptos" pitchFamily="34" charset="-120"/>
+              </a:rPr>
+              <a:t>• CDC Public Health Data Strategy:.</a:t>
             </a:r>
             <a:endParaRPr lang="en-US" sz="2100" dirty="0"/>
           </a:p>
           <a:p>
+            <a:pPr indent="0" marL="0">
+              <a:buNone/>
+            </a:pPr>
             <a:r>
               <a:rPr lang="en-US" sz="2100" dirty="0">
                 <a:solidFill>
-                  <a:srgbClr val="17364A"/>
-                </a:solidFill>
-                <a:latin typeface="Aptos" pitchFamily="34" charset="0"/>
-                <a:ea typeface="Aptos" pitchFamily="34" charset="-122"/>
-                <a:cs typeface="Aptos" pitchFamily="34" charset="-120"/>
-              </a:rPr>
-              <a:t>CDC Data Modernization Initiative materials: https://www.cdc.gov/data-modernization/php/index.html</a:t>
+                  <a:srgbClr val="003A63"/>
+                </a:solidFill>
+                <a:latin typeface="Aptos" pitchFamily="34" charset="0"/>
+                <a:ea typeface="Aptos" pitchFamily="34" charset="-122"/>
+                <a:cs typeface="Aptos" pitchFamily="34" charset="-120"/>
+              </a:rPr>
+              <a:t>• CDC Data Modernization Initiative materials:.</a:t>
             </a:r>
             <a:endParaRPr lang="en-US" sz="2100" dirty="0"/>
           </a:p>
           <a:p>
+            <a:pPr indent="0" marL="0">
+              <a:buNone/>
+            </a:pPr>
             <a:r>
               <a:rPr lang="en-US" sz="2100" dirty="0">
                 <a:solidFill>
-                  <a:srgbClr val="17364A"/>
-                </a:solidFill>
-                <a:latin typeface="Aptos" pitchFamily="34" charset="0"/>
-                <a:ea typeface="Aptos" pitchFamily="34" charset="-122"/>
-                <a:cs typeface="Aptos" pitchFamily="34" charset="-120"/>
-              </a:rPr>
-              <a:t>NIST AI Risk Management Framework: https://www.nist.gov/itl/ai-risk-management-framework</a:t>
+                  <a:srgbClr val="003A63"/>
+                </a:solidFill>
+                <a:latin typeface="Aptos" pitchFamily="34" charset="0"/>
+                <a:ea typeface="Aptos" pitchFamily="34" charset="-122"/>
+                <a:cs typeface="Aptos" pitchFamily="34" charset="-120"/>
+              </a:rPr>
+              <a:t>• NIST AI Risk Management Framework: https://www.nist.gov/itl/ai-risk-management-framework</a:t>
             </a:r>
             <a:endParaRPr lang="en-US" sz="2100" dirty="0"/>
           </a:p>
@@ -13248,17 +13472,17 @@
         </p:nvSpPr>
         <p:spPr>
           <a:xfrm>
-            <a:off x="7799832" y="1828800"/>
-            <a:ext cx="3145536" cy="685800"/>
-          </a:xfrm>
-          <a:prstGeom prst="rect">
-            <a:avLst/>
-          </a:prstGeom>
-          <a:noFill/>
-          <a:ln/>
-        </p:spPr>
-        <p:txBody>
-          <a:bodyPr wrap="square" lIns="0" tIns="0" rIns="0" bIns="0" rtlCol="0" anchor="t">
+            <a:off x="7799832" y="1801368"/>
+            <a:ext cx="3145536" cy="758952"/>
+          </a:xfrm>
+          <a:prstGeom prst="rect">
+            <a:avLst/>
+          </a:prstGeom>
+          <a:noFill/>
+          <a:ln/>
+        </p:spPr>
+        <p:txBody>
+          <a:bodyPr wrap="square" lIns="254" tIns="254" rIns="254" bIns="254" rtlCol="0" anchor="t">
             <a:normAutofit/>
           </a:bodyPr>
           <a:lstStyle/>
@@ -13267,7 +13491,7 @@
               <a:buNone/>
             </a:pPr>
             <a:r>
-              <a:rPr lang="en-US" sz="1550" dirty="0">
+              <a:rPr lang="en-US" sz="1320" dirty="0">
                 <a:solidFill>
                   <a:srgbClr val="17364A"/>
                 </a:solidFill>
@@ -13277,7 +13501,7 @@
               </a:rPr>
               <a:t>CDC Public Health Data Strategy: https://www.cdc.gov/public-health-data-strategy/php/about/index.html</a:t>
             </a:r>
-            <a:endParaRPr lang="en-US" sz="1550" dirty="0"/>
+            <a:endParaRPr lang="en-US" sz="1320" dirty="0"/>
           </a:p>
         </p:txBody>
       </p:sp>
@@ -13365,13 +13589,16 @@
           <a:ln/>
         </p:spPr>
         <p:txBody>
-          <a:bodyPr wrap="square" lIns="254" tIns="254" rIns="254" bIns="254" rtlCol="0" anchor="t">
+          <a:bodyPr wrap="square" lIns="508" tIns="508" rIns="508" bIns="508" rtlCol="0" anchor="t">
             <a:normAutofit/>
           </a:bodyPr>
           <a:lstStyle/>
           <a:p>
-            <a:r>
-              <a:rPr lang="en-US" sz="1380" dirty="0">
+            <a:pPr indent="0" marL="0">
+              <a:buNone/>
+            </a:pPr>
+            <a:r>
+              <a:rPr lang="en-US" sz="1220" dirty="0">
                 <a:solidFill>
                   <a:srgbClr val="17364A"/>
                 </a:solidFill>
@@ -13381,11 +13608,14 @@
               </a:rPr>
               <a:t>NIST Generative AI Profile:.</a:t>
             </a:r>
-            <a:endParaRPr lang="en-US" sz="1380" dirty="0"/>
-          </a:p>
-          <a:p>
-            <a:r>
-              <a:rPr lang="en-US" sz="1380" dirty="0">
+            <a:endParaRPr lang="en-US" sz="1220" dirty="0"/>
+          </a:p>
+          <a:p>
+            <a:pPr indent="0" marL="0">
+              <a:buNone/>
+            </a:pPr>
+            <a:r>
+              <a:rPr lang="en-US" sz="1220" dirty="0">
                 <a:solidFill>
                   <a:srgbClr val="17364A"/>
                 </a:solidFill>
@@ -13395,7 +13625,7 @@
               </a:rPr>
               <a:t>ONC interoperability and health IT resources</a:t>
             </a:r>
-            <a:endParaRPr lang="en-US" sz="1380" dirty="0"/>
+            <a:endParaRPr lang="en-US" sz="1220" dirty="0"/>
           </a:p>
         </p:txBody>
       </p:sp>
@@ -13473,17 +13703,17 @@
         </p:nvSpPr>
         <p:spPr>
           <a:xfrm>
-            <a:off x="7799832" y="5001768"/>
-            <a:ext cx="3145536" cy="502920"/>
-          </a:xfrm>
-          <a:prstGeom prst="rect">
-            <a:avLst/>
-          </a:prstGeom>
-          <a:noFill/>
-          <a:ln/>
-        </p:spPr>
-        <p:txBody>
-          <a:bodyPr wrap="square" lIns="0" tIns="0" rIns="0" bIns="0" rtlCol="0" anchor="t">
+            <a:off x="7799832" y="4974336"/>
+            <a:ext cx="3145536" cy="576072"/>
+          </a:xfrm>
+          <a:prstGeom prst="rect">
+            <a:avLst/>
+          </a:prstGeom>
+          <a:noFill/>
+          <a:ln/>
+        </p:spPr>
+        <p:txBody>
+          <a:bodyPr wrap="square" lIns="254" tIns="254" rIns="254" bIns="254" rtlCol="0" anchor="t">
             <a:normAutofit/>
           </a:bodyPr>
           <a:lstStyle/>
@@ -13492,7 +13722,7 @@
               <a:buNone/>
             </a:pPr>
             <a:r>
-              <a:rPr lang="en-US" sz="1550" dirty="0">
+              <a:rPr lang="en-US" sz="1320" dirty="0">
                 <a:solidFill>
                   <a:srgbClr val="17364A"/>
                 </a:solidFill>
@@ -13500,9 +13730,9 @@
                 <a:ea typeface="Aptos" pitchFamily="34" charset="-122"/>
                 <a:cs typeface="Aptos" pitchFamily="34" charset="-120"/>
               </a:rPr>
-              <a:t>Connect the concept to data quality, model performance, validation evidence, monitoring measures, and decisions that remain under human control.</a:t>
-            </a:r>
-            <a:endParaRPr lang="en-US" sz="1550" dirty="0"/>
+              <a:t>Connect the concept to data quality, model performance, validation evidence, monitoring measures, and decisions that.</a:t>
+            </a:r>
+            <a:endParaRPr lang="en-US" sz="1320" dirty="0"/>
           </a:p>
         </p:txBody>
       </p:sp>
@@ -13803,21 +14033,24 @@
           <a:ln/>
         </p:spPr>
         <p:txBody>
-          <a:bodyPr wrap="square" lIns="635" tIns="635" rIns="635" bIns="635" rtlCol="0" anchor="t">
+          <a:bodyPr wrap="square" lIns="1016" tIns="1016" rIns="1016" bIns="1016" rtlCol="0" anchor="t">
             <a:normAutofit/>
           </a:bodyPr>
           <a:lstStyle/>
           <a:p>
+            <a:pPr indent="0" marL="0">
+              <a:buNone/>
+            </a:pPr>
             <a:r>
               <a:rPr lang="en-US" sz="2100" dirty="0">
                 <a:solidFill>
-                  <a:srgbClr val="17364A"/>
-                </a:solidFill>
-                <a:latin typeface="Aptos" pitchFamily="34" charset="0"/>
-                <a:ea typeface="Aptos" pitchFamily="34" charset="-122"/>
-                <a:cs typeface="Aptos" pitchFamily="34" charset="-120"/>
-              </a:rPr>
-              <a:t>Agency data governance, privacy, cybersecurity, and enterprise architecture documentation</a:t>
+                  <a:srgbClr val="003A63"/>
+                </a:solidFill>
+                <a:latin typeface="Aptos" pitchFamily="34" charset="0"/>
+                <a:ea typeface="Aptos" pitchFamily="34" charset="-122"/>
+                <a:cs typeface="Aptos" pitchFamily="34" charset="-120"/>
+              </a:rPr>
+              <a:t>• Agency data governance, privacy, cybersecurity, and enterprise architecture documentation</a:t>
             </a:r>
             <a:endParaRPr lang="en-US" sz="2100" dirty="0"/>
           </a:p>
@@ -13897,17 +14130,17 @@
         </p:nvSpPr>
         <p:spPr>
           <a:xfrm>
-            <a:off x="7799832" y="1828800"/>
-            <a:ext cx="3145536" cy="685800"/>
-          </a:xfrm>
-          <a:prstGeom prst="rect">
-            <a:avLst/>
-          </a:prstGeom>
-          <a:noFill/>
-          <a:ln/>
-        </p:spPr>
-        <p:txBody>
-          <a:bodyPr wrap="square" lIns="0" tIns="0" rIns="0" bIns="0" rtlCol="0" anchor="t">
+            <a:off x="7799832" y="1801368"/>
+            <a:ext cx="3145536" cy="758952"/>
+          </a:xfrm>
+          <a:prstGeom prst="rect">
+            <a:avLst/>
+          </a:prstGeom>
+          <a:noFill/>
+          <a:ln/>
+        </p:spPr>
+        <p:txBody>
+          <a:bodyPr wrap="square" lIns="254" tIns="254" rIns="254" bIns="254" rtlCol="0" anchor="t">
             <a:normAutofit/>
           </a:bodyPr>
           <a:lstStyle/>
@@ -13916,7 +14149,7 @@
               <a:buNone/>
             </a:pPr>
             <a:r>
-              <a:rPr lang="en-US" sz="1550" dirty="0">
+              <a:rPr lang="en-US" sz="1320" dirty="0">
                 <a:solidFill>
                   <a:srgbClr val="17364A"/>
                 </a:solidFill>
@@ -13926,7 +14159,7 @@
               </a:rPr>
               <a:t>Agency data governance, privacy, cybersecurity, and enterprise architecture documentation</a:t>
             </a:r>
-            <a:endParaRPr lang="en-US" sz="1550" dirty="0"/>
+            <a:endParaRPr lang="en-US" sz="1320" dirty="0"/>
           </a:p>
         </p:txBody>
       </p:sp>
@@ -14014,13 +14247,16 @@
           <a:ln/>
         </p:spPr>
         <p:txBody>
-          <a:bodyPr wrap="square" lIns="254" tIns="254" rIns="254" bIns="254" rtlCol="0" anchor="t">
+          <a:bodyPr wrap="square" lIns="508" tIns="508" rIns="508" bIns="508" rtlCol="0" anchor="t">
             <a:normAutofit/>
           </a:bodyPr>
           <a:lstStyle/>
           <a:p>
-            <a:r>
-              <a:rPr lang="en-US" sz="1380" dirty="0">
+            <a:pPr indent="0" marL="0">
+              <a:buNone/>
+            </a:pPr>
+            <a:r>
+              <a:rPr lang="en-US" sz="1220" dirty="0">
                 <a:solidFill>
                   <a:srgbClr val="17364A"/>
                 </a:solidFill>
@@ -14028,9 +14264,9 @@
                 <a:ea typeface="Aptos" pitchFamily="34" charset="-122"/>
                 <a:cs typeface="Aptos" pitchFamily="34" charset="-120"/>
               </a:rPr>
-              <a:t>Agency data governance, privacy, cybersecurity, and enterprise architecture documentation</a:t>
-            </a:r>
-            <a:endParaRPr lang="en-US" sz="1380" dirty="0"/>
+              <a:t>Agency data governance, privacy, cybersecurity, and enterprise.</a:t>
+            </a:r>
+            <a:endParaRPr lang="en-US" sz="1220" dirty="0"/>
           </a:p>
         </p:txBody>
       </p:sp>
@@ -14108,17 +14344,17 @@
         </p:nvSpPr>
         <p:spPr>
           <a:xfrm>
-            <a:off x="7799832" y="5001768"/>
-            <a:ext cx="3145536" cy="502920"/>
-          </a:xfrm>
-          <a:prstGeom prst="rect">
-            <a:avLst/>
-          </a:prstGeom>
-          <a:noFill/>
-          <a:ln/>
-        </p:spPr>
-        <p:txBody>
-          <a:bodyPr wrap="square" lIns="0" tIns="0" rIns="0" bIns="0" rtlCol="0" anchor="t">
+            <a:off x="7799832" y="4974336"/>
+            <a:ext cx="3145536" cy="576072"/>
+          </a:xfrm>
+          <a:prstGeom prst="rect">
+            <a:avLst/>
+          </a:prstGeom>
+          <a:noFill/>
+          <a:ln/>
+        </p:spPr>
+        <p:txBody>
+          <a:bodyPr wrap="square" lIns="254" tIns="254" rIns="254" bIns="254" rtlCol="0" anchor="t">
             <a:normAutofit/>
           </a:bodyPr>
           <a:lstStyle/>
@@ -14127,7 +14363,7 @@
               <a:buNone/>
             </a:pPr>
             <a:r>
-              <a:rPr lang="en-US" sz="1550" dirty="0">
+              <a:rPr lang="en-US" sz="1320" dirty="0">
                 <a:solidFill>
                   <a:srgbClr val="17364A"/>
                 </a:solidFill>
@@ -14135,9 +14371,9 @@
                 <a:ea typeface="Aptos" pitchFamily="34" charset="-122"/>
                 <a:cs typeface="Aptos" pitchFamily="34" charset="-120"/>
               </a:rPr>
-              <a:t>Connect the concept to data quality, model performance, validation evidence, monitoring measures, and decisions that remain under human control.</a:t>
-            </a:r>
-            <a:endParaRPr lang="en-US" sz="1550" dirty="0"/>
+              <a:t>Connect the concept to data quality, model performance, validation evidence, monitoring measures, and decisions that.</a:t>
+            </a:r>
+            <a:endParaRPr lang="en-US" sz="1320" dirty="0"/>
           </a:p>
         </p:txBody>
       </p:sp>
@@ -14438,63 +14674,75 @@
           <a:ln/>
         </p:spPr>
         <p:txBody>
-          <a:bodyPr wrap="square" lIns="635" tIns="635" rIns="635" bIns="635" rtlCol="0" anchor="t">
+          <a:bodyPr wrap="square" lIns="1016" tIns="1016" rIns="1016" bIns="1016" rtlCol="0" anchor="t">
             <a:normAutofit/>
           </a:bodyPr>
           <a:lstStyle/>
           <a:p>
+            <a:pPr indent="0" marL="0">
+              <a:buNone/>
+            </a:pPr>
             <a:r>
               <a:rPr lang="en-US" sz="1900" dirty="0">
                 <a:solidFill>
-                  <a:srgbClr val="17364A"/>
-                </a:solidFill>
-                <a:latin typeface="Aptos" pitchFamily="34" charset="0"/>
-                <a:ea typeface="Aptos" pitchFamily="34" charset="-122"/>
-                <a:cs typeface="Aptos" pitchFamily="34" charset="-120"/>
-              </a:rPr>
-              <a:t>Play 11: Build and Deploy AI Solutions - This lesson informs Play 11 by helping learners connect the lesson.</a:t>
+                  <a:srgbClr val="003A63"/>
+                </a:solidFill>
+                <a:latin typeface="Aptos" pitchFamily="34" charset="0"/>
+                <a:ea typeface="Aptos" pitchFamily="34" charset="-122"/>
+                <a:cs typeface="Aptos" pitchFamily="34" charset="-120"/>
+              </a:rPr>
+              <a:t>• Play 11: Build and Deploy AI Solutions - This lesson informs Play 11 by helping learners.</a:t>
             </a:r>
             <a:endParaRPr lang="en-US" sz="1900" dirty="0"/>
           </a:p>
           <a:p>
+            <a:pPr indent="0" marL="0">
+              <a:buNone/>
+            </a:pPr>
             <a:r>
               <a:rPr lang="en-US" sz="1900" dirty="0">
                 <a:solidFill>
-                  <a:srgbClr val="17364A"/>
-                </a:solidFill>
-                <a:latin typeface="Aptos" pitchFamily="34" charset="0"/>
-                <a:ea typeface="Aptos" pitchFamily="34" charset="-122"/>
-                <a:cs typeface="Aptos" pitchFamily="34" charset="-120"/>
-              </a:rPr>
-              <a:t>Play 2: Readiness Assessment - This lesson informs Play 2 by helping learners connect the lesson topic to.</a:t>
+                  <a:srgbClr val="003A63"/>
+                </a:solidFill>
+                <a:latin typeface="Aptos" pitchFamily="34" charset="0"/>
+                <a:ea typeface="Aptos" pitchFamily="34" charset="-122"/>
+                <a:cs typeface="Aptos" pitchFamily="34" charset="-120"/>
+              </a:rPr>
+              <a:t>• Play 2: Readiness Assessment - This lesson informs Play 2 by helping learners connect the.</a:t>
             </a:r>
             <a:endParaRPr lang="en-US" sz="1900" dirty="0"/>
           </a:p>
           <a:p>
+            <a:pPr indent="0" marL="0">
+              <a:buNone/>
+            </a:pPr>
             <a:r>
               <a:rPr lang="en-US" sz="1900" dirty="0">
                 <a:solidFill>
-                  <a:srgbClr val="17364A"/>
-                </a:solidFill>
-                <a:latin typeface="Aptos" pitchFamily="34" charset="0"/>
-                <a:ea typeface="Aptos" pitchFamily="34" charset="-122"/>
-                <a:cs typeface="Aptos" pitchFamily="34" charset="-120"/>
-              </a:rPr>
-              <a:t>Play 3: Establish AI Governance - This lesson informs Play 3 by helping learners connect the lesson topic to.</a:t>
+                  <a:srgbClr val="003A63"/>
+                </a:solidFill>
+                <a:latin typeface="Aptos" pitchFamily="34" charset="0"/>
+                <a:ea typeface="Aptos" pitchFamily="34" charset="-122"/>
+                <a:cs typeface="Aptos" pitchFamily="34" charset="-120"/>
+              </a:rPr>
+              <a:t>• Play 3: Establish AI Governance - This lesson informs Play 3 by helping learners connect the.</a:t>
             </a:r>
             <a:endParaRPr lang="en-US" sz="1900" dirty="0"/>
           </a:p>
           <a:p>
+            <a:pPr indent="0" marL="0">
+              <a:buNone/>
+            </a:pPr>
             <a:r>
               <a:rPr lang="en-US" sz="1900" dirty="0">
                 <a:solidFill>
-                  <a:srgbClr val="17364A"/>
-                </a:solidFill>
-                <a:latin typeface="Aptos" pitchFamily="34" charset="0"/>
-                <a:ea typeface="Aptos" pitchFamily="34" charset="-122"/>
-                <a:cs typeface="Aptos" pitchFamily="34" charset="-120"/>
-              </a:rPr>
-              <a:t>Play 7: Prioritize Use Cases - This lesson informs Play 7 by helping learners connect the lesson topic to.</a:t>
+                  <a:srgbClr val="003A63"/>
+                </a:solidFill>
+                <a:latin typeface="Aptos" pitchFamily="34" charset="0"/>
+                <a:ea typeface="Aptos" pitchFamily="34" charset="-122"/>
+                <a:cs typeface="Aptos" pitchFamily="34" charset="-120"/>
+              </a:rPr>
+              <a:t>• Play 7: Prioritize Use Cases - This lesson informs Play 7 by helping learners connect the.</a:t>
             </a:r>
             <a:endParaRPr lang="en-US" sz="1900" dirty="0"/>
           </a:p>
@@ -14574,17 +14822,17 @@
         </p:nvSpPr>
         <p:spPr>
           <a:xfrm>
-            <a:off x="8211312" y="1920240"/>
-            <a:ext cx="2734056" cy="1463040"/>
-          </a:xfrm>
-          <a:prstGeom prst="rect">
-            <a:avLst/>
-          </a:prstGeom>
-          <a:noFill/>
-          <a:ln/>
-        </p:spPr>
-        <p:txBody>
-          <a:bodyPr wrap="square" lIns="0" tIns="0" rIns="0" bIns="0" rtlCol="0" anchor="t">
+            <a:off x="8211312" y="1892808"/>
+            <a:ext cx="2734056" cy="1536192"/>
+          </a:xfrm>
+          <a:prstGeom prst="rect">
+            <a:avLst/>
+          </a:prstGeom>
+          <a:noFill/>
+          <a:ln/>
+        </p:spPr>
+        <p:txBody>
+          <a:bodyPr wrap="square" lIns="254" tIns="254" rIns="254" bIns="254" rtlCol="0" anchor="t">
             <a:normAutofit/>
           </a:bodyPr>
           <a:lstStyle/>
@@ -14593,7 +14841,7 @@
               <a:buNone/>
             </a:pPr>
             <a:r>
-              <a:rPr lang="en-US" sz="1550" dirty="0">
+              <a:rPr lang="en-US" sz="1320" dirty="0">
                 <a:solidFill>
                   <a:srgbClr val="17364A"/>
                 </a:solidFill>
@@ -14601,9 +14849,9 @@
                 <a:ea typeface="Aptos" pitchFamily="34" charset="-122"/>
                 <a:cs typeface="Aptos" pitchFamily="34" charset="-120"/>
               </a:rPr>
-              <a:t>Use the related plays to identify decisions, participants, timing, approvals, and documentation needed for responsible implementation.</a:t>
-            </a:r>
-            <a:endParaRPr lang="en-US" sz="1550" dirty="0"/>
+              <a:t>Use the related plays to identify decisions, participants, timing, approvals, and documentation needed for responsible.</a:t>
+            </a:r>
+            <a:endParaRPr lang="en-US" sz="1320" dirty="0"/>
           </a:p>
         </p:txBody>
       </p:sp>
@@ -14691,13 +14939,16 @@
           <a:ln/>
         </p:spPr>
         <p:txBody>
-          <a:bodyPr wrap="square" lIns="254" tIns="254" rIns="254" bIns="254" rtlCol="0" anchor="t">
+          <a:bodyPr wrap="square" lIns="508" tIns="508" rIns="508" bIns="508" rtlCol="0" anchor="t">
             <a:normAutofit/>
           </a:bodyPr>
           <a:lstStyle/>
           <a:p>
-            <a:r>
-              <a:rPr lang="en-US" sz="1380" dirty="0">
+            <a:pPr indent="0" marL="0">
+              <a:buNone/>
+            </a:pPr>
+            <a:r>
+              <a:rPr lang="en-US" sz="1220" dirty="0">
                 <a:solidFill>
                   <a:srgbClr val="17364A"/>
                 </a:solidFill>
@@ -14707,11 +14958,14 @@
               </a:rPr>
               <a:t>Locate the decision point in the playbook sequence.</a:t>
             </a:r>
-            <a:endParaRPr lang="en-US" sz="1380" dirty="0"/>
-          </a:p>
-          <a:p>
-            <a:r>
-              <a:rPr lang="en-US" sz="1380" dirty="0">
+            <a:endParaRPr lang="en-US" sz="1220" dirty="0"/>
+          </a:p>
+          <a:p>
+            <a:pPr indent="0" marL="0">
+              <a:buNone/>
+            </a:pPr>
+            <a:r>
+              <a:rPr lang="en-US" sz="1220" dirty="0">
                 <a:solidFill>
                   <a:srgbClr val="17364A"/>
                 </a:solidFill>
@@ -14721,11 +14975,14 @@
               </a:rPr>
               <a:t>Identify who should participate in the work.</a:t>
             </a:r>
-            <a:endParaRPr lang="en-US" sz="1380" dirty="0"/>
-          </a:p>
-          <a:p>
-            <a:r>
-              <a:rPr lang="en-US" sz="1380" dirty="0">
+            <a:endParaRPr lang="en-US" sz="1220" dirty="0"/>
+          </a:p>
+          <a:p>
+            <a:pPr indent="0" marL="0">
+              <a:buNone/>
+            </a:pPr>
+            <a:r>
+              <a:rPr lang="en-US" sz="1220" dirty="0">
                 <a:solidFill>
                   <a:srgbClr val="17364A"/>
                 </a:solidFill>
@@ -14735,7 +14992,7 @@
               </a:rPr>
               <a:t>Document the review, approval, or implementation step.</a:t>
             </a:r>
-            <a:endParaRPr lang="en-US" sz="1380" dirty="0"/>
+            <a:endParaRPr lang="en-US" sz="1220" dirty="0"/>
           </a:p>
         </p:txBody>
       </p:sp>
@@ -15036,63 +15293,75 @@
           <a:ln/>
         </p:spPr>
         <p:txBody>
-          <a:bodyPr wrap="square" lIns="635" tIns="635" rIns="635" bIns="635" rtlCol="0" anchor="t">
+          <a:bodyPr wrap="square" lIns="1016" tIns="1016" rIns="1016" bIns="1016" rtlCol="0" anchor="t">
             <a:normAutofit/>
           </a:bodyPr>
           <a:lstStyle/>
           <a:p>
+            <a:pPr indent="0" marL="0">
+              <a:buNone/>
+            </a:pPr>
             <a:r>
               <a:rPr lang="en-US" sz="1850" dirty="0">
                 <a:solidFill>
-                  <a:srgbClr val="17364A"/>
-                </a:solidFill>
-                <a:latin typeface="Aptos" pitchFamily="34" charset="0"/>
-                <a:ea typeface="Aptos" pitchFamily="34" charset="-122"/>
-                <a:cs typeface="Aptos" pitchFamily="34" charset="-120"/>
-              </a:rPr>
-              <a:t>Tool 4: AI Policy Landscape Scan (Worksheet) - Use AI Policy Landscape Scan to translate this lesson into a.</a:t>
+                  <a:srgbClr val="003A63"/>
+                </a:solidFill>
+                <a:latin typeface="Aptos" pitchFamily="34" charset="0"/>
+                <a:ea typeface="Aptos" pitchFamily="34" charset="-122"/>
+                <a:cs typeface="Aptos" pitchFamily="34" charset="-120"/>
+              </a:rPr>
+              <a:t>• Tool 4: AI Policy Landscape Scan (Worksheet) - Use AI Policy Landscape Scan to translate this.</a:t>
             </a:r>
             <a:endParaRPr lang="en-US" sz="1850" dirty="0"/>
           </a:p>
           <a:p>
+            <a:pPr indent="0" marL="0">
+              <a:buNone/>
+            </a:pPr>
             <a:r>
               <a:rPr lang="en-US" sz="1850" dirty="0">
                 <a:solidFill>
-                  <a:srgbClr val="17364A"/>
-                </a:solidFill>
-                <a:latin typeface="Aptos" pitchFamily="34" charset="0"/>
-                <a:ea typeface="Aptos" pitchFamily="34" charset="-122"/>
-                <a:cs typeface="Aptos" pitchFamily="34" charset="-120"/>
-              </a:rPr>
-              <a:t>Tool 5: AI Environmental and Resource Impact Review (Checklist) - Use AI Environmental and Resource Impact.</a:t>
+                  <a:srgbClr val="003A63"/>
+                </a:solidFill>
+                <a:latin typeface="Aptos" pitchFamily="34" charset="0"/>
+                <a:ea typeface="Aptos" pitchFamily="34" charset="-122"/>
+                <a:cs typeface="Aptos" pitchFamily="34" charset="-120"/>
+              </a:rPr>
+              <a:t>• Tool 5: AI Environmental and Resource Impact Review (Checklist) - Use AI Environmental and.</a:t>
             </a:r>
             <a:endParaRPr lang="en-US" sz="1850" dirty="0"/>
           </a:p>
           <a:p>
+            <a:pPr indent="0" marL="0">
+              <a:buNone/>
+            </a:pPr>
             <a:r>
               <a:rPr lang="en-US" sz="1850" dirty="0">
                 <a:solidFill>
-                  <a:srgbClr val="17364A"/>
-                </a:solidFill>
-                <a:latin typeface="Aptos" pitchFamily="34" charset="0"/>
-                <a:ea typeface="Aptos" pitchFamily="34" charset="-122"/>
-                <a:cs typeface="Aptos" pitchFamily="34" charset="-120"/>
-              </a:rPr>
-              <a:t>Tool 6: Human-Centered AI Decision Rule Checklist (Checklist) - Use Human-Centered AI Decision Rule.</a:t>
+                  <a:srgbClr val="003A63"/>
+                </a:solidFill>
+                <a:latin typeface="Aptos" pitchFamily="34" charset="0"/>
+                <a:ea typeface="Aptos" pitchFamily="34" charset="-122"/>
+                <a:cs typeface="Aptos" pitchFamily="34" charset="-120"/>
+              </a:rPr>
+              <a:t>• Tool 6: Human-Centered AI Decision Rule Checklist (Checklist) - Use Human-Centered AI Decision.</a:t>
             </a:r>
             <a:endParaRPr lang="en-US" sz="1850" dirty="0"/>
           </a:p>
           <a:p>
+            <a:pPr indent="0" marL="0">
+              <a:buNone/>
+            </a:pPr>
             <a:r>
               <a:rPr lang="en-US" sz="1850" dirty="0">
                 <a:solidFill>
-                  <a:srgbClr val="17364A"/>
-                </a:solidFill>
-                <a:latin typeface="Aptos" pitchFamily="34" charset="0"/>
-                <a:ea typeface="Aptos" pitchFamily="34" charset="-122"/>
-                <a:cs typeface="Aptos" pitchFamily="34" charset="-120"/>
-              </a:rPr>
-              <a:t>Tool 8: AI Project Charter (Planning) - Use AI Project Charter to translate this lesson into a documented.</a:t>
+                  <a:srgbClr val="003A63"/>
+                </a:solidFill>
+                <a:latin typeface="Aptos" pitchFamily="34" charset="0"/>
+                <a:ea typeface="Aptos" pitchFamily="34" charset="-122"/>
+                <a:cs typeface="Aptos" pitchFamily="34" charset="-120"/>
+              </a:rPr>
+              <a:t>• Tool 8: AI Project Charter (Planning) - Use AI Project Charter to translate this lesson into a.</a:t>
             </a:r>
             <a:endParaRPr lang="en-US" sz="1850" dirty="0"/>
           </a:p>
@@ -15172,17 +15441,17 @@
         </p:nvSpPr>
         <p:spPr>
           <a:xfrm>
-            <a:off x="8211312" y="1920240"/>
-            <a:ext cx="2734056" cy="1463040"/>
-          </a:xfrm>
-          <a:prstGeom prst="rect">
-            <a:avLst/>
-          </a:prstGeom>
-          <a:noFill/>
-          <a:ln/>
-        </p:spPr>
-        <p:txBody>
-          <a:bodyPr wrap="square" lIns="0" tIns="0" rIns="0" bIns="0" rtlCol="0" anchor="t">
+            <a:off x="8211312" y="1892808"/>
+            <a:ext cx="2734056" cy="1536192"/>
+          </a:xfrm>
+          <a:prstGeom prst="rect">
+            <a:avLst/>
+          </a:prstGeom>
+          <a:noFill/>
+          <a:ln/>
+        </p:spPr>
+        <p:txBody>
+          <a:bodyPr wrap="square" lIns="254" tIns="254" rIns="254" bIns="254" rtlCol="0" anchor="t">
             <a:normAutofit/>
           </a:bodyPr>
           <a:lstStyle/>
@@ -15191,7 +15460,7 @@
               <a:buNone/>
             </a:pPr>
             <a:r>
-              <a:rPr lang="en-US" sz="1550" dirty="0">
+              <a:rPr lang="en-US" sz="1320" dirty="0">
                 <a:solidFill>
                   <a:srgbClr val="17364A"/>
                 </a:solidFill>
@@ -15199,9 +15468,9 @@
                 <a:ea typeface="Aptos" pitchFamily="34" charset="-122"/>
                 <a:cs typeface="Aptos" pitchFamily="34" charset="-120"/>
               </a:rPr>
-              <a:t>Use linked tools when your department needs a structured worksheet, template, checklist, review process, or documentation artifact.</a:t>
-            </a:r>
-            <a:endParaRPr lang="en-US" sz="1550" dirty="0"/>
+              <a:t>Use linked tools when your department needs a structured worksheet, template, checklist, review process, or.</a:t>
+            </a:r>
+            <a:endParaRPr lang="en-US" sz="1320" dirty="0"/>
           </a:p>
         </p:txBody>
       </p:sp>
@@ -15289,13 +15558,16 @@
           <a:ln/>
         </p:spPr>
         <p:txBody>
-          <a:bodyPr wrap="square" lIns="254" tIns="254" rIns="254" bIns="254" rtlCol="0" anchor="t">
+          <a:bodyPr wrap="square" lIns="508" tIns="508" rIns="508" bIns="508" rtlCol="0" anchor="t">
             <a:normAutofit/>
           </a:bodyPr>
           <a:lstStyle/>
           <a:p>
-            <a:r>
-              <a:rPr lang="en-US" sz="1380" dirty="0">
+            <a:pPr indent="0" marL="0">
+              <a:buNone/>
+            </a:pPr>
+            <a:r>
+              <a:rPr lang="en-US" sz="1220" dirty="0">
                 <a:solidFill>
                   <a:srgbClr val="17364A"/>
                 </a:solidFill>
@@ -15305,11 +15577,14 @@
               </a:rPr>
               <a:t>Use a tool when no comparable local process exists.</a:t>
             </a:r>
-            <a:endParaRPr lang="en-US" sz="1380" dirty="0"/>
-          </a:p>
-          <a:p>
-            <a:r>
-              <a:rPr lang="en-US" sz="1380" dirty="0">
+            <a:endParaRPr lang="en-US" sz="1220" dirty="0"/>
+          </a:p>
+          <a:p>
+            <a:pPr indent="0" marL="0">
+              <a:buNone/>
+            </a:pPr>
+            <a:r>
+              <a:rPr lang="en-US" sz="1220" dirty="0">
                 <a:solidFill>
                   <a:srgbClr val="17364A"/>
                 </a:solidFill>
@@ -15317,13 +15592,16 @@
                 <a:ea typeface="Aptos" pitchFamily="34" charset="-122"/>
                 <a:cs typeface="Aptos" pitchFamily="34" charset="-120"/>
               </a:rPr>
-              <a:t>Adapt existing department templates when they already fit the purpose.</a:t>
-            </a:r>
-            <a:endParaRPr lang="en-US" sz="1380" dirty="0"/>
-          </a:p>
-          <a:p>
-            <a:r>
-              <a:rPr lang="en-US" sz="1380" dirty="0">
+              <a:t>Adapt existing department templates when they already fit the.</a:t>
+            </a:r>
+            <a:endParaRPr lang="en-US" sz="1220" dirty="0"/>
+          </a:p>
+          <a:p>
+            <a:pPr indent="0" marL="0">
+              <a:buNone/>
+            </a:pPr>
+            <a:r>
+              <a:rPr lang="en-US" sz="1220" dirty="0">
                 <a:solidFill>
                   <a:srgbClr val="17364A"/>
                 </a:solidFill>
@@ -15333,7 +15611,7 @@
               </a:rPr>
               <a:t>Save the completed artifact as evidence of the decision.</a:t>
             </a:r>
-            <a:endParaRPr lang="en-US" sz="1380" dirty="0"/>
+            <a:endParaRPr lang="en-US" sz="1220" dirty="0"/>
           </a:p>
         </p:txBody>
       </p:sp>
@@ -15634,49 +15912,58 @@
           <a:ln/>
         </p:spPr>
         <p:txBody>
-          <a:bodyPr wrap="square" lIns="635" tIns="635" rIns="635" bIns="635" rtlCol="0" anchor="t">
+          <a:bodyPr wrap="square" lIns="1016" tIns="1016" rIns="1016" bIns="1016" rtlCol="0" anchor="t">
             <a:normAutofit/>
           </a:bodyPr>
           <a:lstStyle/>
           <a:p>
+            <a:pPr indent="0" marL="0">
+              <a:buNone/>
+            </a:pPr>
             <a:r>
               <a:rPr lang="en-US" sz="2100" dirty="0">
                 <a:solidFill>
-                  <a:srgbClr val="17364A"/>
-                </a:solidFill>
-                <a:latin typeface="Aptos" pitchFamily="34" charset="0"/>
-                <a:ea typeface="Aptos" pitchFamily="34" charset="-122"/>
-                <a:cs typeface="Aptos" pitchFamily="34" charset="-120"/>
-              </a:rPr>
-              <a:t>Explain why AI readiness depends on public health data modernization, not only on access to an AI tool.</a:t>
+                  <a:srgbClr val="003A63"/>
+                </a:solidFill>
+                <a:latin typeface="Aptos" pitchFamily="34" charset="0"/>
+                <a:ea typeface="Aptos" pitchFamily="34" charset="-122"/>
+                <a:cs typeface="Aptos" pitchFamily="34" charset="-120"/>
+              </a:rPr>
+              <a:t>• Explain why AI readiness depends on public health data modernization, not only on access to an.</a:t>
             </a:r>
             <a:endParaRPr lang="en-US" sz="2100" dirty="0"/>
           </a:p>
           <a:p>
+            <a:pPr indent="0" marL="0">
+              <a:buNone/>
+            </a:pPr>
             <a:r>
               <a:rPr lang="en-US" sz="2100" dirty="0">
                 <a:solidFill>
-                  <a:srgbClr val="17364A"/>
-                </a:solidFill>
-                <a:latin typeface="Aptos" pitchFamily="34" charset="0"/>
-                <a:ea typeface="Aptos" pitchFamily="34" charset="-122"/>
-                <a:cs typeface="Aptos" pitchFamily="34" charset="-120"/>
-              </a:rPr>
-              <a:t>Describe the major components of an AI-enabled public health architecture, including source systems,.</a:t>
+                  <a:srgbClr val="003A63"/>
+                </a:solidFill>
+                <a:latin typeface="Aptos" pitchFamily="34" charset="0"/>
+                <a:ea typeface="Aptos" pitchFamily="34" charset="-122"/>
+                <a:cs typeface="Aptos" pitchFamily="34" charset="-120"/>
+              </a:rPr>
+              <a:t>• Describe the major components of an AI-enabled public health architecture, including source.</a:t>
             </a:r>
             <a:endParaRPr lang="en-US" sz="2100" dirty="0"/>
           </a:p>
           <a:p>
+            <a:pPr indent="0" marL="0">
+              <a:buNone/>
+            </a:pPr>
             <a:r>
               <a:rPr lang="en-US" sz="2100" dirty="0">
                 <a:solidFill>
-                  <a:srgbClr val="17364A"/>
-                </a:solidFill>
-                <a:latin typeface="Aptos" pitchFamily="34" charset="0"/>
-                <a:ea typeface="Aptos" pitchFamily="34" charset="-122"/>
-                <a:cs typeface="Aptos" pitchFamily="34" charset="-120"/>
-              </a:rPr>
-              <a:t>Identify the systems of record, source systems, data flows, and human decision points in a public.</a:t>
+                  <a:srgbClr val="003A63"/>
+                </a:solidFill>
+                <a:latin typeface="Aptos" pitchFamily="34" charset="0"/>
+                <a:ea typeface="Aptos" pitchFamily="34" charset="-122"/>
+                <a:cs typeface="Aptos" pitchFamily="34" charset="-120"/>
+              </a:rPr>
+              <a:t>• Identify the systems of record, source systems, data flows, and human decision points in a.</a:t>
             </a:r>
             <a:endParaRPr lang="en-US" sz="2100" dirty="0"/>
           </a:p>
@@ -15756,17 +16043,17 @@
         </p:nvSpPr>
         <p:spPr>
           <a:xfrm>
-            <a:off x="7799832" y="1828800"/>
-            <a:ext cx="3145536" cy="685800"/>
-          </a:xfrm>
-          <a:prstGeom prst="rect">
-            <a:avLst/>
-          </a:prstGeom>
-          <a:noFill/>
-          <a:ln/>
-        </p:spPr>
-        <p:txBody>
-          <a:bodyPr wrap="square" lIns="0" tIns="0" rIns="0" bIns="0" rtlCol="0" anchor="t">
+            <a:off x="7799832" y="1801368"/>
+            <a:ext cx="3145536" cy="758952"/>
+          </a:xfrm>
+          <a:prstGeom prst="rect">
+            <a:avLst/>
+          </a:prstGeom>
+          <a:noFill/>
+          <a:ln/>
+        </p:spPr>
+        <p:txBody>
+          <a:bodyPr wrap="square" lIns="254" tIns="254" rIns="254" bIns="254" rtlCol="0" anchor="t">
             <a:normAutofit/>
           </a:bodyPr>
           <a:lstStyle/>
@@ -15775,7 +16062,7 @@
               <a:buNone/>
             </a:pPr>
             <a:r>
-              <a:rPr lang="en-US" sz="1550" dirty="0">
+              <a:rPr lang="en-US" sz="1320" dirty="0">
                 <a:solidFill>
                   <a:srgbClr val="17364A"/>
                 </a:solidFill>
@@ -15785,7 +16072,7 @@
               </a:rPr>
               <a:t>Explain why AI readiness depends on public health data modernization, not only on access to an AI tool.</a:t>
             </a:r>
-            <a:endParaRPr lang="en-US" sz="1550" dirty="0"/>
+            <a:endParaRPr lang="en-US" sz="1320" dirty="0"/>
           </a:p>
         </p:txBody>
       </p:sp>
@@ -15873,13 +16160,16 @@
           <a:ln/>
         </p:spPr>
         <p:txBody>
-          <a:bodyPr wrap="square" lIns="254" tIns="254" rIns="254" bIns="254" rtlCol="0" anchor="t">
+          <a:bodyPr wrap="square" lIns="508" tIns="508" rIns="508" bIns="508" rtlCol="0" anchor="t">
             <a:normAutofit/>
           </a:bodyPr>
           <a:lstStyle/>
           <a:p>
-            <a:r>
-              <a:rPr lang="en-US" sz="1380" dirty="0">
+            <a:pPr indent="0" marL="0">
+              <a:buNone/>
+            </a:pPr>
+            <a:r>
+              <a:rPr lang="en-US" sz="1220" dirty="0">
                 <a:solidFill>
                   <a:srgbClr val="17364A"/>
                 </a:solidFill>
@@ -15887,13 +16177,16 @@
                 <a:ea typeface="Aptos" pitchFamily="34" charset="-122"/>
                 <a:cs typeface="Aptos" pitchFamily="34" charset="-120"/>
               </a:rPr>
-              <a:t>Describe the major components of an AI-enabled public health architecture, including.</a:t>
-            </a:r>
-            <a:endParaRPr lang="en-US" sz="1380" dirty="0"/>
-          </a:p>
-          <a:p>
-            <a:r>
-              <a:rPr lang="en-US" sz="1380" dirty="0">
+              <a:t>Describe the major components of an AI-enabled public health.</a:t>
+            </a:r>
+            <a:endParaRPr lang="en-US" sz="1220" dirty="0"/>
+          </a:p>
+          <a:p>
+            <a:pPr indent="0" marL="0">
+              <a:buNone/>
+            </a:pPr>
+            <a:r>
+              <a:rPr lang="en-US" sz="1220" dirty="0">
                 <a:solidFill>
                   <a:srgbClr val="17364A"/>
                 </a:solidFill>
@@ -15901,13 +16194,16 @@
                 <a:ea typeface="Aptos" pitchFamily="34" charset="-122"/>
                 <a:cs typeface="Aptos" pitchFamily="34" charset="-120"/>
               </a:rPr>
-              <a:t>Identify the systems of record, source systems, data flows, and human decision points in a.</a:t>
-            </a:r>
-            <a:endParaRPr lang="en-US" sz="1380" dirty="0"/>
-          </a:p>
-          <a:p>
-            <a:r>
-              <a:rPr lang="en-US" sz="1380" dirty="0">
+              <a:t>Identify the systems of record, source systems, data flows, and.</a:t>
+            </a:r>
+            <a:endParaRPr lang="en-US" sz="1220" dirty="0"/>
+          </a:p>
+          <a:p>
+            <a:pPr indent="0" marL="0">
+              <a:buNone/>
+            </a:pPr>
+            <a:r>
+              <a:rPr lang="en-US" sz="1220" dirty="0">
                 <a:solidFill>
                   <a:srgbClr val="17364A"/>
                 </a:solidFill>
@@ -15915,9 +16211,9 @@
                 <a:ea typeface="Aptos" pitchFamily="34" charset="-122"/>
                 <a:cs typeface="Aptos" pitchFamily="34" charset="-120"/>
               </a:rPr>
-              <a:t>Assess where AI could support a workflow and where human review, legal authority,.</a:t>
-            </a:r>
-            <a:endParaRPr lang="en-US" sz="1380" dirty="0"/>
+              <a:t>Assess where AI could support a workflow and where human review,.</a:t>
+            </a:r>
+            <a:endParaRPr lang="en-US" sz="1220" dirty="0"/>
           </a:p>
         </p:txBody>
       </p:sp>
@@ -15995,17 +16291,17 @@
         </p:nvSpPr>
         <p:spPr>
           <a:xfrm>
-            <a:off x="7799832" y="5001768"/>
-            <a:ext cx="3145536" cy="502920"/>
-          </a:xfrm>
-          <a:prstGeom prst="rect">
-            <a:avLst/>
-          </a:prstGeom>
-          <a:noFill/>
-          <a:ln/>
-        </p:spPr>
-        <p:txBody>
-          <a:bodyPr wrap="square" lIns="0" tIns="0" rIns="0" bIns="0" rtlCol="0" anchor="t">
+            <a:off x="7799832" y="4974336"/>
+            <a:ext cx="3145536" cy="576072"/>
+          </a:xfrm>
+          <a:prstGeom prst="rect">
+            <a:avLst/>
+          </a:prstGeom>
+          <a:noFill/>
+          <a:ln/>
+        </p:spPr>
+        <p:txBody>
+          <a:bodyPr wrap="square" lIns="254" tIns="254" rIns="254" bIns="254" rtlCol="0" anchor="t">
             <a:normAutofit/>
           </a:bodyPr>
           <a:lstStyle/>
@@ -16014,7 +16310,7 @@
               <a:buNone/>
             </a:pPr>
             <a:r>
-              <a:rPr lang="en-US" sz="1550" dirty="0">
+              <a:rPr lang="en-US" sz="1320" dirty="0">
                 <a:solidFill>
                   <a:srgbClr val="17364A"/>
                 </a:solidFill>
@@ -16022,9 +16318,9 @@
                 <a:ea typeface="Aptos" pitchFamily="34" charset="-122"/>
                 <a:cs typeface="Aptos" pitchFamily="34" charset="-120"/>
               </a:rPr>
-              <a:t>Use the assignment to test whether you can explain the concept, apply it to a realistic public health situation, and identify what would need review before the work moves forward.</a:t>
-            </a:r>
-            <a:endParaRPr lang="en-US" sz="1550" dirty="0"/>
+              <a:t>Use the assignment to test whether you can explain the concept, apply it to a realistic public health situation, and.</a:t>
+            </a:r>
+            <a:endParaRPr lang="en-US" sz="1320" dirty="0"/>
           </a:p>
         </p:txBody>
       </p:sp>
@@ -16325,21 +16621,24 @@
           <a:ln/>
         </p:spPr>
         <p:txBody>
-          <a:bodyPr wrap="square" lIns="635" tIns="635" rIns="635" bIns="635" rtlCol="0" anchor="t">
+          <a:bodyPr wrap="square" lIns="1016" tIns="1016" rIns="1016" bIns="1016" rtlCol="0" anchor="t">
             <a:normAutofit/>
           </a:bodyPr>
           <a:lstStyle/>
           <a:p>
+            <a:pPr indent="0" marL="0">
+              <a:buNone/>
+            </a:pPr>
             <a:r>
               <a:rPr lang="en-US" sz="2100" dirty="0">
                 <a:solidFill>
-                  <a:srgbClr val="17364A"/>
-                </a:solidFill>
-                <a:latin typeface="Aptos" pitchFamily="34" charset="0"/>
-                <a:ea typeface="Aptos" pitchFamily="34" charset="-122"/>
-                <a:cs typeface="Aptos" pitchFamily="34" charset="-120"/>
-              </a:rPr>
-              <a:t>Produce an AI-enabled workflow architecture map and readiness memo that can support governance review,.</a:t>
+                  <a:srgbClr val="003A63"/>
+                </a:solidFill>
+                <a:latin typeface="Aptos" pitchFamily="34" charset="0"/>
+                <a:ea typeface="Aptos" pitchFamily="34" charset="-122"/>
+                <a:cs typeface="Aptos" pitchFamily="34" charset="-120"/>
+              </a:rPr>
+              <a:t>• Produce an AI-enabled workflow architecture map and readiness memo that can support governance.</a:t>
             </a:r>
             <a:endParaRPr lang="en-US" sz="2100" dirty="0"/>
           </a:p>
@@ -16419,17 +16718,17 @@
         </p:nvSpPr>
         <p:spPr>
           <a:xfrm>
-            <a:off x="7799832" y="1828800"/>
-            <a:ext cx="3145536" cy="685800"/>
-          </a:xfrm>
-          <a:prstGeom prst="rect">
-            <a:avLst/>
-          </a:prstGeom>
-          <a:noFill/>
-          <a:ln/>
-        </p:spPr>
-        <p:txBody>
-          <a:bodyPr wrap="square" lIns="0" tIns="0" rIns="0" bIns="0" rtlCol="0" anchor="t">
+            <a:off x="7799832" y="1801368"/>
+            <a:ext cx="3145536" cy="758952"/>
+          </a:xfrm>
+          <a:prstGeom prst="rect">
+            <a:avLst/>
+          </a:prstGeom>
+          <a:noFill/>
+          <a:ln/>
+        </p:spPr>
+        <p:txBody>
+          <a:bodyPr wrap="square" lIns="254" tIns="254" rIns="254" bIns="254" rtlCol="0" anchor="t">
             <a:normAutofit/>
           </a:bodyPr>
           <a:lstStyle/>
@@ -16438,7 +16737,7 @@
               <a:buNone/>
             </a:pPr>
             <a:r>
-              <a:rPr lang="en-US" sz="1550" dirty="0">
+              <a:rPr lang="en-US" sz="1320" dirty="0">
                 <a:solidFill>
                   <a:srgbClr val="17364A"/>
                 </a:solidFill>
@@ -16448,7 +16747,7 @@
               </a:rPr>
               <a:t>Produce an AI-enabled workflow architecture map and readiness memo that can support governance review,.</a:t>
             </a:r>
-            <a:endParaRPr lang="en-US" sz="1550" dirty="0"/>
+            <a:endParaRPr lang="en-US" sz="1320" dirty="0"/>
           </a:p>
         </p:txBody>
       </p:sp>
@@ -16536,13 +16835,16 @@
           <a:ln/>
         </p:spPr>
         <p:txBody>
-          <a:bodyPr wrap="square" lIns="254" tIns="254" rIns="254" bIns="254" rtlCol="0" anchor="t">
+          <a:bodyPr wrap="square" lIns="508" tIns="508" rIns="508" bIns="508" rtlCol="0" anchor="t">
             <a:normAutofit/>
           </a:bodyPr>
           <a:lstStyle/>
           <a:p>
-            <a:r>
-              <a:rPr lang="en-US" sz="1380" dirty="0">
+            <a:pPr indent="0" marL="0">
+              <a:buNone/>
+            </a:pPr>
+            <a:r>
+              <a:rPr lang="en-US" sz="1220" dirty="0">
                 <a:solidFill>
                   <a:srgbClr val="17364A"/>
                 </a:solidFill>
@@ -16550,9 +16852,9 @@
                 <a:ea typeface="Aptos" pitchFamily="34" charset="-122"/>
                 <a:cs typeface="Aptos" pitchFamily="34" charset="-120"/>
               </a:rPr>
-              <a:t>Produce an AI-enabled workflow architecture map and readiness memo that can support.</a:t>
-            </a:r>
-            <a:endParaRPr lang="en-US" sz="1380" dirty="0"/>
+              <a:t>Produce an AI-enabled workflow architecture map and readiness memo.</a:t>
+            </a:r>
+            <a:endParaRPr lang="en-US" sz="1220" dirty="0"/>
           </a:p>
         </p:txBody>
       </p:sp>
@@ -16630,17 +16932,17 @@
         </p:nvSpPr>
         <p:spPr>
           <a:xfrm>
-            <a:off x="7799832" y="5001768"/>
-            <a:ext cx="3145536" cy="502920"/>
-          </a:xfrm>
-          <a:prstGeom prst="rect">
-            <a:avLst/>
-          </a:prstGeom>
-          <a:noFill/>
-          <a:ln/>
-        </p:spPr>
-        <p:txBody>
-          <a:bodyPr wrap="square" lIns="0" tIns="0" rIns="0" bIns="0" rtlCol="0" anchor="t">
+            <a:off x="7799832" y="4974336"/>
+            <a:ext cx="3145536" cy="576072"/>
+          </a:xfrm>
+          <a:prstGeom prst="rect">
+            <a:avLst/>
+          </a:prstGeom>
+          <a:noFill/>
+          <a:ln/>
+        </p:spPr>
+        <p:txBody>
+          <a:bodyPr wrap="square" lIns="254" tIns="254" rIns="254" bIns="254" rtlCol="0" anchor="t">
             <a:normAutofit/>
           </a:bodyPr>
           <a:lstStyle/>
@@ -16649,7 +16951,7 @@
               <a:buNone/>
             </a:pPr>
             <a:r>
-              <a:rPr lang="en-US" sz="1550" dirty="0">
+              <a:rPr lang="en-US" sz="1320" dirty="0">
                 <a:solidFill>
                   <a:srgbClr val="17364A"/>
                 </a:solidFill>
@@ -16657,9 +16959,9 @@
                 <a:ea typeface="Aptos" pitchFamily="34" charset="-122"/>
                 <a:cs typeface="Aptos" pitchFamily="34" charset="-120"/>
               </a:rPr>
-              <a:t>Use the assignment to test whether you can explain the concept, apply it to a realistic public health situation, and identify what would need review before the work moves forward.</a:t>
-            </a:r>
-            <a:endParaRPr lang="en-US" sz="1550" dirty="0"/>
+              <a:t>Use the assignment to test whether you can explain the concept, apply it to a realistic public health situation, and.</a:t>
+            </a:r>
+            <a:endParaRPr lang="en-US" sz="1320" dirty="0"/>
           </a:p>
         </p:txBody>
       </p:sp>
@@ -16960,49 +17262,58 @@
           <a:ln/>
         </p:spPr>
         <p:txBody>
-          <a:bodyPr wrap="square" lIns="635" tIns="635" rIns="635" bIns="635" rtlCol="0" anchor="t">
+          <a:bodyPr wrap="square" lIns="1016" tIns="1016" rIns="1016" bIns="1016" rtlCol="0" anchor="t">
             <a:normAutofit/>
           </a:bodyPr>
           <a:lstStyle/>
           <a:p>
+            <a:pPr indent="0" marL="0">
+              <a:buNone/>
+            </a:pPr>
             <a:r>
               <a:rPr lang="en-US" sz="2100" dirty="0">
                 <a:solidFill>
-                  <a:srgbClr val="17364A"/>
-                </a:solidFill>
-                <a:latin typeface="Aptos" pitchFamily="34" charset="0"/>
-                <a:ea typeface="Aptos" pitchFamily="34" charset="-122"/>
-                <a:cs typeface="Aptos" pitchFamily="34" charset="-120"/>
-              </a:rPr>
-              <a:t>Artificial intelligence does not operate separately from the public health data environment.</a:t>
+                  <a:srgbClr val="003A63"/>
+                </a:solidFill>
+                <a:latin typeface="Aptos" pitchFamily="34" charset="0"/>
+                <a:ea typeface="Aptos" pitchFamily="34" charset="-122"/>
+                <a:cs typeface="Aptos" pitchFamily="34" charset="-120"/>
+              </a:rPr>
+              <a:t>• Artificial intelligence does not operate separately from the public health data environment.</a:t>
             </a:r>
             <a:endParaRPr lang="en-US" sz="2100" dirty="0"/>
           </a:p>
           <a:p>
+            <a:pPr indent="0" marL="0">
+              <a:buNone/>
+            </a:pPr>
             <a:r>
               <a:rPr lang="en-US" sz="2100" dirty="0">
                 <a:solidFill>
-                  <a:srgbClr val="17364A"/>
-                </a:solidFill>
-                <a:latin typeface="Aptos" pitchFamily="34" charset="0"/>
-                <a:ea typeface="Aptos" pitchFamily="34" charset="-122"/>
-                <a:cs typeface="Aptos" pitchFamily="34" charset="-120"/>
-              </a:rPr>
-              <a:t>Every AI-supported workflow depends on the quality, structure, timeliness, governance, and security of.</a:t>
+                  <a:srgbClr val="003A63"/>
+                </a:solidFill>
+                <a:latin typeface="Aptos" pitchFamily="34" charset="0"/>
+                <a:ea typeface="Aptos" pitchFamily="34" charset="-122"/>
+                <a:cs typeface="Aptos" pitchFamily="34" charset="-120"/>
+              </a:rPr>
+              <a:t>• Every AI-supported workflow depends on the quality, structure, timeliness, governance, and.</a:t>
             </a:r>
             <a:endParaRPr lang="en-US" sz="2100" dirty="0"/>
           </a:p>
           <a:p>
+            <a:pPr indent="0" marL="0">
+              <a:buNone/>
+            </a:pPr>
             <a:r>
               <a:rPr lang="en-US" sz="2100" dirty="0">
                 <a:solidFill>
-                  <a:srgbClr val="17364A"/>
-                </a:solidFill>
-                <a:latin typeface="Aptos" pitchFamily="34" charset="0"/>
-                <a:ea typeface="Aptos" pitchFamily="34" charset="-122"/>
-                <a:cs typeface="Aptos" pitchFamily="34" charset="-120"/>
-              </a:rPr>
-              <a:t>For public health agencies, this means that AI readiness is inseparable from data modernization.</a:t>
+                  <a:srgbClr val="003A63"/>
+                </a:solidFill>
+                <a:latin typeface="Aptos" pitchFamily="34" charset="0"/>
+                <a:ea typeface="Aptos" pitchFamily="34" charset="-122"/>
+                <a:cs typeface="Aptos" pitchFamily="34" charset="-120"/>
+              </a:rPr>
+              <a:t>• For public health agencies, this means that AI readiness is inseparable from data modernization.</a:t>
             </a:r>
             <a:endParaRPr lang="en-US" sz="2100" dirty="0"/>
           </a:p>
@@ -17082,17 +17393,17 @@
         </p:nvSpPr>
         <p:spPr>
           <a:xfrm>
-            <a:off x="7799832" y="1828800"/>
-            <a:ext cx="3145536" cy="685800"/>
-          </a:xfrm>
-          <a:prstGeom prst="rect">
-            <a:avLst/>
-          </a:prstGeom>
-          <a:noFill/>
-          <a:ln/>
-        </p:spPr>
-        <p:txBody>
-          <a:bodyPr wrap="square" lIns="0" tIns="0" rIns="0" bIns="0" rtlCol="0" anchor="t">
+            <a:off x="7799832" y="1801368"/>
+            <a:ext cx="3145536" cy="758952"/>
+          </a:xfrm>
+          <a:prstGeom prst="rect">
+            <a:avLst/>
+          </a:prstGeom>
+          <a:noFill/>
+          <a:ln/>
+        </p:spPr>
+        <p:txBody>
+          <a:bodyPr wrap="square" lIns="254" tIns="254" rIns="254" bIns="254" rtlCol="0" anchor="t">
             <a:normAutofit/>
           </a:bodyPr>
           <a:lstStyle/>
@@ -17101,7 +17412,7 @@
               <a:buNone/>
             </a:pPr>
             <a:r>
-              <a:rPr lang="en-US" sz="1550" dirty="0">
+              <a:rPr lang="en-US" sz="1320" dirty="0">
                 <a:solidFill>
                   <a:srgbClr val="17364A"/>
                 </a:solidFill>
@@ -17111,7 +17422,7 @@
               </a:rPr>
               <a:t>Artificial intelligence does not operate separately from the public health data environment.</a:t>
             </a:r>
-            <a:endParaRPr lang="en-US" sz="1550" dirty="0"/>
+            <a:endParaRPr lang="en-US" sz="1320" dirty="0"/>
           </a:p>
         </p:txBody>
       </p:sp>
@@ -17199,13 +17510,16 @@
           <a:ln/>
         </p:spPr>
         <p:txBody>
-          <a:bodyPr wrap="square" lIns="254" tIns="254" rIns="254" bIns="254" rtlCol="0" anchor="t">
+          <a:bodyPr wrap="square" lIns="508" tIns="508" rIns="508" bIns="508" rtlCol="0" anchor="t">
             <a:normAutofit/>
           </a:bodyPr>
           <a:lstStyle/>
           <a:p>
-            <a:r>
-              <a:rPr lang="en-US" sz="1380" dirty="0">
+            <a:pPr indent="0" marL="0">
+              <a:buNone/>
+            </a:pPr>
+            <a:r>
+              <a:rPr lang="en-US" sz="1220" dirty="0">
                 <a:solidFill>
                   <a:srgbClr val="17364A"/>
                 </a:solidFill>
@@ -17213,13 +17527,16 @@
                 <a:ea typeface="Aptos" pitchFamily="34" charset="-122"/>
                 <a:cs typeface="Aptos" pitchFamily="34" charset="-120"/>
               </a:rPr>
-              <a:t>Every AI-supported workflow depends on the quality, structure, timeliness, governance, and.</a:t>
-            </a:r>
-            <a:endParaRPr lang="en-US" sz="1380" dirty="0"/>
-          </a:p>
-          <a:p>
-            <a:r>
-              <a:rPr lang="en-US" sz="1380" dirty="0">
+              <a:t>Every AI-supported workflow depends on the quality, structure,.</a:t>
+            </a:r>
+            <a:endParaRPr lang="en-US" sz="1220" dirty="0"/>
+          </a:p>
+          <a:p>
+            <a:pPr indent="0" marL="0">
+              <a:buNone/>
+            </a:pPr>
+            <a:r>
+              <a:rPr lang="en-US" sz="1220" dirty="0">
                 <a:solidFill>
                   <a:srgbClr val="17364A"/>
                 </a:solidFill>
@@ -17227,13 +17544,16 @@
                 <a:ea typeface="Aptos" pitchFamily="34" charset="-122"/>
                 <a:cs typeface="Aptos" pitchFamily="34" charset="-120"/>
               </a:rPr>
-              <a:t>A department cannot responsibly deploy AI for surveillance, case investigation,.</a:t>
-            </a:r>
-            <a:endParaRPr lang="en-US" sz="1380" dirty="0"/>
-          </a:p>
-          <a:p>
-            <a:r>
-              <a:rPr lang="en-US" sz="1380" dirty="0">
+              <a:t>A department cannot responsibly deploy AI for surveillance, case.</a:t>
+            </a:r>
+            <a:endParaRPr lang="en-US" sz="1220" dirty="0"/>
+          </a:p>
+          <a:p>
+            <a:pPr indent="0" marL="0">
+              <a:buNone/>
+            </a:pPr>
+            <a:r>
+              <a:rPr lang="en-US" sz="1220" dirty="0">
                 <a:solidFill>
                   <a:srgbClr val="17364A"/>
                 </a:solidFill>
@@ -17241,9 +17561,9 @@
                 <a:ea typeface="Aptos" pitchFamily="34" charset="-122"/>
                 <a:cs typeface="Aptos" pitchFamily="34" charset="-120"/>
               </a:rPr>
-              <a:t>This module introduces public health data modernization as the technical foundation for AI.</a:t>
-            </a:r>
-            <a:endParaRPr lang="en-US" sz="1380" dirty="0"/>
+              <a:t>This module introduces public health data modernization as the.</a:t>
+            </a:r>
+            <a:endParaRPr lang="en-US" sz="1220" dirty="0"/>
           </a:p>
         </p:txBody>
       </p:sp>
@@ -17321,17 +17641,17 @@
         </p:nvSpPr>
         <p:spPr>
           <a:xfrm>
-            <a:off x="7799832" y="5001768"/>
-            <a:ext cx="3145536" cy="502920"/>
-          </a:xfrm>
-          <a:prstGeom prst="rect">
-            <a:avLst/>
-          </a:prstGeom>
-          <a:noFill/>
-          <a:ln/>
-        </p:spPr>
-        <p:txBody>
-          <a:bodyPr wrap="square" lIns="0" tIns="0" rIns="0" bIns="0" rtlCol="0" anchor="t">
+            <a:off x="7799832" y="4974336"/>
+            <a:ext cx="3145536" cy="576072"/>
+          </a:xfrm>
+          <a:prstGeom prst="rect">
+            <a:avLst/>
+          </a:prstGeom>
+          <a:noFill/>
+          <a:ln/>
+        </p:spPr>
+        <p:txBody>
+          <a:bodyPr wrap="square" lIns="254" tIns="254" rIns="254" bIns="254" rtlCol="0" anchor="t">
             <a:normAutofit/>
           </a:bodyPr>
           <a:lstStyle/>
@@ -17340,7 +17660,7 @@
               <a:buNone/>
             </a:pPr>
             <a:r>
-              <a:rPr lang="en-US" sz="1550" dirty="0">
+              <a:rPr lang="en-US" sz="1320" dirty="0">
                 <a:solidFill>
                   <a:srgbClr val="17364A"/>
                 </a:solidFill>
@@ -17348,9 +17668,9 @@
                 <a:ea typeface="Aptos" pitchFamily="34" charset="-122"/>
                 <a:cs typeface="Aptos" pitchFamily="34" charset="-120"/>
               </a:rPr>
-              <a:t>Connect the concept to data quality, model performance, validation evidence, monitoring measures, and decisions that remain under human control.</a:t>
-            </a:r>
-            <a:endParaRPr lang="en-US" sz="1550" dirty="0"/>
+              <a:t>Connect the concept to data quality, model performance, validation evidence, monitoring measures, and decisions that.</a:t>
+            </a:r>
+            <a:endParaRPr lang="en-US" sz="1320" dirty="0"/>
           </a:p>
         </p:txBody>
       </p:sp>
@@ -17651,49 +17971,58 @@
           <a:ln/>
         </p:spPr>
         <p:txBody>
-          <a:bodyPr wrap="square" lIns="635" tIns="635" rIns="635" bIns="635" rtlCol="0" anchor="t">
+          <a:bodyPr wrap="square" lIns="1016" tIns="1016" rIns="1016" bIns="1016" rtlCol="0" anchor="t">
             <a:normAutofit/>
           </a:bodyPr>
           <a:lstStyle/>
           <a:p>
+            <a:pPr indent="0" marL="0">
+              <a:buNone/>
+            </a:pPr>
             <a:r>
               <a:rPr lang="en-US" sz="2100" dirty="0">
                 <a:solidFill>
-                  <a:srgbClr val="17364A"/>
-                </a:solidFill>
-                <a:latin typeface="Aptos" pitchFamily="34" charset="0"/>
-                <a:ea typeface="Aptos" pitchFamily="34" charset="-122"/>
-                <a:cs typeface="Aptos" pitchFamily="34" charset="-120"/>
-              </a:rPr>
-              <a:t>Public health agencies often feel pressure to adopt AI tools quickly, especially when staff are.</a:t>
+                  <a:srgbClr val="003A63"/>
+                </a:solidFill>
+                <a:latin typeface="Aptos" pitchFamily="34" charset="0"/>
+                <a:ea typeface="Aptos" pitchFamily="34" charset="-122"/>
+                <a:cs typeface="Aptos" pitchFamily="34" charset="-120"/>
+              </a:rPr>
+              <a:t>• Public health agencies often feel pressure to adopt AI tools quickly, especially when staff are.</a:t>
             </a:r>
             <a:endParaRPr lang="en-US" sz="2100" dirty="0"/>
           </a:p>
           <a:p>
+            <a:pPr indent="0" marL="0">
+              <a:buNone/>
+            </a:pPr>
             <a:r>
               <a:rPr lang="en-US" sz="2100" dirty="0">
                 <a:solidFill>
-                  <a:srgbClr val="17364A"/>
-                </a:solidFill>
-                <a:latin typeface="Aptos" pitchFamily="34" charset="0"/>
-                <a:ea typeface="Aptos" pitchFamily="34" charset="-122"/>
-                <a:cs typeface="Aptos" pitchFamily="34" charset="-120"/>
-              </a:rPr>
-              <a:t>AI tools may appear to offer immediate relief by summarizing records, drafting communications,.</a:t>
+                  <a:srgbClr val="003A63"/>
+                </a:solidFill>
+                <a:latin typeface="Aptos" pitchFamily="34" charset="0"/>
+                <a:ea typeface="Aptos" pitchFamily="34" charset="-122"/>
+                <a:cs typeface="Aptos" pitchFamily="34" charset="-120"/>
+              </a:rPr>
+              <a:t>• AI tools may appear to offer immediate relief by summarizing records, drafting communications,.</a:t>
             </a:r>
             <a:endParaRPr lang="en-US" sz="2100" dirty="0"/>
           </a:p>
           <a:p>
+            <a:pPr indent="0" marL="0">
+              <a:buNone/>
+            </a:pPr>
             <a:r>
               <a:rPr lang="en-US" sz="2100" dirty="0">
                 <a:solidFill>
-                  <a:srgbClr val="17364A"/>
-                </a:solidFill>
-                <a:latin typeface="Aptos" pitchFamily="34" charset="0"/>
-                <a:ea typeface="Aptos" pitchFamily="34" charset="-122"/>
-                <a:cs typeface="Aptos" pitchFamily="34" charset="-120"/>
-              </a:rPr>
-              <a:t>However, AI can create new risks when it is layered on top of fragmented or poorly understood systems.</a:t>
+                  <a:srgbClr val="003A63"/>
+                </a:solidFill>
+                <a:latin typeface="Aptos" pitchFamily="34" charset="0"/>
+                <a:ea typeface="Aptos" pitchFamily="34" charset="-122"/>
+                <a:cs typeface="Aptos" pitchFamily="34" charset="-120"/>
+              </a:rPr>
+              <a:t>• However, AI can create new risks when it is layered on top of fragmented or poorly understood.</a:t>
             </a:r>
             <a:endParaRPr lang="en-US" sz="2100" dirty="0"/>
           </a:p>
@@ -17773,17 +18102,17 @@
         </p:nvSpPr>
         <p:spPr>
           <a:xfrm>
-            <a:off x="7799832" y="1828800"/>
-            <a:ext cx="3145536" cy="685800"/>
-          </a:xfrm>
-          <a:prstGeom prst="rect">
-            <a:avLst/>
-          </a:prstGeom>
-          <a:noFill/>
-          <a:ln/>
-        </p:spPr>
-        <p:txBody>
-          <a:bodyPr wrap="square" lIns="0" tIns="0" rIns="0" bIns="0" rtlCol="0" anchor="t">
+            <a:off x="7799832" y="1801368"/>
+            <a:ext cx="3145536" cy="758952"/>
+          </a:xfrm>
+          <a:prstGeom prst="rect">
+            <a:avLst/>
+          </a:prstGeom>
+          <a:noFill/>
+          <a:ln/>
+        </p:spPr>
+        <p:txBody>
+          <a:bodyPr wrap="square" lIns="254" tIns="254" rIns="254" bIns="254" rtlCol="0" anchor="t">
             <a:normAutofit/>
           </a:bodyPr>
           <a:lstStyle/>
@@ -17792,7 +18121,7 @@
               <a:buNone/>
             </a:pPr>
             <a:r>
-              <a:rPr lang="en-US" sz="1550" dirty="0">
+              <a:rPr lang="en-US" sz="1320" dirty="0">
                 <a:solidFill>
                   <a:srgbClr val="17364A"/>
                 </a:solidFill>
@@ -17802,7 +18131,7 @@
               </a:rPr>
               <a:t>Public health agencies often feel pressure to adopt AI tools quickly, especially when staff are.</a:t>
             </a:r>
-            <a:endParaRPr lang="en-US" sz="1550" dirty="0"/>
+            <a:endParaRPr lang="en-US" sz="1320" dirty="0"/>
           </a:p>
         </p:txBody>
       </p:sp>
@@ -17890,13 +18219,16 @@
           <a:ln/>
         </p:spPr>
         <p:txBody>
-          <a:bodyPr wrap="square" lIns="254" tIns="254" rIns="254" bIns="254" rtlCol="0" anchor="t">
+          <a:bodyPr wrap="square" lIns="508" tIns="508" rIns="508" bIns="508" rtlCol="0" anchor="t">
             <a:normAutofit/>
           </a:bodyPr>
           <a:lstStyle/>
           <a:p>
-            <a:r>
-              <a:rPr lang="en-US" sz="1380" dirty="0">
+            <a:pPr indent="0" marL="0">
+              <a:buNone/>
+            </a:pPr>
+            <a:r>
+              <a:rPr lang="en-US" sz="1220" dirty="0">
                 <a:solidFill>
                   <a:srgbClr val="17364A"/>
                 </a:solidFill>
@@ -17904,13 +18236,16 @@
                 <a:ea typeface="Aptos" pitchFamily="34" charset="-122"/>
                 <a:cs typeface="Aptos" pitchFamily="34" charset="-120"/>
               </a:rPr>
-              <a:t>Public health agencies often feel pressure to adopt AI tools quickly, especially when.</a:t>
-            </a:r>
-            <a:endParaRPr lang="en-US" sz="1380" dirty="0"/>
-          </a:p>
-          <a:p>
-            <a:r>
-              <a:rPr lang="en-US" sz="1380" dirty="0">
+              <a:t>Public health agencies often feel pressure to adopt AI tools.</a:t>
+            </a:r>
+            <a:endParaRPr lang="en-US" sz="1220" dirty="0"/>
+          </a:p>
+          <a:p>
+            <a:pPr indent="0" marL="0">
+              <a:buNone/>
+            </a:pPr>
+            <a:r>
+              <a:rPr lang="en-US" sz="1220" dirty="0">
                 <a:solidFill>
                   <a:srgbClr val="17364A"/>
                 </a:solidFill>
@@ -17918,13 +18253,16 @@
                 <a:ea typeface="Aptos" pitchFamily="34" charset="-122"/>
                 <a:cs typeface="Aptos" pitchFamily="34" charset="-120"/>
               </a:rPr>
-              <a:t>AI tools may appear to offer immediate relief by summarizing records, drafting.</a:t>
-            </a:r>
-            <a:endParaRPr lang="en-US" sz="1380" dirty="0"/>
-          </a:p>
-          <a:p>
-            <a:r>
-              <a:rPr lang="en-US" sz="1380" dirty="0">
+              <a:t>AI tools may appear to offer immediate relief by summarizing.</a:t>
+            </a:r>
+            <a:endParaRPr lang="en-US" sz="1220" dirty="0"/>
+          </a:p>
+          <a:p>
+            <a:pPr indent="0" marL="0">
+              <a:buNone/>
+            </a:pPr>
+            <a:r>
+              <a:rPr lang="en-US" sz="1220" dirty="0">
                 <a:solidFill>
                   <a:srgbClr val="17364A"/>
                 </a:solidFill>
@@ -17932,9 +18270,9 @@
                 <a:ea typeface="Aptos" pitchFamily="34" charset="-122"/>
                 <a:cs typeface="Aptos" pitchFamily="34" charset="-120"/>
               </a:rPr>
-              <a:t>A model that summarizes case reports may produce incomplete summaries if the source data.</a:t>
-            </a:r>
-            <a:endParaRPr lang="en-US" sz="1380" dirty="0"/>
+              <a:t>A model that summarizes case reports may produce incomplete.</a:t>
+            </a:r>
+            <a:endParaRPr lang="en-US" sz="1220" dirty="0"/>
           </a:p>
         </p:txBody>
       </p:sp>
@@ -18012,17 +18350,17 @@
         </p:nvSpPr>
         <p:spPr>
           <a:xfrm>
-            <a:off x="7799832" y="5001768"/>
-            <a:ext cx="3145536" cy="502920"/>
-          </a:xfrm>
-          <a:prstGeom prst="rect">
-            <a:avLst/>
-          </a:prstGeom>
-          <a:noFill/>
-          <a:ln/>
-        </p:spPr>
-        <p:txBody>
-          <a:bodyPr wrap="square" lIns="0" tIns="0" rIns="0" bIns="0" rtlCol="0" anchor="t">
+            <a:off x="7799832" y="4974336"/>
+            <a:ext cx="3145536" cy="576072"/>
+          </a:xfrm>
+          <a:prstGeom prst="rect">
+            <a:avLst/>
+          </a:prstGeom>
+          <a:noFill/>
+          <a:ln/>
+        </p:spPr>
+        <p:txBody>
+          <a:bodyPr wrap="square" lIns="254" tIns="254" rIns="254" bIns="254" rtlCol="0" anchor="t">
             <a:normAutofit/>
           </a:bodyPr>
           <a:lstStyle/>
@@ -18031,7 +18369,7 @@
               <a:buNone/>
             </a:pPr>
             <a:r>
-              <a:rPr lang="en-US" sz="1550" dirty="0">
+              <a:rPr lang="en-US" sz="1320" dirty="0">
                 <a:solidFill>
                   <a:srgbClr val="17364A"/>
                 </a:solidFill>
@@ -18039,9 +18377,9 @@
                 <a:ea typeface="Aptos" pitchFamily="34" charset="-122"/>
                 <a:cs typeface="Aptos" pitchFamily="34" charset="-120"/>
               </a:rPr>
-              <a:t>Connect the concept to data quality, model performance, validation evidence, monitoring measures, and decisions that remain under human control.</a:t>
-            </a:r>
-            <a:endParaRPr lang="en-US" sz="1550" dirty="0"/>
+              <a:t>Connect the concept to data quality, model performance, validation evidence, monitoring measures, and decisions that.</a:t>
+            </a:r>
+            <a:endParaRPr lang="en-US" sz="1320" dirty="0"/>
           </a:p>
         </p:txBody>
       </p:sp>
@@ -18342,49 +18680,58 @@
           <a:ln/>
         </p:spPr>
         <p:txBody>
-          <a:bodyPr wrap="square" lIns="635" tIns="635" rIns="635" bIns="635" rtlCol="0" anchor="t">
+          <a:bodyPr wrap="square" lIns="1016" tIns="1016" rIns="1016" bIns="1016" rtlCol="0" anchor="t">
             <a:normAutofit/>
           </a:bodyPr>
           <a:lstStyle/>
           <a:p>
+            <a:pPr indent="0" marL="0">
+              <a:buNone/>
+            </a:pPr>
             <a:r>
               <a:rPr lang="en-US" sz="2100" dirty="0">
                 <a:solidFill>
-                  <a:srgbClr val="17364A"/>
-                </a:solidFill>
-                <a:latin typeface="Aptos" pitchFamily="34" charset="0"/>
-                <a:ea typeface="Aptos" pitchFamily="34" charset="-122"/>
-                <a:cs typeface="Aptos" pitchFamily="34" charset="-120"/>
-              </a:rPr>
-              <a:t>Public health data modernization.</a:t>
+                  <a:srgbClr val="003A63"/>
+                </a:solidFill>
+                <a:latin typeface="Aptos" pitchFamily="34" charset="0"/>
+                <a:ea typeface="Aptos" pitchFamily="34" charset="-122"/>
+                <a:cs typeface="Aptos" pitchFamily="34" charset="-120"/>
+              </a:rPr>
+              <a:t>• Public health data modernization.</a:t>
             </a:r>
             <a:endParaRPr lang="en-US" sz="2100" dirty="0"/>
           </a:p>
           <a:p>
+            <a:pPr indent="0" marL="0">
+              <a:buNone/>
+            </a:pPr>
             <a:r>
               <a:rPr lang="en-US" sz="2100" dirty="0">
                 <a:solidFill>
-                  <a:srgbClr val="17364A"/>
-                </a:solidFill>
-                <a:latin typeface="Aptos" pitchFamily="34" charset="0"/>
-                <a:ea typeface="Aptos" pitchFamily="34" charset="-122"/>
-                <a:cs typeface="Aptos" pitchFamily="34" charset="-120"/>
-              </a:rPr>
-              <a:t>Public health data modernization is the process of improving the systems, standards, infrastructure,.</a:t>
+                  <a:srgbClr val="003A63"/>
+                </a:solidFill>
+                <a:latin typeface="Aptos" pitchFamily="34" charset="0"/>
+                <a:ea typeface="Aptos" pitchFamily="34" charset="-122"/>
+                <a:cs typeface="Aptos" pitchFamily="34" charset="-120"/>
+              </a:rPr>
+              <a:t>• Public health data modernization is the process of improving the systems, standards,.</a:t>
             </a:r>
             <a:endParaRPr lang="en-US" sz="2100" dirty="0"/>
           </a:p>
           <a:p>
+            <a:pPr indent="0" marL="0">
+              <a:buNone/>
+            </a:pPr>
             <a:r>
               <a:rPr lang="en-US" sz="2100" dirty="0">
                 <a:solidFill>
-                  <a:srgbClr val="17364A"/>
-                </a:solidFill>
-                <a:latin typeface="Aptos" pitchFamily="34" charset="0"/>
-                <a:ea typeface="Aptos" pitchFamily="34" charset="-122"/>
-                <a:cs typeface="Aptos" pitchFamily="34" charset="-120"/>
-              </a:rPr>
-              <a:t>Modernization includes technical components such as APIs, cloud platforms, data warehouses, terminology.</a:t>
+                  <a:srgbClr val="003A63"/>
+                </a:solidFill>
+                <a:latin typeface="Aptos" pitchFamily="34" charset="0"/>
+                <a:ea typeface="Aptos" pitchFamily="34" charset="-122"/>
+                <a:cs typeface="Aptos" pitchFamily="34" charset="-120"/>
+              </a:rPr>
+              <a:t>• Modernization includes technical components such as APIs, cloud platforms, data warehouses,.</a:t>
             </a:r>
             <a:endParaRPr lang="en-US" sz="2100" dirty="0"/>
           </a:p>
@@ -18464,17 +18811,17 @@
         </p:nvSpPr>
         <p:spPr>
           <a:xfrm>
-            <a:off x="7799832" y="1828800"/>
-            <a:ext cx="3145536" cy="685800"/>
-          </a:xfrm>
-          <a:prstGeom prst="rect">
-            <a:avLst/>
-          </a:prstGeom>
-          <a:noFill/>
-          <a:ln/>
-        </p:spPr>
-        <p:txBody>
-          <a:bodyPr wrap="square" lIns="0" tIns="0" rIns="0" bIns="0" rtlCol="0" anchor="t">
+            <a:off x="7799832" y="1801368"/>
+            <a:ext cx="3145536" cy="758952"/>
+          </a:xfrm>
+          <a:prstGeom prst="rect">
+            <a:avLst/>
+          </a:prstGeom>
+          <a:noFill/>
+          <a:ln/>
+        </p:spPr>
+        <p:txBody>
+          <a:bodyPr wrap="square" lIns="254" tIns="254" rIns="254" bIns="254" rtlCol="0" anchor="t">
             <a:normAutofit/>
           </a:bodyPr>
           <a:lstStyle/>
@@ -18483,7 +18830,7 @@
               <a:buNone/>
             </a:pPr>
             <a:r>
-              <a:rPr lang="en-US" sz="1550" dirty="0">
+              <a:rPr lang="en-US" sz="1320" dirty="0">
                 <a:solidFill>
                   <a:srgbClr val="17364A"/>
                 </a:solidFill>
@@ -18493,7 +18840,7 @@
               </a:rPr>
               <a:t>Public health data modernization.</a:t>
             </a:r>
-            <a:endParaRPr lang="en-US" sz="1550" dirty="0"/>
+            <a:endParaRPr lang="en-US" sz="1320" dirty="0"/>
           </a:p>
         </p:txBody>
       </p:sp>
@@ -18581,13 +18928,16 @@
           <a:ln/>
         </p:spPr>
         <p:txBody>
-          <a:bodyPr wrap="square" lIns="254" tIns="254" rIns="254" bIns="254" rtlCol="0" anchor="t">
+          <a:bodyPr wrap="square" lIns="508" tIns="508" rIns="508" bIns="508" rtlCol="0" anchor="t">
             <a:normAutofit/>
           </a:bodyPr>
           <a:lstStyle/>
           <a:p>
-            <a:r>
-              <a:rPr lang="en-US" sz="1380" dirty="0">
+            <a:pPr indent="0" marL="0">
+              <a:buNone/>
+            </a:pPr>
+            <a:r>
+              <a:rPr lang="en-US" sz="1220" dirty="0">
                 <a:solidFill>
                   <a:srgbClr val="17364A"/>
                 </a:solidFill>
@@ -18595,13 +18945,16 @@
                 <a:ea typeface="Aptos" pitchFamily="34" charset="-122"/>
                 <a:cs typeface="Aptos" pitchFamily="34" charset="-120"/>
               </a:rPr>
-              <a:t>Public health data modernization is the process of improving the systems, standards,.</a:t>
-            </a:r>
-            <a:endParaRPr lang="en-US" sz="1380" dirty="0"/>
-          </a:p>
-          <a:p>
-            <a:r>
-              <a:rPr lang="en-US" sz="1380" dirty="0">
+              <a:t>Public health data modernization is the process of improving the.</a:t>
+            </a:r>
+            <a:endParaRPr lang="en-US" sz="1220" dirty="0"/>
+          </a:p>
+          <a:p>
+            <a:pPr indent="0" marL="0">
+              <a:buNone/>
+            </a:pPr>
+            <a:r>
+              <a:rPr lang="en-US" sz="1220" dirty="0">
                 <a:solidFill>
                   <a:srgbClr val="17364A"/>
                 </a:solidFill>
@@ -18609,13 +18962,16 @@
                 <a:ea typeface="Aptos" pitchFamily="34" charset="-122"/>
                 <a:cs typeface="Aptos" pitchFamily="34" charset="-120"/>
               </a:rPr>
-              <a:t>Modernization includes technical components such as APIs, cloud platforms, data.</a:t>
-            </a:r>
-            <a:endParaRPr lang="en-US" sz="1380" dirty="0"/>
-          </a:p>
-          <a:p>
-            <a:r>
-              <a:rPr lang="en-US" sz="1380" dirty="0">
+              <a:t>Modernization includes technical components such as APIs, cloud.</a:t>
+            </a:r>
+            <a:endParaRPr lang="en-US" sz="1220" dirty="0"/>
+          </a:p>
+          <a:p>
+            <a:pPr indent="0" marL="0">
+              <a:buNone/>
+            </a:pPr>
+            <a:r>
+              <a:rPr lang="en-US" sz="1220" dirty="0">
                 <a:solidFill>
                   <a:srgbClr val="17364A"/>
                 </a:solidFill>
@@ -18623,9 +18979,9 @@
                 <a:ea typeface="Aptos" pitchFamily="34" charset="-122"/>
                 <a:cs typeface="Aptos" pitchFamily="34" charset="-120"/>
               </a:rPr>
-              <a:t>It also includes operational components such as data stewardship, governance review,.</a:t>
-            </a:r>
-            <a:endParaRPr lang="en-US" sz="1380" dirty="0"/>
+              <a:t>It also includes operational components such as data stewardship,.</a:t>
+            </a:r>
+            <a:endParaRPr lang="en-US" sz="1220" dirty="0"/>
           </a:p>
         </p:txBody>
       </p:sp>
@@ -18703,17 +19059,17 @@
         </p:nvSpPr>
         <p:spPr>
           <a:xfrm>
-            <a:off x="7799832" y="5001768"/>
-            <a:ext cx="3145536" cy="502920"/>
-          </a:xfrm>
-          <a:prstGeom prst="rect">
-            <a:avLst/>
-          </a:prstGeom>
-          <a:noFill/>
-          <a:ln/>
-        </p:spPr>
-        <p:txBody>
-          <a:bodyPr wrap="square" lIns="0" tIns="0" rIns="0" bIns="0" rtlCol="0" anchor="t">
+            <a:off x="7799832" y="4974336"/>
+            <a:ext cx="3145536" cy="576072"/>
+          </a:xfrm>
+          <a:prstGeom prst="rect">
+            <a:avLst/>
+          </a:prstGeom>
+          <a:noFill/>
+          <a:ln/>
+        </p:spPr>
+        <p:txBody>
+          <a:bodyPr wrap="square" lIns="254" tIns="254" rIns="254" bIns="254" rtlCol="0" anchor="t">
             <a:normAutofit/>
           </a:bodyPr>
           <a:lstStyle/>
@@ -18722,7 +19078,7 @@
               <a:buNone/>
             </a:pPr>
             <a:r>
-              <a:rPr lang="en-US" sz="1550" dirty="0">
+              <a:rPr lang="en-US" sz="1320" dirty="0">
                 <a:solidFill>
                   <a:srgbClr val="17364A"/>
                 </a:solidFill>
@@ -18730,9 +19086,9 @@
                 <a:ea typeface="Aptos" pitchFamily="34" charset="-122"/>
                 <a:cs typeface="Aptos" pitchFamily="34" charset="-120"/>
               </a:rPr>
-              <a:t>Connect the concept to data quality, model performance, validation evidence, monitoring measures, and decisions that remain under human control.</a:t>
-            </a:r>
-            <a:endParaRPr lang="en-US" sz="1550" dirty="0"/>
+              <a:t>Connect the concept to data quality, model performance, validation evidence, monitoring measures, and decisions that.</a:t>
+            </a:r>
+            <a:endParaRPr lang="en-US" sz="1320" dirty="0"/>
           </a:p>
         </p:txBody>
       </p:sp>

--- a/downloads/presentations/modules/arc-200.pptx
+++ b/downloads/presentations/modules/arc-200.pptx
@@ -3605,11 +3605,11 @@
         <p:spPr>
           <a:xfrm>
             <a:off x="7635240" y="1325880"/>
-            <a:ext cx="3474720" cy="1325880"/>
+            <a:ext cx="3474720" cy="1207008"/>
           </a:xfrm>
           <a:prstGeom prst="roundRect">
             <a:avLst>
-              <a:gd name="adj" fmla="val 8276"/>
+              <a:gd name="adj" fmla="val 9091"/>
             </a:avLst>
           </a:prstGeom>
           <a:solidFill>
@@ -3671,7 +3671,7 @@
         <p:spPr>
           <a:xfrm>
             <a:off x="7799832" y="1801368"/>
-            <a:ext cx="3145536" cy="758952"/>
+            <a:ext cx="3145536" cy="640080"/>
           </a:xfrm>
           <a:prstGeom prst="rect">
             <a:avLst/>
@@ -3711,12 +3711,12 @@
         </p:nvSpPr>
         <p:spPr>
           <a:xfrm>
-            <a:off x="7635240" y="2788920"/>
-            <a:ext cx="3474720" cy="1536192"/>
+            <a:off x="7635240" y="2670048"/>
+            <a:ext cx="3474720" cy="1377086"/>
           </a:xfrm>
           <a:prstGeom prst="roundRect">
             <a:avLst>
-              <a:gd name="adj" fmla="val 7143"/>
+              <a:gd name="adj" fmla="val 7968"/>
             </a:avLst>
           </a:prstGeom>
           <a:solidFill>
@@ -3738,7 +3738,7 @@
         </p:nvSpPr>
         <p:spPr>
           <a:xfrm>
-            <a:off x="7799832" y="2935224"/>
+            <a:off x="7799832" y="2816352"/>
             <a:ext cx="3145536" cy="256032"/>
           </a:xfrm>
           <a:prstGeom prst="rect">
@@ -3777,8 +3777,8 @@
         </p:nvSpPr>
         <p:spPr>
           <a:xfrm>
-            <a:off x="7818120" y="3300984"/>
-            <a:ext cx="3090672" cy="877824"/>
+            <a:off x="7818120" y="3182112"/>
+            <a:ext cx="3090672" cy="718718"/>
           </a:xfrm>
           <a:prstGeom prst="rect">
             <a:avLst/>
@@ -3852,12 +3852,12 @@
         </p:nvSpPr>
         <p:spPr>
           <a:xfrm>
-            <a:off x="7635240" y="4498848"/>
-            <a:ext cx="3474720" cy="1143000"/>
+            <a:off x="7635240" y="4184294"/>
+            <a:ext cx="3474720" cy="1466698"/>
           </a:xfrm>
           <a:prstGeom prst="roundRect">
             <a:avLst>
-              <a:gd name="adj" fmla="val 9600"/>
+              <a:gd name="adj" fmla="val 7481"/>
             </a:avLst>
           </a:prstGeom>
           <a:solidFill>
@@ -3879,7 +3879,7 @@
         </p:nvSpPr>
         <p:spPr>
           <a:xfrm>
-            <a:off x="7799832" y="4645152"/>
+            <a:off x="7799832" y="4330598"/>
             <a:ext cx="3145536" cy="256032"/>
           </a:xfrm>
           <a:prstGeom prst="rect">
@@ -3918,8 +3918,8 @@
         </p:nvSpPr>
         <p:spPr>
           <a:xfrm>
-            <a:off x="7799832" y="4974336"/>
-            <a:ext cx="3145536" cy="576072"/>
+            <a:off x="7799832" y="4659782"/>
+            <a:ext cx="3145536" cy="899770"/>
           </a:xfrm>
           <a:prstGeom prst="rect">
             <a:avLst/>
@@ -3945,7 +3945,7 @@
                 <a:ea typeface="Aptos" pitchFamily="34" charset="-122"/>
                 <a:cs typeface="Aptos" pitchFamily="34" charset="-120"/>
               </a:rPr>
-              <a:t>Connect the concept to data quality, model performance, validation evidence, monitoring measures, and decisions that.</a:t>
+              <a:t>Connect the concept to data quality, model performance, validation evidence, monitoring measures, and decisions that remain under human control.</a:t>
             </a:r>
             <a:endParaRPr lang="en-US" sz="1320" dirty="0"/>
           </a:p>
@@ -4314,11 +4314,11 @@
         <p:spPr>
           <a:xfrm>
             <a:off x="7635240" y="1325880"/>
-            <a:ext cx="3474720" cy="1325880"/>
+            <a:ext cx="3474720" cy="1255471"/>
           </a:xfrm>
           <a:prstGeom prst="roundRect">
             <a:avLst>
-              <a:gd name="adj" fmla="val 8276"/>
+              <a:gd name="adj" fmla="val 8740"/>
             </a:avLst>
           </a:prstGeom>
           <a:solidFill>
@@ -4380,7 +4380,7 @@
         <p:spPr>
           <a:xfrm>
             <a:off x="7799832" y="1801368"/>
-            <a:ext cx="3145536" cy="758952"/>
+            <a:ext cx="3145536" cy="688543"/>
           </a:xfrm>
           <a:prstGeom prst="rect">
             <a:avLst/>
@@ -4420,12 +4420,12 @@
         </p:nvSpPr>
         <p:spPr>
           <a:xfrm>
-            <a:off x="7635240" y="2788920"/>
-            <a:ext cx="3474720" cy="1536192"/>
+            <a:off x="7635240" y="2718511"/>
+            <a:ext cx="3474720" cy="1328623"/>
           </a:xfrm>
           <a:prstGeom prst="roundRect">
             <a:avLst>
-              <a:gd name="adj" fmla="val 7143"/>
+              <a:gd name="adj" fmla="val 8259"/>
             </a:avLst>
           </a:prstGeom>
           <a:solidFill>
@@ -4447,7 +4447,7 @@
         </p:nvSpPr>
         <p:spPr>
           <a:xfrm>
-            <a:off x="7799832" y="2935224"/>
+            <a:off x="7799832" y="2864815"/>
             <a:ext cx="3145536" cy="256032"/>
           </a:xfrm>
           <a:prstGeom prst="rect">
@@ -4486,8 +4486,8 @@
         </p:nvSpPr>
         <p:spPr>
           <a:xfrm>
-            <a:off x="7818120" y="3300984"/>
-            <a:ext cx="3090672" cy="877824"/>
+            <a:off x="7818120" y="3230575"/>
+            <a:ext cx="3090672" cy="670255"/>
           </a:xfrm>
           <a:prstGeom prst="rect">
             <a:avLst/>
@@ -4561,12 +4561,12 @@
         </p:nvSpPr>
         <p:spPr>
           <a:xfrm>
-            <a:off x="7635240" y="4498848"/>
-            <a:ext cx="3474720" cy="1143000"/>
+            <a:off x="7635240" y="4184294"/>
+            <a:ext cx="3474720" cy="1466698"/>
           </a:xfrm>
           <a:prstGeom prst="roundRect">
             <a:avLst>
-              <a:gd name="adj" fmla="val 9600"/>
+              <a:gd name="adj" fmla="val 7481"/>
             </a:avLst>
           </a:prstGeom>
           <a:solidFill>
@@ -4588,7 +4588,7 @@
         </p:nvSpPr>
         <p:spPr>
           <a:xfrm>
-            <a:off x="7799832" y="4645152"/>
+            <a:off x="7799832" y="4330598"/>
             <a:ext cx="3145536" cy="256032"/>
           </a:xfrm>
           <a:prstGeom prst="rect">
@@ -4627,8 +4627,8 @@
         </p:nvSpPr>
         <p:spPr>
           <a:xfrm>
-            <a:off x="7799832" y="4974336"/>
-            <a:ext cx="3145536" cy="576072"/>
+            <a:off x="7799832" y="4659782"/>
+            <a:ext cx="3145536" cy="899770"/>
           </a:xfrm>
           <a:prstGeom prst="rect">
             <a:avLst/>
@@ -4654,7 +4654,7 @@
                 <a:ea typeface="Aptos" pitchFamily="34" charset="-122"/>
                 <a:cs typeface="Aptos" pitchFamily="34" charset="-120"/>
               </a:rPr>
-              <a:t>Connect the concept to data quality, model performance, validation evidence, monitoring measures, and decisions that.</a:t>
+              <a:t>Connect the concept to data quality, model performance, validation evidence, monitoring measures, and decisions that remain under human control.</a:t>
             </a:r>
             <a:endParaRPr lang="en-US" sz="1320" dirty="0"/>
           </a:p>
@@ -5023,11 +5023,11 @@
         <p:spPr>
           <a:xfrm>
             <a:off x="7635240" y="1325880"/>
-            <a:ext cx="3474720" cy="1325880"/>
+            <a:ext cx="3474720" cy="1207008"/>
           </a:xfrm>
           <a:prstGeom prst="roundRect">
             <a:avLst>
-              <a:gd name="adj" fmla="val 8276"/>
+              <a:gd name="adj" fmla="val 9091"/>
             </a:avLst>
           </a:prstGeom>
           <a:solidFill>
@@ -5089,7 +5089,7 @@
         <p:spPr>
           <a:xfrm>
             <a:off x="7799832" y="1801368"/>
-            <a:ext cx="3145536" cy="758952"/>
+            <a:ext cx="3145536" cy="640080"/>
           </a:xfrm>
           <a:prstGeom prst="rect">
             <a:avLst/>
@@ -5129,12 +5129,12 @@
         </p:nvSpPr>
         <p:spPr>
           <a:xfrm>
-            <a:off x="7635240" y="2788920"/>
-            <a:ext cx="3474720" cy="1536192"/>
+            <a:off x="7635240" y="2670048"/>
+            <a:ext cx="3474720" cy="1377086"/>
           </a:xfrm>
           <a:prstGeom prst="roundRect">
             <a:avLst>
-              <a:gd name="adj" fmla="val 7143"/>
+              <a:gd name="adj" fmla="val 7968"/>
             </a:avLst>
           </a:prstGeom>
           <a:solidFill>
@@ -5156,8 +5156,8 @@
         </p:nvSpPr>
         <p:spPr>
           <a:xfrm>
-            <a:off x="7799832" y="2935224"/>
-            <a:ext cx="3145536" cy="256032"/>
+            <a:off x="7799832" y="2798064"/>
+            <a:ext cx="3145536" cy="237744"/>
           </a:xfrm>
           <a:prstGeom prst="rect">
             <a:avLst/>
@@ -5173,7 +5173,7 @@
               <a:buNone/>
             </a:pPr>
             <a:r>
-              <a:rPr lang="en-US" sz="1300" b="1" dirty="0">
+              <a:rPr lang="en-US" sz="1250" b="1" dirty="0">
                 <a:solidFill>
                   <a:srgbClr val="0068B7"/>
                 </a:solidFill>
@@ -5181,101 +5181,317 @@
                 <a:ea typeface="Aptos" pitchFamily="34" charset="-122"/>
                 <a:cs typeface="Aptos" pitchFamily="34" charset="-120"/>
               </a:rPr>
-              <a:t>Concept checkpoints</a:t>
-            </a:r>
-            <a:endParaRPr lang="en-US" sz="1300" dirty="0"/>
-          </a:p>
-        </p:txBody>
-      </p:sp>
-      <p:sp>
-        <p:nvSpPr>
-          <p:cNvPr id="15" name="Text 13"/>
-          <p:cNvSpPr/>
-          <p:nvPr/>
-        </p:nvSpPr>
-        <p:spPr>
-          <a:xfrm>
-            <a:off x="7818120" y="3300984"/>
-            <a:ext cx="3090672" cy="877824"/>
-          </a:xfrm>
-          <a:prstGeom prst="rect">
-            <a:avLst/>
-          </a:prstGeom>
-          <a:noFill/>
-          <a:ln/>
-        </p:spPr>
-        <p:txBody>
-          <a:bodyPr wrap="square" lIns="508" tIns="508" rIns="508" bIns="508" rtlCol="0" anchor="t">
+              <a:t>Data-to-decision flow</a:t>
+            </a:r>
+            <a:endParaRPr lang="en-US" sz="1250" dirty="0"/>
+          </a:p>
+        </p:txBody>
+      </p:sp>
+      <p:sp>
+        <p:nvSpPr>
+          <p:cNvPr id="15" name="Shape 13"/>
+          <p:cNvSpPr/>
+          <p:nvPr/>
+        </p:nvSpPr>
+        <p:spPr>
+          <a:xfrm>
+            <a:off x="8763000" y="3351276"/>
+            <a:ext cx="164592" cy="0"/>
+          </a:xfrm>
+          <a:prstGeom prst="line">
+            <a:avLst/>
+          </a:prstGeom>
+          <a:noFill/>
+          <a:ln w="15240">
+            <a:solidFill>
+              <a:srgbClr val="8ABBD8"/>
+            </a:solidFill>
+            <a:prstDash val="solid"/>
+          </a:ln>
+        </p:spPr>
+      </p:sp>
+      <p:sp>
+        <p:nvSpPr>
+          <p:cNvPr id="16" name="Shape 14"/>
+          <p:cNvSpPr/>
+          <p:nvPr/>
+        </p:nvSpPr>
+        <p:spPr>
+          <a:xfrm>
+            <a:off x="7872984" y="3200400"/>
+            <a:ext cx="890016" cy="301752"/>
+          </a:xfrm>
+          <a:prstGeom prst="roundRect">
+            <a:avLst>
+              <a:gd name="adj" fmla="val 24242"/>
+            </a:avLst>
+          </a:prstGeom>
+          <a:solidFill>
+            <a:srgbClr val="0068B7"/>
+          </a:solidFill>
+          <a:ln w="12700">
+            <a:solidFill>
+              <a:srgbClr val="0068B7"/>
+            </a:solidFill>
+            <a:prstDash val="solid"/>
+          </a:ln>
+        </p:spPr>
+      </p:sp>
+      <p:sp>
+        <p:nvSpPr>
+          <p:cNvPr id="17" name="Text 15"/>
+          <p:cNvSpPr/>
+          <p:nvPr/>
+        </p:nvSpPr>
+        <p:spPr>
+          <a:xfrm>
+            <a:off x="7909560" y="3273552"/>
+            <a:ext cx="816864" cy="146304"/>
+          </a:xfrm>
+          <a:prstGeom prst="rect">
+            <a:avLst/>
+          </a:prstGeom>
+          <a:noFill/>
+          <a:ln/>
+        </p:spPr>
+        <p:txBody>
+          <a:bodyPr wrap="square" lIns="0" tIns="0" rIns="0" bIns="0" rtlCol="0" anchor="ctr">
             <a:normAutofit/>
           </a:bodyPr>
           <a:lstStyle/>
           <a:p>
-            <a:pPr indent="0" marL="0">
-              <a:buNone/>
-            </a:pPr>
-            <a:r>
-              <a:rPr lang="en-US" sz="1220" dirty="0">
-                <a:solidFill>
-                  <a:srgbClr val="17364A"/>
-                </a:solidFill>
-                <a:latin typeface="Aptos" pitchFamily="34" charset="0"/>
-                <a:ea typeface="Aptos" pitchFamily="34" charset="-122"/>
-                <a:cs typeface="Aptos" pitchFamily="34" charset="-120"/>
-              </a:rPr>
-              <a:t>These may include electronic health records, laboratories,.</a:t>
-            </a:r>
-            <a:endParaRPr lang="en-US" sz="1220" dirty="0"/>
-          </a:p>
-          <a:p>
-            <a:pPr indent="0" marL="0">
-              <a:buNone/>
-            </a:pPr>
-            <a:r>
-              <a:rPr lang="en-US" sz="1220" dirty="0">
-                <a:solidFill>
-                  <a:srgbClr val="17364A"/>
-                </a:solidFill>
-                <a:latin typeface="Aptos" pitchFamily="34" charset="0"/>
-                <a:ea typeface="Aptos" pitchFamily="34" charset="-122"/>
-                <a:cs typeface="Aptos" pitchFamily="34" charset="-120"/>
-              </a:rPr>
-              <a:t>Each source system has its own data quality profile, update.</a:t>
-            </a:r>
-            <a:endParaRPr lang="en-US" sz="1220" dirty="0"/>
-          </a:p>
-          <a:p>
-            <a:pPr indent="0" marL="0">
-              <a:buNone/>
-            </a:pPr>
-            <a:r>
-              <a:rPr lang="en-US" sz="1220" dirty="0">
-                <a:solidFill>
-                  <a:srgbClr val="17364A"/>
-                </a:solidFill>
-                <a:latin typeface="Aptos" pitchFamily="34" charset="0"/>
-                <a:ea typeface="Aptos" pitchFamily="34" charset="-122"/>
-                <a:cs typeface="Aptos" pitchFamily="34" charset="-120"/>
-              </a:rPr>
-              <a:t>Before AI can be used safely, the agency needs to understand these.</a:t>
-            </a:r>
-            <a:endParaRPr lang="en-US" sz="1220" dirty="0"/>
-          </a:p>
-        </p:txBody>
-      </p:sp>
-      <p:sp>
-        <p:nvSpPr>
-          <p:cNvPr id="16" name="Shape 14"/>
-          <p:cNvSpPr/>
-          <p:nvPr/>
-        </p:nvSpPr>
-        <p:spPr>
-          <a:xfrm>
-            <a:off x="7635240" y="4498848"/>
-            <a:ext cx="3474720" cy="1143000"/>
+            <a:pPr algn="ctr" indent="0" marL="0">
+              <a:buNone/>
+            </a:pPr>
+            <a:r>
+              <a:rPr lang="en-US" sz="880" b="1" dirty="0">
+                <a:solidFill>
+                  <a:srgbClr val="FFFFFF"/>
+                </a:solidFill>
+                <a:latin typeface="Aptos" pitchFamily="34" charset="0"/>
+                <a:ea typeface="Aptos" pitchFamily="34" charset="-122"/>
+                <a:cs typeface="Aptos" pitchFamily="34" charset="-120"/>
+              </a:rPr>
+              <a:t>Data</a:t>
+            </a:r>
+            <a:endParaRPr lang="en-US" sz="880" dirty="0"/>
+          </a:p>
+        </p:txBody>
+      </p:sp>
+      <p:sp>
+        <p:nvSpPr>
+          <p:cNvPr id="18" name="Shape 16"/>
+          <p:cNvSpPr/>
+          <p:nvPr/>
+        </p:nvSpPr>
+        <p:spPr>
+          <a:xfrm>
+            <a:off x="9817608" y="3351276"/>
+            <a:ext cx="164592" cy="0"/>
+          </a:xfrm>
+          <a:prstGeom prst="line">
+            <a:avLst/>
+          </a:prstGeom>
+          <a:noFill/>
+          <a:ln w="15240">
+            <a:solidFill>
+              <a:srgbClr val="8ABBD8"/>
+            </a:solidFill>
+            <a:prstDash val="solid"/>
+          </a:ln>
+        </p:spPr>
+      </p:sp>
+      <p:sp>
+        <p:nvSpPr>
+          <p:cNvPr id="19" name="Shape 17"/>
+          <p:cNvSpPr/>
+          <p:nvPr/>
+        </p:nvSpPr>
+        <p:spPr>
+          <a:xfrm>
+            <a:off x="8927592" y="3200400"/>
+            <a:ext cx="890016" cy="301752"/>
           </a:xfrm>
           <a:prstGeom prst="roundRect">
             <a:avLst>
-              <a:gd name="adj" fmla="val 9600"/>
+              <a:gd name="adj" fmla="val 24242"/>
+            </a:avLst>
+          </a:prstGeom>
+          <a:solidFill>
+            <a:srgbClr val="2F8A28"/>
+          </a:solidFill>
+          <a:ln w="12700">
+            <a:solidFill>
+              <a:srgbClr val="2F8A28"/>
+            </a:solidFill>
+            <a:prstDash val="solid"/>
+          </a:ln>
+        </p:spPr>
+      </p:sp>
+      <p:sp>
+        <p:nvSpPr>
+          <p:cNvPr id="20" name="Text 18"/>
+          <p:cNvSpPr/>
+          <p:nvPr/>
+        </p:nvSpPr>
+        <p:spPr>
+          <a:xfrm>
+            <a:off x="8964168" y="3273552"/>
+            <a:ext cx="816864" cy="146304"/>
+          </a:xfrm>
+          <a:prstGeom prst="rect">
+            <a:avLst/>
+          </a:prstGeom>
+          <a:noFill/>
+          <a:ln/>
+        </p:spPr>
+        <p:txBody>
+          <a:bodyPr wrap="square" lIns="0" tIns="0" rIns="0" bIns="0" rtlCol="0" anchor="ctr">
+            <a:normAutofit/>
+          </a:bodyPr>
+          <a:lstStyle/>
+          <a:p>
+            <a:pPr algn="ctr" indent="0" marL="0">
+              <a:buNone/>
+            </a:pPr>
+            <a:r>
+              <a:rPr lang="en-US" sz="880" b="1" dirty="0">
+                <a:solidFill>
+                  <a:srgbClr val="FFFFFF"/>
+                </a:solidFill>
+                <a:latin typeface="Aptos" pitchFamily="34" charset="0"/>
+                <a:ea typeface="Aptos" pitchFamily="34" charset="-122"/>
+                <a:cs typeface="Aptos" pitchFamily="34" charset="-120"/>
+              </a:rPr>
+              <a:t>Analysis</a:t>
+            </a:r>
+            <a:endParaRPr lang="en-US" sz="880" dirty="0"/>
+          </a:p>
+        </p:txBody>
+      </p:sp>
+      <p:sp>
+        <p:nvSpPr>
+          <p:cNvPr id="21" name="Shape 19"/>
+          <p:cNvSpPr/>
+          <p:nvPr/>
+        </p:nvSpPr>
+        <p:spPr>
+          <a:xfrm>
+            <a:off x="9982200" y="3200400"/>
+            <a:ext cx="890016" cy="301752"/>
+          </a:xfrm>
+          <a:prstGeom prst="roundRect">
+            <a:avLst>
+              <a:gd name="adj" fmla="val 24242"/>
+            </a:avLst>
+          </a:prstGeom>
+          <a:solidFill>
+            <a:srgbClr val="6A4CA3"/>
+          </a:solidFill>
+          <a:ln w="12700">
+            <a:solidFill>
+              <a:srgbClr val="6A4CA3"/>
+            </a:solidFill>
+            <a:prstDash val="solid"/>
+          </a:ln>
+        </p:spPr>
+      </p:sp>
+      <p:sp>
+        <p:nvSpPr>
+          <p:cNvPr id="22" name="Text 20"/>
+          <p:cNvSpPr/>
+          <p:nvPr/>
+        </p:nvSpPr>
+        <p:spPr>
+          <a:xfrm>
+            <a:off x="10018776" y="3273552"/>
+            <a:ext cx="816864" cy="146304"/>
+          </a:xfrm>
+          <a:prstGeom prst="rect">
+            <a:avLst/>
+          </a:prstGeom>
+          <a:noFill/>
+          <a:ln/>
+        </p:spPr>
+        <p:txBody>
+          <a:bodyPr wrap="square" lIns="0" tIns="0" rIns="0" bIns="0" rtlCol="0" anchor="ctr">
+            <a:normAutofit/>
+          </a:bodyPr>
+          <a:lstStyle/>
+          <a:p>
+            <a:pPr algn="ctr" indent="0" marL="0">
+              <a:buNone/>
+            </a:pPr>
+            <a:r>
+              <a:rPr lang="en-US" sz="880" b="1" dirty="0">
+                <a:solidFill>
+                  <a:srgbClr val="FFFFFF"/>
+                </a:solidFill>
+                <a:latin typeface="Aptos" pitchFamily="34" charset="0"/>
+                <a:ea typeface="Aptos" pitchFamily="34" charset="-122"/>
+                <a:cs typeface="Aptos" pitchFamily="34" charset="-120"/>
+              </a:rPr>
+              <a:t>Review</a:t>
+            </a:r>
+            <a:endParaRPr lang="en-US" sz="880" dirty="0"/>
+          </a:p>
+        </p:txBody>
+      </p:sp>
+      <p:sp>
+        <p:nvSpPr>
+          <p:cNvPr id="23" name="Text 21"/>
+          <p:cNvSpPr/>
+          <p:nvPr/>
+        </p:nvSpPr>
+        <p:spPr>
+          <a:xfrm>
+            <a:off x="7854696" y="3694176"/>
+            <a:ext cx="3035808" cy="206654"/>
+          </a:xfrm>
+          <a:prstGeom prst="rect">
+            <a:avLst/>
+          </a:prstGeom>
+          <a:noFill/>
+          <a:ln/>
+        </p:spPr>
+        <p:txBody>
+          <a:bodyPr wrap="square" lIns="254" tIns="254" rIns="254" bIns="254" rtlCol="0" anchor="t">
+            <a:normAutofit/>
+          </a:bodyPr>
+          <a:lstStyle/>
+          <a:p>
+            <a:pPr indent="0" marL="0">
+              <a:buNone/>
+            </a:pPr>
+            <a:r>
+              <a:rPr lang="en-US" sz="1120" dirty="0">
+                <a:solidFill>
+                  <a:srgbClr val="17364A"/>
+                </a:solidFill>
+                <a:latin typeface="Aptos" pitchFamily="34" charset="0"/>
+                <a:ea typeface="Aptos" pitchFamily="34" charset="-122"/>
+                <a:cs typeface="Aptos" pitchFamily="34" charset="-120"/>
+              </a:rPr>
+              <a:t>The important handoff is not from data to AI; it is from analysis to accountable human review.</a:t>
+            </a:r>
+            <a:endParaRPr lang="en-US" sz="1120" dirty="0"/>
+          </a:p>
+        </p:txBody>
+      </p:sp>
+      <p:sp>
+        <p:nvSpPr>
+          <p:cNvPr id="24" name="Shape 22"/>
+          <p:cNvSpPr/>
+          <p:nvPr/>
+        </p:nvSpPr>
+        <p:spPr>
+          <a:xfrm>
+            <a:off x="7635240" y="4184294"/>
+            <a:ext cx="3474720" cy="1466698"/>
+          </a:xfrm>
+          <a:prstGeom prst="roundRect">
+            <a:avLst>
+              <a:gd name="adj" fmla="val 7481"/>
             </a:avLst>
           </a:prstGeom>
           <a:solidFill>
@@ -5291,13 +5507,13 @@
       </p:sp>
       <p:sp>
         <p:nvSpPr>
-          <p:cNvPr id="17" name="Text 15"/>
-          <p:cNvSpPr/>
-          <p:nvPr/>
-        </p:nvSpPr>
-        <p:spPr>
-          <a:xfrm>
-            <a:off x="7799832" y="4645152"/>
+          <p:cNvPr id="25" name="Text 23"/>
+          <p:cNvSpPr/>
+          <p:nvPr/>
+        </p:nvSpPr>
+        <p:spPr>
+          <a:xfrm>
+            <a:off x="7799832" y="4330598"/>
             <a:ext cx="3145536" cy="256032"/>
           </a:xfrm>
           <a:prstGeom prst="rect">
@@ -5330,14 +5546,14 @@
       </p:sp>
       <p:sp>
         <p:nvSpPr>
-          <p:cNvPr id="18" name="Text 16"/>
-          <p:cNvSpPr/>
-          <p:nvPr/>
-        </p:nvSpPr>
-        <p:spPr>
-          <a:xfrm>
-            <a:off x="7799832" y="4974336"/>
-            <a:ext cx="3145536" cy="576072"/>
+          <p:cNvPr id="26" name="Text 24"/>
+          <p:cNvSpPr/>
+          <p:nvPr/>
+        </p:nvSpPr>
+        <p:spPr>
+          <a:xfrm>
+            <a:off x="7799832" y="4659782"/>
+            <a:ext cx="3145536" cy="899770"/>
           </a:xfrm>
           <a:prstGeom prst="rect">
             <a:avLst/>
@@ -5363,7 +5579,7 @@
                 <a:ea typeface="Aptos" pitchFamily="34" charset="-122"/>
                 <a:cs typeface="Aptos" pitchFamily="34" charset="-120"/>
               </a:rPr>
-              <a:t>Connect the concept to data quality, model performance, validation evidence, monitoring measures, and decisions that.</a:t>
+              <a:t>Connect the concept to data quality, model performance, validation evidence, monitoring measures, and decisions that remain under human control.</a:t>
             </a:r>
             <a:endParaRPr lang="en-US" sz="1320" dirty="0"/>
           </a:p>
@@ -5732,11 +5948,11 @@
         <p:spPr>
           <a:xfrm>
             <a:off x="7635240" y="1325880"/>
-            <a:ext cx="3474720" cy="1325880"/>
+            <a:ext cx="3474720" cy="1207008"/>
           </a:xfrm>
           <a:prstGeom prst="roundRect">
             <a:avLst>
-              <a:gd name="adj" fmla="val 8276"/>
+              <a:gd name="adj" fmla="val 9091"/>
             </a:avLst>
           </a:prstGeom>
           <a:solidFill>
@@ -5798,7 +6014,7 @@
         <p:spPr>
           <a:xfrm>
             <a:off x="7799832" y="1801368"/>
-            <a:ext cx="3145536" cy="758952"/>
+            <a:ext cx="3145536" cy="640080"/>
           </a:xfrm>
           <a:prstGeom prst="rect">
             <a:avLst/>
@@ -5838,12 +6054,12 @@
         </p:nvSpPr>
         <p:spPr>
           <a:xfrm>
-            <a:off x="7635240" y="2788920"/>
-            <a:ext cx="3474720" cy="1536192"/>
+            <a:off x="7635240" y="2670048"/>
+            <a:ext cx="3474720" cy="1377086"/>
           </a:xfrm>
           <a:prstGeom prst="roundRect">
             <a:avLst>
-              <a:gd name="adj" fmla="val 7143"/>
+              <a:gd name="adj" fmla="val 7968"/>
             </a:avLst>
           </a:prstGeom>
           <a:solidFill>
@@ -5865,7 +6081,7 @@
         </p:nvSpPr>
         <p:spPr>
           <a:xfrm>
-            <a:off x="7799832" y="2935224"/>
+            <a:off x="7799832" y="2816352"/>
             <a:ext cx="3145536" cy="256032"/>
           </a:xfrm>
           <a:prstGeom prst="rect">
@@ -5904,8 +6120,8 @@
         </p:nvSpPr>
         <p:spPr>
           <a:xfrm>
-            <a:off x="7818120" y="3300984"/>
-            <a:ext cx="3090672" cy="877824"/>
+            <a:off x="7818120" y="3182112"/>
+            <a:ext cx="3090672" cy="718718"/>
           </a:xfrm>
           <a:prstGeom prst="rect">
             <a:avLst/>
@@ -5979,12 +6195,12 @@
         </p:nvSpPr>
         <p:spPr>
           <a:xfrm>
-            <a:off x="7635240" y="4498848"/>
-            <a:ext cx="3474720" cy="1143000"/>
+            <a:off x="7635240" y="4184294"/>
+            <a:ext cx="3474720" cy="1466698"/>
           </a:xfrm>
           <a:prstGeom prst="roundRect">
             <a:avLst>
-              <a:gd name="adj" fmla="val 9600"/>
+              <a:gd name="adj" fmla="val 7481"/>
             </a:avLst>
           </a:prstGeom>
           <a:solidFill>
@@ -6006,7 +6222,7 @@
         </p:nvSpPr>
         <p:spPr>
           <a:xfrm>
-            <a:off x="7799832" y="4645152"/>
+            <a:off x="7799832" y="4330598"/>
             <a:ext cx="3145536" cy="256032"/>
           </a:xfrm>
           <a:prstGeom prst="rect">
@@ -6045,8 +6261,8 @@
         </p:nvSpPr>
         <p:spPr>
           <a:xfrm>
-            <a:off x="7799832" y="4974336"/>
-            <a:ext cx="3145536" cy="576072"/>
+            <a:off x="7799832" y="4659782"/>
+            <a:ext cx="3145536" cy="899770"/>
           </a:xfrm>
           <a:prstGeom prst="rect">
             <a:avLst/>
@@ -6072,7 +6288,7 @@
                 <a:ea typeface="Aptos" pitchFamily="34" charset="-122"/>
                 <a:cs typeface="Aptos" pitchFamily="34" charset="-120"/>
               </a:rPr>
-              <a:t>Connect the concept to data quality, model performance, validation evidence, monitoring measures, and decisions that.</a:t>
+              <a:t>Connect the concept to data quality, model performance, validation evidence, monitoring measures, and decisions that remain under human control.</a:t>
             </a:r>
             <a:endParaRPr lang="en-US" sz="1320" dirty="0"/>
           </a:p>
@@ -6441,11 +6657,11 @@
         <p:spPr>
           <a:xfrm>
             <a:off x="7635240" y="1325880"/>
-            <a:ext cx="3474720" cy="1325880"/>
+            <a:ext cx="3474720" cy="1207008"/>
           </a:xfrm>
           <a:prstGeom prst="roundRect">
             <a:avLst>
-              <a:gd name="adj" fmla="val 8276"/>
+              <a:gd name="adj" fmla="val 9091"/>
             </a:avLst>
           </a:prstGeom>
           <a:solidFill>
@@ -6507,7 +6723,7 @@
         <p:spPr>
           <a:xfrm>
             <a:off x="7799832" y="1801368"/>
-            <a:ext cx="3145536" cy="758952"/>
+            <a:ext cx="3145536" cy="640080"/>
           </a:xfrm>
           <a:prstGeom prst="rect">
             <a:avLst/>
@@ -6547,7 +6763,7 @@
         </p:nvSpPr>
         <p:spPr>
           <a:xfrm>
-            <a:off x="7635240" y="2788920"/>
+            <a:off x="7635240" y="2670048"/>
             <a:ext cx="3474720" cy="1536192"/>
           </a:xfrm>
           <a:prstGeom prst="roundRect">
@@ -6574,7 +6790,7 @@
         </p:nvSpPr>
         <p:spPr>
           <a:xfrm>
-            <a:off x="7799832" y="2935224"/>
+            <a:off x="7799832" y="2816352"/>
             <a:ext cx="3145536" cy="256032"/>
           </a:xfrm>
           <a:prstGeom prst="rect">
@@ -6613,7 +6829,7 @@
         </p:nvSpPr>
         <p:spPr>
           <a:xfrm>
-            <a:off x="7818120" y="3300984"/>
+            <a:off x="7818120" y="3182112"/>
             <a:ext cx="3090672" cy="877824"/>
           </a:xfrm>
           <a:prstGeom prst="rect">
@@ -6688,12 +6904,12 @@
         </p:nvSpPr>
         <p:spPr>
           <a:xfrm>
-            <a:off x="7635240" y="4498848"/>
-            <a:ext cx="3474720" cy="1143000"/>
+            <a:off x="7635240" y="4343400"/>
+            <a:ext cx="3474720" cy="1255471"/>
           </a:xfrm>
           <a:prstGeom prst="roundRect">
             <a:avLst>
-              <a:gd name="adj" fmla="val 9600"/>
+              <a:gd name="adj" fmla="val 8740"/>
             </a:avLst>
           </a:prstGeom>
           <a:solidFill>
@@ -6715,7 +6931,7 @@
         </p:nvSpPr>
         <p:spPr>
           <a:xfrm>
-            <a:off x="7799832" y="4645152"/>
+            <a:off x="7799832" y="4489704"/>
             <a:ext cx="3145536" cy="256032"/>
           </a:xfrm>
           <a:prstGeom prst="rect">
@@ -6754,8 +6970,8 @@
         </p:nvSpPr>
         <p:spPr>
           <a:xfrm>
-            <a:off x="7799832" y="4974336"/>
-            <a:ext cx="3145536" cy="576072"/>
+            <a:off x="7799832" y="4818888"/>
+            <a:ext cx="3145536" cy="688543"/>
           </a:xfrm>
           <a:prstGeom prst="rect">
             <a:avLst/>
@@ -6781,7 +6997,7 @@
                 <a:ea typeface="Aptos" pitchFamily="34" charset="-122"/>
                 <a:cs typeface="Aptos" pitchFamily="34" charset="-120"/>
               </a:rPr>
-              <a:t>Identify what could go wrong, who could be affected, what safeguards are needed, and what evidence should be reviewed.</a:t>
+              <a:t>Identify what could go wrong, who could be affected, what safeguards are needed, and what evidence should be reviewed before use.</a:t>
             </a:r>
             <a:endParaRPr lang="en-US" sz="1320" dirty="0"/>
           </a:p>
@@ -7150,11 +7366,11 @@
         <p:spPr>
           <a:xfrm>
             <a:off x="7635240" y="1325880"/>
-            <a:ext cx="3474720" cy="1325880"/>
+            <a:ext cx="3474720" cy="1207008"/>
           </a:xfrm>
           <a:prstGeom prst="roundRect">
             <a:avLst>
-              <a:gd name="adj" fmla="val 8276"/>
+              <a:gd name="adj" fmla="val 9091"/>
             </a:avLst>
           </a:prstGeom>
           <a:solidFill>
@@ -7216,7 +7432,7 @@
         <p:spPr>
           <a:xfrm>
             <a:off x="7799832" y="1801368"/>
-            <a:ext cx="3145536" cy="758952"/>
+            <a:ext cx="3145536" cy="640080"/>
           </a:xfrm>
           <a:prstGeom prst="rect">
             <a:avLst/>
@@ -7256,7 +7472,7 @@
         </p:nvSpPr>
         <p:spPr>
           <a:xfrm>
-            <a:off x="7635240" y="2788920"/>
+            <a:off x="7635240" y="2670048"/>
             <a:ext cx="3474720" cy="1536192"/>
           </a:xfrm>
           <a:prstGeom prst="roundRect">
@@ -7283,7 +7499,7 @@
         </p:nvSpPr>
         <p:spPr>
           <a:xfrm>
-            <a:off x="7799832" y="2935224"/>
+            <a:off x="7799832" y="2816352"/>
             <a:ext cx="3145536" cy="256032"/>
           </a:xfrm>
           <a:prstGeom prst="rect">
@@ -7322,7 +7538,7 @@
         </p:nvSpPr>
         <p:spPr>
           <a:xfrm>
-            <a:off x="7818120" y="3300984"/>
+            <a:off x="7818120" y="3182112"/>
             <a:ext cx="3090672" cy="877824"/>
           </a:xfrm>
           <a:prstGeom prst="rect">
@@ -7397,12 +7613,12 @@
         </p:nvSpPr>
         <p:spPr>
           <a:xfrm>
-            <a:off x="7635240" y="4498848"/>
-            <a:ext cx="3474720" cy="1143000"/>
+            <a:off x="7635240" y="4343400"/>
+            <a:ext cx="3474720" cy="1255471"/>
           </a:xfrm>
           <a:prstGeom prst="roundRect">
             <a:avLst>
-              <a:gd name="adj" fmla="val 9600"/>
+              <a:gd name="adj" fmla="val 8740"/>
             </a:avLst>
           </a:prstGeom>
           <a:solidFill>
@@ -7424,7 +7640,7 @@
         </p:nvSpPr>
         <p:spPr>
           <a:xfrm>
-            <a:off x="7799832" y="4645152"/>
+            <a:off x="7799832" y="4489704"/>
             <a:ext cx="3145536" cy="256032"/>
           </a:xfrm>
           <a:prstGeom prst="rect">
@@ -7463,8 +7679,8 @@
         </p:nvSpPr>
         <p:spPr>
           <a:xfrm>
-            <a:off x="7799832" y="4974336"/>
-            <a:ext cx="3145536" cy="576072"/>
+            <a:off x="7799832" y="4818888"/>
+            <a:ext cx="3145536" cy="688543"/>
           </a:xfrm>
           <a:prstGeom prst="rect">
             <a:avLst/>
@@ -7490,7 +7706,7 @@
                 <a:ea typeface="Aptos" pitchFamily="34" charset="-122"/>
                 <a:cs typeface="Aptos" pitchFamily="34" charset="-120"/>
               </a:rPr>
-              <a:t>Identify what could go wrong, who could be affected, what safeguards are needed, and what evidence should be reviewed.</a:t>
+              <a:t>Identify what could go wrong, who could be affected, what safeguards are needed, and what evidence should be reviewed before use.</a:t>
             </a:r>
             <a:endParaRPr lang="en-US" sz="1320" dirty="0"/>
           </a:p>
@@ -7859,11 +8075,11 @@
         <p:spPr>
           <a:xfrm>
             <a:off x="7635240" y="1325880"/>
-            <a:ext cx="3474720" cy="1325880"/>
+            <a:ext cx="3474720" cy="1255471"/>
           </a:xfrm>
           <a:prstGeom prst="roundRect">
             <a:avLst>
-              <a:gd name="adj" fmla="val 8276"/>
+              <a:gd name="adj" fmla="val 8740"/>
             </a:avLst>
           </a:prstGeom>
           <a:solidFill>
@@ -7925,7 +8141,7 @@
         <p:spPr>
           <a:xfrm>
             <a:off x="7799832" y="1801368"/>
-            <a:ext cx="3145536" cy="758952"/>
+            <a:ext cx="3145536" cy="688543"/>
           </a:xfrm>
           <a:prstGeom prst="rect">
             <a:avLst/>
@@ -7965,12 +8181,12 @@
         </p:nvSpPr>
         <p:spPr>
           <a:xfrm>
-            <a:off x="7635240" y="2788920"/>
-            <a:ext cx="3474720" cy="1536192"/>
+            <a:off x="7635240" y="2718511"/>
+            <a:ext cx="3474720" cy="1328623"/>
           </a:xfrm>
           <a:prstGeom prst="roundRect">
             <a:avLst>
-              <a:gd name="adj" fmla="val 7143"/>
+              <a:gd name="adj" fmla="val 8259"/>
             </a:avLst>
           </a:prstGeom>
           <a:solidFill>
@@ -7992,7 +8208,7 @@
         </p:nvSpPr>
         <p:spPr>
           <a:xfrm>
-            <a:off x="7799832" y="2935224"/>
+            <a:off x="7799832" y="2864815"/>
             <a:ext cx="3145536" cy="256032"/>
           </a:xfrm>
           <a:prstGeom prst="rect">
@@ -8031,8 +8247,8 @@
         </p:nvSpPr>
         <p:spPr>
           <a:xfrm>
-            <a:off x="7818120" y="3300984"/>
-            <a:ext cx="3090672" cy="877824"/>
+            <a:off x="7818120" y="3230575"/>
+            <a:ext cx="3090672" cy="670255"/>
           </a:xfrm>
           <a:prstGeom prst="rect">
             <a:avLst/>
@@ -8106,12 +8322,12 @@
         </p:nvSpPr>
         <p:spPr>
           <a:xfrm>
-            <a:off x="7635240" y="4498848"/>
-            <a:ext cx="3474720" cy="1143000"/>
+            <a:off x="7635240" y="4184294"/>
+            <a:ext cx="3474720" cy="1466698"/>
           </a:xfrm>
           <a:prstGeom prst="roundRect">
             <a:avLst>
-              <a:gd name="adj" fmla="val 9600"/>
+              <a:gd name="adj" fmla="val 7481"/>
             </a:avLst>
           </a:prstGeom>
           <a:solidFill>
@@ -8133,7 +8349,7 @@
         </p:nvSpPr>
         <p:spPr>
           <a:xfrm>
-            <a:off x="7799832" y="4645152"/>
+            <a:off x="7799832" y="4330598"/>
             <a:ext cx="3145536" cy="256032"/>
           </a:xfrm>
           <a:prstGeom prst="rect">
@@ -8172,8 +8388,8 @@
         </p:nvSpPr>
         <p:spPr>
           <a:xfrm>
-            <a:off x="7799832" y="4974336"/>
-            <a:ext cx="3145536" cy="576072"/>
+            <a:off x="7799832" y="4659782"/>
+            <a:ext cx="3145536" cy="899770"/>
           </a:xfrm>
           <a:prstGeom prst="rect">
             <a:avLst/>
@@ -8199,7 +8415,7 @@
                 <a:ea typeface="Aptos" pitchFamily="34" charset="-122"/>
                 <a:cs typeface="Aptos" pitchFamily="34" charset="-120"/>
               </a:rPr>
-              <a:t>Connect the concept to data quality, model performance, validation evidence, monitoring measures, and decisions that.</a:t>
+              <a:t>Connect the concept to data quality, model performance, validation evidence, monitoring measures, and decisions that remain under human control.</a:t>
             </a:r>
             <a:endParaRPr lang="en-US" sz="1320" dirty="0"/>
           </a:p>
@@ -8568,11 +8784,11 @@
         <p:spPr>
           <a:xfrm>
             <a:off x="7635240" y="1325880"/>
-            <a:ext cx="3474720" cy="1325880"/>
+            <a:ext cx="3474720" cy="1255471"/>
           </a:xfrm>
           <a:prstGeom prst="roundRect">
             <a:avLst>
-              <a:gd name="adj" fmla="val 8276"/>
+              <a:gd name="adj" fmla="val 8740"/>
             </a:avLst>
           </a:prstGeom>
           <a:solidFill>
@@ -8634,7 +8850,7 @@
         <p:spPr>
           <a:xfrm>
             <a:off x="7799832" y="1801368"/>
-            <a:ext cx="3145536" cy="758952"/>
+            <a:ext cx="3145536" cy="688543"/>
           </a:xfrm>
           <a:prstGeom prst="rect">
             <a:avLst/>
@@ -8674,12 +8890,12 @@
         </p:nvSpPr>
         <p:spPr>
           <a:xfrm>
-            <a:off x="7635240" y="2788920"/>
-            <a:ext cx="3474720" cy="1536192"/>
+            <a:off x="7635240" y="2718511"/>
+            <a:ext cx="3474720" cy="1328623"/>
           </a:xfrm>
           <a:prstGeom prst="roundRect">
             <a:avLst>
-              <a:gd name="adj" fmla="val 7143"/>
+              <a:gd name="adj" fmla="val 8259"/>
             </a:avLst>
           </a:prstGeom>
           <a:solidFill>
@@ -8701,7 +8917,7 @@
         </p:nvSpPr>
         <p:spPr>
           <a:xfrm>
-            <a:off x="7799832" y="2935224"/>
+            <a:off x="7799832" y="2864815"/>
             <a:ext cx="3145536" cy="256032"/>
           </a:xfrm>
           <a:prstGeom prst="rect">
@@ -8740,8 +8956,8 @@
         </p:nvSpPr>
         <p:spPr>
           <a:xfrm>
-            <a:off x="7818120" y="3300984"/>
-            <a:ext cx="3090672" cy="877824"/>
+            <a:off x="7818120" y="3230575"/>
+            <a:ext cx="3090672" cy="670255"/>
           </a:xfrm>
           <a:prstGeom prst="rect">
             <a:avLst/>
@@ -8815,12 +9031,12 @@
         </p:nvSpPr>
         <p:spPr>
           <a:xfrm>
-            <a:off x="7635240" y="4498848"/>
-            <a:ext cx="3474720" cy="1143000"/>
+            <a:off x="7635240" y="4184294"/>
+            <a:ext cx="3474720" cy="1466698"/>
           </a:xfrm>
           <a:prstGeom prst="roundRect">
             <a:avLst>
-              <a:gd name="adj" fmla="val 9600"/>
+              <a:gd name="adj" fmla="val 7481"/>
             </a:avLst>
           </a:prstGeom>
           <a:solidFill>
@@ -8842,7 +9058,7 @@
         </p:nvSpPr>
         <p:spPr>
           <a:xfrm>
-            <a:off x="7799832" y="4645152"/>
+            <a:off x="7799832" y="4330598"/>
             <a:ext cx="3145536" cy="256032"/>
           </a:xfrm>
           <a:prstGeom prst="rect">
@@ -8881,8 +9097,8 @@
         </p:nvSpPr>
         <p:spPr>
           <a:xfrm>
-            <a:off x="7799832" y="4974336"/>
-            <a:ext cx="3145536" cy="576072"/>
+            <a:off x="7799832" y="4659782"/>
+            <a:ext cx="3145536" cy="899770"/>
           </a:xfrm>
           <a:prstGeom prst="rect">
             <a:avLst/>
@@ -8908,7 +9124,7 @@
                 <a:ea typeface="Aptos" pitchFamily="34" charset="-122"/>
                 <a:cs typeface="Aptos" pitchFamily="34" charset="-120"/>
               </a:rPr>
-              <a:t>Connect the concept to data quality, model performance, validation evidence, monitoring measures, and decisions that.</a:t>
+              <a:t>Connect the concept to data quality, model performance, validation evidence, monitoring measures, and decisions that remain under human control.</a:t>
             </a:r>
             <a:endParaRPr lang="en-US" sz="1320" dirty="0"/>
           </a:p>
@@ -9277,11 +9493,11 @@
         <p:spPr>
           <a:xfrm>
             <a:off x="7635240" y="1325880"/>
-            <a:ext cx="3474720" cy="1325880"/>
+            <a:ext cx="3474720" cy="1255471"/>
           </a:xfrm>
           <a:prstGeom prst="roundRect">
             <a:avLst>
-              <a:gd name="adj" fmla="val 8276"/>
+              <a:gd name="adj" fmla="val 8740"/>
             </a:avLst>
           </a:prstGeom>
           <a:solidFill>
@@ -9343,7 +9559,7 @@
         <p:spPr>
           <a:xfrm>
             <a:off x="7799832" y="1801368"/>
-            <a:ext cx="3145536" cy="758952"/>
+            <a:ext cx="3145536" cy="688543"/>
           </a:xfrm>
           <a:prstGeom prst="rect">
             <a:avLst/>
@@ -9383,12 +9599,12 @@
         </p:nvSpPr>
         <p:spPr>
           <a:xfrm>
-            <a:off x="7635240" y="2788920"/>
-            <a:ext cx="3474720" cy="1536192"/>
+            <a:off x="7635240" y="2718511"/>
+            <a:ext cx="3474720" cy="1328623"/>
           </a:xfrm>
           <a:prstGeom prst="roundRect">
             <a:avLst>
-              <a:gd name="adj" fmla="val 7143"/>
+              <a:gd name="adj" fmla="val 8259"/>
             </a:avLst>
           </a:prstGeom>
           <a:solidFill>
@@ -9410,7 +9626,7 @@
         </p:nvSpPr>
         <p:spPr>
           <a:xfrm>
-            <a:off x="7799832" y="2935224"/>
+            <a:off x="7799832" y="2864815"/>
             <a:ext cx="3145536" cy="256032"/>
           </a:xfrm>
           <a:prstGeom prst="rect">
@@ -9449,8 +9665,8 @@
         </p:nvSpPr>
         <p:spPr>
           <a:xfrm>
-            <a:off x="7818120" y="3300984"/>
-            <a:ext cx="3090672" cy="877824"/>
+            <a:off x="7818120" y="3230575"/>
+            <a:ext cx="3090672" cy="670255"/>
           </a:xfrm>
           <a:prstGeom prst="rect">
             <a:avLst/>
@@ -9524,12 +9740,12 @@
         </p:nvSpPr>
         <p:spPr>
           <a:xfrm>
-            <a:off x="7635240" y="4498848"/>
-            <a:ext cx="3474720" cy="1143000"/>
+            <a:off x="7635240" y="4184294"/>
+            <a:ext cx="3474720" cy="1466698"/>
           </a:xfrm>
           <a:prstGeom prst="roundRect">
             <a:avLst>
-              <a:gd name="adj" fmla="val 9600"/>
+              <a:gd name="adj" fmla="val 7481"/>
             </a:avLst>
           </a:prstGeom>
           <a:solidFill>
@@ -9551,7 +9767,7 @@
         </p:nvSpPr>
         <p:spPr>
           <a:xfrm>
-            <a:off x="7799832" y="4645152"/>
+            <a:off x="7799832" y="4330598"/>
             <a:ext cx="3145536" cy="256032"/>
           </a:xfrm>
           <a:prstGeom prst="rect">
@@ -9590,8 +9806,8 @@
         </p:nvSpPr>
         <p:spPr>
           <a:xfrm>
-            <a:off x="7799832" y="4974336"/>
-            <a:ext cx="3145536" cy="576072"/>
+            <a:off x="7799832" y="4659782"/>
+            <a:ext cx="3145536" cy="899770"/>
           </a:xfrm>
           <a:prstGeom prst="rect">
             <a:avLst/>
@@ -9617,7 +9833,7 @@
                 <a:ea typeface="Aptos" pitchFamily="34" charset="-122"/>
                 <a:cs typeface="Aptos" pitchFamily="34" charset="-120"/>
               </a:rPr>
-              <a:t>Connect the concept to data quality, model performance, validation evidence, monitoring measures, and decisions that.</a:t>
+              <a:t>Connect the concept to data quality, model performance, validation evidence, monitoring measures, and decisions that remain under human control.</a:t>
             </a:r>
             <a:endParaRPr lang="en-US" sz="1320" dirty="0"/>
           </a:p>
@@ -9986,11 +10202,11 @@
         <p:spPr>
           <a:xfrm>
             <a:off x="7635240" y="1325880"/>
-            <a:ext cx="3474720" cy="1325880"/>
+            <a:ext cx="3474720" cy="1207008"/>
           </a:xfrm>
           <a:prstGeom prst="roundRect">
             <a:avLst>
-              <a:gd name="adj" fmla="val 8276"/>
+              <a:gd name="adj" fmla="val 9091"/>
             </a:avLst>
           </a:prstGeom>
           <a:solidFill>
@@ -10052,7 +10268,7 @@
         <p:spPr>
           <a:xfrm>
             <a:off x="7799832" y="1801368"/>
-            <a:ext cx="3145536" cy="758952"/>
+            <a:ext cx="3145536" cy="640080"/>
           </a:xfrm>
           <a:prstGeom prst="rect">
             <a:avLst/>
@@ -10092,12 +10308,12 @@
         </p:nvSpPr>
         <p:spPr>
           <a:xfrm>
-            <a:off x="7635240" y="2788920"/>
-            <a:ext cx="3474720" cy="1536192"/>
+            <a:off x="7635240" y="2670048"/>
+            <a:ext cx="3474720" cy="1377086"/>
           </a:xfrm>
           <a:prstGeom prst="roundRect">
             <a:avLst>
-              <a:gd name="adj" fmla="val 7143"/>
+              <a:gd name="adj" fmla="val 7968"/>
             </a:avLst>
           </a:prstGeom>
           <a:solidFill>
@@ -10119,7 +10335,7 @@
         </p:nvSpPr>
         <p:spPr>
           <a:xfrm>
-            <a:off x="7799832" y="2935224"/>
+            <a:off x="7799832" y="2816352"/>
             <a:ext cx="3145536" cy="256032"/>
           </a:xfrm>
           <a:prstGeom prst="rect">
@@ -10158,8 +10374,8 @@
         </p:nvSpPr>
         <p:spPr>
           <a:xfrm>
-            <a:off x="7818120" y="3300984"/>
-            <a:ext cx="3090672" cy="877824"/>
+            <a:off x="7818120" y="3182112"/>
+            <a:ext cx="3090672" cy="718718"/>
           </a:xfrm>
           <a:prstGeom prst="rect">
             <a:avLst/>
@@ -10233,12 +10449,12 @@
         </p:nvSpPr>
         <p:spPr>
           <a:xfrm>
-            <a:off x="7635240" y="4498848"/>
-            <a:ext cx="3474720" cy="1143000"/>
+            <a:off x="7635240" y="4184294"/>
+            <a:ext cx="3474720" cy="1466698"/>
           </a:xfrm>
           <a:prstGeom prst="roundRect">
             <a:avLst>
-              <a:gd name="adj" fmla="val 9600"/>
+              <a:gd name="adj" fmla="val 7481"/>
             </a:avLst>
           </a:prstGeom>
           <a:solidFill>
@@ -10260,7 +10476,7 @@
         </p:nvSpPr>
         <p:spPr>
           <a:xfrm>
-            <a:off x="7799832" y="4645152"/>
+            <a:off x="7799832" y="4330598"/>
             <a:ext cx="3145536" cy="256032"/>
           </a:xfrm>
           <a:prstGeom prst="rect">
@@ -10299,8 +10515,8 @@
         </p:nvSpPr>
         <p:spPr>
           <a:xfrm>
-            <a:off x="7799832" y="4974336"/>
-            <a:ext cx="3145536" cy="576072"/>
+            <a:off x="7799832" y="4659782"/>
+            <a:ext cx="3145536" cy="899770"/>
           </a:xfrm>
           <a:prstGeom prst="rect">
             <a:avLst/>
@@ -10326,7 +10542,7 @@
                 <a:ea typeface="Aptos" pitchFamily="34" charset="-122"/>
                 <a:cs typeface="Aptos" pitchFamily="34" charset="-120"/>
               </a:rPr>
-              <a:t>Use the assignment to test whether you can explain the concept, apply it to a realistic public health situation, and.</a:t>
+              <a:t>Use the assignment to test whether you can explain the concept, apply it to a realistic public health situation, and identify what would need review before the work moves forward.</a:t>
             </a:r>
             <a:endParaRPr lang="en-US" sz="1320" dirty="0"/>
           </a:p>
@@ -11297,11 +11513,11 @@
         <p:spPr>
           <a:xfrm>
             <a:off x="7635240" y="1325880"/>
-            <a:ext cx="3474720" cy="1325880"/>
+            <a:ext cx="3474720" cy="1207008"/>
           </a:xfrm>
           <a:prstGeom prst="roundRect">
             <a:avLst>
-              <a:gd name="adj" fmla="val 8276"/>
+              <a:gd name="adj" fmla="val 9091"/>
             </a:avLst>
           </a:prstGeom>
           <a:solidFill>
@@ -11363,7 +11579,7 @@
         <p:spPr>
           <a:xfrm>
             <a:off x="7799832" y="1801368"/>
-            <a:ext cx="3145536" cy="758952"/>
+            <a:ext cx="3145536" cy="640080"/>
           </a:xfrm>
           <a:prstGeom prst="rect">
             <a:avLst/>
@@ -11403,12 +11619,12 @@
         </p:nvSpPr>
         <p:spPr>
           <a:xfrm>
-            <a:off x="7635240" y="2788920"/>
-            <a:ext cx="3474720" cy="1536192"/>
+            <a:off x="7635240" y="2670048"/>
+            <a:ext cx="3474720" cy="1377086"/>
           </a:xfrm>
           <a:prstGeom prst="roundRect">
             <a:avLst>
-              <a:gd name="adj" fmla="val 7143"/>
+              <a:gd name="adj" fmla="val 7968"/>
             </a:avLst>
           </a:prstGeom>
           <a:solidFill>
@@ -11430,7 +11646,7 @@
         </p:nvSpPr>
         <p:spPr>
           <a:xfrm>
-            <a:off x="7799832" y="2935224"/>
+            <a:off x="7799832" y="2816352"/>
             <a:ext cx="3145536" cy="256032"/>
           </a:xfrm>
           <a:prstGeom prst="rect">
@@ -11469,8 +11685,8 @@
         </p:nvSpPr>
         <p:spPr>
           <a:xfrm>
-            <a:off x="7818120" y="3300984"/>
-            <a:ext cx="3090672" cy="877824"/>
+            <a:off x="7818120" y="3182112"/>
+            <a:ext cx="3090672" cy="718718"/>
           </a:xfrm>
           <a:prstGeom prst="rect">
             <a:avLst/>
@@ -11544,12 +11760,12 @@
         </p:nvSpPr>
         <p:spPr>
           <a:xfrm>
-            <a:off x="7635240" y="4498848"/>
-            <a:ext cx="3474720" cy="1143000"/>
+            <a:off x="7635240" y="4184294"/>
+            <a:ext cx="3474720" cy="1466698"/>
           </a:xfrm>
           <a:prstGeom prst="roundRect">
             <a:avLst>
-              <a:gd name="adj" fmla="val 9600"/>
+              <a:gd name="adj" fmla="val 7481"/>
             </a:avLst>
           </a:prstGeom>
           <a:solidFill>
@@ -11571,7 +11787,7 @@
         </p:nvSpPr>
         <p:spPr>
           <a:xfrm>
-            <a:off x="7799832" y="4645152"/>
+            <a:off x="7799832" y="4330598"/>
             <a:ext cx="3145536" cy="256032"/>
           </a:xfrm>
           <a:prstGeom prst="rect">
@@ -11610,8 +11826,8 @@
         </p:nvSpPr>
         <p:spPr>
           <a:xfrm>
-            <a:off x="7799832" y="4974336"/>
-            <a:ext cx="3145536" cy="576072"/>
+            <a:off x="7799832" y="4659782"/>
+            <a:ext cx="3145536" cy="899770"/>
           </a:xfrm>
           <a:prstGeom prst="rect">
             <a:avLst/>
@@ -11637,7 +11853,7 @@
                 <a:ea typeface="Aptos" pitchFamily="34" charset="-122"/>
                 <a:cs typeface="Aptos" pitchFamily="34" charset="-120"/>
               </a:rPr>
-              <a:t>Connect the concept to data quality, model performance, validation evidence, monitoring measures, and decisions that.</a:t>
+              <a:t>Connect the concept to data quality, model performance, validation evidence, monitoring measures, and decisions that remain under human control.</a:t>
             </a:r>
             <a:endParaRPr lang="en-US" sz="1320" dirty="0"/>
           </a:p>
@@ -11989,11 +12205,11 @@
         <p:spPr>
           <a:xfrm>
             <a:off x="7635240" y="1325880"/>
-            <a:ext cx="3474720" cy="1325880"/>
+            <a:ext cx="3474720" cy="1255471"/>
           </a:xfrm>
           <a:prstGeom prst="roundRect">
             <a:avLst>
-              <a:gd name="adj" fmla="val 8276"/>
+              <a:gd name="adj" fmla="val 8740"/>
             </a:avLst>
           </a:prstGeom>
           <a:solidFill>
@@ -12055,7 +12271,7 @@
         <p:spPr>
           <a:xfrm>
             <a:off x="7799832" y="1801368"/>
-            <a:ext cx="3145536" cy="758952"/>
+            <a:ext cx="3145536" cy="688543"/>
           </a:xfrm>
           <a:prstGeom prst="rect">
             <a:avLst/>
@@ -12095,12 +12311,12 @@
         </p:nvSpPr>
         <p:spPr>
           <a:xfrm>
-            <a:off x="7635240" y="2788920"/>
-            <a:ext cx="3474720" cy="1536192"/>
+            <a:off x="7635240" y="2718511"/>
+            <a:ext cx="3474720" cy="1328623"/>
           </a:xfrm>
           <a:prstGeom prst="roundRect">
             <a:avLst>
-              <a:gd name="adj" fmla="val 7143"/>
+              <a:gd name="adj" fmla="val 8259"/>
             </a:avLst>
           </a:prstGeom>
           <a:solidFill>
@@ -12122,7 +12338,7 @@
         </p:nvSpPr>
         <p:spPr>
           <a:xfrm>
-            <a:off x="7799832" y="2935224"/>
+            <a:off x="7799832" y="2864815"/>
             <a:ext cx="3145536" cy="256032"/>
           </a:xfrm>
           <a:prstGeom prst="rect">
@@ -12161,8 +12377,8 @@
         </p:nvSpPr>
         <p:spPr>
           <a:xfrm>
-            <a:off x="7818120" y="3300984"/>
-            <a:ext cx="3090672" cy="877824"/>
+            <a:off x="7818120" y="3230575"/>
+            <a:ext cx="3090672" cy="670255"/>
           </a:xfrm>
           <a:prstGeom prst="rect">
             <a:avLst/>
@@ -12236,12 +12452,12 @@
         </p:nvSpPr>
         <p:spPr>
           <a:xfrm>
-            <a:off x="7635240" y="4498848"/>
-            <a:ext cx="3474720" cy="1143000"/>
+            <a:off x="7635240" y="4184294"/>
+            <a:ext cx="3474720" cy="1466698"/>
           </a:xfrm>
           <a:prstGeom prst="roundRect">
             <a:avLst>
-              <a:gd name="adj" fmla="val 9600"/>
+              <a:gd name="adj" fmla="val 7481"/>
             </a:avLst>
           </a:prstGeom>
           <a:solidFill>
@@ -12263,7 +12479,7 @@
         </p:nvSpPr>
         <p:spPr>
           <a:xfrm>
-            <a:off x="7799832" y="4645152"/>
+            <a:off x="7799832" y="4330598"/>
             <a:ext cx="3145536" cy="256032"/>
           </a:xfrm>
           <a:prstGeom prst="rect">
@@ -12302,8 +12518,8 @@
         </p:nvSpPr>
         <p:spPr>
           <a:xfrm>
-            <a:off x="7799832" y="4974336"/>
-            <a:ext cx="3145536" cy="576072"/>
+            <a:off x="7799832" y="4659782"/>
+            <a:ext cx="3145536" cy="899770"/>
           </a:xfrm>
           <a:prstGeom prst="rect">
             <a:avLst/>
@@ -12329,7 +12545,7 @@
                 <a:ea typeface="Aptos" pitchFamily="34" charset="-122"/>
                 <a:cs typeface="Aptos" pitchFamily="34" charset="-120"/>
               </a:rPr>
-              <a:t>Use the assignment to test whether you can explain the concept, apply it to a realistic public health situation, and.</a:t>
+              <a:t>Use the assignment to test whether you can explain the concept, apply it to a realistic public health situation, and identify what would need review before the work moves forward.</a:t>
             </a:r>
             <a:endParaRPr lang="en-US" sz="1320" dirty="0"/>
           </a:p>
@@ -12698,11 +12914,11 @@
         <p:spPr>
           <a:xfrm>
             <a:off x="7635240" y="1325880"/>
-            <a:ext cx="3474720" cy="1325880"/>
+            <a:ext cx="3474720" cy="1207008"/>
           </a:xfrm>
           <a:prstGeom prst="roundRect">
             <a:avLst>
-              <a:gd name="adj" fmla="val 8276"/>
+              <a:gd name="adj" fmla="val 9091"/>
             </a:avLst>
           </a:prstGeom>
           <a:solidFill>
@@ -12764,7 +12980,7 @@
         <p:spPr>
           <a:xfrm>
             <a:off x="7799832" y="1801368"/>
-            <a:ext cx="3145536" cy="758952"/>
+            <a:ext cx="3145536" cy="640080"/>
           </a:xfrm>
           <a:prstGeom prst="rect">
             <a:avLst/>
@@ -12804,12 +13020,12 @@
         </p:nvSpPr>
         <p:spPr>
           <a:xfrm>
-            <a:off x="7635240" y="2788920"/>
-            <a:ext cx="3474720" cy="1536192"/>
+            <a:off x="7635240" y="2670048"/>
+            <a:ext cx="3474720" cy="1377086"/>
           </a:xfrm>
           <a:prstGeom prst="roundRect">
             <a:avLst>
-              <a:gd name="adj" fmla="val 7143"/>
+              <a:gd name="adj" fmla="val 7968"/>
             </a:avLst>
           </a:prstGeom>
           <a:solidFill>
@@ -12831,7 +13047,7 @@
         </p:nvSpPr>
         <p:spPr>
           <a:xfrm>
-            <a:off x="7799832" y="2935224"/>
+            <a:off x="7799832" y="2816352"/>
             <a:ext cx="3145536" cy="256032"/>
           </a:xfrm>
           <a:prstGeom prst="rect">
@@ -12870,8 +13086,8 @@
         </p:nvSpPr>
         <p:spPr>
           <a:xfrm>
-            <a:off x="7818120" y="3300984"/>
-            <a:ext cx="3090672" cy="877824"/>
+            <a:off x="7818120" y="3182112"/>
+            <a:ext cx="3090672" cy="718718"/>
           </a:xfrm>
           <a:prstGeom prst="rect">
             <a:avLst/>
@@ -12945,12 +13161,12 @@
         </p:nvSpPr>
         <p:spPr>
           <a:xfrm>
-            <a:off x="7635240" y="4498848"/>
-            <a:ext cx="3474720" cy="1143000"/>
+            <a:off x="7635240" y="4184294"/>
+            <a:ext cx="3474720" cy="1466698"/>
           </a:xfrm>
           <a:prstGeom prst="roundRect">
             <a:avLst>
-              <a:gd name="adj" fmla="val 9600"/>
+              <a:gd name="adj" fmla="val 7481"/>
             </a:avLst>
           </a:prstGeom>
           <a:solidFill>
@@ -12972,7 +13188,7 @@
         </p:nvSpPr>
         <p:spPr>
           <a:xfrm>
-            <a:off x="7799832" y="4645152"/>
+            <a:off x="7799832" y="4330598"/>
             <a:ext cx="3145536" cy="256032"/>
           </a:xfrm>
           <a:prstGeom prst="rect">
@@ -13011,8 +13227,8 @@
         </p:nvSpPr>
         <p:spPr>
           <a:xfrm>
-            <a:off x="7799832" y="4974336"/>
-            <a:ext cx="3145536" cy="576072"/>
+            <a:off x="7799832" y="4659782"/>
+            <a:ext cx="3145536" cy="899770"/>
           </a:xfrm>
           <a:prstGeom prst="rect">
             <a:avLst/>
@@ -13038,7 +13254,7 @@
                 <a:ea typeface="Aptos" pitchFamily="34" charset="-122"/>
                 <a:cs typeface="Aptos" pitchFamily="34" charset="-120"/>
               </a:rPr>
-              <a:t>Use the assignment to test whether you can explain the concept, apply it to a realistic public health situation, and.</a:t>
+              <a:t>Use the assignment to test whether you can explain the concept, apply it to a realistic public health situation, and identify what would need review before the work moves forward.</a:t>
             </a:r>
             <a:endParaRPr lang="en-US" sz="1320" dirty="0"/>
           </a:p>
@@ -13407,11 +13623,11 @@
         <p:spPr>
           <a:xfrm>
             <a:off x="7635240" y="1325880"/>
-            <a:ext cx="3474720" cy="1325880"/>
+            <a:ext cx="3474720" cy="1255471"/>
           </a:xfrm>
           <a:prstGeom prst="roundRect">
             <a:avLst>
-              <a:gd name="adj" fmla="val 8276"/>
+              <a:gd name="adj" fmla="val 8740"/>
             </a:avLst>
           </a:prstGeom>
           <a:solidFill>
@@ -13473,7 +13689,7 @@
         <p:spPr>
           <a:xfrm>
             <a:off x="7799832" y="1801368"/>
-            <a:ext cx="3145536" cy="758952"/>
+            <a:ext cx="3145536" cy="688543"/>
           </a:xfrm>
           <a:prstGeom prst="rect">
             <a:avLst/>
@@ -13513,12 +13729,12 @@
         </p:nvSpPr>
         <p:spPr>
           <a:xfrm>
-            <a:off x="7635240" y="2788920"/>
-            <a:ext cx="3474720" cy="1536192"/>
+            <a:off x="7635240" y="2718511"/>
+            <a:ext cx="3474720" cy="1328623"/>
           </a:xfrm>
           <a:prstGeom prst="roundRect">
             <a:avLst>
-              <a:gd name="adj" fmla="val 7143"/>
+              <a:gd name="adj" fmla="val 8259"/>
             </a:avLst>
           </a:prstGeom>
           <a:solidFill>
@@ -13540,7 +13756,7 @@
         </p:nvSpPr>
         <p:spPr>
           <a:xfrm>
-            <a:off x="7799832" y="2935224"/>
+            <a:off x="7799832" y="2864815"/>
             <a:ext cx="3145536" cy="256032"/>
           </a:xfrm>
           <a:prstGeom prst="rect">
@@ -13579,8 +13795,8 @@
         </p:nvSpPr>
         <p:spPr>
           <a:xfrm>
-            <a:off x="7818120" y="3300984"/>
-            <a:ext cx="3090672" cy="877824"/>
+            <a:off x="7818120" y="3230575"/>
+            <a:ext cx="3090672" cy="670255"/>
           </a:xfrm>
           <a:prstGeom prst="rect">
             <a:avLst/>
@@ -13637,12 +13853,12 @@
         </p:nvSpPr>
         <p:spPr>
           <a:xfrm>
-            <a:off x="7635240" y="4498848"/>
-            <a:ext cx="3474720" cy="1143000"/>
+            <a:off x="7635240" y="4184294"/>
+            <a:ext cx="3474720" cy="1466698"/>
           </a:xfrm>
           <a:prstGeom prst="roundRect">
             <a:avLst>
-              <a:gd name="adj" fmla="val 9600"/>
+              <a:gd name="adj" fmla="val 7481"/>
             </a:avLst>
           </a:prstGeom>
           <a:solidFill>
@@ -13664,7 +13880,7 @@
         </p:nvSpPr>
         <p:spPr>
           <a:xfrm>
-            <a:off x="7799832" y="4645152"/>
+            <a:off x="7799832" y="4330598"/>
             <a:ext cx="3145536" cy="256032"/>
           </a:xfrm>
           <a:prstGeom prst="rect">
@@ -13703,8 +13919,8 @@
         </p:nvSpPr>
         <p:spPr>
           <a:xfrm>
-            <a:off x="7799832" y="4974336"/>
-            <a:ext cx="3145536" cy="576072"/>
+            <a:off x="7799832" y="4659782"/>
+            <a:ext cx="3145536" cy="899770"/>
           </a:xfrm>
           <a:prstGeom prst="rect">
             <a:avLst/>
@@ -13730,7 +13946,7 @@
                 <a:ea typeface="Aptos" pitchFamily="34" charset="-122"/>
                 <a:cs typeface="Aptos" pitchFamily="34" charset="-120"/>
               </a:rPr>
-              <a:t>Connect the concept to data quality, model performance, validation evidence, monitoring measures, and decisions that.</a:t>
+              <a:t>Connect the concept to data quality, model performance, validation evidence, monitoring measures, and decisions that remain under human control.</a:t>
             </a:r>
             <a:endParaRPr lang="en-US" sz="1320" dirty="0"/>
           </a:p>
@@ -14065,11 +14281,11 @@
         <p:spPr>
           <a:xfrm>
             <a:off x="7635240" y="1325880"/>
-            <a:ext cx="3474720" cy="1325880"/>
+            <a:ext cx="3474720" cy="1207008"/>
           </a:xfrm>
           <a:prstGeom prst="roundRect">
             <a:avLst>
-              <a:gd name="adj" fmla="val 8276"/>
+              <a:gd name="adj" fmla="val 9091"/>
             </a:avLst>
           </a:prstGeom>
           <a:solidFill>
@@ -14131,7 +14347,7 @@
         <p:spPr>
           <a:xfrm>
             <a:off x="7799832" y="1801368"/>
-            <a:ext cx="3145536" cy="758952"/>
+            <a:ext cx="3145536" cy="640080"/>
           </a:xfrm>
           <a:prstGeom prst="rect">
             <a:avLst/>
@@ -14157,7 +14373,7 @@
                 <a:ea typeface="Aptos" pitchFamily="34" charset="-122"/>
                 <a:cs typeface="Aptos" pitchFamily="34" charset="-120"/>
               </a:rPr>
-              <a:t>Agency data governance, privacy, cybersecurity, and enterprise architecture documentation</a:t>
+              <a:t>Agency data governance, privacy, cybersecurity, and enterprise architecture.</a:t>
             </a:r>
             <a:endParaRPr lang="en-US" sz="1320" dirty="0"/>
           </a:p>
@@ -14171,12 +14387,12 @@
         </p:nvSpPr>
         <p:spPr>
           <a:xfrm>
-            <a:off x="7635240" y="2788920"/>
-            <a:ext cx="3474720" cy="1536192"/>
+            <a:off x="7635240" y="2670048"/>
+            <a:ext cx="3474720" cy="1377086"/>
           </a:xfrm>
           <a:prstGeom prst="roundRect">
             <a:avLst>
-              <a:gd name="adj" fmla="val 7143"/>
+              <a:gd name="adj" fmla="val 7968"/>
             </a:avLst>
           </a:prstGeom>
           <a:solidFill>
@@ -14198,7 +14414,7 @@
         </p:nvSpPr>
         <p:spPr>
           <a:xfrm>
-            <a:off x="7799832" y="2935224"/>
+            <a:off x="7799832" y="2816352"/>
             <a:ext cx="3145536" cy="256032"/>
           </a:xfrm>
           <a:prstGeom prst="rect">
@@ -14237,8 +14453,8 @@
         </p:nvSpPr>
         <p:spPr>
           <a:xfrm>
-            <a:off x="7818120" y="3300984"/>
-            <a:ext cx="3090672" cy="877824"/>
+            <a:off x="7818120" y="3182112"/>
+            <a:ext cx="3090672" cy="718718"/>
           </a:xfrm>
           <a:prstGeom prst="rect">
             <a:avLst/>
@@ -14278,12 +14494,12 @@
         </p:nvSpPr>
         <p:spPr>
           <a:xfrm>
-            <a:off x="7635240" y="4498848"/>
-            <a:ext cx="3474720" cy="1143000"/>
+            <a:off x="7635240" y="4184294"/>
+            <a:ext cx="3474720" cy="1466698"/>
           </a:xfrm>
           <a:prstGeom prst="roundRect">
             <a:avLst>
-              <a:gd name="adj" fmla="val 9600"/>
+              <a:gd name="adj" fmla="val 7481"/>
             </a:avLst>
           </a:prstGeom>
           <a:solidFill>
@@ -14305,7 +14521,7 @@
         </p:nvSpPr>
         <p:spPr>
           <a:xfrm>
-            <a:off x="7799832" y="4645152"/>
+            <a:off x="7799832" y="4330598"/>
             <a:ext cx="3145536" cy="256032"/>
           </a:xfrm>
           <a:prstGeom prst="rect">
@@ -14344,8 +14560,8 @@
         </p:nvSpPr>
         <p:spPr>
           <a:xfrm>
-            <a:off x="7799832" y="4974336"/>
-            <a:ext cx="3145536" cy="576072"/>
+            <a:off x="7799832" y="4659782"/>
+            <a:ext cx="3145536" cy="899770"/>
           </a:xfrm>
           <a:prstGeom prst="rect">
             <a:avLst/>
@@ -14371,7 +14587,7 @@
                 <a:ea typeface="Aptos" pitchFamily="34" charset="-122"/>
                 <a:cs typeface="Aptos" pitchFamily="34" charset="-120"/>
               </a:rPr>
-              <a:t>Connect the concept to data quality, model performance, validation evidence, monitoring measures, and decisions that.</a:t>
+              <a:t>Connect the concept to data quality, model performance, validation evidence, monitoring measures, and decisions that remain under human control.</a:t>
             </a:r>
             <a:endParaRPr lang="en-US" sz="1320" dirty="0"/>
           </a:p>
@@ -14849,7 +15065,7 @@
                 <a:ea typeface="Aptos" pitchFamily="34" charset="-122"/>
                 <a:cs typeface="Aptos" pitchFamily="34" charset="-120"/>
               </a:rPr>
-              <a:t>Use the related plays to identify decisions, participants, timing, approvals, and documentation needed for responsible.</a:t>
+              <a:t>Use the related plays to identify decisions, participants, timing, approvals, and documentation needed for responsible implementation.</a:t>
             </a:r>
             <a:endParaRPr lang="en-US" sz="1320" dirty="0"/>
           </a:p>
@@ -15468,7 +15684,7 @@
                 <a:ea typeface="Aptos" pitchFamily="34" charset="-122"/>
                 <a:cs typeface="Aptos" pitchFamily="34" charset="-120"/>
               </a:rPr>
-              <a:t>Use linked tools when your department needs a structured worksheet, template, checklist, review process, or.</a:t>
+              <a:t>Use linked tools when your department needs a structured worksheet, template, checklist, review process, or documentation artifact.</a:t>
             </a:r>
             <a:endParaRPr lang="en-US" sz="1320" dirty="0"/>
           </a:p>
@@ -15978,11 +16194,11 @@
         <p:spPr>
           <a:xfrm>
             <a:off x="7635240" y="1325880"/>
-            <a:ext cx="3474720" cy="1325880"/>
+            <a:ext cx="3474720" cy="1255471"/>
           </a:xfrm>
           <a:prstGeom prst="roundRect">
             <a:avLst>
-              <a:gd name="adj" fmla="val 8276"/>
+              <a:gd name="adj" fmla="val 8740"/>
             </a:avLst>
           </a:prstGeom>
           <a:solidFill>
@@ -16044,7 +16260,7 @@
         <p:spPr>
           <a:xfrm>
             <a:off x="7799832" y="1801368"/>
-            <a:ext cx="3145536" cy="758952"/>
+            <a:ext cx="3145536" cy="688543"/>
           </a:xfrm>
           <a:prstGeom prst="rect">
             <a:avLst/>
@@ -16084,12 +16300,12 @@
         </p:nvSpPr>
         <p:spPr>
           <a:xfrm>
-            <a:off x="7635240" y="2788920"/>
-            <a:ext cx="3474720" cy="1536192"/>
+            <a:off x="7635240" y="2718511"/>
+            <a:ext cx="3474720" cy="1328623"/>
           </a:xfrm>
           <a:prstGeom prst="roundRect">
             <a:avLst>
-              <a:gd name="adj" fmla="val 7143"/>
+              <a:gd name="adj" fmla="val 8259"/>
             </a:avLst>
           </a:prstGeom>
           <a:solidFill>
@@ -16111,7 +16327,7 @@
         </p:nvSpPr>
         <p:spPr>
           <a:xfrm>
-            <a:off x="7799832" y="2935224"/>
+            <a:off x="7799832" y="2864815"/>
             <a:ext cx="3145536" cy="256032"/>
           </a:xfrm>
           <a:prstGeom prst="rect">
@@ -16150,8 +16366,8 @@
         </p:nvSpPr>
         <p:spPr>
           <a:xfrm>
-            <a:off x="7818120" y="3300984"/>
-            <a:ext cx="3090672" cy="877824"/>
+            <a:off x="7818120" y="3230575"/>
+            <a:ext cx="3090672" cy="670255"/>
           </a:xfrm>
           <a:prstGeom prst="rect">
             <a:avLst/>
@@ -16225,12 +16441,12 @@
         </p:nvSpPr>
         <p:spPr>
           <a:xfrm>
-            <a:off x="7635240" y="4498848"/>
-            <a:ext cx="3474720" cy="1143000"/>
+            <a:off x="7635240" y="4184294"/>
+            <a:ext cx="3474720" cy="1466698"/>
           </a:xfrm>
           <a:prstGeom prst="roundRect">
             <a:avLst>
-              <a:gd name="adj" fmla="val 9600"/>
+              <a:gd name="adj" fmla="val 7481"/>
             </a:avLst>
           </a:prstGeom>
           <a:solidFill>
@@ -16252,7 +16468,7 @@
         </p:nvSpPr>
         <p:spPr>
           <a:xfrm>
-            <a:off x="7799832" y="4645152"/>
+            <a:off x="7799832" y="4330598"/>
             <a:ext cx="3145536" cy="256032"/>
           </a:xfrm>
           <a:prstGeom prst="rect">
@@ -16291,8 +16507,8 @@
         </p:nvSpPr>
         <p:spPr>
           <a:xfrm>
-            <a:off x="7799832" y="4974336"/>
-            <a:ext cx="3145536" cy="576072"/>
+            <a:off x="7799832" y="4659782"/>
+            <a:ext cx="3145536" cy="899770"/>
           </a:xfrm>
           <a:prstGeom prst="rect">
             <a:avLst/>
@@ -16318,7 +16534,7 @@
                 <a:ea typeface="Aptos" pitchFamily="34" charset="-122"/>
                 <a:cs typeface="Aptos" pitchFamily="34" charset="-120"/>
               </a:rPr>
-              <a:t>Use the assignment to test whether you can explain the concept, apply it to a realistic public health situation, and.</a:t>
+              <a:t>Use the assignment to test whether you can explain the concept, apply it to a realistic public health situation, and identify what would need review before the work moves forward.</a:t>
             </a:r>
             <a:endParaRPr lang="en-US" sz="1320" dirty="0"/>
           </a:p>
@@ -16653,11 +16869,11 @@
         <p:spPr>
           <a:xfrm>
             <a:off x="7635240" y="1325880"/>
-            <a:ext cx="3474720" cy="1325880"/>
+            <a:ext cx="3474720" cy="1255471"/>
           </a:xfrm>
           <a:prstGeom prst="roundRect">
             <a:avLst>
-              <a:gd name="adj" fmla="val 8276"/>
+              <a:gd name="adj" fmla="val 8740"/>
             </a:avLst>
           </a:prstGeom>
           <a:solidFill>
@@ -16719,7 +16935,7 @@
         <p:spPr>
           <a:xfrm>
             <a:off x="7799832" y="1801368"/>
-            <a:ext cx="3145536" cy="758952"/>
+            <a:ext cx="3145536" cy="688543"/>
           </a:xfrm>
           <a:prstGeom prst="rect">
             <a:avLst/>
@@ -16759,12 +16975,12 @@
         </p:nvSpPr>
         <p:spPr>
           <a:xfrm>
-            <a:off x="7635240" y="2788920"/>
-            <a:ext cx="3474720" cy="1536192"/>
+            <a:off x="7635240" y="2718511"/>
+            <a:ext cx="3474720" cy="1328623"/>
           </a:xfrm>
           <a:prstGeom prst="roundRect">
             <a:avLst>
-              <a:gd name="adj" fmla="val 7143"/>
+              <a:gd name="adj" fmla="val 8259"/>
             </a:avLst>
           </a:prstGeom>
           <a:solidFill>
@@ -16786,7 +17002,7 @@
         </p:nvSpPr>
         <p:spPr>
           <a:xfrm>
-            <a:off x="7799832" y="2935224"/>
+            <a:off x="7799832" y="2864815"/>
             <a:ext cx="3145536" cy="256032"/>
           </a:xfrm>
           <a:prstGeom prst="rect">
@@ -16825,8 +17041,8 @@
         </p:nvSpPr>
         <p:spPr>
           <a:xfrm>
-            <a:off x="7818120" y="3300984"/>
-            <a:ext cx="3090672" cy="877824"/>
+            <a:off x="7818120" y="3230575"/>
+            <a:ext cx="3090672" cy="670255"/>
           </a:xfrm>
           <a:prstGeom prst="rect">
             <a:avLst/>
@@ -16866,12 +17082,12 @@
         </p:nvSpPr>
         <p:spPr>
           <a:xfrm>
-            <a:off x="7635240" y="4498848"/>
-            <a:ext cx="3474720" cy="1143000"/>
+            <a:off x="7635240" y="4184294"/>
+            <a:ext cx="3474720" cy="1466698"/>
           </a:xfrm>
           <a:prstGeom prst="roundRect">
             <a:avLst>
-              <a:gd name="adj" fmla="val 9600"/>
+              <a:gd name="adj" fmla="val 7481"/>
             </a:avLst>
           </a:prstGeom>
           <a:solidFill>
@@ -16893,7 +17109,7 @@
         </p:nvSpPr>
         <p:spPr>
           <a:xfrm>
-            <a:off x="7799832" y="4645152"/>
+            <a:off x="7799832" y="4330598"/>
             <a:ext cx="3145536" cy="256032"/>
           </a:xfrm>
           <a:prstGeom prst="rect">
@@ -16932,8 +17148,8 @@
         </p:nvSpPr>
         <p:spPr>
           <a:xfrm>
-            <a:off x="7799832" y="4974336"/>
-            <a:ext cx="3145536" cy="576072"/>
+            <a:off x="7799832" y="4659782"/>
+            <a:ext cx="3145536" cy="899770"/>
           </a:xfrm>
           <a:prstGeom prst="rect">
             <a:avLst/>
@@ -16959,7 +17175,7 @@
                 <a:ea typeface="Aptos" pitchFamily="34" charset="-122"/>
                 <a:cs typeface="Aptos" pitchFamily="34" charset="-120"/>
               </a:rPr>
-              <a:t>Use the assignment to test whether you can explain the concept, apply it to a realistic public health situation, and.</a:t>
+              <a:t>Use the assignment to test whether you can explain the concept, apply it to a realistic public health situation, and identify what would need review before the work moves forward.</a:t>
             </a:r>
             <a:endParaRPr lang="en-US" sz="1320" dirty="0"/>
           </a:p>
@@ -17328,11 +17544,11 @@
         <p:spPr>
           <a:xfrm>
             <a:off x="7635240" y="1325880"/>
-            <a:ext cx="3474720" cy="1325880"/>
+            <a:ext cx="3474720" cy="1207008"/>
           </a:xfrm>
           <a:prstGeom prst="roundRect">
             <a:avLst>
-              <a:gd name="adj" fmla="val 8276"/>
+              <a:gd name="adj" fmla="val 9091"/>
             </a:avLst>
           </a:prstGeom>
           <a:solidFill>
@@ -17394,7 +17610,7 @@
         <p:spPr>
           <a:xfrm>
             <a:off x="7799832" y="1801368"/>
-            <a:ext cx="3145536" cy="758952"/>
+            <a:ext cx="3145536" cy="640080"/>
           </a:xfrm>
           <a:prstGeom prst="rect">
             <a:avLst/>
@@ -17420,7 +17636,7 @@
                 <a:ea typeface="Aptos" pitchFamily="34" charset="-122"/>
                 <a:cs typeface="Aptos" pitchFamily="34" charset="-120"/>
               </a:rPr>
-              <a:t>Artificial intelligence does not operate separately from the public health data environment.</a:t>
+              <a:t>Artificial intelligence does not operate separately from the public health data.</a:t>
             </a:r>
             <a:endParaRPr lang="en-US" sz="1320" dirty="0"/>
           </a:p>
@@ -17434,12 +17650,12 @@
         </p:nvSpPr>
         <p:spPr>
           <a:xfrm>
-            <a:off x="7635240" y="2788920"/>
-            <a:ext cx="3474720" cy="1536192"/>
+            <a:off x="7635240" y="2670048"/>
+            <a:ext cx="3474720" cy="1377086"/>
           </a:xfrm>
           <a:prstGeom prst="roundRect">
             <a:avLst>
-              <a:gd name="adj" fmla="val 7143"/>
+              <a:gd name="adj" fmla="val 7968"/>
             </a:avLst>
           </a:prstGeom>
           <a:solidFill>
@@ -17461,8 +17677,8 @@
         </p:nvSpPr>
         <p:spPr>
           <a:xfrm>
-            <a:off x="7799832" y="2935224"/>
-            <a:ext cx="3145536" cy="256032"/>
+            <a:off x="7799832" y="2798064"/>
+            <a:ext cx="3145536" cy="237744"/>
           </a:xfrm>
           <a:prstGeom prst="rect">
             <a:avLst/>
@@ -17478,7 +17694,7 @@
               <a:buNone/>
             </a:pPr>
             <a:r>
-              <a:rPr lang="en-US" sz="1300" b="1" dirty="0">
+              <a:rPr lang="en-US" sz="1250" b="1" dirty="0">
                 <a:solidFill>
                   <a:srgbClr val="0068B7"/>
                 </a:solidFill>
@@ -17486,101 +17702,317 @@
                 <a:ea typeface="Aptos" pitchFamily="34" charset="-122"/>
                 <a:cs typeface="Aptos" pitchFamily="34" charset="-120"/>
               </a:rPr>
-              <a:t>Concept checkpoints</a:t>
-            </a:r>
-            <a:endParaRPr lang="en-US" sz="1300" dirty="0"/>
-          </a:p>
-        </p:txBody>
-      </p:sp>
-      <p:sp>
-        <p:nvSpPr>
-          <p:cNvPr id="15" name="Text 13"/>
-          <p:cNvSpPr/>
-          <p:nvPr/>
-        </p:nvSpPr>
-        <p:spPr>
-          <a:xfrm>
-            <a:off x="7818120" y="3300984"/>
-            <a:ext cx="3090672" cy="877824"/>
-          </a:xfrm>
-          <a:prstGeom prst="rect">
-            <a:avLst/>
-          </a:prstGeom>
-          <a:noFill/>
-          <a:ln/>
-        </p:spPr>
-        <p:txBody>
-          <a:bodyPr wrap="square" lIns="508" tIns="508" rIns="508" bIns="508" rtlCol="0" anchor="t">
+              <a:t>Data-to-decision flow</a:t>
+            </a:r>
+            <a:endParaRPr lang="en-US" sz="1250" dirty="0"/>
+          </a:p>
+        </p:txBody>
+      </p:sp>
+      <p:sp>
+        <p:nvSpPr>
+          <p:cNvPr id="15" name="Shape 13"/>
+          <p:cNvSpPr/>
+          <p:nvPr/>
+        </p:nvSpPr>
+        <p:spPr>
+          <a:xfrm>
+            <a:off x="8763000" y="3351276"/>
+            <a:ext cx="164592" cy="0"/>
+          </a:xfrm>
+          <a:prstGeom prst="line">
+            <a:avLst/>
+          </a:prstGeom>
+          <a:noFill/>
+          <a:ln w="15240">
+            <a:solidFill>
+              <a:srgbClr val="8ABBD8"/>
+            </a:solidFill>
+            <a:prstDash val="solid"/>
+          </a:ln>
+        </p:spPr>
+      </p:sp>
+      <p:sp>
+        <p:nvSpPr>
+          <p:cNvPr id="16" name="Shape 14"/>
+          <p:cNvSpPr/>
+          <p:nvPr/>
+        </p:nvSpPr>
+        <p:spPr>
+          <a:xfrm>
+            <a:off x="7872984" y="3200400"/>
+            <a:ext cx="890016" cy="301752"/>
+          </a:xfrm>
+          <a:prstGeom prst="roundRect">
+            <a:avLst>
+              <a:gd name="adj" fmla="val 24242"/>
+            </a:avLst>
+          </a:prstGeom>
+          <a:solidFill>
+            <a:srgbClr val="0068B7"/>
+          </a:solidFill>
+          <a:ln w="12700">
+            <a:solidFill>
+              <a:srgbClr val="0068B7"/>
+            </a:solidFill>
+            <a:prstDash val="solid"/>
+          </a:ln>
+        </p:spPr>
+      </p:sp>
+      <p:sp>
+        <p:nvSpPr>
+          <p:cNvPr id="17" name="Text 15"/>
+          <p:cNvSpPr/>
+          <p:nvPr/>
+        </p:nvSpPr>
+        <p:spPr>
+          <a:xfrm>
+            <a:off x="7909560" y="3273552"/>
+            <a:ext cx="816864" cy="146304"/>
+          </a:xfrm>
+          <a:prstGeom prst="rect">
+            <a:avLst/>
+          </a:prstGeom>
+          <a:noFill/>
+          <a:ln/>
+        </p:spPr>
+        <p:txBody>
+          <a:bodyPr wrap="square" lIns="0" tIns="0" rIns="0" bIns="0" rtlCol="0" anchor="ctr">
             <a:normAutofit/>
           </a:bodyPr>
           <a:lstStyle/>
           <a:p>
-            <a:pPr indent="0" marL="0">
-              <a:buNone/>
-            </a:pPr>
-            <a:r>
-              <a:rPr lang="en-US" sz="1220" dirty="0">
-                <a:solidFill>
-                  <a:srgbClr val="17364A"/>
-                </a:solidFill>
-                <a:latin typeface="Aptos" pitchFamily="34" charset="0"/>
-                <a:ea typeface="Aptos" pitchFamily="34" charset="-122"/>
-                <a:cs typeface="Aptos" pitchFamily="34" charset="-120"/>
-              </a:rPr>
-              <a:t>Every AI-supported workflow depends on the quality, structure,.</a:t>
-            </a:r>
-            <a:endParaRPr lang="en-US" sz="1220" dirty="0"/>
-          </a:p>
-          <a:p>
-            <a:pPr indent="0" marL="0">
-              <a:buNone/>
-            </a:pPr>
-            <a:r>
-              <a:rPr lang="en-US" sz="1220" dirty="0">
-                <a:solidFill>
-                  <a:srgbClr val="17364A"/>
-                </a:solidFill>
-                <a:latin typeface="Aptos" pitchFamily="34" charset="0"/>
-                <a:ea typeface="Aptos" pitchFamily="34" charset="-122"/>
-                <a:cs typeface="Aptos" pitchFamily="34" charset="-120"/>
-              </a:rPr>
-              <a:t>A department cannot responsibly deploy AI for surveillance, case.</a:t>
-            </a:r>
-            <a:endParaRPr lang="en-US" sz="1220" dirty="0"/>
-          </a:p>
-          <a:p>
-            <a:pPr indent="0" marL="0">
-              <a:buNone/>
-            </a:pPr>
-            <a:r>
-              <a:rPr lang="en-US" sz="1220" dirty="0">
-                <a:solidFill>
-                  <a:srgbClr val="17364A"/>
-                </a:solidFill>
-                <a:latin typeface="Aptos" pitchFamily="34" charset="0"/>
-                <a:ea typeface="Aptos" pitchFamily="34" charset="-122"/>
-                <a:cs typeface="Aptos" pitchFamily="34" charset="-120"/>
-              </a:rPr>
-              <a:t>This module introduces public health data modernization as the.</a:t>
-            </a:r>
-            <a:endParaRPr lang="en-US" sz="1220" dirty="0"/>
-          </a:p>
-        </p:txBody>
-      </p:sp>
-      <p:sp>
-        <p:nvSpPr>
-          <p:cNvPr id="16" name="Shape 14"/>
-          <p:cNvSpPr/>
-          <p:nvPr/>
-        </p:nvSpPr>
-        <p:spPr>
-          <a:xfrm>
-            <a:off x="7635240" y="4498848"/>
-            <a:ext cx="3474720" cy="1143000"/>
+            <a:pPr algn="ctr" indent="0" marL="0">
+              <a:buNone/>
+            </a:pPr>
+            <a:r>
+              <a:rPr lang="en-US" sz="880" b="1" dirty="0">
+                <a:solidFill>
+                  <a:srgbClr val="FFFFFF"/>
+                </a:solidFill>
+                <a:latin typeface="Aptos" pitchFamily="34" charset="0"/>
+                <a:ea typeface="Aptos" pitchFamily="34" charset="-122"/>
+                <a:cs typeface="Aptos" pitchFamily="34" charset="-120"/>
+              </a:rPr>
+              <a:t>Data</a:t>
+            </a:r>
+            <a:endParaRPr lang="en-US" sz="880" dirty="0"/>
+          </a:p>
+        </p:txBody>
+      </p:sp>
+      <p:sp>
+        <p:nvSpPr>
+          <p:cNvPr id="18" name="Shape 16"/>
+          <p:cNvSpPr/>
+          <p:nvPr/>
+        </p:nvSpPr>
+        <p:spPr>
+          <a:xfrm>
+            <a:off x="9817608" y="3351276"/>
+            <a:ext cx="164592" cy="0"/>
+          </a:xfrm>
+          <a:prstGeom prst="line">
+            <a:avLst/>
+          </a:prstGeom>
+          <a:noFill/>
+          <a:ln w="15240">
+            <a:solidFill>
+              <a:srgbClr val="8ABBD8"/>
+            </a:solidFill>
+            <a:prstDash val="solid"/>
+          </a:ln>
+        </p:spPr>
+      </p:sp>
+      <p:sp>
+        <p:nvSpPr>
+          <p:cNvPr id="19" name="Shape 17"/>
+          <p:cNvSpPr/>
+          <p:nvPr/>
+        </p:nvSpPr>
+        <p:spPr>
+          <a:xfrm>
+            <a:off x="8927592" y="3200400"/>
+            <a:ext cx="890016" cy="301752"/>
           </a:xfrm>
           <a:prstGeom prst="roundRect">
             <a:avLst>
-              <a:gd name="adj" fmla="val 9600"/>
+              <a:gd name="adj" fmla="val 24242"/>
+            </a:avLst>
+          </a:prstGeom>
+          <a:solidFill>
+            <a:srgbClr val="2F8A28"/>
+          </a:solidFill>
+          <a:ln w="12700">
+            <a:solidFill>
+              <a:srgbClr val="2F8A28"/>
+            </a:solidFill>
+            <a:prstDash val="solid"/>
+          </a:ln>
+        </p:spPr>
+      </p:sp>
+      <p:sp>
+        <p:nvSpPr>
+          <p:cNvPr id="20" name="Text 18"/>
+          <p:cNvSpPr/>
+          <p:nvPr/>
+        </p:nvSpPr>
+        <p:spPr>
+          <a:xfrm>
+            <a:off x="8964168" y="3273552"/>
+            <a:ext cx="816864" cy="146304"/>
+          </a:xfrm>
+          <a:prstGeom prst="rect">
+            <a:avLst/>
+          </a:prstGeom>
+          <a:noFill/>
+          <a:ln/>
+        </p:spPr>
+        <p:txBody>
+          <a:bodyPr wrap="square" lIns="0" tIns="0" rIns="0" bIns="0" rtlCol="0" anchor="ctr">
+            <a:normAutofit/>
+          </a:bodyPr>
+          <a:lstStyle/>
+          <a:p>
+            <a:pPr algn="ctr" indent="0" marL="0">
+              <a:buNone/>
+            </a:pPr>
+            <a:r>
+              <a:rPr lang="en-US" sz="880" b="1" dirty="0">
+                <a:solidFill>
+                  <a:srgbClr val="FFFFFF"/>
+                </a:solidFill>
+                <a:latin typeface="Aptos" pitchFamily="34" charset="0"/>
+                <a:ea typeface="Aptos" pitchFamily="34" charset="-122"/>
+                <a:cs typeface="Aptos" pitchFamily="34" charset="-120"/>
+              </a:rPr>
+              <a:t>Analysis</a:t>
+            </a:r>
+            <a:endParaRPr lang="en-US" sz="880" dirty="0"/>
+          </a:p>
+        </p:txBody>
+      </p:sp>
+      <p:sp>
+        <p:nvSpPr>
+          <p:cNvPr id="21" name="Shape 19"/>
+          <p:cNvSpPr/>
+          <p:nvPr/>
+        </p:nvSpPr>
+        <p:spPr>
+          <a:xfrm>
+            <a:off x="9982200" y="3200400"/>
+            <a:ext cx="890016" cy="301752"/>
+          </a:xfrm>
+          <a:prstGeom prst="roundRect">
+            <a:avLst>
+              <a:gd name="adj" fmla="val 24242"/>
+            </a:avLst>
+          </a:prstGeom>
+          <a:solidFill>
+            <a:srgbClr val="6A4CA3"/>
+          </a:solidFill>
+          <a:ln w="12700">
+            <a:solidFill>
+              <a:srgbClr val="6A4CA3"/>
+            </a:solidFill>
+            <a:prstDash val="solid"/>
+          </a:ln>
+        </p:spPr>
+      </p:sp>
+      <p:sp>
+        <p:nvSpPr>
+          <p:cNvPr id="22" name="Text 20"/>
+          <p:cNvSpPr/>
+          <p:nvPr/>
+        </p:nvSpPr>
+        <p:spPr>
+          <a:xfrm>
+            <a:off x="10018776" y="3273552"/>
+            <a:ext cx="816864" cy="146304"/>
+          </a:xfrm>
+          <a:prstGeom prst="rect">
+            <a:avLst/>
+          </a:prstGeom>
+          <a:noFill/>
+          <a:ln/>
+        </p:spPr>
+        <p:txBody>
+          <a:bodyPr wrap="square" lIns="0" tIns="0" rIns="0" bIns="0" rtlCol="0" anchor="ctr">
+            <a:normAutofit/>
+          </a:bodyPr>
+          <a:lstStyle/>
+          <a:p>
+            <a:pPr algn="ctr" indent="0" marL="0">
+              <a:buNone/>
+            </a:pPr>
+            <a:r>
+              <a:rPr lang="en-US" sz="880" b="1" dirty="0">
+                <a:solidFill>
+                  <a:srgbClr val="FFFFFF"/>
+                </a:solidFill>
+                <a:latin typeface="Aptos" pitchFamily="34" charset="0"/>
+                <a:ea typeface="Aptos" pitchFamily="34" charset="-122"/>
+                <a:cs typeface="Aptos" pitchFamily="34" charset="-120"/>
+              </a:rPr>
+              <a:t>Review</a:t>
+            </a:r>
+            <a:endParaRPr lang="en-US" sz="880" dirty="0"/>
+          </a:p>
+        </p:txBody>
+      </p:sp>
+      <p:sp>
+        <p:nvSpPr>
+          <p:cNvPr id="23" name="Text 21"/>
+          <p:cNvSpPr/>
+          <p:nvPr/>
+        </p:nvSpPr>
+        <p:spPr>
+          <a:xfrm>
+            <a:off x="7854696" y="3694176"/>
+            <a:ext cx="3035808" cy="206654"/>
+          </a:xfrm>
+          <a:prstGeom prst="rect">
+            <a:avLst/>
+          </a:prstGeom>
+          <a:noFill/>
+          <a:ln/>
+        </p:spPr>
+        <p:txBody>
+          <a:bodyPr wrap="square" lIns="254" tIns="254" rIns="254" bIns="254" rtlCol="0" anchor="t">
+            <a:normAutofit/>
+          </a:bodyPr>
+          <a:lstStyle/>
+          <a:p>
+            <a:pPr indent="0" marL="0">
+              <a:buNone/>
+            </a:pPr>
+            <a:r>
+              <a:rPr lang="en-US" sz="1120" dirty="0">
+                <a:solidFill>
+                  <a:srgbClr val="17364A"/>
+                </a:solidFill>
+                <a:latin typeface="Aptos" pitchFamily="34" charset="0"/>
+                <a:ea typeface="Aptos" pitchFamily="34" charset="-122"/>
+                <a:cs typeface="Aptos" pitchFamily="34" charset="-120"/>
+              </a:rPr>
+              <a:t>The important handoff is not from data to AI; it is from analysis to accountable human review.</a:t>
+            </a:r>
+            <a:endParaRPr lang="en-US" sz="1120" dirty="0"/>
+          </a:p>
+        </p:txBody>
+      </p:sp>
+      <p:sp>
+        <p:nvSpPr>
+          <p:cNvPr id="24" name="Shape 22"/>
+          <p:cNvSpPr/>
+          <p:nvPr/>
+        </p:nvSpPr>
+        <p:spPr>
+          <a:xfrm>
+            <a:off x="7635240" y="4184294"/>
+            <a:ext cx="3474720" cy="1466698"/>
+          </a:xfrm>
+          <a:prstGeom prst="roundRect">
+            <a:avLst>
+              <a:gd name="adj" fmla="val 7481"/>
             </a:avLst>
           </a:prstGeom>
           <a:solidFill>
@@ -17596,13 +18028,13 @@
       </p:sp>
       <p:sp>
         <p:nvSpPr>
-          <p:cNvPr id="17" name="Text 15"/>
-          <p:cNvSpPr/>
-          <p:nvPr/>
-        </p:nvSpPr>
-        <p:spPr>
-          <a:xfrm>
-            <a:off x="7799832" y="4645152"/>
+          <p:cNvPr id="25" name="Text 23"/>
+          <p:cNvSpPr/>
+          <p:nvPr/>
+        </p:nvSpPr>
+        <p:spPr>
+          <a:xfrm>
+            <a:off x="7799832" y="4330598"/>
             <a:ext cx="3145536" cy="256032"/>
           </a:xfrm>
           <a:prstGeom prst="rect">
@@ -17635,14 +18067,14 @@
       </p:sp>
       <p:sp>
         <p:nvSpPr>
-          <p:cNvPr id="18" name="Text 16"/>
-          <p:cNvSpPr/>
-          <p:nvPr/>
-        </p:nvSpPr>
-        <p:spPr>
-          <a:xfrm>
-            <a:off x="7799832" y="4974336"/>
-            <a:ext cx="3145536" cy="576072"/>
+          <p:cNvPr id="26" name="Text 24"/>
+          <p:cNvSpPr/>
+          <p:nvPr/>
+        </p:nvSpPr>
+        <p:spPr>
+          <a:xfrm>
+            <a:off x="7799832" y="4659782"/>
+            <a:ext cx="3145536" cy="899770"/>
           </a:xfrm>
           <a:prstGeom prst="rect">
             <a:avLst/>
@@ -17668,7 +18100,7 @@
                 <a:ea typeface="Aptos" pitchFamily="34" charset="-122"/>
                 <a:cs typeface="Aptos" pitchFamily="34" charset="-120"/>
               </a:rPr>
-              <a:t>Connect the concept to data quality, model performance, validation evidence, monitoring measures, and decisions that.</a:t>
+              <a:t>Connect the concept to data quality, model performance, validation evidence, monitoring measures, and decisions that remain under human control.</a:t>
             </a:r>
             <a:endParaRPr lang="en-US" sz="1320" dirty="0"/>
           </a:p>
@@ -18037,11 +18469,11 @@
         <p:spPr>
           <a:xfrm>
             <a:off x="7635240" y="1325880"/>
-            <a:ext cx="3474720" cy="1325880"/>
+            <a:ext cx="3474720" cy="1255471"/>
           </a:xfrm>
           <a:prstGeom prst="roundRect">
             <a:avLst>
-              <a:gd name="adj" fmla="val 8276"/>
+              <a:gd name="adj" fmla="val 8740"/>
             </a:avLst>
           </a:prstGeom>
           <a:solidFill>
@@ -18103,7 +18535,7 @@
         <p:spPr>
           <a:xfrm>
             <a:off x="7799832" y="1801368"/>
-            <a:ext cx="3145536" cy="758952"/>
+            <a:ext cx="3145536" cy="688543"/>
           </a:xfrm>
           <a:prstGeom prst="rect">
             <a:avLst/>
@@ -18143,12 +18575,12 @@
         </p:nvSpPr>
         <p:spPr>
           <a:xfrm>
-            <a:off x="7635240" y="2788920"/>
-            <a:ext cx="3474720" cy="1536192"/>
+            <a:off x="7635240" y="2718511"/>
+            <a:ext cx="3474720" cy="1328623"/>
           </a:xfrm>
           <a:prstGeom prst="roundRect">
             <a:avLst>
-              <a:gd name="adj" fmla="val 7143"/>
+              <a:gd name="adj" fmla="val 8259"/>
             </a:avLst>
           </a:prstGeom>
           <a:solidFill>
@@ -18170,8 +18602,8 @@
         </p:nvSpPr>
         <p:spPr>
           <a:xfrm>
-            <a:off x="7799832" y="2935224"/>
-            <a:ext cx="3145536" cy="256032"/>
+            <a:off x="7799832" y="2846527"/>
+            <a:ext cx="3145536" cy="237744"/>
           </a:xfrm>
           <a:prstGeom prst="rect">
             <a:avLst/>
@@ -18187,7 +18619,7 @@
               <a:buNone/>
             </a:pPr>
             <a:r>
-              <a:rPr lang="en-US" sz="1300" b="1" dirty="0">
+              <a:rPr lang="en-US" sz="1250" b="1" dirty="0">
                 <a:solidFill>
                   <a:srgbClr val="0068B7"/>
                 </a:solidFill>
@@ -18195,101 +18627,317 @@
                 <a:ea typeface="Aptos" pitchFamily="34" charset="-122"/>
                 <a:cs typeface="Aptos" pitchFamily="34" charset="-120"/>
               </a:rPr>
-              <a:t>Concept checkpoints</a:t>
-            </a:r>
-            <a:endParaRPr lang="en-US" sz="1300" dirty="0"/>
-          </a:p>
-        </p:txBody>
-      </p:sp>
-      <p:sp>
-        <p:nvSpPr>
-          <p:cNvPr id="15" name="Text 13"/>
-          <p:cNvSpPr/>
-          <p:nvPr/>
-        </p:nvSpPr>
-        <p:spPr>
-          <a:xfrm>
-            <a:off x="7818120" y="3300984"/>
-            <a:ext cx="3090672" cy="877824"/>
-          </a:xfrm>
-          <a:prstGeom prst="rect">
-            <a:avLst/>
-          </a:prstGeom>
-          <a:noFill/>
-          <a:ln/>
-        </p:spPr>
-        <p:txBody>
-          <a:bodyPr wrap="square" lIns="508" tIns="508" rIns="508" bIns="508" rtlCol="0" anchor="t">
+              <a:t>Data-to-decision flow</a:t>
+            </a:r>
+            <a:endParaRPr lang="en-US" sz="1250" dirty="0"/>
+          </a:p>
+        </p:txBody>
+      </p:sp>
+      <p:sp>
+        <p:nvSpPr>
+          <p:cNvPr id="15" name="Shape 13"/>
+          <p:cNvSpPr/>
+          <p:nvPr/>
+        </p:nvSpPr>
+        <p:spPr>
+          <a:xfrm>
+            <a:off x="8763000" y="3399739"/>
+            <a:ext cx="164592" cy="0"/>
+          </a:xfrm>
+          <a:prstGeom prst="line">
+            <a:avLst/>
+          </a:prstGeom>
+          <a:noFill/>
+          <a:ln w="15240">
+            <a:solidFill>
+              <a:srgbClr val="8ABBD8"/>
+            </a:solidFill>
+            <a:prstDash val="solid"/>
+          </a:ln>
+        </p:spPr>
+      </p:sp>
+      <p:sp>
+        <p:nvSpPr>
+          <p:cNvPr id="16" name="Shape 14"/>
+          <p:cNvSpPr/>
+          <p:nvPr/>
+        </p:nvSpPr>
+        <p:spPr>
+          <a:xfrm>
+            <a:off x="7872984" y="3248863"/>
+            <a:ext cx="890016" cy="301752"/>
+          </a:xfrm>
+          <a:prstGeom prst="roundRect">
+            <a:avLst>
+              <a:gd name="adj" fmla="val 24242"/>
+            </a:avLst>
+          </a:prstGeom>
+          <a:solidFill>
+            <a:srgbClr val="0068B7"/>
+          </a:solidFill>
+          <a:ln w="12700">
+            <a:solidFill>
+              <a:srgbClr val="0068B7"/>
+            </a:solidFill>
+            <a:prstDash val="solid"/>
+          </a:ln>
+        </p:spPr>
+      </p:sp>
+      <p:sp>
+        <p:nvSpPr>
+          <p:cNvPr id="17" name="Text 15"/>
+          <p:cNvSpPr/>
+          <p:nvPr/>
+        </p:nvSpPr>
+        <p:spPr>
+          <a:xfrm>
+            <a:off x="7909560" y="3322015"/>
+            <a:ext cx="816864" cy="146304"/>
+          </a:xfrm>
+          <a:prstGeom prst="rect">
+            <a:avLst/>
+          </a:prstGeom>
+          <a:noFill/>
+          <a:ln/>
+        </p:spPr>
+        <p:txBody>
+          <a:bodyPr wrap="square" lIns="0" tIns="0" rIns="0" bIns="0" rtlCol="0" anchor="ctr">
             <a:normAutofit/>
           </a:bodyPr>
           <a:lstStyle/>
           <a:p>
-            <a:pPr indent="0" marL="0">
-              <a:buNone/>
-            </a:pPr>
-            <a:r>
-              <a:rPr lang="en-US" sz="1220" dirty="0">
-                <a:solidFill>
-                  <a:srgbClr val="17364A"/>
-                </a:solidFill>
-                <a:latin typeface="Aptos" pitchFamily="34" charset="0"/>
-                <a:ea typeface="Aptos" pitchFamily="34" charset="-122"/>
-                <a:cs typeface="Aptos" pitchFamily="34" charset="-120"/>
-              </a:rPr>
-              <a:t>Public health agencies often feel pressure to adopt AI tools.</a:t>
-            </a:r>
-            <a:endParaRPr lang="en-US" sz="1220" dirty="0"/>
-          </a:p>
-          <a:p>
-            <a:pPr indent="0" marL="0">
-              <a:buNone/>
-            </a:pPr>
-            <a:r>
-              <a:rPr lang="en-US" sz="1220" dirty="0">
-                <a:solidFill>
-                  <a:srgbClr val="17364A"/>
-                </a:solidFill>
-                <a:latin typeface="Aptos" pitchFamily="34" charset="0"/>
-                <a:ea typeface="Aptos" pitchFamily="34" charset="-122"/>
-                <a:cs typeface="Aptos" pitchFamily="34" charset="-120"/>
-              </a:rPr>
-              <a:t>AI tools may appear to offer immediate relief by summarizing.</a:t>
-            </a:r>
-            <a:endParaRPr lang="en-US" sz="1220" dirty="0"/>
-          </a:p>
-          <a:p>
-            <a:pPr indent="0" marL="0">
-              <a:buNone/>
-            </a:pPr>
-            <a:r>
-              <a:rPr lang="en-US" sz="1220" dirty="0">
-                <a:solidFill>
-                  <a:srgbClr val="17364A"/>
-                </a:solidFill>
-                <a:latin typeface="Aptos" pitchFamily="34" charset="0"/>
-                <a:ea typeface="Aptos" pitchFamily="34" charset="-122"/>
-                <a:cs typeface="Aptos" pitchFamily="34" charset="-120"/>
-              </a:rPr>
-              <a:t>A model that summarizes case reports may produce incomplete.</a:t>
-            </a:r>
-            <a:endParaRPr lang="en-US" sz="1220" dirty="0"/>
-          </a:p>
-        </p:txBody>
-      </p:sp>
-      <p:sp>
-        <p:nvSpPr>
-          <p:cNvPr id="16" name="Shape 14"/>
-          <p:cNvSpPr/>
-          <p:nvPr/>
-        </p:nvSpPr>
-        <p:spPr>
-          <a:xfrm>
-            <a:off x="7635240" y="4498848"/>
-            <a:ext cx="3474720" cy="1143000"/>
+            <a:pPr algn="ctr" indent="0" marL="0">
+              <a:buNone/>
+            </a:pPr>
+            <a:r>
+              <a:rPr lang="en-US" sz="880" b="1" dirty="0">
+                <a:solidFill>
+                  <a:srgbClr val="FFFFFF"/>
+                </a:solidFill>
+                <a:latin typeface="Aptos" pitchFamily="34" charset="0"/>
+                <a:ea typeface="Aptos" pitchFamily="34" charset="-122"/>
+                <a:cs typeface="Aptos" pitchFamily="34" charset="-120"/>
+              </a:rPr>
+              <a:t>Data</a:t>
+            </a:r>
+            <a:endParaRPr lang="en-US" sz="880" dirty="0"/>
+          </a:p>
+        </p:txBody>
+      </p:sp>
+      <p:sp>
+        <p:nvSpPr>
+          <p:cNvPr id="18" name="Shape 16"/>
+          <p:cNvSpPr/>
+          <p:nvPr/>
+        </p:nvSpPr>
+        <p:spPr>
+          <a:xfrm>
+            <a:off x="9817608" y="3399739"/>
+            <a:ext cx="164592" cy="0"/>
+          </a:xfrm>
+          <a:prstGeom prst="line">
+            <a:avLst/>
+          </a:prstGeom>
+          <a:noFill/>
+          <a:ln w="15240">
+            <a:solidFill>
+              <a:srgbClr val="8ABBD8"/>
+            </a:solidFill>
+            <a:prstDash val="solid"/>
+          </a:ln>
+        </p:spPr>
+      </p:sp>
+      <p:sp>
+        <p:nvSpPr>
+          <p:cNvPr id="19" name="Shape 17"/>
+          <p:cNvSpPr/>
+          <p:nvPr/>
+        </p:nvSpPr>
+        <p:spPr>
+          <a:xfrm>
+            <a:off x="8927592" y="3248863"/>
+            <a:ext cx="890016" cy="301752"/>
           </a:xfrm>
           <a:prstGeom prst="roundRect">
             <a:avLst>
-              <a:gd name="adj" fmla="val 9600"/>
+              <a:gd name="adj" fmla="val 24242"/>
+            </a:avLst>
+          </a:prstGeom>
+          <a:solidFill>
+            <a:srgbClr val="2F8A28"/>
+          </a:solidFill>
+          <a:ln w="12700">
+            <a:solidFill>
+              <a:srgbClr val="2F8A28"/>
+            </a:solidFill>
+            <a:prstDash val="solid"/>
+          </a:ln>
+        </p:spPr>
+      </p:sp>
+      <p:sp>
+        <p:nvSpPr>
+          <p:cNvPr id="20" name="Text 18"/>
+          <p:cNvSpPr/>
+          <p:nvPr/>
+        </p:nvSpPr>
+        <p:spPr>
+          <a:xfrm>
+            <a:off x="8964168" y="3322015"/>
+            <a:ext cx="816864" cy="146304"/>
+          </a:xfrm>
+          <a:prstGeom prst="rect">
+            <a:avLst/>
+          </a:prstGeom>
+          <a:noFill/>
+          <a:ln/>
+        </p:spPr>
+        <p:txBody>
+          <a:bodyPr wrap="square" lIns="0" tIns="0" rIns="0" bIns="0" rtlCol="0" anchor="ctr">
+            <a:normAutofit/>
+          </a:bodyPr>
+          <a:lstStyle/>
+          <a:p>
+            <a:pPr algn="ctr" indent="0" marL="0">
+              <a:buNone/>
+            </a:pPr>
+            <a:r>
+              <a:rPr lang="en-US" sz="880" b="1" dirty="0">
+                <a:solidFill>
+                  <a:srgbClr val="FFFFFF"/>
+                </a:solidFill>
+                <a:latin typeface="Aptos" pitchFamily="34" charset="0"/>
+                <a:ea typeface="Aptos" pitchFamily="34" charset="-122"/>
+                <a:cs typeface="Aptos" pitchFamily="34" charset="-120"/>
+              </a:rPr>
+              <a:t>Analysis</a:t>
+            </a:r>
+            <a:endParaRPr lang="en-US" sz="880" dirty="0"/>
+          </a:p>
+        </p:txBody>
+      </p:sp>
+      <p:sp>
+        <p:nvSpPr>
+          <p:cNvPr id="21" name="Shape 19"/>
+          <p:cNvSpPr/>
+          <p:nvPr/>
+        </p:nvSpPr>
+        <p:spPr>
+          <a:xfrm>
+            <a:off x="9982200" y="3248863"/>
+            <a:ext cx="890016" cy="301752"/>
+          </a:xfrm>
+          <a:prstGeom prst="roundRect">
+            <a:avLst>
+              <a:gd name="adj" fmla="val 24242"/>
+            </a:avLst>
+          </a:prstGeom>
+          <a:solidFill>
+            <a:srgbClr val="6A4CA3"/>
+          </a:solidFill>
+          <a:ln w="12700">
+            <a:solidFill>
+              <a:srgbClr val="6A4CA3"/>
+            </a:solidFill>
+            <a:prstDash val="solid"/>
+          </a:ln>
+        </p:spPr>
+      </p:sp>
+      <p:sp>
+        <p:nvSpPr>
+          <p:cNvPr id="22" name="Text 20"/>
+          <p:cNvSpPr/>
+          <p:nvPr/>
+        </p:nvSpPr>
+        <p:spPr>
+          <a:xfrm>
+            <a:off x="10018776" y="3322015"/>
+            <a:ext cx="816864" cy="146304"/>
+          </a:xfrm>
+          <a:prstGeom prst="rect">
+            <a:avLst/>
+          </a:prstGeom>
+          <a:noFill/>
+          <a:ln/>
+        </p:spPr>
+        <p:txBody>
+          <a:bodyPr wrap="square" lIns="0" tIns="0" rIns="0" bIns="0" rtlCol="0" anchor="ctr">
+            <a:normAutofit/>
+          </a:bodyPr>
+          <a:lstStyle/>
+          <a:p>
+            <a:pPr algn="ctr" indent="0" marL="0">
+              <a:buNone/>
+            </a:pPr>
+            <a:r>
+              <a:rPr lang="en-US" sz="880" b="1" dirty="0">
+                <a:solidFill>
+                  <a:srgbClr val="FFFFFF"/>
+                </a:solidFill>
+                <a:latin typeface="Aptos" pitchFamily="34" charset="0"/>
+                <a:ea typeface="Aptos" pitchFamily="34" charset="-122"/>
+                <a:cs typeface="Aptos" pitchFamily="34" charset="-120"/>
+              </a:rPr>
+              <a:t>Review</a:t>
+            </a:r>
+            <a:endParaRPr lang="en-US" sz="880" dirty="0"/>
+          </a:p>
+        </p:txBody>
+      </p:sp>
+      <p:sp>
+        <p:nvSpPr>
+          <p:cNvPr id="23" name="Text 21"/>
+          <p:cNvSpPr/>
+          <p:nvPr/>
+        </p:nvSpPr>
+        <p:spPr>
+          <a:xfrm>
+            <a:off x="7854696" y="3742639"/>
+            <a:ext cx="3035808" cy="158191"/>
+          </a:xfrm>
+          <a:prstGeom prst="rect">
+            <a:avLst/>
+          </a:prstGeom>
+          <a:noFill/>
+          <a:ln/>
+        </p:spPr>
+        <p:txBody>
+          <a:bodyPr wrap="square" lIns="254" tIns="254" rIns="254" bIns="254" rtlCol="0" anchor="t">
+            <a:normAutofit/>
+          </a:bodyPr>
+          <a:lstStyle/>
+          <a:p>
+            <a:pPr indent="0" marL="0">
+              <a:buNone/>
+            </a:pPr>
+            <a:r>
+              <a:rPr lang="en-US" sz="1120" dirty="0">
+                <a:solidFill>
+                  <a:srgbClr val="17364A"/>
+                </a:solidFill>
+                <a:latin typeface="Aptos" pitchFamily="34" charset="0"/>
+                <a:ea typeface="Aptos" pitchFamily="34" charset="-122"/>
+                <a:cs typeface="Aptos" pitchFamily="34" charset="-120"/>
+              </a:rPr>
+              <a:t>The important handoff is not from data to AI; it is from analysis to accountable human review.</a:t>
+            </a:r>
+            <a:endParaRPr lang="en-US" sz="1120" dirty="0"/>
+          </a:p>
+        </p:txBody>
+      </p:sp>
+      <p:sp>
+        <p:nvSpPr>
+          <p:cNvPr id="24" name="Shape 22"/>
+          <p:cNvSpPr/>
+          <p:nvPr/>
+        </p:nvSpPr>
+        <p:spPr>
+          <a:xfrm>
+            <a:off x="7635240" y="4184294"/>
+            <a:ext cx="3474720" cy="1466698"/>
+          </a:xfrm>
+          <a:prstGeom prst="roundRect">
+            <a:avLst>
+              <a:gd name="adj" fmla="val 7481"/>
             </a:avLst>
           </a:prstGeom>
           <a:solidFill>
@@ -18305,13 +18953,13 @@
       </p:sp>
       <p:sp>
         <p:nvSpPr>
-          <p:cNvPr id="17" name="Text 15"/>
-          <p:cNvSpPr/>
-          <p:nvPr/>
-        </p:nvSpPr>
-        <p:spPr>
-          <a:xfrm>
-            <a:off x="7799832" y="4645152"/>
+          <p:cNvPr id="25" name="Text 23"/>
+          <p:cNvSpPr/>
+          <p:nvPr/>
+        </p:nvSpPr>
+        <p:spPr>
+          <a:xfrm>
+            <a:off x="7799832" y="4330598"/>
             <a:ext cx="3145536" cy="256032"/>
           </a:xfrm>
           <a:prstGeom prst="rect">
@@ -18344,14 +18992,14 @@
       </p:sp>
       <p:sp>
         <p:nvSpPr>
-          <p:cNvPr id="18" name="Text 16"/>
-          <p:cNvSpPr/>
-          <p:nvPr/>
-        </p:nvSpPr>
-        <p:spPr>
-          <a:xfrm>
-            <a:off x="7799832" y="4974336"/>
-            <a:ext cx="3145536" cy="576072"/>
+          <p:cNvPr id="26" name="Text 24"/>
+          <p:cNvSpPr/>
+          <p:nvPr/>
+        </p:nvSpPr>
+        <p:spPr>
+          <a:xfrm>
+            <a:off x="7799832" y="4659782"/>
+            <a:ext cx="3145536" cy="899770"/>
           </a:xfrm>
           <a:prstGeom prst="rect">
             <a:avLst/>
@@ -18377,7 +19025,7 @@
                 <a:ea typeface="Aptos" pitchFamily="34" charset="-122"/>
                 <a:cs typeface="Aptos" pitchFamily="34" charset="-120"/>
               </a:rPr>
-              <a:t>Connect the concept to data quality, model performance, validation evidence, monitoring measures, and decisions that.</a:t>
+              <a:t>Connect the concept to data quality, model performance, validation evidence, monitoring measures, and decisions that remain under human control.</a:t>
             </a:r>
             <a:endParaRPr lang="en-US" sz="1320" dirty="0"/>
           </a:p>
@@ -18746,11 +19394,11 @@
         <p:spPr>
           <a:xfrm>
             <a:off x="7635240" y="1325880"/>
-            <a:ext cx="3474720" cy="1325880"/>
+            <a:ext cx="3474720" cy="1207008"/>
           </a:xfrm>
           <a:prstGeom prst="roundRect">
             <a:avLst>
-              <a:gd name="adj" fmla="val 8276"/>
+              <a:gd name="adj" fmla="val 9091"/>
             </a:avLst>
           </a:prstGeom>
           <a:solidFill>
@@ -18812,7 +19460,7 @@
         <p:spPr>
           <a:xfrm>
             <a:off x="7799832" y="1801368"/>
-            <a:ext cx="3145536" cy="758952"/>
+            <a:ext cx="3145536" cy="640080"/>
           </a:xfrm>
           <a:prstGeom prst="rect">
             <a:avLst/>
@@ -18852,12 +19500,12 @@
         </p:nvSpPr>
         <p:spPr>
           <a:xfrm>
-            <a:off x="7635240" y="2788920"/>
-            <a:ext cx="3474720" cy="1536192"/>
+            <a:off x="7635240" y="2670048"/>
+            <a:ext cx="3474720" cy="1377086"/>
           </a:xfrm>
           <a:prstGeom prst="roundRect">
             <a:avLst>
-              <a:gd name="adj" fmla="val 7143"/>
+              <a:gd name="adj" fmla="val 7968"/>
             </a:avLst>
           </a:prstGeom>
           <a:solidFill>
@@ -18879,7 +19527,7 @@
         </p:nvSpPr>
         <p:spPr>
           <a:xfrm>
-            <a:off x="7799832" y="2935224"/>
+            <a:off x="7799832" y="2816352"/>
             <a:ext cx="3145536" cy="256032"/>
           </a:xfrm>
           <a:prstGeom prst="rect">
@@ -18918,8 +19566,8 @@
         </p:nvSpPr>
         <p:spPr>
           <a:xfrm>
-            <a:off x="7818120" y="3300984"/>
-            <a:ext cx="3090672" cy="877824"/>
+            <a:off x="7818120" y="3182112"/>
+            <a:ext cx="3090672" cy="718718"/>
           </a:xfrm>
           <a:prstGeom prst="rect">
             <a:avLst/>
@@ -18993,12 +19641,12 @@
         </p:nvSpPr>
         <p:spPr>
           <a:xfrm>
-            <a:off x="7635240" y="4498848"/>
-            <a:ext cx="3474720" cy="1143000"/>
+            <a:off x="7635240" y="4184294"/>
+            <a:ext cx="3474720" cy="1466698"/>
           </a:xfrm>
           <a:prstGeom prst="roundRect">
             <a:avLst>
-              <a:gd name="adj" fmla="val 9600"/>
+              <a:gd name="adj" fmla="val 7481"/>
             </a:avLst>
           </a:prstGeom>
           <a:solidFill>
@@ -19020,7 +19668,7 @@
         </p:nvSpPr>
         <p:spPr>
           <a:xfrm>
-            <a:off x="7799832" y="4645152"/>
+            <a:off x="7799832" y="4330598"/>
             <a:ext cx="3145536" cy="256032"/>
           </a:xfrm>
           <a:prstGeom prst="rect">
@@ -19059,8 +19707,8 @@
         </p:nvSpPr>
         <p:spPr>
           <a:xfrm>
-            <a:off x="7799832" y="4974336"/>
-            <a:ext cx="3145536" cy="576072"/>
+            <a:off x="7799832" y="4659782"/>
+            <a:ext cx="3145536" cy="899770"/>
           </a:xfrm>
           <a:prstGeom prst="rect">
             <a:avLst/>
@@ -19086,7 +19734,7 @@
                 <a:ea typeface="Aptos" pitchFamily="34" charset="-122"/>
                 <a:cs typeface="Aptos" pitchFamily="34" charset="-120"/>
               </a:rPr>
-              <a:t>Connect the concept to data quality, model performance, validation evidence, monitoring measures, and decisions that.</a:t>
+              <a:t>Connect the concept to data quality, model performance, validation evidence, monitoring measures, and decisions that remain under human control.</a:t>
             </a:r>
             <a:endParaRPr lang="en-US" sz="1320" dirty="0"/>
           </a:p>

--- a/downloads/presentations/modules/arc-200.pptx
+++ b/downloads/presentations/modules/arc-200.pptx
@@ -3529,8 +3529,8 @@
         </p:nvSpPr>
         <p:spPr>
           <a:xfrm>
-            <a:off x="868680" y="1508760"/>
-            <a:ext cx="6309360" cy="4160520"/>
+            <a:off x="822960" y="1463040"/>
+            <a:ext cx="6565392" cy="4343400"/>
           </a:xfrm>
           <a:prstGeom prst="rect">
             <a:avLst/>
@@ -3548,7 +3548,7 @@
               <a:buNone/>
             </a:pPr>
             <a:r>
-              <a:rPr lang="en-US" sz="2100" dirty="0">
+              <a:rPr lang="en-US" sz="1920" dirty="0">
                 <a:solidFill>
                   <a:srgbClr val="003A63"/>
                 </a:solidFill>
@@ -3558,14 +3558,14 @@
               </a:rPr>
               <a:t>• System of record.</a:t>
             </a:r>
-            <a:endParaRPr lang="en-US" sz="2100" dirty="0"/>
-          </a:p>
-          <a:p>
-            <a:pPr indent="0" marL="0">
-              <a:buNone/>
-            </a:pPr>
-            <a:r>
-              <a:rPr lang="en-US" sz="2100" dirty="0">
+            <a:endParaRPr lang="en-US" sz="1920" dirty="0"/>
+          </a:p>
+          <a:p>
+            <a:pPr indent="0" marL="0">
+              <a:buNone/>
+            </a:pPr>
+            <a:r>
+              <a:rPr lang="en-US" sz="1920" dirty="0">
                 <a:solidFill>
                   <a:srgbClr val="003A63"/>
                 </a:solidFill>
@@ -3573,16 +3573,16 @@
                 <a:ea typeface="Aptos" pitchFamily="34" charset="-122"/>
                 <a:cs typeface="Aptos" pitchFamily="34" charset="-120"/>
               </a:rPr>
-              <a:t>• A system of record is the official system or process where public health information,.</a:t>
-            </a:r>
-            <a:endParaRPr lang="en-US" sz="2100" dirty="0"/>
-          </a:p>
-          <a:p>
-            <a:pPr indent="0" marL="0">
-              <a:buNone/>
-            </a:pPr>
-            <a:r>
-              <a:rPr lang="en-US" sz="2100" dirty="0">
+              <a:t>• A system of record is the official system or process where public health.</a:t>
+            </a:r>
+            <a:endParaRPr lang="en-US" sz="1920" dirty="0"/>
+          </a:p>
+          <a:p>
+            <a:pPr indent="0" marL="0">
+              <a:buNone/>
+            </a:pPr>
+            <a:r>
+              <a:rPr lang="en-US" sz="1920" dirty="0">
                 <a:solidFill>
                   <a:srgbClr val="003A63"/>
                 </a:solidFill>
@@ -3590,9 +3590,9 @@
                 <a:ea typeface="Aptos" pitchFamily="34" charset="-122"/>
                 <a:cs typeface="Aptos" pitchFamily="34" charset="-120"/>
               </a:rPr>
-              <a:t>• AI outputs should not automatically become the official record unless the agency has explicitly.</a:t>
-            </a:r>
-            <a:endParaRPr lang="en-US" sz="2100" dirty="0"/>
+              <a:t>• AI outputs should not automatically become the official record unless the.</a:t>
+            </a:r>
+            <a:endParaRPr lang="en-US" sz="1920" dirty="0"/>
           </a:p>
         </p:txBody>
       </p:sp>
@@ -3604,12 +3604,12 @@
         </p:nvSpPr>
         <p:spPr>
           <a:xfrm>
-            <a:off x="7635240" y="1325880"/>
-            <a:ext cx="3474720" cy="1207008"/>
+            <a:off x="7543800" y="1325880"/>
+            <a:ext cx="3611880" cy="1261872"/>
           </a:xfrm>
           <a:prstGeom prst="roundRect">
             <a:avLst>
-              <a:gd name="adj" fmla="val 9091"/>
+              <a:gd name="adj" fmla="val 8696"/>
             </a:avLst>
           </a:prstGeom>
           <a:solidFill>
@@ -3631,8 +3631,8 @@
         </p:nvSpPr>
         <p:spPr>
           <a:xfrm>
-            <a:off x="7799832" y="1472184"/>
-            <a:ext cx="3145536" cy="256032"/>
+            <a:off x="7708392" y="1453896"/>
+            <a:ext cx="3282696" cy="228600"/>
           </a:xfrm>
           <a:prstGeom prst="rect">
             <a:avLst/>
@@ -3648,7 +3648,7 @@
               <a:buNone/>
             </a:pPr>
             <a:r>
-              <a:rPr lang="en-US" sz="1300" b="1" dirty="0">
+              <a:rPr lang="en-US" sz="1220" b="1" dirty="0">
                 <a:solidFill>
                   <a:srgbClr val="0068B7"/>
                 </a:solidFill>
@@ -3658,7 +3658,7 @@
               </a:rPr>
               <a:t>Data decision</a:t>
             </a:r>
-            <a:endParaRPr lang="en-US" sz="1300" dirty="0"/>
+            <a:endParaRPr lang="en-US" sz="1220" dirty="0"/>
           </a:p>
         </p:txBody>
       </p:sp>
@@ -3670,8 +3670,8 @@
         </p:nvSpPr>
         <p:spPr>
           <a:xfrm>
-            <a:off x="7799832" y="1801368"/>
-            <a:ext cx="3145536" cy="640080"/>
+            <a:off x="7708392" y="1764792"/>
+            <a:ext cx="3282696" cy="749808"/>
           </a:xfrm>
           <a:prstGeom prst="rect">
             <a:avLst/>
@@ -3689,7 +3689,7 @@
               <a:buNone/>
             </a:pPr>
             <a:r>
-              <a:rPr lang="en-US" sz="1320" dirty="0">
+              <a:rPr lang="en-US" sz="1220" dirty="0">
                 <a:solidFill>
                   <a:srgbClr val="17364A"/>
                 </a:solidFill>
@@ -3699,7 +3699,7 @@
               </a:rPr>
               <a:t>System of record.</a:t>
             </a:r>
-            <a:endParaRPr lang="en-US" sz="1320" dirty="0"/>
+            <a:endParaRPr lang="en-US" sz="1220" dirty="0"/>
           </a:p>
         </p:txBody>
       </p:sp>
@@ -3711,12 +3711,12 @@
         </p:nvSpPr>
         <p:spPr>
           <a:xfrm>
-            <a:off x="7635240" y="2670048"/>
-            <a:ext cx="3474720" cy="1377086"/>
+            <a:off x="7543800" y="2724912"/>
+            <a:ext cx="3611880" cy="1527048"/>
           </a:xfrm>
           <a:prstGeom prst="roundRect">
             <a:avLst>
-              <a:gd name="adj" fmla="val 7968"/>
+              <a:gd name="adj" fmla="val 7186"/>
             </a:avLst>
           </a:prstGeom>
           <a:solidFill>
@@ -3738,8 +3738,8 @@
         </p:nvSpPr>
         <p:spPr>
           <a:xfrm>
-            <a:off x="7799832" y="2816352"/>
-            <a:ext cx="3145536" cy="256032"/>
+            <a:off x="7708392" y="2852928"/>
+            <a:ext cx="3282696" cy="228600"/>
           </a:xfrm>
           <a:prstGeom prst="rect">
             <a:avLst/>
@@ -3755,7 +3755,7 @@
               <a:buNone/>
             </a:pPr>
             <a:r>
-              <a:rPr lang="en-US" sz="1300" b="1" dirty="0">
+              <a:rPr lang="en-US" sz="1220" b="1" dirty="0">
                 <a:solidFill>
                   <a:srgbClr val="0068B7"/>
                 </a:solidFill>
@@ -3765,7 +3765,7 @@
               </a:rPr>
               <a:t>Concept checkpoints</a:t>
             </a:r>
-            <a:endParaRPr lang="en-US" sz="1300" dirty="0"/>
+            <a:endParaRPr lang="en-US" sz="1220" dirty="0"/>
           </a:p>
         </p:txBody>
       </p:sp>
@@ -3777,8 +3777,8 @@
         </p:nvSpPr>
         <p:spPr>
           <a:xfrm>
-            <a:off x="7818120" y="3182112"/>
-            <a:ext cx="3090672" cy="718718"/>
+            <a:off x="7726680" y="3182112"/>
+            <a:ext cx="3227832" cy="960120"/>
           </a:xfrm>
           <a:prstGeom prst="rect">
             <a:avLst/>
@@ -3796,7 +3796,7 @@
               <a:buNone/>
             </a:pPr>
             <a:r>
-              <a:rPr lang="en-US" sz="1220" dirty="0">
+              <a:rPr lang="en-US" sz="1140" dirty="0">
                 <a:solidFill>
                   <a:srgbClr val="17364A"/>
                 </a:solidFill>
@@ -3804,16 +3804,16 @@
                 <a:ea typeface="Aptos" pitchFamily="34" charset="-122"/>
                 <a:cs typeface="Aptos" pitchFamily="34" charset="-120"/>
               </a:rPr>
-              <a:t>A system of record is the official system or process where public.</a:t>
-            </a:r>
-            <a:endParaRPr lang="en-US" sz="1220" dirty="0"/>
-          </a:p>
-          <a:p>
-            <a:pPr indent="0" marL="0">
-              <a:buNone/>
-            </a:pPr>
-            <a:r>
-              <a:rPr lang="en-US" sz="1220" dirty="0">
+              <a:t>A system of record is the official system or.</a:t>
+            </a:r>
+            <a:endParaRPr lang="en-US" sz="1140" dirty="0"/>
+          </a:p>
+          <a:p>
+            <a:pPr indent="0" marL="0">
+              <a:buNone/>
+            </a:pPr>
+            <a:r>
+              <a:rPr lang="en-US" sz="1140" dirty="0">
                 <a:solidFill>
                   <a:srgbClr val="17364A"/>
                 </a:solidFill>
@@ -3821,16 +3821,16 @@
                 <a:ea typeface="Aptos" pitchFamily="34" charset="-122"/>
                 <a:cs typeface="Aptos" pitchFamily="34" charset="-120"/>
               </a:rPr>
-              <a:t>AI outputs should not automatically become the official record.</a:t>
-            </a:r>
-            <a:endParaRPr lang="en-US" sz="1220" dirty="0"/>
-          </a:p>
-          <a:p>
-            <a:pPr indent="0" marL="0">
-              <a:buNone/>
-            </a:pPr>
-            <a:r>
-              <a:rPr lang="en-US" sz="1220" dirty="0">
+              <a:t>AI outputs should not automatically become the.</a:t>
+            </a:r>
+            <a:endParaRPr lang="en-US" sz="1140" dirty="0"/>
+          </a:p>
+          <a:p>
+            <a:pPr indent="0" marL="0">
+              <a:buNone/>
+            </a:pPr>
+            <a:r>
+              <a:rPr lang="en-US" sz="1140" dirty="0">
                 <a:solidFill>
                   <a:srgbClr val="17364A"/>
                 </a:solidFill>
@@ -3838,9 +3838,9 @@
                 <a:ea typeface="Aptos" pitchFamily="34" charset="-122"/>
                 <a:cs typeface="Aptos" pitchFamily="34" charset="-120"/>
               </a:rPr>
-              <a:t>For example, an AI tool may draft a case summary, but the final.</a:t>
-            </a:r>
-            <a:endParaRPr lang="en-US" sz="1220" dirty="0"/>
+              <a:t>For example, an AI tool may draft a case summary,.</a:t>
+            </a:r>
+            <a:endParaRPr lang="en-US" sz="1140" dirty="0"/>
           </a:p>
         </p:txBody>
       </p:sp>
@@ -3852,12 +3852,12 @@
         </p:nvSpPr>
         <p:spPr>
           <a:xfrm>
-            <a:off x="7635240" y="4184294"/>
-            <a:ext cx="3474720" cy="1466698"/>
+            <a:off x="7543800" y="4389120"/>
+            <a:ext cx="3611880" cy="1261872"/>
           </a:xfrm>
           <a:prstGeom prst="roundRect">
             <a:avLst>
-              <a:gd name="adj" fmla="val 7481"/>
+              <a:gd name="adj" fmla="val 8696"/>
             </a:avLst>
           </a:prstGeom>
           <a:solidFill>
@@ -3879,8 +3879,8 @@
         </p:nvSpPr>
         <p:spPr>
           <a:xfrm>
-            <a:off x="7799832" y="4330598"/>
-            <a:ext cx="3145536" cy="256032"/>
+            <a:off x="7708392" y="4517136"/>
+            <a:ext cx="3282696" cy="228600"/>
           </a:xfrm>
           <a:prstGeom prst="rect">
             <a:avLst/>
@@ -3896,7 +3896,7 @@
               <a:buNone/>
             </a:pPr>
             <a:r>
-              <a:rPr lang="en-US" sz="1300" b="1" dirty="0">
+              <a:rPr lang="en-US" sz="1220" b="1" dirty="0">
                 <a:solidFill>
                   <a:srgbClr val="0068B7"/>
                 </a:solidFill>
@@ -3906,7 +3906,7 @@
               </a:rPr>
               <a:t>How to validate</a:t>
             </a:r>
-            <a:endParaRPr lang="en-US" sz="1300" dirty="0"/>
+            <a:endParaRPr lang="en-US" sz="1220" dirty="0"/>
           </a:p>
         </p:txBody>
       </p:sp>
@@ -3918,8 +3918,8 @@
         </p:nvSpPr>
         <p:spPr>
           <a:xfrm>
-            <a:off x="7799832" y="4659782"/>
-            <a:ext cx="3145536" cy="899770"/>
+            <a:off x="7708392" y="4828032"/>
+            <a:ext cx="3282696" cy="749808"/>
           </a:xfrm>
           <a:prstGeom prst="rect">
             <a:avLst/>
@@ -3937,7 +3937,7 @@
               <a:buNone/>
             </a:pPr>
             <a:r>
-              <a:rPr lang="en-US" sz="1320" dirty="0">
+              <a:rPr lang="en-US" sz="1220" dirty="0">
                 <a:solidFill>
                   <a:srgbClr val="17364A"/>
                 </a:solidFill>
@@ -3945,9 +3945,9 @@
                 <a:ea typeface="Aptos" pitchFamily="34" charset="-122"/>
                 <a:cs typeface="Aptos" pitchFamily="34" charset="-120"/>
               </a:rPr>
-              <a:t>Connect the concept to data quality, model performance, validation evidence, monitoring measures, and decisions that remain under human control.</a:t>
-            </a:r>
-            <a:endParaRPr lang="en-US" sz="1320" dirty="0"/>
+              <a:t>Connect the concept to data quality, model performance, validation evidence,.</a:t>
+            </a:r>
+            <a:endParaRPr lang="en-US" sz="1220" dirty="0"/>
           </a:p>
         </p:txBody>
       </p:sp>
@@ -4238,8 +4238,8 @@
         </p:nvSpPr>
         <p:spPr>
           <a:xfrm>
-            <a:off x="868680" y="1508760"/>
-            <a:ext cx="6309360" cy="4160520"/>
+            <a:off x="822960" y="1463040"/>
+            <a:ext cx="6565392" cy="4343400"/>
           </a:xfrm>
           <a:prstGeom prst="rect">
             <a:avLst/>
@@ -4257,7 +4257,7 @@
               <a:buNone/>
             </a:pPr>
             <a:r>
-              <a:rPr lang="en-US" sz="2100" dirty="0">
+              <a:rPr lang="en-US" sz="1920" dirty="0">
                 <a:solidFill>
                   <a:srgbClr val="003A63"/>
                 </a:solidFill>
@@ -4265,16 +4265,16 @@
                 <a:ea typeface="Aptos" pitchFamily="34" charset="-122"/>
                 <a:cs typeface="Aptos" pitchFamily="34" charset="-120"/>
               </a:rPr>
-              <a:t>• Consider a health department that wants to use AI to summarize incoming electronic case.</a:t>
-            </a:r>
-            <a:endParaRPr lang="en-US" sz="2100" dirty="0"/>
-          </a:p>
-          <a:p>
-            <a:pPr indent="0" marL="0">
-              <a:buNone/>
-            </a:pPr>
-            <a:r>
-              <a:rPr lang="en-US" sz="2100" dirty="0">
+              <a:t>• Consider a health department that wants to use AI to summarize incoming.</a:t>
+            </a:r>
+            <a:endParaRPr lang="en-US" sz="1920" dirty="0"/>
+          </a:p>
+          <a:p>
+            <a:pPr indent="0" marL="0">
+              <a:buNone/>
+            </a:pPr>
+            <a:r>
+              <a:rPr lang="en-US" sz="1920" dirty="0">
                 <a:solidFill>
                   <a:srgbClr val="003A63"/>
                 </a:solidFill>
@@ -4282,16 +4282,16 @@
                 <a:ea typeface="Aptos" pitchFamily="34" charset="-122"/>
                 <a:cs typeface="Aptos" pitchFamily="34" charset="-120"/>
               </a:rPr>
-              <a:t>• The AI tool may be able to produce a concise summary of symptoms, laboratory results,.</a:t>
-            </a:r>
-            <a:endParaRPr lang="en-US" sz="2100" dirty="0"/>
-          </a:p>
-          <a:p>
-            <a:pPr indent="0" marL="0">
-              <a:buNone/>
-            </a:pPr>
-            <a:r>
-              <a:rPr lang="en-US" sz="2100" dirty="0">
+              <a:t>• The AI tool may be able to produce a concise summary of symptoms, laboratory.</a:t>
+            </a:r>
+            <a:endParaRPr lang="en-US" sz="1920" dirty="0"/>
+          </a:p>
+          <a:p>
+            <a:pPr indent="0" marL="0">
+              <a:buNone/>
+            </a:pPr>
+            <a:r>
+              <a:rPr lang="en-US" sz="1920" dirty="0">
                 <a:solidFill>
                   <a:srgbClr val="003A63"/>
                 </a:solidFill>
@@ -4301,7 +4301,7 @@
               </a:rPr>
               <a:t>• However, the safety of that workflow depends on the surrounding architecture.</a:t>
             </a:r>
-            <a:endParaRPr lang="en-US" sz="2100" dirty="0"/>
+            <a:endParaRPr lang="en-US" sz="1920" dirty="0"/>
           </a:p>
         </p:txBody>
       </p:sp>
@@ -4313,12 +4313,12 @@
         </p:nvSpPr>
         <p:spPr>
           <a:xfrm>
-            <a:off x="7635240" y="1325880"/>
-            <a:ext cx="3474720" cy="1255471"/>
+            <a:off x="7543800" y="1325880"/>
+            <a:ext cx="3611880" cy="1261872"/>
           </a:xfrm>
           <a:prstGeom prst="roundRect">
             <a:avLst>
-              <a:gd name="adj" fmla="val 8740"/>
+              <a:gd name="adj" fmla="val 8696"/>
             </a:avLst>
           </a:prstGeom>
           <a:solidFill>
@@ -4340,8 +4340,8 @@
         </p:nvSpPr>
         <p:spPr>
           <a:xfrm>
-            <a:off x="7799832" y="1472184"/>
-            <a:ext cx="3145536" cy="256032"/>
+            <a:off x="7708392" y="1453896"/>
+            <a:ext cx="3282696" cy="228600"/>
           </a:xfrm>
           <a:prstGeom prst="rect">
             <a:avLst/>
@@ -4357,7 +4357,7 @@
               <a:buNone/>
             </a:pPr>
             <a:r>
-              <a:rPr lang="en-US" sz="1300" b="1" dirty="0">
+              <a:rPr lang="en-US" sz="1220" b="1" dirty="0">
                 <a:solidFill>
                   <a:srgbClr val="0068B7"/>
                 </a:solidFill>
@@ -4367,7 +4367,7 @@
               </a:rPr>
               <a:t>Data decision</a:t>
             </a:r>
-            <a:endParaRPr lang="en-US" sz="1300" dirty="0"/>
+            <a:endParaRPr lang="en-US" sz="1220" dirty="0"/>
           </a:p>
         </p:txBody>
       </p:sp>
@@ -4379,8 +4379,8 @@
         </p:nvSpPr>
         <p:spPr>
           <a:xfrm>
-            <a:off x="7799832" y="1801368"/>
-            <a:ext cx="3145536" cy="688543"/>
+            <a:off x="7708392" y="1764792"/>
+            <a:ext cx="3282696" cy="749808"/>
           </a:xfrm>
           <a:prstGeom prst="rect">
             <a:avLst/>
@@ -4398,7 +4398,7 @@
               <a:buNone/>
             </a:pPr>
             <a:r>
-              <a:rPr lang="en-US" sz="1320" dirty="0">
+              <a:rPr lang="en-US" sz="1220" dirty="0">
                 <a:solidFill>
                   <a:srgbClr val="17364A"/>
                 </a:solidFill>
@@ -4406,9 +4406,9 @@
                 <a:ea typeface="Aptos" pitchFamily="34" charset="-122"/>
                 <a:cs typeface="Aptos" pitchFamily="34" charset="-120"/>
               </a:rPr>
-              <a:t>Consider a health department that wants to use AI to summarize incoming electronic case reports for.</a:t>
-            </a:r>
-            <a:endParaRPr lang="en-US" sz="1320" dirty="0"/>
+              <a:t>Consider a health department that wants to use AI to summarize incoming.</a:t>
+            </a:r>
+            <a:endParaRPr lang="en-US" sz="1220" dirty="0"/>
           </a:p>
         </p:txBody>
       </p:sp>
@@ -4420,12 +4420,12 @@
         </p:nvSpPr>
         <p:spPr>
           <a:xfrm>
-            <a:off x="7635240" y="2718511"/>
-            <a:ext cx="3474720" cy="1328623"/>
+            <a:off x="7543800" y="2724912"/>
+            <a:ext cx="3611880" cy="1527048"/>
           </a:xfrm>
           <a:prstGeom prst="roundRect">
             <a:avLst>
-              <a:gd name="adj" fmla="val 8259"/>
+              <a:gd name="adj" fmla="val 7186"/>
             </a:avLst>
           </a:prstGeom>
           <a:solidFill>
@@ -4447,8 +4447,8 @@
         </p:nvSpPr>
         <p:spPr>
           <a:xfrm>
-            <a:off x="7799832" y="2864815"/>
-            <a:ext cx="3145536" cy="256032"/>
+            <a:off x="7708392" y="2852928"/>
+            <a:ext cx="3282696" cy="228600"/>
           </a:xfrm>
           <a:prstGeom prst="rect">
             <a:avLst/>
@@ -4464,7 +4464,7 @@
               <a:buNone/>
             </a:pPr>
             <a:r>
-              <a:rPr lang="en-US" sz="1300" b="1" dirty="0">
+              <a:rPr lang="en-US" sz="1220" b="1" dirty="0">
                 <a:solidFill>
                   <a:srgbClr val="0068B7"/>
                 </a:solidFill>
@@ -4474,7 +4474,7 @@
               </a:rPr>
               <a:t>Concept checkpoints</a:t>
             </a:r>
-            <a:endParaRPr lang="en-US" sz="1300" dirty="0"/>
+            <a:endParaRPr lang="en-US" sz="1220" dirty="0"/>
           </a:p>
         </p:txBody>
       </p:sp>
@@ -4486,8 +4486,8 @@
         </p:nvSpPr>
         <p:spPr>
           <a:xfrm>
-            <a:off x="7818120" y="3230575"/>
-            <a:ext cx="3090672" cy="670255"/>
+            <a:off x="7726680" y="3182112"/>
+            <a:ext cx="3227832" cy="960120"/>
           </a:xfrm>
           <a:prstGeom prst="rect">
             <a:avLst/>
@@ -4505,7 +4505,7 @@
               <a:buNone/>
             </a:pPr>
             <a:r>
-              <a:rPr lang="en-US" sz="1220" dirty="0">
+              <a:rPr lang="en-US" sz="1140" dirty="0">
                 <a:solidFill>
                   <a:srgbClr val="17364A"/>
                 </a:solidFill>
@@ -4513,16 +4513,16 @@
                 <a:ea typeface="Aptos" pitchFamily="34" charset="-122"/>
                 <a:cs typeface="Aptos" pitchFamily="34" charset="-120"/>
               </a:rPr>
-              <a:t>Consider a health department that wants to use AI to summarize.</a:t>
-            </a:r>
-            <a:endParaRPr lang="en-US" sz="1220" dirty="0"/>
-          </a:p>
-          <a:p>
-            <a:pPr indent="0" marL="0">
-              <a:buNone/>
-            </a:pPr>
-            <a:r>
-              <a:rPr lang="en-US" sz="1220" dirty="0">
+              <a:t>Consider a health department that wants to use AI.</a:t>
+            </a:r>
+            <a:endParaRPr lang="en-US" sz="1140" dirty="0"/>
+          </a:p>
+          <a:p>
+            <a:pPr indent="0" marL="0">
+              <a:buNone/>
+            </a:pPr>
+            <a:r>
+              <a:rPr lang="en-US" sz="1140" dirty="0">
                 <a:solidFill>
                   <a:srgbClr val="17364A"/>
                 </a:solidFill>
@@ -4530,16 +4530,16 @@
                 <a:ea typeface="Aptos" pitchFamily="34" charset="-122"/>
                 <a:cs typeface="Aptos" pitchFamily="34" charset="-120"/>
               </a:rPr>
-              <a:t>The AI tool may be able to produce a concise summary of symptoms,.</a:t>
-            </a:r>
-            <a:endParaRPr lang="en-US" sz="1220" dirty="0"/>
-          </a:p>
-          <a:p>
-            <a:pPr indent="0" marL="0">
-              <a:buNone/>
-            </a:pPr>
-            <a:r>
-              <a:rPr lang="en-US" sz="1220" dirty="0">
+              <a:t>The AI tool may be able to produce a concise.</a:t>
+            </a:r>
+            <a:endParaRPr lang="en-US" sz="1140" dirty="0"/>
+          </a:p>
+          <a:p>
+            <a:pPr indent="0" marL="0">
+              <a:buNone/>
+            </a:pPr>
+            <a:r>
+              <a:rPr lang="en-US" sz="1140" dirty="0">
                 <a:solidFill>
                   <a:srgbClr val="17364A"/>
                 </a:solidFill>
@@ -4547,9 +4547,9 @@
                 <a:ea typeface="Aptos" pitchFamily="34" charset="-122"/>
                 <a:cs typeface="Aptos" pitchFamily="34" charset="-120"/>
               </a:rPr>
-              <a:t>The eCR data must be received correctly, routed to the right.</a:t>
-            </a:r>
-            <a:endParaRPr lang="en-US" sz="1220" dirty="0"/>
+              <a:t>The eCR data must be received correctly, routed to.</a:t>
+            </a:r>
+            <a:endParaRPr lang="en-US" sz="1140" dirty="0"/>
           </a:p>
         </p:txBody>
       </p:sp>
@@ -4561,12 +4561,12 @@
         </p:nvSpPr>
         <p:spPr>
           <a:xfrm>
-            <a:off x="7635240" y="4184294"/>
-            <a:ext cx="3474720" cy="1466698"/>
+            <a:off x="7543800" y="4389120"/>
+            <a:ext cx="3611880" cy="1261872"/>
           </a:xfrm>
           <a:prstGeom prst="roundRect">
             <a:avLst>
-              <a:gd name="adj" fmla="val 7481"/>
+              <a:gd name="adj" fmla="val 8696"/>
             </a:avLst>
           </a:prstGeom>
           <a:solidFill>
@@ -4588,8 +4588,8 @@
         </p:nvSpPr>
         <p:spPr>
           <a:xfrm>
-            <a:off x="7799832" y="4330598"/>
-            <a:ext cx="3145536" cy="256032"/>
+            <a:off x="7708392" y="4517136"/>
+            <a:ext cx="3282696" cy="228600"/>
           </a:xfrm>
           <a:prstGeom prst="rect">
             <a:avLst/>
@@ -4605,7 +4605,7 @@
               <a:buNone/>
             </a:pPr>
             <a:r>
-              <a:rPr lang="en-US" sz="1300" b="1" dirty="0">
+              <a:rPr lang="en-US" sz="1220" b="1" dirty="0">
                 <a:solidFill>
                   <a:srgbClr val="0068B7"/>
                 </a:solidFill>
@@ -4615,7 +4615,7 @@
               </a:rPr>
               <a:t>How to validate</a:t>
             </a:r>
-            <a:endParaRPr lang="en-US" sz="1300" dirty="0"/>
+            <a:endParaRPr lang="en-US" sz="1220" dirty="0"/>
           </a:p>
         </p:txBody>
       </p:sp>
@@ -4627,8 +4627,8 @@
         </p:nvSpPr>
         <p:spPr>
           <a:xfrm>
-            <a:off x="7799832" y="4659782"/>
-            <a:ext cx="3145536" cy="899770"/>
+            <a:off x="7708392" y="4828032"/>
+            <a:ext cx="3282696" cy="749808"/>
           </a:xfrm>
           <a:prstGeom prst="rect">
             <a:avLst/>
@@ -4646,7 +4646,7 @@
               <a:buNone/>
             </a:pPr>
             <a:r>
-              <a:rPr lang="en-US" sz="1320" dirty="0">
+              <a:rPr lang="en-US" sz="1220" dirty="0">
                 <a:solidFill>
                   <a:srgbClr val="17364A"/>
                 </a:solidFill>
@@ -4654,9 +4654,9 @@
                 <a:ea typeface="Aptos" pitchFamily="34" charset="-122"/>
                 <a:cs typeface="Aptos" pitchFamily="34" charset="-120"/>
               </a:rPr>
-              <a:t>Connect the concept to data quality, model performance, validation evidence, monitoring measures, and decisions that remain under human control.</a:t>
-            </a:r>
-            <a:endParaRPr lang="en-US" sz="1320" dirty="0"/>
+              <a:t>Connect the concept to data quality, model performance, validation evidence,.</a:t>
+            </a:r>
+            <a:endParaRPr lang="en-US" sz="1220" dirty="0"/>
           </a:p>
         </p:txBody>
       </p:sp>
@@ -4947,8 +4947,8 @@
         </p:nvSpPr>
         <p:spPr>
           <a:xfrm>
-            <a:off x="868680" y="1508760"/>
-            <a:ext cx="6309360" cy="4160520"/>
+            <a:off x="822960" y="1463040"/>
+            <a:ext cx="6565392" cy="4343400"/>
           </a:xfrm>
           <a:prstGeom prst="rect">
             <a:avLst/>
@@ -4966,7 +4966,7 @@
               <a:buNone/>
             </a:pPr>
             <a:r>
-              <a:rPr lang="en-US" sz="2100" dirty="0">
+              <a:rPr lang="en-US" sz="1920" dirty="0">
                 <a:solidFill>
                   <a:srgbClr val="003A63"/>
                 </a:solidFill>
@@ -4976,14 +4976,14 @@
               </a:rPr>
               <a:t>• A public health AI architecture usually begins with source systems.</a:t>
             </a:r>
-            <a:endParaRPr lang="en-US" sz="2100" dirty="0"/>
-          </a:p>
-          <a:p>
-            <a:pPr indent="0" marL="0">
-              <a:buNone/>
-            </a:pPr>
-            <a:r>
-              <a:rPr lang="en-US" sz="2100" dirty="0">
+            <a:endParaRPr lang="en-US" sz="1920" dirty="0"/>
+          </a:p>
+          <a:p>
+            <a:pPr indent="0" marL="0">
+              <a:buNone/>
+            </a:pPr>
+            <a:r>
+              <a:rPr lang="en-US" sz="1920" dirty="0">
                 <a:solidFill>
                   <a:srgbClr val="003A63"/>
                 </a:solidFill>
@@ -4991,16 +4991,16 @@
                 <a:ea typeface="Aptos" pitchFamily="34" charset="-122"/>
                 <a:cs typeface="Aptos" pitchFamily="34" charset="-120"/>
               </a:rPr>
-              <a:t>• These may include electronic health records, laboratories, immunization information systems,.</a:t>
-            </a:r>
-            <a:endParaRPr lang="en-US" sz="2100" dirty="0"/>
-          </a:p>
-          <a:p>
-            <a:pPr indent="0" marL="0">
-              <a:buNone/>
-            </a:pPr>
-            <a:r>
-              <a:rPr lang="en-US" sz="2100" dirty="0">
+              <a:t>• These may include electronic health records, laboratories, immunization.</a:t>
+            </a:r>
+            <a:endParaRPr lang="en-US" sz="1920" dirty="0"/>
+          </a:p>
+          <a:p>
+            <a:pPr indent="0" marL="0">
+              <a:buNone/>
+            </a:pPr>
+            <a:r>
+              <a:rPr lang="en-US" sz="1920" dirty="0">
                 <a:solidFill>
                   <a:srgbClr val="003A63"/>
                 </a:solidFill>
@@ -5008,9 +5008,9 @@
                 <a:ea typeface="Aptos" pitchFamily="34" charset="-122"/>
                 <a:cs typeface="Aptos" pitchFamily="34" charset="-120"/>
               </a:rPr>
-              <a:t>• Each source system has its own data quality profile, update frequency, terminology conventions,.</a:t>
-            </a:r>
-            <a:endParaRPr lang="en-US" sz="2100" dirty="0"/>
+              <a:t>• Each source system has its own data quality profile, update frequency,.</a:t>
+            </a:r>
+            <a:endParaRPr lang="en-US" sz="1920" dirty="0"/>
           </a:p>
         </p:txBody>
       </p:sp>
@@ -5022,12 +5022,12 @@
         </p:nvSpPr>
         <p:spPr>
           <a:xfrm>
-            <a:off x="7635240" y="1325880"/>
-            <a:ext cx="3474720" cy="1207008"/>
+            <a:off x="7543800" y="1325880"/>
+            <a:ext cx="3611880" cy="1261872"/>
           </a:xfrm>
           <a:prstGeom prst="roundRect">
             <a:avLst>
-              <a:gd name="adj" fmla="val 9091"/>
+              <a:gd name="adj" fmla="val 8696"/>
             </a:avLst>
           </a:prstGeom>
           <a:solidFill>
@@ -5049,8 +5049,8 @@
         </p:nvSpPr>
         <p:spPr>
           <a:xfrm>
-            <a:off x="7799832" y="1472184"/>
-            <a:ext cx="3145536" cy="256032"/>
+            <a:off x="7708392" y="1453896"/>
+            <a:ext cx="3282696" cy="228600"/>
           </a:xfrm>
           <a:prstGeom prst="rect">
             <a:avLst/>
@@ -5066,7 +5066,7 @@
               <a:buNone/>
             </a:pPr>
             <a:r>
-              <a:rPr lang="en-US" sz="1300" b="1" dirty="0">
+              <a:rPr lang="en-US" sz="1220" b="1" dirty="0">
                 <a:solidFill>
                   <a:srgbClr val="0068B7"/>
                 </a:solidFill>
@@ -5076,7 +5076,7 @@
               </a:rPr>
               <a:t>Data decision</a:t>
             </a:r>
-            <a:endParaRPr lang="en-US" sz="1300" dirty="0"/>
+            <a:endParaRPr lang="en-US" sz="1220" dirty="0"/>
           </a:p>
         </p:txBody>
       </p:sp>
@@ -5088,8 +5088,8 @@
         </p:nvSpPr>
         <p:spPr>
           <a:xfrm>
-            <a:off x="7799832" y="1801368"/>
-            <a:ext cx="3145536" cy="640080"/>
+            <a:off x="7708392" y="1764792"/>
+            <a:ext cx="3282696" cy="749808"/>
           </a:xfrm>
           <a:prstGeom prst="rect">
             <a:avLst/>
@@ -5107,7 +5107,7 @@
               <a:buNone/>
             </a:pPr>
             <a:r>
-              <a:rPr lang="en-US" sz="1320" dirty="0">
+              <a:rPr lang="en-US" sz="1220" dirty="0">
                 <a:solidFill>
                   <a:srgbClr val="17364A"/>
                 </a:solidFill>
@@ -5117,7 +5117,7 @@
               </a:rPr>
               <a:t>A public health AI architecture usually begins with source systems.</a:t>
             </a:r>
-            <a:endParaRPr lang="en-US" sz="1320" dirty="0"/>
+            <a:endParaRPr lang="en-US" sz="1220" dirty="0"/>
           </a:p>
         </p:txBody>
       </p:sp>
@@ -5129,12 +5129,12 @@
         </p:nvSpPr>
         <p:spPr>
           <a:xfrm>
-            <a:off x="7635240" y="2670048"/>
-            <a:ext cx="3474720" cy="1377086"/>
+            <a:off x="7543800" y="2724912"/>
+            <a:ext cx="3611880" cy="1527048"/>
           </a:xfrm>
           <a:prstGeom prst="roundRect">
             <a:avLst>
-              <a:gd name="adj" fmla="val 7968"/>
+              <a:gd name="adj" fmla="val 7186"/>
             </a:avLst>
           </a:prstGeom>
           <a:solidFill>
@@ -5156,24 +5156,26 @@
         </p:nvSpPr>
         <p:spPr>
           <a:xfrm>
-            <a:off x="7799832" y="2798064"/>
-            <a:ext cx="3145536" cy="237744"/>
-          </a:xfrm>
-          <a:prstGeom prst="rect">
-            <a:avLst/>
-          </a:prstGeom>
-          <a:noFill/>
-          <a:ln/>
-        </p:spPr>
-        <p:txBody>
-          <a:bodyPr wrap="square" lIns="0" tIns="0" rIns="0" bIns="0" rtlCol="0" anchor="ctr"/>
-          <a:lstStyle/>
-          <a:p>
-            <a:pPr indent="0" marL="0">
-              <a:buNone/>
-            </a:pPr>
-            <a:r>
-              <a:rPr lang="en-US" sz="1250" b="1" dirty="0">
+            <a:off x="7708392" y="2852928"/>
+            <a:ext cx="3282696" cy="219456"/>
+          </a:xfrm>
+          <a:prstGeom prst="rect">
+            <a:avLst/>
+          </a:prstGeom>
+          <a:noFill/>
+          <a:ln/>
+        </p:spPr>
+        <p:txBody>
+          <a:bodyPr wrap="square" lIns="0" tIns="0" rIns="0" bIns="0" rtlCol="0" anchor="ctr">
+            <a:normAutofit/>
+          </a:bodyPr>
+          <a:lstStyle/>
+          <a:p>
+            <a:pPr indent="0" marL="0">
+              <a:buNone/>
+            </a:pPr>
+            <a:r>
+              <a:rPr lang="en-US" sz="1160" b="1" dirty="0">
                 <a:solidFill>
                   <a:srgbClr val="0068B7"/>
                 </a:solidFill>
@@ -5183,7 +5185,7 @@
               </a:rPr>
               <a:t>Data-to-decision flow</a:t>
             </a:r>
-            <a:endParaRPr lang="en-US" sz="1250" dirty="0"/>
+            <a:endParaRPr lang="en-US" sz="1160" dirty="0"/>
           </a:p>
         </p:txBody>
       </p:sp>
@@ -5195,7 +5197,7 @@
         </p:nvSpPr>
         <p:spPr>
           <a:xfrm>
-            <a:off x="8763000" y="3351276"/>
+            <a:off x="8717280" y="3406140"/>
             <a:ext cx="164592" cy="0"/>
           </a:xfrm>
           <a:prstGeom prst="line">
@@ -5218,8 +5220,8 @@
         </p:nvSpPr>
         <p:spPr>
           <a:xfrm>
-            <a:off x="7872984" y="3200400"/>
-            <a:ext cx="890016" cy="301752"/>
+            <a:off x="7781544" y="3255264"/>
+            <a:ext cx="935736" cy="301752"/>
           </a:xfrm>
           <a:prstGeom prst="roundRect">
             <a:avLst>
@@ -5245,8 +5247,8 @@
         </p:nvSpPr>
         <p:spPr>
           <a:xfrm>
-            <a:off x="7909560" y="3273552"/>
-            <a:ext cx="816864" cy="146304"/>
+            <a:off x="7818120" y="3328416"/>
+            <a:ext cx="862584" cy="146304"/>
           </a:xfrm>
           <a:prstGeom prst="rect">
             <a:avLst/>
@@ -5286,7 +5288,7 @@
         </p:nvSpPr>
         <p:spPr>
           <a:xfrm>
-            <a:off x="9817608" y="3351276"/>
+            <a:off x="9817608" y="3406140"/>
             <a:ext cx="164592" cy="0"/>
           </a:xfrm>
           <a:prstGeom prst="line">
@@ -5309,8 +5311,8 @@
         </p:nvSpPr>
         <p:spPr>
           <a:xfrm>
-            <a:off x="8927592" y="3200400"/>
-            <a:ext cx="890016" cy="301752"/>
+            <a:off x="8881872" y="3255264"/>
+            <a:ext cx="935736" cy="301752"/>
           </a:xfrm>
           <a:prstGeom prst="roundRect">
             <a:avLst>
@@ -5336,8 +5338,8 @@
         </p:nvSpPr>
         <p:spPr>
           <a:xfrm>
-            <a:off x="8964168" y="3273552"/>
-            <a:ext cx="816864" cy="146304"/>
+            <a:off x="8918448" y="3328416"/>
+            <a:ext cx="862584" cy="146304"/>
           </a:xfrm>
           <a:prstGeom prst="rect">
             <a:avLst/>
@@ -5377,8 +5379,8 @@
         </p:nvSpPr>
         <p:spPr>
           <a:xfrm>
-            <a:off x="9982200" y="3200400"/>
-            <a:ext cx="890016" cy="301752"/>
+            <a:off x="9982200" y="3255264"/>
+            <a:ext cx="935736" cy="301752"/>
           </a:xfrm>
           <a:prstGeom prst="roundRect">
             <a:avLst>
@@ -5404,8 +5406,8 @@
         </p:nvSpPr>
         <p:spPr>
           <a:xfrm>
-            <a:off x="10018776" y="3273552"/>
-            <a:ext cx="816864" cy="146304"/>
+            <a:off x="10018776" y="3328416"/>
+            <a:ext cx="862584" cy="146304"/>
           </a:xfrm>
           <a:prstGeom prst="rect">
             <a:avLst/>
@@ -5445,8 +5447,8 @@
         </p:nvSpPr>
         <p:spPr>
           <a:xfrm>
-            <a:off x="7854696" y="3694176"/>
-            <a:ext cx="3035808" cy="206654"/>
+            <a:off x="7763256" y="3749040"/>
+            <a:ext cx="3172968" cy="356616"/>
           </a:xfrm>
           <a:prstGeom prst="rect">
             <a:avLst/>
@@ -5464,7 +5466,7 @@
               <a:buNone/>
             </a:pPr>
             <a:r>
-              <a:rPr lang="en-US" sz="1120" dirty="0">
+              <a:rPr lang="en-US" sz="1040" dirty="0">
                 <a:solidFill>
                   <a:srgbClr val="17364A"/>
                 </a:solidFill>
@@ -5472,9 +5474,9 @@
                 <a:ea typeface="Aptos" pitchFamily="34" charset="-122"/>
                 <a:cs typeface="Aptos" pitchFamily="34" charset="-120"/>
               </a:rPr>
-              <a:t>The important handoff is not from data to AI; it is from analysis to accountable human review.</a:t>
-            </a:r>
-            <a:endParaRPr lang="en-US" sz="1120" dirty="0"/>
+              <a:t>The important handoff is not from data to AI; it is from analysis to.</a:t>
+            </a:r>
+            <a:endParaRPr lang="en-US" sz="1040" dirty="0"/>
           </a:p>
         </p:txBody>
       </p:sp>
@@ -5486,12 +5488,12 @@
         </p:nvSpPr>
         <p:spPr>
           <a:xfrm>
-            <a:off x="7635240" y="4184294"/>
-            <a:ext cx="3474720" cy="1466698"/>
+            <a:off x="7543800" y="4389120"/>
+            <a:ext cx="3611880" cy="1261872"/>
           </a:xfrm>
           <a:prstGeom prst="roundRect">
             <a:avLst>
-              <a:gd name="adj" fmla="val 7481"/>
+              <a:gd name="adj" fmla="val 8696"/>
             </a:avLst>
           </a:prstGeom>
           <a:solidFill>
@@ -5513,8 +5515,8 @@
         </p:nvSpPr>
         <p:spPr>
           <a:xfrm>
-            <a:off x="7799832" y="4330598"/>
-            <a:ext cx="3145536" cy="256032"/>
+            <a:off x="7708392" y="4517136"/>
+            <a:ext cx="3282696" cy="228600"/>
           </a:xfrm>
           <a:prstGeom prst="rect">
             <a:avLst/>
@@ -5530,7 +5532,7 @@
               <a:buNone/>
             </a:pPr>
             <a:r>
-              <a:rPr lang="en-US" sz="1300" b="1" dirty="0">
+              <a:rPr lang="en-US" sz="1220" b="1" dirty="0">
                 <a:solidFill>
                   <a:srgbClr val="0068B7"/>
                 </a:solidFill>
@@ -5540,7 +5542,7 @@
               </a:rPr>
               <a:t>How to validate</a:t>
             </a:r>
-            <a:endParaRPr lang="en-US" sz="1300" dirty="0"/>
+            <a:endParaRPr lang="en-US" sz="1220" dirty="0"/>
           </a:p>
         </p:txBody>
       </p:sp>
@@ -5552,8 +5554,8 @@
         </p:nvSpPr>
         <p:spPr>
           <a:xfrm>
-            <a:off x="7799832" y="4659782"/>
-            <a:ext cx="3145536" cy="899770"/>
+            <a:off x="7708392" y="4828032"/>
+            <a:ext cx="3282696" cy="749808"/>
           </a:xfrm>
           <a:prstGeom prst="rect">
             <a:avLst/>
@@ -5571,7 +5573,7 @@
               <a:buNone/>
             </a:pPr>
             <a:r>
-              <a:rPr lang="en-US" sz="1320" dirty="0">
+              <a:rPr lang="en-US" sz="1220" dirty="0">
                 <a:solidFill>
                   <a:srgbClr val="17364A"/>
                 </a:solidFill>
@@ -5579,9 +5581,9 @@
                 <a:ea typeface="Aptos" pitchFamily="34" charset="-122"/>
                 <a:cs typeface="Aptos" pitchFamily="34" charset="-120"/>
               </a:rPr>
-              <a:t>Connect the concept to data quality, model performance, validation evidence, monitoring measures, and decisions that remain under human control.</a:t>
-            </a:r>
-            <a:endParaRPr lang="en-US" sz="1320" dirty="0"/>
+              <a:t>Connect the concept to data quality, model performance, validation evidence,.</a:t>
+            </a:r>
+            <a:endParaRPr lang="en-US" sz="1220" dirty="0"/>
           </a:p>
         </p:txBody>
       </p:sp>
@@ -5872,8 +5874,8 @@
         </p:nvSpPr>
         <p:spPr>
           <a:xfrm>
-            <a:off x="868680" y="1508760"/>
-            <a:ext cx="6309360" cy="4160520"/>
+            <a:off x="822960" y="1463040"/>
+            <a:ext cx="6565392" cy="4343400"/>
           </a:xfrm>
           <a:prstGeom prst="rect">
             <a:avLst/>
@@ -5891,7 +5893,7 @@
               <a:buNone/>
             </a:pPr>
             <a:r>
-              <a:rPr lang="en-US" sz="2100" dirty="0">
+              <a:rPr lang="en-US" sz="1920" dirty="0">
                 <a:solidFill>
                   <a:srgbClr val="003A63"/>
                 </a:solidFill>
@@ -5901,14 +5903,14 @@
               </a:rPr>
               <a:t>• The fourth layer is the AI service or model.</a:t>
             </a:r>
-            <a:endParaRPr lang="en-US" sz="2100" dirty="0"/>
-          </a:p>
-          <a:p>
-            <a:pPr indent="0" marL="0">
-              <a:buNone/>
-            </a:pPr>
-            <a:r>
-              <a:rPr lang="en-US" sz="2100" dirty="0">
+            <a:endParaRPr lang="en-US" sz="1920" dirty="0"/>
+          </a:p>
+          <a:p>
+            <a:pPr indent="0" marL="0">
+              <a:buNone/>
+            </a:pPr>
+            <a:r>
+              <a:rPr lang="en-US" sz="1920" dirty="0">
                 <a:solidFill>
                   <a:srgbClr val="003A63"/>
                 </a:solidFill>
@@ -5916,16 +5918,16 @@
                 <a:ea typeface="Aptos" pitchFamily="34" charset="-122"/>
                 <a:cs typeface="Aptos" pitchFamily="34" charset="-120"/>
               </a:rPr>
-              <a:t>• This may be a predictive model, natural language processing tool, generative AI assistant,.</a:t>
-            </a:r>
-            <a:endParaRPr lang="en-US" sz="2100" dirty="0"/>
-          </a:p>
-          <a:p>
-            <a:pPr indent="0" marL="0">
-              <a:buNone/>
-            </a:pPr>
-            <a:r>
-              <a:rPr lang="en-US" sz="2100" dirty="0">
+              <a:t>• This may be a predictive model, natural language processing tool, generative.</a:t>
+            </a:r>
+            <a:endParaRPr lang="en-US" sz="1920" dirty="0"/>
+          </a:p>
+          <a:p>
+            <a:pPr indent="0" marL="0">
+              <a:buNone/>
+            </a:pPr>
+            <a:r>
+              <a:rPr lang="en-US" sz="1920" dirty="0">
                 <a:solidFill>
                   <a:srgbClr val="003A63"/>
                 </a:solidFill>
@@ -5935,7 +5937,7 @@
               </a:rPr>
               <a:t>• The model should have a defined intended use and explicit limits.</a:t>
             </a:r>
-            <a:endParaRPr lang="en-US" sz="2100" dirty="0"/>
+            <a:endParaRPr lang="en-US" sz="1920" dirty="0"/>
           </a:p>
         </p:txBody>
       </p:sp>
@@ -5947,12 +5949,12 @@
         </p:nvSpPr>
         <p:spPr>
           <a:xfrm>
-            <a:off x="7635240" y="1325880"/>
-            <a:ext cx="3474720" cy="1207008"/>
+            <a:off x="7543800" y="1325880"/>
+            <a:ext cx="3611880" cy="1261872"/>
           </a:xfrm>
           <a:prstGeom prst="roundRect">
             <a:avLst>
-              <a:gd name="adj" fmla="val 9091"/>
+              <a:gd name="adj" fmla="val 8696"/>
             </a:avLst>
           </a:prstGeom>
           <a:solidFill>
@@ -5974,8 +5976,8 @@
         </p:nvSpPr>
         <p:spPr>
           <a:xfrm>
-            <a:off x="7799832" y="1472184"/>
-            <a:ext cx="3145536" cy="256032"/>
+            <a:off x="7708392" y="1453896"/>
+            <a:ext cx="3282696" cy="228600"/>
           </a:xfrm>
           <a:prstGeom prst="rect">
             <a:avLst/>
@@ -5991,7 +5993,7 @@
               <a:buNone/>
             </a:pPr>
             <a:r>
-              <a:rPr lang="en-US" sz="1300" b="1" dirty="0">
+              <a:rPr lang="en-US" sz="1220" b="1" dirty="0">
                 <a:solidFill>
                   <a:srgbClr val="0068B7"/>
                 </a:solidFill>
@@ -6001,7 +6003,7 @@
               </a:rPr>
               <a:t>Data decision</a:t>
             </a:r>
-            <a:endParaRPr lang="en-US" sz="1300" dirty="0"/>
+            <a:endParaRPr lang="en-US" sz="1220" dirty="0"/>
           </a:p>
         </p:txBody>
       </p:sp>
@@ -6013,8 +6015,8 @@
         </p:nvSpPr>
         <p:spPr>
           <a:xfrm>
-            <a:off x="7799832" y="1801368"/>
-            <a:ext cx="3145536" cy="640080"/>
+            <a:off x="7708392" y="1764792"/>
+            <a:ext cx="3282696" cy="749808"/>
           </a:xfrm>
           <a:prstGeom prst="rect">
             <a:avLst/>
@@ -6032,7 +6034,7 @@
               <a:buNone/>
             </a:pPr>
             <a:r>
-              <a:rPr lang="en-US" sz="1320" dirty="0">
+              <a:rPr lang="en-US" sz="1220" dirty="0">
                 <a:solidFill>
                   <a:srgbClr val="17364A"/>
                 </a:solidFill>
@@ -6042,7 +6044,7 @@
               </a:rPr>
               <a:t>The fourth layer is the AI service or model.</a:t>
             </a:r>
-            <a:endParaRPr lang="en-US" sz="1320" dirty="0"/>
+            <a:endParaRPr lang="en-US" sz="1220" dirty="0"/>
           </a:p>
         </p:txBody>
       </p:sp>
@@ -6054,12 +6056,12 @@
         </p:nvSpPr>
         <p:spPr>
           <a:xfrm>
-            <a:off x="7635240" y="2670048"/>
-            <a:ext cx="3474720" cy="1377086"/>
+            <a:off x="7543800" y="2724912"/>
+            <a:ext cx="3611880" cy="1527048"/>
           </a:xfrm>
           <a:prstGeom prst="roundRect">
             <a:avLst>
-              <a:gd name="adj" fmla="val 7968"/>
+              <a:gd name="adj" fmla="val 7186"/>
             </a:avLst>
           </a:prstGeom>
           <a:solidFill>
@@ -6081,8 +6083,8 @@
         </p:nvSpPr>
         <p:spPr>
           <a:xfrm>
-            <a:off x="7799832" y="2816352"/>
-            <a:ext cx="3145536" cy="256032"/>
+            <a:off x="7708392" y="2852928"/>
+            <a:ext cx="3282696" cy="228600"/>
           </a:xfrm>
           <a:prstGeom prst="rect">
             <a:avLst/>
@@ -6098,7 +6100,7 @@
               <a:buNone/>
             </a:pPr>
             <a:r>
-              <a:rPr lang="en-US" sz="1300" b="1" dirty="0">
+              <a:rPr lang="en-US" sz="1220" b="1" dirty="0">
                 <a:solidFill>
                   <a:srgbClr val="0068B7"/>
                 </a:solidFill>
@@ -6108,7 +6110,7 @@
               </a:rPr>
               <a:t>Concept checkpoints</a:t>
             </a:r>
-            <a:endParaRPr lang="en-US" sz="1300" dirty="0"/>
+            <a:endParaRPr lang="en-US" sz="1220" dirty="0"/>
           </a:p>
         </p:txBody>
       </p:sp>
@@ -6120,8 +6122,8 @@
         </p:nvSpPr>
         <p:spPr>
           <a:xfrm>
-            <a:off x="7818120" y="3182112"/>
-            <a:ext cx="3090672" cy="718718"/>
+            <a:off x="7726680" y="3182112"/>
+            <a:ext cx="3227832" cy="960120"/>
           </a:xfrm>
           <a:prstGeom prst="rect">
             <a:avLst/>
@@ -6139,7 +6141,7 @@
               <a:buNone/>
             </a:pPr>
             <a:r>
-              <a:rPr lang="en-US" sz="1220" dirty="0">
+              <a:rPr lang="en-US" sz="1140" dirty="0">
                 <a:solidFill>
                   <a:srgbClr val="17364A"/>
                 </a:solidFill>
@@ -6147,16 +6149,16 @@
                 <a:ea typeface="Aptos" pitchFamily="34" charset="-122"/>
                 <a:cs typeface="Aptos" pitchFamily="34" charset="-120"/>
               </a:rPr>
-              <a:t>This may be a predictive model, natural language processing tool,.</a:t>
-            </a:r>
-            <a:endParaRPr lang="en-US" sz="1220" dirty="0"/>
-          </a:p>
-          <a:p>
-            <a:pPr indent="0" marL="0">
-              <a:buNone/>
-            </a:pPr>
-            <a:r>
-              <a:rPr lang="en-US" sz="1220" dirty="0">
+              <a:t>This may be a predictive model, natural language.</a:t>
+            </a:r>
+            <a:endParaRPr lang="en-US" sz="1140" dirty="0"/>
+          </a:p>
+          <a:p>
+            <a:pPr indent="0" marL="0">
+              <a:buNone/>
+            </a:pPr>
+            <a:r>
+              <a:rPr lang="en-US" sz="1140" dirty="0">
                 <a:solidFill>
                   <a:srgbClr val="17364A"/>
                 </a:solidFill>
@@ -6164,16 +6166,16 @@
                 <a:ea typeface="Aptos" pitchFamily="34" charset="-122"/>
                 <a:cs typeface="Aptos" pitchFamily="34" charset="-120"/>
               </a:rPr>
-              <a:t>A tool designed to summarize case notes should not silently make.</a:t>
-            </a:r>
-            <a:endParaRPr lang="en-US" sz="1220" dirty="0"/>
-          </a:p>
-          <a:p>
-            <a:pPr indent="0" marL="0">
-              <a:buNone/>
-            </a:pPr>
-            <a:r>
-              <a:rPr lang="en-US" sz="1220" dirty="0">
+              <a:t>A tool designed to summarize case notes should not.</a:t>
+            </a:r>
+            <a:endParaRPr lang="en-US" sz="1140" dirty="0"/>
+          </a:p>
+          <a:p>
+            <a:pPr indent="0" marL="0">
+              <a:buNone/>
+            </a:pPr>
+            <a:r>
+              <a:rPr lang="en-US" sz="1140" dirty="0">
                 <a:solidFill>
                   <a:srgbClr val="17364A"/>
                 </a:solidFill>
@@ -6181,9 +6183,9 @@
                 <a:ea typeface="Aptos" pitchFamily="34" charset="-122"/>
                 <a:cs typeface="Aptos" pitchFamily="34" charset="-120"/>
               </a:rPr>
-              <a:t>A tool designed to classify complaints should not automatically.</a:t>
-            </a:r>
-            <a:endParaRPr lang="en-US" sz="1220" dirty="0"/>
+              <a:t>A tool designed to classify complaints should not.</a:t>
+            </a:r>
+            <a:endParaRPr lang="en-US" sz="1140" dirty="0"/>
           </a:p>
         </p:txBody>
       </p:sp>
@@ -6195,12 +6197,12 @@
         </p:nvSpPr>
         <p:spPr>
           <a:xfrm>
-            <a:off x="7635240" y="4184294"/>
-            <a:ext cx="3474720" cy="1466698"/>
+            <a:off x="7543800" y="4389120"/>
+            <a:ext cx="3611880" cy="1261872"/>
           </a:xfrm>
           <a:prstGeom prst="roundRect">
             <a:avLst>
-              <a:gd name="adj" fmla="val 7481"/>
+              <a:gd name="adj" fmla="val 8696"/>
             </a:avLst>
           </a:prstGeom>
           <a:solidFill>
@@ -6222,8 +6224,8 @@
         </p:nvSpPr>
         <p:spPr>
           <a:xfrm>
-            <a:off x="7799832" y="4330598"/>
-            <a:ext cx="3145536" cy="256032"/>
+            <a:off x="7708392" y="4517136"/>
+            <a:ext cx="3282696" cy="228600"/>
           </a:xfrm>
           <a:prstGeom prst="rect">
             <a:avLst/>
@@ -6239,7 +6241,7 @@
               <a:buNone/>
             </a:pPr>
             <a:r>
-              <a:rPr lang="en-US" sz="1300" b="1" dirty="0">
+              <a:rPr lang="en-US" sz="1220" b="1" dirty="0">
                 <a:solidFill>
                   <a:srgbClr val="0068B7"/>
                 </a:solidFill>
@@ -6249,7 +6251,7 @@
               </a:rPr>
               <a:t>How to validate</a:t>
             </a:r>
-            <a:endParaRPr lang="en-US" sz="1300" dirty="0"/>
+            <a:endParaRPr lang="en-US" sz="1220" dirty="0"/>
           </a:p>
         </p:txBody>
       </p:sp>
@@ -6261,8 +6263,8 @@
         </p:nvSpPr>
         <p:spPr>
           <a:xfrm>
-            <a:off x="7799832" y="4659782"/>
-            <a:ext cx="3145536" cy="899770"/>
+            <a:off x="7708392" y="4828032"/>
+            <a:ext cx="3282696" cy="749808"/>
           </a:xfrm>
           <a:prstGeom prst="rect">
             <a:avLst/>
@@ -6280,7 +6282,7 @@
               <a:buNone/>
             </a:pPr>
             <a:r>
-              <a:rPr lang="en-US" sz="1320" dirty="0">
+              <a:rPr lang="en-US" sz="1220" dirty="0">
                 <a:solidFill>
                   <a:srgbClr val="17364A"/>
                 </a:solidFill>
@@ -6288,9 +6290,9 @@
                 <a:ea typeface="Aptos" pitchFamily="34" charset="-122"/>
                 <a:cs typeface="Aptos" pitchFamily="34" charset="-120"/>
               </a:rPr>
-              <a:t>Connect the concept to data quality, model performance, validation evidence, monitoring measures, and decisions that remain under human control.</a:t>
-            </a:r>
-            <a:endParaRPr lang="en-US" sz="1320" dirty="0"/>
+              <a:t>Connect the concept to data quality, model performance, validation evidence,.</a:t>
+            </a:r>
+            <a:endParaRPr lang="en-US" sz="1220" dirty="0"/>
           </a:p>
         </p:txBody>
       </p:sp>
@@ -6581,8 +6583,8 @@
         </p:nvSpPr>
         <p:spPr>
           <a:xfrm>
-            <a:off x="868680" y="1508760"/>
-            <a:ext cx="6309360" cy="4160520"/>
+            <a:off x="822960" y="1463040"/>
+            <a:ext cx="6565392" cy="4343400"/>
           </a:xfrm>
           <a:prstGeom prst="rect">
             <a:avLst/>
@@ -6600,7 +6602,7 @@
               <a:buNone/>
             </a:pPr>
             <a:r>
-              <a:rPr lang="en-US" sz="2100" dirty="0">
+              <a:rPr lang="en-US" sz="1920" dirty="0">
                 <a:solidFill>
                   <a:srgbClr val="003A63"/>
                 </a:solidFill>
@@ -6610,14 +6612,14 @@
               </a:rPr>
               <a:t>• Architectural invisibility.</a:t>
             </a:r>
-            <a:endParaRPr lang="en-US" sz="2100" dirty="0"/>
-          </a:p>
-          <a:p>
-            <a:pPr indent="0" marL="0">
-              <a:buNone/>
-            </a:pPr>
-            <a:r>
-              <a:rPr lang="en-US" sz="2100" dirty="0">
+            <a:endParaRPr lang="en-US" sz="1920" dirty="0"/>
+          </a:p>
+          <a:p>
+            <a:pPr indent="0" marL="0">
+              <a:buNone/>
+            </a:pPr>
+            <a:r>
+              <a:rPr lang="en-US" sz="1920" dirty="0">
                 <a:solidFill>
                   <a:srgbClr val="003A63"/>
                 </a:solidFill>
@@ -6625,16 +6627,16 @@
                 <a:ea typeface="Aptos" pitchFamily="34" charset="-122"/>
                 <a:cs typeface="Aptos" pitchFamily="34" charset="-120"/>
               </a:rPr>
-              <a:t>• If staff cannot explain how data move through the system, they may not recognize when an AI.</a:t>
-            </a:r>
-            <a:endParaRPr lang="en-US" sz="2100" dirty="0"/>
-          </a:p>
-          <a:p>
-            <a:pPr indent="0" marL="0">
-              <a:buNone/>
-            </a:pPr>
-            <a:r>
-              <a:rPr lang="en-US" sz="2100" dirty="0">
+              <a:t>• If staff cannot explain how data move through the system, they may not.</a:t>
+            </a:r>
+            <a:endParaRPr lang="en-US" sz="1920" dirty="0"/>
+          </a:p>
+          <a:p>
+            <a:pPr indent="0" marL="0">
+              <a:buNone/>
+            </a:pPr>
+            <a:r>
+              <a:rPr lang="en-US" sz="1920" dirty="0">
                 <a:solidFill>
                   <a:srgbClr val="003A63"/>
                 </a:solidFill>
@@ -6642,9 +6644,9 @@
                 <a:ea typeface="Aptos" pitchFamily="34" charset="-122"/>
                 <a:cs typeface="Aptos" pitchFamily="34" charset="-120"/>
               </a:rPr>
-              <a:t>• A practical guardrail is to require a workflow and data flow map before AI use is approved.</a:t>
-            </a:r>
-            <a:endParaRPr lang="en-US" sz="2100" dirty="0"/>
+              <a:t>• A practical guardrail is to require a workflow and data flow map before AI.</a:t>
+            </a:r>
+            <a:endParaRPr lang="en-US" sz="1920" dirty="0"/>
           </a:p>
         </p:txBody>
       </p:sp>
@@ -6656,12 +6658,12 @@
         </p:nvSpPr>
         <p:spPr>
           <a:xfrm>
-            <a:off x="7635240" y="1325880"/>
-            <a:ext cx="3474720" cy="1207008"/>
+            <a:off x="7543800" y="1325880"/>
+            <a:ext cx="3611880" cy="1261872"/>
           </a:xfrm>
           <a:prstGeom prst="roundRect">
             <a:avLst>
-              <a:gd name="adj" fmla="val 9091"/>
+              <a:gd name="adj" fmla="val 8696"/>
             </a:avLst>
           </a:prstGeom>
           <a:solidFill>
@@ -6683,8 +6685,8 @@
         </p:nvSpPr>
         <p:spPr>
           <a:xfrm>
-            <a:off x="7799832" y="1472184"/>
-            <a:ext cx="3145536" cy="256032"/>
+            <a:off x="7708392" y="1453896"/>
+            <a:ext cx="3282696" cy="228600"/>
           </a:xfrm>
           <a:prstGeom prst="rect">
             <a:avLst/>
@@ -6700,7 +6702,7 @@
               <a:buNone/>
             </a:pPr>
             <a:r>
-              <a:rPr lang="en-US" sz="1300" b="1" dirty="0">
+              <a:rPr lang="en-US" sz="1220" b="1" dirty="0">
                 <a:solidFill>
                   <a:srgbClr val="0068B7"/>
                 </a:solidFill>
@@ -6710,7 +6712,7 @@
               </a:rPr>
               <a:t>Risk check</a:t>
             </a:r>
-            <a:endParaRPr lang="en-US" sz="1300" dirty="0"/>
+            <a:endParaRPr lang="en-US" sz="1220" dirty="0"/>
           </a:p>
         </p:txBody>
       </p:sp>
@@ -6722,8 +6724,8 @@
         </p:nvSpPr>
         <p:spPr>
           <a:xfrm>
-            <a:off x="7799832" y="1801368"/>
-            <a:ext cx="3145536" cy="640080"/>
+            <a:off x="7708392" y="1764792"/>
+            <a:ext cx="3282696" cy="749808"/>
           </a:xfrm>
           <a:prstGeom prst="rect">
             <a:avLst/>
@@ -6741,7 +6743,7 @@
               <a:buNone/>
             </a:pPr>
             <a:r>
-              <a:rPr lang="en-US" sz="1320" dirty="0">
+              <a:rPr lang="en-US" sz="1220" dirty="0">
                 <a:solidFill>
                   <a:srgbClr val="17364A"/>
                 </a:solidFill>
@@ -6751,7 +6753,7 @@
               </a:rPr>
               <a:t>Architectural invisibility.</a:t>
             </a:r>
-            <a:endParaRPr lang="en-US" sz="1320" dirty="0"/>
+            <a:endParaRPr lang="en-US" sz="1220" dirty="0"/>
           </a:p>
         </p:txBody>
       </p:sp>
@@ -6763,12 +6765,12 @@
         </p:nvSpPr>
         <p:spPr>
           <a:xfrm>
-            <a:off x="7635240" y="2670048"/>
-            <a:ext cx="3474720" cy="1536192"/>
+            <a:off x="7543800" y="2724912"/>
+            <a:ext cx="3611880" cy="1527048"/>
           </a:xfrm>
           <a:prstGeom prst="roundRect">
             <a:avLst>
-              <a:gd name="adj" fmla="val 7143"/>
+              <a:gd name="adj" fmla="val 7186"/>
             </a:avLst>
           </a:prstGeom>
           <a:solidFill>
@@ -6790,8 +6792,8 @@
         </p:nvSpPr>
         <p:spPr>
           <a:xfrm>
-            <a:off x="7799832" y="2816352"/>
-            <a:ext cx="3145536" cy="256032"/>
+            <a:off x="7708392" y="2852928"/>
+            <a:ext cx="3282696" cy="228600"/>
           </a:xfrm>
           <a:prstGeom prst="rect">
             <a:avLst/>
@@ -6807,7 +6809,7 @@
               <a:buNone/>
             </a:pPr>
             <a:r>
-              <a:rPr lang="en-US" sz="1300" b="1" dirty="0">
+              <a:rPr lang="en-US" sz="1220" b="1" dirty="0">
                 <a:solidFill>
                   <a:srgbClr val="0068B7"/>
                 </a:solidFill>
@@ -6817,7 +6819,7 @@
               </a:rPr>
               <a:t>Concept checkpoints</a:t>
             </a:r>
-            <a:endParaRPr lang="en-US" sz="1300" dirty="0"/>
+            <a:endParaRPr lang="en-US" sz="1220" dirty="0"/>
           </a:p>
         </p:txBody>
       </p:sp>
@@ -6829,8 +6831,8 @@
         </p:nvSpPr>
         <p:spPr>
           <a:xfrm>
-            <a:off x="7818120" y="3182112"/>
-            <a:ext cx="3090672" cy="877824"/>
+            <a:off x="7726680" y="3182112"/>
+            <a:ext cx="3227832" cy="960120"/>
           </a:xfrm>
           <a:prstGeom prst="rect">
             <a:avLst/>
@@ -6848,7 +6850,7 @@
               <a:buNone/>
             </a:pPr>
             <a:r>
-              <a:rPr lang="en-US" sz="1220" dirty="0">
+              <a:rPr lang="en-US" sz="1140" dirty="0">
                 <a:solidFill>
                   <a:srgbClr val="17364A"/>
                 </a:solidFill>
@@ -6856,16 +6858,16 @@
                 <a:ea typeface="Aptos" pitchFamily="34" charset="-122"/>
                 <a:cs typeface="Aptos" pitchFamily="34" charset="-120"/>
               </a:rPr>
-              <a:t>If staff cannot explain how data move through the system, they may.</a:t>
-            </a:r>
-            <a:endParaRPr lang="en-US" sz="1220" dirty="0"/>
-          </a:p>
-          <a:p>
-            <a:pPr indent="0" marL="0">
-              <a:buNone/>
-            </a:pPr>
-            <a:r>
-              <a:rPr lang="en-US" sz="1220" dirty="0">
+              <a:t>If staff cannot explain how data move through the.</a:t>
+            </a:r>
+            <a:endParaRPr lang="en-US" sz="1140" dirty="0"/>
+          </a:p>
+          <a:p>
+            <a:pPr indent="0" marL="0">
+              <a:buNone/>
+            </a:pPr>
+            <a:r>
+              <a:rPr lang="en-US" sz="1140" dirty="0">
                 <a:solidFill>
                   <a:srgbClr val="17364A"/>
                 </a:solidFill>
@@ -6875,14 +6877,14 @@
               </a:rPr>
               <a:t>Unclear authority.</a:t>
             </a:r>
-            <a:endParaRPr lang="en-US" sz="1220" dirty="0"/>
-          </a:p>
-          <a:p>
-            <a:pPr indent="0" marL="0">
-              <a:buNone/>
-            </a:pPr>
-            <a:r>
-              <a:rPr lang="en-US" sz="1220" dirty="0">
+            <a:endParaRPr lang="en-US" sz="1140" dirty="0"/>
+          </a:p>
+          <a:p>
+            <a:pPr indent="0" marL="0">
+              <a:buNone/>
+            </a:pPr>
+            <a:r>
+              <a:rPr lang="en-US" sz="1140" dirty="0">
                 <a:solidFill>
                   <a:srgbClr val="17364A"/>
                 </a:solidFill>
@@ -6890,9 +6892,9 @@
                 <a:ea typeface="Aptos" pitchFamily="34" charset="-122"/>
                 <a:cs typeface="Aptos" pitchFamily="34" charset="-120"/>
               </a:rPr>
-              <a:t>AI tools may produce recommendations, summaries, or.</a:t>
-            </a:r>
-            <a:endParaRPr lang="en-US" sz="1220" dirty="0"/>
+              <a:t>AI tools may produce recommendations, summaries,.</a:t>
+            </a:r>
+            <a:endParaRPr lang="en-US" sz="1140" dirty="0"/>
           </a:p>
         </p:txBody>
       </p:sp>
@@ -6904,12 +6906,12 @@
         </p:nvSpPr>
         <p:spPr>
           <a:xfrm>
-            <a:off x="7635240" y="4343400"/>
-            <a:ext cx="3474720" cy="1255471"/>
+            <a:off x="7543800" y="4389120"/>
+            <a:ext cx="3611880" cy="1261872"/>
           </a:xfrm>
           <a:prstGeom prst="roundRect">
             <a:avLst>
-              <a:gd name="adj" fmla="val 8740"/>
+              <a:gd name="adj" fmla="val 8696"/>
             </a:avLst>
           </a:prstGeom>
           <a:solidFill>
@@ -6931,8 +6933,8 @@
         </p:nvSpPr>
         <p:spPr>
           <a:xfrm>
-            <a:off x="7799832" y="4489704"/>
-            <a:ext cx="3145536" cy="256032"/>
+            <a:off x="7708392" y="4517136"/>
+            <a:ext cx="3282696" cy="228600"/>
           </a:xfrm>
           <a:prstGeom prst="rect">
             <a:avLst/>
@@ -6948,7 +6950,7 @@
               <a:buNone/>
             </a:pPr>
             <a:r>
-              <a:rPr lang="en-US" sz="1300" b="1" dirty="0">
+              <a:rPr lang="en-US" sz="1220" b="1" dirty="0">
                 <a:solidFill>
                   <a:srgbClr val="0068B7"/>
                 </a:solidFill>
@@ -6958,7 +6960,7 @@
               </a:rPr>
               <a:t>Safeguard to plan</a:t>
             </a:r>
-            <a:endParaRPr lang="en-US" sz="1300" dirty="0"/>
+            <a:endParaRPr lang="en-US" sz="1220" dirty="0"/>
           </a:p>
         </p:txBody>
       </p:sp>
@@ -6970,8 +6972,8 @@
         </p:nvSpPr>
         <p:spPr>
           <a:xfrm>
-            <a:off x="7799832" y="4818888"/>
-            <a:ext cx="3145536" cy="688543"/>
+            <a:off x="7708392" y="4828032"/>
+            <a:ext cx="3282696" cy="749808"/>
           </a:xfrm>
           <a:prstGeom prst="rect">
             <a:avLst/>
@@ -6989,7 +6991,7 @@
               <a:buNone/>
             </a:pPr>
             <a:r>
-              <a:rPr lang="en-US" sz="1320" dirty="0">
+              <a:rPr lang="en-US" sz="1220" dirty="0">
                 <a:solidFill>
                   <a:srgbClr val="17364A"/>
                 </a:solidFill>
@@ -6997,9 +6999,9 @@
                 <a:ea typeface="Aptos" pitchFamily="34" charset="-122"/>
                 <a:cs typeface="Aptos" pitchFamily="34" charset="-120"/>
               </a:rPr>
-              <a:t>Identify what could go wrong, who could be affected, what safeguards are needed, and what evidence should be reviewed before use.</a:t>
-            </a:r>
-            <a:endParaRPr lang="en-US" sz="1320" dirty="0"/>
+              <a:t>Identify what could go wrong, who could be affected, what safeguards are needed,.</a:t>
+            </a:r>
+            <a:endParaRPr lang="en-US" sz="1220" dirty="0"/>
           </a:p>
         </p:txBody>
       </p:sp>
@@ -7290,8 +7292,8 @@
         </p:nvSpPr>
         <p:spPr>
           <a:xfrm>
-            <a:off x="868680" y="1508760"/>
-            <a:ext cx="6309360" cy="4160520"/>
+            <a:off x="822960" y="1463040"/>
+            <a:ext cx="6565392" cy="4343400"/>
           </a:xfrm>
           <a:prstGeom prst="rect">
             <a:avLst/>
@@ -7309,7 +7311,7 @@
               <a:buNone/>
             </a:pPr>
             <a:r>
-              <a:rPr lang="en-US" sz="2100" dirty="0">
+              <a:rPr lang="en-US" sz="1920" dirty="0">
                 <a:solidFill>
                   <a:srgbClr val="003A63"/>
                 </a:solidFill>
@@ -7319,14 +7321,14 @@
               </a:rPr>
               <a:t>• Poor monitoring and equity harm.</a:t>
             </a:r>
-            <a:endParaRPr lang="en-US" sz="2100" dirty="0"/>
-          </a:p>
-          <a:p>
-            <a:pPr indent="0" marL="0">
-              <a:buNone/>
-            </a:pPr>
-            <a:r>
-              <a:rPr lang="en-US" sz="2100" dirty="0">
+            <a:endParaRPr lang="en-US" sz="1920" dirty="0"/>
+          </a:p>
+          <a:p>
+            <a:pPr indent="0" marL="0">
+              <a:buNone/>
+            </a:pPr>
+            <a:r>
+              <a:rPr lang="en-US" sz="1920" dirty="0">
                 <a:solidFill>
                   <a:srgbClr val="003A63"/>
                 </a:solidFill>
@@ -7334,16 +7336,16 @@
                 <a:ea typeface="Aptos" pitchFamily="34" charset="-122"/>
                 <a:cs typeface="Aptos" pitchFamily="34" charset="-120"/>
               </a:rPr>
-              <a:t>• AI tools can degrade over time when data patterns, reporting sources, terminology, policies, or.</a:t>
-            </a:r>
-            <a:endParaRPr lang="en-US" sz="2100" dirty="0"/>
-          </a:p>
-          <a:p>
-            <a:pPr indent="0" marL="0">
-              <a:buNone/>
-            </a:pPr>
-            <a:r>
-              <a:rPr lang="en-US" sz="2100" dirty="0">
+              <a:t>• AI tools can degrade over time when data patterns, reporting sources,.</a:t>
+            </a:r>
+            <a:endParaRPr lang="en-US" sz="1920" dirty="0"/>
+          </a:p>
+          <a:p>
+            <a:pPr indent="0" marL="0">
+              <a:buNone/>
+            </a:pPr>
+            <a:r>
+              <a:rPr lang="en-US" sz="1920" dirty="0">
                 <a:solidFill>
                   <a:srgbClr val="003A63"/>
                 </a:solidFill>
@@ -7351,9 +7353,9 @@
                 <a:ea typeface="Aptos" pitchFamily="34" charset="-122"/>
                 <a:cs typeface="Aptos" pitchFamily="34" charset="-120"/>
               </a:rPr>
-              <a:t>• If the architecture relies on data sources that underrepresent some communities, the tool may.</a:t>
-            </a:r>
-            <a:endParaRPr lang="en-US" sz="2100" dirty="0"/>
+              <a:t>• If the architecture relies on data sources that underrepresent some.</a:t>
+            </a:r>
+            <a:endParaRPr lang="en-US" sz="1920" dirty="0"/>
           </a:p>
         </p:txBody>
       </p:sp>
@@ -7365,12 +7367,12 @@
         </p:nvSpPr>
         <p:spPr>
           <a:xfrm>
-            <a:off x="7635240" y="1325880"/>
-            <a:ext cx="3474720" cy="1207008"/>
+            <a:off x="7543800" y="1325880"/>
+            <a:ext cx="3611880" cy="1261872"/>
           </a:xfrm>
           <a:prstGeom prst="roundRect">
             <a:avLst>
-              <a:gd name="adj" fmla="val 9091"/>
+              <a:gd name="adj" fmla="val 8696"/>
             </a:avLst>
           </a:prstGeom>
           <a:solidFill>
@@ -7392,8 +7394,8 @@
         </p:nvSpPr>
         <p:spPr>
           <a:xfrm>
-            <a:off x="7799832" y="1472184"/>
-            <a:ext cx="3145536" cy="256032"/>
+            <a:off x="7708392" y="1453896"/>
+            <a:ext cx="3282696" cy="228600"/>
           </a:xfrm>
           <a:prstGeom prst="rect">
             <a:avLst/>
@@ -7409,7 +7411,7 @@
               <a:buNone/>
             </a:pPr>
             <a:r>
-              <a:rPr lang="en-US" sz="1300" b="1" dirty="0">
+              <a:rPr lang="en-US" sz="1220" b="1" dirty="0">
                 <a:solidFill>
                   <a:srgbClr val="0068B7"/>
                 </a:solidFill>
@@ -7419,7 +7421,7 @@
               </a:rPr>
               <a:t>Risk check</a:t>
             </a:r>
-            <a:endParaRPr lang="en-US" sz="1300" dirty="0"/>
+            <a:endParaRPr lang="en-US" sz="1220" dirty="0"/>
           </a:p>
         </p:txBody>
       </p:sp>
@@ -7431,8 +7433,8 @@
         </p:nvSpPr>
         <p:spPr>
           <a:xfrm>
-            <a:off x="7799832" y="1801368"/>
-            <a:ext cx="3145536" cy="640080"/>
+            <a:off x="7708392" y="1764792"/>
+            <a:ext cx="3282696" cy="749808"/>
           </a:xfrm>
           <a:prstGeom prst="rect">
             <a:avLst/>
@@ -7450,7 +7452,7 @@
               <a:buNone/>
             </a:pPr>
             <a:r>
-              <a:rPr lang="en-US" sz="1320" dirty="0">
+              <a:rPr lang="en-US" sz="1220" dirty="0">
                 <a:solidFill>
                   <a:srgbClr val="17364A"/>
                 </a:solidFill>
@@ -7460,7 +7462,7 @@
               </a:rPr>
               <a:t>Poor monitoring and equity harm.</a:t>
             </a:r>
-            <a:endParaRPr lang="en-US" sz="1320" dirty="0"/>
+            <a:endParaRPr lang="en-US" sz="1220" dirty="0"/>
           </a:p>
         </p:txBody>
       </p:sp>
@@ -7472,12 +7474,12 @@
         </p:nvSpPr>
         <p:spPr>
           <a:xfrm>
-            <a:off x="7635240" y="2670048"/>
-            <a:ext cx="3474720" cy="1536192"/>
+            <a:off x="7543800" y="2724912"/>
+            <a:ext cx="3611880" cy="1527048"/>
           </a:xfrm>
           <a:prstGeom prst="roundRect">
             <a:avLst>
-              <a:gd name="adj" fmla="val 7143"/>
+              <a:gd name="adj" fmla="val 7186"/>
             </a:avLst>
           </a:prstGeom>
           <a:solidFill>
@@ -7499,8 +7501,8 @@
         </p:nvSpPr>
         <p:spPr>
           <a:xfrm>
-            <a:off x="7799832" y="2816352"/>
-            <a:ext cx="3145536" cy="256032"/>
+            <a:off x="7708392" y="2852928"/>
+            <a:ext cx="3282696" cy="228600"/>
           </a:xfrm>
           <a:prstGeom prst="rect">
             <a:avLst/>
@@ -7516,7 +7518,7 @@
               <a:buNone/>
             </a:pPr>
             <a:r>
-              <a:rPr lang="en-US" sz="1300" b="1" dirty="0">
+              <a:rPr lang="en-US" sz="1220" b="1" dirty="0">
                 <a:solidFill>
                   <a:srgbClr val="0068B7"/>
                 </a:solidFill>
@@ -7526,7 +7528,7 @@
               </a:rPr>
               <a:t>Concept checkpoints</a:t>
             </a:r>
-            <a:endParaRPr lang="en-US" sz="1300" dirty="0"/>
+            <a:endParaRPr lang="en-US" sz="1220" dirty="0"/>
           </a:p>
         </p:txBody>
       </p:sp>
@@ -7538,8 +7540,8 @@
         </p:nvSpPr>
         <p:spPr>
           <a:xfrm>
-            <a:off x="7818120" y="3182112"/>
-            <a:ext cx="3090672" cy="877824"/>
+            <a:off x="7726680" y="3182112"/>
+            <a:ext cx="3227832" cy="960120"/>
           </a:xfrm>
           <a:prstGeom prst="rect">
             <a:avLst/>
@@ -7557,7 +7559,7 @@
               <a:buNone/>
             </a:pPr>
             <a:r>
-              <a:rPr lang="en-US" sz="1220" dirty="0">
+              <a:rPr lang="en-US" sz="1140" dirty="0">
                 <a:solidFill>
                   <a:srgbClr val="17364A"/>
                 </a:solidFill>
@@ -7565,16 +7567,16 @@
                 <a:ea typeface="Aptos" pitchFamily="34" charset="-122"/>
                 <a:cs typeface="Aptos" pitchFamily="34" charset="-120"/>
               </a:rPr>
-              <a:t>AI tools can degrade over time when data patterns, reporting.</a:t>
-            </a:r>
-            <a:endParaRPr lang="en-US" sz="1220" dirty="0"/>
-          </a:p>
-          <a:p>
-            <a:pPr indent="0" marL="0">
-              <a:buNone/>
-            </a:pPr>
-            <a:r>
-              <a:rPr lang="en-US" sz="1220" dirty="0">
+              <a:t>AI tools can degrade over time when data patterns,.</a:t>
+            </a:r>
+            <a:endParaRPr lang="en-US" sz="1140" dirty="0"/>
+          </a:p>
+          <a:p>
+            <a:pPr indent="0" marL="0">
+              <a:buNone/>
+            </a:pPr>
+            <a:r>
+              <a:rPr lang="en-US" sz="1140" dirty="0">
                 <a:solidFill>
                   <a:srgbClr val="17364A"/>
                 </a:solidFill>
@@ -7582,16 +7584,16 @@
                 <a:ea typeface="Aptos" pitchFamily="34" charset="-122"/>
                 <a:cs typeface="Aptos" pitchFamily="34" charset="-120"/>
               </a:rPr>
-              <a:t>If the architecture relies on data sources that underrepresent.</a:t>
-            </a:r>
-            <a:endParaRPr lang="en-US" sz="1220" dirty="0"/>
-          </a:p>
-          <a:p>
-            <a:pPr indent="0" marL="0">
-              <a:buNone/>
-            </a:pPr>
-            <a:r>
-              <a:rPr lang="en-US" sz="1220" dirty="0">
+              <a:t>If the architecture relies on data sources that.</a:t>
+            </a:r>
+            <a:endParaRPr lang="en-US" sz="1140" dirty="0"/>
+          </a:p>
+          <a:p>
+            <a:pPr indent="0" marL="0">
+              <a:buNone/>
+            </a:pPr>
+            <a:r>
+              <a:rPr lang="en-US" sz="1140" dirty="0">
                 <a:solidFill>
                   <a:srgbClr val="17364A"/>
                 </a:solidFill>
@@ -7599,9 +7601,9 @@
                 <a:ea typeface="Aptos" pitchFamily="34" charset="-122"/>
                 <a:cs typeface="Aptos" pitchFamily="34" charset="-120"/>
               </a:rPr>
-              <a:t>Practical guardrails include pre-deployment subgroup review,.</a:t>
-            </a:r>
-            <a:endParaRPr lang="en-US" sz="1220" dirty="0"/>
+              <a:t>Practical guardrails include pre-deployment.</a:t>
+            </a:r>
+            <a:endParaRPr lang="en-US" sz="1140" dirty="0"/>
           </a:p>
         </p:txBody>
       </p:sp>
@@ -7613,12 +7615,12 @@
         </p:nvSpPr>
         <p:spPr>
           <a:xfrm>
-            <a:off x="7635240" y="4343400"/>
-            <a:ext cx="3474720" cy="1255471"/>
+            <a:off x="7543800" y="4389120"/>
+            <a:ext cx="3611880" cy="1261872"/>
           </a:xfrm>
           <a:prstGeom prst="roundRect">
             <a:avLst>
-              <a:gd name="adj" fmla="val 8740"/>
+              <a:gd name="adj" fmla="val 8696"/>
             </a:avLst>
           </a:prstGeom>
           <a:solidFill>
@@ -7640,8 +7642,8 @@
         </p:nvSpPr>
         <p:spPr>
           <a:xfrm>
-            <a:off x="7799832" y="4489704"/>
-            <a:ext cx="3145536" cy="256032"/>
+            <a:off x="7708392" y="4517136"/>
+            <a:ext cx="3282696" cy="228600"/>
           </a:xfrm>
           <a:prstGeom prst="rect">
             <a:avLst/>
@@ -7657,7 +7659,7 @@
               <a:buNone/>
             </a:pPr>
             <a:r>
-              <a:rPr lang="en-US" sz="1300" b="1" dirty="0">
+              <a:rPr lang="en-US" sz="1220" b="1" dirty="0">
                 <a:solidFill>
                   <a:srgbClr val="0068B7"/>
                 </a:solidFill>
@@ -7667,7 +7669,7 @@
               </a:rPr>
               <a:t>Safeguard to plan</a:t>
             </a:r>
-            <a:endParaRPr lang="en-US" sz="1300" dirty="0"/>
+            <a:endParaRPr lang="en-US" sz="1220" dirty="0"/>
           </a:p>
         </p:txBody>
       </p:sp>
@@ -7679,8 +7681,8 @@
         </p:nvSpPr>
         <p:spPr>
           <a:xfrm>
-            <a:off x="7799832" y="4818888"/>
-            <a:ext cx="3145536" cy="688543"/>
+            <a:off x="7708392" y="4828032"/>
+            <a:ext cx="3282696" cy="749808"/>
           </a:xfrm>
           <a:prstGeom prst="rect">
             <a:avLst/>
@@ -7698,7 +7700,7 @@
               <a:buNone/>
             </a:pPr>
             <a:r>
-              <a:rPr lang="en-US" sz="1320" dirty="0">
+              <a:rPr lang="en-US" sz="1220" dirty="0">
                 <a:solidFill>
                   <a:srgbClr val="17364A"/>
                 </a:solidFill>
@@ -7706,9 +7708,9 @@
                 <a:ea typeface="Aptos" pitchFamily="34" charset="-122"/>
                 <a:cs typeface="Aptos" pitchFamily="34" charset="-120"/>
               </a:rPr>
-              <a:t>Identify what could go wrong, who could be affected, what safeguards are needed, and what evidence should be reviewed before use.</a:t>
-            </a:r>
-            <a:endParaRPr lang="en-US" sz="1320" dirty="0"/>
+              <a:t>Identify what could go wrong, who could be affected, what safeguards are needed,.</a:t>
+            </a:r>
+            <a:endParaRPr lang="en-US" sz="1220" dirty="0"/>
           </a:p>
         </p:txBody>
       </p:sp>
@@ -7999,8 +8001,8 @@
         </p:nvSpPr>
         <p:spPr>
           <a:xfrm>
-            <a:off x="868680" y="1508760"/>
-            <a:ext cx="6309360" cy="4160520"/>
+            <a:off x="822960" y="1463040"/>
+            <a:ext cx="6565392" cy="4343400"/>
           </a:xfrm>
           <a:prstGeom prst="rect">
             <a:avLst/>
@@ -8018,7 +8020,7 @@
               <a:buNone/>
             </a:pPr>
             <a:r>
-              <a:rPr lang="en-US" sz="2100" dirty="0">
+              <a:rPr lang="en-US" sz="1920" dirty="0">
                 <a:solidFill>
                   <a:srgbClr val="003A63"/>
                 </a:solidFill>
@@ -8026,16 +8028,16 @@
                 <a:ea typeface="Aptos" pitchFamily="34" charset="-122"/>
                 <a:cs typeface="Aptos" pitchFamily="34" charset="-120"/>
               </a:rPr>
-              <a:t>• For generative AI, architecture determines what source material the tool can access, whether.</a:t>
-            </a:r>
-            <a:endParaRPr lang="en-US" sz="2100" dirty="0"/>
-          </a:p>
-          <a:p>
-            <a:pPr indent="0" marL="0">
-              <a:buNone/>
-            </a:pPr>
-            <a:r>
-              <a:rPr lang="en-US" sz="2100" dirty="0">
+              <a:t>• For generative AI, architecture determines what source material the tool can.</a:t>
+            </a:r>
+            <a:endParaRPr lang="en-US" sz="1920" dirty="0"/>
+          </a:p>
+          <a:p>
+            <a:pPr indent="0" marL="0">
+              <a:buNone/>
+            </a:pPr>
+            <a:r>
+              <a:rPr lang="en-US" sz="1920" dirty="0">
                 <a:solidFill>
                   <a:srgbClr val="003A63"/>
                 </a:solidFill>
@@ -8043,16 +8045,16 @@
                 <a:ea typeface="Aptos" pitchFamily="34" charset="-122"/>
                 <a:cs typeface="Aptos" pitchFamily="34" charset="-120"/>
               </a:rPr>
-              <a:t>• A generative AI tool used to summarize policy documents has different architectural.</a:t>
-            </a:r>
-            <a:endParaRPr lang="en-US" sz="2100" dirty="0"/>
-          </a:p>
-          <a:p>
-            <a:pPr indent="0" marL="0">
-              <a:buNone/>
-            </a:pPr>
-            <a:r>
-              <a:rPr lang="en-US" sz="2100" dirty="0">
+              <a:t>• A generative AI tool used to summarize policy documents has different.</a:t>
+            </a:r>
+            <a:endParaRPr lang="en-US" sz="1920" dirty="0"/>
+          </a:p>
+          <a:p>
+            <a:pPr indent="0" marL="0">
+              <a:buNone/>
+            </a:pPr>
+            <a:r>
+              <a:rPr lang="en-US" sz="1920" dirty="0">
                 <a:solidFill>
                   <a:srgbClr val="003A63"/>
                 </a:solidFill>
@@ -8060,9 +8062,9 @@
                 <a:ea typeface="Aptos" pitchFamily="34" charset="-122"/>
                 <a:cs typeface="Aptos" pitchFamily="34" charset="-120"/>
               </a:rPr>
-              <a:t>• The more sensitive or operational the use case, the stronger the controls should be.</a:t>
-            </a:r>
-            <a:endParaRPr lang="en-US" sz="2100" dirty="0"/>
+              <a:t>• The more sensitive or operational the use case, the stronger the controls.</a:t>
+            </a:r>
+            <a:endParaRPr lang="en-US" sz="1920" dirty="0"/>
           </a:p>
         </p:txBody>
       </p:sp>
@@ -8074,12 +8076,12 @@
         </p:nvSpPr>
         <p:spPr>
           <a:xfrm>
-            <a:off x="7635240" y="1325880"/>
-            <a:ext cx="3474720" cy="1255471"/>
+            <a:off x="7543800" y="1325880"/>
+            <a:ext cx="3611880" cy="1261872"/>
           </a:xfrm>
           <a:prstGeom prst="roundRect">
             <a:avLst>
-              <a:gd name="adj" fmla="val 8740"/>
+              <a:gd name="adj" fmla="val 8696"/>
             </a:avLst>
           </a:prstGeom>
           <a:solidFill>
@@ -8101,8 +8103,8 @@
         </p:nvSpPr>
         <p:spPr>
           <a:xfrm>
-            <a:off x="7799832" y="1472184"/>
-            <a:ext cx="3145536" cy="256032"/>
+            <a:off x="7708392" y="1453896"/>
+            <a:ext cx="3282696" cy="228600"/>
           </a:xfrm>
           <a:prstGeom prst="rect">
             <a:avLst/>
@@ -8118,7 +8120,7 @@
               <a:buNone/>
             </a:pPr>
             <a:r>
-              <a:rPr lang="en-US" sz="1300" b="1" dirty="0">
+              <a:rPr lang="en-US" sz="1220" b="1" dirty="0">
                 <a:solidFill>
                   <a:srgbClr val="0068B7"/>
                 </a:solidFill>
@@ -8128,7 +8130,7 @@
               </a:rPr>
               <a:t>Data decision</a:t>
             </a:r>
-            <a:endParaRPr lang="en-US" sz="1300" dirty="0"/>
+            <a:endParaRPr lang="en-US" sz="1220" dirty="0"/>
           </a:p>
         </p:txBody>
       </p:sp>
@@ -8140,8 +8142,8 @@
         </p:nvSpPr>
         <p:spPr>
           <a:xfrm>
-            <a:off x="7799832" y="1801368"/>
-            <a:ext cx="3145536" cy="688543"/>
+            <a:off x="7708392" y="1764792"/>
+            <a:ext cx="3282696" cy="749808"/>
           </a:xfrm>
           <a:prstGeom prst="rect">
             <a:avLst/>
@@ -8159,7 +8161,7 @@
               <a:buNone/>
             </a:pPr>
             <a:r>
-              <a:rPr lang="en-US" sz="1320" dirty="0">
+              <a:rPr lang="en-US" sz="1220" dirty="0">
                 <a:solidFill>
                   <a:srgbClr val="17364A"/>
                 </a:solidFill>
@@ -8167,9 +8169,9 @@
                 <a:ea typeface="Aptos" pitchFamily="34" charset="-122"/>
                 <a:cs typeface="Aptos" pitchFamily="34" charset="-120"/>
               </a:rPr>
-              <a:t>For generative AI, architecture determines what source material the tool can access, whether it can.</a:t>
-            </a:r>
-            <a:endParaRPr lang="en-US" sz="1320" dirty="0"/>
+              <a:t>For generative AI, architecture determines what source material the tool can.</a:t>
+            </a:r>
+            <a:endParaRPr lang="en-US" sz="1220" dirty="0"/>
           </a:p>
         </p:txBody>
       </p:sp>
@@ -8181,12 +8183,12 @@
         </p:nvSpPr>
         <p:spPr>
           <a:xfrm>
-            <a:off x="7635240" y="2718511"/>
-            <a:ext cx="3474720" cy="1328623"/>
+            <a:off x="7543800" y="2724912"/>
+            <a:ext cx="3611880" cy="1527048"/>
           </a:xfrm>
           <a:prstGeom prst="roundRect">
             <a:avLst>
-              <a:gd name="adj" fmla="val 8259"/>
+              <a:gd name="adj" fmla="val 7186"/>
             </a:avLst>
           </a:prstGeom>
           <a:solidFill>
@@ -8208,8 +8210,8 @@
         </p:nvSpPr>
         <p:spPr>
           <a:xfrm>
-            <a:off x="7799832" y="2864815"/>
-            <a:ext cx="3145536" cy="256032"/>
+            <a:off x="7708392" y="2852928"/>
+            <a:ext cx="3282696" cy="228600"/>
           </a:xfrm>
           <a:prstGeom prst="rect">
             <a:avLst/>
@@ -8225,7 +8227,7 @@
               <a:buNone/>
             </a:pPr>
             <a:r>
-              <a:rPr lang="en-US" sz="1300" b="1" dirty="0">
+              <a:rPr lang="en-US" sz="1220" b="1" dirty="0">
                 <a:solidFill>
                   <a:srgbClr val="0068B7"/>
                 </a:solidFill>
@@ -8235,7 +8237,7 @@
               </a:rPr>
               <a:t>Concept checkpoints</a:t>
             </a:r>
-            <a:endParaRPr lang="en-US" sz="1300" dirty="0"/>
+            <a:endParaRPr lang="en-US" sz="1220" dirty="0"/>
           </a:p>
         </p:txBody>
       </p:sp>
@@ -8247,8 +8249,8 @@
         </p:nvSpPr>
         <p:spPr>
           <a:xfrm>
-            <a:off x="7818120" y="3230575"/>
-            <a:ext cx="3090672" cy="670255"/>
+            <a:off x="7726680" y="3182112"/>
+            <a:ext cx="3227832" cy="960120"/>
           </a:xfrm>
           <a:prstGeom prst="rect">
             <a:avLst/>
@@ -8266,7 +8268,7 @@
               <a:buNone/>
             </a:pPr>
             <a:r>
-              <a:rPr lang="en-US" sz="1220" dirty="0">
+              <a:rPr lang="en-US" sz="1140" dirty="0">
                 <a:solidFill>
                   <a:srgbClr val="17364A"/>
                 </a:solidFill>
@@ -8274,16 +8276,16 @@
                 <a:ea typeface="Aptos" pitchFamily="34" charset="-122"/>
                 <a:cs typeface="Aptos" pitchFamily="34" charset="-120"/>
               </a:rPr>
-              <a:t>For generative AI, architecture determines what source material.</a:t>
-            </a:r>
-            <a:endParaRPr lang="en-US" sz="1220" dirty="0"/>
-          </a:p>
-          <a:p>
-            <a:pPr indent="0" marL="0">
-              <a:buNone/>
-            </a:pPr>
-            <a:r>
-              <a:rPr lang="en-US" sz="1220" dirty="0">
+              <a:t>For generative AI, architecture determines what.</a:t>
+            </a:r>
+            <a:endParaRPr lang="en-US" sz="1140" dirty="0"/>
+          </a:p>
+          <a:p>
+            <a:pPr indent="0" marL="0">
+              <a:buNone/>
+            </a:pPr>
+            <a:r>
+              <a:rPr lang="en-US" sz="1140" dirty="0">
                 <a:solidFill>
                   <a:srgbClr val="17364A"/>
                 </a:solidFill>
@@ -8291,16 +8293,16 @@
                 <a:ea typeface="Aptos" pitchFamily="34" charset="-122"/>
                 <a:cs typeface="Aptos" pitchFamily="34" charset="-120"/>
               </a:rPr>
-              <a:t>A generative AI tool used to summarize policy documents has.</a:t>
-            </a:r>
-            <a:endParaRPr lang="en-US" sz="1220" dirty="0"/>
-          </a:p>
-          <a:p>
-            <a:pPr indent="0" marL="0">
-              <a:buNone/>
-            </a:pPr>
-            <a:r>
-              <a:rPr lang="en-US" sz="1220" dirty="0">
+              <a:t>A generative AI tool used to summarize policy.</a:t>
+            </a:r>
+            <a:endParaRPr lang="en-US" sz="1140" dirty="0"/>
+          </a:p>
+          <a:p>
+            <a:pPr indent="0" marL="0">
+              <a:buNone/>
+            </a:pPr>
+            <a:r>
+              <a:rPr lang="en-US" sz="1140" dirty="0">
                 <a:solidFill>
                   <a:srgbClr val="17364A"/>
                 </a:solidFill>
@@ -8308,9 +8310,9 @@
                 <a:ea typeface="Aptos" pitchFamily="34" charset="-122"/>
                 <a:cs typeface="Aptos" pitchFamily="34" charset="-120"/>
               </a:rPr>
-              <a:t>For predictive analytics, architecture determines whether the.</a:t>
-            </a:r>
-            <a:endParaRPr lang="en-US" sz="1220" dirty="0"/>
+              <a:t>For predictive analytics, architecture determines.</a:t>
+            </a:r>
+            <a:endParaRPr lang="en-US" sz="1140" dirty="0"/>
           </a:p>
         </p:txBody>
       </p:sp>
@@ -8322,12 +8324,12 @@
         </p:nvSpPr>
         <p:spPr>
           <a:xfrm>
-            <a:off x="7635240" y="4184294"/>
-            <a:ext cx="3474720" cy="1466698"/>
+            <a:off x="7543800" y="4389120"/>
+            <a:ext cx="3611880" cy="1261872"/>
           </a:xfrm>
           <a:prstGeom prst="roundRect">
             <a:avLst>
-              <a:gd name="adj" fmla="val 7481"/>
+              <a:gd name="adj" fmla="val 8696"/>
             </a:avLst>
           </a:prstGeom>
           <a:solidFill>
@@ -8349,8 +8351,8 @@
         </p:nvSpPr>
         <p:spPr>
           <a:xfrm>
-            <a:off x="7799832" y="4330598"/>
-            <a:ext cx="3145536" cy="256032"/>
+            <a:off x="7708392" y="4517136"/>
+            <a:ext cx="3282696" cy="228600"/>
           </a:xfrm>
           <a:prstGeom prst="rect">
             <a:avLst/>
@@ -8366,7 +8368,7 @@
               <a:buNone/>
             </a:pPr>
             <a:r>
-              <a:rPr lang="en-US" sz="1300" b="1" dirty="0">
+              <a:rPr lang="en-US" sz="1220" b="1" dirty="0">
                 <a:solidFill>
                   <a:srgbClr val="0068B7"/>
                 </a:solidFill>
@@ -8376,7 +8378,7 @@
               </a:rPr>
               <a:t>How to validate</a:t>
             </a:r>
-            <a:endParaRPr lang="en-US" sz="1300" dirty="0"/>
+            <a:endParaRPr lang="en-US" sz="1220" dirty="0"/>
           </a:p>
         </p:txBody>
       </p:sp>
@@ -8388,8 +8390,8 @@
         </p:nvSpPr>
         <p:spPr>
           <a:xfrm>
-            <a:off x="7799832" y="4659782"/>
-            <a:ext cx="3145536" cy="899770"/>
+            <a:off x="7708392" y="4828032"/>
+            <a:ext cx="3282696" cy="749808"/>
           </a:xfrm>
           <a:prstGeom prst="rect">
             <a:avLst/>
@@ -8407,7 +8409,7 @@
               <a:buNone/>
             </a:pPr>
             <a:r>
-              <a:rPr lang="en-US" sz="1320" dirty="0">
+              <a:rPr lang="en-US" sz="1220" dirty="0">
                 <a:solidFill>
                   <a:srgbClr val="17364A"/>
                 </a:solidFill>
@@ -8415,9 +8417,9 @@
                 <a:ea typeface="Aptos" pitchFamily="34" charset="-122"/>
                 <a:cs typeface="Aptos" pitchFamily="34" charset="-120"/>
               </a:rPr>
-              <a:t>Connect the concept to data quality, model performance, validation evidence, monitoring measures, and decisions that remain under human control.</a:t>
-            </a:r>
-            <a:endParaRPr lang="en-US" sz="1320" dirty="0"/>
+              <a:t>Connect the concept to data quality, model performance, validation evidence,.</a:t>
+            </a:r>
+            <a:endParaRPr lang="en-US" sz="1220" dirty="0"/>
           </a:p>
         </p:txBody>
       </p:sp>
@@ -8708,8 +8710,8 @@
         </p:nvSpPr>
         <p:spPr>
           <a:xfrm>
-            <a:off x="868680" y="1508760"/>
-            <a:ext cx="6309360" cy="4160520"/>
+            <a:off x="822960" y="1463040"/>
+            <a:ext cx="6565392" cy="4343400"/>
           </a:xfrm>
           <a:prstGeom prst="rect">
             <a:avLst/>
@@ -8727,7 +8729,7 @@
               <a:buNone/>
             </a:pPr>
             <a:r>
-              <a:rPr lang="en-US" sz="2100" dirty="0">
+              <a:rPr lang="en-US" sz="1920" dirty="0">
                 <a:solidFill>
                   <a:srgbClr val="003A63"/>
                 </a:solidFill>
@@ -8735,16 +8737,16 @@
                 <a:ea typeface="Aptos" pitchFamily="34" charset="-122"/>
                 <a:cs typeface="Aptos" pitchFamily="34" charset="-120"/>
               </a:rPr>
-              <a:t>• Which public health workflow in your agency would be most helpful to map before considering AI?</a:t>
-            </a:r>
-            <a:endParaRPr lang="en-US" sz="2100" dirty="0"/>
-          </a:p>
-          <a:p>
-            <a:pPr indent="0" marL="0">
-              <a:buNone/>
-            </a:pPr>
-            <a:r>
-              <a:rPr lang="en-US" sz="2100" dirty="0">
+              <a:t>• Which public health workflow in your agency would be most helpful to map.</a:t>
+            </a:r>
+            <a:endParaRPr lang="en-US" sz="1920" dirty="0"/>
+          </a:p>
+          <a:p>
+            <a:pPr indent="0" marL="0">
+              <a:buNone/>
+            </a:pPr>
+            <a:r>
+              <a:rPr lang="en-US" sz="1920" dirty="0">
                 <a:solidFill>
                   <a:srgbClr val="003A63"/>
                 </a:solidFill>
@@ -8752,16 +8754,16 @@
                 <a:ea typeface="Aptos" pitchFamily="34" charset="-122"/>
                 <a:cs typeface="Aptos" pitchFamily="34" charset="-120"/>
               </a:rPr>
-              <a:t>• What are the source systems, systems of record, and downstream outputs for that workflow?</a:t>
-            </a:r>
-            <a:endParaRPr lang="en-US" sz="2100" dirty="0"/>
-          </a:p>
-          <a:p>
-            <a:pPr indent="0" marL="0">
-              <a:buNone/>
-            </a:pPr>
-            <a:r>
-              <a:rPr lang="en-US" sz="2100" dirty="0">
+              <a:t>• What are the source systems, systems of record, and downstream outputs for.</a:t>
+            </a:r>
+            <a:endParaRPr lang="en-US" sz="1920" dirty="0"/>
+          </a:p>
+          <a:p>
+            <a:pPr indent="0" marL="0">
+              <a:buNone/>
+            </a:pPr>
+            <a:r>
+              <a:rPr lang="en-US" sz="1920" dirty="0">
                 <a:solidFill>
                   <a:srgbClr val="003A63"/>
                 </a:solidFill>
@@ -8769,9 +8771,9 @@
                 <a:ea typeface="Aptos" pitchFamily="34" charset="-122"/>
                 <a:cs typeface="Aptos" pitchFamily="34" charset="-120"/>
               </a:rPr>
-              <a:t>• Where are data transformed, linked, summarized, interpreted, or manually corrected?</a:t>
-            </a:r>
-            <a:endParaRPr lang="en-US" sz="2100" dirty="0"/>
+              <a:t>• Where are data transformed, linked, summarized, interpreted, or manually.</a:t>
+            </a:r>
+            <a:endParaRPr lang="en-US" sz="1920" dirty="0"/>
           </a:p>
         </p:txBody>
       </p:sp>
@@ -8783,12 +8785,12 @@
         </p:nvSpPr>
         <p:spPr>
           <a:xfrm>
-            <a:off x="7635240" y="1325880"/>
-            <a:ext cx="3474720" cy="1255471"/>
+            <a:off x="7543800" y="1325880"/>
+            <a:ext cx="3611880" cy="1261872"/>
           </a:xfrm>
           <a:prstGeom prst="roundRect">
             <a:avLst>
-              <a:gd name="adj" fmla="val 8740"/>
+              <a:gd name="adj" fmla="val 8696"/>
             </a:avLst>
           </a:prstGeom>
           <a:solidFill>
@@ -8810,8 +8812,8 @@
         </p:nvSpPr>
         <p:spPr>
           <a:xfrm>
-            <a:off x="7799832" y="1472184"/>
-            <a:ext cx="3145536" cy="256032"/>
+            <a:off x="7708392" y="1453896"/>
+            <a:ext cx="3282696" cy="228600"/>
           </a:xfrm>
           <a:prstGeom prst="rect">
             <a:avLst/>
@@ -8827,7 +8829,7 @@
               <a:buNone/>
             </a:pPr>
             <a:r>
-              <a:rPr lang="en-US" sz="1300" b="1" dirty="0">
+              <a:rPr lang="en-US" sz="1220" b="1" dirty="0">
                 <a:solidFill>
                   <a:srgbClr val="0068B7"/>
                 </a:solidFill>
@@ -8837,7 +8839,7 @@
               </a:rPr>
               <a:t>Data decision</a:t>
             </a:r>
-            <a:endParaRPr lang="en-US" sz="1300" dirty="0"/>
+            <a:endParaRPr lang="en-US" sz="1220" dirty="0"/>
           </a:p>
         </p:txBody>
       </p:sp>
@@ -8849,8 +8851,8 @@
         </p:nvSpPr>
         <p:spPr>
           <a:xfrm>
-            <a:off x="7799832" y="1801368"/>
-            <a:ext cx="3145536" cy="688543"/>
+            <a:off x="7708392" y="1764792"/>
+            <a:ext cx="3282696" cy="749808"/>
           </a:xfrm>
           <a:prstGeom prst="rect">
             <a:avLst/>
@@ -8868,7 +8870,7 @@
               <a:buNone/>
             </a:pPr>
             <a:r>
-              <a:rPr lang="en-US" sz="1320" dirty="0">
+              <a:rPr lang="en-US" sz="1220" dirty="0">
                 <a:solidFill>
                   <a:srgbClr val="17364A"/>
                 </a:solidFill>
@@ -8876,9 +8878,9 @@
                 <a:ea typeface="Aptos" pitchFamily="34" charset="-122"/>
                 <a:cs typeface="Aptos" pitchFamily="34" charset="-120"/>
               </a:rPr>
-              <a:t>Which public health workflow in your agency would be most helpful to map before considering AI?</a:t>
-            </a:r>
-            <a:endParaRPr lang="en-US" sz="1320" dirty="0"/>
+              <a:t>Which public health workflow in your agency would be most helpful to map before.</a:t>
+            </a:r>
+            <a:endParaRPr lang="en-US" sz="1220" dirty="0"/>
           </a:p>
         </p:txBody>
       </p:sp>
@@ -8890,12 +8892,12 @@
         </p:nvSpPr>
         <p:spPr>
           <a:xfrm>
-            <a:off x="7635240" y="2718511"/>
-            <a:ext cx="3474720" cy="1328623"/>
+            <a:off x="7543800" y="2724912"/>
+            <a:ext cx="3611880" cy="1527048"/>
           </a:xfrm>
           <a:prstGeom prst="roundRect">
             <a:avLst>
-              <a:gd name="adj" fmla="val 8259"/>
+              <a:gd name="adj" fmla="val 7186"/>
             </a:avLst>
           </a:prstGeom>
           <a:solidFill>
@@ -8917,8 +8919,8 @@
         </p:nvSpPr>
         <p:spPr>
           <a:xfrm>
-            <a:off x="7799832" y="2864815"/>
-            <a:ext cx="3145536" cy="256032"/>
+            <a:off x="7708392" y="2852928"/>
+            <a:ext cx="3282696" cy="228600"/>
           </a:xfrm>
           <a:prstGeom prst="rect">
             <a:avLst/>
@@ -8934,7 +8936,7 @@
               <a:buNone/>
             </a:pPr>
             <a:r>
-              <a:rPr lang="en-US" sz="1300" b="1" dirty="0">
+              <a:rPr lang="en-US" sz="1220" b="1" dirty="0">
                 <a:solidFill>
                   <a:srgbClr val="0068B7"/>
                 </a:solidFill>
@@ -8944,7 +8946,7 @@
               </a:rPr>
               <a:t>Concept checkpoints</a:t>
             </a:r>
-            <a:endParaRPr lang="en-US" sz="1300" dirty="0"/>
+            <a:endParaRPr lang="en-US" sz="1220" dirty="0"/>
           </a:p>
         </p:txBody>
       </p:sp>
@@ -8956,8 +8958,8 @@
         </p:nvSpPr>
         <p:spPr>
           <a:xfrm>
-            <a:off x="7818120" y="3230575"/>
-            <a:ext cx="3090672" cy="670255"/>
+            <a:off x="7726680" y="3182112"/>
+            <a:ext cx="3227832" cy="960120"/>
           </a:xfrm>
           <a:prstGeom prst="rect">
             <a:avLst/>
@@ -8975,7 +8977,7 @@
               <a:buNone/>
             </a:pPr>
             <a:r>
-              <a:rPr lang="en-US" sz="1220" dirty="0">
+              <a:rPr lang="en-US" sz="1140" dirty="0">
                 <a:solidFill>
                   <a:srgbClr val="17364A"/>
                 </a:solidFill>
@@ -8983,16 +8985,16 @@
                 <a:ea typeface="Aptos" pitchFamily="34" charset="-122"/>
                 <a:cs typeface="Aptos" pitchFamily="34" charset="-120"/>
               </a:rPr>
-              <a:t>Which public health workflow in your agency would be most helpful.</a:t>
-            </a:r>
-            <a:endParaRPr lang="en-US" sz="1220" dirty="0"/>
-          </a:p>
-          <a:p>
-            <a:pPr indent="0" marL="0">
-              <a:buNone/>
-            </a:pPr>
-            <a:r>
-              <a:rPr lang="en-US" sz="1220" dirty="0">
+              <a:t>Which public health workflow in your agency would.</a:t>
+            </a:r>
+            <a:endParaRPr lang="en-US" sz="1140" dirty="0"/>
+          </a:p>
+          <a:p>
+            <a:pPr indent="0" marL="0">
+              <a:buNone/>
+            </a:pPr>
+            <a:r>
+              <a:rPr lang="en-US" sz="1140" dirty="0">
                 <a:solidFill>
                   <a:srgbClr val="17364A"/>
                 </a:solidFill>
@@ -9000,16 +9002,16 @@
                 <a:ea typeface="Aptos" pitchFamily="34" charset="-122"/>
                 <a:cs typeface="Aptos" pitchFamily="34" charset="-120"/>
               </a:rPr>
-              <a:t>What are the source systems, systems of record, and downstream.</a:t>
-            </a:r>
-            <a:endParaRPr lang="en-US" sz="1220" dirty="0"/>
-          </a:p>
-          <a:p>
-            <a:pPr indent="0" marL="0">
-              <a:buNone/>
-            </a:pPr>
-            <a:r>
-              <a:rPr lang="en-US" sz="1220" dirty="0">
+              <a:t>What are the source systems, systems of record,.</a:t>
+            </a:r>
+            <a:endParaRPr lang="en-US" sz="1140" dirty="0"/>
+          </a:p>
+          <a:p>
+            <a:pPr indent="0" marL="0">
+              <a:buNone/>
+            </a:pPr>
+            <a:r>
+              <a:rPr lang="en-US" sz="1140" dirty="0">
                 <a:solidFill>
                   <a:srgbClr val="17364A"/>
                 </a:solidFill>
@@ -9017,9 +9019,9 @@
                 <a:ea typeface="Aptos" pitchFamily="34" charset="-122"/>
                 <a:cs typeface="Aptos" pitchFamily="34" charset="-120"/>
               </a:rPr>
-              <a:t>Where are data transformed, linked, summarized, interpreted, or.</a:t>
-            </a:r>
-            <a:endParaRPr lang="en-US" sz="1220" dirty="0"/>
+              <a:t>Where are data transformed, linked, summarized,.</a:t>
+            </a:r>
+            <a:endParaRPr lang="en-US" sz="1140" dirty="0"/>
           </a:p>
         </p:txBody>
       </p:sp>
@@ -9031,12 +9033,12 @@
         </p:nvSpPr>
         <p:spPr>
           <a:xfrm>
-            <a:off x="7635240" y="4184294"/>
-            <a:ext cx="3474720" cy="1466698"/>
+            <a:off x="7543800" y="4389120"/>
+            <a:ext cx="3611880" cy="1261872"/>
           </a:xfrm>
           <a:prstGeom prst="roundRect">
             <a:avLst>
-              <a:gd name="adj" fmla="val 7481"/>
+              <a:gd name="adj" fmla="val 8696"/>
             </a:avLst>
           </a:prstGeom>
           <a:solidFill>
@@ -9058,8 +9060,8 @@
         </p:nvSpPr>
         <p:spPr>
           <a:xfrm>
-            <a:off x="7799832" y="4330598"/>
-            <a:ext cx="3145536" cy="256032"/>
+            <a:off x="7708392" y="4517136"/>
+            <a:ext cx="3282696" cy="228600"/>
           </a:xfrm>
           <a:prstGeom prst="rect">
             <a:avLst/>
@@ -9075,7 +9077,7 @@
               <a:buNone/>
             </a:pPr>
             <a:r>
-              <a:rPr lang="en-US" sz="1300" b="1" dirty="0">
+              <a:rPr lang="en-US" sz="1220" b="1" dirty="0">
                 <a:solidFill>
                   <a:srgbClr val="0068B7"/>
                 </a:solidFill>
@@ -9085,7 +9087,7 @@
               </a:rPr>
               <a:t>How to validate</a:t>
             </a:r>
-            <a:endParaRPr lang="en-US" sz="1300" dirty="0"/>
+            <a:endParaRPr lang="en-US" sz="1220" dirty="0"/>
           </a:p>
         </p:txBody>
       </p:sp>
@@ -9097,8 +9099,8 @@
         </p:nvSpPr>
         <p:spPr>
           <a:xfrm>
-            <a:off x="7799832" y="4659782"/>
-            <a:ext cx="3145536" cy="899770"/>
+            <a:off x="7708392" y="4828032"/>
+            <a:ext cx="3282696" cy="749808"/>
           </a:xfrm>
           <a:prstGeom prst="rect">
             <a:avLst/>
@@ -9116,7 +9118,7 @@
               <a:buNone/>
             </a:pPr>
             <a:r>
-              <a:rPr lang="en-US" sz="1320" dirty="0">
+              <a:rPr lang="en-US" sz="1220" dirty="0">
                 <a:solidFill>
                   <a:srgbClr val="17364A"/>
                 </a:solidFill>
@@ -9124,9 +9126,9 @@
                 <a:ea typeface="Aptos" pitchFamily="34" charset="-122"/>
                 <a:cs typeface="Aptos" pitchFamily="34" charset="-120"/>
               </a:rPr>
-              <a:t>Connect the concept to data quality, model performance, validation evidence, monitoring measures, and decisions that remain under human control.</a:t>
-            </a:r>
-            <a:endParaRPr lang="en-US" sz="1320" dirty="0"/>
+              <a:t>Connect the concept to data quality, model performance, validation evidence,.</a:t>
+            </a:r>
+            <a:endParaRPr lang="en-US" sz="1220" dirty="0"/>
           </a:p>
         </p:txBody>
       </p:sp>
@@ -9417,8 +9419,8 @@
         </p:nvSpPr>
         <p:spPr>
           <a:xfrm>
-            <a:off x="868680" y="1508760"/>
-            <a:ext cx="6309360" cy="4160520"/>
+            <a:off x="822960" y="1463040"/>
+            <a:ext cx="6565392" cy="4343400"/>
           </a:xfrm>
           <a:prstGeom prst="rect">
             <a:avLst/>
@@ -9436,7 +9438,7 @@
               <a:buNone/>
             </a:pPr>
             <a:r>
-              <a:rPr lang="en-US" sz="2100" dirty="0">
+              <a:rPr lang="en-US" sz="1920" dirty="0">
                 <a:solidFill>
                   <a:srgbClr val="003A63"/>
                 </a:solidFill>
@@ -9444,16 +9446,16 @@
                 <a:ea typeface="Aptos" pitchFamily="34" charset="-122"/>
                 <a:cs typeface="Aptos" pitchFamily="34" charset="-120"/>
               </a:rPr>
-              <a:t>• Which parts of the workflow require legal, epidemiologic, clinical, communications, equity,.</a:t>
-            </a:r>
-            <a:endParaRPr lang="en-US" sz="2100" dirty="0"/>
-          </a:p>
-          <a:p>
-            <a:pPr indent="0" marL="0">
-              <a:buNone/>
-            </a:pPr>
-            <a:r>
-              <a:rPr lang="en-US" sz="2100" dirty="0">
+              <a:t>• Which parts of the workflow require legal, epidemiologic, clinical,.</a:t>
+            </a:r>
+            <a:endParaRPr lang="en-US" sz="1920" dirty="0"/>
+          </a:p>
+          <a:p>
+            <a:pPr indent="0" marL="0">
+              <a:buNone/>
+            </a:pPr>
+            <a:r>
+              <a:rPr lang="en-US" sz="1920" dirty="0">
                 <a:solidFill>
                   <a:srgbClr val="003A63"/>
                 </a:solidFill>
@@ -9463,14 +9465,14 @@
               </a:rPr>
               <a:t>• What could go wrong if AI were added without changing the architecture?</a:t>
             </a:r>
-            <a:endParaRPr lang="en-US" sz="2100" dirty="0"/>
-          </a:p>
-          <a:p>
-            <a:pPr indent="0" marL="0">
-              <a:buNone/>
-            </a:pPr>
-            <a:r>
-              <a:rPr lang="en-US" sz="2100" dirty="0">
+            <a:endParaRPr lang="en-US" sz="1920" dirty="0"/>
+          </a:p>
+          <a:p>
+            <a:pPr indent="0" marL="0">
+              <a:buNone/>
+            </a:pPr>
+            <a:r>
+              <a:rPr lang="en-US" sz="1920" dirty="0">
                 <a:solidFill>
                   <a:srgbClr val="003A63"/>
                 </a:solidFill>
@@ -9478,9 +9480,9 @@
                 <a:ea typeface="Aptos" pitchFamily="34" charset="-122"/>
                 <a:cs typeface="Aptos" pitchFamily="34" charset="-120"/>
               </a:rPr>
-              <a:t>• Which monitoring indicators would show whether the AI-supported workflow is working safely and.</a:t>
-            </a:r>
-            <a:endParaRPr lang="en-US" sz="2100" dirty="0"/>
+              <a:t>• Which monitoring indicators would show whether the AI-supported workflow is.</a:t>
+            </a:r>
+            <a:endParaRPr lang="en-US" sz="1920" dirty="0"/>
           </a:p>
         </p:txBody>
       </p:sp>
@@ -9492,12 +9494,12 @@
         </p:nvSpPr>
         <p:spPr>
           <a:xfrm>
-            <a:off x="7635240" y="1325880"/>
-            <a:ext cx="3474720" cy="1255471"/>
+            <a:off x="7543800" y="1325880"/>
+            <a:ext cx="3611880" cy="1261872"/>
           </a:xfrm>
           <a:prstGeom prst="roundRect">
             <a:avLst>
-              <a:gd name="adj" fmla="val 8740"/>
+              <a:gd name="adj" fmla="val 8696"/>
             </a:avLst>
           </a:prstGeom>
           <a:solidFill>
@@ -9519,8 +9521,8 @@
         </p:nvSpPr>
         <p:spPr>
           <a:xfrm>
-            <a:off x="7799832" y="1472184"/>
-            <a:ext cx="3145536" cy="256032"/>
+            <a:off x="7708392" y="1453896"/>
+            <a:ext cx="3282696" cy="228600"/>
           </a:xfrm>
           <a:prstGeom prst="rect">
             <a:avLst/>
@@ -9536,7 +9538,7 @@
               <a:buNone/>
             </a:pPr>
             <a:r>
-              <a:rPr lang="en-US" sz="1300" b="1" dirty="0">
+              <a:rPr lang="en-US" sz="1220" b="1" dirty="0">
                 <a:solidFill>
                   <a:srgbClr val="0068B7"/>
                 </a:solidFill>
@@ -9546,7 +9548,7 @@
               </a:rPr>
               <a:t>Data decision</a:t>
             </a:r>
-            <a:endParaRPr lang="en-US" sz="1300" dirty="0"/>
+            <a:endParaRPr lang="en-US" sz="1220" dirty="0"/>
           </a:p>
         </p:txBody>
       </p:sp>
@@ -9558,8 +9560,8 @@
         </p:nvSpPr>
         <p:spPr>
           <a:xfrm>
-            <a:off x="7799832" y="1801368"/>
-            <a:ext cx="3145536" cy="688543"/>
+            <a:off x="7708392" y="1764792"/>
+            <a:ext cx="3282696" cy="749808"/>
           </a:xfrm>
           <a:prstGeom prst="rect">
             <a:avLst/>
@@ -9577,7 +9579,7 @@
               <a:buNone/>
             </a:pPr>
             <a:r>
-              <a:rPr lang="en-US" sz="1320" dirty="0">
+              <a:rPr lang="en-US" sz="1220" dirty="0">
                 <a:solidFill>
                   <a:srgbClr val="17364A"/>
                 </a:solidFill>
@@ -9585,9 +9587,9 @@
                 <a:ea typeface="Aptos" pitchFamily="34" charset="-122"/>
                 <a:cs typeface="Aptos" pitchFamily="34" charset="-120"/>
               </a:rPr>
-              <a:t>Which parts of the workflow require legal, epidemiologic, clinical, communications, equity, privacy, or.</a:t>
-            </a:r>
-            <a:endParaRPr lang="en-US" sz="1320" dirty="0"/>
+              <a:t>Which parts of the workflow require legal, epidemiologic, clinical,.</a:t>
+            </a:r>
+            <a:endParaRPr lang="en-US" sz="1220" dirty="0"/>
           </a:p>
         </p:txBody>
       </p:sp>
@@ -9599,12 +9601,12 @@
         </p:nvSpPr>
         <p:spPr>
           <a:xfrm>
-            <a:off x="7635240" y="2718511"/>
-            <a:ext cx="3474720" cy="1328623"/>
+            <a:off x="7543800" y="2724912"/>
+            <a:ext cx="3611880" cy="1527048"/>
           </a:xfrm>
           <a:prstGeom prst="roundRect">
             <a:avLst>
-              <a:gd name="adj" fmla="val 8259"/>
+              <a:gd name="adj" fmla="val 7186"/>
             </a:avLst>
           </a:prstGeom>
           <a:solidFill>
@@ -9626,8 +9628,8 @@
         </p:nvSpPr>
         <p:spPr>
           <a:xfrm>
-            <a:off x="7799832" y="2864815"/>
-            <a:ext cx="3145536" cy="256032"/>
+            <a:off x="7708392" y="2852928"/>
+            <a:ext cx="3282696" cy="228600"/>
           </a:xfrm>
           <a:prstGeom prst="rect">
             <a:avLst/>
@@ -9643,7 +9645,7 @@
               <a:buNone/>
             </a:pPr>
             <a:r>
-              <a:rPr lang="en-US" sz="1300" b="1" dirty="0">
+              <a:rPr lang="en-US" sz="1220" b="1" dirty="0">
                 <a:solidFill>
                   <a:srgbClr val="0068B7"/>
                 </a:solidFill>
@@ -9653,7 +9655,7 @@
               </a:rPr>
               <a:t>Concept checkpoints</a:t>
             </a:r>
-            <a:endParaRPr lang="en-US" sz="1300" dirty="0"/>
+            <a:endParaRPr lang="en-US" sz="1220" dirty="0"/>
           </a:p>
         </p:txBody>
       </p:sp>
@@ -9665,8 +9667,8 @@
         </p:nvSpPr>
         <p:spPr>
           <a:xfrm>
-            <a:off x="7818120" y="3230575"/>
-            <a:ext cx="3090672" cy="670255"/>
+            <a:off x="7726680" y="3182112"/>
+            <a:ext cx="3227832" cy="960120"/>
           </a:xfrm>
           <a:prstGeom prst="rect">
             <a:avLst/>
@@ -9684,7 +9686,7 @@
               <a:buNone/>
             </a:pPr>
             <a:r>
-              <a:rPr lang="en-US" sz="1220" dirty="0">
+              <a:rPr lang="en-US" sz="1140" dirty="0">
                 <a:solidFill>
                   <a:srgbClr val="17364A"/>
                 </a:solidFill>
@@ -9692,16 +9694,16 @@
                 <a:ea typeface="Aptos" pitchFamily="34" charset="-122"/>
                 <a:cs typeface="Aptos" pitchFamily="34" charset="-120"/>
               </a:rPr>
-              <a:t>Which parts of the workflow require legal, epidemiologic,.</a:t>
-            </a:r>
-            <a:endParaRPr lang="en-US" sz="1220" dirty="0"/>
-          </a:p>
-          <a:p>
-            <a:pPr indent="0" marL="0">
-              <a:buNone/>
-            </a:pPr>
-            <a:r>
-              <a:rPr lang="en-US" sz="1220" dirty="0">
+              <a:t>Which parts of the workflow require legal,.</a:t>
+            </a:r>
+            <a:endParaRPr lang="en-US" sz="1140" dirty="0"/>
+          </a:p>
+          <a:p>
+            <a:pPr indent="0" marL="0">
+              <a:buNone/>
+            </a:pPr>
+            <a:r>
+              <a:rPr lang="en-US" sz="1140" dirty="0">
                 <a:solidFill>
                   <a:srgbClr val="17364A"/>
                 </a:solidFill>
@@ -9709,16 +9711,16 @@
                 <a:ea typeface="Aptos" pitchFamily="34" charset="-122"/>
                 <a:cs typeface="Aptos" pitchFamily="34" charset="-120"/>
               </a:rPr>
-              <a:t>What could go wrong if AI were added without changing the.</a:t>
-            </a:r>
-            <a:endParaRPr lang="en-US" sz="1220" dirty="0"/>
-          </a:p>
-          <a:p>
-            <a:pPr indent="0" marL="0">
-              <a:buNone/>
-            </a:pPr>
-            <a:r>
-              <a:rPr lang="en-US" sz="1220" dirty="0">
+              <a:t>What could go wrong if AI were added without.</a:t>
+            </a:r>
+            <a:endParaRPr lang="en-US" sz="1140" dirty="0"/>
+          </a:p>
+          <a:p>
+            <a:pPr indent="0" marL="0">
+              <a:buNone/>
+            </a:pPr>
+            <a:r>
+              <a:rPr lang="en-US" sz="1140" dirty="0">
                 <a:solidFill>
                   <a:srgbClr val="17364A"/>
                 </a:solidFill>
@@ -9726,9 +9728,9 @@
                 <a:ea typeface="Aptos" pitchFamily="34" charset="-122"/>
                 <a:cs typeface="Aptos" pitchFamily="34" charset="-120"/>
               </a:rPr>
-              <a:t>Which monitoring indicators would show whether the AI-supported.</a:t>
-            </a:r>
-            <a:endParaRPr lang="en-US" sz="1220" dirty="0"/>
+              <a:t>Which monitoring indicators would show whether the.</a:t>
+            </a:r>
+            <a:endParaRPr lang="en-US" sz="1140" dirty="0"/>
           </a:p>
         </p:txBody>
       </p:sp>
@@ -9740,12 +9742,12 @@
         </p:nvSpPr>
         <p:spPr>
           <a:xfrm>
-            <a:off x="7635240" y="4184294"/>
-            <a:ext cx="3474720" cy="1466698"/>
+            <a:off x="7543800" y="4389120"/>
+            <a:ext cx="3611880" cy="1261872"/>
           </a:xfrm>
           <a:prstGeom prst="roundRect">
             <a:avLst>
-              <a:gd name="adj" fmla="val 7481"/>
+              <a:gd name="adj" fmla="val 8696"/>
             </a:avLst>
           </a:prstGeom>
           <a:solidFill>
@@ -9767,8 +9769,8 @@
         </p:nvSpPr>
         <p:spPr>
           <a:xfrm>
-            <a:off x="7799832" y="4330598"/>
-            <a:ext cx="3145536" cy="256032"/>
+            <a:off x="7708392" y="4517136"/>
+            <a:ext cx="3282696" cy="228600"/>
           </a:xfrm>
           <a:prstGeom prst="rect">
             <a:avLst/>
@@ -9784,7 +9786,7 @@
               <a:buNone/>
             </a:pPr>
             <a:r>
-              <a:rPr lang="en-US" sz="1300" b="1" dirty="0">
+              <a:rPr lang="en-US" sz="1220" b="1" dirty="0">
                 <a:solidFill>
                   <a:srgbClr val="0068B7"/>
                 </a:solidFill>
@@ -9794,7 +9796,7 @@
               </a:rPr>
               <a:t>How to validate</a:t>
             </a:r>
-            <a:endParaRPr lang="en-US" sz="1300" dirty="0"/>
+            <a:endParaRPr lang="en-US" sz="1220" dirty="0"/>
           </a:p>
         </p:txBody>
       </p:sp>
@@ -9806,8 +9808,8 @@
         </p:nvSpPr>
         <p:spPr>
           <a:xfrm>
-            <a:off x="7799832" y="4659782"/>
-            <a:ext cx="3145536" cy="899770"/>
+            <a:off x="7708392" y="4828032"/>
+            <a:ext cx="3282696" cy="749808"/>
           </a:xfrm>
           <a:prstGeom prst="rect">
             <a:avLst/>
@@ -9825,7 +9827,7 @@
               <a:buNone/>
             </a:pPr>
             <a:r>
-              <a:rPr lang="en-US" sz="1320" dirty="0">
+              <a:rPr lang="en-US" sz="1220" dirty="0">
                 <a:solidFill>
                   <a:srgbClr val="17364A"/>
                 </a:solidFill>
@@ -9833,9 +9835,9 @@
                 <a:ea typeface="Aptos" pitchFamily="34" charset="-122"/>
                 <a:cs typeface="Aptos" pitchFamily="34" charset="-120"/>
               </a:rPr>
-              <a:t>Connect the concept to data quality, model performance, validation evidence, monitoring measures, and decisions that remain under human control.</a:t>
-            </a:r>
-            <a:endParaRPr lang="en-US" sz="1320" dirty="0"/>
+              <a:t>Connect the concept to data quality, model performance, validation evidence,.</a:t>
+            </a:r>
+            <a:endParaRPr lang="en-US" sz="1220" dirty="0"/>
           </a:p>
         </p:txBody>
       </p:sp>
@@ -10126,8 +10128,8 @@
         </p:nvSpPr>
         <p:spPr>
           <a:xfrm>
-            <a:off x="868680" y="1508760"/>
-            <a:ext cx="6309360" cy="4160520"/>
+            <a:off x="822960" y="1463040"/>
+            <a:ext cx="6565392" cy="4343400"/>
           </a:xfrm>
           <a:prstGeom prst="rect">
             <a:avLst/>
@@ -10145,7 +10147,7 @@
               <a:buNone/>
             </a:pPr>
             <a:r>
-              <a:rPr lang="en-US" sz="2100" dirty="0">
+              <a:rPr lang="en-US" sz="1920" dirty="0">
                 <a:solidFill>
                   <a:srgbClr val="003A63"/>
                 </a:solidFill>
@@ -10155,14 +10157,14 @@
               </a:rPr>
               <a:t>• Create an AI-enabled workflow architecture map for one public health workflow.</a:t>
             </a:r>
-            <a:endParaRPr lang="en-US" sz="2100" dirty="0"/>
-          </a:p>
-          <a:p>
-            <a:pPr indent="0" marL="0">
-              <a:buNone/>
-            </a:pPr>
-            <a:r>
-              <a:rPr lang="en-US" sz="2100" dirty="0">
+            <a:endParaRPr lang="en-US" sz="1920" dirty="0"/>
+          </a:p>
+          <a:p>
+            <a:pPr indent="0" marL="0">
+              <a:buNone/>
+            </a:pPr>
+            <a:r>
+              <a:rPr lang="en-US" sz="1920" dirty="0">
                 <a:solidFill>
                   <a:srgbClr val="003A63"/>
                 </a:solidFill>
@@ -10170,16 +10172,16 @@
                 <a:ea typeface="Aptos" pitchFamily="34" charset="-122"/>
                 <a:cs typeface="Aptos" pitchFamily="34" charset="-120"/>
               </a:rPr>
-              <a:t>• Choose a workflow that is real or realistic for your agency, such as case report intake, lab.</a:t>
-            </a:r>
-            <a:endParaRPr lang="en-US" sz="2100" dirty="0"/>
-          </a:p>
-          <a:p>
-            <a:pPr indent="0" marL="0">
-              <a:buNone/>
-            </a:pPr>
-            <a:r>
-              <a:rPr lang="en-US" sz="2100" dirty="0">
+              <a:t>• Choose a workflow that is real or realistic for your agency, such as case.</a:t>
+            </a:r>
+            <a:endParaRPr lang="en-US" sz="1920" dirty="0"/>
+          </a:p>
+          <a:p>
+            <a:pPr indent="0" marL="0">
+              <a:buNone/>
+            </a:pPr>
+            <a:r>
+              <a:rPr lang="en-US" sz="1920" dirty="0">
                 <a:solidFill>
                   <a:srgbClr val="003A63"/>
                 </a:solidFill>
@@ -10187,9 +10189,9 @@
                 <a:ea typeface="Aptos" pitchFamily="34" charset="-122"/>
                 <a:cs typeface="Aptos" pitchFamily="34" charset="-120"/>
               </a:rPr>
-              <a:t>• Your map should include the source systems, data exchange methods, transformation steps,.</a:t>
-            </a:r>
-            <a:endParaRPr lang="en-US" sz="2100" dirty="0"/>
+              <a:t>• Your map should include the source systems, data exchange methods,.</a:t>
+            </a:r>
+            <a:endParaRPr lang="en-US" sz="1920" dirty="0"/>
           </a:p>
         </p:txBody>
       </p:sp>
@@ -10201,12 +10203,12 @@
         </p:nvSpPr>
         <p:spPr>
           <a:xfrm>
-            <a:off x="7635240" y="1325880"/>
-            <a:ext cx="3474720" cy="1207008"/>
+            <a:off x="7543800" y="1325880"/>
+            <a:ext cx="3611880" cy="1261872"/>
           </a:xfrm>
           <a:prstGeom prst="roundRect">
             <a:avLst>
-              <a:gd name="adj" fmla="val 9091"/>
+              <a:gd name="adj" fmla="val 8696"/>
             </a:avLst>
           </a:prstGeom>
           <a:solidFill>
@@ -10228,8 +10230,8 @@
         </p:nvSpPr>
         <p:spPr>
           <a:xfrm>
-            <a:off x="7799832" y="1472184"/>
-            <a:ext cx="3145536" cy="256032"/>
+            <a:off x="7708392" y="1453896"/>
+            <a:ext cx="3282696" cy="228600"/>
           </a:xfrm>
           <a:prstGeom prst="rect">
             <a:avLst/>
@@ -10245,7 +10247,7 @@
               <a:buNone/>
             </a:pPr>
             <a:r>
-              <a:rPr lang="en-US" sz="1300" b="1" dirty="0">
+              <a:rPr lang="en-US" sz="1220" b="1" dirty="0">
                 <a:solidFill>
                   <a:srgbClr val="0068B7"/>
                 </a:solidFill>
@@ -10255,7 +10257,7 @@
               </a:rPr>
               <a:t>Data decision</a:t>
             </a:r>
-            <a:endParaRPr lang="en-US" sz="1300" dirty="0"/>
+            <a:endParaRPr lang="en-US" sz="1220" dirty="0"/>
           </a:p>
         </p:txBody>
       </p:sp>
@@ -10267,8 +10269,8 @@
         </p:nvSpPr>
         <p:spPr>
           <a:xfrm>
-            <a:off x="7799832" y="1801368"/>
-            <a:ext cx="3145536" cy="640080"/>
+            <a:off x="7708392" y="1764792"/>
+            <a:ext cx="3282696" cy="749808"/>
           </a:xfrm>
           <a:prstGeom prst="rect">
             <a:avLst/>
@@ -10286,7 +10288,7 @@
               <a:buNone/>
             </a:pPr>
             <a:r>
-              <a:rPr lang="en-US" sz="1320" dirty="0">
+              <a:rPr lang="en-US" sz="1220" dirty="0">
                 <a:solidFill>
                   <a:srgbClr val="17364A"/>
                 </a:solidFill>
@@ -10296,7 +10298,7 @@
               </a:rPr>
               <a:t>Create an AI-enabled workflow architecture map for one public health workflow.</a:t>
             </a:r>
-            <a:endParaRPr lang="en-US" sz="1320" dirty="0"/>
+            <a:endParaRPr lang="en-US" sz="1220" dirty="0"/>
           </a:p>
         </p:txBody>
       </p:sp>
@@ -10308,12 +10310,12 @@
         </p:nvSpPr>
         <p:spPr>
           <a:xfrm>
-            <a:off x="7635240" y="2670048"/>
-            <a:ext cx="3474720" cy="1377086"/>
+            <a:off x="7543800" y="2724912"/>
+            <a:ext cx="3611880" cy="1527048"/>
           </a:xfrm>
           <a:prstGeom prst="roundRect">
             <a:avLst>
-              <a:gd name="adj" fmla="val 7968"/>
+              <a:gd name="adj" fmla="val 7186"/>
             </a:avLst>
           </a:prstGeom>
           <a:solidFill>
@@ -10335,8 +10337,8 @@
         </p:nvSpPr>
         <p:spPr>
           <a:xfrm>
-            <a:off x="7799832" y="2816352"/>
-            <a:ext cx="3145536" cy="256032"/>
+            <a:off x="7708392" y="2852928"/>
+            <a:ext cx="3282696" cy="228600"/>
           </a:xfrm>
           <a:prstGeom prst="rect">
             <a:avLst/>
@@ -10352,7 +10354,7 @@
               <a:buNone/>
             </a:pPr>
             <a:r>
-              <a:rPr lang="en-US" sz="1300" b="1" dirty="0">
+              <a:rPr lang="en-US" sz="1220" b="1" dirty="0">
                 <a:solidFill>
                   <a:srgbClr val="0068B7"/>
                 </a:solidFill>
@@ -10362,7 +10364,7 @@
               </a:rPr>
               <a:t>Concept checkpoints</a:t>
             </a:r>
-            <a:endParaRPr lang="en-US" sz="1300" dirty="0"/>
+            <a:endParaRPr lang="en-US" sz="1220" dirty="0"/>
           </a:p>
         </p:txBody>
       </p:sp>
@@ -10374,8 +10376,8 @@
         </p:nvSpPr>
         <p:spPr>
           <a:xfrm>
-            <a:off x="7818120" y="3182112"/>
-            <a:ext cx="3090672" cy="718718"/>
+            <a:off x="7726680" y="3182112"/>
+            <a:ext cx="3227832" cy="960120"/>
           </a:xfrm>
           <a:prstGeom prst="rect">
             <a:avLst/>
@@ -10393,7 +10395,7 @@
               <a:buNone/>
             </a:pPr>
             <a:r>
-              <a:rPr lang="en-US" sz="1220" dirty="0">
+              <a:rPr lang="en-US" sz="1140" dirty="0">
                 <a:solidFill>
                   <a:srgbClr val="17364A"/>
                 </a:solidFill>
@@ -10401,16 +10403,16 @@
                 <a:ea typeface="Aptos" pitchFamily="34" charset="-122"/>
                 <a:cs typeface="Aptos" pitchFamily="34" charset="-120"/>
               </a:rPr>
-              <a:t>Choose a workflow that is real or realistic for your agency, such.</a:t>
-            </a:r>
-            <a:endParaRPr lang="en-US" sz="1220" dirty="0"/>
-          </a:p>
-          <a:p>
-            <a:pPr indent="0" marL="0">
-              <a:buNone/>
-            </a:pPr>
-            <a:r>
-              <a:rPr lang="en-US" sz="1220" dirty="0">
+              <a:t>Choose a workflow that is real or realistic for.</a:t>
+            </a:r>
+            <a:endParaRPr lang="en-US" sz="1140" dirty="0"/>
+          </a:p>
+          <a:p>
+            <a:pPr indent="0" marL="0">
+              <a:buNone/>
+            </a:pPr>
+            <a:r>
+              <a:rPr lang="en-US" sz="1140" dirty="0">
                 <a:solidFill>
                   <a:srgbClr val="17364A"/>
                 </a:solidFill>
@@ -10418,16 +10420,16 @@
                 <a:ea typeface="Aptos" pitchFamily="34" charset="-122"/>
                 <a:cs typeface="Aptos" pitchFamily="34" charset="-120"/>
               </a:rPr>
-              <a:t>Your map should include the source systems, data exchange methods,.</a:t>
-            </a:r>
-            <a:endParaRPr lang="en-US" sz="1220" dirty="0"/>
-          </a:p>
-          <a:p>
-            <a:pPr indent="0" marL="0">
-              <a:buNone/>
-            </a:pPr>
-            <a:r>
-              <a:rPr lang="en-US" sz="1220" dirty="0">
+              <a:t>Your map should include the source systems, data.</a:t>
+            </a:r>
+            <a:endParaRPr lang="en-US" sz="1140" dirty="0"/>
+          </a:p>
+          <a:p>
+            <a:pPr indent="0" marL="0">
+              <a:buNone/>
+            </a:pPr>
+            <a:r>
+              <a:rPr lang="en-US" sz="1140" dirty="0">
                 <a:solidFill>
                   <a:srgbClr val="17364A"/>
                 </a:solidFill>
@@ -10435,9 +10437,9 @@
                 <a:ea typeface="Aptos" pitchFamily="34" charset="-122"/>
                 <a:cs typeface="Aptos" pitchFamily="34" charset="-120"/>
               </a:rPr>
-              <a:t>After completing the map, identify at least five readiness gaps.</a:t>
-            </a:r>
-            <a:endParaRPr lang="en-US" sz="1220" dirty="0"/>
+              <a:t>After completing the map, identify at least five.</a:t>
+            </a:r>
+            <a:endParaRPr lang="en-US" sz="1140" dirty="0"/>
           </a:p>
         </p:txBody>
       </p:sp>
@@ -10449,12 +10451,12 @@
         </p:nvSpPr>
         <p:spPr>
           <a:xfrm>
-            <a:off x="7635240" y="4184294"/>
-            <a:ext cx="3474720" cy="1466698"/>
+            <a:off x="7543800" y="4389120"/>
+            <a:ext cx="3611880" cy="1261872"/>
           </a:xfrm>
           <a:prstGeom prst="roundRect">
             <a:avLst>
-              <a:gd name="adj" fmla="val 7481"/>
+              <a:gd name="adj" fmla="val 8696"/>
             </a:avLst>
           </a:prstGeom>
           <a:solidFill>
@@ -10476,8 +10478,8 @@
         </p:nvSpPr>
         <p:spPr>
           <a:xfrm>
-            <a:off x="7799832" y="4330598"/>
-            <a:ext cx="3145536" cy="256032"/>
+            <a:off x="7708392" y="4517136"/>
+            <a:ext cx="3282696" cy="228600"/>
           </a:xfrm>
           <a:prstGeom prst="rect">
             <a:avLst/>
@@ -10493,7 +10495,7 @@
               <a:buNone/>
             </a:pPr>
             <a:r>
-              <a:rPr lang="en-US" sz="1300" b="1" dirty="0">
+              <a:rPr lang="en-US" sz="1220" b="1" dirty="0">
                 <a:solidFill>
                   <a:srgbClr val="0068B7"/>
                 </a:solidFill>
@@ -10503,7 +10505,7 @@
               </a:rPr>
               <a:t>How to validate</a:t>
             </a:r>
-            <a:endParaRPr lang="en-US" sz="1300" dirty="0"/>
+            <a:endParaRPr lang="en-US" sz="1220" dirty="0"/>
           </a:p>
         </p:txBody>
       </p:sp>
@@ -10515,8 +10517,8 @@
         </p:nvSpPr>
         <p:spPr>
           <a:xfrm>
-            <a:off x="7799832" y="4659782"/>
-            <a:ext cx="3145536" cy="899770"/>
+            <a:off x="7708392" y="4828032"/>
+            <a:ext cx="3282696" cy="749808"/>
           </a:xfrm>
           <a:prstGeom prst="rect">
             <a:avLst/>
@@ -10534,7 +10536,7 @@
               <a:buNone/>
             </a:pPr>
             <a:r>
-              <a:rPr lang="en-US" sz="1320" dirty="0">
+              <a:rPr lang="en-US" sz="1220" dirty="0">
                 <a:solidFill>
                   <a:srgbClr val="17364A"/>
                 </a:solidFill>
@@ -10542,9 +10544,9 @@
                 <a:ea typeface="Aptos" pitchFamily="34" charset="-122"/>
                 <a:cs typeface="Aptos" pitchFamily="34" charset="-120"/>
               </a:rPr>
-              <a:t>Use the assignment to test whether you can explain the concept, apply it to a realistic public health situation, and identify what would need review before the work moves forward.</a:t>
-            </a:r>
-            <a:endParaRPr lang="en-US" sz="1320" dirty="0"/>
+              <a:t>Use the assignment to test whether you can explain the concept, apply it to a.</a:t>
+            </a:r>
+            <a:endParaRPr lang="en-US" sz="1220" dirty="0"/>
           </a:p>
         </p:txBody>
       </p:sp>
@@ -10862,7 +10864,7 @@
                 <a:ea typeface="Aptos" pitchFamily="34" charset="-122"/>
                 <a:cs typeface="Aptos" pitchFamily="34" charset="-120"/>
               </a:rPr>
-              <a:t>• Artificial intelligence does not operate separately from the public health data environment.</a:t>
+              <a:t>• Artificial intelligence does not operate separately from the public health.</a:t>
             </a:r>
             <a:endParaRPr lang="en-US" sz="2100" dirty="0"/>
           </a:p>
@@ -10879,7 +10881,7 @@
                 <a:ea typeface="Aptos" pitchFamily="34" charset="-122"/>
                 <a:cs typeface="Aptos" pitchFamily="34" charset="-120"/>
               </a:rPr>
-              <a:t>• Every AI-supported workflow depends on the quality, structure, timeliness, governance, and.</a:t>
+              <a:t>• Every AI-supported workflow depends on the quality, structure, timeliness,.</a:t>
             </a:r>
             <a:endParaRPr lang="en-US" sz="2100" dirty="0"/>
           </a:p>
@@ -10896,7 +10898,7 @@
                 <a:ea typeface="Aptos" pitchFamily="34" charset="-122"/>
                 <a:cs typeface="Aptos" pitchFamily="34" charset="-120"/>
               </a:rPr>
-              <a:t>• For public health agencies, this means that AI readiness is inseparable from data modernization.</a:t>
+              <a:t>• For public health agencies, this means that AI readiness is inseparable from.</a:t>
             </a:r>
             <a:endParaRPr lang="en-US" sz="2100" dirty="0"/>
           </a:p>
@@ -10937,8 +10939,8 @@
         </p:nvSpPr>
         <p:spPr>
           <a:xfrm>
-            <a:off x="8074152" y="1563624"/>
-            <a:ext cx="2825496" cy="256032"/>
+            <a:off x="8074152" y="1545336"/>
+            <a:ext cx="2825496" cy="228600"/>
           </a:xfrm>
           <a:prstGeom prst="rect">
             <a:avLst/>
@@ -10954,7 +10956,7 @@
               <a:buNone/>
             </a:pPr>
             <a:r>
-              <a:rPr lang="en-US" sz="1300" b="1" dirty="0">
+              <a:rPr lang="en-US" sz="1220" b="1" dirty="0">
                 <a:solidFill>
                   <a:srgbClr val="0068B7"/>
                 </a:solidFill>
@@ -10964,7 +10966,7 @@
               </a:rPr>
               <a:t>Module details</a:t>
             </a:r>
-            <a:endParaRPr lang="en-US" sz="1300" dirty="0"/>
+            <a:endParaRPr lang="en-US" sz="1220" dirty="0"/>
           </a:p>
         </p:txBody>
       </p:sp>
@@ -10976,8 +10978,8 @@
         </p:nvSpPr>
         <p:spPr>
           <a:xfrm>
-            <a:off x="8074152" y="1892808"/>
-            <a:ext cx="2825496" cy="1353312"/>
+            <a:off x="8074152" y="1856232"/>
+            <a:ext cx="2825496" cy="1408176"/>
           </a:xfrm>
           <a:prstGeom prst="rect">
             <a:avLst/>
@@ -10995,7 +10997,7 @@
               <a:buNone/>
             </a:pPr>
             <a:r>
-              <a:rPr lang="en-US" sz="1320" dirty="0">
+              <a:rPr lang="en-US" sz="1220" dirty="0">
                 <a:solidFill>
                   <a:srgbClr val="17364A"/>
                 </a:solidFill>
@@ -11003,9 +11005,9 @@
                 <a:ea typeface="Aptos" pitchFamily="34" charset="-122"/>
                 <a:cs typeface="Aptos" pitchFamily="34" charset="-120"/>
               </a:rPr>
-              <a:t>Level: applied/foundational Primary track: Technical Architecture Track Appears in tracks: technical-architecture</a:t>
-            </a:r>
-            <a:endParaRPr lang="en-US" sz="1320" dirty="0"/>
+              <a:t>Level: applied/foundational Primary track: Technical Architecture Track Appears.</a:t>
+            </a:r>
+            <a:endParaRPr lang="en-US" sz="1220" dirty="0"/>
           </a:p>
         </p:txBody>
       </p:sp>
@@ -11044,8 +11046,8 @@
         </p:nvSpPr>
         <p:spPr>
           <a:xfrm>
-            <a:off x="8074152" y="3822192"/>
-            <a:ext cx="2825496" cy="256032"/>
+            <a:off x="8074152" y="3803904"/>
+            <a:ext cx="2825496" cy="228600"/>
           </a:xfrm>
           <a:prstGeom prst="rect">
             <a:avLst/>
@@ -11061,7 +11063,7 @@
               <a:buNone/>
             </a:pPr>
             <a:r>
-              <a:rPr lang="en-US" sz="1300" b="1" dirty="0">
+              <a:rPr lang="en-US" sz="1220" b="1" dirty="0">
                 <a:solidFill>
                   <a:srgbClr val="0068B7"/>
                 </a:solidFill>
@@ -11071,7 +11073,7 @@
               </a:rPr>
               <a:t>Learning sequence</a:t>
             </a:r>
-            <a:endParaRPr lang="en-US" sz="1300" dirty="0"/>
+            <a:endParaRPr lang="en-US" sz="1220" dirty="0"/>
           </a:p>
         </p:txBody>
       </p:sp>
@@ -11083,8 +11085,8 @@
         </p:nvSpPr>
         <p:spPr>
           <a:xfrm>
-            <a:off x="8092440" y="4187952"/>
-            <a:ext cx="2770632" cy="1033272"/>
+            <a:off x="8092440" y="4133088"/>
+            <a:ext cx="2770632" cy="1124712"/>
           </a:xfrm>
           <a:prstGeom prst="rect">
             <a:avLst/>
@@ -11102,7 +11104,7 @@
               <a:buNone/>
             </a:pPr>
             <a:r>
-              <a:rPr lang="en-US" sz="1220" dirty="0">
+              <a:rPr lang="en-US" sz="1140" dirty="0">
                 <a:solidFill>
                   <a:srgbClr val="17364A"/>
                 </a:solidFill>
@@ -11112,14 +11114,14 @@
               </a:rPr>
               <a:t>Read the module for shared vocabulary and context.</a:t>
             </a:r>
-            <a:endParaRPr lang="en-US" sz="1220" dirty="0"/>
-          </a:p>
-          <a:p>
-            <a:pPr indent="0" marL="0">
-              <a:buNone/>
-            </a:pPr>
-            <a:r>
-              <a:rPr lang="en-US" sz="1220" dirty="0">
+            <a:endParaRPr lang="en-US" sz="1140" dirty="0"/>
+          </a:p>
+          <a:p>
+            <a:pPr indent="0" marL="0">
+              <a:buNone/>
+            </a:pPr>
+            <a:r>
+              <a:rPr lang="en-US" sz="1140" dirty="0">
                 <a:solidFill>
                   <a:srgbClr val="17364A"/>
                 </a:solidFill>
@@ -11127,16 +11129,16 @@
                 <a:ea typeface="Aptos" pitchFamily="34" charset="-122"/>
                 <a:cs typeface="Aptos" pitchFamily="34" charset="-120"/>
               </a:rPr>
-              <a:t>Complete the practical exercise to apply the concept.</a:t>
-            </a:r>
-            <a:endParaRPr lang="en-US" sz="1220" dirty="0"/>
-          </a:p>
-          <a:p>
-            <a:pPr indent="0" marL="0">
-              <a:buNone/>
-            </a:pPr>
-            <a:r>
-              <a:rPr lang="en-US" sz="1220" dirty="0">
+              <a:t>Complete the practical exercise to apply the.</a:t>
+            </a:r>
+            <a:endParaRPr lang="en-US" sz="1140" dirty="0"/>
+          </a:p>
+          <a:p>
+            <a:pPr indent="0" marL="0">
+              <a:buNone/>
+            </a:pPr>
+            <a:r>
+              <a:rPr lang="en-US" sz="1140" dirty="0">
                 <a:solidFill>
                   <a:srgbClr val="17364A"/>
                 </a:solidFill>
@@ -11146,7 +11148,7 @@
               </a:rPr>
               <a:t>Use the notes and references for deeper review.</a:t>
             </a:r>
-            <a:endParaRPr lang="en-US" sz="1220" dirty="0"/>
+            <a:endParaRPr lang="en-US" sz="1140" dirty="0"/>
           </a:p>
         </p:txBody>
       </p:sp>
@@ -11437,8 +11439,8 @@
         </p:nvSpPr>
         <p:spPr>
           <a:xfrm>
-            <a:off x="868680" y="1508760"/>
-            <a:ext cx="6309360" cy="4160520"/>
+            <a:off x="822960" y="1463040"/>
+            <a:ext cx="6565392" cy="4343400"/>
           </a:xfrm>
           <a:prstGeom prst="rect">
             <a:avLst/>
@@ -11456,7 +11458,7 @@
               <a:buNone/>
             </a:pPr>
             <a:r>
-              <a:rPr lang="en-US" sz="2100" dirty="0">
+              <a:rPr lang="en-US" sz="1920" dirty="0">
                 <a:solidFill>
                   <a:srgbClr val="003A63"/>
                 </a:solidFill>
@@ -11466,14 +11468,14 @@
               </a:rPr>
               <a:t>• The expected artifact is an AI-enabled workflow architecture map.</a:t>
             </a:r>
-            <a:endParaRPr lang="en-US" sz="2100" dirty="0"/>
-          </a:p>
-          <a:p>
-            <a:pPr indent="0" marL="0">
-              <a:buNone/>
-            </a:pPr>
-            <a:r>
-              <a:rPr lang="en-US" sz="2100" dirty="0">
+            <a:endParaRPr lang="en-US" sz="1920" dirty="0"/>
+          </a:p>
+          <a:p>
+            <a:pPr indent="0" marL="0">
+              <a:buNone/>
+            </a:pPr>
+            <a:r>
+              <a:rPr lang="en-US" sz="1920" dirty="0">
                 <a:solidFill>
                   <a:srgbClr val="003A63"/>
                 </a:solidFill>
@@ -11481,16 +11483,16 @@
                 <a:ea typeface="Aptos" pitchFamily="34" charset="-122"/>
                 <a:cs typeface="Aptos" pitchFamily="34" charset="-120"/>
               </a:rPr>
-              <a:t>• The evidence should also include a short readiness memo that identifies technical dependencies,.</a:t>
-            </a:r>
-            <a:endParaRPr lang="en-US" sz="2100" dirty="0"/>
-          </a:p>
-          <a:p>
-            <a:pPr indent="0" marL="0">
-              <a:buNone/>
-            </a:pPr>
-            <a:r>
-              <a:rPr lang="en-US" sz="2100" dirty="0">
+              <a:t>• The evidence should also include a short readiness memo that identifies.</a:t>
+            </a:r>
+            <a:endParaRPr lang="en-US" sz="1920" dirty="0"/>
+          </a:p>
+          <a:p>
+            <a:pPr indent="0" marL="0">
+              <a:buNone/>
+            </a:pPr>
+            <a:r>
+              <a:rPr lang="en-US" sz="1920" dirty="0">
                 <a:solidFill>
                   <a:srgbClr val="003A63"/>
                 </a:solidFill>
@@ -11498,9 +11500,9 @@
                 <a:ea typeface="Aptos" pitchFamily="34" charset="-122"/>
                 <a:cs typeface="Aptos" pitchFamily="34" charset="-120"/>
               </a:rPr>
-              <a:t>• A strong completion artifact should be specific enough to support governance review,.</a:t>
-            </a:r>
-            <a:endParaRPr lang="en-US" sz="2100" dirty="0"/>
+              <a:t>• A strong completion artifact should be specific enough to support governance.</a:t>
+            </a:r>
+            <a:endParaRPr lang="en-US" sz="1920" dirty="0"/>
           </a:p>
         </p:txBody>
       </p:sp>
@@ -11512,12 +11514,12 @@
         </p:nvSpPr>
         <p:spPr>
           <a:xfrm>
-            <a:off x="7635240" y="1325880"/>
-            <a:ext cx="3474720" cy="1207008"/>
+            <a:off x="7543800" y="1325880"/>
+            <a:ext cx="3611880" cy="1261872"/>
           </a:xfrm>
           <a:prstGeom prst="roundRect">
             <a:avLst>
-              <a:gd name="adj" fmla="val 9091"/>
+              <a:gd name="adj" fmla="val 8696"/>
             </a:avLst>
           </a:prstGeom>
           <a:solidFill>
@@ -11539,8 +11541,8 @@
         </p:nvSpPr>
         <p:spPr>
           <a:xfrm>
-            <a:off x="7799832" y="1472184"/>
-            <a:ext cx="3145536" cy="256032"/>
+            <a:off x="7708392" y="1453896"/>
+            <a:ext cx="3282696" cy="228600"/>
           </a:xfrm>
           <a:prstGeom prst="rect">
             <a:avLst/>
@@ -11556,7 +11558,7 @@
               <a:buNone/>
             </a:pPr>
             <a:r>
-              <a:rPr lang="en-US" sz="1300" b="1" dirty="0">
+              <a:rPr lang="en-US" sz="1220" b="1" dirty="0">
                 <a:solidFill>
                   <a:srgbClr val="0068B7"/>
                 </a:solidFill>
@@ -11566,7 +11568,7 @@
               </a:rPr>
               <a:t>Data decision</a:t>
             </a:r>
-            <a:endParaRPr lang="en-US" sz="1300" dirty="0"/>
+            <a:endParaRPr lang="en-US" sz="1220" dirty="0"/>
           </a:p>
         </p:txBody>
       </p:sp>
@@ -11578,8 +11580,8 @@
         </p:nvSpPr>
         <p:spPr>
           <a:xfrm>
-            <a:off x="7799832" y="1801368"/>
-            <a:ext cx="3145536" cy="640080"/>
+            <a:off x="7708392" y="1764792"/>
+            <a:ext cx="3282696" cy="749808"/>
           </a:xfrm>
           <a:prstGeom prst="rect">
             <a:avLst/>
@@ -11597,7 +11599,7 @@
               <a:buNone/>
             </a:pPr>
             <a:r>
-              <a:rPr lang="en-US" sz="1320" dirty="0">
+              <a:rPr lang="en-US" sz="1220" dirty="0">
                 <a:solidFill>
                   <a:srgbClr val="17364A"/>
                 </a:solidFill>
@@ -11607,7 +11609,7 @@
               </a:rPr>
               <a:t>The expected artifact is an AI-enabled workflow architecture map.</a:t>
             </a:r>
-            <a:endParaRPr lang="en-US" sz="1320" dirty="0"/>
+            <a:endParaRPr lang="en-US" sz="1220" dirty="0"/>
           </a:p>
         </p:txBody>
       </p:sp>
@@ -11619,12 +11621,12 @@
         </p:nvSpPr>
         <p:spPr>
           <a:xfrm>
-            <a:off x="7635240" y="2670048"/>
-            <a:ext cx="3474720" cy="1377086"/>
+            <a:off x="7543800" y="2724912"/>
+            <a:ext cx="3611880" cy="1527048"/>
           </a:xfrm>
           <a:prstGeom prst="roundRect">
             <a:avLst>
-              <a:gd name="adj" fmla="val 7968"/>
+              <a:gd name="adj" fmla="val 7186"/>
             </a:avLst>
           </a:prstGeom>
           <a:solidFill>
@@ -11646,8 +11648,8 @@
         </p:nvSpPr>
         <p:spPr>
           <a:xfrm>
-            <a:off x="7799832" y="2816352"/>
-            <a:ext cx="3145536" cy="256032"/>
+            <a:off x="7708392" y="2852928"/>
+            <a:ext cx="3282696" cy="228600"/>
           </a:xfrm>
           <a:prstGeom prst="rect">
             <a:avLst/>
@@ -11663,7 +11665,7 @@
               <a:buNone/>
             </a:pPr>
             <a:r>
-              <a:rPr lang="en-US" sz="1300" b="1" dirty="0">
+              <a:rPr lang="en-US" sz="1220" b="1" dirty="0">
                 <a:solidFill>
                   <a:srgbClr val="0068B7"/>
                 </a:solidFill>
@@ -11673,7 +11675,7 @@
               </a:rPr>
               <a:t>Concept checkpoints</a:t>
             </a:r>
-            <a:endParaRPr lang="en-US" sz="1300" dirty="0"/>
+            <a:endParaRPr lang="en-US" sz="1220" dirty="0"/>
           </a:p>
         </p:txBody>
       </p:sp>
@@ -11685,8 +11687,8 @@
         </p:nvSpPr>
         <p:spPr>
           <a:xfrm>
-            <a:off x="7818120" y="3182112"/>
-            <a:ext cx="3090672" cy="718718"/>
+            <a:off x="7726680" y="3182112"/>
+            <a:ext cx="3227832" cy="960120"/>
           </a:xfrm>
           <a:prstGeom prst="rect">
             <a:avLst/>
@@ -11704,7 +11706,7 @@
               <a:buNone/>
             </a:pPr>
             <a:r>
-              <a:rPr lang="en-US" sz="1220" dirty="0">
+              <a:rPr lang="en-US" sz="1140" dirty="0">
                 <a:solidFill>
                   <a:srgbClr val="17364A"/>
                 </a:solidFill>
@@ -11712,16 +11714,16 @@
                 <a:ea typeface="Aptos" pitchFamily="34" charset="-122"/>
                 <a:cs typeface="Aptos" pitchFamily="34" charset="-120"/>
               </a:rPr>
-              <a:t>The evidence should also include a short readiness memo that.</a:t>
-            </a:r>
-            <a:endParaRPr lang="en-US" sz="1220" dirty="0"/>
-          </a:p>
-          <a:p>
-            <a:pPr indent="0" marL="0">
-              <a:buNone/>
-            </a:pPr>
-            <a:r>
-              <a:rPr lang="en-US" sz="1220" dirty="0">
+              <a:t>The evidence should also include a short readiness.</a:t>
+            </a:r>
+            <a:endParaRPr lang="en-US" sz="1140" dirty="0"/>
+          </a:p>
+          <a:p>
+            <a:pPr indent="0" marL="0">
+              <a:buNone/>
+            </a:pPr>
+            <a:r>
+              <a:rPr lang="en-US" sz="1140" dirty="0">
                 <a:solidFill>
                   <a:srgbClr val="17364A"/>
                 </a:solidFill>
@@ -11729,16 +11731,16 @@
                 <a:ea typeface="Aptos" pitchFamily="34" charset="-122"/>
                 <a:cs typeface="Aptos" pitchFamily="34" charset="-120"/>
               </a:rPr>
-              <a:t>A strong completion artifact should be specific enough to support.</a:t>
-            </a:r>
-            <a:endParaRPr lang="en-US" sz="1220" dirty="0"/>
-          </a:p>
-          <a:p>
-            <a:pPr indent="0" marL="0">
-              <a:buNone/>
-            </a:pPr>
-            <a:r>
-              <a:rPr lang="en-US" sz="1220" dirty="0">
+              <a:t>A strong completion artifact should be specific.</a:t>
+            </a:r>
+            <a:endParaRPr lang="en-US" sz="1140" dirty="0"/>
+          </a:p>
+          <a:p>
+            <a:pPr indent="0" marL="0">
+              <a:buNone/>
+            </a:pPr>
+            <a:r>
+              <a:rPr lang="en-US" sz="1140" dirty="0">
                 <a:solidFill>
                   <a:srgbClr val="17364A"/>
                 </a:solidFill>
@@ -11748,7 +11750,7 @@
               </a:rPr>
               <a:t>It should not simply state that AI may be useful.</a:t>
             </a:r>
-            <a:endParaRPr lang="en-US" sz="1220" dirty="0"/>
+            <a:endParaRPr lang="en-US" sz="1140" dirty="0"/>
           </a:p>
         </p:txBody>
       </p:sp>
@@ -11760,12 +11762,12 @@
         </p:nvSpPr>
         <p:spPr>
           <a:xfrm>
-            <a:off x="7635240" y="4184294"/>
-            <a:ext cx="3474720" cy="1466698"/>
+            <a:off x="7543800" y="4389120"/>
+            <a:ext cx="3611880" cy="1261872"/>
           </a:xfrm>
           <a:prstGeom prst="roundRect">
             <a:avLst>
-              <a:gd name="adj" fmla="val 7481"/>
+              <a:gd name="adj" fmla="val 8696"/>
             </a:avLst>
           </a:prstGeom>
           <a:solidFill>
@@ -11787,8 +11789,8 @@
         </p:nvSpPr>
         <p:spPr>
           <a:xfrm>
-            <a:off x="7799832" y="4330598"/>
-            <a:ext cx="3145536" cy="256032"/>
+            <a:off x="7708392" y="4517136"/>
+            <a:ext cx="3282696" cy="228600"/>
           </a:xfrm>
           <a:prstGeom prst="rect">
             <a:avLst/>
@@ -11804,7 +11806,7 @@
               <a:buNone/>
             </a:pPr>
             <a:r>
-              <a:rPr lang="en-US" sz="1300" b="1" dirty="0">
+              <a:rPr lang="en-US" sz="1220" b="1" dirty="0">
                 <a:solidFill>
                   <a:srgbClr val="0068B7"/>
                 </a:solidFill>
@@ -11814,7 +11816,7 @@
               </a:rPr>
               <a:t>How to validate</a:t>
             </a:r>
-            <a:endParaRPr lang="en-US" sz="1300" dirty="0"/>
+            <a:endParaRPr lang="en-US" sz="1220" dirty="0"/>
           </a:p>
         </p:txBody>
       </p:sp>
@@ -11826,8 +11828,8 @@
         </p:nvSpPr>
         <p:spPr>
           <a:xfrm>
-            <a:off x="7799832" y="4659782"/>
-            <a:ext cx="3145536" cy="899770"/>
+            <a:off x="7708392" y="4828032"/>
+            <a:ext cx="3282696" cy="749808"/>
           </a:xfrm>
           <a:prstGeom prst="rect">
             <a:avLst/>
@@ -11845,7 +11847,7 @@
               <a:buNone/>
             </a:pPr>
             <a:r>
-              <a:rPr lang="en-US" sz="1320" dirty="0">
+              <a:rPr lang="en-US" sz="1220" dirty="0">
                 <a:solidFill>
                   <a:srgbClr val="17364A"/>
                 </a:solidFill>
@@ -11853,9 +11855,9 @@
                 <a:ea typeface="Aptos" pitchFamily="34" charset="-122"/>
                 <a:cs typeface="Aptos" pitchFamily="34" charset="-120"/>
               </a:rPr>
-              <a:t>Connect the concept to data quality, model performance, validation evidence, monitoring measures, and decisions that remain under human control.</a:t>
-            </a:r>
-            <a:endParaRPr lang="en-US" sz="1320" dirty="0"/>
+              <a:t>Connect the concept to data quality, model performance, validation evidence,.</a:t>
+            </a:r>
+            <a:endParaRPr lang="en-US" sz="1220" dirty="0"/>
           </a:p>
         </p:txBody>
       </p:sp>
@@ -12146,8 +12148,8 @@
         </p:nvSpPr>
         <p:spPr>
           <a:xfrm>
-            <a:off x="868680" y="1508760"/>
-            <a:ext cx="6309360" cy="4160520"/>
+            <a:off x="822960" y="1463040"/>
+            <a:ext cx="6565392" cy="4343400"/>
           </a:xfrm>
           <a:prstGeom prst="rect">
             <a:avLst/>
@@ -12165,7 +12167,7 @@
               <a:buNone/>
             </a:pPr>
             <a:r>
-              <a:rPr lang="en-US" sz="2100" dirty="0">
+              <a:rPr lang="en-US" sz="1920" dirty="0">
                 <a:solidFill>
                   <a:srgbClr val="003A63"/>
                 </a:solidFill>
@@ -12173,16 +12175,16 @@
                 <a:ea typeface="Aptos" pitchFamily="34" charset="-122"/>
                 <a:cs typeface="Aptos" pitchFamily="34" charset="-120"/>
               </a:rPr>
-              <a:t>• The expected artifact is an AI-enabled workflow architecture map. The evidence should also.</a:t>
-            </a:r>
-            <a:endParaRPr lang="en-US" sz="2100" dirty="0"/>
-          </a:p>
-          <a:p>
-            <a:pPr indent="0" marL="0">
-              <a:buNone/>
-            </a:pPr>
-            <a:r>
-              <a:rPr lang="en-US" sz="2100" dirty="0">
+              <a:t>• The expected artifact is an AI-enabled workflow architecture map. The.</a:t>
+            </a:r>
+            <a:endParaRPr lang="en-US" sz="1920" dirty="0"/>
+          </a:p>
+          <a:p>
+            <a:pPr indent="0" marL="0">
+              <a:buNone/>
+            </a:pPr>
+            <a:r>
+              <a:rPr lang="en-US" sz="1920" dirty="0">
                 <a:solidFill>
                   <a:srgbClr val="003A63"/>
                 </a:solidFill>
@@ -12190,9 +12192,9 @@
                 <a:ea typeface="Aptos" pitchFamily="34" charset="-122"/>
                 <a:cs typeface="Aptos" pitchFamily="34" charset="-120"/>
               </a:rPr>
-              <a:t>• A strong completion artifact should be specific enough to support governance review,.</a:t>
-            </a:r>
-            <a:endParaRPr lang="en-US" sz="2100" dirty="0"/>
+              <a:t>• A strong completion artifact should be specific enough to support governance.</a:t>
+            </a:r>
+            <a:endParaRPr lang="en-US" sz="1920" dirty="0"/>
           </a:p>
         </p:txBody>
       </p:sp>
@@ -12204,12 +12206,12 @@
         </p:nvSpPr>
         <p:spPr>
           <a:xfrm>
-            <a:off x="7635240" y="1325880"/>
-            <a:ext cx="3474720" cy="1255471"/>
+            <a:off x="7543800" y="1325880"/>
+            <a:ext cx="3611880" cy="1261872"/>
           </a:xfrm>
           <a:prstGeom prst="roundRect">
             <a:avLst>
-              <a:gd name="adj" fmla="val 8740"/>
+              <a:gd name="adj" fmla="val 8696"/>
             </a:avLst>
           </a:prstGeom>
           <a:solidFill>
@@ -12231,8 +12233,8 @@
         </p:nvSpPr>
         <p:spPr>
           <a:xfrm>
-            <a:off x="7799832" y="1472184"/>
-            <a:ext cx="3145536" cy="256032"/>
+            <a:off x="7708392" y="1453896"/>
+            <a:ext cx="3282696" cy="228600"/>
           </a:xfrm>
           <a:prstGeom prst="rect">
             <a:avLst/>
@@ -12248,7 +12250,7 @@
               <a:buNone/>
             </a:pPr>
             <a:r>
-              <a:rPr lang="en-US" sz="1300" b="1" dirty="0">
+              <a:rPr lang="en-US" sz="1220" b="1" dirty="0">
                 <a:solidFill>
                   <a:srgbClr val="0068B7"/>
                 </a:solidFill>
@@ -12258,7 +12260,7 @@
               </a:rPr>
               <a:t>Data decision</a:t>
             </a:r>
-            <a:endParaRPr lang="en-US" sz="1300" dirty="0"/>
+            <a:endParaRPr lang="en-US" sz="1220" dirty="0"/>
           </a:p>
         </p:txBody>
       </p:sp>
@@ -12270,8 +12272,8 @@
         </p:nvSpPr>
         <p:spPr>
           <a:xfrm>
-            <a:off x="7799832" y="1801368"/>
-            <a:ext cx="3145536" cy="688543"/>
+            <a:off x="7708392" y="1764792"/>
+            <a:ext cx="3282696" cy="749808"/>
           </a:xfrm>
           <a:prstGeom prst="rect">
             <a:avLst/>
@@ -12289,7 +12291,7 @@
               <a:buNone/>
             </a:pPr>
             <a:r>
-              <a:rPr lang="en-US" sz="1320" dirty="0">
+              <a:rPr lang="en-US" sz="1220" dirty="0">
                 <a:solidFill>
                   <a:srgbClr val="17364A"/>
                 </a:solidFill>
@@ -12297,9 +12299,9 @@
                 <a:ea typeface="Aptos" pitchFamily="34" charset="-122"/>
                 <a:cs typeface="Aptos" pitchFamily="34" charset="-120"/>
               </a:rPr>
-              <a:t>The expected artifact is an AI-enabled workflow architecture map. The evidence should also include a.</a:t>
-            </a:r>
-            <a:endParaRPr lang="en-US" sz="1320" dirty="0"/>
+              <a:t>The expected artifact is an AI-enabled workflow architecture map. The evidence.</a:t>
+            </a:r>
+            <a:endParaRPr lang="en-US" sz="1220" dirty="0"/>
           </a:p>
         </p:txBody>
       </p:sp>
@@ -12311,12 +12313,12 @@
         </p:nvSpPr>
         <p:spPr>
           <a:xfrm>
-            <a:off x="7635240" y="2718511"/>
-            <a:ext cx="3474720" cy="1328623"/>
+            <a:off x="7543800" y="2724912"/>
+            <a:ext cx="3611880" cy="1527048"/>
           </a:xfrm>
           <a:prstGeom prst="roundRect">
             <a:avLst>
-              <a:gd name="adj" fmla="val 8259"/>
+              <a:gd name="adj" fmla="val 7186"/>
             </a:avLst>
           </a:prstGeom>
           <a:solidFill>
@@ -12338,8 +12340,8 @@
         </p:nvSpPr>
         <p:spPr>
           <a:xfrm>
-            <a:off x="7799832" y="2864815"/>
-            <a:ext cx="3145536" cy="256032"/>
+            <a:off x="7708392" y="2852928"/>
+            <a:ext cx="3282696" cy="228600"/>
           </a:xfrm>
           <a:prstGeom prst="rect">
             <a:avLst/>
@@ -12355,7 +12357,7 @@
               <a:buNone/>
             </a:pPr>
             <a:r>
-              <a:rPr lang="en-US" sz="1300" b="1" dirty="0">
+              <a:rPr lang="en-US" sz="1220" b="1" dirty="0">
                 <a:solidFill>
                   <a:srgbClr val="0068B7"/>
                 </a:solidFill>
@@ -12365,7 +12367,7 @@
               </a:rPr>
               <a:t>Concept checkpoints</a:t>
             </a:r>
-            <a:endParaRPr lang="en-US" sz="1300" dirty="0"/>
+            <a:endParaRPr lang="en-US" sz="1220" dirty="0"/>
           </a:p>
         </p:txBody>
       </p:sp>
@@ -12377,8 +12379,8 @@
         </p:nvSpPr>
         <p:spPr>
           <a:xfrm>
-            <a:off x="7818120" y="3230575"/>
-            <a:ext cx="3090672" cy="670255"/>
+            <a:off x="7726680" y="3182112"/>
+            <a:ext cx="3227832" cy="960120"/>
           </a:xfrm>
           <a:prstGeom prst="rect">
             <a:avLst/>
@@ -12396,7 +12398,7 @@
               <a:buNone/>
             </a:pPr>
             <a:r>
-              <a:rPr lang="en-US" sz="1220" dirty="0">
+              <a:rPr lang="en-US" sz="1140" dirty="0">
                 <a:solidFill>
                   <a:srgbClr val="17364A"/>
                 </a:solidFill>
@@ -12404,16 +12406,16 @@
                 <a:ea typeface="Aptos" pitchFamily="34" charset="-122"/>
                 <a:cs typeface="Aptos" pitchFamily="34" charset="-120"/>
               </a:rPr>
-              <a:t>The expected artifact is an AI-enabled workflow architecture map.</a:t>
-            </a:r>
-            <a:endParaRPr lang="en-US" sz="1220" dirty="0"/>
-          </a:p>
-          <a:p>
-            <a:pPr indent="0" marL="0">
-              <a:buNone/>
-            </a:pPr>
-            <a:r>
-              <a:rPr lang="en-US" sz="1220" dirty="0">
+              <a:t>The expected artifact is an AI-enabled workflow.</a:t>
+            </a:r>
+            <a:endParaRPr lang="en-US" sz="1140" dirty="0"/>
+          </a:p>
+          <a:p>
+            <a:pPr indent="0" marL="0">
+              <a:buNone/>
+            </a:pPr>
+            <a:r>
+              <a:rPr lang="en-US" sz="1140" dirty="0">
                 <a:solidFill>
                   <a:srgbClr val="17364A"/>
                 </a:solidFill>
@@ -12421,16 +12423,16 @@
                 <a:ea typeface="Aptos" pitchFamily="34" charset="-122"/>
                 <a:cs typeface="Aptos" pitchFamily="34" charset="-120"/>
               </a:rPr>
-              <a:t>The evidence should also include a short readiness memo that.</a:t>
-            </a:r>
-            <a:endParaRPr lang="en-US" sz="1220" dirty="0"/>
-          </a:p>
-          <a:p>
-            <a:pPr indent="0" marL="0">
-              <a:buNone/>
-            </a:pPr>
-            <a:r>
-              <a:rPr lang="en-US" sz="1220" dirty="0">
+              <a:t>The evidence should also include a short readiness.</a:t>
+            </a:r>
+            <a:endParaRPr lang="en-US" sz="1140" dirty="0"/>
+          </a:p>
+          <a:p>
+            <a:pPr indent="0" marL="0">
+              <a:buNone/>
+            </a:pPr>
+            <a:r>
+              <a:rPr lang="en-US" sz="1140" dirty="0">
                 <a:solidFill>
                   <a:srgbClr val="17364A"/>
                 </a:solidFill>
@@ -12438,9 +12440,9 @@
                 <a:ea typeface="Aptos" pitchFamily="34" charset="-122"/>
                 <a:cs typeface="Aptos" pitchFamily="34" charset="-120"/>
               </a:rPr>
-              <a:t>A strong completion artifact should be specific enough to support.</a:t>
-            </a:r>
-            <a:endParaRPr lang="en-US" sz="1220" dirty="0"/>
+              <a:t>A strong completion artifact should be specific.</a:t>
+            </a:r>
+            <a:endParaRPr lang="en-US" sz="1140" dirty="0"/>
           </a:p>
         </p:txBody>
       </p:sp>
@@ -12452,12 +12454,12 @@
         </p:nvSpPr>
         <p:spPr>
           <a:xfrm>
-            <a:off x="7635240" y="4184294"/>
-            <a:ext cx="3474720" cy="1466698"/>
+            <a:off x="7543800" y="4389120"/>
+            <a:ext cx="3611880" cy="1261872"/>
           </a:xfrm>
           <a:prstGeom prst="roundRect">
             <a:avLst>
-              <a:gd name="adj" fmla="val 7481"/>
+              <a:gd name="adj" fmla="val 8696"/>
             </a:avLst>
           </a:prstGeom>
           <a:solidFill>
@@ -12479,8 +12481,8 @@
         </p:nvSpPr>
         <p:spPr>
           <a:xfrm>
-            <a:off x="7799832" y="4330598"/>
-            <a:ext cx="3145536" cy="256032"/>
+            <a:off x="7708392" y="4517136"/>
+            <a:ext cx="3282696" cy="228600"/>
           </a:xfrm>
           <a:prstGeom prst="rect">
             <a:avLst/>
@@ -12496,7 +12498,7 @@
               <a:buNone/>
             </a:pPr>
             <a:r>
-              <a:rPr lang="en-US" sz="1300" b="1" dirty="0">
+              <a:rPr lang="en-US" sz="1220" b="1" dirty="0">
                 <a:solidFill>
                   <a:srgbClr val="0068B7"/>
                 </a:solidFill>
@@ -12506,7 +12508,7 @@
               </a:rPr>
               <a:t>How to validate</a:t>
             </a:r>
-            <a:endParaRPr lang="en-US" sz="1300" dirty="0"/>
+            <a:endParaRPr lang="en-US" sz="1220" dirty="0"/>
           </a:p>
         </p:txBody>
       </p:sp>
@@ -12518,8 +12520,8 @@
         </p:nvSpPr>
         <p:spPr>
           <a:xfrm>
-            <a:off x="7799832" y="4659782"/>
-            <a:ext cx="3145536" cy="899770"/>
+            <a:off x="7708392" y="4828032"/>
+            <a:ext cx="3282696" cy="749808"/>
           </a:xfrm>
           <a:prstGeom prst="rect">
             <a:avLst/>
@@ -12537,7 +12539,7 @@
               <a:buNone/>
             </a:pPr>
             <a:r>
-              <a:rPr lang="en-US" sz="1320" dirty="0">
+              <a:rPr lang="en-US" sz="1220" dirty="0">
                 <a:solidFill>
                   <a:srgbClr val="17364A"/>
                 </a:solidFill>
@@ -12545,9 +12547,9 @@
                 <a:ea typeface="Aptos" pitchFamily="34" charset="-122"/>
                 <a:cs typeface="Aptos" pitchFamily="34" charset="-120"/>
               </a:rPr>
-              <a:t>Use the assignment to test whether you can explain the concept, apply it to a realistic public health situation, and identify what would need review before the work moves forward.</a:t>
-            </a:r>
-            <a:endParaRPr lang="en-US" sz="1320" dirty="0"/>
+              <a:t>Use the assignment to test whether you can explain the concept, apply it to a.</a:t>
+            </a:r>
+            <a:endParaRPr lang="en-US" sz="1220" dirty="0"/>
           </a:p>
         </p:txBody>
       </p:sp>
@@ -12838,8 +12840,8 @@
         </p:nvSpPr>
         <p:spPr>
           <a:xfrm>
-            <a:off x="868680" y="1508760"/>
-            <a:ext cx="6309360" cy="4160520"/>
+            <a:off x="822960" y="1463040"/>
+            <a:ext cx="6565392" cy="4343400"/>
           </a:xfrm>
           <a:prstGeom prst="rect">
             <a:avLst/>
@@ -12857,7 +12859,7 @@
               <a:buNone/>
             </a:pPr>
             <a:r>
-              <a:rPr lang="en-US" sz="2100" dirty="0">
+              <a:rPr lang="en-US" sz="1920" dirty="0">
                 <a:solidFill>
                   <a:srgbClr val="003A63"/>
                 </a:solidFill>
@@ -12867,14 +12869,14 @@
               </a:rPr>
               <a:t>• 1. Why should AI planning begin with architecture and workflow mapping?</a:t>
             </a:r>
-            <a:endParaRPr lang="en-US" sz="2100" dirty="0"/>
-          </a:p>
-          <a:p>
-            <a:pPr indent="0" marL="0">
-              <a:buNone/>
-            </a:pPr>
-            <a:r>
-              <a:rPr lang="en-US" sz="2100" dirty="0">
+            <a:endParaRPr lang="en-US" sz="1920" dirty="0"/>
+          </a:p>
+          <a:p>
+            <a:pPr indent="0" marL="0">
+              <a:buNone/>
+            </a:pPr>
+            <a:r>
+              <a:rPr lang="en-US" sz="1920" dirty="0">
                 <a:solidFill>
                   <a:srgbClr val="003A63"/>
                 </a:solidFill>
@@ -12884,14 +12886,14 @@
               </a:rPr>
               <a:t>• 2. What is the role of a system of record in an AI-supported workflow?</a:t>
             </a:r>
-            <a:endParaRPr lang="en-US" sz="2100" dirty="0"/>
-          </a:p>
-          <a:p>
-            <a:pPr indent="0" marL="0">
-              <a:buNone/>
-            </a:pPr>
-            <a:r>
-              <a:rPr lang="en-US" sz="2100" dirty="0">
+            <a:endParaRPr lang="en-US" sz="1920" dirty="0"/>
+          </a:p>
+          <a:p>
+            <a:pPr indent="0" marL="0">
+              <a:buNone/>
+            </a:pPr>
+            <a:r>
+              <a:rPr lang="en-US" sz="1920" dirty="0">
                 <a:solidFill>
                   <a:srgbClr val="003A63"/>
                 </a:solidFill>
@@ -12899,9 +12901,9 @@
                 <a:ea typeface="Aptos" pitchFamily="34" charset="-122"/>
                 <a:cs typeface="Aptos" pitchFamily="34" charset="-120"/>
               </a:rPr>
-              <a:t>• 3. Which risk is most likely when staff cannot explain how data move through a workflow?</a:t>
-            </a:r>
-            <a:endParaRPr lang="en-US" sz="2100" dirty="0"/>
+              <a:t>• 3. Which risk is most likely when staff cannot explain how data move through.</a:t>
+            </a:r>
+            <a:endParaRPr lang="en-US" sz="1920" dirty="0"/>
           </a:p>
         </p:txBody>
       </p:sp>
@@ -12913,12 +12915,12 @@
         </p:nvSpPr>
         <p:spPr>
           <a:xfrm>
-            <a:off x="7635240" y="1325880"/>
-            <a:ext cx="3474720" cy="1207008"/>
+            <a:off x="7543800" y="1325880"/>
+            <a:ext cx="3611880" cy="1261872"/>
           </a:xfrm>
           <a:prstGeom prst="roundRect">
             <a:avLst>
-              <a:gd name="adj" fmla="val 9091"/>
+              <a:gd name="adj" fmla="val 8696"/>
             </a:avLst>
           </a:prstGeom>
           <a:solidFill>
@@ -12940,8 +12942,8 @@
         </p:nvSpPr>
         <p:spPr>
           <a:xfrm>
-            <a:off x="7799832" y="1472184"/>
-            <a:ext cx="3145536" cy="256032"/>
+            <a:off x="7708392" y="1453896"/>
+            <a:ext cx="3282696" cy="228600"/>
           </a:xfrm>
           <a:prstGeom prst="rect">
             <a:avLst/>
@@ -12957,7 +12959,7 @@
               <a:buNone/>
             </a:pPr>
             <a:r>
-              <a:rPr lang="en-US" sz="1300" b="1" dirty="0">
+              <a:rPr lang="en-US" sz="1220" b="1" dirty="0">
                 <a:solidFill>
                   <a:srgbClr val="0068B7"/>
                 </a:solidFill>
@@ -12967,7 +12969,7 @@
               </a:rPr>
               <a:t>Data decision</a:t>
             </a:r>
-            <a:endParaRPr lang="en-US" sz="1300" dirty="0"/>
+            <a:endParaRPr lang="en-US" sz="1220" dirty="0"/>
           </a:p>
         </p:txBody>
       </p:sp>
@@ -12979,8 +12981,8 @@
         </p:nvSpPr>
         <p:spPr>
           <a:xfrm>
-            <a:off x="7799832" y="1801368"/>
-            <a:ext cx="3145536" cy="640080"/>
+            <a:off x="7708392" y="1764792"/>
+            <a:ext cx="3282696" cy="749808"/>
           </a:xfrm>
           <a:prstGeom prst="rect">
             <a:avLst/>
@@ -12998,7 +13000,7 @@
               <a:buNone/>
             </a:pPr>
             <a:r>
-              <a:rPr lang="en-US" sz="1320" dirty="0">
+              <a:rPr lang="en-US" sz="1220" dirty="0">
                 <a:solidFill>
                   <a:srgbClr val="17364A"/>
                 </a:solidFill>
@@ -13008,7 +13010,7 @@
               </a:rPr>
               <a:t>1. Why should AI planning begin with architecture and workflow mapping?</a:t>
             </a:r>
-            <a:endParaRPr lang="en-US" sz="1320" dirty="0"/>
+            <a:endParaRPr lang="en-US" sz="1220" dirty="0"/>
           </a:p>
         </p:txBody>
       </p:sp>
@@ -13020,12 +13022,12 @@
         </p:nvSpPr>
         <p:spPr>
           <a:xfrm>
-            <a:off x="7635240" y="2670048"/>
-            <a:ext cx="3474720" cy="1377086"/>
+            <a:off x="7543800" y="2724912"/>
+            <a:ext cx="3611880" cy="1527048"/>
           </a:xfrm>
           <a:prstGeom prst="roundRect">
             <a:avLst>
-              <a:gd name="adj" fmla="val 7968"/>
+              <a:gd name="adj" fmla="val 7186"/>
             </a:avLst>
           </a:prstGeom>
           <a:solidFill>
@@ -13047,8 +13049,8 @@
         </p:nvSpPr>
         <p:spPr>
           <a:xfrm>
-            <a:off x="7799832" y="2816352"/>
-            <a:ext cx="3145536" cy="256032"/>
+            <a:off x="7708392" y="2852928"/>
+            <a:ext cx="3282696" cy="228600"/>
           </a:xfrm>
           <a:prstGeom prst="rect">
             <a:avLst/>
@@ -13064,7 +13066,7 @@
               <a:buNone/>
             </a:pPr>
             <a:r>
-              <a:rPr lang="en-US" sz="1300" b="1" dirty="0">
+              <a:rPr lang="en-US" sz="1220" b="1" dirty="0">
                 <a:solidFill>
                   <a:srgbClr val="0068B7"/>
                 </a:solidFill>
@@ -13074,7 +13076,7 @@
               </a:rPr>
               <a:t>Concept checkpoints</a:t>
             </a:r>
-            <a:endParaRPr lang="en-US" sz="1300" dirty="0"/>
+            <a:endParaRPr lang="en-US" sz="1220" dirty="0"/>
           </a:p>
         </p:txBody>
       </p:sp>
@@ -13086,8 +13088,8 @@
         </p:nvSpPr>
         <p:spPr>
           <a:xfrm>
-            <a:off x="7818120" y="3182112"/>
-            <a:ext cx="3090672" cy="718718"/>
+            <a:off x="7726680" y="3182112"/>
+            <a:ext cx="3227832" cy="960120"/>
           </a:xfrm>
           <a:prstGeom prst="rect">
             <a:avLst/>
@@ -13105,7 +13107,7 @@
               <a:buNone/>
             </a:pPr>
             <a:r>
-              <a:rPr lang="en-US" sz="1220" dirty="0">
+              <a:rPr lang="en-US" sz="1140" dirty="0">
                 <a:solidFill>
                   <a:srgbClr val="17364A"/>
                 </a:solidFill>
@@ -13115,14 +13117,14 @@
               </a:rPr>
               <a:t>1.</a:t>
             </a:r>
-            <a:endParaRPr lang="en-US" sz="1220" dirty="0"/>
-          </a:p>
-          <a:p>
-            <a:pPr indent="0" marL="0">
-              <a:buNone/>
-            </a:pPr>
-            <a:r>
-              <a:rPr lang="en-US" sz="1220" dirty="0">
+            <a:endParaRPr lang="en-US" sz="1140" dirty="0"/>
+          </a:p>
+          <a:p>
+            <a:pPr indent="0" marL="0">
+              <a:buNone/>
+            </a:pPr>
+            <a:r>
+              <a:rPr lang="en-US" sz="1140" dirty="0">
                 <a:solidFill>
                   <a:srgbClr val="17364A"/>
                 </a:solidFill>
@@ -13130,16 +13132,16 @@
                 <a:ea typeface="Aptos" pitchFamily="34" charset="-122"/>
                 <a:cs typeface="Aptos" pitchFamily="34" charset="-120"/>
               </a:rPr>
-              <a:t>Why should AI planning begin with architecture and workflow mapping?</a:t>
-            </a:r>
-            <a:endParaRPr lang="en-US" sz="1220" dirty="0"/>
-          </a:p>
-          <a:p>
-            <a:pPr indent="0" marL="0">
-              <a:buNone/>
-            </a:pPr>
-            <a:r>
-              <a:rPr lang="en-US" sz="1220" dirty="0">
+              <a:t>Why should AI planning begin with architecture and.</a:t>
+            </a:r>
+            <a:endParaRPr lang="en-US" sz="1140" dirty="0"/>
+          </a:p>
+          <a:p>
+            <a:pPr indent="0" marL="0">
+              <a:buNone/>
+            </a:pPr>
+            <a:r>
+              <a:rPr lang="en-US" sz="1140" dirty="0">
                 <a:solidFill>
                   <a:srgbClr val="17364A"/>
                 </a:solidFill>
@@ -13149,7 +13151,7 @@
               </a:rPr>
               <a:t>2.</a:t>
             </a:r>
-            <a:endParaRPr lang="en-US" sz="1220" dirty="0"/>
+            <a:endParaRPr lang="en-US" sz="1140" dirty="0"/>
           </a:p>
         </p:txBody>
       </p:sp>
@@ -13161,12 +13163,12 @@
         </p:nvSpPr>
         <p:spPr>
           <a:xfrm>
-            <a:off x="7635240" y="4184294"/>
-            <a:ext cx="3474720" cy="1466698"/>
+            <a:off x="7543800" y="4389120"/>
+            <a:ext cx="3611880" cy="1261872"/>
           </a:xfrm>
           <a:prstGeom prst="roundRect">
             <a:avLst>
-              <a:gd name="adj" fmla="val 7481"/>
+              <a:gd name="adj" fmla="val 8696"/>
             </a:avLst>
           </a:prstGeom>
           <a:solidFill>
@@ -13188,8 +13190,8 @@
         </p:nvSpPr>
         <p:spPr>
           <a:xfrm>
-            <a:off x="7799832" y="4330598"/>
-            <a:ext cx="3145536" cy="256032"/>
+            <a:off x="7708392" y="4517136"/>
+            <a:ext cx="3282696" cy="228600"/>
           </a:xfrm>
           <a:prstGeom prst="rect">
             <a:avLst/>
@@ -13205,7 +13207,7 @@
               <a:buNone/>
             </a:pPr>
             <a:r>
-              <a:rPr lang="en-US" sz="1300" b="1" dirty="0">
+              <a:rPr lang="en-US" sz="1220" b="1" dirty="0">
                 <a:solidFill>
                   <a:srgbClr val="0068B7"/>
                 </a:solidFill>
@@ -13215,7 +13217,7 @@
               </a:rPr>
               <a:t>How to validate</a:t>
             </a:r>
-            <a:endParaRPr lang="en-US" sz="1300" dirty="0"/>
+            <a:endParaRPr lang="en-US" sz="1220" dirty="0"/>
           </a:p>
         </p:txBody>
       </p:sp>
@@ -13227,8 +13229,8 @@
         </p:nvSpPr>
         <p:spPr>
           <a:xfrm>
-            <a:off x="7799832" y="4659782"/>
-            <a:ext cx="3145536" cy="899770"/>
+            <a:off x="7708392" y="4828032"/>
+            <a:ext cx="3282696" cy="749808"/>
           </a:xfrm>
           <a:prstGeom prst="rect">
             <a:avLst/>
@@ -13246,7 +13248,7 @@
               <a:buNone/>
             </a:pPr>
             <a:r>
-              <a:rPr lang="en-US" sz="1320" dirty="0">
+              <a:rPr lang="en-US" sz="1220" dirty="0">
                 <a:solidFill>
                   <a:srgbClr val="17364A"/>
                 </a:solidFill>
@@ -13254,9 +13256,9 @@
                 <a:ea typeface="Aptos" pitchFamily="34" charset="-122"/>
                 <a:cs typeface="Aptos" pitchFamily="34" charset="-120"/>
               </a:rPr>
-              <a:t>Use the assignment to test whether you can explain the concept, apply it to a realistic public health situation, and identify what would need review before the work moves forward.</a:t>
-            </a:r>
-            <a:endParaRPr lang="en-US" sz="1320" dirty="0"/>
+              <a:t>Use the assignment to test whether you can explain the concept, apply it to a.</a:t>
+            </a:r>
+            <a:endParaRPr lang="en-US" sz="1220" dirty="0"/>
           </a:p>
         </p:txBody>
       </p:sp>
@@ -13547,8 +13549,8 @@
         </p:nvSpPr>
         <p:spPr>
           <a:xfrm>
-            <a:off x="868680" y="1508760"/>
-            <a:ext cx="6309360" cy="4160520"/>
+            <a:off x="822960" y="1463040"/>
+            <a:ext cx="6565392" cy="4343400"/>
           </a:xfrm>
           <a:prstGeom prst="rect">
             <a:avLst/>
@@ -13566,7 +13568,7 @@
               <a:buNone/>
             </a:pPr>
             <a:r>
-              <a:rPr lang="en-US" sz="2100" dirty="0">
+              <a:rPr lang="en-US" sz="1920" dirty="0">
                 <a:solidFill>
                   <a:srgbClr val="003A63"/>
                 </a:solidFill>
@@ -13576,14 +13578,14 @@
               </a:rPr>
               <a:t>• CDC Public Health Data Strategy:.</a:t>
             </a:r>
-            <a:endParaRPr lang="en-US" sz="2100" dirty="0"/>
-          </a:p>
-          <a:p>
-            <a:pPr indent="0" marL="0">
-              <a:buNone/>
-            </a:pPr>
-            <a:r>
-              <a:rPr lang="en-US" sz="2100" dirty="0">
+            <a:endParaRPr lang="en-US" sz="1920" dirty="0"/>
+          </a:p>
+          <a:p>
+            <a:pPr indent="0" marL="0">
+              <a:buNone/>
+            </a:pPr>
+            <a:r>
+              <a:rPr lang="en-US" sz="1920" dirty="0">
                 <a:solidFill>
                   <a:srgbClr val="003A63"/>
                 </a:solidFill>
@@ -13593,14 +13595,14 @@
               </a:rPr>
               <a:t>• CDC Data Modernization Initiative materials:.</a:t>
             </a:r>
-            <a:endParaRPr lang="en-US" sz="2100" dirty="0"/>
-          </a:p>
-          <a:p>
-            <a:pPr indent="0" marL="0">
-              <a:buNone/>
-            </a:pPr>
-            <a:r>
-              <a:rPr lang="en-US" sz="2100" dirty="0">
+            <a:endParaRPr lang="en-US" sz="1920" dirty="0"/>
+          </a:p>
+          <a:p>
+            <a:pPr indent="0" marL="0">
+              <a:buNone/>
+            </a:pPr>
+            <a:r>
+              <a:rPr lang="en-US" sz="1920" dirty="0">
                 <a:solidFill>
                   <a:srgbClr val="003A63"/>
                 </a:solidFill>
@@ -13608,9 +13610,9 @@
                 <a:ea typeface="Aptos" pitchFamily="34" charset="-122"/>
                 <a:cs typeface="Aptos" pitchFamily="34" charset="-120"/>
               </a:rPr>
-              <a:t>• NIST AI Risk Management Framework: https://www.nist.gov/itl/ai-risk-management-framework</a:t>
-            </a:r>
-            <a:endParaRPr lang="en-US" sz="2100" dirty="0"/>
+              <a:t>• NIST AI Risk Management Framework:.</a:t>
+            </a:r>
+            <a:endParaRPr lang="en-US" sz="1920" dirty="0"/>
           </a:p>
         </p:txBody>
       </p:sp>
@@ -13622,12 +13624,12 @@
         </p:nvSpPr>
         <p:spPr>
           <a:xfrm>
-            <a:off x="7635240" y="1325880"/>
-            <a:ext cx="3474720" cy="1255471"/>
+            <a:off x="7543800" y="1325880"/>
+            <a:ext cx="3611880" cy="1261872"/>
           </a:xfrm>
           <a:prstGeom prst="roundRect">
             <a:avLst>
-              <a:gd name="adj" fmla="val 8740"/>
+              <a:gd name="adj" fmla="val 8696"/>
             </a:avLst>
           </a:prstGeom>
           <a:solidFill>
@@ -13649,8 +13651,8 @@
         </p:nvSpPr>
         <p:spPr>
           <a:xfrm>
-            <a:off x="7799832" y="1472184"/>
-            <a:ext cx="3145536" cy="256032"/>
+            <a:off x="7708392" y="1453896"/>
+            <a:ext cx="3282696" cy="228600"/>
           </a:xfrm>
           <a:prstGeom prst="rect">
             <a:avLst/>
@@ -13666,7 +13668,7 @@
               <a:buNone/>
             </a:pPr>
             <a:r>
-              <a:rPr lang="en-US" sz="1300" b="1" dirty="0">
+              <a:rPr lang="en-US" sz="1220" b="1" dirty="0">
                 <a:solidFill>
                   <a:srgbClr val="0068B7"/>
                 </a:solidFill>
@@ -13676,7 +13678,7 @@
               </a:rPr>
               <a:t>Data decision</a:t>
             </a:r>
-            <a:endParaRPr lang="en-US" sz="1300" dirty="0"/>
+            <a:endParaRPr lang="en-US" sz="1220" dirty="0"/>
           </a:p>
         </p:txBody>
       </p:sp>
@@ -13688,8 +13690,8 @@
         </p:nvSpPr>
         <p:spPr>
           <a:xfrm>
-            <a:off x="7799832" y="1801368"/>
-            <a:ext cx="3145536" cy="688543"/>
+            <a:off x="7708392" y="1764792"/>
+            <a:ext cx="3282696" cy="749808"/>
           </a:xfrm>
           <a:prstGeom prst="rect">
             <a:avLst/>
@@ -13707,7 +13709,7 @@
               <a:buNone/>
             </a:pPr>
             <a:r>
-              <a:rPr lang="en-US" sz="1320" dirty="0">
+              <a:rPr lang="en-US" sz="1220" dirty="0">
                 <a:solidFill>
                   <a:srgbClr val="17364A"/>
                 </a:solidFill>
@@ -13715,9 +13717,9 @@
                 <a:ea typeface="Aptos" pitchFamily="34" charset="-122"/>
                 <a:cs typeface="Aptos" pitchFamily="34" charset="-120"/>
               </a:rPr>
-              <a:t>CDC Public Health Data Strategy: https://www.cdc.gov/public-health-data-strategy/php/about/index.html</a:t>
-            </a:r>
-            <a:endParaRPr lang="en-US" sz="1320" dirty="0"/>
+              <a:t>CDC Public Health Data Strategy:.</a:t>
+            </a:r>
+            <a:endParaRPr lang="en-US" sz="1220" dirty="0"/>
           </a:p>
         </p:txBody>
       </p:sp>
@@ -13729,12 +13731,12 @@
         </p:nvSpPr>
         <p:spPr>
           <a:xfrm>
-            <a:off x="7635240" y="2718511"/>
-            <a:ext cx="3474720" cy="1328623"/>
+            <a:off x="7543800" y="2724912"/>
+            <a:ext cx="3611880" cy="1527048"/>
           </a:xfrm>
           <a:prstGeom prst="roundRect">
             <a:avLst>
-              <a:gd name="adj" fmla="val 8259"/>
+              <a:gd name="adj" fmla="val 7186"/>
             </a:avLst>
           </a:prstGeom>
           <a:solidFill>
@@ -13756,8 +13758,8 @@
         </p:nvSpPr>
         <p:spPr>
           <a:xfrm>
-            <a:off x="7799832" y="2864815"/>
-            <a:ext cx="3145536" cy="256032"/>
+            <a:off x="7708392" y="2852928"/>
+            <a:ext cx="3282696" cy="228600"/>
           </a:xfrm>
           <a:prstGeom prst="rect">
             <a:avLst/>
@@ -13773,7 +13775,7 @@
               <a:buNone/>
             </a:pPr>
             <a:r>
-              <a:rPr lang="en-US" sz="1300" b="1" dirty="0">
+              <a:rPr lang="en-US" sz="1220" b="1" dirty="0">
                 <a:solidFill>
                   <a:srgbClr val="0068B7"/>
                 </a:solidFill>
@@ -13783,7 +13785,7 @@
               </a:rPr>
               <a:t>Concept checkpoints</a:t>
             </a:r>
-            <a:endParaRPr lang="en-US" sz="1300" dirty="0"/>
+            <a:endParaRPr lang="en-US" sz="1220" dirty="0"/>
           </a:p>
         </p:txBody>
       </p:sp>
@@ -13795,8 +13797,8 @@
         </p:nvSpPr>
         <p:spPr>
           <a:xfrm>
-            <a:off x="7818120" y="3230575"/>
-            <a:ext cx="3090672" cy="670255"/>
+            <a:off x="7726680" y="3182112"/>
+            <a:ext cx="3227832" cy="960120"/>
           </a:xfrm>
           <a:prstGeom prst="rect">
             <a:avLst/>
@@ -13814,7 +13816,7 @@
               <a:buNone/>
             </a:pPr>
             <a:r>
-              <a:rPr lang="en-US" sz="1220" dirty="0">
+              <a:rPr lang="en-US" sz="1140" dirty="0">
                 <a:solidFill>
                   <a:srgbClr val="17364A"/>
                 </a:solidFill>
@@ -13824,14 +13826,14 @@
               </a:rPr>
               <a:t>NIST Generative AI Profile:.</a:t>
             </a:r>
-            <a:endParaRPr lang="en-US" sz="1220" dirty="0"/>
-          </a:p>
-          <a:p>
-            <a:pPr indent="0" marL="0">
-              <a:buNone/>
-            </a:pPr>
-            <a:r>
-              <a:rPr lang="en-US" sz="1220" dirty="0">
+            <a:endParaRPr lang="en-US" sz="1140" dirty="0"/>
+          </a:p>
+          <a:p>
+            <a:pPr indent="0" marL="0">
+              <a:buNone/>
+            </a:pPr>
+            <a:r>
+              <a:rPr lang="en-US" sz="1140" dirty="0">
                 <a:solidFill>
                   <a:srgbClr val="17364A"/>
                 </a:solidFill>
@@ -13841,7 +13843,7 @@
               </a:rPr>
               <a:t>ONC interoperability and health IT resources</a:t>
             </a:r>
-            <a:endParaRPr lang="en-US" sz="1220" dirty="0"/>
+            <a:endParaRPr lang="en-US" sz="1140" dirty="0"/>
           </a:p>
         </p:txBody>
       </p:sp>
@@ -13853,12 +13855,12 @@
         </p:nvSpPr>
         <p:spPr>
           <a:xfrm>
-            <a:off x="7635240" y="4184294"/>
-            <a:ext cx="3474720" cy="1466698"/>
+            <a:off x="7543800" y="4389120"/>
+            <a:ext cx="3611880" cy="1261872"/>
           </a:xfrm>
           <a:prstGeom prst="roundRect">
             <a:avLst>
-              <a:gd name="adj" fmla="val 7481"/>
+              <a:gd name="adj" fmla="val 8696"/>
             </a:avLst>
           </a:prstGeom>
           <a:solidFill>
@@ -13880,8 +13882,8 @@
         </p:nvSpPr>
         <p:spPr>
           <a:xfrm>
-            <a:off x="7799832" y="4330598"/>
-            <a:ext cx="3145536" cy="256032"/>
+            <a:off x="7708392" y="4517136"/>
+            <a:ext cx="3282696" cy="228600"/>
           </a:xfrm>
           <a:prstGeom prst="rect">
             <a:avLst/>
@@ -13897,7 +13899,7 @@
               <a:buNone/>
             </a:pPr>
             <a:r>
-              <a:rPr lang="en-US" sz="1300" b="1" dirty="0">
+              <a:rPr lang="en-US" sz="1220" b="1" dirty="0">
                 <a:solidFill>
                   <a:srgbClr val="0068B7"/>
                 </a:solidFill>
@@ -13907,7 +13909,7 @@
               </a:rPr>
               <a:t>How to validate</a:t>
             </a:r>
-            <a:endParaRPr lang="en-US" sz="1300" dirty="0"/>
+            <a:endParaRPr lang="en-US" sz="1220" dirty="0"/>
           </a:p>
         </p:txBody>
       </p:sp>
@@ -13919,8 +13921,8 @@
         </p:nvSpPr>
         <p:spPr>
           <a:xfrm>
-            <a:off x="7799832" y="4659782"/>
-            <a:ext cx="3145536" cy="899770"/>
+            <a:off x="7708392" y="4828032"/>
+            <a:ext cx="3282696" cy="749808"/>
           </a:xfrm>
           <a:prstGeom prst="rect">
             <a:avLst/>
@@ -13938,7 +13940,7 @@
               <a:buNone/>
             </a:pPr>
             <a:r>
-              <a:rPr lang="en-US" sz="1320" dirty="0">
+              <a:rPr lang="en-US" sz="1220" dirty="0">
                 <a:solidFill>
                   <a:srgbClr val="17364A"/>
                 </a:solidFill>
@@ -13946,9 +13948,9 @@
                 <a:ea typeface="Aptos" pitchFamily="34" charset="-122"/>
                 <a:cs typeface="Aptos" pitchFamily="34" charset="-120"/>
               </a:rPr>
-              <a:t>Connect the concept to data quality, model performance, validation evidence, monitoring measures, and decisions that remain under human control.</a:t>
-            </a:r>
-            <a:endParaRPr lang="en-US" sz="1320" dirty="0"/>
+              <a:t>Connect the concept to data quality, model performance, validation evidence,.</a:t>
+            </a:r>
+            <a:endParaRPr lang="en-US" sz="1220" dirty="0"/>
           </a:p>
         </p:txBody>
       </p:sp>
@@ -14239,8 +14241,8 @@
         </p:nvSpPr>
         <p:spPr>
           <a:xfrm>
-            <a:off x="868680" y="1508760"/>
-            <a:ext cx="6309360" cy="4160520"/>
+            <a:off x="822960" y="1463040"/>
+            <a:ext cx="6565392" cy="4343400"/>
           </a:xfrm>
           <a:prstGeom prst="rect">
             <a:avLst/>
@@ -14258,7 +14260,7 @@
               <a:buNone/>
             </a:pPr>
             <a:r>
-              <a:rPr lang="en-US" sz="2100" dirty="0">
+              <a:rPr lang="en-US" sz="1920" dirty="0">
                 <a:solidFill>
                   <a:srgbClr val="003A63"/>
                 </a:solidFill>
@@ -14266,9 +14268,9 @@
                 <a:ea typeface="Aptos" pitchFamily="34" charset="-122"/>
                 <a:cs typeface="Aptos" pitchFamily="34" charset="-120"/>
               </a:rPr>
-              <a:t>• Agency data governance, privacy, cybersecurity, and enterprise architecture documentation</a:t>
-            </a:r>
-            <a:endParaRPr lang="en-US" sz="2100" dirty="0"/>
+              <a:t>• Agency data governance, privacy, cybersecurity, and enterprise architecture.</a:t>
+            </a:r>
+            <a:endParaRPr lang="en-US" sz="1920" dirty="0"/>
           </a:p>
         </p:txBody>
       </p:sp>
@@ -14280,12 +14282,12 @@
         </p:nvSpPr>
         <p:spPr>
           <a:xfrm>
-            <a:off x="7635240" y="1325880"/>
-            <a:ext cx="3474720" cy="1207008"/>
+            <a:off x="7543800" y="1325880"/>
+            <a:ext cx="3611880" cy="1261872"/>
           </a:xfrm>
           <a:prstGeom prst="roundRect">
             <a:avLst>
-              <a:gd name="adj" fmla="val 9091"/>
+              <a:gd name="adj" fmla="val 8696"/>
             </a:avLst>
           </a:prstGeom>
           <a:solidFill>
@@ -14307,8 +14309,8 @@
         </p:nvSpPr>
         <p:spPr>
           <a:xfrm>
-            <a:off x="7799832" y="1472184"/>
-            <a:ext cx="3145536" cy="256032"/>
+            <a:off x="7708392" y="1453896"/>
+            <a:ext cx="3282696" cy="228600"/>
           </a:xfrm>
           <a:prstGeom prst="rect">
             <a:avLst/>
@@ -14324,7 +14326,7 @@
               <a:buNone/>
             </a:pPr>
             <a:r>
-              <a:rPr lang="en-US" sz="1300" b="1" dirty="0">
+              <a:rPr lang="en-US" sz="1220" b="1" dirty="0">
                 <a:solidFill>
                   <a:srgbClr val="0068B7"/>
                 </a:solidFill>
@@ -14334,7 +14336,7 @@
               </a:rPr>
               <a:t>Data decision</a:t>
             </a:r>
-            <a:endParaRPr lang="en-US" sz="1300" dirty="0"/>
+            <a:endParaRPr lang="en-US" sz="1220" dirty="0"/>
           </a:p>
         </p:txBody>
       </p:sp>
@@ -14346,8 +14348,8 @@
         </p:nvSpPr>
         <p:spPr>
           <a:xfrm>
-            <a:off x="7799832" y="1801368"/>
-            <a:ext cx="3145536" cy="640080"/>
+            <a:off x="7708392" y="1764792"/>
+            <a:ext cx="3282696" cy="749808"/>
           </a:xfrm>
           <a:prstGeom prst="rect">
             <a:avLst/>
@@ -14365,7 +14367,7 @@
               <a:buNone/>
             </a:pPr>
             <a:r>
-              <a:rPr lang="en-US" sz="1320" dirty="0">
+              <a:rPr lang="en-US" sz="1220" dirty="0">
                 <a:solidFill>
                   <a:srgbClr val="17364A"/>
                 </a:solidFill>
@@ -14375,7 +14377,7 @@
               </a:rPr>
               <a:t>Agency data governance, privacy, cybersecurity, and enterprise architecture.</a:t>
             </a:r>
-            <a:endParaRPr lang="en-US" sz="1320" dirty="0"/>
+            <a:endParaRPr lang="en-US" sz="1220" dirty="0"/>
           </a:p>
         </p:txBody>
       </p:sp>
@@ -14387,12 +14389,12 @@
         </p:nvSpPr>
         <p:spPr>
           <a:xfrm>
-            <a:off x="7635240" y="2670048"/>
-            <a:ext cx="3474720" cy="1377086"/>
+            <a:off x="7543800" y="2724912"/>
+            <a:ext cx="3611880" cy="1527048"/>
           </a:xfrm>
           <a:prstGeom prst="roundRect">
             <a:avLst>
-              <a:gd name="adj" fmla="val 7968"/>
+              <a:gd name="adj" fmla="val 7186"/>
             </a:avLst>
           </a:prstGeom>
           <a:solidFill>
@@ -14414,8 +14416,8 @@
         </p:nvSpPr>
         <p:spPr>
           <a:xfrm>
-            <a:off x="7799832" y="2816352"/>
-            <a:ext cx="3145536" cy="256032"/>
+            <a:off x="7708392" y="2852928"/>
+            <a:ext cx="3282696" cy="228600"/>
           </a:xfrm>
           <a:prstGeom prst="rect">
             <a:avLst/>
@@ -14431,7 +14433,7 @@
               <a:buNone/>
             </a:pPr>
             <a:r>
-              <a:rPr lang="en-US" sz="1300" b="1" dirty="0">
+              <a:rPr lang="en-US" sz="1220" b="1" dirty="0">
                 <a:solidFill>
                   <a:srgbClr val="0068B7"/>
                 </a:solidFill>
@@ -14441,7 +14443,7 @@
               </a:rPr>
               <a:t>Concept checkpoints</a:t>
             </a:r>
-            <a:endParaRPr lang="en-US" sz="1300" dirty="0"/>
+            <a:endParaRPr lang="en-US" sz="1220" dirty="0"/>
           </a:p>
         </p:txBody>
       </p:sp>
@@ -14453,8 +14455,8 @@
         </p:nvSpPr>
         <p:spPr>
           <a:xfrm>
-            <a:off x="7818120" y="3182112"/>
-            <a:ext cx="3090672" cy="718718"/>
+            <a:off x="7726680" y="3182112"/>
+            <a:ext cx="3227832" cy="960120"/>
           </a:xfrm>
           <a:prstGeom prst="rect">
             <a:avLst/>
@@ -14472,7 +14474,7 @@
               <a:buNone/>
             </a:pPr>
             <a:r>
-              <a:rPr lang="en-US" sz="1220" dirty="0">
+              <a:rPr lang="en-US" sz="1140" dirty="0">
                 <a:solidFill>
                   <a:srgbClr val="17364A"/>
                 </a:solidFill>
@@ -14480,9 +14482,9 @@
                 <a:ea typeface="Aptos" pitchFamily="34" charset="-122"/>
                 <a:cs typeface="Aptos" pitchFamily="34" charset="-120"/>
               </a:rPr>
-              <a:t>Agency data governance, privacy, cybersecurity, and enterprise.</a:t>
-            </a:r>
-            <a:endParaRPr lang="en-US" sz="1220" dirty="0"/>
+              <a:t>Agency data governance, privacy, cybersecurity,.</a:t>
+            </a:r>
+            <a:endParaRPr lang="en-US" sz="1140" dirty="0"/>
           </a:p>
         </p:txBody>
       </p:sp>
@@ -14494,12 +14496,12 @@
         </p:nvSpPr>
         <p:spPr>
           <a:xfrm>
-            <a:off x="7635240" y="4184294"/>
-            <a:ext cx="3474720" cy="1466698"/>
+            <a:off x="7543800" y="4389120"/>
+            <a:ext cx="3611880" cy="1261872"/>
           </a:xfrm>
           <a:prstGeom prst="roundRect">
             <a:avLst>
-              <a:gd name="adj" fmla="val 7481"/>
+              <a:gd name="adj" fmla="val 8696"/>
             </a:avLst>
           </a:prstGeom>
           <a:solidFill>
@@ -14521,8 +14523,8 @@
         </p:nvSpPr>
         <p:spPr>
           <a:xfrm>
-            <a:off x="7799832" y="4330598"/>
-            <a:ext cx="3145536" cy="256032"/>
+            <a:off x="7708392" y="4517136"/>
+            <a:ext cx="3282696" cy="228600"/>
           </a:xfrm>
           <a:prstGeom prst="rect">
             <a:avLst/>
@@ -14538,7 +14540,7 @@
               <a:buNone/>
             </a:pPr>
             <a:r>
-              <a:rPr lang="en-US" sz="1300" b="1" dirty="0">
+              <a:rPr lang="en-US" sz="1220" b="1" dirty="0">
                 <a:solidFill>
                   <a:srgbClr val="0068B7"/>
                 </a:solidFill>
@@ -14548,7 +14550,7 @@
               </a:rPr>
               <a:t>How to validate</a:t>
             </a:r>
-            <a:endParaRPr lang="en-US" sz="1300" dirty="0"/>
+            <a:endParaRPr lang="en-US" sz="1220" dirty="0"/>
           </a:p>
         </p:txBody>
       </p:sp>
@@ -14560,8 +14562,8 @@
         </p:nvSpPr>
         <p:spPr>
           <a:xfrm>
-            <a:off x="7799832" y="4659782"/>
-            <a:ext cx="3145536" cy="899770"/>
+            <a:off x="7708392" y="4828032"/>
+            <a:ext cx="3282696" cy="749808"/>
           </a:xfrm>
           <a:prstGeom prst="rect">
             <a:avLst/>
@@ -14579,7 +14581,7 @@
               <a:buNone/>
             </a:pPr>
             <a:r>
-              <a:rPr lang="en-US" sz="1320" dirty="0">
+              <a:rPr lang="en-US" sz="1220" dirty="0">
                 <a:solidFill>
                   <a:srgbClr val="17364A"/>
                 </a:solidFill>
@@ -14587,9 +14589,9 @@
                 <a:ea typeface="Aptos" pitchFamily="34" charset="-122"/>
                 <a:cs typeface="Aptos" pitchFamily="34" charset="-120"/>
               </a:rPr>
-              <a:t>Connect the concept to data quality, model performance, validation evidence, monitoring measures, and decisions that remain under human control.</a:t>
-            </a:r>
-            <a:endParaRPr lang="en-US" sz="1320" dirty="0"/>
+              <a:t>Connect the concept to data quality, model performance, validation evidence,.</a:t>
+            </a:r>
+            <a:endParaRPr lang="en-US" sz="1220" dirty="0"/>
           </a:p>
         </p:txBody>
       </p:sp>
@@ -14907,7 +14909,7 @@
                 <a:ea typeface="Aptos" pitchFamily="34" charset="-122"/>
                 <a:cs typeface="Aptos" pitchFamily="34" charset="-120"/>
               </a:rPr>
-              <a:t>• Play 11: Build and Deploy AI Solutions - This lesson informs Play 11 by helping learners.</a:t>
+              <a:t>• Play 11: Build and Deploy AI Solutions - This lesson informs Play 11 by.</a:t>
             </a:r>
             <a:endParaRPr lang="en-US" sz="1900" dirty="0"/>
           </a:p>
@@ -14924,7 +14926,7 @@
                 <a:ea typeface="Aptos" pitchFamily="34" charset="-122"/>
                 <a:cs typeface="Aptos" pitchFamily="34" charset="-120"/>
               </a:rPr>
-              <a:t>• Play 2: Readiness Assessment - This lesson informs Play 2 by helping learners connect the.</a:t>
+              <a:t>• Play 2: Readiness Assessment - This lesson informs Play 2 by helping.</a:t>
             </a:r>
             <a:endParaRPr lang="en-US" sz="1900" dirty="0"/>
           </a:p>
@@ -14941,7 +14943,7 @@
                 <a:ea typeface="Aptos" pitchFamily="34" charset="-122"/>
                 <a:cs typeface="Aptos" pitchFamily="34" charset="-120"/>
               </a:rPr>
-              <a:t>• Play 3: Establish AI Governance - This lesson informs Play 3 by helping learners connect the.</a:t>
+              <a:t>• Play 3: Establish AI Governance - This lesson informs Play 3 by helping.</a:t>
             </a:r>
             <a:endParaRPr lang="en-US" sz="1900" dirty="0"/>
           </a:p>
@@ -14958,7 +14960,7 @@
                 <a:ea typeface="Aptos" pitchFamily="34" charset="-122"/>
                 <a:cs typeface="Aptos" pitchFamily="34" charset="-120"/>
               </a:rPr>
-              <a:t>• Play 7: Prioritize Use Cases - This lesson informs Play 7 by helping learners connect the.</a:t>
+              <a:t>• Play 7: Prioritize Use Cases - This lesson informs Play 7 by helping.</a:t>
             </a:r>
             <a:endParaRPr lang="en-US" sz="1900" dirty="0"/>
           </a:p>
@@ -14999,8 +15001,8 @@
         </p:nvSpPr>
         <p:spPr>
           <a:xfrm>
-            <a:off x="8211312" y="1563624"/>
-            <a:ext cx="2734056" cy="256032"/>
+            <a:off x="8211312" y="1545336"/>
+            <a:ext cx="2734056" cy="228600"/>
           </a:xfrm>
           <a:prstGeom prst="rect">
             <a:avLst/>
@@ -15016,7 +15018,7 @@
               <a:buNone/>
             </a:pPr>
             <a:r>
-              <a:rPr lang="en-US" sz="1300" b="1" dirty="0">
+              <a:rPr lang="en-US" sz="1220" b="1" dirty="0">
                 <a:solidFill>
                   <a:srgbClr val="0068B7"/>
                 </a:solidFill>
@@ -15026,7 +15028,7 @@
               </a:rPr>
               <a:t>Apply the lesson</a:t>
             </a:r>
-            <a:endParaRPr lang="en-US" sz="1300" dirty="0"/>
+            <a:endParaRPr lang="en-US" sz="1220" dirty="0"/>
           </a:p>
         </p:txBody>
       </p:sp>
@@ -15038,8 +15040,8 @@
         </p:nvSpPr>
         <p:spPr>
           <a:xfrm>
-            <a:off x="8211312" y="1892808"/>
-            <a:ext cx="2734056" cy="1536192"/>
+            <a:off x="8211312" y="1856232"/>
+            <a:ext cx="2734056" cy="1591056"/>
           </a:xfrm>
           <a:prstGeom prst="rect">
             <a:avLst/>
@@ -15057,7 +15059,7 @@
               <a:buNone/>
             </a:pPr>
             <a:r>
-              <a:rPr lang="en-US" sz="1320" dirty="0">
+              <a:rPr lang="en-US" sz="1220" dirty="0">
                 <a:solidFill>
                   <a:srgbClr val="17364A"/>
                 </a:solidFill>
@@ -15065,9 +15067,9 @@
                 <a:ea typeface="Aptos" pitchFamily="34" charset="-122"/>
                 <a:cs typeface="Aptos" pitchFamily="34" charset="-120"/>
               </a:rPr>
-              <a:t>Use the related plays to identify decisions, participants, timing, approvals, and documentation needed for responsible implementation.</a:t>
-            </a:r>
-            <a:endParaRPr lang="en-US" sz="1320" dirty="0"/>
+              <a:t>Use the related plays to identify decisions, participants, timing, approvals,.</a:t>
+            </a:r>
+            <a:endParaRPr lang="en-US" sz="1220" dirty="0"/>
           </a:p>
         </p:txBody>
       </p:sp>
@@ -15106,8 +15108,8 @@
         </p:nvSpPr>
         <p:spPr>
           <a:xfrm>
-            <a:off x="8211312" y="3941064"/>
-            <a:ext cx="2734056" cy="256032"/>
+            <a:off x="8211312" y="3922776"/>
+            <a:ext cx="2734056" cy="228600"/>
           </a:xfrm>
           <a:prstGeom prst="rect">
             <a:avLst/>
@@ -15123,7 +15125,7 @@
               <a:buNone/>
             </a:pPr>
             <a:r>
-              <a:rPr lang="en-US" sz="1300" b="1" dirty="0">
+              <a:rPr lang="en-US" sz="1220" b="1" dirty="0">
                 <a:solidFill>
                   <a:srgbClr val="0068B7"/>
                 </a:solidFill>
@@ -15133,7 +15135,7 @@
               </a:rPr>
               <a:t>Use the play links to</a:t>
             </a:r>
-            <a:endParaRPr lang="en-US" sz="1300" dirty="0"/>
+            <a:endParaRPr lang="en-US" sz="1220" dirty="0"/>
           </a:p>
         </p:txBody>
       </p:sp>
@@ -15145,8 +15147,8 @@
         </p:nvSpPr>
         <p:spPr>
           <a:xfrm>
-            <a:off x="8229600" y="4306824"/>
-            <a:ext cx="2679192" cy="941832"/>
+            <a:off x="8229600" y="4251960"/>
+            <a:ext cx="2679192" cy="1033272"/>
           </a:xfrm>
           <a:prstGeom prst="rect">
             <a:avLst/>
@@ -15164,7 +15166,7 @@
               <a:buNone/>
             </a:pPr>
             <a:r>
-              <a:rPr lang="en-US" sz="1220" dirty="0">
+              <a:rPr lang="en-US" sz="1140" dirty="0">
                 <a:solidFill>
                   <a:srgbClr val="17364A"/>
                 </a:solidFill>
@@ -15174,14 +15176,14 @@
               </a:rPr>
               <a:t>Locate the decision point in the playbook sequence.</a:t>
             </a:r>
-            <a:endParaRPr lang="en-US" sz="1220" dirty="0"/>
-          </a:p>
-          <a:p>
-            <a:pPr indent="0" marL="0">
-              <a:buNone/>
-            </a:pPr>
-            <a:r>
-              <a:rPr lang="en-US" sz="1220" dirty="0">
+            <a:endParaRPr lang="en-US" sz="1140" dirty="0"/>
+          </a:p>
+          <a:p>
+            <a:pPr indent="0" marL="0">
+              <a:buNone/>
+            </a:pPr>
+            <a:r>
+              <a:rPr lang="en-US" sz="1140" dirty="0">
                 <a:solidFill>
                   <a:srgbClr val="17364A"/>
                 </a:solidFill>
@@ -15191,14 +15193,14 @@
               </a:rPr>
               <a:t>Identify who should participate in the work.</a:t>
             </a:r>
-            <a:endParaRPr lang="en-US" sz="1220" dirty="0"/>
-          </a:p>
-          <a:p>
-            <a:pPr indent="0" marL="0">
-              <a:buNone/>
-            </a:pPr>
-            <a:r>
-              <a:rPr lang="en-US" sz="1220" dirty="0">
+            <a:endParaRPr lang="en-US" sz="1140" dirty="0"/>
+          </a:p>
+          <a:p>
+            <a:pPr indent="0" marL="0">
+              <a:buNone/>
+            </a:pPr>
+            <a:r>
+              <a:rPr lang="en-US" sz="1140" dirty="0">
                 <a:solidFill>
                   <a:srgbClr val="17364A"/>
                 </a:solidFill>
@@ -15206,9 +15208,9 @@
                 <a:ea typeface="Aptos" pitchFamily="34" charset="-122"/>
                 <a:cs typeface="Aptos" pitchFamily="34" charset="-120"/>
               </a:rPr>
-              <a:t>Document the review, approval, or implementation step.</a:t>
-            </a:r>
-            <a:endParaRPr lang="en-US" sz="1220" dirty="0"/>
+              <a:t>Document the review, approval, or implementation.</a:t>
+            </a:r>
+            <a:endParaRPr lang="en-US" sz="1140" dirty="0"/>
           </a:p>
         </p:txBody>
       </p:sp>
@@ -15526,7 +15528,7 @@
                 <a:ea typeface="Aptos" pitchFamily="34" charset="-122"/>
                 <a:cs typeface="Aptos" pitchFamily="34" charset="-120"/>
               </a:rPr>
-              <a:t>• Tool 4: AI Policy Landscape Scan (Worksheet) - Use AI Policy Landscape Scan to translate this.</a:t>
+              <a:t>• Tool 4: AI Policy Landscape Scan (Worksheet) - Use AI Policy Landscape Scan.</a:t>
             </a:r>
             <a:endParaRPr lang="en-US" sz="1850" dirty="0"/>
           </a:p>
@@ -15543,7 +15545,7 @@
                 <a:ea typeface="Aptos" pitchFamily="34" charset="-122"/>
                 <a:cs typeface="Aptos" pitchFamily="34" charset="-120"/>
               </a:rPr>
-              <a:t>• Tool 5: AI Environmental and Resource Impact Review (Checklist) - Use AI Environmental and.</a:t>
+              <a:t>• Tool 5: AI Environmental and Resource Impact Review (Checklist) - Use AI.</a:t>
             </a:r>
             <a:endParaRPr lang="en-US" sz="1850" dirty="0"/>
           </a:p>
@@ -15560,7 +15562,7 @@
                 <a:ea typeface="Aptos" pitchFamily="34" charset="-122"/>
                 <a:cs typeface="Aptos" pitchFamily="34" charset="-120"/>
               </a:rPr>
-              <a:t>• Tool 6: Human-Centered AI Decision Rule Checklist (Checklist) - Use Human-Centered AI Decision.</a:t>
+              <a:t>• Tool 6: Human-Centered AI Decision Rule Checklist (Checklist) - Use.</a:t>
             </a:r>
             <a:endParaRPr lang="en-US" sz="1850" dirty="0"/>
           </a:p>
@@ -15577,7 +15579,7 @@
                 <a:ea typeface="Aptos" pitchFamily="34" charset="-122"/>
                 <a:cs typeface="Aptos" pitchFamily="34" charset="-120"/>
               </a:rPr>
-              <a:t>• Tool 8: AI Project Charter (Planning) - Use AI Project Charter to translate this lesson into a.</a:t>
+              <a:t>• Tool 8: AI Project Charter (Planning) - Use AI Project Charter to translate.</a:t>
             </a:r>
             <a:endParaRPr lang="en-US" sz="1850" dirty="0"/>
           </a:p>
@@ -15618,8 +15620,8 @@
         </p:nvSpPr>
         <p:spPr>
           <a:xfrm>
-            <a:off x="8211312" y="1563624"/>
-            <a:ext cx="2734056" cy="256032"/>
+            <a:off x="8211312" y="1545336"/>
+            <a:ext cx="2734056" cy="228600"/>
           </a:xfrm>
           <a:prstGeom prst="rect">
             <a:avLst/>
@@ -15635,7 +15637,7 @@
               <a:buNone/>
             </a:pPr>
             <a:r>
-              <a:rPr lang="en-US" sz="1300" b="1" dirty="0">
+              <a:rPr lang="en-US" sz="1220" b="1" dirty="0">
                 <a:solidFill>
                   <a:srgbClr val="0068B7"/>
                 </a:solidFill>
@@ -15645,7 +15647,7 @@
               </a:rPr>
               <a:t>Use the tools</a:t>
             </a:r>
-            <a:endParaRPr lang="en-US" sz="1300" dirty="0"/>
+            <a:endParaRPr lang="en-US" sz="1220" dirty="0"/>
           </a:p>
         </p:txBody>
       </p:sp>
@@ -15657,8 +15659,8 @@
         </p:nvSpPr>
         <p:spPr>
           <a:xfrm>
-            <a:off x="8211312" y="1892808"/>
-            <a:ext cx="2734056" cy="1536192"/>
+            <a:off x="8211312" y="1856232"/>
+            <a:ext cx="2734056" cy="1591056"/>
           </a:xfrm>
           <a:prstGeom prst="rect">
             <a:avLst/>
@@ -15676,7 +15678,7 @@
               <a:buNone/>
             </a:pPr>
             <a:r>
-              <a:rPr lang="en-US" sz="1320" dirty="0">
+              <a:rPr lang="en-US" sz="1220" dirty="0">
                 <a:solidFill>
                   <a:srgbClr val="17364A"/>
                 </a:solidFill>
@@ -15684,9 +15686,9 @@
                 <a:ea typeface="Aptos" pitchFamily="34" charset="-122"/>
                 <a:cs typeface="Aptos" pitchFamily="34" charset="-120"/>
               </a:rPr>
-              <a:t>Use linked tools when your department needs a structured worksheet, template, checklist, review process, or documentation artifact.</a:t>
-            </a:r>
-            <a:endParaRPr lang="en-US" sz="1320" dirty="0"/>
+              <a:t>Use linked tools when your department needs a structured worksheet, template,.</a:t>
+            </a:r>
+            <a:endParaRPr lang="en-US" sz="1220" dirty="0"/>
           </a:p>
         </p:txBody>
       </p:sp>
@@ -15725,8 +15727,8 @@
         </p:nvSpPr>
         <p:spPr>
           <a:xfrm>
-            <a:off x="8211312" y="3941064"/>
-            <a:ext cx="2734056" cy="256032"/>
+            <a:off x="8211312" y="3922776"/>
+            <a:ext cx="2734056" cy="228600"/>
           </a:xfrm>
           <a:prstGeom prst="rect">
             <a:avLst/>
@@ -15742,7 +15744,7 @@
               <a:buNone/>
             </a:pPr>
             <a:r>
-              <a:rPr lang="en-US" sz="1300" b="1" dirty="0">
+              <a:rPr lang="en-US" sz="1220" b="1" dirty="0">
                 <a:solidFill>
                   <a:srgbClr val="0068B7"/>
                 </a:solidFill>
@@ -15752,7 +15754,7 @@
               </a:rPr>
               <a:t>Tool selection cues</a:t>
             </a:r>
-            <a:endParaRPr lang="en-US" sz="1300" dirty="0"/>
+            <a:endParaRPr lang="en-US" sz="1220" dirty="0"/>
           </a:p>
         </p:txBody>
       </p:sp>
@@ -15764,8 +15766,8 @@
         </p:nvSpPr>
         <p:spPr>
           <a:xfrm>
-            <a:off x="8229600" y="4306824"/>
-            <a:ext cx="2679192" cy="941832"/>
+            <a:off x="8229600" y="4251960"/>
+            <a:ext cx="2679192" cy="1033272"/>
           </a:xfrm>
           <a:prstGeom prst="rect">
             <a:avLst/>
@@ -15783,7 +15785,7 @@
               <a:buNone/>
             </a:pPr>
             <a:r>
-              <a:rPr lang="en-US" sz="1220" dirty="0">
+              <a:rPr lang="en-US" sz="1140" dirty="0">
                 <a:solidFill>
                   <a:srgbClr val="17364A"/>
                 </a:solidFill>
@@ -15793,14 +15795,14 @@
               </a:rPr>
               <a:t>Use a tool when no comparable local process exists.</a:t>
             </a:r>
-            <a:endParaRPr lang="en-US" sz="1220" dirty="0"/>
-          </a:p>
-          <a:p>
-            <a:pPr indent="0" marL="0">
-              <a:buNone/>
-            </a:pPr>
-            <a:r>
-              <a:rPr lang="en-US" sz="1220" dirty="0">
+            <a:endParaRPr lang="en-US" sz="1140" dirty="0"/>
+          </a:p>
+          <a:p>
+            <a:pPr indent="0" marL="0">
+              <a:buNone/>
+            </a:pPr>
+            <a:r>
+              <a:rPr lang="en-US" sz="1140" dirty="0">
                 <a:solidFill>
                   <a:srgbClr val="17364A"/>
                 </a:solidFill>
@@ -15808,16 +15810,16 @@
                 <a:ea typeface="Aptos" pitchFamily="34" charset="-122"/>
                 <a:cs typeface="Aptos" pitchFamily="34" charset="-120"/>
               </a:rPr>
-              <a:t>Adapt existing department templates when they already fit the.</a:t>
-            </a:r>
-            <a:endParaRPr lang="en-US" sz="1220" dirty="0"/>
-          </a:p>
-          <a:p>
-            <a:pPr indent="0" marL="0">
-              <a:buNone/>
-            </a:pPr>
-            <a:r>
-              <a:rPr lang="en-US" sz="1220" dirty="0">
+              <a:t>Adapt existing department templates when they.</a:t>
+            </a:r>
+            <a:endParaRPr lang="en-US" sz="1140" dirty="0"/>
+          </a:p>
+          <a:p>
+            <a:pPr indent="0" marL="0">
+              <a:buNone/>
+            </a:pPr>
+            <a:r>
+              <a:rPr lang="en-US" sz="1140" dirty="0">
                 <a:solidFill>
                   <a:srgbClr val="17364A"/>
                 </a:solidFill>
@@ -15825,9 +15827,9 @@
                 <a:ea typeface="Aptos" pitchFamily="34" charset="-122"/>
                 <a:cs typeface="Aptos" pitchFamily="34" charset="-120"/>
               </a:rPr>
-              <a:t>Save the completed artifact as evidence of the decision.</a:t>
-            </a:r>
-            <a:endParaRPr lang="en-US" sz="1220" dirty="0"/>
+              <a:t>Save the completed artifact as evidence of the.</a:t>
+            </a:r>
+            <a:endParaRPr lang="en-US" sz="1140" dirty="0"/>
           </a:p>
         </p:txBody>
       </p:sp>
@@ -16118,8 +16120,8 @@
         </p:nvSpPr>
         <p:spPr>
           <a:xfrm>
-            <a:off x="868680" y="1508760"/>
-            <a:ext cx="6309360" cy="4160520"/>
+            <a:off x="822960" y="1463040"/>
+            <a:ext cx="6565392" cy="4343400"/>
           </a:xfrm>
           <a:prstGeom prst="rect">
             <a:avLst/>
@@ -16137,7 +16139,7 @@
               <a:buNone/>
             </a:pPr>
             <a:r>
-              <a:rPr lang="en-US" sz="2100" dirty="0">
+              <a:rPr lang="en-US" sz="1920" dirty="0">
                 <a:solidFill>
                   <a:srgbClr val="003A63"/>
                 </a:solidFill>
@@ -16145,16 +16147,16 @@
                 <a:ea typeface="Aptos" pitchFamily="34" charset="-122"/>
                 <a:cs typeface="Aptos" pitchFamily="34" charset="-120"/>
               </a:rPr>
-              <a:t>• Explain why AI readiness depends on public health data modernization, not only on access to an.</a:t>
-            </a:r>
-            <a:endParaRPr lang="en-US" sz="2100" dirty="0"/>
-          </a:p>
-          <a:p>
-            <a:pPr indent="0" marL="0">
-              <a:buNone/>
-            </a:pPr>
-            <a:r>
-              <a:rPr lang="en-US" sz="2100" dirty="0">
+              <a:t>• Explain why AI readiness depends on public health data modernization, not.</a:t>
+            </a:r>
+            <a:endParaRPr lang="en-US" sz="1920" dirty="0"/>
+          </a:p>
+          <a:p>
+            <a:pPr indent="0" marL="0">
+              <a:buNone/>
+            </a:pPr>
+            <a:r>
+              <a:rPr lang="en-US" sz="1920" dirty="0">
                 <a:solidFill>
                   <a:srgbClr val="003A63"/>
                 </a:solidFill>
@@ -16162,16 +16164,16 @@
                 <a:ea typeface="Aptos" pitchFamily="34" charset="-122"/>
                 <a:cs typeface="Aptos" pitchFamily="34" charset="-120"/>
               </a:rPr>
-              <a:t>• Describe the major components of an AI-enabled public health architecture, including source.</a:t>
-            </a:r>
-            <a:endParaRPr lang="en-US" sz="2100" dirty="0"/>
-          </a:p>
-          <a:p>
-            <a:pPr indent="0" marL="0">
-              <a:buNone/>
-            </a:pPr>
-            <a:r>
-              <a:rPr lang="en-US" sz="2100" dirty="0">
+              <a:t>• Describe the major components of an AI-enabled public health architecture,.</a:t>
+            </a:r>
+            <a:endParaRPr lang="en-US" sz="1920" dirty="0"/>
+          </a:p>
+          <a:p>
+            <a:pPr indent="0" marL="0">
+              <a:buNone/>
+            </a:pPr>
+            <a:r>
+              <a:rPr lang="en-US" sz="1920" dirty="0">
                 <a:solidFill>
                   <a:srgbClr val="003A63"/>
                 </a:solidFill>
@@ -16179,9 +16181,9 @@
                 <a:ea typeface="Aptos" pitchFamily="34" charset="-122"/>
                 <a:cs typeface="Aptos" pitchFamily="34" charset="-120"/>
               </a:rPr>
-              <a:t>• Identify the systems of record, source systems, data flows, and human decision points in a.</a:t>
-            </a:r>
-            <a:endParaRPr lang="en-US" sz="2100" dirty="0"/>
+              <a:t>• Identify the systems of record, source systems, data flows, and human.</a:t>
+            </a:r>
+            <a:endParaRPr lang="en-US" sz="1920" dirty="0"/>
           </a:p>
         </p:txBody>
       </p:sp>
@@ -16193,12 +16195,12 @@
         </p:nvSpPr>
         <p:spPr>
           <a:xfrm>
-            <a:off x="7635240" y="1325880"/>
-            <a:ext cx="3474720" cy="1255471"/>
+            <a:off x="7543800" y="1325880"/>
+            <a:ext cx="3611880" cy="1261872"/>
           </a:xfrm>
           <a:prstGeom prst="roundRect">
             <a:avLst>
-              <a:gd name="adj" fmla="val 8740"/>
+              <a:gd name="adj" fmla="val 8696"/>
             </a:avLst>
           </a:prstGeom>
           <a:solidFill>
@@ -16220,8 +16222,8 @@
         </p:nvSpPr>
         <p:spPr>
           <a:xfrm>
-            <a:off x="7799832" y="1472184"/>
-            <a:ext cx="3145536" cy="256032"/>
+            <a:off x="7708392" y="1453896"/>
+            <a:ext cx="3282696" cy="228600"/>
           </a:xfrm>
           <a:prstGeom prst="rect">
             <a:avLst/>
@@ -16237,7 +16239,7 @@
               <a:buNone/>
             </a:pPr>
             <a:r>
-              <a:rPr lang="en-US" sz="1300" b="1" dirty="0">
+              <a:rPr lang="en-US" sz="1220" b="1" dirty="0">
                 <a:solidFill>
                   <a:srgbClr val="0068B7"/>
                 </a:solidFill>
@@ -16247,7 +16249,7 @@
               </a:rPr>
               <a:t>Data decision</a:t>
             </a:r>
-            <a:endParaRPr lang="en-US" sz="1300" dirty="0"/>
+            <a:endParaRPr lang="en-US" sz="1220" dirty="0"/>
           </a:p>
         </p:txBody>
       </p:sp>
@@ -16259,8 +16261,8 @@
         </p:nvSpPr>
         <p:spPr>
           <a:xfrm>
-            <a:off x="7799832" y="1801368"/>
-            <a:ext cx="3145536" cy="688543"/>
+            <a:off x="7708392" y="1764792"/>
+            <a:ext cx="3282696" cy="749808"/>
           </a:xfrm>
           <a:prstGeom prst="rect">
             <a:avLst/>
@@ -16278,7 +16280,7 @@
               <a:buNone/>
             </a:pPr>
             <a:r>
-              <a:rPr lang="en-US" sz="1320" dirty="0">
+              <a:rPr lang="en-US" sz="1220" dirty="0">
                 <a:solidFill>
                   <a:srgbClr val="17364A"/>
                 </a:solidFill>
@@ -16286,9 +16288,9 @@
                 <a:ea typeface="Aptos" pitchFamily="34" charset="-122"/>
                 <a:cs typeface="Aptos" pitchFamily="34" charset="-120"/>
               </a:rPr>
-              <a:t>Explain why AI readiness depends on public health data modernization, not only on access to an AI tool.</a:t>
-            </a:r>
-            <a:endParaRPr lang="en-US" sz="1320" dirty="0"/>
+              <a:t>Explain why AI readiness depends on public health data modernization, not only.</a:t>
+            </a:r>
+            <a:endParaRPr lang="en-US" sz="1220" dirty="0"/>
           </a:p>
         </p:txBody>
       </p:sp>
@@ -16300,12 +16302,12 @@
         </p:nvSpPr>
         <p:spPr>
           <a:xfrm>
-            <a:off x="7635240" y="2718511"/>
-            <a:ext cx="3474720" cy="1328623"/>
+            <a:off x="7543800" y="2724912"/>
+            <a:ext cx="3611880" cy="1527048"/>
           </a:xfrm>
           <a:prstGeom prst="roundRect">
             <a:avLst>
-              <a:gd name="adj" fmla="val 8259"/>
+              <a:gd name="adj" fmla="val 7186"/>
             </a:avLst>
           </a:prstGeom>
           <a:solidFill>
@@ -16327,8 +16329,8 @@
         </p:nvSpPr>
         <p:spPr>
           <a:xfrm>
-            <a:off x="7799832" y="2864815"/>
-            <a:ext cx="3145536" cy="256032"/>
+            <a:off x="7708392" y="2852928"/>
+            <a:ext cx="3282696" cy="228600"/>
           </a:xfrm>
           <a:prstGeom prst="rect">
             <a:avLst/>
@@ -16344,7 +16346,7 @@
               <a:buNone/>
             </a:pPr>
             <a:r>
-              <a:rPr lang="en-US" sz="1300" b="1" dirty="0">
+              <a:rPr lang="en-US" sz="1220" b="1" dirty="0">
                 <a:solidFill>
                   <a:srgbClr val="0068B7"/>
                 </a:solidFill>
@@ -16354,7 +16356,7 @@
               </a:rPr>
               <a:t>Concept checkpoints</a:t>
             </a:r>
-            <a:endParaRPr lang="en-US" sz="1300" dirty="0"/>
+            <a:endParaRPr lang="en-US" sz="1220" dirty="0"/>
           </a:p>
         </p:txBody>
       </p:sp>
@@ -16366,8 +16368,8 @@
         </p:nvSpPr>
         <p:spPr>
           <a:xfrm>
-            <a:off x="7818120" y="3230575"/>
-            <a:ext cx="3090672" cy="670255"/>
+            <a:off x="7726680" y="3182112"/>
+            <a:ext cx="3227832" cy="960120"/>
           </a:xfrm>
           <a:prstGeom prst="rect">
             <a:avLst/>
@@ -16385,7 +16387,7 @@
               <a:buNone/>
             </a:pPr>
             <a:r>
-              <a:rPr lang="en-US" sz="1220" dirty="0">
+              <a:rPr lang="en-US" sz="1140" dirty="0">
                 <a:solidFill>
                   <a:srgbClr val="17364A"/>
                 </a:solidFill>
@@ -16393,16 +16395,16 @@
                 <a:ea typeface="Aptos" pitchFamily="34" charset="-122"/>
                 <a:cs typeface="Aptos" pitchFamily="34" charset="-120"/>
               </a:rPr>
-              <a:t>Describe the major components of an AI-enabled public health.</a:t>
-            </a:r>
-            <a:endParaRPr lang="en-US" sz="1220" dirty="0"/>
-          </a:p>
-          <a:p>
-            <a:pPr indent="0" marL="0">
-              <a:buNone/>
-            </a:pPr>
-            <a:r>
-              <a:rPr lang="en-US" sz="1220" dirty="0">
+              <a:t>Describe the major components of an AI-enabled.</a:t>
+            </a:r>
+            <a:endParaRPr lang="en-US" sz="1140" dirty="0"/>
+          </a:p>
+          <a:p>
+            <a:pPr indent="0" marL="0">
+              <a:buNone/>
+            </a:pPr>
+            <a:r>
+              <a:rPr lang="en-US" sz="1140" dirty="0">
                 <a:solidFill>
                   <a:srgbClr val="17364A"/>
                 </a:solidFill>
@@ -16410,16 +16412,16 @@
                 <a:ea typeface="Aptos" pitchFamily="34" charset="-122"/>
                 <a:cs typeface="Aptos" pitchFamily="34" charset="-120"/>
               </a:rPr>
-              <a:t>Identify the systems of record, source systems, data flows, and.</a:t>
-            </a:r>
-            <a:endParaRPr lang="en-US" sz="1220" dirty="0"/>
-          </a:p>
-          <a:p>
-            <a:pPr indent="0" marL="0">
-              <a:buNone/>
-            </a:pPr>
-            <a:r>
-              <a:rPr lang="en-US" sz="1220" dirty="0">
+              <a:t>Identify the systems of record, source systems,.</a:t>
+            </a:r>
+            <a:endParaRPr lang="en-US" sz="1140" dirty="0"/>
+          </a:p>
+          <a:p>
+            <a:pPr indent="0" marL="0">
+              <a:buNone/>
+            </a:pPr>
+            <a:r>
+              <a:rPr lang="en-US" sz="1140" dirty="0">
                 <a:solidFill>
                   <a:srgbClr val="17364A"/>
                 </a:solidFill>
@@ -16427,9 +16429,9 @@
                 <a:ea typeface="Aptos" pitchFamily="34" charset="-122"/>
                 <a:cs typeface="Aptos" pitchFamily="34" charset="-120"/>
               </a:rPr>
-              <a:t>Assess where AI could support a workflow and where human review,.</a:t>
-            </a:r>
-            <a:endParaRPr lang="en-US" sz="1220" dirty="0"/>
+              <a:t>Assess where AI could support a workflow and where.</a:t>
+            </a:r>
+            <a:endParaRPr lang="en-US" sz="1140" dirty="0"/>
           </a:p>
         </p:txBody>
       </p:sp>
@@ -16441,12 +16443,12 @@
         </p:nvSpPr>
         <p:spPr>
           <a:xfrm>
-            <a:off x="7635240" y="4184294"/>
-            <a:ext cx="3474720" cy="1466698"/>
+            <a:off x="7543800" y="4389120"/>
+            <a:ext cx="3611880" cy="1261872"/>
           </a:xfrm>
           <a:prstGeom prst="roundRect">
             <a:avLst>
-              <a:gd name="adj" fmla="val 7481"/>
+              <a:gd name="adj" fmla="val 8696"/>
             </a:avLst>
           </a:prstGeom>
           <a:solidFill>
@@ -16468,8 +16470,8 @@
         </p:nvSpPr>
         <p:spPr>
           <a:xfrm>
-            <a:off x="7799832" y="4330598"/>
-            <a:ext cx="3145536" cy="256032"/>
+            <a:off x="7708392" y="4517136"/>
+            <a:ext cx="3282696" cy="228600"/>
           </a:xfrm>
           <a:prstGeom prst="rect">
             <a:avLst/>
@@ -16485,7 +16487,7 @@
               <a:buNone/>
             </a:pPr>
             <a:r>
-              <a:rPr lang="en-US" sz="1300" b="1" dirty="0">
+              <a:rPr lang="en-US" sz="1220" b="1" dirty="0">
                 <a:solidFill>
                   <a:srgbClr val="0068B7"/>
                 </a:solidFill>
@@ -16495,7 +16497,7 @@
               </a:rPr>
               <a:t>How to validate</a:t>
             </a:r>
-            <a:endParaRPr lang="en-US" sz="1300" dirty="0"/>
+            <a:endParaRPr lang="en-US" sz="1220" dirty="0"/>
           </a:p>
         </p:txBody>
       </p:sp>
@@ -16507,8 +16509,8 @@
         </p:nvSpPr>
         <p:spPr>
           <a:xfrm>
-            <a:off x="7799832" y="4659782"/>
-            <a:ext cx="3145536" cy="899770"/>
+            <a:off x="7708392" y="4828032"/>
+            <a:ext cx="3282696" cy="749808"/>
           </a:xfrm>
           <a:prstGeom prst="rect">
             <a:avLst/>
@@ -16526,7 +16528,7 @@
               <a:buNone/>
             </a:pPr>
             <a:r>
-              <a:rPr lang="en-US" sz="1320" dirty="0">
+              <a:rPr lang="en-US" sz="1220" dirty="0">
                 <a:solidFill>
                   <a:srgbClr val="17364A"/>
                 </a:solidFill>
@@ -16534,9 +16536,9 @@
                 <a:ea typeface="Aptos" pitchFamily="34" charset="-122"/>
                 <a:cs typeface="Aptos" pitchFamily="34" charset="-120"/>
               </a:rPr>
-              <a:t>Use the assignment to test whether you can explain the concept, apply it to a realistic public health situation, and identify what would need review before the work moves forward.</a:t>
-            </a:r>
-            <a:endParaRPr lang="en-US" sz="1320" dirty="0"/>
+              <a:t>Use the assignment to test whether you can explain the concept, apply it to a.</a:t>
+            </a:r>
+            <a:endParaRPr lang="en-US" sz="1220" dirty="0"/>
           </a:p>
         </p:txBody>
       </p:sp>
@@ -16827,8 +16829,8 @@
         </p:nvSpPr>
         <p:spPr>
           <a:xfrm>
-            <a:off x="868680" y="1508760"/>
-            <a:ext cx="6309360" cy="4160520"/>
+            <a:off x="822960" y="1463040"/>
+            <a:ext cx="6565392" cy="4343400"/>
           </a:xfrm>
           <a:prstGeom prst="rect">
             <a:avLst/>
@@ -16846,7 +16848,7 @@
               <a:buNone/>
             </a:pPr>
             <a:r>
-              <a:rPr lang="en-US" sz="2100" dirty="0">
+              <a:rPr lang="en-US" sz="1920" dirty="0">
                 <a:solidFill>
                   <a:srgbClr val="003A63"/>
                 </a:solidFill>
@@ -16854,9 +16856,9 @@
                 <a:ea typeface="Aptos" pitchFamily="34" charset="-122"/>
                 <a:cs typeface="Aptos" pitchFamily="34" charset="-120"/>
               </a:rPr>
-              <a:t>• Produce an AI-enabled workflow architecture map and readiness memo that can support governance.</a:t>
-            </a:r>
-            <a:endParaRPr lang="en-US" sz="2100" dirty="0"/>
+              <a:t>• Produce an AI-enabled workflow architecture map and readiness memo that can.</a:t>
+            </a:r>
+            <a:endParaRPr lang="en-US" sz="1920" dirty="0"/>
           </a:p>
         </p:txBody>
       </p:sp>
@@ -16868,12 +16870,12 @@
         </p:nvSpPr>
         <p:spPr>
           <a:xfrm>
-            <a:off x="7635240" y="1325880"/>
-            <a:ext cx="3474720" cy="1255471"/>
+            <a:off x="7543800" y="1325880"/>
+            <a:ext cx="3611880" cy="1261872"/>
           </a:xfrm>
           <a:prstGeom prst="roundRect">
             <a:avLst>
-              <a:gd name="adj" fmla="val 8740"/>
+              <a:gd name="adj" fmla="val 8696"/>
             </a:avLst>
           </a:prstGeom>
           <a:solidFill>
@@ -16895,8 +16897,8 @@
         </p:nvSpPr>
         <p:spPr>
           <a:xfrm>
-            <a:off x="7799832" y="1472184"/>
-            <a:ext cx="3145536" cy="256032"/>
+            <a:off x="7708392" y="1453896"/>
+            <a:ext cx="3282696" cy="228600"/>
           </a:xfrm>
           <a:prstGeom prst="rect">
             <a:avLst/>
@@ -16912,7 +16914,7 @@
               <a:buNone/>
             </a:pPr>
             <a:r>
-              <a:rPr lang="en-US" sz="1300" b="1" dirty="0">
+              <a:rPr lang="en-US" sz="1220" b="1" dirty="0">
                 <a:solidFill>
                   <a:srgbClr val="0068B7"/>
                 </a:solidFill>
@@ -16922,7 +16924,7 @@
               </a:rPr>
               <a:t>Data decision</a:t>
             </a:r>
-            <a:endParaRPr lang="en-US" sz="1300" dirty="0"/>
+            <a:endParaRPr lang="en-US" sz="1220" dirty="0"/>
           </a:p>
         </p:txBody>
       </p:sp>
@@ -16934,8 +16936,8 @@
         </p:nvSpPr>
         <p:spPr>
           <a:xfrm>
-            <a:off x="7799832" y="1801368"/>
-            <a:ext cx="3145536" cy="688543"/>
+            <a:off x="7708392" y="1764792"/>
+            <a:ext cx="3282696" cy="749808"/>
           </a:xfrm>
           <a:prstGeom prst="rect">
             <a:avLst/>
@@ -16953,7 +16955,7 @@
               <a:buNone/>
             </a:pPr>
             <a:r>
-              <a:rPr lang="en-US" sz="1320" dirty="0">
+              <a:rPr lang="en-US" sz="1220" dirty="0">
                 <a:solidFill>
                   <a:srgbClr val="17364A"/>
                 </a:solidFill>
@@ -16961,9 +16963,9 @@
                 <a:ea typeface="Aptos" pitchFamily="34" charset="-122"/>
                 <a:cs typeface="Aptos" pitchFamily="34" charset="-120"/>
               </a:rPr>
-              <a:t>Produce an AI-enabled workflow architecture map and readiness memo that can support governance review,.</a:t>
-            </a:r>
-            <a:endParaRPr lang="en-US" sz="1320" dirty="0"/>
+              <a:t>Produce an AI-enabled workflow architecture map and readiness memo that can.</a:t>
+            </a:r>
+            <a:endParaRPr lang="en-US" sz="1220" dirty="0"/>
           </a:p>
         </p:txBody>
       </p:sp>
@@ -16975,12 +16977,12 @@
         </p:nvSpPr>
         <p:spPr>
           <a:xfrm>
-            <a:off x="7635240" y="2718511"/>
-            <a:ext cx="3474720" cy="1328623"/>
+            <a:off x="7543800" y="2724912"/>
+            <a:ext cx="3611880" cy="1527048"/>
           </a:xfrm>
           <a:prstGeom prst="roundRect">
             <a:avLst>
-              <a:gd name="adj" fmla="val 8259"/>
+              <a:gd name="adj" fmla="val 7186"/>
             </a:avLst>
           </a:prstGeom>
           <a:solidFill>
@@ -17002,8 +17004,8 @@
         </p:nvSpPr>
         <p:spPr>
           <a:xfrm>
-            <a:off x="7799832" y="2864815"/>
-            <a:ext cx="3145536" cy="256032"/>
+            <a:off x="7708392" y="2852928"/>
+            <a:ext cx="3282696" cy="228600"/>
           </a:xfrm>
           <a:prstGeom prst="rect">
             <a:avLst/>
@@ -17019,7 +17021,7 @@
               <a:buNone/>
             </a:pPr>
             <a:r>
-              <a:rPr lang="en-US" sz="1300" b="1" dirty="0">
+              <a:rPr lang="en-US" sz="1220" b="1" dirty="0">
                 <a:solidFill>
                   <a:srgbClr val="0068B7"/>
                 </a:solidFill>
@@ -17029,7 +17031,7 @@
               </a:rPr>
               <a:t>Concept checkpoints</a:t>
             </a:r>
-            <a:endParaRPr lang="en-US" sz="1300" dirty="0"/>
+            <a:endParaRPr lang="en-US" sz="1220" dirty="0"/>
           </a:p>
         </p:txBody>
       </p:sp>
@@ -17041,8 +17043,8 @@
         </p:nvSpPr>
         <p:spPr>
           <a:xfrm>
-            <a:off x="7818120" y="3230575"/>
-            <a:ext cx="3090672" cy="670255"/>
+            <a:off x="7726680" y="3182112"/>
+            <a:ext cx="3227832" cy="960120"/>
           </a:xfrm>
           <a:prstGeom prst="rect">
             <a:avLst/>
@@ -17060,7 +17062,7 @@
               <a:buNone/>
             </a:pPr>
             <a:r>
-              <a:rPr lang="en-US" sz="1220" dirty="0">
+              <a:rPr lang="en-US" sz="1140" dirty="0">
                 <a:solidFill>
                   <a:srgbClr val="17364A"/>
                 </a:solidFill>
@@ -17068,9 +17070,9 @@
                 <a:ea typeface="Aptos" pitchFamily="34" charset="-122"/>
                 <a:cs typeface="Aptos" pitchFamily="34" charset="-120"/>
               </a:rPr>
-              <a:t>Produce an AI-enabled workflow architecture map and readiness memo.</a:t>
-            </a:r>
-            <a:endParaRPr lang="en-US" sz="1220" dirty="0"/>
+              <a:t>Produce an AI-enabled workflow architecture map.</a:t>
+            </a:r>
+            <a:endParaRPr lang="en-US" sz="1140" dirty="0"/>
           </a:p>
         </p:txBody>
       </p:sp>
@@ -17082,12 +17084,12 @@
         </p:nvSpPr>
         <p:spPr>
           <a:xfrm>
-            <a:off x="7635240" y="4184294"/>
-            <a:ext cx="3474720" cy="1466698"/>
+            <a:off x="7543800" y="4389120"/>
+            <a:ext cx="3611880" cy="1261872"/>
           </a:xfrm>
           <a:prstGeom prst="roundRect">
             <a:avLst>
-              <a:gd name="adj" fmla="val 7481"/>
+              <a:gd name="adj" fmla="val 8696"/>
             </a:avLst>
           </a:prstGeom>
           <a:solidFill>
@@ -17109,8 +17111,8 @@
         </p:nvSpPr>
         <p:spPr>
           <a:xfrm>
-            <a:off x="7799832" y="4330598"/>
-            <a:ext cx="3145536" cy="256032"/>
+            <a:off x="7708392" y="4517136"/>
+            <a:ext cx="3282696" cy="228600"/>
           </a:xfrm>
           <a:prstGeom prst="rect">
             <a:avLst/>
@@ -17126,7 +17128,7 @@
               <a:buNone/>
             </a:pPr>
             <a:r>
-              <a:rPr lang="en-US" sz="1300" b="1" dirty="0">
+              <a:rPr lang="en-US" sz="1220" b="1" dirty="0">
                 <a:solidFill>
                   <a:srgbClr val="0068B7"/>
                 </a:solidFill>
@@ -17136,7 +17138,7 @@
               </a:rPr>
               <a:t>How to validate</a:t>
             </a:r>
-            <a:endParaRPr lang="en-US" sz="1300" dirty="0"/>
+            <a:endParaRPr lang="en-US" sz="1220" dirty="0"/>
           </a:p>
         </p:txBody>
       </p:sp>
@@ -17148,8 +17150,8 @@
         </p:nvSpPr>
         <p:spPr>
           <a:xfrm>
-            <a:off x="7799832" y="4659782"/>
-            <a:ext cx="3145536" cy="899770"/>
+            <a:off x="7708392" y="4828032"/>
+            <a:ext cx="3282696" cy="749808"/>
           </a:xfrm>
           <a:prstGeom prst="rect">
             <a:avLst/>
@@ -17167,7 +17169,7 @@
               <a:buNone/>
             </a:pPr>
             <a:r>
-              <a:rPr lang="en-US" sz="1320" dirty="0">
+              <a:rPr lang="en-US" sz="1220" dirty="0">
                 <a:solidFill>
                   <a:srgbClr val="17364A"/>
                 </a:solidFill>
@@ -17175,9 +17177,9 @@
                 <a:ea typeface="Aptos" pitchFamily="34" charset="-122"/>
                 <a:cs typeface="Aptos" pitchFamily="34" charset="-120"/>
               </a:rPr>
-              <a:t>Use the assignment to test whether you can explain the concept, apply it to a realistic public health situation, and identify what would need review before the work moves forward.</a:t>
-            </a:r>
-            <a:endParaRPr lang="en-US" sz="1320" dirty="0"/>
+              <a:t>Use the assignment to test whether you can explain the concept, apply it to a.</a:t>
+            </a:r>
+            <a:endParaRPr lang="en-US" sz="1220" dirty="0"/>
           </a:p>
         </p:txBody>
       </p:sp>
@@ -17468,8 +17470,8 @@
         </p:nvSpPr>
         <p:spPr>
           <a:xfrm>
-            <a:off x="868680" y="1508760"/>
-            <a:ext cx="6309360" cy="4160520"/>
+            <a:off x="822960" y="1463040"/>
+            <a:ext cx="6565392" cy="4343400"/>
           </a:xfrm>
           <a:prstGeom prst="rect">
             <a:avLst/>
@@ -17487,7 +17489,7 @@
               <a:buNone/>
             </a:pPr>
             <a:r>
-              <a:rPr lang="en-US" sz="2100" dirty="0">
+              <a:rPr lang="en-US" sz="1920" dirty="0">
                 <a:solidFill>
                   <a:srgbClr val="003A63"/>
                 </a:solidFill>
@@ -17495,16 +17497,16 @@
                 <a:ea typeface="Aptos" pitchFamily="34" charset="-122"/>
                 <a:cs typeface="Aptos" pitchFamily="34" charset="-120"/>
               </a:rPr>
-              <a:t>• Artificial intelligence does not operate separately from the public health data environment.</a:t>
-            </a:r>
-            <a:endParaRPr lang="en-US" sz="2100" dirty="0"/>
-          </a:p>
-          <a:p>
-            <a:pPr indent="0" marL="0">
-              <a:buNone/>
-            </a:pPr>
-            <a:r>
-              <a:rPr lang="en-US" sz="2100" dirty="0">
+              <a:t>• Artificial intelligence does not operate separately from the public health.</a:t>
+            </a:r>
+            <a:endParaRPr lang="en-US" sz="1920" dirty="0"/>
+          </a:p>
+          <a:p>
+            <a:pPr indent="0" marL="0">
+              <a:buNone/>
+            </a:pPr>
+            <a:r>
+              <a:rPr lang="en-US" sz="1920" dirty="0">
                 <a:solidFill>
                   <a:srgbClr val="003A63"/>
                 </a:solidFill>
@@ -17512,16 +17514,16 @@
                 <a:ea typeface="Aptos" pitchFamily="34" charset="-122"/>
                 <a:cs typeface="Aptos" pitchFamily="34" charset="-120"/>
               </a:rPr>
-              <a:t>• Every AI-supported workflow depends on the quality, structure, timeliness, governance, and.</a:t>
-            </a:r>
-            <a:endParaRPr lang="en-US" sz="2100" dirty="0"/>
-          </a:p>
-          <a:p>
-            <a:pPr indent="0" marL="0">
-              <a:buNone/>
-            </a:pPr>
-            <a:r>
-              <a:rPr lang="en-US" sz="2100" dirty="0">
+              <a:t>• Every AI-supported workflow depends on the quality, structure, timeliness,.</a:t>
+            </a:r>
+            <a:endParaRPr lang="en-US" sz="1920" dirty="0"/>
+          </a:p>
+          <a:p>
+            <a:pPr indent="0" marL="0">
+              <a:buNone/>
+            </a:pPr>
+            <a:r>
+              <a:rPr lang="en-US" sz="1920" dirty="0">
                 <a:solidFill>
                   <a:srgbClr val="003A63"/>
                 </a:solidFill>
@@ -17529,9 +17531,9 @@
                 <a:ea typeface="Aptos" pitchFamily="34" charset="-122"/>
                 <a:cs typeface="Aptos" pitchFamily="34" charset="-120"/>
               </a:rPr>
-              <a:t>• For public health agencies, this means that AI readiness is inseparable from data modernization.</a:t>
-            </a:r>
-            <a:endParaRPr lang="en-US" sz="2100" dirty="0"/>
+              <a:t>• For public health agencies, this means that AI readiness is inseparable from.</a:t>
+            </a:r>
+            <a:endParaRPr lang="en-US" sz="1920" dirty="0"/>
           </a:p>
         </p:txBody>
       </p:sp>
@@ -17543,12 +17545,12 @@
         </p:nvSpPr>
         <p:spPr>
           <a:xfrm>
-            <a:off x="7635240" y="1325880"/>
-            <a:ext cx="3474720" cy="1207008"/>
+            <a:off x="7543800" y="1325880"/>
+            <a:ext cx="3611880" cy="1261872"/>
           </a:xfrm>
           <a:prstGeom prst="roundRect">
             <a:avLst>
-              <a:gd name="adj" fmla="val 9091"/>
+              <a:gd name="adj" fmla="val 8696"/>
             </a:avLst>
           </a:prstGeom>
           <a:solidFill>
@@ -17570,8 +17572,8 @@
         </p:nvSpPr>
         <p:spPr>
           <a:xfrm>
-            <a:off x="7799832" y="1472184"/>
-            <a:ext cx="3145536" cy="256032"/>
+            <a:off x="7708392" y="1453896"/>
+            <a:ext cx="3282696" cy="228600"/>
           </a:xfrm>
           <a:prstGeom prst="rect">
             <a:avLst/>
@@ -17587,7 +17589,7 @@
               <a:buNone/>
             </a:pPr>
             <a:r>
-              <a:rPr lang="en-US" sz="1300" b="1" dirty="0">
+              <a:rPr lang="en-US" sz="1220" b="1" dirty="0">
                 <a:solidFill>
                   <a:srgbClr val="0068B7"/>
                 </a:solidFill>
@@ -17597,7 +17599,7 @@
               </a:rPr>
               <a:t>Data decision</a:t>
             </a:r>
-            <a:endParaRPr lang="en-US" sz="1300" dirty="0"/>
+            <a:endParaRPr lang="en-US" sz="1220" dirty="0"/>
           </a:p>
         </p:txBody>
       </p:sp>
@@ -17609,8 +17611,8 @@
         </p:nvSpPr>
         <p:spPr>
           <a:xfrm>
-            <a:off x="7799832" y="1801368"/>
-            <a:ext cx="3145536" cy="640080"/>
+            <a:off x="7708392" y="1764792"/>
+            <a:ext cx="3282696" cy="749808"/>
           </a:xfrm>
           <a:prstGeom prst="rect">
             <a:avLst/>
@@ -17628,7 +17630,7 @@
               <a:buNone/>
             </a:pPr>
             <a:r>
-              <a:rPr lang="en-US" sz="1320" dirty="0">
+              <a:rPr lang="en-US" sz="1220" dirty="0">
                 <a:solidFill>
                   <a:srgbClr val="17364A"/>
                 </a:solidFill>
@@ -17638,7 +17640,7 @@
               </a:rPr>
               <a:t>Artificial intelligence does not operate separately from the public health data.</a:t>
             </a:r>
-            <a:endParaRPr lang="en-US" sz="1320" dirty="0"/>
+            <a:endParaRPr lang="en-US" sz="1220" dirty="0"/>
           </a:p>
         </p:txBody>
       </p:sp>
@@ -17650,12 +17652,12 @@
         </p:nvSpPr>
         <p:spPr>
           <a:xfrm>
-            <a:off x="7635240" y="2670048"/>
-            <a:ext cx="3474720" cy="1377086"/>
+            <a:off x="7543800" y="2724912"/>
+            <a:ext cx="3611880" cy="1527048"/>
           </a:xfrm>
           <a:prstGeom prst="roundRect">
             <a:avLst>
-              <a:gd name="adj" fmla="val 7968"/>
+              <a:gd name="adj" fmla="val 7186"/>
             </a:avLst>
           </a:prstGeom>
           <a:solidFill>
@@ -17677,24 +17679,26 @@
         </p:nvSpPr>
         <p:spPr>
           <a:xfrm>
-            <a:off x="7799832" y="2798064"/>
-            <a:ext cx="3145536" cy="237744"/>
-          </a:xfrm>
-          <a:prstGeom prst="rect">
-            <a:avLst/>
-          </a:prstGeom>
-          <a:noFill/>
-          <a:ln/>
-        </p:spPr>
-        <p:txBody>
-          <a:bodyPr wrap="square" lIns="0" tIns="0" rIns="0" bIns="0" rtlCol="0" anchor="ctr"/>
-          <a:lstStyle/>
-          <a:p>
-            <a:pPr indent="0" marL="0">
-              <a:buNone/>
-            </a:pPr>
-            <a:r>
-              <a:rPr lang="en-US" sz="1250" b="1" dirty="0">
+            <a:off x="7708392" y="2852928"/>
+            <a:ext cx="3282696" cy="219456"/>
+          </a:xfrm>
+          <a:prstGeom prst="rect">
+            <a:avLst/>
+          </a:prstGeom>
+          <a:noFill/>
+          <a:ln/>
+        </p:spPr>
+        <p:txBody>
+          <a:bodyPr wrap="square" lIns="0" tIns="0" rIns="0" bIns="0" rtlCol="0" anchor="ctr">
+            <a:normAutofit/>
+          </a:bodyPr>
+          <a:lstStyle/>
+          <a:p>
+            <a:pPr indent="0" marL="0">
+              <a:buNone/>
+            </a:pPr>
+            <a:r>
+              <a:rPr lang="en-US" sz="1160" b="1" dirty="0">
                 <a:solidFill>
                   <a:srgbClr val="0068B7"/>
                 </a:solidFill>
@@ -17704,7 +17708,7 @@
               </a:rPr>
               <a:t>Data-to-decision flow</a:t>
             </a:r>
-            <a:endParaRPr lang="en-US" sz="1250" dirty="0"/>
+            <a:endParaRPr lang="en-US" sz="1160" dirty="0"/>
           </a:p>
         </p:txBody>
       </p:sp>
@@ -17716,7 +17720,7 @@
         </p:nvSpPr>
         <p:spPr>
           <a:xfrm>
-            <a:off x="8763000" y="3351276"/>
+            <a:off x="8717280" y="3406140"/>
             <a:ext cx="164592" cy="0"/>
           </a:xfrm>
           <a:prstGeom prst="line">
@@ -17739,8 +17743,8 @@
         </p:nvSpPr>
         <p:spPr>
           <a:xfrm>
-            <a:off x="7872984" y="3200400"/>
-            <a:ext cx="890016" cy="301752"/>
+            <a:off x="7781544" y="3255264"/>
+            <a:ext cx="935736" cy="301752"/>
           </a:xfrm>
           <a:prstGeom prst="roundRect">
             <a:avLst>
@@ -17766,8 +17770,8 @@
         </p:nvSpPr>
         <p:spPr>
           <a:xfrm>
-            <a:off x="7909560" y="3273552"/>
-            <a:ext cx="816864" cy="146304"/>
+            <a:off x="7818120" y="3328416"/>
+            <a:ext cx="862584" cy="146304"/>
           </a:xfrm>
           <a:prstGeom prst="rect">
             <a:avLst/>
@@ -17807,7 +17811,7 @@
         </p:nvSpPr>
         <p:spPr>
           <a:xfrm>
-            <a:off x="9817608" y="3351276"/>
+            <a:off x="9817608" y="3406140"/>
             <a:ext cx="164592" cy="0"/>
           </a:xfrm>
           <a:prstGeom prst="line">
@@ -17830,8 +17834,8 @@
         </p:nvSpPr>
         <p:spPr>
           <a:xfrm>
-            <a:off x="8927592" y="3200400"/>
-            <a:ext cx="890016" cy="301752"/>
+            <a:off x="8881872" y="3255264"/>
+            <a:ext cx="935736" cy="301752"/>
           </a:xfrm>
           <a:prstGeom prst="roundRect">
             <a:avLst>
@@ -17857,8 +17861,8 @@
         </p:nvSpPr>
         <p:spPr>
           <a:xfrm>
-            <a:off x="8964168" y="3273552"/>
-            <a:ext cx="816864" cy="146304"/>
+            <a:off x="8918448" y="3328416"/>
+            <a:ext cx="862584" cy="146304"/>
           </a:xfrm>
           <a:prstGeom prst="rect">
             <a:avLst/>
@@ -17898,8 +17902,8 @@
         </p:nvSpPr>
         <p:spPr>
           <a:xfrm>
-            <a:off x="9982200" y="3200400"/>
-            <a:ext cx="890016" cy="301752"/>
+            <a:off x="9982200" y="3255264"/>
+            <a:ext cx="935736" cy="301752"/>
           </a:xfrm>
           <a:prstGeom prst="roundRect">
             <a:avLst>
@@ -17925,8 +17929,8 @@
         </p:nvSpPr>
         <p:spPr>
           <a:xfrm>
-            <a:off x="10018776" y="3273552"/>
-            <a:ext cx="816864" cy="146304"/>
+            <a:off x="10018776" y="3328416"/>
+            <a:ext cx="862584" cy="146304"/>
           </a:xfrm>
           <a:prstGeom prst="rect">
             <a:avLst/>
@@ -17966,8 +17970,8 @@
         </p:nvSpPr>
         <p:spPr>
           <a:xfrm>
-            <a:off x="7854696" y="3694176"/>
-            <a:ext cx="3035808" cy="206654"/>
+            <a:off x="7763256" y="3749040"/>
+            <a:ext cx="3172968" cy="356616"/>
           </a:xfrm>
           <a:prstGeom prst="rect">
             <a:avLst/>
@@ -17985,7 +17989,7 @@
               <a:buNone/>
             </a:pPr>
             <a:r>
-              <a:rPr lang="en-US" sz="1120" dirty="0">
+              <a:rPr lang="en-US" sz="1040" dirty="0">
                 <a:solidFill>
                   <a:srgbClr val="17364A"/>
                 </a:solidFill>
@@ -17993,9 +17997,9 @@
                 <a:ea typeface="Aptos" pitchFamily="34" charset="-122"/>
                 <a:cs typeface="Aptos" pitchFamily="34" charset="-120"/>
               </a:rPr>
-              <a:t>The important handoff is not from data to AI; it is from analysis to accountable human review.</a:t>
-            </a:r>
-            <a:endParaRPr lang="en-US" sz="1120" dirty="0"/>
+              <a:t>The important handoff is not from data to AI; it is from analysis to.</a:t>
+            </a:r>
+            <a:endParaRPr lang="en-US" sz="1040" dirty="0"/>
           </a:p>
         </p:txBody>
       </p:sp>
@@ -18007,12 +18011,12 @@
         </p:nvSpPr>
         <p:spPr>
           <a:xfrm>
-            <a:off x="7635240" y="4184294"/>
-            <a:ext cx="3474720" cy="1466698"/>
+            <a:off x="7543800" y="4389120"/>
+            <a:ext cx="3611880" cy="1261872"/>
           </a:xfrm>
           <a:prstGeom prst="roundRect">
             <a:avLst>
-              <a:gd name="adj" fmla="val 7481"/>
+              <a:gd name="adj" fmla="val 8696"/>
             </a:avLst>
           </a:prstGeom>
           <a:solidFill>
@@ -18034,8 +18038,8 @@
         </p:nvSpPr>
         <p:spPr>
           <a:xfrm>
-            <a:off x="7799832" y="4330598"/>
-            <a:ext cx="3145536" cy="256032"/>
+            <a:off x="7708392" y="4517136"/>
+            <a:ext cx="3282696" cy="228600"/>
           </a:xfrm>
           <a:prstGeom prst="rect">
             <a:avLst/>
@@ -18051,7 +18055,7 @@
               <a:buNone/>
             </a:pPr>
             <a:r>
-              <a:rPr lang="en-US" sz="1300" b="1" dirty="0">
+              <a:rPr lang="en-US" sz="1220" b="1" dirty="0">
                 <a:solidFill>
                   <a:srgbClr val="0068B7"/>
                 </a:solidFill>
@@ -18061,7 +18065,7 @@
               </a:rPr>
               <a:t>How to validate</a:t>
             </a:r>
-            <a:endParaRPr lang="en-US" sz="1300" dirty="0"/>
+            <a:endParaRPr lang="en-US" sz="1220" dirty="0"/>
           </a:p>
         </p:txBody>
       </p:sp>
@@ -18073,8 +18077,8 @@
         </p:nvSpPr>
         <p:spPr>
           <a:xfrm>
-            <a:off x="7799832" y="4659782"/>
-            <a:ext cx="3145536" cy="899770"/>
+            <a:off x="7708392" y="4828032"/>
+            <a:ext cx="3282696" cy="749808"/>
           </a:xfrm>
           <a:prstGeom prst="rect">
             <a:avLst/>
@@ -18092,7 +18096,7 @@
               <a:buNone/>
             </a:pPr>
             <a:r>
-              <a:rPr lang="en-US" sz="1320" dirty="0">
+              <a:rPr lang="en-US" sz="1220" dirty="0">
                 <a:solidFill>
                   <a:srgbClr val="17364A"/>
                 </a:solidFill>
@@ -18100,9 +18104,9 @@
                 <a:ea typeface="Aptos" pitchFamily="34" charset="-122"/>
                 <a:cs typeface="Aptos" pitchFamily="34" charset="-120"/>
               </a:rPr>
-              <a:t>Connect the concept to data quality, model performance, validation evidence, monitoring measures, and decisions that remain under human control.</a:t>
-            </a:r>
-            <a:endParaRPr lang="en-US" sz="1320" dirty="0"/>
+              <a:t>Connect the concept to data quality, model performance, validation evidence,.</a:t>
+            </a:r>
+            <a:endParaRPr lang="en-US" sz="1220" dirty="0"/>
           </a:p>
         </p:txBody>
       </p:sp>
@@ -18393,8 +18397,8 @@
         </p:nvSpPr>
         <p:spPr>
           <a:xfrm>
-            <a:off x="868680" y="1508760"/>
-            <a:ext cx="6309360" cy="4160520"/>
+            <a:off x="822960" y="1463040"/>
+            <a:ext cx="6565392" cy="4343400"/>
           </a:xfrm>
           <a:prstGeom prst="rect">
             <a:avLst/>
@@ -18412,7 +18416,7 @@
               <a:buNone/>
             </a:pPr>
             <a:r>
-              <a:rPr lang="en-US" sz="2100" dirty="0">
+              <a:rPr lang="en-US" sz="1920" dirty="0">
                 <a:solidFill>
                   <a:srgbClr val="003A63"/>
                 </a:solidFill>
@@ -18420,16 +18424,16 @@
                 <a:ea typeface="Aptos" pitchFamily="34" charset="-122"/>
                 <a:cs typeface="Aptos" pitchFamily="34" charset="-120"/>
               </a:rPr>
-              <a:t>• Public health agencies often feel pressure to adopt AI tools quickly, especially when staff are.</a:t>
-            </a:r>
-            <a:endParaRPr lang="en-US" sz="2100" dirty="0"/>
-          </a:p>
-          <a:p>
-            <a:pPr indent="0" marL="0">
-              <a:buNone/>
-            </a:pPr>
-            <a:r>
-              <a:rPr lang="en-US" sz="2100" dirty="0">
+              <a:t>• Public health agencies often feel pressure to adopt AI tools quickly,.</a:t>
+            </a:r>
+            <a:endParaRPr lang="en-US" sz="1920" dirty="0"/>
+          </a:p>
+          <a:p>
+            <a:pPr indent="0" marL="0">
+              <a:buNone/>
+            </a:pPr>
+            <a:r>
+              <a:rPr lang="en-US" sz="1920" dirty="0">
                 <a:solidFill>
                   <a:srgbClr val="003A63"/>
                 </a:solidFill>
@@ -18437,16 +18441,16 @@
                 <a:ea typeface="Aptos" pitchFamily="34" charset="-122"/>
                 <a:cs typeface="Aptos" pitchFamily="34" charset="-120"/>
               </a:rPr>
-              <a:t>• AI tools may appear to offer immediate relief by summarizing records, drafting communications,.</a:t>
-            </a:r>
-            <a:endParaRPr lang="en-US" sz="2100" dirty="0"/>
-          </a:p>
-          <a:p>
-            <a:pPr indent="0" marL="0">
-              <a:buNone/>
-            </a:pPr>
-            <a:r>
-              <a:rPr lang="en-US" sz="2100" dirty="0">
+              <a:t>• AI tools may appear to offer immediate relief by summarizing records,.</a:t>
+            </a:r>
+            <a:endParaRPr lang="en-US" sz="1920" dirty="0"/>
+          </a:p>
+          <a:p>
+            <a:pPr indent="0" marL="0">
+              <a:buNone/>
+            </a:pPr>
+            <a:r>
+              <a:rPr lang="en-US" sz="1920" dirty="0">
                 <a:solidFill>
                   <a:srgbClr val="003A63"/>
                 </a:solidFill>
@@ -18454,9 +18458,9 @@
                 <a:ea typeface="Aptos" pitchFamily="34" charset="-122"/>
                 <a:cs typeface="Aptos" pitchFamily="34" charset="-120"/>
               </a:rPr>
-              <a:t>• However, AI can create new risks when it is layered on top of fragmented or poorly understood.</a:t>
-            </a:r>
-            <a:endParaRPr lang="en-US" sz="2100" dirty="0"/>
+              <a:t>• However, AI can create new risks when it is layered on top of fragmented or.</a:t>
+            </a:r>
+            <a:endParaRPr lang="en-US" sz="1920" dirty="0"/>
           </a:p>
         </p:txBody>
       </p:sp>
@@ -18468,12 +18472,12 @@
         </p:nvSpPr>
         <p:spPr>
           <a:xfrm>
-            <a:off x="7635240" y="1325880"/>
-            <a:ext cx="3474720" cy="1255471"/>
+            <a:off x="7543800" y="1325880"/>
+            <a:ext cx="3611880" cy="1261872"/>
           </a:xfrm>
           <a:prstGeom prst="roundRect">
             <a:avLst>
-              <a:gd name="adj" fmla="val 8740"/>
+              <a:gd name="adj" fmla="val 8696"/>
             </a:avLst>
           </a:prstGeom>
           <a:solidFill>
@@ -18495,8 +18499,8 @@
         </p:nvSpPr>
         <p:spPr>
           <a:xfrm>
-            <a:off x="7799832" y="1472184"/>
-            <a:ext cx="3145536" cy="256032"/>
+            <a:off x="7708392" y="1453896"/>
+            <a:ext cx="3282696" cy="228600"/>
           </a:xfrm>
           <a:prstGeom prst="rect">
             <a:avLst/>
@@ -18512,7 +18516,7 @@
               <a:buNone/>
             </a:pPr>
             <a:r>
-              <a:rPr lang="en-US" sz="1300" b="1" dirty="0">
+              <a:rPr lang="en-US" sz="1220" b="1" dirty="0">
                 <a:solidFill>
                   <a:srgbClr val="0068B7"/>
                 </a:solidFill>
@@ -18522,7 +18526,7 @@
               </a:rPr>
               <a:t>Data decision</a:t>
             </a:r>
-            <a:endParaRPr lang="en-US" sz="1300" dirty="0"/>
+            <a:endParaRPr lang="en-US" sz="1220" dirty="0"/>
           </a:p>
         </p:txBody>
       </p:sp>
@@ -18534,8 +18538,8 @@
         </p:nvSpPr>
         <p:spPr>
           <a:xfrm>
-            <a:off x="7799832" y="1801368"/>
-            <a:ext cx="3145536" cy="688543"/>
+            <a:off x="7708392" y="1764792"/>
+            <a:ext cx="3282696" cy="749808"/>
           </a:xfrm>
           <a:prstGeom prst="rect">
             <a:avLst/>
@@ -18553,7 +18557,7 @@
               <a:buNone/>
             </a:pPr>
             <a:r>
-              <a:rPr lang="en-US" sz="1320" dirty="0">
+              <a:rPr lang="en-US" sz="1220" dirty="0">
                 <a:solidFill>
                   <a:srgbClr val="17364A"/>
                 </a:solidFill>
@@ -18561,9 +18565,9 @@
                 <a:ea typeface="Aptos" pitchFamily="34" charset="-122"/>
                 <a:cs typeface="Aptos" pitchFamily="34" charset="-120"/>
               </a:rPr>
-              <a:t>Public health agencies often feel pressure to adopt AI tools quickly, especially when staff are.</a:t>
-            </a:r>
-            <a:endParaRPr lang="en-US" sz="1320" dirty="0"/>
+              <a:t>Public health agencies often feel pressure to adopt AI tools quickly, especially.</a:t>
+            </a:r>
+            <a:endParaRPr lang="en-US" sz="1220" dirty="0"/>
           </a:p>
         </p:txBody>
       </p:sp>
@@ -18575,12 +18579,12 @@
         </p:nvSpPr>
         <p:spPr>
           <a:xfrm>
-            <a:off x="7635240" y="2718511"/>
-            <a:ext cx="3474720" cy="1328623"/>
+            <a:off x="7543800" y="2724912"/>
+            <a:ext cx="3611880" cy="1527048"/>
           </a:xfrm>
           <a:prstGeom prst="roundRect">
             <a:avLst>
-              <a:gd name="adj" fmla="val 8259"/>
+              <a:gd name="adj" fmla="val 7186"/>
             </a:avLst>
           </a:prstGeom>
           <a:solidFill>
@@ -18602,24 +18606,26 @@
         </p:nvSpPr>
         <p:spPr>
           <a:xfrm>
-            <a:off x="7799832" y="2846527"/>
-            <a:ext cx="3145536" cy="237744"/>
-          </a:xfrm>
-          <a:prstGeom prst="rect">
-            <a:avLst/>
-          </a:prstGeom>
-          <a:noFill/>
-          <a:ln/>
-        </p:spPr>
-        <p:txBody>
-          <a:bodyPr wrap="square" lIns="0" tIns="0" rIns="0" bIns="0" rtlCol="0" anchor="ctr"/>
-          <a:lstStyle/>
-          <a:p>
-            <a:pPr indent="0" marL="0">
-              <a:buNone/>
-            </a:pPr>
-            <a:r>
-              <a:rPr lang="en-US" sz="1250" b="1" dirty="0">
+            <a:off x="7708392" y="2852928"/>
+            <a:ext cx="3282696" cy="219456"/>
+          </a:xfrm>
+          <a:prstGeom prst="rect">
+            <a:avLst/>
+          </a:prstGeom>
+          <a:noFill/>
+          <a:ln/>
+        </p:spPr>
+        <p:txBody>
+          <a:bodyPr wrap="square" lIns="0" tIns="0" rIns="0" bIns="0" rtlCol="0" anchor="ctr">
+            <a:normAutofit/>
+          </a:bodyPr>
+          <a:lstStyle/>
+          <a:p>
+            <a:pPr indent="0" marL="0">
+              <a:buNone/>
+            </a:pPr>
+            <a:r>
+              <a:rPr lang="en-US" sz="1160" b="1" dirty="0">
                 <a:solidFill>
                   <a:srgbClr val="0068B7"/>
                 </a:solidFill>
@@ -18629,7 +18635,7 @@
               </a:rPr>
               <a:t>Data-to-decision flow</a:t>
             </a:r>
-            <a:endParaRPr lang="en-US" sz="1250" dirty="0"/>
+            <a:endParaRPr lang="en-US" sz="1160" dirty="0"/>
           </a:p>
         </p:txBody>
       </p:sp>
@@ -18641,7 +18647,7 @@
         </p:nvSpPr>
         <p:spPr>
           <a:xfrm>
-            <a:off x="8763000" y="3399739"/>
+            <a:off x="8717280" y="3406140"/>
             <a:ext cx="164592" cy="0"/>
           </a:xfrm>
           <a:prstGeom prst="line">
@@ -18664,8 +18670,8 @@
         </p:nvSpPr>
         <p:spPr>
           <a:xfrm>
-            <a:off x="7872984" y="3248863"/>
-            <a:ext cx="890016" cy="301752"/>
+            <a:off x="7781544" y="3255264"/>
+            <a:ext cx="935736" cy="301752"/>
           </a:xfrm>
           <a:prstGeom prst="roundRect">
             <a:avLst>
@@ -18691,8 +18697,8 @@
         </p:nvSpPr>
         <p:spPr>
           <a:xfrm>
-            <a:off x="7909560" y="3322015"/>
-            <a:ext cx="816864" cy="146304"/>
+            <a:off x="7818120" y="3328416"/>
+            <a:ext cx="862584" cy="146304"/>
           </a:xfrm>
           <a:prstGeom prst="rect">
             <a:avLst/>
@@ -18732,7 +18738,7 @@
         </p:nvSpPr>
         <p:spPr>
           <a:xfrm>
-            <a:off x="9817608" y="3399739"/>
+            <a:off x="9817608" y="3406140"/>
             <a:ext cx="164592" cy="0"/>
           </a:xfrm>
           <a:prstGeom prst="line">
@@ -18755,8 +18761,8 @@
         </p:nvSpPr>
         <p:spPr>
           <a:xfrm>
-            <a:off x="8927592" y="3248863"/>
-            <a:ext cx="890016" cy="301752"/>
+            <a:off x="8881872" y="3255264"/>
+            <a:ext cx="935736" cy="301752"/>
           </a:xfrm>
           <a:prstGeom prst="roundRect">
             <a:avLst>
@@ -18782,8 +18788,8 @@
         </p:nvSpPr>
         <p:spPr>
           <a:xfrm>
-            <a:off x="8964168" y="3322015"/>
-            <a:ext cx="816864" cy="146304"/>
+            <a:off x="8918448" y="3328416"/>
+            <a:ext cx="862584" cy="146304"/>
           </a:xfrm>
           <a:prstGeom prst="rect">
             <a:avLst/>
@@ -18823,8 +18829,8 @@
         </p:nvSpPr>
         <p:spPr>
           <a:xfrm>
-            <a:off x="9982200" y="3248863"/>
-            <a:ext cx="890016" cy="301752"/>
+            <a:off x="9982200" y="3255264"/>
+            <a:ext cx="935736" cy="301752"/>
           </a:xfrm>
           <a:prstGeom prst="roundRect">
             <a:avLst>
@@ -18850,8 +18856,8 @@
         </p:nvSpPr>
         <p:spPr>
           <a:xfrm>
-            <a:off x="10018776" y="3322015"/>
-            <a:ext cx="816864" cy="146304"/>
+            <a:off x="10018776" y="3328416"/>
+            <a:ext cx="862584" cy="146304"/>
           </a:xfrm>
           <a:prstGeom prst="rect">
             <a:avLst/>
@@ -18891,8 +18897,8 @@
         </p:nvSpPr>
         <p:spPr>
           <a:xfrm>
-            <a:off x="7854696" y="3742639"/>
-            <a:ext cx="3035808" cy="158191"/>
+            <a:off x="7763256" y="3749040"/>
+            <a:ext cx="3172968" cy="356616"/>
           </a:xfrm>
           <a:prstGeom prst="rect">
             <a:avLst/>
@@ -18910,7 +18916,7 @@
               <a:buNone/>
             </a:pPr>
             <a:r>
-              <a:rPr lang="en-US" sz="1120" dirty="0">
+              <a:rPr lang="en-US" sz="1040" dirty="0">
                 <a:solidFill>
                   <a:srgbClr val="17364A"/>
                 </a:solidFill>
@@ -18918,9 +18924,9 @@
                 <a:ea typeface="Aptos" pitchFamily="34" charset="-122"/>
                 <a:cs typeface="Aptos" pitchFamily="34" charset="-120"/>
               </a:rPr>
-              <a:t>The important handoff is not from data to AI; it is from analysis to accountable human review.</a:t>
-            </a:r>
-            <a:endParaRPr lang="en-US" sz="1120" dirty="0"/>
+              <a:t>The important handoff is not from data to AI; it is from analysis to.</a:t>
+            </a:r>
+            <a:endParaRPr lang="en-US" sz="1040" dirty="0"/>
           </a:p>
         </p:txBody>
       </p:sp>
@@ -18932,12 +18938,12 @@
         </p:nvSpPr>
         <p:spPr>
           <a:xfrm>
-            <a:off x="7635240" y="4184294"/>
-            <a:ext cx="3474720" cy="1466698"/>
+            <a:off x="7543800" y="4389120"/>
+            <a:ext cx="3611880" cy="1261872"/>
           </a:xfrm>
           <a:prstGeom prst="roundRect">
             <a:avLst>
-              <a:gd name="adj" fmla="val 7481"/>
+              <a:gd name="adj" fmla="val 8696"/>
             </a:avLst>
           </a:prstGeom>
           <a:solidFill>
@@ -18959,8 +18965,8 @@
         </p:nvSpPr>
         <p:spPr>
           <a:xfrm>
-            <a:off x="7799832" y="4330598"/>
-            <a:ext cx="3145536" cy="256032"/>
+            <a:off x="7708392" y="4517136"/>
+            <a:ext cx="3282696" cy="228600"/>
           </a:xfrm>
           <a:prstGeom prst="rect">
             <a:avLst/>
@@ -18976,7 +18982,7 @@
               <a:buNone/>
             </a:pPr>
             <a:r>
-              <a:rPr lang="en-US" sz="1300" b="1" dirty="0">
+              <a:rPr lang="en-US" sz="1220" b="1" dirty="0">
                 <a:solidFill>
                   <a:srgbClr val="0068B7"/>
                 </a:solidFill>
@@ -18986,7 +18992,7 @@
               </a:rPr>
               <a:t>How to validate</a:t>
             </a:r>
-            <a:endParaRPr lang="en-US" sz="1300" dirty="0"/>
+            <a:endParaRPr lang="en-US" sz="1220" dirty="0"/>
           </a:p>
         </p:txBody>
       </p:sp>
@@ -18998,8 +19004,8 @@
         </p:nvSpPr>
         <p:spPr>
           <a:xfrm>
-            <a:off x="7799832" y="4659782"/>
-            <a:ext cx="3145536" cy="899770"/>
+            <a:off x="7708392" y="4828032"/>
+            <a:ext cx="3282696" cy="749808"/>
           </a:xfrm>
           <a:prstGeom prst="rect">
             <a:avLst/>
@@ -19017,7 +19023,7 @@
               <a:buNone/>
             </a:pPr>
             <a:r>
-              <a:rPr lang="en-US" sz="1320" dirty="0">
+              <a:rPr lang="en-US" sz="1220" dirty="0">
                 <a:solidFill>
                   <a:srgbClr val="17364A"/>
                 </a:solidFill>
@@ -19025,9 +19031,9 @@
                 <a:ea typeface="Aptos" pitchFamily="34" charset="-122"/>
                 <a:cs typeface="Aptos" pitchFamily="34" charset="-120"/>
               </a:rPr>
-              <a:t>Connect the concept to data quality, model performance, validation evidence, monitoring measures, and decisions that remain under human control.</a:t>
-            </a:r>
-            <a:endParaRPr lang="en-US" sz="1320" dirty="0"/>
+              <a:t>Connect the concept to data quality, model performance, validation evidence,.</a:t>
+            </a:r>
+            <a:endParaRPr lang="en-US" sz="1220" dirty="0"/>
           </a:p>
         </p:txBody>
       </p:sp>
@@ -19318,8 +19324,8 @@
         </p:nvSpPr>
         <p:spPr>
           <a:xfrm>
-            <a:off x="868680" y="1508760"/>
-            <a:ext cx="6309360" cy="4160520"/>
+            <a:off x="822960" y="1463040"/>
+            <a:ext cx="6565392" cy="4343400"/>
           </a:xfrm>
           <a:prstGeom prst="rect">
             <a:avLst/>
@@ -19337,7 +19343,7 @@
               <a:buNone/>
             </a:pPr>
             <a:r>
-              <a:rPr lang="en-US" sz="2100" dirty="0">
+              <a:rPr lang="en-US" sz="1920" dirty="0">
                 <a:solidFill>
                   <a:srgbClr val="003A63"/>
                 </a:solidFill>
@@ -19347,14 +19353,14 @@
               </a:rPr>
               <a:t>• Public health data modernization.</a:t>
             </a:r>
-            <a:endParaRPr lang="en-US" sz="2100" dirty="0"/>
-          </a:p>
-          <a:p>
-            <a:pPr indent="0" marL="0">
-              <a:buNone/>
-            </a:pPr>
-            <a:r>
-              <a:rPr lang="en-US" sz="2100" dirty="0">
+            <a:endParaRPr lang="en-US" sz="1920" dirty="0"/>
+          </a:p>
+          <a:p>
+            <a:pPr indent="0" marL="0">
+              <a:buNone/>
+            </a:pPr>
+            <a:r>
+              <a:rPr lang="en-US" sz="1920" dirty="0">
                 <a:solidFill>
                   <a:srgbClr val="003A63"/>
                 </a:solidFill>
@@ -19362,16 +19368,16 @@
                 <a:ea typeface="Aptos" pitchFamily="34" charset="-122"/>
                 <a:cs typeface="Aptos" pitchFamily="34" charset="-120"/>
               </a:rPr>
-              <a:t>• Public health data modernization is the process of improving the systems, standards,.</a:t>
-            </a:r>
-            <a:endParaRPr lang="en-US" sz="2100" dirty="0"/>
-          </a:p>
-          <a:p>
-            <a:pPr indent="0" marL="0">
-              <a:buNone/>
-            </a:pPr>
-            <a:r>
-              <a:rPr lang="en-US" sz="2100" dirty="0">
+              <a:t>• Public health data modernization is the process of improving the systems,.</a:t>
+            </a:r>
+            <a:endParaRPr lang="en-US" sz="1920" dirty="0"/>
+          </a:p>
+          <a:p>
+            <a:pPr indent="0" marL="0">
+              <a:buNone/>
+            </a:pPr>
+            <a:r>
+              <a:rPr lang="en-US" sz="1920" dirty="0">
                 <a:solidFill>
                   <a:srgbClr val="003A63"/>
                 </a:solidFill>
@@ -19379,9 +19385,9 @@
                 <a:ea typeface="Aptos" pitchFamily="34" charset="-122"/>
                 <a:cs typeface="Aptos" pitchFamily="34" charset="-120"/>
               </a:rPr>
-              <a:t>• Modernization includes technical components such as APIs, cloud platforms, data warehouses,.</a:t>
-            </a:r>
-            <a:endParaRPr lang="en-US" sz="2100" dirty="0"/>
+              <a:t>• Modernization includes technical components such as APIs, cloud platforms,.</a:t>
+            </a:r>
+            <a:endParaRPr lang="en-US" sz="1920" dirty="0"/>
           </a:p>
         </p:txBody>
       </p:sp>
@@ -19393,12 +19399,12 @@
         </p:nvSpPr>
         <p:spPr>
           <a:xfrm>
-            <a:off x="7635240" y="1325880"/>
-            <a:ext cx="3474720" cy="1207008"/>
+            <a:off x="7543800" y="1325880"/>
+            <a:ext cx="3611880" cy="1261872"/>
           </a:xfrm>
           <a:prstGeom prst="roundRect">
             <a:avLst>
-              <a:gd name="adj" fmla="val 9091"/>
+              <a:gd name="adj" fmla="val 8696"/>
             </a:avLst>
           </a:prstGeom>
           <a:solidFill>
@@ -19420,8 +19426,8 @@
         </p:nvSpPr>
         <p:spPr>
           <a:xfrm>
-            <a:off x="7799832" y="1472184"/>
-            <a:ext cx="3145536" cy="256032"/>
+            <a:off x="7708392" y="1453896"/>
+            <a:ext cx="3282696" cy="228600"/>
           </a:xfrm>
           <a:prstGeom prst="rect">
             <a:avLst/>
@@ -19437,7 +19443,7 @@
               <a:buNone/>
             </a:pPr>
             <a:r>
-              <a:rPr lang="en-US" sz="1300" b="1" dirty="0">
+              <a:rPr lang="en-US" sz="1220" b="1" dirty="0">
                 <a:solidFill>
                   <a:srgbClr val="0068B7"/>
                 </a:solidFill>
@@ -19447,7 +19453,7 @@
               </a:rPr>
               <a:t>Data decision</a:t>
             </a:r>
-            <a:endParaRPr lang="en-US" sz="1300" dirty="0"/>
+            <a:endParaRPr lang="en-US" sz="1220" dirty="0"/>
           </a:p>
         </p:txBody>
       </p:sp>
@@ -19459,8 +19465,8 @@
         </p:nvSpPr>
         <p:spPr>
           <a:xfrm>
-            <a:off x="7799832" y="1801368"/>
-            <a:ext cx="3145536" cy="640080"/>
+            <a:off x="7708392" y="1764792"/>
+            <a:ext cx="3282696" cy="749808"/>
           </a:xfrm>
           <a:prstGeom prst="rect">
             <a:avLst/>
@@ -19478,7 +19484,7 @@
               <a:buNone/>
             </a:pPr>
             <a:r>
-              <a:rPr lang="en-US" sz="1320" dirty="0">
+              <a:rPr lang="en-US" sz="1220" dirty="0">
                 <a:solidFill>
                   <a:srgbClr val="17364A"/>
                 </a:solidFill>
@@ -19488,7 +19494,7 @@
               </a:rPr>
               <a:t>Public health data modernization.</a:t>
             </a:r>
-            <a:endParaRPr lang="en-US" sz="1320" dirty="0"/>
+            <a:endParaRPr lang="en-US" sz="1220" dirty="0"/>
           </a:p>
         </p:txBody>
       </p:sp>
@@ -19500,12 +19506,12 @@
         </p:nvSpPr>
         <p:spPr>
           <a:xfrm>
-            <a:off x="7635240" y="2670048"/>
-            <a:ext cx="3474720" cy="1377086"/>
+            <a:off x="7543800" y="2724912"/>
+            <a:ext cx="3611880" cy="1527048"/>
           </a:xfrm>
           <a:prstGeom prst="roundRect">
             <a:avLst>
-              <a:gd name="adj" fmla="val 7968"/>
+              <a:gd name="adj" fmla="val 7186"/>
             </a:avLst>
           </a:prstGeom>
           <a:solidFill>
@@ -19527,8 +19533,8 @@
         </p:nvSpPr>
         <p:spPr>
           <a:xfrm>
-            <a:off x="7799832" y="2816352"/>
-            <a:ext cx="3145536" cy="256032"/>
+            <a:off x="7708392" y="2852928"/>
+            <a:ext cx="3282696" cy="228600"/>
           </a:xfrm>
           <a:prstGeom prst="rect">
             <a:avLst/>
@@ -19544,7 +19550,7 @@
               <a:buNone/>
             </a:pPr>
             <a:r>
-              <a:rPr lang="en-US" sz="1300" b="1" dirty="0">
+              <a:rPr lang="en-US" sz="1220" b="1" dirty="0">
                 <a:solidFill>
                   <a:srgbClr val="0068B7"/>
                 </a:solidFill>
@@ -19554,7 +19560,7 @@
               </a:rPr>
               <a:t>Concept checkpoints</a:t>
             </a:r>
-            <a:endParaRPr lang="en-US" sz="1300" dirty="0"/>
+            <a:endParaRPr lang="en-US" sz="1220" dirty="0"/>
           </a:p>
         </p:txBody>
       </p:sp>
@@ -19566,8 +19572,8 @@
         </p:nvSpPr>
         <p:spPr>
           <a:xfrm>
-            <a:off x="7818120" y="3182112"/>
-            <a:ext cx="3090672" cy="718718"/>
+            <a:off x="7726680" y="3182112"/>
+            <a:ext cx="3227832" cy="960120"/>
           </a:xfrm>
           <a:prstGeom prst="rect">
             <a:avLst/>
@@ -19585,7 +19591,7 @@
               <a:buNone/>
             </a:pPr>
             <a:r>
-              <a:rPr lang="en-US" sz="1220" dirty="0">
+              <a:rPr lang="en-US" sz="1140" dirty="0">
                 <a:solidFill>
                   <a:srgbClr val="17364A"/>
                 </a:solidFill>
@@ -19593,16 +19599,16 @@
                 <a:ea typeface="Aptos" pitchFamily="34" charset="-122"/>
                 <a:cs typeface="Aptos" pitchFamily="34" charset="-120"/>
               </a:rPr>
-              <a:t>Public health data modernization is the process of improving the.</a:t>
-            </a:r>
-            <a:endParaRPr lang="en-US" sz="1220" dirty="0"/>
-          </a:p>
-          <a:p>
-            <a:pPr indent="0" marL="0">
-              <a:buNone/>
-            </a:pPr>
-            <a:r>
-              <a:rPr lang="en-US" sz="1220" dirty="0">
+              <a:t>Public health data modernization is the process of.</a:t>
+            </a:r>
+            <a:endParaRPr lang="en-US" sz="1140" dirty="0"/>
+          </a:p>
+          <a:p>
+            <a:pPr indent="0" marL="0">
+              <a:buNone/>
+            </a:pPr>
+            <a:r>
+              <a:rPr lang="en-US" sz="1140" dirty="0">
                 <a:solidFill>
                   <a:srgbClr val="17364A"/>
                 </a:solidFill>
@@ -19610,16 +19616,16 @@
                 <a:ea typeface="Aptos" pitchFamily="34" charset="-122"/>
                 <a:cs typeface="Aptos" pitchFamily="34" charset="-120"/>
               </a:rPr>
-              <a:t>Modernization includes technical components such as APIs, cloud.</a:t>
-            </a:r>
-            <a:endParaRPr lang="en-US" sz="1220" dirty="0"/>
-          </a:p>
-          <a:p>
-            <a:pPr indent="0" marL="0">
-              <a:buNone/>
-            </a:pPr>
-            <a:r>
-              <a:rPr lang="en-US" sz="1220" dirty="0">
+              <a:t>Modernization includes technical components such.</a:t>
+            </a:r>
+            <a:endParaRPr lang="en-US" sz="1140" dirty="0"/>
+          </a:p>
+          <a:p>
+            <a:pPr indent="0" marL="0">
+              <a:buNone/>
+            </a:pPr>
+            <a:r>
+              <a:rPr lang="en-US" sz="1140" dirty="0">
                 <a:solidFill>
                   <a:srgbClr val="17364A"/>
                 </a:solidFill>
@@ -19627,9 +19633,9 @@
                 <a:ea typeface="Aptos" pitchFamily="34" charset="-122"/>
                 <a:cs typeface="Aptos" pitchFamily="34" charset="-120"/>
               </a:rPr>
-              <a:t>It also includes operational components such as data stewardship,.</a:t>
-            </a:r>
-            <a:endParaRPr lang="en-US" sz="1220" dirty="0"/>
+              <a:t>It also includes operational components such as.</a:t>
+            </a:r>
+            <a:endParaRPr lang="en-US" sz="1140" dirty="0"/>
           </a:p>
         </p:txBody>
       </p:sp>
@@ -19641,12 +19647,12 @@
         </p:nvSpPr>
         <p:spPr>
           <a:xfrm>
-            <a:off x="7635240" y="4184294"/>
-            <a:ext cx="3474720" cy="1466698"/>
+            <a:off x="7543800" y="4389120"/>
+            <a:ext cx="3611880" cy="1261872"/>
           </a:xfrm>
           <a:prstGeom prst="roundRect">
             <a:avLst>
-              <a:gd name="adj" fmla="val 7481"/>
+              <a:gd name="adj" fmla="val 8696"/>
             </a:avLst>
           </a:prstGeom>
           <a:solidFill>
@@ -19668,8 +19674,8 @@
         </p:nvSpPr>
         <p:spPr>
           <a:xfrm>
-            <a:off x="7799832" y="4330598"/>
-            <a:ext cx="3145536" cy="256032"/>
+            <a:off x="7708392" y="4517136"/>
+            <a:ext cx="3282696" cy="228600"/>
           </a:xfrm>
           <a:prstGeom prst="rect">
             <a:avLst/>
@@ -19685,7 +19691,7 @@
               <a:buNone/>
             </a:pPr>
             <a:r>
-              <a:rPr lang="en-US" sz="1300" b="1" dirty="0">
+              <a:rPr lang="en-US" sz="1220" b="1" dirty="0">
                 <a:solidFill>
                   <a:srgbClr val="0068B7"/>
                 </a:solidFill>
@@ -19695,7 +19701,7 @@
               </a:rPr>
               <a:t>How to validate</a:t>
             </a:r>
-            <a:endParaRPr lang="en-US" sz="1300" dirty="0"/>
+            <a:endParaRPr lang="en-US" sz="1220" dirty="0"/>
           </a:p>
         </p:txBody>
       </p:sp>
@@ -19707,8 +19713,8 @@
         </p:nvSpPr>
         <p:spPr>
           <a:xfrm>
-            <a:off x="7799832" y="4659782"/>
-            <a:ext cx="3145536" cy="899770"/>
+            <a:off x="7708392" y="4828032"/>
+            <a:ext cx="3282696" cy="749808"/>
           </a:xfrm>
           <a:prstGeom prst="rect">
             <a:avLst/>
@@ -19726,7 +19732,7 @@
               <a:buNone/>
             </a:pPr>
             <a:r>
-              <a:rPr lang="en-US" sz="1320" dirty="0">
+              <a:rPr lang="en-US" sz="1220" dirty="0">
                 <a:solidFill>
                   <a:srgbClr val="17364A"/>
                 </a:solidFill>
@@ -19734,9 +19740,9 @@
                 <a:ea typeface="Aptos" pitchFamily="34" charset="-122"/>
                 <a:cs typeface="Aptos" pitchFamily="34" charset="-120"/>
               </a:rPr>
-              <a:t>Connect the concept to data quality, model performance, validation evidence, monitoring measures, and decisions that remain under human control.</a:t>
-            </a:r>
-            <a:endParaRPr lang="en-US" sz="1320" dirty="0"/>
+              <a:t>Connect the concept to data quality, model performance, validation evidence,.</a:t>
+            </a:r>
+            <a:endParaRPr lang="en-US" sz="1220" dirty="0"/>
           </a:p>
         </p:txBody>
       </p:sp>

--- a/downloads/presentations/modules/arc-200.pptx
+++ b/downloads/presentations/modules/arc-200.pptx
@@ -12867,7 +12867,7 @@
                 <a:ea typeface="Aptos" pitchFamily="34" charset="-122"/>
                 <a:cs typeface="Aptos" pitchFamily="34" charset="-120"/>
               </a:rPr>
-              <a:t>• 1. Why should AI planning begin with architecture and workflow mapping?</a:t>
+              <a:t>1. Why should AI planning begin with architecture and workflow mapping?</a:t>
             </a:r>
             <a:endParaRPr lang="en-US" sz="1920" dirty="0"/>
           </a:p>
@@ -12884,7 +12884,7 @@
                 <a:ea typeface="Aptos" pitchFamily="34" charset="-122"/>
                 <a:cs typeface="Aptos" pitchFamily="34" charset="-120"/>
               </a:rPr>
-              <a:t>• 2. What is the role of a system of record in an AI-supported workflow?</a:t>
+              <a:t>2. What is the role of a system of record in an AI-supported workflow?</a:t>
             </a:r>
             <a:endParaRPr lang="en-US" sz="1920" dirty="0"/>
           </a:p>
@@ -12901,7 +12901,7 @@
                 <a:ea typeface="Aptos" pitchFamily="34" charset="-122"/>
                 <a:cs typeface="Aptos" pitchFamily="34" charset="-120"/>
               </a:rPr>
-              <a:t>• 3. Which risk is most likely when staff cannot explain how data move through.</a:t>
+              <a:t>3. Which risk is most likely when staff cannot explain how data move through.</a:t>
             </a:r>
             <a:endParaRPr lang="en-US" sz="1920" dirty="0"/>
           </a:p>
@@ -13008,7 +13008,7 @@
                 <a:ea typeface="Aptos" pitchFamily="34" charset="-122"/>
                 <a:cs typeface="Aptos" pitchFamily="34" charset="-120"/>
               </a:rPr>
-              <a:t>1. Why should AI planning begin with architecture and workflow mapping?</a:t>
+              <a:t>Why should AI planning begin with architecture and workflow mapping?</a:t>
             </a:r>
             <a:endParaRPr lang="en-US" sz="1220" dirty="0"/>
           </a:p>
@@ -13115,41 +13115,7 @@
                 <a:ea typeface="Aptos" pitchFamily="34" charset="-122"/>
                 <a:cs typeface="Aptos" pitchFamily="34" charset="-120"/>
               </a:rPr>
-              <a:t>1.</a:t>
-            </a:r>
-            <a:endParaRPr lang="en-US" sz="1140" dirty="0"/>
-          </a:p>
-          <a:p>
-            <a:pPr indent="0" marL="0">
-              <a:buNone/>
-            </a:pPr>
-            <a:r>
-              <a:rPr lang="en-US" sz="1140" dirty="0">
-                <a:solidFill>
-                  <a:srgbClr val="17364A"/>
-                </a:solidFill>
-                <a:latin typeface="Aptos" pitchFamily="34" charset="0"/>
-                <a:ea typeface="Aptos" pitchFamily="34" charset="-122"/>
-                <a:cs typeface="Aptos" pitchFamily="34" charset="-120"/>
-              </a:rPr>
               <a:t>Why should AI planning begin with architecture and.</a:t>
-            </a:r>
-            <a:endParaRPr lang="en-US" sz="1140" dirty="0"/>
-          </a:p>
-          <a:p>
-            <a:pPr indent="0" marL="0">
-              <a:buNone/>
-            </a:pPr>
-            <a:r>
-              <a:rPr lang="en-US" sz="1140" dirty="0">
-                <a:solidFill>
-                  <a:srgbClr val="17364A"/>
-                </a:solidFill>
-                <a:latin typeface="Aptos" pitchFamily="34" charset="0"/>
-                <a:ea typeface="Aptos" pitchFamily="34" charset="-122"/>
-                <a:cs typeface="Aptos" pitchFamily="34" charset="-120"/>
-              </a:rPr>
-              <a:t>2.</a:t>
             </a:r>
             <a:endParaRPr lang="en-US" sz="1140" dirty="0"/>
           </a:p>
